--- a/docs/ZVKY-FORGE-Overview.pptx
+++ b/docs/ZVKY-FORGE-Overview.pptx
@@ -3439,7 +3439,7 @@
                 <a:ea typeface="Calibri" pitchFamily="34" charset="-122"/>
                 <a:cs typeface="Calibri" pitchFamily="34" charset="-120"/>
               </a:rPr>
-              <a:t>Internal induction deck  ·  built 2026-09-02</a:t>
+              <a:t>Internal induction deck  ·  built 2026-09-03</a:t>
             </a:r>
             <a:endParaRPr lang="en-US" sz="1100" dirty="0"/>
           </a:p>

--- a/docs/ZVKY-FORGE-Overview.pptx
+++ b/docs/ZVKY-FORGE-Overview.pptx
@@ -3439,7 +3439,7 @@
                 <a:ea typeface="Calibri" pitchFamily="34" charset="-122"/>
                 <a:cs typeface="Calibri" pitchFamily="34" charset="-120"/>
               </a:rPr>
-              <a:t>Internal induction deck  ·  built 2026-09-03</a:t>
+              <a:t>Internal induction deck  ·  built 2026-09-04</a:t>
             </a:r>
             <a:endParaRPr lang="en-US" sz="1100" dirty="0"/>
           </a:p>

--- a/docs/ZVKY-FORGE-Overview.pptx
+++ b/docs/ZVKY-FORGE-Overview.pptx
@@ -32,9 +32,10 @@
     <p:sldId id="280" r:id="rId26"/>
     <p:sldId id="281" r:id="rId27"/>
     <p:sldId id="282" r:id="rId28"/>
+    <p:sldId id="283" r:id="rId29"/>
   </p:sldIdLst>
   <p:notesMasterIdLst>
-    <p:notesMasterId r:id="rId29"/>
+    <p:notesMasterId r:id="rId30"/>
   </p:notesMasterIdLst>
   <p:sldSz cx="12192000" cy="6858000"/>
   <p:notesSz cx="6858000" cy="12192000"/>
@@ -1320,7 +1321,7 @@
           <a:p>
             <a:r>
               <a:rPr lang="en-US" dirty="0"/>
-              <a:t>Flag this one in induction: the permissions here are narrow out of the box, and a studio must grant them before producers and directors can use the feature.</a:t>
+              <a:t/>
             </a:r>
             <a:endParaRPr lang="en-US" dirty="0"/>
           </a:p>
@@ -1408,7 +1409,7 @@
           <a:p>
             <a:r>
               <a:rPr lang="en-US" dirty="0"/>
-              <a:t/>
+              <a:t>Flag this one in induction: the permissions here are narrow out of the box, and a studio must grant them before producers and directors can use the feature.</a:t>
             </a:r>
             <a:endParaRPr lang="en-US" dirty="0"/>
           </a:p>
@@ -1936,7 +1937,7 @@
           <a:p>
             <a:r>
               <a:rPr lang="en-US" dirty="0"/>
-              <a:t>These twelve bands are generated from the permission table, not written by hand. Appendix A of the manual lists every designation in each.</a:t>
+              <a:t/>
             </a:r>
             <a:endParaRPr lang="en-US" dirty="0"/>
           </a:p>
@@ -2024,7 +2025,7 @@
           <a:p>
             <a:r>
               <a:rPr lang="en-US" dirty="0"/>
-              <a:t/>
+              <a:t>These twelve bands are generated from the permission table, not written by hand. Appendix A of the manual lists every designation in each.</a:t>
             </a:r>
             <a:endParaRPr lang="en-US" dirty="0"/>
           </a:p>
@@ -2200,7 +2201,7 @@
           <a:p>
             <a:r>
               <a:rPr lang="en-US" dirty="0"/>
-              <a:t>The standing rule: every feature prompt from here on should say what the documentation needs added.</a:t>
+              <a:t/>
             </a:r>
             <a:endParaRPr lang="en-US" dirty="0"/>
           </a:p>
@@ -2224,6 +2225,94 @@
             <a:fld id="{F7021451-1387-4CA6-816F-3879F97B5CBC}" type="slidenum">
               <a:rPr lang="en-US"/>
               <a:t>27</a:t>
+            </a:fld>
+            <a:endParaRPr lang="en-US"/>
+          </a:p>
+        </p:txBody>
+      </p:sp>
+    </p:spTree>
+    <p:extLst>
+      <p:ext uri="{BB962C8B-B14F-4D97-AF65-F5344CB8AC3E}">
+        <p14:creationId xmlns:p14="http://schemas.microsoft.com/office/powerpoint/2010/main" val="1024086991"/>
+      </p:ext>
+    </p:extLst>
+  </p:cSld>
+  <p:clrMapOvr>
+    <a:masterClrMapping/>
+  </p:clrMapOvr>
+</p:notes>
+</file>
+
+<file path=ppt/notesSlides/notesSlide28.xml><?xml version="1.0" encoding="utf-8"?>
+<p:notes xmlns:a="http://schemas.openxmlformats.org/drawingml/2006/main" xmlns:r="http://schemas.openxmlformats.org/officeDocument/2006/relationships" xmlns:p="http://schemas.openxmlformats.org/presentationml/2006/main">
+  <p:cSld>
+    <p:spTree>
+      <p:nvGrpSpPr>
+        <p:cNvPr id="1" name=""/>
+        <p:cNvGrpSpPr/>
+        <p:nvPr/>
+      </p:nvGrpSpPr>
+      <p:grpSpPr>
+        <a:xfrm>
+          <a:off x="0" y="0"/>
+          <a:ext cx="0" cy="0"/>
+          <a:chOff x="0" y="0"/>
+          <a:chExt cx="0" cy="0"/>
+        </a:xfrm>
+      </p:grpSpPr>
+      <p:sp>
+        <p:nvSpPr>
+          <p:cNvPr id="2" name="Slide Image Placeholder 1"/>
+          <p:cNvSpPr>
+            <a:spLocks noGrp="1" noRot="1" noChangeAspect="1"/>
+          </p:cNvSpPr>
+          <p:nvPr>
+            <p:ph type="sldImg"/>
+          </p:nvPr>
+        </p:nvSpPr>
+        <p:spPr/>
+      </p:sp>
+      <p:sp>
+        <p:nvSpPr>
+          <p:cNvPr id="3" name="Notes Placeholder 2"/>
+          <p:cNvSpPr>
+            <a:spLocks noGrp="1"/>
+          </p:cNvSpPr>
+          <p:nvPr>
+            <p:ph type="body" idx="1"/>
+          </p:nvPr>
+        </p:nvSpPr>
+        <p:spPr/>
+        <p:txBody>
+          <a:bodyPr/>
+          <a:lstStyle/>
+          <a:p>
+            <a:r>
+              <a:rPr lang="en-US" dirty="0"/>
+              <a:t>The standing rule: every feature prompt from here on should say what the documentation needs added.</a:t>
+            </a:r>
+            <a:endParaRPr lang="en-US" dirty="0"/>
+          </a:p>
+        </p:txBody>
+      </p:sp>
+      <p:sp>
+        <p:nvSpPr>
+          <p:cNvPr id="4" name="Slide Number Placeholder 3"/>
+          <p:cNvSpPr>
+            <a:spLocks noGrp="1"/>
+          </p:cNvSpPr>
+          <p:nvPr>
+            <p:ph type="sldNum" sz="quarter" idx="10"/>
+          </p:nvPr>
+        </p:nvSpPr>
+        <p:spPr/>
+        <p:txBody>
+          <a:bodyPr/>
+          <a:lstStyle/>
+          <a:p>
+            <a:fld id="{F7021451-1387-4CA6-816F-3879F97B5CBC}" type="slidenum">
+              <a:rPr lang="en-US"/>
+              <a:t>28</a:t>
             </a:fld>
             <a:endParaRPr lang="en-US"/>
           </a:p>
@@ -6174,7 +6263,7 @@
                 <a:ea typeface="Calibri" pitchFamily="34" charset="-122"/>
                 <a:cs typeface="Calibri" pitchFamily="34" charset="-120"/>
               </a:rPr>
-              <a:t>Time Spent is the gap between that stamp and your submission — not a timer you can pause.</a:t>
+              <a:t>Time Spent is the gap between that stamp and your submission, less any stretch put on hold.</a:t>
             </a:r>
             <a:endParaRPr lang="en-US" sz="1400" dirty="0"/>
           </a:p>
@@ -7045,7 +7134,7 @@
                 <a:ea typeface="Calibri" pitchFamily="34" charset="-122"/>
                 <a:cs typeface="Calibri" pitchFamily="34" charset="-120"/>
               </a:rPr>
-              <a:t>FIRST REVIEW GATE</a:t>
+              <a:t>HOLD</a:t>
             </a:r>
             <a:endParaRPr lang="en-US" sz="1100" dirty="0"/>
           </a:p>
@@ -7084,7 +7173,7 @@
                 <a:ea typeface="Cambria" pitchFamily="34" charset="-122"/>
                 <a:cs typeface="Cambria" pitchFamily="34" charset="-120"/>
               </a:rPr>
-              <a:t>The team lead sees it first</a:t>
+              <a:t>Put a task down without handing it in</a:t>
             </a:r>
             <a:endParaRPr lang="en-US" sz="3400" dirty="0"/>
           </a:p>
@@ -7130,7 +7219,7 @@
                 <a:ea typeface="Calibri" pitchFamily="34" charset="-122"/>
                 <a:cs typeface="Calibri" pitchFamily="34" charset="-120"/>
               </a:rPr>
-              <a:t>Approve to send it on to the Creative Director.</a:t>
+              <a:t>Hold stops the count on a task and frees you to start another one.</a:t>
             </a:r>
             <a:endParaRPr lang="en-US" sz="1400" dirty="0"/>
           </a:p>
@@ -7154,7 +7243,7 @@
                 <a:ea typeface="Calibri" pitchFamily="34" charset="-122"/>
                 <a:cs typeface="Calibri" pitchFamily="34" charset="-120"/>
               </a:rPr>
-              <a:t>Request changes to send it back as TL Feedbacks, with a note.</a:t>
+              <a:t>The held time is left out of that asset’s Time Spent. Say why in a line, or leave it blank.</a:t>
             </a:r>
             <a:endParaRPr lang="en-US" sz="1400" dirty="0"/>
           </a:p>
@@ -7178,7 +7267,7 @@
                 <a:ea typeface="Calibri" pitchFamily="34" charset="-122"/>
                 <a:cs typeface="Calibri" pitchFamily="34" charset="-120"/>
               </a:rPr>
-              <a:t>A studio without a Creative Director gate can send straight to Approved for Client, if the reviewer holds that permission.</a:t>
+              <a:t>It stays in its stage and carries an On hold badge, so a lead can see the work has stopped.</a:t>
             </a:r>
             <a:endParaRPr lang="en-US" sz="1400" dirty="0"/>
           </a:p>
@@ -7202,7 +7291,31 @@
                 <a:ea typeface="Calibri" pitchFamily="34" charset="-122"/>
                 <a:cs typeface="Calibri" pitchFamily="34" charset="-120"/>
               </a:rPr>
-              <a:t>Rework comes back through this same gate.</a:t>
+              <a:t>Resume obeys the same one-task rule as starting, so holding is not a way around it.</a:t>
+            </a:r>
+            <a:endParaRPr lang="en-US" sz="1400" dirty="0"/>
+          </a:p>
+          <a:p>
+            <a:pPr marL="342900" indent="-342900">
+              <a:lnSpc>
+                <a:spcPts val="2000"/>
+              </a:lnSpc>
+              <a:spcAft>
+                <a:spcPts val="1000"/>
+              </a:spcAft>
+              <a:buSzPct val="100000"/>
+              <a:buChar char="•"/>
+            </a:pPr>
+            <a:r>
+              <a:rPr lang="en-US" sz="1400" dirty="0">
+                <a:solidFill>
+                  <a:srgbClr val="F4F1F0"/>
+                </a:solidFill>
+                <a:latin typeface="Calibri" pitchFamily="34" charset="0"/>
+                <a:ea typeface="Calibri" pitchFamily="34" charset="-122"/>
+                <a:cs typeface="Calibri" pitchFamily="34" charset="-120"/>
+              </a:rPr>
+              <a:t>Time Spent now depends on people pressing the button, exactly as the Time Sheet does.</a:t>
             </a:r>
             <a:endParaRPr lang="en-US" sz="1400" dirty="0"/>
           </a:p>
@@ -7282,7 +7395,7 @@
                 <a:ea typeface="Calibri" pitchFamily="34" charset="-122"/>
                 <a:cs typeface="Calibri" pitchFamily="34" charset="-120"/>
               </a:rPr>
-              <a:t>First review gate — 23 designations: leads, supervisors, production and creative direction.</a:t>
+              <a:t>The person the task is assigned to, with Hold / Resume Own Task — on for every designation by default, and switchable off in Settings. Nobody can hold somebody else’s task in this version.</a:t>
             </a:r>
             <a:endParaRPr lang="en-US" sz="1000" dirty="0"/>
           </a:p>
@@ -7352,7 +7465,7 @@
                 <a:ea typeface="Calibri" pitchFamily="34" charset="-122"/>
                 <a:cs typeface="Calibri" pitchFamily="34" charset="-120"/>
               </a:rPr>
-              <a:t>An asset at TL Review.</a:t>
+              <a:t>A task in progress, where the Hold button sits.</a:t>
             </a:r>
             <a:endParaRPr lang="en-US" sz="1000" dirty="0"/>
           </a:p>
@@ -7523,7 +7636,7 @@
                 <a:ea typeface="Calibri" pitchFamily="34" charset="-122"/>
                 <a:cs typeface="Calibri" pitchFamily="34" charset="-120"/>
               </a:rPr>
-              <a:t>SECOND REVIEW GATE</a:t>
+              <a:t>FIRST REVIEW GATE</a:t>
             </a:r>
             <a:endParaRPr lang="en-US" sz="1100" dirty="0"/>
           </a:p>
@@ -7562,7 +7675,7 @@
                 <a:ea typeface="Cambria" pitchFamily="34" charset="-122"/>
                 <a:cs typeface="Cambria" pitchFamily="34" charset="-120"/>
               </a:rPr>
-              <a:t>The Creative Director, and the relay</a:t>
+              <a:t>The team lead sees it first</a:t>
             </a:r>
             <a:endParaRPr lang="en-US" sz="3400" dirty="0"/>
           </a:p>
@@ -7608,7 +7721,7 @@
                 <a:ea typeface="Calibri" pitchFamily="34" charset="-122"/>
                 <a:cs typeface="Calibri" pitchFamily="34" charset="-120"/>
               </a:rPr>
-              <a:t>Approve for client, or Submit Feedback — one action, not two competing decisions.</a:t>
+              <a:t>Approve to send it on to the Creative Director.</a:t>
             </a:r>
             <a:endParaRPr lang="en-US" sz="1400" dirty="0"/>
           </a:p>
@@ -7632,7 +7745,7 @@
                 <a:ea typeface="Calibri" pitchFamily="34" charset="-122"/>
                 <a:cs typeface="Calibri" pitchFamily="34" charset="-120"/>
               </a:rPr>
-              <a:t>Feedback goes to CD Feedbacks, which sits with the team lead first.</a:t>
+              <a:t>Request changes to send it back as TL Feedbacks, with a note.</a:t>
             </a:r>
             <a:endParaRPr lang="en-US" sz="1400" dirty="0"/>
           </a:p>
@@ -7656,7 +7769,7 @@
                 <a:ea typeface="Calibri" pitchFamily="34" charset="-122"/>
                 <a:cs typeface="Calibri" pitchFamily="34" charset="-120"/>
               </a:rPr>
-              <a:t>The lead reads the notes, adds their own reading, and relays them to the artist.</a:t>
+              <a:t>A studio without a Creative Director gate can send straight to Approved for Client, if the reviewer holds that permission.</a:t>
             </a:r>
             <a:endParaRPr lang="en-US" sz="1400" dirty="0"/>
           </a:p>
@@ -7680,7 +7793,7 @@
                 <a:ea typeface="Calibri" pitchFamily="34" charset="-122"/>
                 <a:cs typeface="Calibri" pitchFamily="34" charset="-120"/>
               </a:rPr>
-              <a:t>Until they do, the artist cannot start the rework — and the application says so plainly.</a:t>
+              <a:t>Rework comes back through this same gate.</a:t>
             </a:r>
             <a:endParaRPr lang="en-US" sz="1400" dirty="0"/>
           </a:p>
@@ -7760,7 +7873,7 @@
                 <a:ea typeface="Calibri" pitchFamily="34" charset="-122"/>
                 <a:cs typeface="Calibri" pitchFamily="34" charset="-120"/>
               </a:rPr>
-              <a:t>Creative direction — 9 designations: art direction and above.</a:t>
+              <a:t>First review gate — 23 designations: leads, supervisors, production and creative direction.</a:t>
             </a:r>
             <a:endParaRPr lang="en-US" sz="1000" dirty="0"/>
           </a:p>
@@ -7830,7 +7943,7 @@
                 <a:ea typeface="Calibri" pitchFamily="34" charset="-122"/>
                 <a:cs typeface="Calibri" pitchFamily="34" charset="-120"/>
               </a:rPr>
-              <a:t>An asset at CD Review.</a:t>
+              <a:t>An asset at TL Review.</a:t>
             </a:r>
             <a:endParaRPr lang="en-US" sz="1000" dirty="0"/>
           </a:p>
@@ -8001,7 +8114,7 @@
                 <a:ea typeface="Calibri" pitchFamily="34" charset="-122"/>
                 <a:cs typeface="Calibri" pitchFamily="34" charset="-120"/>
               </a:rPr>
-              <a:t>DELIVERY</a:t>
+              <a:t>SECOND REVIEW GATE</a:t>
             </a:r>
             <a:endParaRPr lang="en-US" sz="1100" dirty="0"/>
           </a:p>
@@ -8040,7 +8153,7 @@
                 <a:ea typeface="Cambria" pitchFamily="34" charset="-122"/>
                 <a:cs typeface="Cambria" pitchFamily="34" charset="-120"/>
               </a:rPr>
-              <a:t>Two ways out of the studio</a:t>
+              <a:t>The Creative Director, and the relay</a:t>
             </a:r>
             <a:endParaRPr lang="en-US" sz="3400" dirty="0"/>
           </a:p>
@@ -8086,7 +8199,7 @@
                 <a:ea typeface="Calibri" pitchFamily="34" charset="-122"/>
                 <a:cs typeface="Calibri" pitchFamily="34" charset="-120"/>
               </a:rPr>
-              <a:t>Deliver — handed over, and the asset is Delivered. One step.</a:t>
+              <a:t>Approve for client, or Submit Feedback — one action, not two competing decisions.</a:t>
             </a:r>
             <a:endParaRPr lang="en-US" sz="1400" dirty="0"/>
           </a:p>
@@ -8110,7 +8223,7 @@
                 <a:ea typeface="Calibri" pitchFamily="34" charset="-122"/>
                 <a:cs typeface="Calibri" pitchFamily="34" charset="-120"/>
               </a:rPr>
-              <a:t>Send to client review — the asset waits at Awaiting Client Feedback.</a:t>
+              <a:t>Feedback goes to CD Feedbacks, which sits with the team lead first.</a:t>
             </a:r>
             <a:endParaRPr lang="en-US" sz="1400" dirty="0"/>
           </a:p>
@@ -8134,7 +8247,7 @@
                 <a:ea typeface="Calibri" pitchFamily="34" charset="-122"/>
                 <a:cs typeface="Calibri" pitchFamily="34" charset="-120"/>
               </a:rPr>
-              <a:t>Client approved sends it to Delivered; client changes send it back to TL Feedbacks and round again.</a:t>
+              <a:t>The lead reads the notes, adds their own reading, and relays them to the artist.</a:t>
             </a:r>
             <a:endParaRPr lang="en-US" sz="1400" dirty="0"/>
           </a:p>
@@ -8158,7 +8271,7 @@
                 <a:ea typeface="Calibri" pitchFamily="34" charset="-122"/>
                 <a:cs typeface="Calibri" pitchFamily="34" charset="-120"/>
               </a:rPr>
-              <a:t>A studio uses whichever route matches how it works with that client.</a:t>
+              <a:t>Until they do, the artist cannot start the rework — and the application says so plainly.</a:t>
             </a:r>
             <a:endParaRPr lang="en-US" sz="1400" dirty="0"/>
           </a:p>
@@ -8238,7 +8351,7 @@
                 <a:ea typeface="Calibri" pitchFamily="34" charset="-122"/>
                 <a:cs typeface="Calibri" pitchFamily="34" charset="-120"/>
               </a:rPr>
-              <a:t>Delivery — 18 designations. The whole client-feedback loop is Super Admin only until granted.</a:t>
+              <a:t>Creative direction — 9 designations: art direction and above.</a:t>
             </a:r>
             <a:endParaRPr lang="en-US" sz="1000" dirty="0"/>
           </a:p>
@@ -8260,8 +8373,8 @@
         </p:blipFill>
         <p:spPr>
           <a:xfrm>
-            <a:off x="5989320" y="2795305"/>
-            <a:ext cx="5632704" cy="1633151"/>
+            <a:off x="7882677" y="1371600"/>
+            <a:ext cx="1845991" cy="4480560"/>
           </a:xfrm>
           <a:prstGeom prst="rect">
             <a:avLst/>
@@ -8283,7 +8396,7 @@
         </p:nvSpPr>
         <p:spPr>
           <a:xfrm>
-            <a:off x="5989320" y="4538183"/>
+            <a:off x="5989320" y="5961888"/>
             <a:ext cx="5632704" cy="457200"/>
           </a:xfrm>
           <a:prstGeom prst="rect">
@@ -8308,7 +8421,7 @@
                 <a:ea typeface="Calibri" pitchFamily="34" charset="-122"/>
                 <a:cs typeface="Calibri" pitchFamily="34" charset="-120"/>
               </a:rPr>
-              <a:t>The later columns on the board.</a:t>
+              <a:t>An asset at CD Review.</a:t>
             </a:r>
             <a:endParaRPr lang="en-US" sz="1000" dirty="0"/>
           </a:p>
@@ -8479,7 +8592,7 @@
                 <a:ea typeface="Calibri" pitchFamily="34" charset="-122"/>
                 <a:cs typeface="Calibri" pitchFamily="34" charset="-120"/>
               </a:rPr>
-              <a:t>PROJECT REVIEWS</a:t>
+              <a:t>DELIVERY</a:t>
             </a:r>
             <a:endParaRPr lang="en-US" sz="1100" dirty="0"/>
           </a:p>
@@ -8518,7 +8631,7 @@
                 <a:ea typeface="Cambria" pitchFamily="34" charset="-122"/>
                 <a:cs typeface="Cambria" pitchFamily="34" charset="-120"/>
               </a:rPr>
-              <a:t>A project, not an asset</a:t>
+              <a:t>Two ways out of the studio</a:t>
             </a:r>
             <a:endParaRPr lang="en-US" sz="3400" dirty="0"/>
           </a:p>
@@ -8564,7 +8677,7 @@
                 <a:ea typeface="Calibri" pitchFamily="34" charset="-122"/>
                 <a:cs typeface="Calibri" pitchFamily="34" charset="-120"/>
               </a:rPr>
-              <a:t>A producer sends a project to the Creative Director with a question.</a:t>
+              <a:t>Deliver — handed over, and the asset is Delivered. One step.</a:t>
             </a:r>
             <a:endParaRPr lang="en-US" sz="1400" dirty="0"/>
           </a:p>
@@ -8588,7 +8701,7 @@
                 <a:ea typeface="Calibri" pitchFamily="34" charset="-122"/>
                 <a:cs typeface="Calibri" pitchFamily="34" charset="-120"/>
               </a:rPr>
-              <a:t>It lands in the reviewer’s Pending Actions, which carries a count and highlights while something waits.</a:t>
+              <a:t>Send to client review — the asset waits at Awaiting Client Feedback.</a:t>
             </a:r>
             <a:endParaRPr lang="en-US" sz="1400" dirty="0"/>
           </a:p>
@@ -8612,7 +8725,7 @@
                 <a:ea typeface="Calibri" pitchFamily="34" charset="-122"/>
                 <a:cs typeface="Calibri" pitchFamily="34" charset="-120"/>
               </a:rPr>
-              <a:t>The reviewer answers with Submit Feedback; the submitter is notified at once.</a:t>
+              <a:t>Client approved sends it to Delivered; client changes send it back to TL Feedbacks and round again.</a:t>
             </a:r>
             <a:endParaRPr lang="en-US" sz="1400" dirty="0"/>
           </a:p>
@@ -8636,31 +8749,7 @@
                 <a:ea typeface="Calibri" pitchFamily="34" charset="-122"/>
                 <a:cs typeface="Calibri" pitchFamily="34" charset="-120"/>
               </a:rPr>
-              <a:t>The submitter reads it and presses Acknowledge and Close.</a:t>
-            </a:r>
-            <a:endParaRPr lang="en-US" sz="1400" dirty="0"/>
-          </a:p>
-          <a:p>
-            <a:pPr marL="342900" indent="-342900">
-              <a:lnSpc>
-                <a:spcPts val="2000"/>
-              </a:lnSpc>
-              <a:spcAft>
-                <a:spcPts val="1000"/>
-              </a:spcAft>
-              <a:buSzPct val="100000"/>
-              <a:buChar char="•"/>
-            </a:pPr>
-            <a:r>
-              <a:rPr lang="en-US" sz="1400" dirty="0">
-                <a:solidFill>
-                  <a:srgbClr val="F4F1F0"/>
-                </a:solidFill>
-                <a:latin typeface="Calibri" pitchFamily="34" charset="0"/>
-                <a:ea typeface="Calibri" pitchFamily="34" charset="-122"/>
-                <a:cs typeface="Calibri" pitchFamily="34" charset="-120"/>
-              </a:rPr>
-              <a:t>Your own submissions never appear in your queue to answer, only in your queue to read.</a:t>
+              <a:t>A studio uses whichever route matches how it works with that client.</a:t>
             </a:r>
             <a:endParaRPr lang="en-US" sz="1400" dirty="0"/>
           </a:p>
@@ -8740,7 +8829,7 @@
                 <a:ea typeface="Calibri" pitchFamily="34" charset="-122"/>
                 <a:cs typeface="Calibri" pitchFamily="34" charset="-120"/>
               </a:rPr>
-              <a:t>Creative Art Director and Super Admin. Sending, and seeing your own submissions, are Super Admin only until granted.</a:t>
+              <a:t>Delivery — 18 designations. The whole client-feedback loop is Super Admin only until granted.</a:t>
             </a:r>
             <a:endParaRPr lang="en-US" sz="1000" dirty="0"/>
           </a:p>
@@ -8762,8 +8851,8 @@
         </p:blipFill>
         <p:spPr>
           <a:xfrm>
-            <a:off x="5989320" y="1811110"/>
-            <a:ext cx="5632704" cy="3601539"/>
+            <a:off x="5989320" y="2795305"/>
+            <a:ext cx="5632704" cy="1633151"/>
           </a:xfrm>
           <a:prstGeom prst="rect">
             <a:avLst/>
@@ -8785,7 +8874,7 @@
         </p:nvSpPr>
         <p:spPr>
           <a:xfrm>
-            <a:off x="5989320" y="5522378"/>
+            <a:off x="5989320" y="4538183"/>
             <a:ext cx="5632704" cy="457200"/>
           </a:xfrm>
           <a:prstGeom prst="rect">
@@ -8810,7 +8899,7 @@
                 <a:ea typeface="Calibri" pitchFamily="34" charset="-122"/>
                 <a:cs typeface="Calibri" pitchFamily="34" charset="-120"/>
               </a:rPr>
-              <a:t>Pending Actions, as the Creative Director.</a:t>
+              <a:t>The later columns on the board.</a:t>
             </a:r>
             <a:endParaRPr lang="en-US" sz="1000" dirty="0"/>
           </a:p>
@@ -8981,7 +9070,7 @@
                 <a:ea typeface="Calibri" pitchFamily="34" charset="-122"/>
                 <a:cs typeface="Calibri" pitchFamily="34" charset="-120"/>
               </a:rPr>
-              <a:t>TIME SHEET</a:t>
+              <a:t>PROJECT REVIEWS</a:t>
             </a:r>
             <a:endParaRPr lang="en-US" sz="1100" dirty="0"/>
           </a:p>
@@ -9020,7 +9109,7 @@
                 <a:ea typeface="Cambria" pitchFamily="34" charset="-122"/>
                 <a:cs typeface="Cambria" pitchFamily="34" charset="-120"/>
               </a:rPr>
-              <a:t>A day at a time, in IST</a:t>
+              <a:t>A project, not an asset</a:t>
             </a:r>
             <a:endParaRPr lang="en-US" sz="3400" dirty="0"/>
           </a:p>
@@ -9066,7 +9155,7 @@
                 <a:ea typeface="Calibri" pitchFamily="34" charset="-122"/>
                 <a:cs typeface="Calibri" pitchFamily="34" charset="-120"/>
               </a:rPr>
-              <a:t>The working window is printed above the week — 09:30 to 19:00 IST, lunch 13:00 to 14:00, 8 hours a day.</a:t>
+              <a:t>A producer sends a project to the Creative Director with a question.</a:t>
             </a:r>
             <a:endParaRPr lang="en-US" sz="1400" dirty="0"/>
           </a:p>
@@ -9090,7 +9179,7 @@
                 <a:ea typeface="Calibri" pitchFamily="34" charset="-122"/>
                 <a:cs typeface="Calibri" pitchFamily="34" charset="-120"/>
               </a:rPr>
-              <a:t>Lines outside the day are refused; the lunch hour is taken out of any line that crosses it.</a:t>
+              <a:t>It lands in the reviewer’s Pending Actions, which carries a count and highlights while something waits.</a:t>
             </a:r>
             <a:endParaRPr lang="en-US" sz="1400" dirty="0"/>
           </a:p>
@@ -9114,7 +9203,7 @@
                 <a:ea typeface="Calibri" pitchFamily="34" charset="-122"/>
                 <a:cs typeface="Calibri" pitchFamily="34" charset="-120"/>
               </a:rPr>
-              <a:t>Submission is daily. A submitted day is with your approver and no longer yours to edit.</a:t>
+              <a:t>The reviewer answers with Submit Feedback; the submitter is notified at once.</a:t>
             </a:r>
             <a:endParaRPr lang="en-US" sz="1400" dirty="0"/>
           </a:p>
@@ -9138,7 +9227,7 @@
                 <a:ea typeface="Calibri" pitchFamily="34" charset="-122"/>
                 <a:cs typeface="Calibri" pitchFamily="34" charset="-120"/>
               </a:rPr>
-              <a:t>Approvers see their team’s days, with the count carried on the tab.</a:t>
+              <a:t>The submitter reads it and presses Acknowledge and Close.</a:t>
             </a:r>
             <a:endParaRPr lang="en-US" sz="1400" dirty="0"/>
           </a:p>
@@ -9162,7 +9251,7 @@
                 <a:ea typeface="Calibri" pitchFamily="34" charset="-122"/>
                 <a:cs typeface="Calibri" pitchFamily="34" charset="-120"/>
               </a:rPr>
-              <a:t>Every rule reads the configured window — change it in Settings and the rules change with it.</a:t>
+              <a:t>Your own submissions never appear in your queue to answer, only in your queue to read.</a:t>
             </a:r>
             <a:endParaRPr lang="en-US" sz="1400" dirty="0"/>
           </a:p>
@@ -9242,7 +9331,7 @@
                 <a:ea typeface="Calibri" pitchFamily="34" charset="-122"/>
                 <a:cs typeface="Calibri" pitchFamily="34" charset="-120"/>
               </a:rPr>
-              <a:t>Everybody fills in their own. Approving sits with leads and producers — 18 designations.</a:t>
+              <a:t>Creative Art Director and Super Admin. Sending, and seeing your own submissions, are Super Admin only until granted.</a:t>
             </a:r>
             <a:endParaRPr lang="en-US" sz="1000" dirty="0"/>
           </a:p>
@@ -9264,8 +9353,8 @@
         </p:blipFill>
         <p:spPr>
           <a:xfrm>
-            <a:off x="5989320" y="2312451"/>
-            <a:ext cx="5632704" cy="2598859"/>
+            <a:off x="5989320" y="1811110"/>
+            <a:ext cx="5632704" cy="3601539"/>
           </a:xfrm>
           <a:prstGeom prst="rect">
             <a:avLst/>
@@ -9287,7 +9376,7 @@
         </p:nvSpPr>
         <p:spPr>
           <a:xfrm>
-            <a:off x="5989320" y="5021037"/>
+            <a:off x="5989320" y="5522378"/>
             <a:ext cx="5632704" cy="457200"/>
           </a:xfrm>
           <a:prstGeom prst="rect">
@@ -9312,7 +9401,7 @@
                 <a:ea typeface="Calibri" pitchFamily="34" charset="-122"/>
                 <a:cs typeface="Calibri" pitchFamily="34" charset="-120"/>
               </a:rPr>
-              <a:t>A week: Submitted, Approved and Draft days.</a:t>
+              <a:t>Pending Actions, as the Creative Director.</a:t>
             </a:r>
             <a:endParaRPr lang="en-US" sz="1000" dirty="0"/>
           </a:p>
@@ -10152,7 +10241,7 @@
                 <a:ea typeface="Calibri" pitchFamily="34" charset="-122"/>
                 <a:cs typeface="Calibri" pitchFamily="34" charset="-120"/>
               </a:rPr>
-              <a:t>REPORTS</a:t>
+              <a:t>TIME SHEET</a:t>
             </a:r>
             <a:endParaRPr lang="en-US" sz="1100" dirty="0"/>
           </a:p>
@@ -10191,7 +10280,7 @@
                 <a:ea typeface="Cambria" pitchFamily="34" charset="-122"/>
                 <a:cs typeface="Cambria" pitchFamily="34" charset="-120"/>
               </a:rPr>
-              <a:t>Estimate against actual, and time with nothing open</a:t>
+              <a:t>A day at a time, in IST</a:t>
             </a:r>
             <a:endParaRPr lang="en-US" sz="3400" dirty="0"/>
           </a:p>
@@ -10237,7 +10326,7 @@
                 <a:ea typeface="Calibri" pitchFamily="34" charset="-122"/>
                 <a:cs typeface="Calibri" pitchFamily="34" charset="-120"/>
               </a:rPr>
-              <a:t>Efficiency compares each asset’s man hours against Time Spent, by user, asset, project or scope of work.</a:t>
+              <a:t>The working window is printed above the week — 09:30 to 19:00 IST, lunch 13:00 to 14:00, 8 hours a day.</a:t>
             </a:r>
             <a:endParaRPr lang="en-US" sz="1400" dirty="0"/>
           </a:p>
@@ -10261,7 +10350,7 @@
                 <a:ea typeface="Calibri" pitchFamily="34" charset="-122"/>
                 <a:cs typeface="Calibri" pitchFamily="34" charset="-120"/>
               </a:rPr>
-              <a:t>Idle is working time during which somebody had nothing started.</a:t>
+              <a:t>Lines outside the day are refused; the lunch hour is taken out of any line that crosses it.</a:t>
             </a:r>
             <a:endParaRPr lang="en-US" sz="1400" dirty="0"/>
           </a:p>
@@ -10285,7 +10374,7 @@
                 <a:ea typeface="Calibri" pitchFamily="34" charset="-122"/>
                 <a:cs typeface="Calibri" pitchFamily="34" charset="-120"/>
               </a:rPr>
-              <a:t>Idle counts against the configured working hours, so evenings and lunch are not counted as idle.</a:t>
+              <a:t>Submission is daily. A submitted day is with your approver and no longer yours to edit.</a:t>
             </a:r>
             <a:endParaRPr lang="en-US" sz="1400" dirty="0"/>
           </a:p>
@@ -10309,7 +10398,7 @@
                 <a:ea typeface="Calibri" pitchFamily="34" charset="-122"/>
                 <a:cs typeface="Calibri" pitchFamily="34" charset="-120"/>
               </a:rPr>
-              <a:t>Idle Now answers the immediate question: who has nothing open right now.</a:t>
+              <a:t>Approvers see their team’s days, with the count carried on the tab.</a:t>
             </a:r>
             <a:endParaRPr lang="en-US" sz="1400" dirty="0"/>
           </a:p>
@@ -10333,7 +10422,7 @@
                 <a:ea typeface="Calibri" pitchFamily="34" charset="-122"/>
                 <a:cs typeface="Calibri" pitchFamily="34" charset="-120"/>
               </a:rPr>
-              <a:t>Every report exports to Excel and PDF, named after the view you were looking at.</a:t>
+              <a:t>Every rule reads the configured window — change it in Settings and the rules change with it.</a:t>
             </a:r>
             <a:endParaRPr lang="en-US" sz="1400" dirty="0"/>
           </a:p>
@@ -10413,7 +10502,7 @@
                 <a:ea typeface="Calibri" pitchFamily="34" charset="-122"/>
                 <a:cs typeface="Calibri" pitchFamily="34" charset="-120"/>
               </a:rPr>
-              <a:t>Studio leadership — 7 designations, plus anyone given View Reports. Team Lead is a common addition.</a:t>
+              <a:t>Everybody fills in their own. Approving sits with leads and producers — 18 designations.</a:t>
             </a:r>
             <a:endParaRPr lang="en-US" sz="1000" dirty="0"/>
           </a:p>
@@ -10435,8 +10524,8 @@
         </p:blipFill>
         <p:spPr>
           <a:xfrm>
-            <a:off x="5989320" y="1918014"/>
-            <a:ext cx="5632704" cy="3387732"/>
+            <a:off x="5989320" y="2312451"/>
+            <a:ext cx="5632704" cy="2598859"/>
           </a:xfrm>
           <a:prstGeom prst="rect">
             <a:avLst/>
@@ -10458,7 +10547,7 @@
         </p:nvSpPr>
         <p:spPr>
           <a:xfrm>
-            <a:off x="5989320" y="5415474"/>
+            <a:off x="5989320" y="5021037"/>
             <a:ext cx="5632704" cy="457200"/>
           </a:xfrm>
           <a:prstGeom prst="rect">
@@ -10483,7 +10572,7 @@
                 <a:ea typeface="Calibri" pitchFamily="34" charset="-122"/>
                 <a:cs typeface="Calibri" pitchFamily="34" charset="-120"/>
               </a:rPr>
-              <a:t>The Idle report.</a:t>
+              <a:t>A week: Submitted, Approved and Draft days.</a:t>
             </a:r>
             <a:endParaRPr lang="en-US" sz="1000" dirty="0"/>
           </a:p>
@@ -10654,7 +10743,7 @@
                 <a:ea typeface="Calibri" pitchFamily="34" charset="-122"/>
                 <a:cs typeface="Calibri" pitchFamily="34" charset="-120"/>
               </a:rPr>
-              <a:t>PEOPLE</a:t>
+              <a:t>REPORTS</a:t>
             </a:r>
             <a:endParaRPr lang="en-US" sz="1100" dirty="0"/>
           </a:p>
@@ -10693,7 +10782,7 @@
                 <a:ea typeface="Cambria" pitchFamily="34" charset="-122"/>
                 <a:cs typeface="Cambria" pitchFamily="34" charset="-120"/>
               </a:rPr>
-              <a:t>The staff list, and your own team</a:t>
+              <a:t>Estimate against actual, and time with nothing open</a:t>
             </a:r>
             <a:endParaRPr lang="en-US" sz="3400" dirty="0"/>
           </a:p>
@@ -10739,7 +10828,7 @@
                 <a:ea typeface="Calibri" pitchFamily="34" charset="-122"/>
                 <a:cs typeface="Calibri" pitchFamily="34" charset="-120"/>
               </a:rPr>
-              <a:t>Add a person with their name, sign-in email, designation, reporting line and project.</a:t>
+              <a:t>Efficiency compares each asset’s man hours against Time Spent, by user, asset, project or scope of work.</a:t>
             </a:r>
             <a:endParaRPr lang="en-US" sz="1400" dirty="0"/>
           </a:p>
@@ -10763,7 +10852,7 @@
                 <a:ea typeface="Calibri" pitchFamily="34" charset="-122"/>
                 <a:cs typeface="Calibri" pitchFamily="34" charset="-120"/>
               </a:rPr>
-              <a:t>What a designation can do comes from the tier behind it — pick the closest match.</a:t>
+              <a:t>It says how many assets had time held back, and Idle counts that same held time as idle — the two reports are meant to disagree there.</a:t>
             </a:r>
             <a:endParaRPr lang="en-US" sz="1400" dirty="0"/>
           </a:p>
@@ -10787,7 +10876,7 @@
                 <a:ea typeface="Calibri" pitchFamily="34" charset="-122"/>
                 <a:cs typeface="Calibri" pitchFamily="34" charset="-120"/>
               </a:rPr>
-              <a:t>Bulk import takes name, email and role as required columns.</a:t>
+              <a:t>Idle is working time during which somebody had nothing started.</a:t>
             </a:r>
             <a:endParaRPr lang="en-US" sz="1400" dirty="0"/>
           </a:p>
@@ -10811,7 +10900,55 @@
                 <a:ea typeface="Calibri" pitchFamily="34" charset="-122"/>
                 <a:cs typeface="Calibri" pitchFamily="34" charset="-120"/>
               </a:rPr>
-              <a:t>My Team shows the people who report to you, what they are carrying and how far along it is.</a:t>
+              <a:t>Idle counts against the configured working hours, so evenings and lunch are not counted as idle.</a:t>
+            </a:r>
+            <a:endParaRPr lang="en-US" sz="1400" dirty="0"/>
+          </a:p>
+          <a:p>
+            <a:pPr marL="342900" indent="-342900">
+              <a:lnSpc>
+                <a:spcPts val="2000"/>
+              </a:lnSpc>
+              <a:spcAft>
+                <a:spcPts val="1000"/>
+              </a:spcAft>
+              <a:buSzPct val="100000"/>
+              <a:buChar char="•"/>
+            </a:pPr>
+            <a:r>
+              <a:rPr lang="en-US" sz="1400" dirty="0">
+                <a:solidFill>
+                  <a:srgbClr val="F4F1F0"/>
+                </a:solidFill>
+                <a:latin typeface="Calibri" pitchFamily="34" charset="0"/>
+                <a:ea typeface="Calibri" pitchFamily="34" charset="-122"/>
+                <a:cs typeface="Calibri" pitchFamily="34" charset="-120"/>
+              </a:rPr>
+              <a:t>Idle Now answers the immediate question: who has nothing open right now.</a:t>
+            </a:r>
+            <a:endParaRPr lang="en-US" sz="1400" dirty="0"/>
+          </a:p>
+          <a:p>
+            <a:pPr marL="342900" indent="-342900">
+              <a:lnSpc>
+                <a:spcPts val="2000"/>
+              </a:lnSpc>
+              <a:spcAft>
+                <a:spcPts val="1000"/>
+              </a:spcAft>
+              <a:buSzPct val="100000"/>
+              <a:buChar char="•"/>
+            </a:pPr>
+            <a:r>
+              <a:rPr lang="en-US" sz="1400" dirty="0">
+                <a:solidFill>
+                  <a:srgbClr val="F4F1F0"/>
+                </a:solidFill>
+                <a:latin typeface="Calibri" pitchFamily="34" charset="0"/>
+                <a:ea typeface="Calibri" pitchFamily="34" charset="-122"/>
+                <a:cs typeface="Calibri" pitchFamily="34" charset="-120"/>
+              </a:rPr>
+              <a:t>Every report exports to Excel and PDF, named after the view you were looking at.</a:t>
             </a:r>
             <a:endParaRPr lang="en-US" sz="1400" dirty="0"/>
           </a:p>
@@ -10891,7 +11028,7 @@
                 <a:ea typeface="Calibri" pitchFamily="34" charset="-122"/>
                 <a:cs typeface="Calibri" pitchFamily="34" charset="-120"/>
               </a:rPr>
-              <a:t>Administration — 8 designations. My Team is open to anyone who supervises people — 14.</a:t>
+              <a:t>Studio leadership — 7 designations, plus anyone given View Reports. Team Lead is a common addition.</a:t>
             </a:r>
             <a:endParaRPr lang="en-US" sz="1000" dirty="0"/>
           </a:p>
@@ -10913,8 +11050,8 @@
         </p:blipFill>
         <p:spPr>
           <a:xfrm>
-            <a:off x="5989320" y="2869086"/>
-            <a:ext cx="5632704" cy="1485589"/>
+            <a:off x="5989320" y="1918014"/>
+            <a:ext cx="5632704" cy="3387732"/>
           </a:xfrm>
           <a:prstGeom prst="rect">
             <a:avLst/>
@@ -10936,7 +11073,7 @@
         </p:nvSpPr>
         <p:spPr>
           <a:xfrm>
-            <a:off x="5989320" y="4464402"/>
+            <a:off x="5989320" y="5415474"/>
             <a:ext cx="5632704" cy="457200"/>
           </a:xfrm>
           <a:prstGeom prst="rect">
@@ -10961,7 +11098,7 @@
                 <a:ea typeface="Calibri" pitchFamily="34" charset="-122"/>
                 <a:cs typeface="Calibri" pitchFamily="34" charset="-120"/>
               </a:rPr>
-              <a:t>My Team, as a Team Lead.</a:t>
+              <a:t>The Idle report.</a:t>
             </a:r>
             <a:endParaRPr lang="en-US" sz="1000" dirty="0"/>
           </a:p>
@@ -11132,7 +11269,7 @@
                 <a:ea typeface="Calibri" pitchFamily="34" charset="-122"/>
                 <a:cs typeface="Calibri" pitchFamily="34" charset="-120"/>
               </a:rPr>
-              <a:t>YOU</a:t>
+              <a:t>PEOPLE</a:t>
             </a:r>
             <a:endParaRPr lang="en-US" sz="1100" dirty="0"/>
           </a:p>
@@ -11171,7 +11308,7 @@
                 <a:ea typeface="Cambria" pitchFamily="34" charset="-122"/>
                 <a:cs typeface="Cambria" pitchFamily="34" charset="-120"/>
               </a:rPr>
-              <a:t>Notifications, your photo, your password</a:t>
+              <a:t>The staff list, and your own team</a:t>
             </a:r>
             <a:endParaRPr lang="en-US" sz="3400" dirty="0"/>
           </a:p>
@@ -11217,7 +11354,7 @@
                 <a:ea typeface="Calibri" pitchFamily="34" charset="-122"/>
                 <a:cs typeface="Calibri" pitchFamily="34" charset="-120"/>
               </a:rPr>
-              <a:t>The bell carries unread notifications: work assigned to you, reviews coming back, feedback landing, time sheets waiting.</a:t>
+              <a:t>Add a person with their name, sign-in email, designation, reporting line and project.</a:t>
             </a:r>
             <a:endParaRPr lang="en-US" sz="1400" dirty="0"/>
           </a:p>
@@ -11241,7 +11378,7 @@
                 <a:ea typeface="Calibri" pitchFamily="34" charset="-122"/>
                 <a:cs typeface="Calibri" pitchFamily="34" charset="-120"/>
               </a:rPr>
-              <a:t>Profile holds your photo, which then appears everywhere you are represented.</a:t>
+              <a:t>What a designation can do comes from the tier behind it — pick the closest match.</a:t>
             </a:r>
             <a:endParaRPr lang="en-US" sz="1400" dirty="0"/>
           </a:p>
@@ -11265,7 +11402,7 @@
                 <a:ea typeface="Calibri" pitchFamily="34" charset="-122"/>
                 <a:cs typeface="Calibri" pitchFamily="34" charset="-120"/>
               </a:rPr>
-              <a:t>Profile also holds your password.</a:t>
+              <a:t>Bulk import takes name, email and role as required columns.</a:t>
             </a:r>
             <a:endParaRPr lang="en-US" sz="1400" dirty="0"/>
           </a:p>
@@ -11289,7 +11426,7 @@
                 <a:ea typeface="Calibri" pitchFamily="34" charset="-122"/>
                 <a:cs typeface="Calibri" pitchFamily="34" charset="-120"/>
               </a:rPr>
-              <a:t>Changing your password signs out every other session — deliberately, since a password is changed because it may be known.</a:t>
+              <a:t>My Team shows the people who report to you, what they are carrying and how far along it is.</a:t>
             </a:r>
             <a:endParaRPr lang="en-US" sz="1400" dirty="0"/>
           </a:p>
@@ -11369,7 +11506,7 @@
                 <a:ea typeface="Calibri" pitchFamily="34" charset="-122"/>
                 <a:cs typeface="Calibri" pitchFamily="34" charset="-120"/>
               </a:rPr>
-              <a:t>Everybody, for themselves.</a:t>
+              <a:t>Administration — 8 designations. My Team is open to anyone who supervises people — 14.</a:t>
             </a:r>
             <a:endParaRPr lang="en-US" sz="1000" dirty="0"/>
           </a:p>
@@ -11391,8 +11528,8 @@
         </p:blipFill>
         <p:spPr>
           <a:xfrm>
-            <a:off x="5989320" y="2023074"/>
-            <a:ext cx="5632704" cy="3177612"/>
+            <a:off x="5989320" y="2869086"/>
+            <a:ext cx="5632704" cy="1485589"/>
           </a:xfrm>
           <a:prstGeom prst="rect">
             <a:avLst/>
@@ -11414,7 +11551,7 @@
         </p:nvSpPr>
         <p:spPr>
           <a:xfrm>
-            <a:off x="5989320" y="5310414"/>
+            <a:off x="5989320" y="4464402"/>
             <a:ext cx="5632704" cy="457200"/>
           </a:xfrm>
           <a:prstGeom prst="rect">
@@ -11439,7 +11576,7 @@
                 <a:ea typeface="Calibri" pitchFamily="34" charset="-122"/>
                 <a:cs typeface="Calibri" pitchFamily="34" charset="-120"/>
               </a:rPr>
-              <a:t>The Profile panel.</a:t>
+              <a:t>My Team, as a Team Lead.</a:t>
             </a:r>
             <a:endParaRPr lang="en-US" sz="1000" dirty="0"/>
           </a:p>
@@ -11610,7 +11747,7 @@
                 <a:ea typeface="Calibri" pitchFamily="34" charset="-122"/>
                 <a:cs typeface="Calibri" pitchFamily="34" charset="-120"/>
               </a:rPr>
-              <a:t>SETTINGS</a:t>
+              <a:t>YOU</a:t>
             </a:r>
             <a:endParaRPr lang="en-US" sz="1100" dirty="0"/>
           </a:p>
@@ -11649,7 +11786,7 @@
                 <a:ea typeface="Cambria" pitchFamily="34" charset="-122"/>
                 <a:cs typeface="Cambria" pitchFamily="34" charset="-120"/>
               </a:rPr>
-              <a:t>Not one screen, but the ones you hold</a:t>
+              <a:t>Notifications, your photo, your password</a:t>
             </a:r>
             <a:endParaRPr lang="en-US" sz="3400" dirty="0"/>
           </a:p>
@@ -11695,7 +11832,7 @@
                 <a:ea typeface="Calibri" pitchFamily="34" charset="-122"/>
                 <a:cs typeface="Calibri" pitchFamily="34" charset="-120"/>
               </a:rPr>
-              <a:t>Working hours and lunch — the window the Time Sheet and the Idle report both read.</a:t>
+              <a:t>The bell carries unread notifications: work assigned to you, reviews coming back, feedback landing, time sheets waiting.</a:t>
             </a:r>
             <a:endParaRPr lang="en-US" sz="1400" dirty="0"/>
           </a:p>
@@ -11719,7 +11856,7 @@
                 <a:ea typeface="Calibri" pitchFamily="34" charset="-122"/>
                 <a:cs typeface="Calibri" pitchFamily="34" charset="-120"/>
               </a:rPr>
-              <a:t>Branding — the studio name and the colour used across the application.</a:t>
+              <a:t>Profile holds your photo, which then appears everywhere you are represented.</a:t>
             </a:r>
             <a:endParaRPr lang="en-US" sz="1400" dirty="0"/>
           </a:p>
@@ -11743,7 +11880,7 @@
                 <a:ea typeface="Calibri" pitchFamily="34" charset="-122"/>
                 <a:cs typeface="Calibri" pitchFamily="34" charset="-120"/>
               </a:rPr>
-              <a:t>Four value lists: Scope of Work, Priorities, Categories and Roles.</a:t>
+              <a:t>Profile also holds your password.</a:t>
             </a:r>
             <a:endParaRPr lang="en-US" sz="1400" dirty="0"/>
           </a:p>
@@ -11767,31 +11904,7 @@
                 <a:ea typeface="Calibri" pitchFamily="34" charset="-122"/>
                 <a:cs typeface="Calibri" pitchFamily="34" charset="-120"/>
               </a:rPr>
-              <a:t>Renaming a value is safe; a value in use cannot be deleted, only deactivated.</a:t>
-            </a:r>
-            <a:endParaRPr lang="en-US" sz="1400" dirty="0"/>
-          </a:p>
-          <a:p>
-            <a:pPr marL="342900" indent="-342900">
-              <a:lnSpc>
-                <a:spcPts val="2000"/>
-              </a:lnSpc>
-              <a:spcAft>
-                <a:spcPts val="1000"/>
-              </a:spcAft>
-              <a:buSzPct val="100000"/>
-              <a:buChar char="•"/>
-            </a:pPr>
-            <a:r>
-              <a:rPr lang="en-US" sz="1400" dirty="0">
-                <a:solidFill>
-                  <a:srgbClr val="F4F1F0"/>
-                </a:solidFill>
-                <a:latin typeface="Calibri" pitchFamily="34" charset="0"/>
-                <a:ea typeface="Calibri" pitchFamily="34" charset="-122"/>
-                <a:cs typeface="Calibri" pitchFamily="34" charset="-120"/>
-              </a:rPr>
-              <a:t>A person given one Settings permission gets this page with exactly that one section on it.</a:t>
+              <a:t>Changing your password signs out every other session — deliberately, since a password is changed because it may be known.</a:t>
             </a:r>
             <a:endParaRPr lang="en-US" sz="1400" dirty="0"/>
           </a:p>
@@ -11871,7 +11984,7 @@
                 <a:ea typeface="Calibri" pitchFamily="34" charset="-122"/>
                 <a:cs typeface="Calibri" pitchFamily="34" charset="-120"/>
               </a:rPr>
-              <a:t>Studio leadership — 7 designations, one permission per section.</a:t>
+              <a:t>Everybody, for themselves.</a:t>
             </a:r>
             <a:endParaRPr lang="en-US" sz="1000" dirty="0"/>
           </a:p>
@@ -11893,8 +12006,8 @@
         </p:blipFill>
         <p:spPr>
           <a:xfrm>
-            <a:off x="5989320" y="2786972"/>
-            <a:ext cx="5632704" cy="1649816"/>
+            <a:off x="5989320" y="2023074"/>
+            <a:ext cx="5632704" cy="3177612"/>
           </a:xfrm>
           <a:prstGeom prst="rect">
             <a:avLst/>
@@ -11916,7 +12029,7 @@
         </p:nvSpPr>
         <p:spPr>
           <a:xfrm>
-            <a:off x="5989320" y="4546516"/>
+            <a:off x="5989320" y="5310414"/>
             <a:ext cx="5632704" cy="457200"/>
           </a:xfrm>
           <a:prstGeom prst="rect">
@@ -11941,7 +12054,7 @@
                 <a:ea typeface="Calibri" pitchFamily="34" charset="-122"/>
                 <a:cs typeface="Calibri" pitchFamily="34" charset="-120"/>
               </a:rPr>
-              <a:t>The working-hours control.</a:t>
+              <a:t>The Profile panel.</a:t>
             </a:r>
             <a:endParaRPr lang="en-US" sz="1000" dirty="0"/>
           </a:p>
@@ -12112,7 +12225,7 @@
                 <a:ea typeface="Calibri" pitchFamily="34" charset="-122"/>
                 <a:cs typeface="Calibri" pitchFamily="34" charset="-120"/>
               </a:rPr>
-              <a:t>PERMISSIONS</a:t>
+              <a:t>SETTINGS</a:t>
             </a:r>
             <a:endParaRPr lang="en-US" sz="1100" dirty="0"/>
           </a:p>
@@ -12151,7 +12264,7 @@
                 <a:ea typeface="Cambria" pitchFamily="34" charset="-122"/>
                 <a:cs typeface="Cambria" pitchFamily="34" charset="-120"/>
               </a:rPr>
-              <a:t>Twelve access bands, not sixty role lists</a:t>
+              <a:t>Not one screen, but the ones you hold</a:t>
             </a:r>
             <a:endParaRPr lang="en-US" sz="3400" dirty="0"/>
           </a:p>
@@ -12165,32 +12278,135 @@
         </p:nvSpPr>
         <p:spPr>
           <a:xfrm>
-            <a:off x="566928" y="1554480"/>
-            <a:ext cx="6035040" cy="457200"/>
-          </a:xfrm>
-          <a:prstGeom prst="rect">
-            <a:avLst/>
-          </a:prstGeom>
-          <a:noFill/>
-          <a:ln/>
-        </p:spPr>
-        <p:txBody>
-          <a:bodyPr wrap="square" lIns="0" tIns="0" rIns="0" bIns="0" rtlCol="0" anchor="ctr"/>
-          <a:lstStyle/>
-          <a:p>
-            <a:pPr indent="0" marL="0">
-              <a:buNone/>
+            <a:off x="566928" y="1828800"/>
+            <a:ext cx="4937760" cy="3200400"/>
+          </a:xfrm>
+          <a:prstGeom prst="rect">
+            <a:avLst/>
+          </a:prstGeom>
+          <a:noFill/>
+          <a:ln/>
+        </p:spPr>
+        <p:txBody>
+          <a:bodyPr wrap="square" rtlCol="0" anchor="ctr"/>
+          <a:lstStyle/>
+          <a:p>
+            <a:pPr marL="342900" indent="-342900">
+              <a:lnSpc>
+                <a:spcPts val="2000"/>
+              </a:lnSpc>
+              <a:spcAft>
+                <a:spcPts val="1000"/>
+              </a:spcAft>
+              <a:buSzPct val="100000"/>
+              <a:buChar char="•"/>
             </a:pPr>
             <a:r>
               <a:rPr lang="en-US" sz="1400" dirty="0">
                 <a:solidFill>
-                  <a:srgbClr val="A9A09E"/>
-                </a:solidFill>
-                <a:latin typeface="Calibri" pitchFamily="34" charset="0"/>
-                <a:ea typeface="Calibri" pitchFamily="34" charset="-122"/>
-                <a:cs typeface="Calibri" pitchFamily="34" charset="-120"/>
-              </a:rPr>
-              <a:t>58 permissions across 60 designations, in only twelve distinct groups of holders.</a:t>
+                  <a:srgbClr val="F4F1F0"/>
+                </a:solidFill>
+                <a:latin typeface="Calibri" pitchFamily="34" charset="0"/>
+                <a:ea typeface="Calibri" pitchFamily="34" charset="-122"/>
+                <a:cs typeface="Calibri" pitchFamily="34" charset="-120"/>
+              </a:rPr>
+              <a:t>Working hours and lunch — the window the Time Sheet and the Idle report both read.</a:t>
+            </a:r>
+            <a:endParaRPr lang="en-US" sz="1400" dirty="0"/>
+          </a:p>
+          <a:p>
+            <a:pPr marL="342900" indent="-342900">
+              <a:lnSpc>
+                <a:spcPts val="2000"/>
+              </a:lnSpc>
+              <a:spcAft>
+                <a:spcPts val="1000"/>
+              </a:spcAft>
+              <a:buSzPct val="100000"/>
+              <a:buChar char="•"/>
+            </a:pPr>
+            <a:r>
+              <a:rPr lang="en-US" sz="1400" dirty="0">
+                <a:solidFill>
+                  <a:srgbClr val="F4F1F0"/>
+                </a:solidFill>
+                <a:latin typeface="Calibri" pitchFamily="34" charset="0"/>
+                <a:ea typeface="Calibri" pitchFamily="34" charset="-122"/>
+                <a:cs typeface="Calibri" pitchFamily="34" charset="-120"/>
+              </a:rPr>
+              <a:t>Branding — the studio name and the colour used across the application.</a:t>
+            </a:r>
+            <a:endParaRPr lang="en-US" sz="1400" dirty="0"/>
+          </a:p>
+          <a:p>
+            <a:pPr marL="342900" indent="-342900">
+              <a:lnSpc>
+                <a:spcPts val="2000"/>
+              </a:lnSpc>
+              <a:spcAft>
+                <a:spcPts val="1000"/>
+              </a:spcAft>
+              <a:buSzPct val="100000"/>
+              <a:buChar char="•"/>
+            </a:pPr>
+            <a:r>
+              <a:rPr lang="en-US" sz="1400" dirty="0">
+                <a:solidFill>
+                  <a:srgbClr val="F4F1F0"/>
+                </a:solidFill>
+                <a:latin typeface="Calibri" pitchFamily="34" charset="0"/>
+                <a:ea typeface="Calibri" pitchFamily="34" charset="-122"/>
+                <a:cs typeface="Calibri" pitchFamily="34" charset="-120"/>
+              </a:rPr>
+              <a:t>Four value lists: Scope of Work, Priorities, Categories and Roles.</a:t>
+            </a:r>
+            <a:endParaRPr lang="en-US" sz="1400" dirty="0"/>
+          </a:p>
+          <a:p>
+            <a:pPr marL="342900" indent="-342900">
+              <a:lnSpc>
+                <a:spcPts val="2000"/>
+              </a:lnSpc>
+              <a:spcAft>
+                <a:spcPts val="1000"/>
+              </a:spcAft>
+              <a:buSzPct val="100000"/>
+              <a:buChar char="•"/>
+            </a:pPr>
+            <a:r>
+              <a:rPr lang="en-US" sz="1400" dirty="0">
+                <a:solidFill>
+                  <a:srgbClr val="F4F1F0"/>
+                </a:solidFill>
+                <a:latin typeface="Calibri" pitchFamily="34" charset="0"/>
+                <a:ea typeface="Calibri" pitchFamily="34" charset="-122"/>
+                <a:cs typeface="Calibri" pitchFamily="34" charset="-120"/>
+              </a:rPr>
+              <a:t>Renaming a value is safe; a value in use cannot be deleted, only deactivated.</a:t>
+            </a:r>
+            <a:endParaRPr lang="en-US" sz="1400" dirty="0"/>
+          </a:p>
+          <a:p>
+            <a:pPr marL="342900" indent="-342900">
+              <a:lnSpc>
+                <a:spcPts val="2000"/>
+              </a:lnSpc>
+              <a:spcAft>
+                <a:spcPts val="1000"/>
+              </a:spcAft>
+              <a:buSzPct val="100000"/>
+              <a:buChar char="•"/>
+            </a:pPr>
+            <a:r>
+              <a:rPr lang="en-US" sz="1400" dirty="0">
+                <a:solidFill>
+                  <a:srgbClr val="F4F1F0"/>
+                </a:solidFill>
+                <a:latin typeface="Calibri" pitchFamily="34" charset="0"/>
+                <a:ea typeface="Calibri" pitchFamily="34" charset="-122"/>
+                <a:cs typeface="Calibri" pitchFamily="34" charset="-120"/>
+              </a:rPr>
+              <a:t>A person given one Settings permission gets this page with exactly that one section on it.</a:t>
             </a:r>
             <a:endParaRPr lang="en-US" sz="1400" dirty="0"/>
           </a:p>
@@ -12204,8 +12420,8 @@
         </p:nvSpPr>
         <p:spPr>
           <a:xfrm>
-            <a:off x="566928" y="2286000"/>
-            <a:ext cx="3493008" cy="777240"/>
+            <a:off x="566928" y="5532120"/>
+            <a:ext cx="4937760" cy="777240"/>
           </a:xfrm>
           <a:prstGeom prst="roundRect">
             <a:avLst>
@@ -12231,24 +12447,38 @@
         </p:nvSpPr>
         <p:spPr>
           <a:xfrm>
-            <a:off x="731520" y="2340864"/>
-            <a:ext cx="2560320" cy="384048"/>
-          </a:xfrm>
-          <a:prstGeom prst="rect">
-            <a:avLst/>
-          </a:prstGeom>
-          <a:noFill/>
-          <a:ln/>
-        </p:spPr>
-        <p:txBody>
-          <a:bodyPr wrap="square" lIns="0" tIns="0" rIns="0" bIns="0" rtlCol="0" anchor="t"/>
+            <a:off x="749808" y="5532120"/>
+            <a:ext cx="4572000" cy="777240"/>
+          </a:xfrm>
+          <a:prstGeom prst="rect">
+            <a:avLst/>
+          </a:prstGeom>
+          <a:noFill/>
+          <a:ln/>
+        </p:spPr>
+        <p:txBody>
+          <a:bodyPr wrap="square" lIns="0" tIns="0" rIns="0" bIns="0" rtlCol="0" anchor="ctr"/>
           <a:lstStyle/>
           <a:p>
             <a:pPr indent="0" marL="0">
               <a:buNone/>
             </a:pPr>
             <a:r>
-              <a:rPr lang="en-US" sz="1200" b="1" dirty="0">
+              <a:rPr lang="en-US" sz="1000" b="1" spc="200" kern="0" dirty="0">
+                <a:solidFill>
+                  <a:srgbClr val="B8323A"/>
+                </a:solidFill>
+                <a:latin typeface="Calibri" pitchFamily="34" charset="0"/>
+                <a:ea typeface="Calibri" pitchFamily="34" charset="-122"/>
+                <a:cs typeface="Calibri" pitchFamily="34" charset="-120"/>
+              </a:rPr>
+              <a:t>WHO  </a:t>
+            </a:r>
+            <a:pPr indent="0" marL="0">
+              <a:buNone/>
+            </a:pPr>
+            <a:r>
+              <a:rPr lang="en-US" sz="1200" dirty="0">
                 <a:solidFill>
                   <a:srgbClr val="F4F1F0"/>
                 </a:solidFill>
@@ -12256,38 +12486,69 @@
                 <a:ea typeface="Calibri" pitchFamily="34" charset="-122"/>
                 <a:cs typeface="Calibri" pitchFamily="34" charset="-120"/>
               </a:rPr>
-              <a:t>Everyone</a:t>
-            </a:r>
-            <a:endParaRPr lang="en-US" sz="1200" dirty="0"/>
-          </a:p>
-        </p:txBody>
-      </p:sp>
-      <p:sp>
-        <p:nvSpPr>
-          <p:cNvPr id="10" name="Text 8"/>
-          <p:cNvSpPr txBox="1"/>
-          <p:nvPr/>
-        </p:nvSpPr>
-        <p:spPr>
-          <a:xfrm>
-            <a:off x="731520" y="2697480"/>
-            <a:ext cx="2743200" cy="292608"/>
-          </a:xfrm>
-          <a:prstGeom prst="rect">
-            <a:avLst/>
-          </a:prstGeom>
-          <a:noFill/>
-          <a:ln/>
-        </p:spPr>
-        <p:txBody>
-          <a:bodyPr wrap="square" lIns="0" tIns="0" rIns="0" bIns="0" rtlCol="0" anchor="ctr"/>
-          <a:lstStyle/>
-          <a:p>
-            <a:pPr indent="0" marL="0">
-              <a:buNone/>
-            </a:pPr>
-            <a:r>
-              <a:rPr lang="en-US" sz="1100" dirty="0">
+              <a:t>Studio leadership — 7 designations, one permission per section.</a:t>
+            </a:r>
+            <a:endParaRPr lang="en-US" sz="1000" dirty="0"/>
+          </a:p>
+        </p:txBody>
+      </p:sp>
+      <p:pic>
+        <p:nvPicPr>
+          <p:cNvPr id="10" name="Image 0" descr="preencoded.png">    </p:cNvPr>
+          <p:cNvPicPr>
+            <a:picLocks noChangeAspect="1"/>
+          </p:cNvPicPr>
+          <p:nvPr/>
+        </p:nvPicPr>
+        <p:blipFill>
+          <a:blip r:embed="rId1"/>
+          <a:stretch>
+            <a:fillRect/>
+          </a:stretch>
+        </p:blipFill>
+        <p:spPr>
+          <a:xfrm>
+            <a:off x="5989320" y="2786972"/>
+            <a:ext cx="5632704" cy="1649816"/>
+          </a:xfrm>
+          <a:prstGeom prst="rect">
+            <a:avLst/>
+          </a:prstGeom>
+          <a:effectLst>
+            <a:outerShdw sx="100000" sy="100000" kx="0" ky="0" algn="bl" rotWithShape="0" blurRad="177800" dist="50800" dir="5400000">
+              <a:srgbClr val="000000">
+                <a:alpha val="55000"/>
+              </a:srgbClr>
+            </a:outerShdw>
+          </a:effectLst>
+        </p:spPr>
+      </p:pic>
+      <p:sp>
+        <p:nvSpPr>
+          <p:cNvPr id="11" name="Text 8"/>
+          <p:cNvSpPr txBox="1"/>
+          <p:nvPr/>
+        </p:nvSpPr>
+        <p:spPr>
+          <a:xfrm>
+            <a:off x="5989320" y="4546516"/>
+            <a:ext cx="5632704" cy="457200"/>
+          </a:xfrm>
+          <a:prstGeom prst="rect">
+            <a:avLst/>
+          </a:prstGeom>
+          <a:noFill/>
+          <a:ln/>
+        </p:spPr>
+        <p:txBody>
+          <a:bodyPr wrap="square" lIns="0" tIns="0" rIns="0" bIns="0" rtlCol="0" anchor="ctr"/>
+          <a:lstStyle/>
+          <a:p>
+            <a:pPr algn="ctr" indent="0" marL="0">
+              <a:buNone/>
+            </a:pPr>
+            <a:r>
+              <a:rPr lang="en-US" sz="1000" i="1" dirty="0">
                 <a:solidFill>
                   <a:srgbClr val="A9A09E"/>
                 </a:solidFill>
@@ -12295,1671 +12556,9 @@
                 <a:ea typeface="Calibri" pitchFamily="34" charset="-122"/>
                 <a:cs typeface="Calibri" pitchFamily="34" charset="-120"/>
               </a:rPr>
-              <a:t>2 permissions</a:t>
-            </a:r>
-            <a:endParaRPr lang="en-US" sz="1100" dirty="0"/>
-          </a:p>
-        </p:txBody>
-      </p:sp>
-      <p:sp>
-        <p:nvSpPr>
-          <p:cNvPr id="11" name="Text 9"/>
-          <p:cNvSpPr txBox="1"/>
-          <p:nvPr/>
-        </p:nvSpPr>
-        <p:spPr>
-          <a:xfrm>
-            <a:off x="3328416" y="2377440"/>
-            <a:ext cx="566928" cy="594360"/>
-          </a:xfrm>
-          <a:prstGeom prst="rect">
-            <a:avLst/>
-          </a:prstGeom>
-          <a:noFill/>
-          <a:ln/>
-        </p:spPr>
-        <p:txBody>
-          <a:bodyPr wrap="square" lIns="0" tIns="0" rIns="0" bIns="0" rtlCol="0" anchor="ctr"/>
-          <a:lstStyle/>
-          <a:p>
-            <a:pPr algn="r" indent="0" marL="0">
-              <a:buNone/>
-            </a:pPr>
-            <a:r>
-              <a:rPr lang="en-US" sz="2000" b="1" dirty="0">
-                <a:solidFill>
-                  <a:srgbClr val="B8323A"/>
-                </a:solidFill>
-                <a:latin typeface="Cambria" pitchFamily="34" charset="0"/>
-                <a:ea typeface="Cambria" pitchFamily="34" charset="-122"/>
-                <a:cs typeface="Cambria" pitchFamily="34" charset="-120"/>
-              </a:rPr>
-              <a:t>60</a:t>
-            </a:r>
-            <a:endParaRPr lang="en-US" sz="2000" dirty="0"/>
-          </a:p>
-        </p:txBody>
-      </p:sp>
-      <p:sp>
-        <p:nvSpPr>
-          <p:cNvPr id="12" name="Shape 10"/>
-          <p:cNvSpPr/>
-          <p:nvPr/>
-        </p:nvSpPr>
-        <p:spPr>
-          <a:xfrm>
-            <a:off x="4279392" y="2286000"/>
-            <a:ext cx="3493008" cy="777240"/>
-          </a:xfrm>
-          <a:prstGeom prst="roundRect">
-            <a:avLst>
-              <a:gd name="adj" fmla="val 7059"/>
-            </a:avLst>
-          </a:prstGeom>
-          <a:solidFill>
-            <a:srgbClr val="1E1A19"/>
-          </a:solidFill>
-          <a:ln w="12700">
-            <a:solidFill>
-              <a:srgbClr val="2C2524"/>
-            </a:solidFill>
-            <a:prstDash val="solid"/>
-          </a:ln>
-        </p:spPr>
-      </p:sp>
-      <p:sp>
-        <p:nvSpPr>
-          <p:cNvPr id="13" name="Text 11"/>
-          <p:cNvSpPr txBox="1"/>
-          <p:nvPr/>
-        </p:nvSpPr>
-        <p:spPr>
-          <a:xfrm>
-            <a:off x="4443984" y="2340864"/>
-            <a:ext cx="2560320" cy="384048"/>
-          </a:xfrm>
-          <a:prstGeom prst="rect">
-            <a:avLst/>
-          </a:prstGeom>
-          <a:noFill/>
-          <a:ln/>
-        </p:spPr>
-        <p:txBody>
-          <a:bodyPr wrap="square" lIns="0" tIns="0" rIns="0" bIns="0" rtlCol="0" anchor="t"/>
-          <a:lstStyle/>
-          <a:p>
-            <a:pPr indent="0" marL="0">
-              <a:buNone/>
-            </a:pPr>
-            <a:r>
-              <a:rPr lang="en-US" sz="1200" b="1" dirty="0">
-                <a:solidFill>
-                  <a:srgbClr val="F4F1F0"/>
-                </a:solidFill>
-                <a:latin typeface="Calibri" pitchFamily="34" charset="0"/>
-                <a:ea typeface="Calibri" pitchFamily="34" charset="-122"/>
-                <a:cs typeface="Calibri" pitchFamily="34" charset="-120"/>
-              </a:rPr>
-              <a:t>Everyone who works on assets</a:t>
-            </a:r>
-            <a:endParaRPr lang="en-US" sz="1200" dirty="0"/>
-          </a:p>
-        </p:txBody>
-      </p:sp>
-      <p:sp>
-        <p:nvSpPr>
-          <p:cNvPr id="14" name="Text 12"/>
-          <p:cNvSpPr txBox="1"/>
-          <p:nvPr/>
-        </p:nvSpPr>
-        <p:spPr>
-          <a:xfrm>
-            <a:off x="4443984" y="2697480"/>
-            <a:ext cx="2743200" cy="292608"/>
-          </a:xfrm>
-          <a:prstGeom prst="rect">
-            <a:avLst/>
-          </a:prstGeom>
-          <a:noFill/>
-          <a:ln/>
-        </p:spPr>
-        <p:txBody>
-          <a:bodyPr wrap="square" lIns="0" tIns="0" rIns="0" bIns="0" rtlCol="0" anchor="ctr"/>
-          <a:lstStyle/>
-          <a:p>
-            <a:pPr indent="0" marL="0">
-              <a:buNone/>
-            </a:pPr>
-            <a:r>
-              <a:rPr lang="en-US" sz="1100" dirty="0">
-                <a:solidFill>
-                  <a:srgbClr val="A9A09E"/>
-                </a:solidFill>
-                <a:latin typeface="Calibri" pitchFamily="34" charset="0"/>
-                <a:ea typeface="Calibri" pitchFamily="34" charset="-122"/>
-                <a:cs typeface="Calibri" pitchFamily="34" charset="-120"/>
-              </a:rPr>
-              <a:t>2 permissions</a:t>
-            </a:r>
-            <a:endParaRPr lang="en-US" sz="1100" dirty="0"/>
-          </a:p>
-        </p:txBody>
-      </p:sp>
-      <p:sp>
-        <p:nvSpPr>
-          <p:cNvPr id="15" name="Text 13"/>
-          <p:cNvSpPr txBox="1"/>
-          <p:nvPr/>
-        </p:nvSpPr>
-        <p:spPr>
-          <a:xfrm>
-            <a:off x="7040880" y="2377440"/>
-            <a:ext cx="566928" cy="594360"/>
-          </a:xfrm>
-          <a:prstGeom prst="rect">
-            <a:avLst/>
-          </a:prstGeom>
-          <a:noFill/>
-          <a:ln/>
-        </p:spPr>
-        <p:txBody>
-          <a:bodyPr wrap="square" lIns="0" tIns="0" rIns="0" bIns="0" rtlCol="0" anchor="ctr"/>
-          <a:lstStyle/>
-          <a:p>
-            <a:pPr algn="r" indent="0" marL="0">
-              <a:buNone/>
-            </a:pPr>
-            <a:r>
-              <a:rPr lang="en-US" sz="2000" b="1" dirty="0">
-                <a:solidFill>
-                  <a:srgbClr val="B8323A"/>
-                </a:solidFill>
-                <a:latin typeface="Cambria" pitchFamily="34" charset="0"/>
-                <a:ea typeface="Cambria" pitchFamily="34" charset="-122"/>
-                <a:cs typeface="Cambria" pitchFamily="34" charset="-120"/>
-              </a:rPr>
-              <a:t>51</a:t>
-            </a:r>
-            <a:endParaRPr lang="en-US" sz="2000" dirty="0"/>
-          </a:p>
-        </p:txBody>
-      </p:sp>
-      <p:sp>
-        <p:nvSpPr>
-          <p:cNvPr id="16" name="Shape 14"/>
-          <p:cNvSpPr/>
-          <p:nvPr/>
-        </p:nvSpPr>
-        <p:spPr>
-          <a:xfrm>
-            <a:off x="7991856" y="2286000"/>
-            <a:ext cx="3493008" cy="777240"/>
-          </a:xfrm>
-          <a:prstGeom prst="roundRect">
-            <a:avLst>
-              <a:gd name="adj" fmla="val 7059"/>
-            </a:avLst>
-          </a:prstGeom>
-          <a:solidFill>
-            <a:srgbClr val="1E1A19"/>
-          </a:solidFill>
-          <a:ln w="12700">
-            <a:solidFill>
-              <a:srgbClr val="2C2524"/>
-            </a:solidFill>
-            <a:prstDash val="solid"/>
-          </a:ln>
-        </p:spPr>
-      </p:sp>
-      <p:sp>
-        <p:nvSpPr>
-          <p:cNvPr id="17" name="Text 15"/>
-          <p:cNvSpPr txBox="1"/>
-          <p:nvPr/>
-        </p:nvSpPr>
-        <p:spPr>
-          <a:xfrm>
-            <a:off x="8156448" y="2340864"/>
-            <a:ext cx="2560320" cy="384048"/>
-          </a:xfrm>
-          <a:prstGeom prst="rect">
-            <a:avLst/>
-          </a:prstGeom>
-          <a:noFill/>
-          <a:ln/>
-        </p:spPr>
-        <p:txBody>
-          <a:bodyPr wrap="square" lIns="0" tIns="0" rIns="0" bIns="0" rtlCol="0" anchor="t"/>
-          <a:lstStyle/>
-          <a:p>
-            <a:pPr indent="0" marL="0">
-              <a:buNone/>
-            </a:pPr>
-            <a:r>
-              <a:rPr lang="en-US" sz="1200" b="1" dirty="0">
-                <a:solidFill>
-                  <a:srgbClr val="F4F1F0"/>
-                </a:solidFill>
-                <a:latin typeface="Calibri" pitchFamily="34" charset="0"/>
-                <a:ea typeface="Calibri" pitchFamily="34" charset="-122"/>
-                <a:cs typeface="Calibri" pitchFamily="34" charset="-120"/>
-              </a:rPr>
-              <a:t>Production planning</a:t>
-            </a:r>
-            <a:endParaRPr lang="en-US" sz="1200" dirty="0"/>
-          </a:p>
-        </p:txBody>
-      </p:sp>
-      <p:sp>
-        <p:nvSpPr>
-          <p:cNvPr id="18" name="Text 16"/>
-          <p:cNvSpPr txBox="1"/>
-          <p:nvPr/>
-        </p:nvSpPr>
-        <p:spPr>
-          <a:xfrm>
-            <a:off x="8156448" y="2697480"/>
-            <a:ext cx="2743200" cy="292608"/>
-          </a:xfrm>
-          <a:prstGeom prst="rect">
-            <a:avLst/>
-          </a:prstGeom>
-          <a:noFill/>
-          <a:ln/>
-        </p:spPr>
-        <p:txBody>
-          <a:bodyPr wrap="square" lIns="0" tIns="0" rIns="0" bIns="0" rtlCol="0" anchor="ctr"/>
-          <a:lstStyle/>
-          <a:p>
-            <a:pPr indent="0" marL="0">
-              <a:buNone/>
-            </a:pPr>
-            <a:r>
-              <a:rPr lang="en-US" sz="1100" dirty="0">
-                <a:solidFill>
-                  <a:srgbClr val="A9A09E"/>
-                </a:solidFill>
-                <a:latin typeface="Calibri" pitchFamily="34" charset="0"/>
-                <a:ea typeface="Calibri" pitchFamily="34" charset="-122"/>
-                <a:cs typeface="Calibri" pitchFamily="34" charset="-120"/>
-              </a:rPr>
-              <a:t>2 permissions</a:t>
-            </a:r>
-            <a:endParaRPr lang="en-US" sz="1100" dirty="0"/>
-          </a:p>
-        </p:txBody>
-      </p:sp>
-      <p:sp>
-        <p:nvSpPr>
-          <p:cNvPr id="19" name="Text 17"/>
-          <p:cNvSpPr txBox="1"/>
-          <p:nvPr/>
-        </p:nvSpPr>
-        <p:spPr>
-          <a:xfrm>
-            <a:off x="10753344" y="2377440"/>
-            <a:ext cx="566928" cy="594360"/>
-          </a:xfrm>
-          <a:prstGeom prst="rect">
-            <a:avLst/>
-          </a:prstGeom>
-          <a:noFill/>
-          <a:ln/>
-        </p:spPr>
-        <p:txBody>
-          <a:bodyPr wrap="square" lIns="0" tIns="0" rIns="0" bIns="0" rtlCol="0" anchor="ctr"/>
-          <a:lstStyle/>
-          <a:p>
-            <a:pPr algn="r" indent="0" marL="0">
-              <a:buNone/>
-            </a:pPr>
-            <a:r>
-              <a:rPr lang="en-US" sz="2000" b="1" dirty="0">
-                <a:solidFill>
-                  <a:srgbClr val="B8323A"/>
-                </a:solidFill>
-                <a:latin typeface="Cambria" pitchFamily="34" charset="0"/>
-                <a:ea typeface="Cambria" pitchFamily="34" charset="-122"/>
-                <a:cs typeface="Cambria" pitchFamily="34" charset="-120"/>
-              </a:rPr>
-              <a:t>23</a:t>
-            </a:r>
-            <a:endParaRPr lang="en-US" sz="2000" dirty="0"/>
-          </a:p>
-        </p:txBody>
-      </p:sp>
-      <p:sp>
-        <p:nvSpPr>
-          <p:cNvPr id="20" name="Shape 18"/>
-          <p:cNvSpPr/>
-          <p:nvPr/>
-        </p:nvSpPr>
-        <p:spPr>
-          <a:xfrm>
-            <a:off x="566928" y="3200400"/>
-            <a:ext cx="3493008" cy="777240"/>
-          </a:xfrm>
-          <a:prstGeom prst="roundRect">
-            <a:avLst>
-              <a:gd name="adj" fmla="val 7059"/>
-            </a:avLst>
-          </a:prstGeom>
-          <a:solidFill>
-            <a:srgbClr val="1E1A19"/>
-          </a:solidFill>
-          <a:ln w="12700">
-            <a:solidFill>
-              <a:srgbClr val="2C2524"/>
-            </a:solidFill>
-            <a:prstDash val="solid"/>
-          </a:ln>
-        </p:spPr>
-      </p:sp>
-      <p:sp>
-        <p:nvSpPr>
-          <p:cNvPr id="21" name="Text 19"/>
-          <p:cNvSpPr txBox="1"/>
-          <p:nvPr/>
-        </p:nvSpPr>
-        <p:spPr>
-          <a:xfrm>
-            <a:off x="731520" y="3255264"/>
-            <a:ext cx="2560320" cy="384048"/>
-          </a:xfrm>
-          <a:prstGeom prst="rect">
-            <a:avLst/>
-          </a:prstGeom>
-          <a:noFill/>
-          <a:ln/>
-        </p:spPr>
-        <p:txBody>
-          <a:bodyPr wrap="square" lIns="0" tIns="0" rIns="0" bIns="0" rtlCol="0" anchor="t"/>
-          <a:lstStyle/>
-          <a:p>
-            <a:pPr indent="0" marL="0">
-              <a:buNone/>
-            </a:pPr>
-            <a:r>
-              <a:rPr lang="en-US" sz="1200" b="1" dirty="0">
-                <a:solidFill>
-                  <a:srgbClr val="F4F1F0"/>
-                </a:solidFill>
-                <a:latin typeface="Calibri" pitchFamily="34" charset="0"/>
-                <a:ea typeface="Calibri" pitchFamily="34" charset="-122"/>
-                <a:cs typeface="Calibri" pitchFamily="34" charset="-120"/>
-              </a:rPr>
-              <a:t>First review gate</a:t>
-            </a:r>
-            <a:endParaRPr lang="en-US" sz="1200" dirty="0"/>
-          </a:p>
-        </p:txBody>
-      </p:sp>
-      <p:sp>
-        <p:nvSpPr>
-          <p:cNvPr id="22" name="Text 20"/>
-          <p:cNvSpPr txBox="1"/>
-          <p:nvPr/>
-        </p:nvSpPr>
-        <p:spPr>
-          <a:xfrm>
-            <a:off x="731520" y="3611880"/>
-            <a:ext cx="2743200" cy="292608"/>
-          </a:xfrm>
-          <a:prstGeom prst="rect">
-            <a:avLst/>
-          </a:prstGeom>
-          <a:noFill/>
-          <a:ln/>
-        </p:spPr>
-        <p:txBody>
-          <a:bodyPr wrap="square" lIns="0" tIns="0" rIns="0" bIns="0" rtlCol="0" anchor="ctr"/>
-          <a:lstStyle/>
-          <a:p>
-            <a:pPr indent="0" marL="0">
-              <a:buNone/>
-            </a:pPr>
-            <a:r>
-              <a:rPr lang="en-US" sz="1100" dirty="0">
-                <a:solidFill>
-                  <a:srgbClr val="A9A09E"/>
-                </a:solidFill>
-                <a:latin typeface="Calibri" pitchFamily="34" charset="0"/>
-                <a:ea typeface="Calibri" pitchFamily="34" charset="-122"/>
-                <a:cs typeface="Calibri" pitchFamily="34" charset="-120"/>
-              </a:rPr>
-              <a:t>1 permission</a:t>
-            </a:r>
-            <a:endParaRPr lang="en-US" sz="1100" dirty="0"/>
-          </a:p>
-        </p:txBody>
-      </p:sp>
-      <p:sp>
-        <p:nvSpPr>
-          <p:cNvPr id="23" name="Text 21"/>
-          <p:cNvSpPr txBox="1"/>
-          <p:nvPr/>
-        </p:nvSpPr>
-        <p:spPr>
-          <a:xfrm>
-            <a:off x="3328416" y="3291840"/>
-            <a:ext cx="566928" cy="594360"/>
-          </a:xfrm>
-          <a:prstGeom prst="rect">
-            <a:avLst/>
-          </a:prstGeom>
-          <a:noFill/>
-          <a:ln/>
-        </p:spPr>
-        <p:txBody>
-          <a:bodyPr wrap="square" lIns="0" tIns="0" rIns="0" bIns="0" rtlCol="0" anchor="ctr"/>
-          <a:lstStyle/>
-          <a:p>
-            <a:pPr algn="r" indent="0" marL="0">
-              <a:buNone/>
-            </a:pPr>
-            <a:r>
-              <a:rPr lang="en-US" sz="2000" b="1" dirty="0">
-                <a:solidFill>
-                  <a:srgbClr val="B8323A"/>
-                </a:solidFill>
-                <a:latin typeface="Cambria" pitchFamily="34" charset="0"/>
-                <a:ea typeface="Cambria" pitchFamily="34" charset="-122"/>
-                <a:cs typeface="Cambria" pitchFamily="34" charset="-120"/>
-              </a:rPr>
-              <a:t>23</a:t>
-            </a:r>
-            <a:endParaRPr lang="en-US" sz="2000" dirty="0"/>
-          </a:p>
-        </p:txBody>
-      </p:sp>
-      <p:sp>
-        <p:nvSpPr>
-          <p:cNvPr id="24" name="Shape 22"/>
-          <p:cNvSpPr/>
-          <p:nvPr/>
-        </p:nvSpPr>
-        <p:spPr>
-          <a:xfrm>
-            <a:off x="4279392" y="3200400"/>
-            <a:ext cx="3493008" cy="777240"/>
-          </a:xfrm>
-          <a:prstGeom prst="roundRect">
-            <a:avLst>
-              <a:gd name="adj" fmla="val 7059"/>
-            </a:avLst>
-          </a:prstGeom>
-          <a:solidFill>
-            <a:srgbClr val="1E1A19"/>
-          </a:solidFill>
-          <a:ln w="12700">
-            <a:solidFill>
-              <a:srgbClr val="2C2524"/>
-            </a:solidFill>
-            <a:prstDash val="solid"/>
-          </a:ln>
-        </p:spPr>
-      </p:sp>
-      <p:sp>
-        <p:nvSpPr>
-          <p:cNvPr id="25" name="Text 23"/>
-          <p:cNvSpPr txBox="1"/>
-          <p:nvPr/>
-        </p:nvSpPr>
-        <p:spPr>
-          <a:xfrm>
-            <a:off x="4443984" y="3255264"/>
-            <a:ext cx="2560320" cy="384048"/>
-          </a:xfrm>
-          <a:prstGeom prst="rect">
-            <a:avLst/>
-          </a:prstGeom>
-          <a:noFill/>
-          <a:ln/>
-        </p:spPr>
-        <p:txBody>
-          <a:bodyPr wrap="square" lIns="0" tIns="0" rIns="0" bIns="0" rtlCol="0" anchor="t"/>
-          <a:lstStyle/>
-          <a:p>
-            <a:pPr indent="0" marL="0">
-              <a:buNone/>
-            </a:pPr>
-            <a:r>
-              <a:rPr lang="en-US" sz="1200" b="1" dirty="0">
-                <a:solidFill>
-                  <a:srgbClr val="F4F1F0"/>
-                </a:solidFill>
-                <a:latin typeface="Calibri" pitchFamily="34" charset="0"/>
-                <a:ea typeface="Calibri" pitchFamily="34" charset="-122"/>
-                <a:cs typeface="Calibri" pitchFamily="34" charset="-120"/>
-              </a:rPr>
-              <a:t>Leads and producers</a:t>
-            </a:r>
-            <a:endParaRPr lang="en-US" sz="1200" dirty="0"/>
-          </a:p>
-        </p:txBody>
-      </p:sp>
-      <p:sp>
-        <p:nvSpPr>
-          <p:cNvPr id="26" name="Text 24"/>
-          <p:cNvSpPr txBox="1"/>
-          <p:nvPr/>
-        </p:nvSpPr>
-        <p:spPr>
-          <a:xfrm>
-            <a:off x="4443984" y="3611880"/>
-            <a:ext cx="2743200" cy="292608"/>
-          </a:xfrm>
-          <a:prstGeom prst="rect">
-            <a:avLst/>
-          </a:prstGeom>
-          <a:noFill/>
-          <a:ln/>
-        </p:spPr>
-        <p:txBody>
-          <a:bodyPr wrap="square" lIns="0" tIns="0" rIns="0" bIns="0" rtlCol="0" anchor="ctr"/>
-          <a:lstStyle/>
-          <a:p>
-            <a:pPr indent="0" marL="0">
-              <a:buNone/>
-            </a:pPr>
-            <a:r>
-              <a:rPr lang="en-US" sz="1100" dirty="0">
-                <a:solidFill>
-                  <a:srgbClr val="A9A09E"/>
-                </a:solidFill>
-                <a:latin typeface="Calibri" pitchFamily="34" charset="0"/>
-                <a:ea typeface="Calibri" pitchFamily="34" charset="-122"/>
-                <a:cs typeface="Calibri" pitchFamily="34" charset="-120"/>
-              </a:rPr>
-              <a:t>3 permissions</a:t>
-            </a:r>
-            <a:endParaRPr lang="en-US" sz="1100" dirty="0"/>
-          </a:p>
-        </p:txBody>
-      </p:sp>
-      <p:sp>
-        <p:nvSpPr>
-          <p:cNvPr id="27" name="Text 25"/>
-          <p:cNvSpPr txBox="1"/>
-          <p:nvPr/>
-        </p:nvSpPr>
-        <p:spPr>
-          <a:xfrm>
-            <a:off x="7040880" y="3291840"/>
-            <a:ext cx="566928" cy="594360"/>
-          </a:xfrm>
-          <a:prstGeom prst="rect">
-            <a:avLst/>
-          </a:prstGeom>
-          <a:noFill/>
-          <a:ln/>
-        </p:spPr>
-        <p:txBody>
-          <a:bodyPr wrap="square" lIns="0" tIns="0" rIns="0" bIns="0" rtlCol="0" anchor="ctr"/>
-          <a:lstStyle/>
-          <a:p>
-            <a:pPr algn="r" indent="0" marL="0">
-              <a:buNone/>
-            </a:pPr>
-            <a:r>
-              <a:rPr lang="en-US" sz="2000" b="1" dirty="0">
-                <a:solidFill>
-                  <a:srgbClr val="B8323A"/>
-                </a:solidFill>
-                <a:latin typeface="Cambria" pitchFamily="34" charset="0"/>
-                <a:ea typeface="Cambria" pitchFamily="34" charset="-122"/>
-                <a:cs typeface="Cambria" pitchFamily="34" charset="-120"/>
-              </a:rPr>
-              <a:t>18</a:t>
-            </a:r>
-            <a:endParaRPr lang="en-US" sz="2000" dirty="0"/>
-          </a:p>
-        </p:txBody>
-      </p:sp>
-      <p:sp>
-        <p:nvSpPr>
-          <p:cNvPr id="28" name="Shape 26"/>
-          <p:cNvSpPr/>
-          <p:nvPr/>
-        </p:nvSpPr>
-        <p:spPr>
-          <a:xfrm>
-            <a:off x="7991856" y="3200400"/>
-            <a:ext cx="3493008" cy="777240"/>
-          </a:xfrm>
-          <a:prstGeom prst="roundRect">
-            <a:avLst>
-              <a:gd name="adj" fmla="val 7059"/>
-            </a:avLst>
-          </a:prstGeom>
-          <a:solidFill>
-            <a:srgbClr val="1E1A19"/>
-          </a:solidFill>
-          <a:ln w="12700">
-            <a:solidFill>
-              <a:srgbClr val="2C2524"/>
-            </a:solidFill>
-            <a:prstDash val="solid"/>
-          </a:ln>
-        </p:spPr>
-      </p:sp>
-      <p:sp>
-        <p:nvSpPr>
-          <p:cNvPr id="29" name="Text 27"/>
-          <p:cNvSpPr txBox="1"/>
-          <p:nvPr/>
-        </p:nvSpPr>
-        <p:spPr>
-          <a:xfrm>
-            <a:off x="8156448" y="3255264"/>
-            <a:ext cx="2560320" cy="384048"/>
-          </a:xfrm>
-          <a:prstGeom prst="rect">
-            <a:avLst/>
-          </a:prstGeom>
-          <a:noFill/>
-          <a:ln/>
-        </p:spPr>
-        <p:txBody>
-          <a:bodyPr wrap="square" lIns="0" tIns="0" rIns="0" bIns="0" rtlCol="0" anchor="t"/>
-          <a:lstStyle/>
-          <a:p>
-            <a:pPr indent="0" marL="0">
-              <a:buNone/>
-            </a:pPr>
-            <a:r>
-              <a:rPr lang="en-US" sz="1200" b="1" dirty="0">
-                <a:solidFill>
-                  <a:srgbClr val="F4F1F0"/>
-                </a:solidFill>
-                <a:latin typeface="Calibri" pitchFamily="34" charset="0"/>
-                <a:ea typeface="Calibri" pitchFamily="34" charset="-122"/>
-                <a:cs typeface="Calibri" pitchFamily="34" charset="-120"/>
-              </a:rPr>
-              <a:t>Anyone who supervises people</a:t>
-            </a:r>
-            <a:endParaRPr lang="en-US" sz="1200" dirty="0"/>
-          </a:p>
-        </p:txBody>
-      </p:sp>
-      <p:sp>
-        <p:nvSpPr>
-          <p:cNvPr id="30" name="Text 28"/>
-          <p:cNvSpPr txBox="1"/>
-          <p:nvPr/>
-        </p:nvSpPr>
-        <p:spPr>
-          <a:xfrm>
-            <a:off x="8156448" y="3611880"/>
-            <a:ext cx="2743200" cy="292608"/>
-          </a:xfrm>
-          <a:prstGeom prst="rect">
-            <a:avLst/>
-          </a:prstGeom>
-          <a:noFill/>
-          <a:ln/>
-        </p:spPr>
-        <p:txBody>
-          <a:bodyPr wrap="square" lIns="0" tIns="0" rIns="0" bIns="0" rtlCol="0" anchor="ctr"/>
-          <a:lstStyle/>
-          <a:p>
-            <a:pPr indent="0" marL="0">
-              <a:buNone/>
-            </a:pPr>
-            <a:r>
-              <a:rPr lang="en-US" sz="1100" dirty="0">
-                <a:solidFill>
-                  <a:srgbClr val="A9A09E"/>
-                </a:solidFill>
-                <a:latin typeface="Calibri" pitchFamily="34" charset="0"/>
-                <a:ea typeface="Calibri" pitchFamily="34" charset="-122"/>
-                <a:cs typeface="Calibri" pitchFamily="34" charset="-120"/>
-              </a:rPr>
-              <a:t>1 permission</a:t>
-            </a:r>
-            <a:endParaRPr lang="en-US" sz="1100" dirty="0"/>
-          </a:p>
-        </p:txBody>
-      </p:sp>
-      <p:sp>
-        <p:nvSpPr>
-          <p:cNvPr id="31" name="Text 29"/>
-          <p:cNvSpPr txBox="1"/>
-          <p:nvPr/>
-        </p:nvSpPr>
-        <p:spPr>
-          <a:xfrm>
-            <a:off x="10753344" y="3291840"/>
-            <a:ext cx="566928" cy="594360"/>
-          </a:xfrm>
-          <a:prstGeom prst="rect">
-            <a:avLst/>
-          </a:prstGeom>
-          <a:noFill/>
-          <a:ln/>
-        </p:spPr>
-        <p:txBody>
-          <a:bodyPr wrap="square" lIns="0" tIns="0" rIns="0" bIns="0" rtlCol="0" anchor="ctr"/>
-          <a:lstStyle/>
-          <a:p>
-            <a:pPr algn="r" indent="0" marL="0">
-              <a:buNone/>
-            </a:pPr>
-            <a:r>
-              <a:rPr lang="en-US" sz="2000" b="1" dirty="0">
-                <a:solidFill>
-                  <a:srgbClr val="B8323A"/>
-                </a:solidFill>
-                <a:latin typeface="Cambria" pitchFamily="34" charset="0"/>
-                <a:ea typeface="Cambria" pitchFamily="34" charset="-122"/>
-                <a:cs typeface="Cambria" pitchFamily="34" charset="-120"/>
-              </a:rPr>
-              <a:t>14</a:t>
-            </a:r>
-            <a:endParaRPr lang="en-US" sz="2000" dirty="0"/>
-          </a:p>
-        </p:txBody>
-      </p:sp>
-      <p:sp>
-        <p:nvSpPr>
-          <p:cNvPr id="32" name="Shape 30"/>
-          <p:cNvSpPr/>
-          <p:nvPr/>
-        </p:nvSpPr>
-        <p:spPr>
-          <a:xfrm>
-            <a:off x="566928" y="4114800"/>
-            <a:ext cx="3493008" cy="777240"/>
-          </a:xfrm>
-          <a:prstGeom prst="roundRect">
-            <a:avLst>
-              <a:gd name="adj" fmla="val 7059"/>
-            </a:avLst>
-          </a:prstGeom>
-          <a:solidFill>
-            <a:srgbClr val="1E1A19"/>
-          </a:solidFill>
-          <a:ln w="12700">
-            <a:solidFill>
-              <a:srgbClr val="2C2524"/>
-            </a:solidFill>
-            <a:prstDash val="solid"/>
-          </a:ln>
-        </p:spPr>
-      </p:sp>
-      <p:sp>
-        <p:nvSpPr>
-          <p:cNvPr id="33" name="Text 31"/>
-          <p:cNvSpPr txBox="1"/>
-          <p:nvPr/>
-        </p:nvSpPr>
-        <p:spPr>
-          <a:xfrm>
-            <a:off x="731520" y="4169664"/>
-            <a:ext cx="2560320" cy="384048"/>
-          </a:xfrm>
-          <a:prstGeom prst="rect">
-            <a:avLst/>
-          </a:prstGeom>
-          <a:noFill/>
-          <a:ln/>
-        </p:spPr>
-        <p:txBody>
-          <a:bodyPr wrap="square" lIns="0" tIns="0" rIns="0" bIns="0" rtlCol="0" anchor="t"/>
-          <a:lstStyle/>
-          <a:p>
-            <a:pPr indent="0" marL="0">
-              <a:buNone/>
-            </a:pPr>
-            <a:r>
-              <a:rPr lang="en-US" sz="1200" b="1" dirty="0">
-                <a:solidFill>
-                  <a:srgbClr val="F4F1F0"/>
-                </a:solidFill>
-                <a:latin typeface="Calibri" pitchFamily="34" charset="0"/>
-                <a:ea typeface="Calibri" pitchFamily="34" charset="-122"/>
-                <a:cs typeface="Calibri" pitchFamily="34" charset="-120"/>
-              </a:rPr>
-              <a:t>Delivery</a:t>
-            </a:r>
-            <a:endParaRPr lang="en-US" sz="1200" dirty="0"/>
-          </a:p>
-        </p:txBody>
-      </p:sp>
-      <p:sp>
-        <p:nvSpPr>
-          <p:cNvPr id="34" name="Text 32"/>
-          <p:cNvSpPr txBox="1"/>
-          <p:nvPr/>
-        </p:nvSpPr>
-        <p:spPr>
-          <a:xfrm>
-            <a:off x="731520" y="4526280"/>
-            <a:ext cx="2743200" cy="292608"/>
-          </a:xfrm>
-          <a:prstGeom prst="rect">
-            <a:avLst/>
-          </a:prstGeom>
-          <a:noFill/>
-          <a:ln/>
-        </p:spPr>
-        <p:txBody>
-          <a:bodyPr wrap="square" lIns="0" tIns="0" rIns="0" bIns="0" rtlCol="0" anchor="ctr"/>
-          <a:lstStyle/>
-          <a:p>
-            <a:pPr indent="0" marL="0">
-              <a:buNone/>
-            </a:pPr>
-            <a:r>
-              <a:rPr lang="en-US" sz="1100" dirty="0">
-                <a:solidFill>
-                  <a:srgbClr val="A9A09E"/>
-                </a:solidFill>
-                <a:latin typeface="Calibri" pitchFamily="34" charset="0"/>
-                <a:ea typeface="Calibri" pitchFamily="34" charset="-122"/>
-                <a:cs typeface="Calibri" pitchFamily="34" charset="-120"/>
-              </a:rPr>
-              <a:t>1 permission</a:t>
-            </a:r>
-            <a:endParaRPr lang="en-US" sz="1100" dirty="0"/>
-          </a:p>
-        </p:txBody>
-      </p:sp>
-      <p:sp>
-        <p:nvSpPr>
-          <p:cNvPr id="35" name="Text 33"/>
-          <p:cNvSpPr txBox="1"/>
-          <p:nvPr/>
-        </p:nvSpPr>
-        <p:spPr>
-          <a:xfrm>
-            <a:off x="3328416" y="4206240"/>
-            <a:ext cx="566928" cy="594360"/>
-          </a:xfrm>
-          <a:prstGeom prst="rect">
-            <a:avLst/>
-          </a:prstGeom>
-          <a:noFill/>
-          <a:ln/>
-        </p:spPr>
-        <p:txBody>
-          <a:bodyPr wrap="square" lIns="0" tIns="0" rIns="0" bIns="0" rtlCol="0" anchor="ctr"/>
-          <a:lstStyle/>
-          <a:p>
-            <a:pPr algn="r" indent="0" marL="0">
-              <a:buNone/>
-            </a:pPr>
-            <a:r>
-              <a:rPr lang="en-US" sz="2000" b="1" dirty="0">
-                <a:solidFill>
-                  <a:srgbClr val="B8323A"/>
-                </a:solidFill>
-                <a:latin typeface="Cambria" pitchFamily="34" charset="0"/>
-                <a:ea typeface="Cambria" pitchFamily="34" charset="-122"/>
-                <a:cs typeface="Cambria" pitchFamily="34" charset="-120"/>
-              </a:rPr>
-              <a:t>18</a:t>
-            </a:r>
-            <a:endParaRPr lang="en-US" sz="2000" dirty="0"/>
-          </a:p>
-        </p:txBody>
-      </p:sp>
-      <p:sp>
-        <p:nvSpPr>
-          <p:cNvPr id="36" name="Shape 34"/>
-          <p:cNvSpPr/>
-          <p:nvPr/>
-        </p:nvSpPr>
-        <p:spPr>
-          <a:xfrm>
-            <a:off x="4279392" y="4114800"/>
-            <a:ext cx="3493008" cy="777240"/>
-          </a:xfrm>
-          <a:prstGeom prst="roundRect">
-            <a:avLst>
-              <a:gd name="adj" fmla="val 7059"/>
-            </a:avLst>
-          </a:prstGeom>
-          <a:solidFill>
-            <a:srgbClr val="1E1A19"/>
-          </a:solidFill>
-          <a:ln w="12700">
-            <a:solidFill>
-              <a:srgbClr val="2C2524"/>
-            </a:solidFill>
-            <a:prstDash val="solid"/>
-          </a:ln>
-        </p:spPr>
-      </p:sp>
-      <p:sp>
-        <p:nvSpPr>
-          <p:cNvPr id="37" name="Text 35"/>
-          <p:cNvSpPr txBox="1"/>
-          <p:nvPr/>
-        </p:nvSpPr>
-        <p:spPr>
-          <a:xfrm>
-            <a:off x="4443984" y="4169664"/>
-            <a:ext cx="2560320" cy="384048"/>
-          </a:xfrm>
-          <a:prstGeom prst="rect">
-            <a:avLst/>
-          </a:prstGeom>
-          <a:noFill/>
-          <a:ln/>
-        </p:spPr>
-        <p:txBody>
-          <a:bodyPr wrap="square" lIns="0" tIns="0" rIns="0" bIns="0" rtlCol="0" anchor="t"/>
-          <a:lstStyle/>
-          <a:p>
-            <a:pPr indent="0" marL="0">
-              <a:buNone/>
-            </a:pPr>
-            <a:r>
-              <a:rPr lang="en-US" sz="1200" b="1" dirty="0">
-                <a:solidFill>
-                  <a:srgbClr val="F4F1F0"/>
-                </a:solidFill>
-                <a:latin typeface="Calibri" pitchFamily="34" charset="0"/>
-                <a:ea typeface="Calibri" pitchFamily="34" charset="-122"/>
-                <a:cs typeface="Calibri" pitchFamily="34" charset="-120"/>
-              </a:rPr>
-              <a:t>Creative direction</a:t>
-            </a:r>
-            <a:endParaRPr lang="en-US" sz="1200" dirty="0"/>
-          </a:p>
-        </p:txBody>
-      </p:sp>
-      <p:sp>
-        <p:nvSpPr>
-          <p:cNvPr id="38" name="Text 36"/>
-          <p:cNvSpPr txBox="1"/>
-          <p:nvPr/>
-        </p:nvSpPr>
-        <p:spPr>
-          <a:xfrm>
-            <a:off x="4443984" y="4526280"/>
-            <a:ext cx="2743200" cy="292608"/>
-          </a:xfrm>
-          <a:prstGeom prst="rect">
-            <a:avLst/>
-          </a:prstGeom>
-          <a:noFill/>
-          <a:ln/>
-        </p:spPr>
-        <p:txBody>
-          <a:bodyPr wrap="square" lIns="0" tIns="0" rIns="0" bIns="0" rtlCol="0" anchor="ctr"/>
-          <a:lstStyle/>
-          <a:p>
-            <a:pPr indent="0" marL="0">
-              <a:buNone/>
-            </a:pPr>
-            <a:r>
-              <a:rPr lang="en-US" sz="1100" dirty="0">
-                <a:solidFill>
-                  <a:srgbClr val="A9A09E"/>
-                </a:solidFill>
-                <a:latin typeface="Calibri" pitchFamily="34" charset="0"/>
-                <a:ea typeface="Calibri" pitchFamily="34" charset="-122"/>
-                <a:cs typeface="Calibri" pitchFamily="34" charset="-120"/>
-              </a:rPr>
-              <a:t>2 permissions</a:t>
-            </a:r>
-            <a:endParaRPr lang="en-US" sz="1100" dirty="0"/>
-          </a:p>
-        </p:txBody>
-      </p:sp>
-      <p:sp>
-        <p:nvSpPr>
-          <p:cNvPr id="39" name="Text 37"/>
-          <p:cNvSpPr txBox="1"/>
-          <p:nvPr/>
-        </p:nvSpPr>
-        <p:spPr>
-          <a:xfrm>
-            <a:off x="7040880" y="4206240"/>
-            <a:ext cx="566928" cy="594360"/>
-          </a:xfrm>
-          <a:prstGeom prst="rect">
-            <a:avLst/>
-          </a:prstGeom>
-          <a:noFill/>
-          <a:ln/>
-        </p:spPr>
-        <p:txBody>
-          <a:bodyPr wrap="square" lIns="0" tIns="0" rIns="0" bIns="0" rtlCol="0" anchor="ctr"/>
-          <a:lstStyle/>
-          <a:p>
-            <a:pPr algn="r" indent="0" marL="0">
-              <a:buNone/>
-            </a:pPr>
-            <a:r>
-              <a:rPr lang="en-US" sz="2000" b="1" dirty="0">
-                <a:solidFill>
-                  <a:srgbClr val="B8323A"/>
-                </a:solidFill>
-                <a:latin typeface="Cambria" pitchFamily="34" charset="0"/>
-                <a:ea typeface="Cambria" pitchFamily="34" charset="-122"/>
-                <a:cs typeface="Cambria" pitchFamily="34" charset="-120"/>
-              </a:rPr>
-              <a:t>9</a:t>
-            </a:r>
-            <a:endParaRPr lang="en-US" sz="2000" dirty="0"/>
-          </a:p>
-        </p:txBody>
-      </p:sp>
-      <p:sp>
-        <p:nvSpPr>
-          <p:cNvPr id="40" name="Shape 38"/>
-          <p:cNvSpPr/>
-          <p:nvPr/>
-        </p:nvSpPr>
-        <p:spPr>
-          <a:xfrm>
-            <a:off x="7991856" y="4114800"/>
-            <a:ext cx="3493008" cy="777240"/>
-          </a:xfrm>
-          <a:prstGeom prst="roundRect">
-            <a:avLst>
-              <a:gd name="adj" fmla="val 7059"/>
-            </a:avLst>
-          </a:prstGeom>
-          <a:solidFill>
-            <a:srgbClr val="1E1A19"/>
-          </a:solidFill>
-          <a:ln w="12700">
-            <a:solidFill>
-              <a:srgbClr val="2C2524"/>
-            </a:solidFill>
-            <a:prstDash val="solid"/>
-          </a:ln>
-        </p:spPr>
-      </p:sp>
-      <p:sp>
-        <p:nvSpPr>
-          <p:cNvPr id="41" name="Text 39"/>
-          <p:cNvSpPr txBox="1"/>
-          <p:nvPr/>
-        </p:nvSpPr>
-        <p:spPr>
-          <a:xfrm>
-            <a:off x="8156448" y="4169664"/>
-            <a:ext cx="2560320" cy="384048"/>
-          </a:xfrm>
-          <a:prstGeom prst="rect">
-            <a:avLst/>
-          </a:prstGeom>
-          <a:noFill/>
-          <a:ln/>
-        </p:spPr>
-        <p:txBody>
-          <a:bodyPr wrap="square" lIns="0" tIns="0" rIns="0" bIns="0" rtlCol="0" anchor="t"/>
-          <a:lstStyle/>
-          <a:p>
-            <a:pPr indent="0" marL="0">
-              <a:buNone/>
-            </a:pPr>
-            <a:r>
-              <a:rPr lang="en-US" sz="1200" b="1" dirty="0">
-                <a:solidFill>
-                  <a:srgbClr val="F4F1F0"/>
-                </a:solidFill>
-                <a:latin typeface="Calibri" pitchFamily="34" charset="0"/>
-                <a:ea typeface="Calibri" pitchFamily="34" charset="-122"/>
-                <a:cs typeface="Calibri" pitchFamily="34" charset="-120"/>
-              </a:rPr>
-              <a:t>Administration</a:t>
-            </a:r>
-            <a:endParaRPr lang="en-US" sz="1200" dirty="0"/>
-          </a:p>
-        </p:txBody>
-      </p:sp>
-      <p:sp>
-        <p:nvSpPr>
-          <p:cNvPr id="42" name="Text 40"/>
-          <p:cNvSpPr txBox="1"/>
-          <p:nvPr/>
-        </p:nvSpPr>
-        <p:spPr>
-          <a:xfrm>
-            <a:off x="8156448" y="4526280"/>
-            <a:ext cx="2743200" cy="292608"/>
-          </a:xfrm>
-          <a:prstGeom prst="rect">
-            <a:avLst/>
-          </a:prstGeom>
-          <a:noFill/>
-          <a:ln/>
-        </p:spPr>
-        <p:txBody>
-          <a:bodyPr wrap="square" lIns="0" tIns="0" rIns="0" bIns="0" rtlCol="0" anchor="ctr"/>
-          <a:lstStyle/>
-          <a:p>
-            <a:pPr indent="0" marL="0">
-              <a:buNone/>
-            </a:pPr>
-            <a:r>
-              <a:rPr lang="en-US" sz="1100" dirty="0">
-                <a:solidFill>
-                  <a:srgbClr val="A9A09E"/>
-                </a:solidFill>
-                <a:latin typeface="Calibri" pitchFamily="34" charset="0"/>
-                <a:ea typeface="Calibri" pitchFamily="34" charset="-122"/>
-                <a:cs typeface="Calibri" pitchFamily="34" charset="-120"/>
-              </a:rPr>
-              <a:t>18 permissions</a:t>
-            </a:r>
-            <a:endParaRPr lang="en-US" sz="1100" dirty="0"/>
-          </a:p>
-        </p:txBody>
-      </p:sp>
-      <p:sp>
-        <p:nvSpPr>
-          <p:cNvPr id="43" name="Text 41"/>
-          <p:cNvSpPr txBox="1"/>
-          <p:nvPr/>
-        </p:nvSpPr>
-        <p:spPr>
-          <a:xfrm>
-            <a:off x="10753344" y="4206240"/>
-            <a:ext cx="566928" cy="594360"/>
-          </a:xfrm>
-          <a:prstGeom prst="rect">
-            <a:avLst/>
-          </a:prstGeom>
-          <a:noFill/>
-          <a:ln/>
-        </p:spPr>
-        <p:txBody>
-          <a:bodyPr wrap="square" lIns="0" tIns="0" rIns="0" bIns="0" rtlCol="0" anchor="ctr"/>
-          <a:lstStyle/>
-          <a:p>
-            <a:pPr algn="r" indent="0" marL="0">
-              <a:buNone/>
-            </a:pPr>
-            <a:r>
-              <a:rPr lang="en-US" sz="2000" b="1" dirty="0">
-                <a:solidFill>
-                  <a:srgbClr val="B8323A"/>
-                </a:solidFill>
-                <a:latin typeface="Cambria" pitchFamily="34" charset="0"/>
-                <a:ea typeface="Cambria" pitchFamily="34" charset="-122"/>
-                <a:cs typeface="Cambria" pitchFamily="34" charset="-120"/>
-              </a:rPr>
-              <a:t>8</a:t>
-            </a:r>
-            <a:endParaRPr lang="en-US" sz="2000" dirty="0"/>
-          </a:p>
-        </p:txBody>
-      </p:sp>
-      <p:sp>
-        <p:nvSpPr>
-          <p:cNvPr id="44" name="Shape 42"/>
-          <p:cNvSpPr/>
-          <p:nvPr/>
-        </p:nvSpPr>
-        <p:spPr>
-          <a:xfrm>
-            <a:off x="566928" y="5029200"/>
-            <a:ext cx="3493008" cy="777240"/>
-          </a:xfrm>
-          <a:prstGeom prst="roundRect">
-            <a:avLst>
-              <a:gd name="adj" fmla="val 7059"/>
-            </a:avLst>
-          </a:prstGeom>
-          <a:solidFill>
-            <a:srgbClr val="1E1A19"/>
-          </a:solidFill>
-          <a:ln w="12700">
-            <a:solidFill>
-              <a:srgbClr val="2C2524"/>
-            </a:solidFill>
-            <a:prstDash val="solid"/>
-          </a:ln>
-        </p:spPr>
-      </p:sp>
-      <p:sp>
-        <p:nvSpPr>
-          <p:cNvPr id="45" name="Text 43"/>
-          <p:cNvSpPr txBox="1"/>
-          <p:nvPr/>
-        </p:nvSpPr>
-        <p:spPr>
-          <a:xfrm>
-            <a:off x="731520" y="5084064"/>
-            <a:ext cx="2560320" cy="384048"/>
-          </a:xfrm>
-          <a:prstGeom prst="rect">
-            <a:avLst/>
-          </a:prstGeom>
-          <a:noFill/>
-          <a:ln/>
-        </p:spPr>
-        <p:txBody>
-          <a:bodyPr wrap="square" lIns="0" tIns="0" rIns="0" bIns="0" rtlCol="0" anchor="t"/>
-          <a:lstStyle/>
-          <a:p>
-            <a:pPr indent="0" marL="0">
-              <a:buNone/>
-            </a:pPr>
-            <a:r>
-              <a:rPr lang="en-US" sz="1200" b="1" dirty="0">
-                <a:solidFill>
-                  <a:srgbClr val="F4F1F0"/>
-                </a:solidFill>
-                <a:latin typeface="Calibri" pitchFamily="34" charset="0"/>
-                <a:ea typeface="Calibri" pitchFamily="34" charset="-122"/>
-                <a:cs typeface="Calibri" pitchFamily="34" charset="-120"/>
-              </a:rPr>
-              <a:t>Studio leadership</a:t>
-            </a:r>
-            <a:endParaRPr lang="en-US" sz="1200" dirty="0"/>
-          </a:p>
-        </p:txBody>
-      </p:sp>
-      <p:sp>
-        <p:nvSpPr>
-          <p:cNvPr id="46" name="Text 44"/>
-          <p:cNvSpPr txBox="1"/>
-          <p:nvPr/>
-        </p:nvSpPr>
-        <p:spPr>
-          <a:xfrm>
-            <a:off x="731520" y="5440680"/>
-            <a:ext cx="2743200" cy="292608"/>
-          </a:xfrm>
-          <a:prstGeom prst="rect">
-            <a:avLst/>
-          </a:prstGeom>
-          <a:noFill/>
-          <a:ln/>
-        </p:spPr>
-        <p:txBody>
-          <a:bodyPr wrap="square" lIns="0" tIns="0" rIns="0" bIns="0" rtlCol="0" anchor="ctr"/>
-          <a:lstStyle/>
-          <a:p>
-            <a:pPr indent="0" marL="0">
-              <a:buNone/>
-            </a:pPr>
-            <a:r>
-              <a:rPr lang="en-US" sz="1100" dirty="0">
-                <a:solidFill>
-                  <a:srgbClr val="A9A09E"/>
-                </a:solidFill>
-                <a:latin typeface="Calibri" pitchFamily="34" charset="0"/>
-                <a:ea typeface="Calibri" pitchFamily="34" charset="-122"/>
-                <a:cs typeface="Calibri" pitchFamily="34" charset="-120"/>
-              </a:rPr>
-              <a:t>15 permissions</a:t>
-            </a:r>
-            <a:endParaRPr lang="en-US" sz="1100" dirty="0"/>
-          </a:p>
-        </p:txBody>
-      </p:sp>
-      <p:sp>
-        <p:nvSpPr>
-          <p:cNvPr id="47" name="Text 45"/>
-          <p:cNvSpPr txBox="1"/>
-          <p:nvPr/>
-        </p:nvSpPr>
-        <p:spPr>
-          <a:xfrm>
-            <a:off x="3328416" y="5120640"/>
-            <a:ext cx="566928" cy="594360"/>
-          </a:xfrm>
-          <a:prstGeom prst="rect">
-            <a:avLst/>
-          </a:prstGeom>
-          <a:noFill/>
-          <a:ln/>
-        </p:spPr>
-        <p:txBody>
-          <a:bodyPr wrap="square" lIns="0" tIns="0" rIns="0" bIns="0" rtlCol="0" anchor="ctr"/>
-          <a:lstStyle/>
-          <a:p>
-            <a:pPr algn="r" indent="0" marL="0">
-              <a:buNone/>
-            </a:pPr>
-            <a:r>
-              <a:rPr lang="en-US" sz="2000" b="1" dirty="0">
-                <a:solidFill>
-                  <a:srgbClr val="B8323A"/>
-                </a:solidFill>
-                <a:latin typeface="Cambria" pitchFamily="34" charset="0"/>
-                <a:ea typeface="Cambria" pitchFamily="34" charset="-122"/>
-                <a:cs typeface="Cambria" pitchFamily="34" charset="-120"/>
-              </a:rPr>
-              <a:t>7</a:t>
-            </a:r>
-            <a:endParaRPr lang="en-US" sz="2000" dirty="0"/>
-          </a:p>
-        </p:txBody>
-      </p:sp>
-      <p:sp>
-        <p:nvSpPr>
-          <p:cNvPr id="48" name="Shape 46"/>
-          <p:cNvSpPr/>
-          <p:nvPr/>
-        </p:nvSpPr>
-        <p:spPr>
-          <a:xfrm>
-            <a:off x="4279392" y="5029200"/>
-            <a:ext cx="3493008" cy="777240"/>
-          </a:xfrm>
-          <a:prstGeom prst="roundRect">
-            <a:avLst>
-              <a:gd name="adj" fmla="val 7059"/>
-            </a:avLst>
-          </a:prstGeom>
-          <a:solidFill>
-            <a:srgbClr val="1E1A19"/>
-          </a:solidFill>
-          <a:ln w="12700">
-            <a:solidFill>
-              <a:srgbClr val="2C2524"/>
-            </a:solidFill>
-            <a:prstDash val="solid"/>
-          </a:ln>
-        </p:spPr>
-      </p:sp>
-      <p:sp>
-        <p:nvSpPr>
-          <p:cNvPr id="49" name="Text 47"/>
-          <p:cNvSpPr txBox="1"/>
-          <p:nvPr/>
-        </p:nvSpPr>
-        <p:spPr>
-          <a:xfrm>
-            <a:off x="4443984" y="5084064"/>
-            <a:ext cx="2560320" cy="384048"/>
-          </a:xfrm>
-          <a:prstGeom prst="rect">
-            <a:avLst/>
-          </a:prstGeom>
-          <a:noFill/>
-          <a:ln/>
-        </p:spPr>
-        <p:txBody>
-          <a:bodyPr wrap="square" lIns="0" tIns="0" rIns="0" bIns="0" rtlCol="0" anchor="t"/>
-          <a:lstStyle/>
-          <a:p>
-            <a:pPr indent="0" marL="0">
-              <a:buNone/>
-            </a:pPr>
-            <a:r>
-              <a:rPr lang="en-US" sz="1200" b="1" dirty="0">
-                <a:solidFill>
-                  <a:srgbClr val="F4F1F0"/>
-                </a:solidFill>
-                <a:latin typeface="Calibri" pitchFamily="34" charset="0"/>
-                <a:ea typeface="Calibri" pitchFamily="34" charset="-122"/>
-                <a:cs typeface="Calibri" pitchFamily="34" charset="-120"/>
-              </a:rPr>
-              <a:t>Creative Art Director and Super Admin</a:t>
-            </a:r>
-            <a:endParaRPr lang="en-US" sz="1200" dirty="0"/>
-          </a:p>
-        </p:txBody>
-      </p:sp>
-      <p:sp>
-        <p:nvSpPr>
-          <p:cNvPr id="50" name="Text 48"/>
-          <p:cNvSpPr txBox="1"/>
-          <p:nvPr/>
-        </p:nvSpPr>
-        <p:spPr>
-          <a:xfrm>
-            <a:off x="4443984" y="5440680"/>
-            <a:ext cx="2743200" cy="292608"/>
-          </a:xfrm>
-          <a:prstGeom prst="rect">
-            <a:avLst/>
-          </a:prstGeom>
-          <a:noFill/>
-          <a:ln/>
-        </p:spPr>
-        <p:txBody>
-          <a:bodyPr wrap="square" lIns="0" tIns="0" rIns="0" bIns="0" rtlCol="0" anchor="ctr"/>
-          <a:lstStyle/>
-          <a:p>
-            <a:pPr indent="0" marL="0">
-              <a:buNone/>
-            </a:pPr>
-            <a:r>
-              <a:rPr lang="en-US" sz="1100" dirty="0">
-                <a:solidFill>
-                  <a:srgbClr val="A9A09E"/>
-                </a:solidFill>
-                <a:latin typeface="Calibri" pitchFamily="34" charset="0"/>
-                <a:ea typeface="Calibri" pitchFamily="34" charset="-122"/>
-                <a:cs typeface="Calibri" pitchFamily="34" charset="-120"/>
-              </a:rPr>
-              <a:t>3 permissions</a:t>
-            </a:r>
-            <a:endParaRPr lang="en-US" sz="1100" dirty="0"/>
-          </a:p>
-        </p:txBody>
-      </p:sp>
-      <p:sp>
-        <p:nvSpPr>
-          <p:cNvPr id="51" name="Text 49"/>
-          <p:cNvSpPr txBox="1"/>
-          <p:nvPr/>
-        </p:nvSpPr>
-        <p:spPr>
-          <a:xfrm>
-            <a:off x="7040880" y="5120640"/>
-            <a:ext cx="566928" cy="594360"/>
-          </a:xfrm>
-          <a:prstGeom prst="rect">
-            <a:avLst/>
-          </a:prstGeom>
-          <a:noFill/>
-          <a:ln/>
-        </p:spPr>
-        <p:txBody>
-          <a:bodyPr wrap="square" lIns="0" tIns="0" rIns="0" bIns="0" rtlCol="0" anchor="ctr"/>
-          <a:lstStyle/>
-          <a:p>
-            <a:pPr algn="r" indent="0" marL="0">
-              <a:buNone/>
-            </a:pPr>
-            <a:r>
-              <a:rPr lang="en-US" sz="2000" b="1" dirty="0">
-                <a:solidFill>
-                  <a:srgbClr val="B8323A"/>
-                </a:solidFill>
-                <a:latin typeface="Cambria" pitchFamily="34" charset="0"/>
-                <a:ea typeface="Cambria" pitchFamily="34" charset="-122"/>
-                <a:cs typeface="Cambria" pitchFamily="34" charset="-120"/>
-              </a:rPr>
-              <a:t>2</a:t>
-            </a:r>
-            <a:endParaRPr lang="en-US" sz="2000" dirty="0"/>
-          </a:p>
-        </p:txBody>
-      </p:sp>
-      <p:sp>
-        <p:nvSpPr>
-          <p:cNvPr id="52" name="Shape 50"/>
-          <p:cNvSpPr/>
-          <p:nvPr/>
-        </p:nvSpPr>
-        <p:spPr>
-          <a:xfrm>
-            <a:off x="7991856" y="5029200"/>
-            <a:ext cx="3493008" cy="777240"/>
-          </a:xfrm>
-          <a:prstGeom prst="roundRect">
-            <a:avLst>
-              <a:gd name="adj" fmla="val 7059"/>
-            </a:avLst>
-          </a:prstGeom>
-          <a:solidFill>
-            <a:srgbClr val="1E1A19"/>
-          </a:solidFill>
-          <a:ln w="12700">
-            <a:solidFill>
-              <a:srgbClr val="2C2524"/>
-            </a:solidFill>
-            <a:prstDash val="solid"/>
-          </a:ln>
-        </p:spPr>
-      </p:sp>
-      <p:sp>
-        <p:nvSpPr>
-          <p:cNvPr id="53" name="Text 51"/>
-          <p:cNvSpPr txBox="1"/>
-          <p:nvPr/>
-        </p:nvSpPr>
-        <p:spPr>
-          <a:xfrm>
-            <a:off x="8156448" y="5084064"/>
-            <a:ext cx="2560320" cy="384048"/>
-          </a:xfrm>
-          <a:prstGeom prst="rect">
-            <a:avLst/>
-          </a:prstGeom>
-          <a:noFill/>
-          <a:ln/>
-        </p:spPr>
-        <p:txBody>
-          <a:bodyPr wrap="square" lIns="0" tIns="0" rIns="0" bIns="0" rtlCol="0" anchor="t"/>
-          <a:lstStyle/>
-          <a:p>
-            <a:pPr indent="0" marL="0">
-              <a:buNone/>
-            </a:pPr>
-            <a:r>
-              <a:rPr lang="en-US" sz="1200" b="1" dirty="0">
-                <a:solidFill>
-                  <a:srgbClr val="F4F1F0"/>
-                </a:solidFill>
-                <a:latin typeface="Calibri" pitchFamily="34" charset="0"/>
-                <a:ea typeface="Calibri" pitchFamily="34" charset="-122"/>
-                <a:cs typeface="Calibri" pitchFamily="34" charset="-120"/>
-              </a:rPr>
-              <a:t>Super Admin only</a:t>
-            </a:r>
-            <a:endParaRPr lang="en-US" sz="1200" dirty="0"/>
-          </a:p>
-        </p:txBody>
-      </p:sp>
-      <p:sp>
-        <p:nvSpPr>
-          <p:cNvPr id="54" name="Text 52"/>
-          <p:cNvSpPr txBox="1"/>
-          <p:nvPr/>
-        </p:nvSpPr>
-        <p:spPr>
-          <a:xfrm>
-            <a:off x="8156448" y="5440680"/>
-            <a:ext cx="2743200" cy="292608"/>
-          </a:xfrm>
-          <a:prstGeom prst="rect">
-            <a:avLst/>
-          </a:prstGeom>
-          <a:noFill/>
-          <a:ln/>
-        </p:spPr>
-        <p:txBody>
-          <a:bodyPr wrap="square" lIns="0" tIns="0" rIns="0" bIns="0" rtlCol="0" anchor="ctr"/>
-          <a:lstStyle/>
-          <a:p>
-            <a:pPr indent="0" marL="0">
-              <a:buNone/>
-            </a:pPr>
-            <a:r>
-              <a:rPr lang="en-US" sz="1100" dirty="0">
-                <a:solidFill>
-                  <a:srgbClr val="A9A09E"/>
-                </a:solidFill>
-                <a:latin typeface="Calibri" pitchFamily="34" charset="0"/>
-                <a:ea typeface="Calibri" pitchFamily="34" charset="-122"/>
-                <a:cs typeface="Calibri" pitchFamily="34" charset="-120"/>
-              </a:rPr>
-              <a:t>8 permissions</a:t>
-            </a:r>
-            <a:endParaRPr lang="en-US" sz="1100" dirty="0"/>
-          </a:p>
-        </p:txBody>
-      </p:sp>
-      <p:sp>
-        <p:nvSpPr>
-          <p:cNvPr id="55" name="Text 53"/>
-          <p:cNvSpPr txBox="1"/>
-          <p:nvPr/>
-        </p:nvSpPr>
-        <p:spPr>
-          <a:xfrm>
-            <a:off x="10753344" y="5120640"/>
-            <a:ext cx="566928" cy="594360"/>
-          </a:xfrm>
-          <a:prstGeom prst="rect">
-            <a:avLst/>
-          </a:prstGeom>
-          <a:noFill/>
-          <a:ln/>
-        </p:spPr>
-        <p:txBody>
-          <a:bodyPr wrap="square" lIns="0" tIns="0" rIns="0" bIns="0" rtlCol="0" anchor="ctr"/>
-          <a:lstStyle/>
-          <a:p>
-            <a:pPr algn="r" indent="0" marL="0">
-              <a:buNone/>
-            </a:pPr>
-            <a:r>
-              <a:rPr lang="en-US" sz="2000" b="1" dirty="0">
-                <a:solidFill>
-                  <a:srgbClr val="B8323A"/>
-                </a:solidFill>
-                <a:latin typeface="Cambria" pitchFamily="34" charset="0"/>
-                <a:ea typeface="Cambria" pitchFamily="34" charset="-122"/>
-                <a:cs typeface="Cambria" pitchFamily="34" charset="-120"/>
-              </a:rPr>
-              <a:t>1</a:t>
-            </a:r>
-            <a:endParaRPr lang="en-US" sz="2000" dirty="0"/>
-          </a:p>
-        </p:txBody>
-      </p:sp>
-      <p:sp>
-        <p:nvSpPr>
-          <p:cNvPr id="56" name="Text 54"/>
-          <p:cNvSpPr txBox="1"/>
-          <p:nvPr/>
-        </p:nvSpPr>
-        <p:spPr>
-          <a:xfrm>
-            <a:off x="566928" y="5989320"/>
-            <a:ext cx="10881360" cy="548640"/>
-          </a:xfrm>
-          <a:prstGeom prst="rect">
-            <a:avLst/>
-          </a:prstGeom>
-          <a:noFill/>
-          <a:ln/>
-        </p:spPr>
-        <p:txBody>
-          <a:bodyPr wrap="square" lIns="0" tIns="0" rIns="0" bIns="0" rtlCol="0" anchor="ctr"/>
-          <a:lstStyle/>
-          <a:p>
-            <a:pPr indent="0" marL="0">
-              <a:buNone/>
-            </a:pPr>
-            <a:r>
-              <a:rPr lang="en-US" sz="1300" dirty="0">
-                <a:solidFill>
-                  <a:srgbClr val="A9A09E"/>
-                </a:solidFill>
-                <a:latin typeface="Calibri" pitchFamily="34" charset="0"/>
-                <a:ea typeface="Calibri" pitchFamily="34" charset="-122"/>
-                <a:cs typeface="Calibri" pitchFamily="34" charset="-120"/>
-              </a:rPr>
-              <a:t>The large number on each card is how many designations hold that band. Super Admin holds everything, including any permission added in future, without anybody switching it on.</a:t>
-            </a:r>
-            <a:endParaRPr lang="en-US" sz="1300" dirty="0"/>
+              <a:t>The working-hours control.</a:t>
+            </a:r>
+            <a:endParaRPr lang="en-US" sz="1000" dirty="0"/>
           </a:p>
         </p:txBody>
       </p:sp>
@@ -14167,7 +12766,7 @@
                 <a:ea typeface="Cambria" pitchFamily="34" charset="-122"/>
                 <a:cs typeface="Cambria" pitchFamily="34" charset="-120"/>
               </a:rPr>
-              <a:t>One screen decides what everybody else may do</a:t>
+              <a:t>Twelve access bands, not sixty role lists</a:t>
             </a:r>
             <a:endParaRPr lang="en-US" sz="3400" dirty="0"/>
           </a:p>
@@ -14181,111 +12780,32 @@
         </p:nvSpPr>
         <p:spPr>
           <a:xfrm>
-            <a:off x="566928" y="1828800"/>
-            <a:ext cx="4937760" cy="3200400"/>
-          </a:xfrm>
-          <a:prstGeom prst="rect">
-            <a:avLst/>
-          </a:prstGeom>
-          <a:noFill/>
-          <a:ln/>
-        </p:spPr>
-        <p:txBody>
-          <a:bodyPr wrap="square" rtlCol="0" anchor="ctr"/>
-          <a:lstStyle/>
-          <a:p>
-            <a:pPr marL="342900" indent="-342900">
-              <a:lnSpc>
-                <a:spcPts val="2000"/>
-              </a:lnSpc>
-              <a:spcAft>
-                <a:spcPts val="1000"/>
-              </a:spcAft>
-              <a:buSzPct val="100000"/>
-              <a:buChar char="•"/>
+            <a:off x="566928" y="1554480"/>
+            <a:ext cx="6035040" cy="457200"/>
+          </a:xfrm>
+          <a:prstGeom prst="rect">
+            <a:avLst/>
+          </a:prstGeom>
+          <a:noFill/>
+          <a:ln/>
+        </p:spPr>
+        <p:txBody>
+          <a:bodyPr wrap="square" lIns="0" tIns="0" rIns="0" bIns="0" rtlCol="0" anchor="ctr"/>
+          <a:lstStyle/>
+          <a:p>
+            <a:pPr indent="0" marL="0">
+              <a:buNone/>
             </a:pPr>
             <a:r>
               <a:rPr lang="en-US" sz="1400" dirty="0">
                 <a:solidFill>
-                  <a:srgbClr val="F4F1F0"/>
-                </a:solidFill>
-                <a:latin typeface="Calibri" pitchFamily="34" charset="0"/>
-                <a:ea typeface="Calibri" pitchFamily="34" charset="-122"/>
-                <a:cs typeface="Calibri" pitchFamily="34" charset="-120"/>
-              </a:rPr>
-              <a:t>Choose a designation, tick the actions it should hold, save.</a:t>
-            </a:r>
-            <a:endParaRPr lang="en-US" sz="1400" dirty="0"/>
-          </a:p>
-          <a:p>
-            <a:pPr marL="342900" indent="-342900">
-              <a:lnSpc>
-                <a:spcPts val="2000"/>
-              </a:lnSpc>
-              <a:spcAft>
-                <a:spcPts val="1000"/>
-              </a:spcAft>
-              <a:buSzPct val="100000"/>
-              <a:buChar char="•"/>
-            </a:pPr>
-            <a:r>
-              <a:rPr lang="en-US" sz="1400" dirty="0">
-                <a:solidFill>
-                  <a:srgbClr val="F4F1F0"/>
-                </a:solidFill>
-                <a:latin typeface="Calibri" pitchFamily="34" charset="0"/>
-                <a:ea typeface="Calibri" pitchFamily="34" charset="-122"/>
-                <a:cs typeface="Calibri" pitchFamily="34" charset="-120"/>
-              </a:rPr>
-              <a:t>The change applies to everybody holding that designation, on their next request.</a:t>
-            </a:r>
-            <a:endParaRPr lang="en-US" sz="1400" dirty="0"/>
-          </a:p>
-          <a:p>
-            <a:pPr marL="342900" indent="-342900">
-              <a:lnSpc>
-                <a:spcPts val="2000"/>
-              </a:lnSpc>
-              <a:spcAft>
-                <a:spcPts val="1000"/>
-              </a:spcAft>
-              <a:buSzPct val="100000"/>
-              <a:buChar char="•"/>
-            </a:pPr>
-            <a:r>
-              <a:rPr lang="en-US" sz="1400" dirty="0">
-                <a:solidFill>
-                  <a:srgbClr val="F4F1F0"/>
-                </a:solidFill>
-                <a:latin typeface="Calibri" pitchFamily="34" charset="0"/>
-                <a:ea typeface="Calibri" pitchFamily="34" charset="-122"/>
-                <a:cs typeface="Calibri" pitchFamily="34" charset="-120"/>
-              </a:rPr>
-              <a:t>Super Admin holds every permission and cannot be edited down.</a:t>
-            </a:r>
-            <a:endParaRPr lang="en-US" sz="1400" dirty="0"/>
-          </a:p>
-          <a:p>
-            <a:pPr marL="342900" indent="-342900">
-              <a:lnSpc>
-                <a:spcPts val="2000"/>
-              </a:lnSpc>
-              <a:spcAft>
-                <a:spcPts val="1000"/>
-              </a:spcAft>
-              <a:buSzPct val="100000"/>
-              <a:buChar char="•"/>
-            </a:pPr>
-            <a:r>
-              <a:rPr lang="en-US" sz="1400" dirty="0">
-                <a:solidFill>
-                  <a:srgbClr val="F4F1F0"/>
-                </a:solidFill>
-                <a:latin typeface="Calibri" pitchFamily="34" charset="0"/>
-                <a:ea typeface="Calibri" pitchFamily="34" charset="-122"/>
-                <a:cs typeface="Calibri" pitchFamily="34" charset="-120"/>
-              </a:rPr>
-              <a:t>Every change is written to the Activity Log — the designation, the permission and the direction.</a:t>
+                  <a:srgbClr val="A9A09E"/>
+                </a:solidFill>
+                <a:latin typeface="Calibri" pitchFamily="34" charset="0"/>
+                <a:ea typeface="Calibri" pitchFamily="34" charset="-122"/>
+                <a:cs typeface="Calibri" pitchFamily="34" charset="-120"/>
+              </a:rPr>
+              <a:t>58 permissions across 60 designations, in only twelve distinct groups of holders.</a:t>
             </a:r>
             <a:endParaRPr lang="en-US" sz="1400" dirty="0"/>
           </a:p>
@@ -14299,8 +12819,8 @@
         </p:nvSpPr>
         <p:spPr>
           <a:xfrm>
-            <a:off x="566928" y="5532120"/>
-            <a:ext cx="4937760" cy="777240"/>
+            <a:off x="566928" y="2286000"/>
+            <a:ext cx="3493008" cy="777240"/>
           </a:xfrm>
           <a:prstGeom prst="roundRect">
             <a:avLst>
@@ -14326,38 +12846,168 @@
         </p:nvSpPr>
         <p:spPr>
           <a:xfrm>
-            <a:off x="749808" y="5532120"/>
-            <a:ext cx="4572000" cy="777240"/>
-          </a:xfrm>
-          <a:prstGeom prst="rect">
-            <a:avLst/>
-          </a:prstGeom>
-          <a:noFill/>
-          <a:ln/>
-        </p:spPr>
-        <p:txBody>
-          <a:bodyPr wrap="square" lIns="0" tIns="0" rIns="0" bIns="0" rtlCol="0" anchor="ctr"/>
+            <a:off x="731520" y="2340864"/>
+            <a:ext cx="2560320" cy="384048"/>
+          </a:xfrm>
+          <a:prstGeom prst="rect">
+            <a:avLst/>
+          </a:prstGeom>
+          <a:noFill/>
+          <a:ln/>
+        </p:spPr>
+        <p:txBody>
+          <a:bodyPr wrap="square" lIns="0" tIns="0" rIns="0" bIns="0" rtlCol="0" anchor="t"/>
           <a:lstStyle/>
           <a:p>
             <a:pPr indent="0" marL="0">
               <a:buNone/>
             </a:pPr>
             <a:r>
-              <a:rPr lang="en-US" sz="1000" b="1" spc="200" kern="0" dirty="0">
+              <a:rPr lang="en-US" sz="1200" b="1" dirty="0">
+                <a:solidFill>
+                  <a:srgbClr val="F4F1F0"/>
+                </a:solidFill>
+                <a:latin typeface="Calibri" pitchFamily="34" charset="0"/>
+                <a:ea typeface="Calibri" pitchFamily="34" charset="-122"/>
+                <a:cs typeface="Calibri" pitchFamily="34" charset="-120"/>
+              </a:rPr>
+              <a:t>Everyone</a:t>
+            </a:r>
+            <a:endParaRPr lang="en-US" sz="1200" dirty="0"/>
+          </a:p>
+        </p:txBody>
+      </p:sp>
+      <p:sp>
+        <p:nvSpPr>
+          <p:cNvPr id="10" name="Text 8"/>
+          <p:cNvSpPr txBox="1"/>
+          <p:nvPr/>
+        </p:nvSpPr>
+        <p:spPr>
+          <a:xfrm>
+            <a:off x="731520" y="2697480"/>
+            <a:ext cx="2743200" cy="292608"/>
+          </a:xfrm>
+          <a:prstGeom prst="rect">
+            <a:avLst/>
+          </a:prstGeom>
+          <a:noFill/>
+          <a:ln/>
+        </p:spPr>
+        <p:txBody>
+          <a:bodyPr wrap="square" lIns="0" tIns="0" rIns="0" bIns="0" rtlCol="0" anchor="ctr"/>
+          <a:lstStyle/>
+          <a:p>
+            <a:pPr indent="0" marL="0">
+              <a:buNone/>
+            </a:pPr>
+            <a:r>
+              <a:rPr lang="en-US" sz="1100" dirty="0">
+                <a:solidFill>
+                  <a:srgbClr val="A9A09E"/>
+                </a:solidFill>
+                <a:latin typeface="Calibri" pitchFamily="34" charset="0"/>
+                <a:ea typeface="Calibri" pitchFamily="34" charset="-122"/>
+                <a:cs typeface="Calibri" pitchFamily="34" charset="-120"/>
+              </a:rPr>
+              <a:t>2 permissions</a:t>
+            </a:r>
+            <a:endParaRPr lang="en-US" sz="1100" dirty="0"/>
+          </a:p>
+        </p:txBody>
+      </p:sp>
+      <p:sp>
+        <p:nvSpPr>
+          <p:cNvPr id="11" name="Text 9"/>
+          <p:cNvSpPr txBox="1"/>
+          <p:nvPr/>
+        </p:nvSpPr>
+        <p:spPr>
+          <a:xfrm>
+            <a:off x="3328416" y="2377440"/>
+            <a:ext cx="566928" cy="594360"/>
+          </a:xfrm>
+          <a:prstGeom prst="rect">
+            <a:avLst/>
+          </a:prstGeom>
+          <a:noFill/>
+          <a:ln/>
+        </p:spPr>
+        <p:txBody>
+          <a:bodyPr wrap="square" lIns="0" tIns="0" rIns="0" bIns="0" rtlCol="0" anchor="ctr"/>
+          <a:lstStyle/>
+          <a:p>
+            <a:pPr algn="r" indent="0" marL="0">
+              <a:buNone/>
+            </a:pPr>
+            <a:r>
+              <a:rPr lang="en-US" sz="2000" b="1" dirty="0">
                 <a:solidFill>
                   <a:srgbClr val="B8323A"/>
                 </a:solidFill>
-                <a:latin typeface="Calibri" pitchFamily="34" charset="0"/>
-                <a:ea typeface="Calibri" pitchFamily="34" charset="-122"/>
-                <a:cs typeface="Calibri" pitchFamily="34" charset="-120"/>
-              </a:rPr>
-              <a:t>WHO  </a:t>
-            </a:r>
+                <a:latin typeface="Cambria" pitchFamily="34" charset="0"/>
+                <a:ea typeface="Cambria" pitchFamily="34" charset="-122"/>
+                <a:cs typeface="Cambria" pitchFamily="34" charset="-120"/>
+              </a:rPr>
+              <a:t>60</a:t>
+            </a:r>
+            <a:endParaRPr lang="en-US" sz="2000" dirty="0"/>
+          </a:p>
+        </p:txBody>
+      </p:sp>
+      <p:sp>
+        <p:nvSpPr>
+          <p:cNvPr id="12" name="Shape 10"/>
+          <p:cNvSpPr/>
+          <p:nvPr/>
+        </p:nvSpPr>
+        <p:spPr>
+          <a:xfrm>
+            <a:off x="4279392" y="2286000"/>
+            <a:ext cx="3493008" cy="777240"/>
+          </a:xfrm>
+          <a:prstGeom prst="roundRect">
+            <a:avLst>
+              <a:gd name="adj" fmla="val 7059"/>
+            </a:avLst>
+          </a:prstGeom>
+          <a:solidFill>
+            <a:srgbClr val="1E1A19"/>
+          </a:solidFill>
+          <a:ln w="12700">
+            <a:solidFill>
+              <a:srgbClr val="2C2524"/>
+            </a:solidFill>
+            <a:prstDash val="solid"/>
+          </a:ln>
+        </p:spPr>
+      </p:sp>
+      <p:sp>
+        <p:nvSpPr>
+          <p:cNvPr id="13" name="Text 11"/>
+          <p:cNvSpPr txBox="1"/>
+          <p:nvPr/>
+        </p:nvSpPr>
+        <p:spPr>
+          <a:xfrm>
+            <a:off x="4443984" y="2340864"/>
+            <a:ext cx="2560320" cy="384048"/>
+          </a:xfrm>
+          <a:prstGeom prst="rect">
+            <a:avLst/>
+          </a:prstGeom>
+          <a:noFill/>
+          <a:ln/>
+        </p:spPr>
+        <p:txBody>
+          <a:bodyPr wrap="square" lIns="0" tIns="0" rIns="0" bIns="0" rtlCol="0" anchor="t"/>
+          <a:lstStyle/>
+          <a:p>
             <a:pPr indent="0" marL="0">
               <a:buNone/>
             </a:pPr>
             <a:r>
-              <a:rPr lang="en-US" sz="1200" dirty="0">
+              <a:rPr lang="en-US" sz="1200" b="1" dirty="0">
                 <a:solidFill>
                   <a:srgbClr val="F4F1F0"/>
                 </a:solidFill>
@@ -14365,69 +13015,38 @@
                 <a:ea typeface="Calibri" pitchFamily="34" charset="-122"/>
                 <a:cs typeface="Calibri" pitchFamily="34" charset="-120"/>
               </a:rPr>
-              <a:t>Super Admin, and nobody else.</a:t>
-            </a:r>
-            <a:endParaRPr lang="en-US" sz="1000" dirty="0"/>
-          </a:p>
-        </p:txBody>
-      </p:sp>
-      <p:pic>
-        <p:nvPicPr>
-          <p:cNvPr id="10" name="Image 0" descr="preencoded.png">    </p:cNvPr>
-          <p:cNvPicPr>
-            <a:picLocks noChangeAspect="1"/>
-          </p:cNvPicPr>
-          <p:nvPr/>
-        </p:nvPicPr>
-        <p:blipFill>
-          <a:blip r:embed="rId1"/>
-          <a:stretch>
-            <a:fillRect/>
-          </a:stretch>
-        </p:blipFill>
-        <p:spPr>
-          <a:xfrm>
-            <a:off x="5989320" y="1570441"/>
-            <a:ext cx="5632704" cy="4082877"/>
-          </a:xfrm>
-          <a:prstGeom prst="rect">
-            <a:avLst/>
-          </a:prstGeom>
-          <a:effectLst>
-            <a:outerShdw sx="100000" sy="100000" kx="0" ky="0" algn="bl" rotWithShape="0" blurRad="177800" dist="50800" dir="5400000">
-              <a:srgbClr val="000000">
-                <a:alpha val="55000"/>
-              </a:srgbClr>
-            </a:outerShdw>
-          </a:effectLst>
-        </p:spPr>
-      </p:pic>
-      <p:sp>
-        <p:nvSpPr>
-          <p:cNvPr id="11" name="Text 8"/>
-          <p:cNvSpPr txBox="1"/>
-          <p:nvPr/>
-        </p:nvSpPr>
-        <p:spPr>
-          <a:xfrm>
-            <a:off x="5989320" y="5763047"/>
-            <a:ext cx="5632704" cy="457200"/>
-          </a:xfrm>
-          <a:prstGeom prst="rect">
-            <a:avLst/>
-          </a:prstGeom>
-          <a:noFill/>
-          <a:ln/>
-        </p:spPr>
-        <p:txBody>
-          <a:bodyPr wrap="square" lIns="0" tIns="0" rIns="0" bIns="0" rtlCol="0" anchor="ctr"/>
-          <a:lstStyle/>
-          <a:p>
-            <a:pPr algn="ctr" indent="0" marL="0">
-              <a:buNone/>
-            </a:pPr>
-            <a:r>
-              <a:rPr lang="en-US" sz="1000" i="1" dirty="0">
+              <a:t>Everyone who works on assets</a:t>
+            </a:r>
+            <a:endParaRPr lang="en-US" sz="1200" dirty="0"/>
+          </a:p>
+        </p:txBody>
+      </p:sp>
+      <p:sp>
+        <p:nvSpPr>
+          <p:cNvPr id="14" name="Text 12"/>
+          <p:cNvSpPr txBox="1"/>
+          <p:nvPr/>
+        </p:nvSpPr>
+        <p:spPr>
+          <a:xfrm>
+            <a:off x="4443984" y="2697480"/>
+            <a:ext cx="2743200" cy="292608"/>
+          </a:xfrm>
+          <a:prstGeom prst="rect">
+            <a:avLst/>
+          </a:prstGeom>
+          <a:noFill/>
+          <a:ln/>
+        </p:spPr>
+        <p:txBody>
+          <a:bodyPr wrap="square" lIns="0" tIns="0" rIns="0" bIns="0" rtlCol="0" anchor="ctr"/>
+          <a:lstStyle/>
+          <a:p>
+            <a:pPr indent="0" marL="0">
+              <a:buNone/>
+            </a:pPr>
+            <a:r>
+              <a:rPr lang="en-US" sz="1100" dirty="0">
                 <a:solidFill>
                   <a:srgbClr val="A9A09E"/>
                 </a:solidFill>
@@ -14435,9 +13054,1527 @@
                 <a:ea typeface="Calibri" pitchFamily="34" charset="-122"/>
                 <a:cs typeface="Calibri" pitchFamily="34" charset="-120"/>
               </a:rPr>
-              <a:t>The permission grid for one designation (first screenful).</a:t>
-            </a:r>
-            <a:endParaRPr lang="en-US" sz="1000" dirty="0"/>
+              <a:t>2 permissions</a:t>
+            </a:r>
+            <a:endParaRPr lang="en-US" sz="1100" dirty="0"/>
+          </a:p>
+        </p:txBody>
+      </p:sp>
+      <p:sp>
+        <p:nvSpPr>
+          <p:cNvPr id="15" name="Text 13"/>
+          <p:cNvSpPr txBox="1"/>
+          <p:nvPr/>
+        </p:nvSpPr>
+        <p:spPr>
+          <a:xfrm>
+            <a:off x="7040880" y="2377440"/>
+            <a:ext cx="566928" cy="594360"/>
+          </a:xfrm>
+          <a:prstGeom prst="rect">
+            <a:avLst/>
+          </a:prstGeom>
+          <a:noFill/>
+          <a:ln/>
+        </p:spPr>
+        <p:txBody>
+          <a:bodyPr wrap="square" lIns="0" tIns="0" rIns="0" bIns="0" rtlCol="0" anchor="ctr"/>
+          <a:lstStyle/>
+          <a:p>
+            <a:pPr algn="r" indent="0" marL="0">
+              <a:buNone/>
+            </a:pPr>
+            <a:r>
+              <a:rPr lang="en-US" sz="2000" b="1" dirty="0">
+                <a:solidFill>
+                  <a:srgbClr val="B8323A"/>
+                </a:solidFill>
+                <a:latin typeface="Cambria" pitchFamily="34" charset="0"/>
+                <a:ea typeface="Cambria" pitchFamily="34" charset="-122"/>
+                <a:cs typeface="Cambria" pitchFamily="34" charset="-120"/>
+              </a:rPr>
+              <a:t>51</a:t>
+            </a:r>
+            <a:endParaRPr lang="en-US" sz="2000" dirty="0"/>
+          </a:p>
+        </p:txBody>
+      </p:sp>
+      <p:sp>
+        <p:nvSpPr>
+          <p:cNvPr id="16" name="Shape 14"/>
+          <p:cNvSpPr/>
+          <p:nvPr/>
+        </p:nvSpPr>
+        <p:spPr>
+          <a:xfrm>
+            <a:off x="7991856" y="2286000"/>
+            <a:ext cx="3493008" cy="777240"/>
+          </a:xfrm>
+          <a:prstGeom prst="roundRect">
+            <a:avLst>
+              <a:gd name="adj" fmla="val 7059"/>
+            </a:avLst>
+          </a:prstGeom>
+          <a:solidFill>
+            <a:srgbClr val="1E1A19"/>
+          </a:solidFill>
+          <a:ln w="12700">
+            <a:solidFill>
+              <a:srgbClr val="2C2524"/>
+            </a:solidFill>
+            <a:prstDash val="solid"/>
+          </a:ln>
+        </p:spPr>
+      </p:sp>
+      <p:sp>
+        <p:nvSpPr>
+          <p:cNvPr id="17" name="Text 15"/>
+          <p:cNvSpPr txBox="1"/>
+          <p:nvPr/>
+        </p:nvSpPr>
+        <p:spPr>
+          <a:xfrm>
+            <a:off x="8156448" y="2340864"/>
+            <a:ext cx="2560320" cy="384048"/>
+          </a:xfrm>
+          <a:prstGeom prst="rect">
+            <a:avLst/>
+          </a:prstGeom>
+          <a:noFill/>
+          <a:ln/>
+        </p:spPr>
+        <p:txBody>
+          <a:bodyPr wrap="square" lIns="0" tIns="0" rIns="0" bIns="0" rtlCol="0" anchor="t"/>
+          <a:lstStyle/>
+          <a:p>
+            <a:pPr indent="0" marL="0">
+              <a:buNone/>
+            </a:pPr>
+            <a:r>
+              <a:rPr lang="en-US" sz="1200" b="1" dirty="0">
+                <a:solidFill>
+                  <a:srgbClr val="F4F1F0"/>
+                </a:solidFill>
+                <a:latin typeface="Calibri" pitchFamily="34" charset="0"/>
+                <a:ea typeface="Calibri" pitchFamily="34" charset="-122"/>
+                <a:cs typeface="Calibri" pitchFamily="34" charset="-120"/>
+              </a:rPr>
+              <a:t>Production planning</a:t>
+            </a:r>
+            <a:endParaRPr lang="en-US" sz="1200" dirty="0"/>
+          </a:p>
+        </p:txBody>
+      </p:sp>
+      <p:sp>
+        <p:nvSpPr>
+          <p:cNvPr id="18" name="Text 16"/>
+          <p:cNvSpPr txBox="1"/>
+          <p:nvPr/>
+        </p:nvSpPr>
+        <p:spPr>
+          <a:xfrm>
+            <a:off x="8156448" y="2697480"/>
+            <a:ext cx="2743200" cy="292608"/>
+          </a:xfrm>
+          <a:prstGeom prst="rect">
+            <a:avLst/>
+          </a:prstGeom>
+          <a:noFill/>
+          <a:ln/>
+        </p:spPr>
+        <p:txBody>
+          <a:bodyPr wrap="square" lIns="0" tIns="0" rIns="0" bIns="0" rtlCol="0" anchor="ctr"/>
+          <a:lstStyle/>
+          <a:p>
+            <a:pPr indent="0" marL="0">
+              <a:buNone/>
+            </a:pPr>
+            <a:r>
+              <a:rPr lang="en-US" sz="1100" dirty="0">
+                <a:solidFill>
+                  <a:srgbClr val="A9A09E"/>
+                </a:solidFill>
+                <a:latin typeface="Calibri" pitchFamily="34" charset="0"/>
+                <a:ea typeface="Calibri" pitchFamily="34" charset="-122"/>
+                <a:cs typeface="Calibri" pitchFamily="34" charset="-120"/>
+              </a:rPr>
+              <a:t>2 permissions</a:t>
+            </a:r>
+            <a:endParaRPr lang="en-US" sz="1100" dirty="0"/>
+          </a:p>
+        </p:txBody>
+      </p:sp>
+      <p:sp>
+        <p:nvSpPr>
+          <p:cNvPr id="19" name="Text 17"/>
+          <p:cNvSpPr txBox="1"/>
+          <p:nvPr/>
+        </p:nvSpPr>
+        <p:spPr>
+          <a:xfrm>
+            <a:off x="10753344" y="2377440"/>
+            <a:ext cx="566928" cy="594360"/>
+          </a:xfrm>
+          <a:prstGeom prst="rect">
+            <a:avLst/>
+          </a:prstGeom>
+          <a:noFill/>
+          <a:ln/>
+        </p:spPr>
+        <p:txBody>
+          <a:bodyPr wrap="square" lIns="0" tIns="0" rIns="0" bIns="0" rtlCol="0" anchor="ctr"/>
+          <a:lstStyle/>
+          <a:p>
+            <a:pPr algn="r" indent="0" marL="0">
+              <a:buNone/>
+            </a:pPr>
+            <a:r>
+              <a:rPr lang="en-US" sz="2000" b="1" dirty="0">
+                <a:solidFill>
+                  <a:srgbClr val="B8323A"/>
+                </a:solidFill>
+                <a:latin typeface="Cambria" pitchFamily="34" charset="0"/>
+                <a:ea typeface="Cambria" pitchFamily="34" charset="-122"/>
+                <a:cs typeface="Cambria" pitchFamily="34" charset="-120"/>
+              </a:rPr>
+              <a:t>23</a:t>
+            </a:r>
+            <a:endParaRPr lang="en-US" sz="2000" dirty="0"/>
+          </a:p>
+        </p:txBody>
+      </p:sp>
+      <p:sp>
+        <p:nvSpPr>
+          <p:cNvPr id="20" name="Shape 18"/>
+          <p:cNvSpPr/>
+          <p:nvPr/>
+        </p:nvSpPr>
+        <p:spPr>
+          <a:xfrm>
+            <a:off x="566928" y="3200400"/>
+            <a:ext cx="3493008" cy="777240"/>
+          </a:xfrm>
+          <a:prstGeom prst="roundRect">
+            <a:avLst>
+              <a:gd name="adj" fmla="val 7059"/>
+            </a:avLst>
+          </a:prstGeom>
+          <a:solidFill>
+            <a:srgbClr val="1E1A19"/>
+          </a:solidFill>
+          <a:ln w="12700">
+            <a:solidFill>
+              <a:srgbClr val="2C2524"/>
+            </a:solidFill>
+            <a:prstDash val="solid"/>
+          </a:ln>
+        </p:spPr>
+      </p:sp>
+      <p:sp>
+        <p:nvSpPr>
+          <p:cNvPr id="21" name="Text 19"/>
+          <p:cNvSpPr txBox="1"/>
+          <p:nvPr/>
+        </p:nvSpPr>
+        <p:spPr>
+          <a:xfrm>
+            <a:off x="731520" y="3255264"/>
+            <a:ext cx="2560320" cy="384048"/>
+          </a:xfrm>
+          <a:prstGeom prst="rect">
+            <a:avLst/>
+          </a:prstGeom>
+          <a:noFill/>
+          <a:ln/>
+        </p:spPr>
+        <p:txBody>
+          <a:bodyPr wrap="square" lIns="0" tIns="0" rIns="0" bIns="0" rtlCol="0" anchor="t"/>
+          <a:lstStyle/>
+          <a:p>
+            <a:pPr indent="0" marL="0">
+              <a:buNone/>
+            </a:pPr>
+            <a:r>
+              <a:rPr lang="en-US" sz="1200" b="1" dirty="0">
+                <a:solidFill>
+                  <a:srgbClr val="F4F1F0"/>
+                </a:solidFill>
+                <a:latin typeface="Calibri" pitchFamily="34" charset="0"/>
+                <a:ea typeface="Calibri" pitchFamily="34" charset="-122"/>
+                <a:cs typeface="Calibri" pitchFamily="34" charset="-120"/>
+              </a:rPr>
+              <a:t>First review gate</a:t>
+            </a:r>
+            <a:endParaRPr lang="en-US" sz="1200" dirty="0"/>
+          </a:p>
+        </p:txBody>
+      </p:sp>
+      <p:sp>
+        <p:nvSpPr>
+          <p:cNvPr id="22" name="Text 20"/>
+          <p:cNvSpPr txBox="1"/>
+          <p:nvPr/>
+        </p:nvSpPr>
+        <p:spPr>
+          <a:xfrm>
+            <a:off x="731520" y="3611880"/>
+            <a:ext cx="2743200" cy="292608"/>
+          </a:xfrm>
+          <a:prstGeom prst="rect">
+            <a:avLst/>
+          </a:prstGeom>
+          <a:noFill/>
+          <a:ln/>
+        </p:spPr>
+        <p:txBody>
+          <a:bodyPr wrap="square" lIns="0" tIns="0" rIns="0" bIns="0" rtlCol="0" anchor="ctr"/>
+          <a:lstStyle/>
+          <a:p>
+            <a:pPr indent="0" marL="0">
+              <a:buNone/>
+            </a:pPr>
+            <a:r>
+              <a:rPr lang="en-US" sz="1100" dirty="0">
+                <a:solidFill>
+                  <a:srgbClr val="A9A09E"/>
+                </a:solidFill>
+                <a:latin typeface="Calibri" pitchFamily="34" charset="0"/>
+                <a:ea typeface="Calibri" pitchFamily="34" charset="-122"/>
+                <a:cs typeface="Calibri" pitchFamily="34" charset="-120"/>
+              </a:rPr>
+              <a:t>1 permission</a:t>
+            </a:r>
+            <a:endParaRPr lang="en-US" sz="1100" dirty="0"/>
+          </a:p>
+        </p:txBody>
+      </p:sp>
+      <p:sp>
+        <p:nvSpPr>
+          <p:cNvPr id="23" name="Text 21"/>
+          <p:cNvSpPr txBox="1"/>
+          <p:nvPr/>
+        </p:nvSpPr>
+        <p:spPr>
+          <a:xfrm>
+            <a:off x="3328416" y="3291840"/>
+            <a:ext cx="566928" cy="594360"/>
+          </a:xfrm>
+          <a:prstGeom prst="rect">
+            <a:avLst/>
+          </a:prstGeom>
+          <a:noFill/>
+          <a:ln/>
+        </p:spPr>
+        <p:txBody>
+          <a:bodyPr wrap="square" lIns="0" tIns="0" rIns="0" bIns="0" rtlCol="0" anchor="ctr"/>
+          <a:lstStyle/>
+          <a:p>
+            <a:pPr algn="r" indent="0" marL="0">
+              <a:buNone/>
+            </a:pPr>
+            <a:r>
+              <a:rPr lang="en-US" sz="2000" b="1" dirty="0">
+                <a:solidFill>
+                  <a:srgbClr val="B8323A"/>
+                </a:solidFill>
+                <a:latin typeface="Cambria" pitchFamily="34" charset="0"/>
+                <a:ea typeface="Cambria" pitchFamily="34" charset="-122"/>
+                <a:cs typeface="Cambria" pitchFamily="34" charset="-120"/>
+              </a:rPr>
+              <a:t>23</a:t>
+            </a:r>
+            <a:endParaRPr lang="en-US" sz="2000" dirty="0"/>
+          </a:p>
+        </p:txBody>
+      </p:sp>
+      <p:sp>
+        <p:nvSpPr>
+          <p:cNvPr id="24" name="Shape 22"/>
+          <p:cNvSpPr/>
+          <p:nvPr/>
+        </p:nvSpPr>
+        <p:spPr>
+          <a:xfrm>
+            <a:off x="4279392" y="3200400"/>
+            <a:ext cx="3493008" cy="777240"/>
+          </a:xfrm>
+          <a:prstGeom prst="roundRect">
+            <a:avLst>
+              <a:gd name="adj" fmla="val 7059"/>
+            </a:avLst>
+          </a:prstGeom>
+          <a:solidFill>
+            <a:srgbClr val="1E1A19"/>
+          </a:solidFill>
+          <a:ln w="12700">
+            <a:solidFill>
+              <a:srgbClr val="2C2524"/>
+            </a:solidFill>
+            <a:prstDash val="solid"/>
+          </a:ln>
+        </p:spPr>
+      </p:sp>
+      <p:sp>
+        <p:nvSpPr>
+          <p:cNvPr id="25" name="Text 23"/>
+          <p:cNvSpPr txBox="1"/>
+          <p:nvPr/>
+        </p:nvSpPr>
+        <p:spPr>
+          <a:xfrm>
+            <a:off x="4443984" y="3255264"/>
+            <a:ext cx="2560320" cy="384048"/>
+          </a:xfrm>
+          <a:prstGeom prst="rect">
+            <a:avLst/>
+          </a:prstGeom>
+          <a:noFill/>
+          <a:ln/>
+        </p:spPr>
+        <p:txBody>
+          <a:bodyPr wrap="square" lIns="0" tIns="0" rIns="0" bIns="0" rtlCol="0" anchor="t"/>
+          <a:lstStyle/>
+          <a:p>
+            <a:pPr indent="0" marL="0">
+              <a:buNone/>
+            </a:pPr>
+            <a:r>
+              <a:rPr lang="en-US" sz="1200" b="1" dirty="0">
+                <a:solidFill>
+                  <a:srgbClr val="F4F1F0"/>
+                </a:solidFill>
+                <a:latin typeface="Calibri" pitchFamily="34" charset="0"/>
+                <a:ea typeface="Calibri" pitchFamily="34" charset="-122"/>
+                <a:cs typeface="Calibri" pitchFamily="34" charset="-120"/>
+              </a:rPr>
+              <a:t>Leads and producers</a:t>
+            </a:r>
+            <a:endParaRPr lang="en-US" sz="1200" dirty="0"/>
+          </a:p>
+        </p:txBody>
+      </p:sp>
+      <p:sp>
+        <p:nvSpPr>
+          <p:cNvPr id="26" name="Text 24"/>
+          <p:cNvSpPr txBox="1"/>
+          <p:nvPr/>
+        </p:nvSpPr>
+        <p:spPr>
+          <a:xfrm>
+            <a:off x="4443984" y="3611880"/>
+            <a:ext cx="2743200" cy="292608"/>
+          </a:xfrm>
+          <a:prstGeom prst="rect">
+            <a:avLst/>
+          </a:prstGeom>
+          <a:noFill/>
+          <a:ln/>
+        </p:spPr>
+        <p:txBody>
+          <a:bodyPr wrap="square" lIns="0" tIns="0" rIns="0" bIns="0" rtlCol="0" anchor="ctr"/>
+          <a:lstStyle/>
+          <a:p>
+            <a:pPr indent="0" marL="0">
+              <a:buNone/>
+            </a:pPr>
+            <a:r>
+              <a:rPr lang="en-US" sz="1100" dirty="0">
+                <a:solidFill>
+                  <a:srgbClr val="A9A09E"/>
+                </a:solidFill>
+                <a:latin typeface="Calibri" pitchFamily="34" charset="0"/>
+                <a:ea typeface="Calibri" pitchFamily="34" charset="-122"/>
+                <a:cs typeface="Calibri" pitchFamily="34" charset="-120"/>
+              </a:rPr>
+              <a:t>3 permissions</a:t>
+            </a:r>
+            <a:endParaRPr lang="en-US" sz="1100" dirty="0"/>
+          </a:p>
+        </p:txBody>
+      </p:sp>
+      <p:sp>
+        <p:nvSpPr>
+          <p:cNvPr id="27" name="Text 25"/>
+          <p:cNvSpPr txBox="1"/>
+          <p:nvPr/>
+        </p:nvSpPr>
+        <p:spPr>
+          <a:xfrm>
+            <a:off x="7040880" y="3291840"/>
+            <a:ext cx="566928" cy="594360"/>
+          </a:xfrm>
+          <a:prstGeom prst="rect">
+            <a:avLst/>
+          </a:prstGeom>
+          <a:noFill/>
+          <a:ln/>
+        </p:spPr>
+        <p:txBody>
+          <a:bodyPr wrap="square" lIns="0" tIns="0" rIns="0" bIns="0" rtlCol="0" anchor="ctr"/>
+          <a:lstStyle/>
+          <a:p>
+            <a:pPr algn="r" indent="0" marL="0">
+              <a:buNone/>
+            </a:pPr>
+            <a:r>
+              <a:rPr lang="en-US" sz="2000" b="1" dirty="0">
+                <a:solidFill>
+                  <a:srgbClr val="B8323A"/>
+                </a:solidFill>
+                <a:latin typeface="Cambria" pitchFamily="34" charset="0"/>
+                <a:ea typeface="Cambria" pitchFamily="34" charset="-122"/>
+                <a:cs typeface="Cambria" pitchFamily="34" charset="-120"/>
+              </a:rPr>
+              <a:t>18</a:t>
+            </a:r>
+            <a:endParaRPr lang="en-US" sz="2000" dirty="0"/>
+          </a:p>
+        </p:txBody>
+      </p:sp>
+      <p:sp>
+        <p:nvSpPr>
+          <p:cNvPr id="28" name="Shape 26"/>
+          <p:cNvSpPr/>
+          <p:nvPr/>
+        </p:nvSpPr>
+        <p:spPr>
+          <a:xfrm>
+            <a:off x="7991856" y="3200400"/>
+            <a:ext cx="3493008" cy="777240"/>
+          </a:xfrm>
+          <a:prstGeom prst="roundRect">
+            <a:avLst>
+              <a:gd name="adj" fmla="val 7059"/>
+            </a:avLst>
+          </a:prstGeom>
+          <a:solidFill>
+            <a:srgbClr val="1E1A19"/>
+          </a:solidFill>
+          <a:ln w="12700">
+            <a:solidFill>
+              <a:srgbClr val="2C2524"/>
+            </a:solidFill>
+            <a:prstDash val="solid"/>
+          </a:ln>
+        </p:spPr>
+      </p:sp>
+      <p:sp>
+        <p:nvSpPr>
+          <p:cNvPr id="29" name="Text 27"/>
+          <p:cNvSpPr txBox="1"/>
+          <p:nvPr/>
+        </p:nvSpPr>
+        <p:spPr>
+          <a:xfrm>
+            <a:off x="8156448" y="3255264"/>
+            <a:ext cx="2560320" cy="384048"/>
+          </a:xfrm>
+          <a:prstGeom prst="rect">
+            <a:avLst/>
+          </a:prstGeom>
+          <a:noFill/>
+          <a:ln/>
+        </p:spPr>
+        <p:txBody>
+          <a:bodyPr wrap="square" lIns="0" tIns="0" rIns="0" bIns="0" rtlCol="0" anchor="t"/>
+          <a:lstStyle/>
+          <a:p>
+            <a:pPr indent="0" marL="0">
+              <a:buNone/>
+            </a:pPr>
+            <a:r>
+              <a:rPr lang="en-US" sz="1200" b="1" dirty="0">
+                <a:solidFill>
+                  <a:srgbClr val="F4F1F0"/>
+                </a:solidFill>
+                <a:latin typeface="Calibri" pitchFamily="34" charset="0"/>
+                <a:ea typeface="Calibri" pitchFamily="34" charset="-122"/>
+                <a:cs typeface="Calibri" pitchFamily="34" charset="-120"/>
+              </a:rPr>
+              <a:t>Anyone who supervises people</a:t>
+            </a:r>
+            <a:endParaRPr lang="en-US" sz="1200" dirty="0"/>
+          </a:p>
+        </p:txBody>
+      </p:sp>
+      <p:sp>
+        <p:nvSpPr>
+          <p:cNvPr id="30" name="Text 28"/>
+          <p:cNvSpPr txBox="1"/>
+          <p:nvPr/>
+        </p:nvSpPr>
+        <p:spPr>
+          <a:xfrm>
+            <a:off x="8156448" y="3611880"/>
+            <a:ext cx="2743200" cy="292608"/>
+          </a:xfrm>
+          <a:prstGeom prst="rect">
+            <a:avLst/>
+          </a:prstGeom>
+          <a:noFill/>
+          <a:ln/>
+        </p:spPr>
+        <p:txBody>
+          <a:bodyPr wrap="square" lIns="0" tIns="0" rIns="0" bIns="0" rtlCol="0" anchor="ctr"/>
+          <a:lstStyle/>
+          <a:p>
+            <a:pPr indent="0" marL="0">
+              <a:buNone/>
+            </a:pPr>
+            <a:r>
+              <a:rPr lang="en-US" sz="1100" dirty="0">
+                <a:solidFill>
+                  <a:srgbClr val="A9A09E"/>
+                </a:solidFill>
+                <a:latin typeface="Calibri" pitchFamily="34" charset="0"/>
+                <a:ea typeface="Calibri" pitchFamily="34" charset="-122"/>
+                <a:cs typeface="Calibri" pitchFamily="34" charset="-120"/>
+              </a:rPr>
+              <a:t>1 permission</a:t>
+            </a:r>
+            <a:endParaRPr lang="en-US" sz="1100" dirty="0"/>
+          </a:p>
+        </p:txBody>
+      </p:sp>
+      <p:sp>
+        <p:nvSpPr>
+          <p:cNvPr id="31" name="Text 29"/>
+          <p:cNvSpPr txBox="1"/>
+          <p:nvPr/>
+        </p:nvSpPr>
+        <p:spPr>
+          <a:xfrm>
+            <a:off x="10753344" y="3291840"/>
+            <a:ext cx="566928" cy="594360"/>
+          </a:xfrm>
+          <a:prstGeom prst="rect">
+            <a:avLst/>
+          </a:prstGeom>
+          <a:noFill/>
+          <a:ln/>
+        </p:spPr>
+        <p:txBody>
+          <a:bodyPr wrap="square" lIns="0" tIns="0" rIns="0" bIns="0" rtlCol="0" anchor="ctr"/>
+          <a:lstStyle/>
+          <a:p>
+            <a:pPr algn="r" indent="0" marL="0">
+              <a:buNone/>
+            </a:pPr>
+            <a:r>
+              <a:rPr lang="en-US" sz="2000" b="1" dirty="0">
+                <a:solidFill>
+                  <a:srgbClr val="B8323A"/>
+                </a:solidFill>
+                <a:latin typeface="Cambria" pitchFamily="34" charset="0"/>
+                <a:ea typeface="Cambria" pitchFamily="34" charset="-122"/>
+                <a:cs typeface="Cambria" pitchFamily="34" charset="-120"/>
+              </a:rPr>
+              <a:t>14</a:t>
+            </a:r>
+            <a:endParaRPr lang="en-US" sz="2000" dirty="0"/>
+          </a:p>
+        </p:txBody>
+      </p:sp>
+      <p:sp>
+        <p:nvSpPr>
+          <p:cNvPr id="32" name="Shape 30"/>
+          <p:cNvSpPr/>
+          <p:nvPr/>
+        </p:nvSpPr>
+        <p:spPr>
+          <a:xfrm>
+            <a:off x="566928" y="4114800"/>
+            <a:ext cx="3493008" cy="777240"/>
+          </a:xfrm>
+          <a:prstGeom prst="roundRect">
+            <a:avLst>
+              <a:gd name="adj" fmla="val 7059"/>
+            </a:avLst>
+          </a:prstGeom>
+          <a:solidFill>
+            <a:srgbClr val="1E1A19"/>
+          </a:solidFill>
+          <a:ln w="12700">
+            <a:solidFill>
+              <a:srgbClr val="2C2524"/>
+            </a:solidFill>
+            <a:prstDash val="solid"/>
+          </a:ln>
+        </p:spPr>
+      </p:sp>
+      <p:sp>
+        <p:nvSpPr>
+          <p:cNvPr id="33" name="Text 31"/>
+          <p:cNvSpPr txBox="1"/>
+          <p:nvPr/>
+        </p:nvSpPr>
+        <p:spPr>
+          <a:xfrm>
+            <a:off x="731520" y="4169664"/>
+            <a:ext cx="2560320" cy="384048"/>
+          </a:xfrm>
+          <a:prstGeom prst="rect">
+            <a:avLst/>
+          </a:prstGeom>
+          <a:noFill/>
+          <a:ln/>
+        </p:spPr>
+        <p:txBody>
+          <a:bodyPr wrap="square" lIns="0" tIns="0" rIns="0" bIns="0" rtlCol="0" anchor="t"/>
+          <a:lstStyle/>
+          <a:p>
+            <a:pPr indent="0" marL="0">
+              <a:buNone/>
+            </a:pPr>
+            <a:r>
+              <a:rPr lang="en-US" sz="1200" b="1" dirty="0">
+                <a:solidFill>
+                  <a:srgbClr val="F4F1F0"/>
+                </a:solidFill>
+                <a:latin typeface="Calibri" pitchFamily="34" charset="0"/>
+                <a:ea typeface="Calibri" pitchFamily="34" charset="-122"/>
+                <a:cs typeface="Calibri" pitchFamily="34" charset="-120"/>
+              </a:rPr>
+              <a:t>Delivery</a:t>
+            </a:r>
+            <a:endParaRPr lang="en-US" sz="1200" dirty="0"/>
+          </a:p>
+        </p:txBody>
+      </p:sp>
+      <p:sp>
+        <p:nvSpPr>
+          <p:cNvPr id="34" name="Text 32"/>
+          <p:cNvSpPr txBox="1"/>
+          <p:nvPr/>
+        </p:nvSpPr>
+        <p:spPr>
+          <a:xfrm>
+            <a:off x="731520" y="4526280"/>
+            <a:ext cx="2743200" cy="292608"/>
+          </a:xfrm>
+          <a:prstGeom prst="rect">
+            <a:avLst/>
+          </a:prstGeom>
+          <a:noFill/>
+          <a:ln/>
+        </p:spPr>
+        <p:txBody>
+          <a:bodyPr wrap="square" lIns="0" tIns="0" rIns="0" bIns="0" rtlCol="0" anchor="ctr"/>
+          <a:lstStyle/>
+          <a:p>
+            <a:pPr indent="0" marL="0">
+              <a:buNone/>
+            </a:pPr>
+            <a:r>
+              <a:rPr lang="en-US" sz="1100" dirty="0">
+                <a:solidFill>
+                  <a:srgbClr val="A9A09E"/>
+                </a:solidFill>
+                <a:latin typeface="Calibri" pitchFamily="34" charset="0"/>
+                <a:ea typeface="Calibri" pitchFamily="34" charset="-122"/>
+                <a:cs typeface="Calibri" pitchFamily="34" charset="-120"/>
+              </a:rPr>
+              <a:t>1 permission</a:t>
+            </a:r>
+            <a:endParaRPr lang="en-US" sz="1100" dirty="0"/>
+          </a:p>
+        </p:txBody>
+      </p:sp>
+      <p:sp>
+        <p:nvSpPr>
+          <p:cNvPr id="35" name="Text 33"/>
+          <p:cNvSpPr txBox="1"/>
+          <p:nvPr/>
+        </p:nvSpPr>
+        <p:spPr>
+          <a:xfrm>
+            <a:off x="3328416" y="4206240"/>
+            <a:ext cx="566928" cy="594360"/>
+          </a:xfrm>
+          <a:prstGeom prst="rect">
+            <a:avLst/>
+          </a:prstGeom>
+          <a:noFill/>
+          <a:ln/>
+        </p:spPr>
+        <p:txBody>
+          <a:bodyPr wrap="square" lIns="0" tIns="0" rIns="0" bIns="0" rtlCol="0" anchor="ctr"/>
+          <a:lstStyle/>
+          <a:p>
+            <a:pPr algn="r" indent="0" marL="0">
+              <a:buNone/>
+            </a:pPr>
+            <a:r>
+              <a:rPr lang="en-US" sz="2000" b="1" dirty="0">
+                <a:solidFill>
+                  <a:srgbClr val="B8323A"/>
+                </a:solidFill>
+                <a:latin typeface="Cambria" pitchFamily="34" charset="0"/>
+                <a:ea typeface="Cambria" pitchFamily="34" charset="-122"/>
+                <a:cs typeface="Cambria" pitchFamily="34" charset="-120"/>
+              </a:rPr>
+              <a:t>18</a:t>
+            </a:r>
+            <a:endParaRPr lang="en-US" sz="2000" dirty="0"/>
+          </a:p>
+        </p:txBody>
+      </p:sp>
+      <p:sp>
+        <p:nvSpPr>
+          <p:cNvPr id="36" name="Shape 34"/>
+          <p:cNvSpPr/>
+          <p:nvPr/>
+        </p:nvSpPr>
+        <p:spPr>
+          <a:xfrm>
+            <a:off x="4279392" y="4114800"/>
+            <a:ext cx="3493008" cy="777240"/>
+          </a:xfrm>
+          <a:prstGeom prst="roundRect">
+            <a:avLst>
+              <a:gd name="adj" fmla="val 7059"/>
+            </a:avLst>
+          </a:prstGeom>
+          <a:solidFill>
+            <a:srgbClr val="1E1A19"/>
+          </a:solidFill>
+          <a:ln w="12700">
+            <a:solidFill>
+              <a:srgbClr val="2C2524"/>
+            </a:solidFill>
+            <a:prstDash val="solid"/>
+          </a:ln>
+        </p:spPr>
+      </p:sp>
+      <p:sp>
+        <p:nvSpPr>
+          <p:cNvPr id="37" name="Text 35"/>
+          <p:cNvSpPr txBox="1"/>
+          <p:nvPr/>
+        </p:nvSpPr>
+        <p:spPr>
+          <a:xfrm>
+            <a:off x="4443984" y="4169664"/>
+            <a:ext cx="2560320" cy="384048"/>
+          </a:xfrm>
+          <a:prstGeom prst="rect">
+            <a:avLst/>
+          </a:prstGeom>
+          <a:noFill/>
+          <a:ln/>
+        </p:spPr>
+        <p:txBody>
+          <a:bodyPr wrap="square" lIns="0" tIns="0" rIns="0" bIns="0" rtlCol="0" anchor="t"/>
+          <a:lstStyle/>
+          <a:p>
+            <a:pPr indent="0" marL="0">
+              <a:buNone/>
+            </a:pPr>
+            <a:r>
+              <a:rPr lang="en-US" sz="1200" b="1" dirty="0">
+                <a:solidFill>
+                  <a:srgbClr val="F4F1F0"/>
+                </a:solidFill>
+                <a:latin typeface="Calibri" pitchFamily="34" charset="0"/>
+                <a:ea typeface="Calibri" pitchFamily="34" charset="-122"/>
+                <a:cs typeface="Calibri" pitchFamily="34" charset="-120"/>
+              </a:rPr>
+              <a:t>Creative direction</a:t>
+            </a:r>
+            <a:endParaRPr lang="en-US" sz="1200" dirty="0"/>
+          </a:p>
+        </p:txBody>
+      </p:sp>
+      <p:sp>
+        <p:nvSpPr>
+          <p:cNvPr id="38" name="Text 36"/>
+          <p:cNvSpPr txBox="1"/>
+          <p:nvPr/>
+        </p:nvSpPr>
+        <p:spPr>
+          <a:xfrm>
+            <a:off x="4443984" y="4526280"/>
+            <a:ext cx="2743200" cy="292608"/>
+          </a:xfrm>
+          <a:prstGeom prst="rect">
+            <a:avLst/>
+          </a:prstGeom>
+          <a:noFill/>
+          <a:ln/>
+        </p:spPr>
+        <p:txBody>
+          <a:bodyPr wrap="square" lIns="0" tIns="0" rIns="0" bIns="0" rtlCol="0" anchor="ctr"/>
+          <a:lstStyle/>
+          <a:p>
+            <a:pPr indent="0" marL="0">
+              <a:buNone/>
+            </a:pPr>
+            <a:r>
+              <a:rPr lang="en-US" sz="1100" dirty="0">
+                <a:solidFill>
+                  <a:srgbClr val="A9A09E"/>
+                </a:solidFill>
+                <a:latin typeface="Calibri" pitchFamily="34" charset="0"/>
+                <a:ea typeface="Calibri" pitchFamily="34" charset="-122"/>
+                <a:cs typeface="Calibri" pitchFamily="34" charset="-120"/>
+              </a:rPr>
+              <a:t>2 permissions</a:t>
+            </a:r>
+            <a:endParaRPr lang="en-US" sz="1100" dirty="0"/>
+          </a:p>
+        </p:txBody>
+      </p:sp>
+      <p:sp>
+        <p:nvSpPr>
+          <p:cNvPr id="39" name="Text 37"/>
+          <p:cNvSpPr txBox="1"/>
+          <p:nvPr/>
+        </p:nvSpPr>
+        <p:spPr>
+          <a:xfrm>
+            <a:off x="7040880" y="4206240"/>
+            <a:ext cx="566928" cy="594360"/>
+          </a:xfrm>
+          <a:prstGeom prst="rect">
+            <a:avLst/>
+          </a:prstGeom>
+          <a:noFill/>
+          <a:ln/>
+        </p:spPr>
+        <p:txBody>
+          <a:bodyPr wrap="square" lIns="0" tIns="0" rIns="0" bIns="0" rtlCol="0" anchor="ctr"/>
+          <a:lstStyle/>
+          <a:p>
+            <a:pPr algn="r" indent="0" marL="0">
+              <a:buNone/>
+            </a:pPr>
+            <a:r>
+              <a:rPr lang="en-US" sz="2000" b="1" dirty="0">
+                <a:solidFill>
+                  <a:srgbClr val="B8323A"/>
+                </a:solidFill>
+                <a:latin typeface="Cambria" pitchFamily="34" charset="0"/>
+                <a:ea typeface="Cambria" pitchFamily="34" charset="-122"/>
+                <a:cs typeface="Cambria" pitchFamily="34" charset="-120"/>
+              </a:rPr>
+              <a:t>9</a:t>
+            </a:r>
+            <a:endParaRPr lang="en-US" sz="2000" dirty="0"/>
+          </a:p>
+        </p:txBody>
+      </p:sp>
+      <p:sp>
+        <p:nvSpPr>
+          <p:cNvPr id="40" name="Shape 38"/>
+          <p:cNvSpPr/>
+          <p:nvPr/>
+        </p:nvSpPr>
+        <p:spPr>
+          <a:xfrm>
+            <a:off x="7991856" y="4114800"/>
+            <a:ext cx="3493008" cy="777240"/>
+          </a:xfrm>
+          <a:prstGeom prst="roundRect">
+            <a:avLst>
+              <a:gd name="adj" fmla="val 7059"/>
+            </a:avLst>
+          </a:prstGeom>
+          <a:solidFill>
+            <a:srgbClr val="1E1A19"/>
+          </a:solidFill>
+          <a:ln w="12700">
+            <a:solidFill>
+              <a:srgbClr val="2C2524"/>
+            </a:solidFill>
+            <a:prstDash val="solid"/>
+          </a:ln>
+        </p:spPr>
+      </p:sp>
+      <p:sp>
+        <p:nvSpPr>
+          <p:cNvPr id="41" name="Text 39"/>
+          <p:cNvSpPr txBox="1"/>
+          <p:nvPr/>
+        </p:nvSpPr>
+        <p:spPr>
+          <a:xfrm>
+            <a:off x="8156448" y="4169664"/>
+            <a:ext cx="2560320" cy="384048"/>
+          </a:xfrm>
+          <a:prstGeom prst="rect">
+            <a:avLst/>
+          </a:prstGeom>
+          <a:noFill/>
+          <a:ln/>
+        </p:spPr>
+        <p:txBody>
+          <a:bodyPr wrap="square" lIns="0" tIns="0" rIns="0" bIns="0" rtlCol="0" anchor="t"/>
+          <a:lstStyle/>
+          <a:p>
+            <a:pPr indent="0" marL="0">
+              <a:buNone/>
+            </a:pPr>
+            <a:r>
+              <a:rPr lang="en-US" sz="1200" b="1" dirty="0">
+                <a:solidFill>
+                  <a:srgbClr val="F4F1F0"/>
+                </a:solidFill>
+                <a:latin typeface="Calibri" pitchFamily="34" charset="0"/>
+                <a:ea typeface="Calibri" pitchFamily="34" charset="-122"/>
+                <a:cs typeface="Calibri" pitchFamily="34" charset="-120"/>
+              </a:rPr>
+              <a:t>Administration</a:t>
+            </a:r>
+            <a:endParaRPr lang="en-US" sz="1200" dirty="0"/>
+          </a:p>
+        </p:txBody>
+      </p:sp>
+      <p:sp>
+        <p:nvSpPr>
+          <p:cNvPr id="42" name="Text 40"/>
+          <p:cNvSpPr txBox="1"/>
+          <p:nvPr/>
+        </p:nvSpPr>
+        <p:spPr>
+          <a:xfrm>
+            <a:off x="8156448" y="4526280"/>
+            <a:ext cx="2743200" cy="292608"/>
+          </a:xfrm>
+          <a:prstGeom prst="rect">
+            <a:avLst/>
+          </a:prstGeom>
+          <a:noFill/>
+          <a:ln/>
+        </p:spPr>
+        <p:txBody>
+          <a:bodyPr wrap="square" lIns="0" tIns="0" rIns="0" bIns="0" rtlCol="0" anchor="ctr"/>
+          <a:lstStyle/>
+          <a:p>
+            <a:pPr indent="0" marL="0">
+              <a:buNone/>
+            </a:pPr>
+            <a:r>
+              <a:rPr lang="en-US" sz="1100" dirty="0">
+                <a:solidFill>
+                  <a:srgbClr val="A9A09E"/>
+                </a:solidFill>
+                <a:latin typeface="Calibri" pitchFamily="34" charset="0"/>
+                <a:ea typeface="Calibri" pitchFamily="34" charset="-122"/>
+                <a:cs typeface="Calibri" pitchFamily="34" charset="-120"/>
+              </a:rPr>
+              <a:t>18 permissions</a:t>
+            </a:r>
+            <a:endParaRPr lang="en-US" sz="1100" dirty="0"/>
+          </a:p>
+        </p:txBody>
+      </p:sp>
+      <p:sp>
+        <p:nvSpPr>
+          <p:cNvPr id="43" name="Text 41"/>
+          <p:cNvSpPr txBox="1"/>
+          <p:nvPr/>
+        </p:nvSpPr>
+        <p:spPr>
+          <a:xfrm>
+            <a:off x="10753344" y="4206240"/>
+            <a:ext cx="566928" cy="594360"/>
+          </a:xfrm>
+          <a:prstGeom prst="rect">
+            <a:avLst/>
+          </a:prstGeom>
+          <a:noFill/>
+          <a:ln/>
+        </p:spPr>
+        <p:txBody>
+          <a:bodyPr wrap="square" lIns="0" tIns="0" rIns="0" bIns="0" rtlCol="0" anchor="ctr"/>
+          <a:lstStyle/>
+          <a:p>
+            <a:pPr algn="r" indent="0" marL="0">
+              <a:buNone/>
+            </a:pPr>
+            <a:r>
+              <a:rPr lang="en-US" sz="2000" b="1" dirty="0">
+                <a:solidFill>
+                  <a:srgbClr val="B8323A"/>
+                </a:solidFill>
+                <a:latin typeface="Cambria" pitchFamily="34" charset="0"/>
+                <a:ea typeface="Cambria" pitchFamily="34" charset="-122"/>
+                <a:cs typeface="Cambria" pitchFamily="34" charset="-120"/>
+              </a:rPr>
+              <a:t>8</a:t>
+            </a:r>
+            <a:endParaRPr lang="en-US" sz="2000" dirty="0"/>
+          </a:p>
+        </p:txBody>
+      </p:sp>
+      <p:sp>
+        <p:nvSpPr>
+          <p:cNvPr id="44" name="Shape 42"/>
+          <p:cNvSpPr/>
+          <p:nvPr/>
+        </p:nvSpPr>
+        <p:spPr>
+          <a:xfrm>
+            <a:off x="566928" y="5029200"/>
+            <a:ext cx="3493008" cy="777240"/>
+          </a:xfrm>
+          <a:prstGeom prst="roundRect">
+            <a:avLst>
+              <a:gd name="adj" fmla="val 7059"/>
+            </a:avLst>
+          </a:prstGeom>
+          <a:solidFill>
+            <a:srgbClr val="1E1A19"/>
+          </a:solidFill>
+          <a:ln w="12700">
+            <a:solidFill>
+              <a:srgbClr val="2C2524"/>
+            </a:solidFill>
+            <a:prstDash val="solid"/>
+          </a:ln>
+        </p:spPr>
+      </p:sp>
+      <p:sp>
+        <p:nvSpPr>
+          <p:cNvPr id="45" name="Text 43"/>
+          <p:cNvSpPr txBox="1"/>
+          <p:nvPr/>
+        </p:nvSpPr>
+        <p:spPr>
+          <a:xfrm>
+            <a:off x="731520" y="5084064"/>
+            <a:ext cx="2560320" cy="384048"/>
+          </a:xfrm>
+          <a:prstGeom prst="rect">
+            <a:avLst/>
+          </a:prstGeom>
+          <a:noFill/>
+          <a:ln/>
+        </p:spPr>
+        <p:txBody>
+          <a:bodyPr wrap="square" lIns="0" tIns="0" rIns="0" bIns="0" rtlCol="0" anchor="t"/>
+          <a:lstStyle/>
+          <a:p>
+            <a:pPr indent="0" marL="0">
+              <a:buNone/>
+            </a:pPr>
+            <a:r>
+              <a:rPr lang="en-US" sz="1200" b="1" dirty="0">
+                <a:solidFill>
+                  <a:srgbClr val="F4F1F0"/>
+                </a:solidFill>
+                <a:latin typeface="Calibri" pitchFamily="34" charset="0"/>
+                <a:ea typeface="Calibri" pitchFamily="34" charset="-122"/>
+                <a:cs typeface="Calibri" pitchFamily="34" charset="-120"/>
+              </a:rPr>
+              <a:t>Studio leadership</a:t>
+            </a:r>
+            <a:endParaRPr lang="en-US" sz="1200" dirty="0"/>
+          </a:p>
+        </p:txBody>
+      </p:sp>
+      <p:sp>
+        <p:nvSpPr>
+          <p:cNvPr id="46" name="Text 44"/>
+          <p:cNvSpPr txBox="1"/>
+          <p:nvPr/>
+        </p:nvSpPr>
+        <p:spPr>
+          <a:xfrm>
+            <a:off x="731520" y="5440680"/>
+            <a:ext cx="2743200" cy="292608"/>
+          </a:xfrm>
+          <a:prstGeom prst="rect">
+            <a:avLst/>
+          </a:prstGeom>
+          <a:noFill/>
+          <a:ln/>
+        </p:spPr>
+        <p:txBody>
+          <a:bodyPr wrap="square" lIns="0" tIns="0" rIns="0" bIns="0" rtlCol="0" anchor="ctr"/>
+          <a:lstStyle/>
+          <a:p>
+            <a:pPr indent="0" marL="0">
+              <a:buNone/>
+            </a:pPr>
+            <a:r>
+              <a:rPr lang="en-US" sz="1100" dirty="0">
+                <a:solidFill>
+                  <a:srgbClr val="A9A09E"/>
+                </a:solidFill>
+                <a:latin typeface="Calibri" pitchFamily="34" charset="0"/>
+                <a:ea typeface="Calibri" pitchFamily="34" charset="-122"/>
+                <a:cs typeface="Calibri" pitchFamily="34" charset="-120"/>
+              </a:rPr>
+              <a:t>15 permissions</a:t>
+            </a:r>
+            <a:endParaRPr lang="en-US" sz="1100" dirty="0"/>
+          </a:p>
+        </p:txBody>
+      </p:sp>
+      <p:sp>
+        <p:nvSpPr>
+          <p:cNvPr id="47" name="Text 45"/>
+          <p:cNvSpPr txBox="1"/>
+          <p:nvPr/>
+        </p:nvSpPr>
+        <p:spPr>
+          <a:xfrm>
+            <a:off x="3328416" y="5120640"/>
+            <a:ext cx="566928" cy="594360"/>
+          </a:xfrm>
+          <a:prstGeom prst="rect">
+            <a:avLst/>
+          </a:prstGeom>
+          <a:noFill/>
+          <a:ln/>
+        </p:spPr>
+        <p:txBody>
+          <a:bodyPr wrap="square" lIns="0" tIns="0" rIns="0" bIns="0" rtlCol="0" anchor="ctr"/>
+          <a:lstStyle/>
+          <a:p>
+            <a:pPr algn="r" indent="0" marL="0">
+              <a:buNone/>
+            </a:pPr>
+            <a:r>
+              <a:rPr lang="en-US" sz="2000" b="1" dirty="0">
+                <a:solidFill>
+                  <a:srgbClr val="B8323A"/>
+                </a:solidFill>
+                <a:latin typeface="Cambria" pitchFamily="34" charset="0"/>
+                <a:ea typeface="Cambria" pitchFamily="34" charset="-122"/>
+                <a:cs typeface="Cambria" pitchFamily="34" charset="-120"/>
+              </a:rPr>
+              <a:t>7</a:t>
+            </a:r>
+            <a:endParaRPr lang="en-US" sz="2000" dirty="0"/>
+          </a:p>
+        </p:txBody>
+      </p:sp>
+      <p:sp>
+        <p:nvSpPr>
+          <p:cNvPr id="48" name="Shape 46"/>
+          <p:cNvSpPr/>
+          <p:nvPr/>
+        </p:nvSpPr>
+        <p:spPr>
+          <a:xfrm>
+            <a:off x="4279392" y="5029200"/>
+            <a:ext cx="3493008" cy="777240"/>
+          </a:xfrm>
+          <a:prstGeom prst="roundRect">
+            <a:avLst>
+              <a:gd name="adj" fmla="val 7059"/>
+            </a:avLst>
+          </a:prstGeom>
+          <a:solidFill>
+            <a:srgbClr val="1E1A19"/>
+          </a:solidFill>
+          <a:ln w="12700">
+            <a:solidFill>
+              <a:srgbClr val="2C2524"/>
+            </a:solidFill>
+            <a:prstDash val="solid"/>
+          </a:ln>
+        </p:spPr>
+      </p:sp>
+      <p:sp>
+        <p:nvSpPr>
+          <p:cNvPr id="49" name="Text 47"/>
+          <p:cNvSpPr txBox="1"/>
+          <p:nvPr/>
+        </p:nvSpPr>
+        <p:spPr>
+          <a:xfrm>
+            <a:off x="4443984" y="5084064"/>
+            <a:ext cx="2560320" cy="384048"/>
+          </a:xfrm>
+          <a:prstGeom prst="rect">
+            <a:avLst/>
+          </a:prstGeom>
+          <a:noFill/>
+          <a:ln/>
+        </p:spPr>
+        <p:txBody>
+          <a:bodyPr wrap="square" lIns="0" tIns="0" rIns="0" bIns="0" rtlCol="0" anchor="t"/>
+          <a:lstStyle/>
+          <a:p>
+            <a:pPr indent="0" marL="0">
+              <a:buNone/>
+            </a:pPr>
+            <a:r>
+              <a:rPr lang="en-US" sz="1200" b="1" dirty="0">
+                <a:solidFill>
+                  <a:srgbClr val="F4F1F0"/>
+                </a:solidFill>
+                <a:latin typeface="Calibri" pitchFamily="34" charset="0"/>
+                <a:ea typeface="Calibri" pitchFamily="34" charset="-122"/>
+                <a:cs typeface="Calibri" pitchFamily="34" charset="-120"/>
+              </a:rPr>
+              <a:t>Creative Art Director and Super Admin</a:t>
+            </a:r>
+            <a:endParaRPr lang="en-US" sz="1200" dirty="0"/>
+          </a:p>
+        </p:txBody>
+      </p:sp>
+      <p:sp>
+        <p:nvSpPr>
+          <p:cNvPr id="50" name="Text 48"/>
+          <p:cNvSpPr txBox="1"/>
+          <p:nvPr/>
+        </p:nvSpPr>
+        <p:spPr>
+          <a:xfrm>
+            <a:off x="4443984" y="5440680"/>
+            <a:ext cx="2743200" cy="292608"/>
+          </a:xfrm>
+          <a:prstGeom prst="rect">
+            <a:avLst/>
+          </a:prstGeom>
+          <a:noFill/>
+          <a:ln/>
+        </p:spPr>
+        <p:txBody>
+          <a:bodyPr wrap="square" lIns="0" tIns="0" rIns="0" bIns="0" rtlCol="0" anchor="ctr"/>
+          <a:lstStyle/>
+          <a:p>
+            <a:pPr indent="0" marL="0">
+              <a:buNone/>
+            </a:pPr>
+            <a:r>
+              <a:rPr lang="en-US" sz="1100" dirty="0">
+                <a:solidFill>
+                  <a:srgbClr val="A9A09E"/>
+                </a:solidFill>
+                <a:latin typeface="Calibri" pitchFamily="34" charset="0"/>
+                <a:ea typeface="Calibri" pitchFamily="34" charset="-122"/>
+                <a:cs typeface="Calibri" pitchFamily="34" charset="-120"/>
+              </a:rPr>
+              <a:t>3 permissions</a:t>
+            </a:r>
+            <a:endParaRPr lang="en-US" sz="1100" dirty="0"/>
+          </a:p>
+        </p:txBody>
+      </p:sp>
+      <p:sp>
+        <p:nvSpPr>
+          <p:cNvPr id="51" name="Text 49"/>
+          <p:cNvSpPr txBox="1"/>
+          <p:nvPr/>
+        </p:nvSpPr>
+        <p:spPr>
+          <a:xfrm>
+            <a:off x="7040880" y="5120640"/>
+            <a:ext cx="566928" cy="594360"/>
+          </a:xfrm>
+          <a:prstGeom prst="rect">
+            <a:avLst/>
+          </a:prstGeom>
+          <a:noFill/>
+          <a:ln/>
+        </p:spPr>
+        <p:txBody>
+          <a:bodyPr wrap="square" lIns="0" tIns="0" rIns="0" bIns="0" rtlCol="0" anchor="ctr"/>
+          <a:lstStyle/>
+          <a:p>
+            <a:pPr algn="r" indent="0" marL="0">
+              <a:buNone/>
+            </a:pPr>
+            <a:r>
+              <a:rPr lang="en-US" sz="2000" b="1" dirty="0">
+                <a:solidFill>
+                  <a:srgbClr val="B8323A"/>
+                </a:solidFill>
+                <a:latin typeface="Cambria" pitchFamily="34" charset="0"/>
+                <a:ea typeface="Cambria" pitchFamily="34" charset="-122"/>
+                <a:cs typeface="Cambria" pitchFamily="34" charset="-120"/>
+              </a:rPr>
+              <a:t>2</a:t>
+            </a:r>
+            <a:endParaRPr lang="en-US" sz="2000" dirty="0"/>
+          </a:p>
+        </p:txBody>
+      </p:sp>
+      <p:sp>
+        <p:nvSpPr>
+          <p:cNvPr id="52" name="Shape 50"/>
+          <p:cNvSpPr/>
+          <p:nvPr/>
+        </p:nvSpPr>
+        <p:spPr>
+          <a:xfrm>
+            <a:off x="7991856" y="5029200"/>
+            <a:ext cx="3493008" cy="777240"/>
+          </a:xfrm>
+          <a:prstGeom prst="roundRect">
+            <a:avLst>
+              <a:gd name="adj" fmla="val 7059"/>
+            </a:avLst>
+          </a:prstGeom>
+          <a:solidFill>
+            <a:srgbClr val="1E1A19"/>
+          </a:solidFill>
+          <a:ln w="12700">
+            <a:solidFill>
+              <a:srgbClr val="2C2524"/>
+            </a:solidFill>
+            <a:prstDash val="solid"/>
+          </a:ln>
+        </p:spPr>
+      </p:sp>
+      <p:sp>
+        <p:nvSpPr>
+          <p:cNvPr id="53" name="Text 51"/>
+          <p:cNvSpPr txBox="1"/>
+          <p:nvPr/>
+        </p:nvSpPr>
+        <p:spPr>
+          <a:xfrm>
+            <a:off x="8156448" y="5084064"/>
+            <a:ext cx="2560320" cy="384048"/>
+          </a:xfrm>
+          <a:prstGeom prst="rect">
+            <a:avLst/>
+          </a:prstGeom>
+          <a:noFill/>
+          <a:ln/>
+        </p:spPr>
+        <p:txBody>
+          <a:bodyPr wrap="square" lIns="0" tIns="0" rIns="0" bIns="0" rtlCol="0" anchor="t"/>
+          <a:lstStyle/>
+          <a:p>
+            <a:pPr indent="0" marL="0">
+              <a:buNone/>
+            </a:pPr>
+            <a:r>
+              <a:rPr lang="en-US" sz="1200" b="1" dirty="0">
+                <a:solidFill>
+                  <a:srgbClr val="F4F1F0"/>
+                </a:solidFill>
+                <a:latin typeface="Calibri" pitchFamily="34" charset="0"/>
+                <a:ea typeface="Calibri" pitchFamily="34" charset="-122"/>
+                <a:cs typeface="Calibri" pitchFamily="34" charset="-120"/>
+              </a:rPr>
+              <a:t>Super Admin only</a:t>
+            </a:r>
+            <a:endParaRPr lang="en-US" sz="1200" dirty="0"/>
+          </a:p>
+        </p:txBody>
+      </p:sp>
+      <p:sp>
+        <p:nvSpPr>
+          <p:cNvPr id="54" name="Text 52"/>
+          <p:cNvSpPr txBox="1"/>
+          <p:nvPr/>
+        </p:nvSpPr>
+        <p:spPr>
+          <a:xfrm>
+            <a:off x="8156448" y="5440680"/>
+            <a:ext cx="2743200" cy="292608"/>
+          </a:xfrm>
+          <a:prstGeom prst="rect">
+            <a:avLst/>
+          </a:prstGeom>
+          <a:noFill/>
+          <a:ln/>
+        </p:spPr>
+        <p:txBody>
+          <a:bodyPr wrap="square" lIns="0" tIns="0" rIns="0" bIns="0" rtlCol="0" anchor="ctr"/>
+          <a:lstStyle/>
+          <a:p>
+            <a:pPr indent="0" marL="0">
+              <a:buNone/>
+            </a:pPr>
+            <a:r>
+              <a:rPr lang="en-US" sz="1100" dirty="0">
+                <a:solidFill>
+                  <a:srgbClr val="A9A09E"/>
+                </a:solidFill>
+                <a:latin typeface="Calibri" pitchFamily="34" charset="0"/>
+                <a:ea typeface="Calibri" pitchFamily="34" charset="-122"/>
+                <a:cs typeface="Calibri" pitchFamily="34" charset="-120"/>
+              </a:rPr>
+              <a:t>8 permissions</a:t>
+            </a:r>
+            <a:endParaRPr lang="en-US" sz="1100" dirty="0"/>
+          </a:p>
+        </p:txBody>
+      </p:sp>
+      <p:sp>
+        <p:nvSpPr>
+          <p:cNvPr id="55" name="Text 53"/>
+          <p:cNvSpPr txBox="1"/>
+          <p:nvPr/>
+        </p:nvSpPr>
+        <p:spPr>
+          <a:xfrm>
+            <a:off x="10753344" y="5120640"/>
+            <a:ext cx="566928" cy="594360"/>
+          </a:xfrm>
+          <a:prstGeom prst="rect">
+            <a:avLst/>
+          </a:prstGeom>
+          <a:noFill/>
+          <a:ln/>
+        </p:spPr>
+        <p:txBody>
+          <a:bodyPr wrap="square" lIns="0" tIns="0" rIns="0" bIns="0" rtlCol="0" anchor="ctr"/>
+          <a:lstStyle/>
+          <a:p>
+            <a:pPr algn="r" indent="0" marL="0">
+              <a:buNone/>
+            </a:pPr>
+            <a:r>
+              <a:rPr lang="en-US" sz="2000" b="1" dirty="0">
+                <a:solidFill>
+                  <a:srgbClr val="B8323A"/>
+                </a:solidFill>
+                <a:latin typeface="Cambria" pitchFamily="34" charset="0"/>
+                <a:ea typeface="Cambria" pitchFamily="34" charset="-122"/>
+                <a:cs typeface="Cambria" pitchFamily="34" charset="-120"/>
+              </a:rPr>
+              <a:t>1</a:t>
+            </a:r>
+            <a:endParaRPr lang="en-US" sz="2000" dirty="0"/>
+          </a:p>
+        </p:txBody>
+      </p:sp>
+      <p:sp>
+        <p:nvSpPr>
+          <p:cNvPr id="56" name="Text 54"/>
+          <p:cNvSpPr txBox="1"/>
+          <p:nvPr/>
+        </p:nvSpPr>
+        <p:spPr>
+          <a:xfrm>
+            <a:off x="566928" y="5989320"/>
+            <a:ext cx="10881360" cy="548640"/>
+          </a:xfrm>
+          <a:prstGeom prst="rect">
+            <a:avLst/>
+          </a:prstGeom>
+          <a:noFill/>
+          <a:ln/>
+        </p:spPr>
+        <p:txBody>
+          <a:bodyPr wrap="square" lIns="0" tIns="0" rIns="0" bIns="0" rtlCol="0" anchor="ctr"/>
+          <a:lstStyle/>
+          <a:p>
+            <a:pPr indent="0" marL="0">
+              <a:buNone/>
+            </a:pPr>
+            <a:r>
+              <a:rPr lang="en-US" sz="1300" dirty="0">
+                <a:solidFill>
+                  <a:srgbClr val="A9A09E"/>
+                </a:solidFill>
+                <a:latin typeface="Calibri" pitchFamily="34" charset="0"/>
+                <a:ea typeface="Calibri" pitchFamily="34" charset="-122"/>
+                <a:cs typeface="Calibri" pitchFamily="34" charset="-120"/>
+              </a:rPr>
+              <a:t>The large number on each card is how many designations hold that band. Super Admin holds everything, including any permission added in future, without anybody switching it on.</a:t>
+            </a:r>
+            <a:endParaRPr lang="en-US" sz="1300" dirty="0"/>
           </a:p>
         </p:txBody>
       </p:sp>
@@ -14606,7 +14743,7 @@
                 <a:ea typeface="Calibri" pitchFamily="34" charset="-122"/>
                 <a:cs typeface="Calibri" pitchFamily="34" charset="-120"/>
               </a:rPr>
-              <a:t>ACTIVITY LOG</a:t>
+              <a:t>PERMISSIONS</a:t>
             </a:r>
             <a:endParaRPr lang="en-US" sz="1100" dirty="0"/>
           </a:p>
@@ -14645,7 +14782,7 @@
                 <a:ea typeface="Cambria" pitchFamily="34" charset="-122"/>
                 <a:cs typeface="Cambria" pitchFamily="34" charset="-120"/>
               </a:rPr>
-              <a:t>One record that crosses every module</a:t>
+              <a:t>One screen decides what everybody else may do</a:t>
             </a:r>
             <a:endParaRPr lang="en-US" sz="3400" dirty="0"/>
           </a:p>
@@ -14691,7 +14828,7 @@
                 <a:ea typeface="Calibri" pitchFamily="34" charset="-122"/>
                 <a:cs typeface="Calibri" pitchFamily="34" charset="-120"/>
               </a:rPr>
-              <a:t>Every action anybody takes, newest first, with the person’s name and designation.</a:t>
+              <a:t>Choose a designation, tick the actions it should hold, save.</a:t>
             </a:r>
             <a:endParaRPr lang="en-US" sz="1400" dirty="0"/>
           </a:p>
@@ -14715,7 +14852,7 @@
                 <a:ea typeface="Calibri" pitchFamily="34" charset="-122"/>
                 <a:cs typeface="Calibri" pitchFamily="34" charset="-120"/>
               </a:rPr>
-              <a:t>Filter by person, module, action or date; search the text.</a:t>
+              <a:t>The change applies to everybody holding that designation, on their next request.</a:t>
             </a:r>
             <a:endParaRPr lang="en-US" sz="1400" dirty="0"/>
           </a:p>
@@ -14739,7 +14876,7 @@
                 <a:ea typeface="Calibri" pitchFamily="34" charset="-122"/>
                 <a:cs typeface="Calibri" pitchFamily="34" charset="-120"/>
               </a:rPr>
-              <a:t>Where a change has a before and an after, the entry shows both.</a:t>
+              <a:t>Super Admin holds every permission and cannot be edited down.</a:t>
             </a:r>
             <a:endParaRPr lang="en-US" sz="1400" dirty="0"/>
           </a:p>
@@ -14763,31 +14900,7 @@
                 <a:ea typeface="Calibri" pitchFamily="34" charset="-122"/>
                 <a:cs typeface="Calibri" pitchFamily="34" charset="-120"/>
               </a:rPr>
-              <a:t>Nothing here can be edited or removed, from this screen or any other.</a:t>
-            </a:r>
-            <a:endParaRPr lang="en-US" sz="1400" dirty="0"/>
-          </a:p>
-          <a:p>
-            <a:pPr marL="342900" indent="-342900">
-              <a:lnSpc>
-                <a:spcPts val="2000"/>
-              </a:lnSpc>
-              <a:spcAft>
-                <a:spcPts val="1000"/>
-              </a:spcAft>
-              <a:buSzPct val="100000"/>
-              <a:buChar char="•"/>
-            </a:pPr>
-            <a:r>
-              <a:rPr lang="en-US" sz="1400" dirty="0">
-                <a:solidFill>
-                  <a:srgbClr val="F4F1F0"/>
-                </a:solidFill>
-                <a:latin typeface="Calibri" pitchFamily="34" charset="0"/>
-                <a:ea typeface="Calibri" pitchFamily="34" charset="-122"/>
-                <a:cs typeface="Calibri" pitchFamily="34" charset="-120"/>
-              </a:rPr>
-              <a:t>The asset history, the review trail and the time-sheet log all still exist — this is the view that crosses them.</a:t>
+              <a:t>Every change is written to the Activity Log — the designation, the permission and the direction.</a:t>
             </a:r>
             <a:endParaRPr lang="en-US" sz="1400" dirty="0"/>
           </a:p>
@@ -14867,7 +14980,7 @@
                 <a:ea typeface="Calibri" pitchFamily="34" charset="-122"/>
                 <a:cs typeface="Calibri" pitchFamily="34" charset="-120"/>
               </a:rPr>
-              <a:t>Studio leadership — 7 designations. Readable, filterable, exportable, editable by nobody.</a:t>
+              <a:t>Super Admin, and nobody else.</a:t>
             </a:r>
             <a:endParaRPr lang="en-US" sz="1000" dirty="0"/>
           </a:p>
@@ -14889,8 +15002,8 @@
         </p:blipFill>
         <p:spPr>
           <a:xfrm>
-            <a:off x="5989320" y="1528779"/>
-            <a:ext cx="5632704" cy="4166201"/>
+            <a:off x="5989320" y="1570441"/>
+            <a:ext cx="5632704" cy="4082877"/>
           </a:xfrm>
           <a:prstGeom prst="rect">
             <a:avLst/>
@@ -14912,7 +15025,7 @@
         </p:nvSpPr>
         <p:spPr>
           <a:xfrm>
-            <a:off x="5989320" y="5804709"/>
+            <a:off x="5989320" y="5763047"/>
             <a:ext cx="5632704" cy="457200"/>
           </a:xfrm>
           <a:prstGeom prst="rect">
@@ -14937,7 +15050,7 @@
                 <a:ea typeface="Calibri" pitchFamily="34" charset="-122"/>
                 <a:cs typeface="Calibri" pitchFamily="34" charset="-120"/>
               </a:rPr>
-              <a:t>The Activity Log (first screenful).</a:t>
+              <a:t>The permission grid for one designation (first screenful).</a:t>
             </a:r>
             <a:endParaRPr lang="en-US" sz="1000" dirty="0"/>
           </a:p>
@@ -14954,6 +15067,508 @@
 <file path=ppt/slides/slide27.xml><?xml version="1.0" encoding="utf-8"?>
 <p:sld xmlns:a="http://schemas.openxmlformats.org/drawingml/2006/main" xmlns:r="http://schemas.openxmlformats.org/officeDocument/2006/relationships" xmlns:p="http://schemas.openxmlformats.org/presentationml/2006/main">
   <p:cSld name="Slide 27">
+    <p:bg>
+      <p:bgPr>
+        <a:solidFill>
+          <a:srgbClr val="141110"/>
+        </a:solidFill>
+      </p:bgPr>
+    </p:bg>
+    <p:spTree>
+      <p:nvGrpSpPr>
+        <p:cNvPr id="1" name=""/>
+        <p:cNvGrpSpPr/>
+        <p:nvPr/>
+      </p:nvGrpSpPr>
+      <p:grpSpPr>
+        <a:xfrm>
+          <a:off x="0" y="0"/>
+          <a:ext cx="0" cy="0"/>
+          <a:chOff x="0" y="0"/>
+          <a:chExt cx="0" cy="0"/>
+        </a:xfrm>
+      </p:grpSpPr>
+      <p:sp>
+        <p:nvSpPr>
+          <p:cNvPr id="2" name="Text 0"/>
+          <p:cNvSpPr txBox="1"/>
+          <p:nvPr/>
+        </p:nvSpPr>
+        <p:spPr>
+          <a:xfrm>
+            <a:off x="11411712" y="6355080"/>
+            <a:ext cx="457200" cy="274320"/>
+          </a:xfrm>
+          <a:prstGeom prst="rect">
+            <a:avLst/>
+          </a:prstGeom>
+          <a:noFill/>
+          <a:ln/>
+        </p:spPr>
+        <p:txBody>
+          <a:bodyPr wrap="square" lIns="0" tIns="0" rIns="0" bIns="0" rtlCol="0" anchor="ctr"/>
+          <a:lstStyle/>
+          <a:p>
+            <a:pPr algn="r" indent="0" marL="0">
+              <a:buNone/>
+            </a:pPr>
+            <a:r>
+              <a:rPr lang="en-US" sz="1000" dirty="0">
+                <a:solidFill>
+                  <a:srgbClr val="A9A09E"/>
+                </a:solidFill>
+                <a:latin typeface="Calibri" pitchFamily="34" charset="0"/>
+                <a:ea typeface="Calibri" pitchFamily="34" charset="-122"/>
+                <a:cs typeface="Calibri" pitchFamily="34" charset="-120"/>
+              </a:rPr>
+              <a:t>27</a:t>
+            </a:r>
+            <a:endParaRPr lang="en-US" sz="1000" dirty="0"/>
+          </a:p>
+        </p:txBody>
+      </p:sp>
+      <p:sp>
+        <p:nvSpPr>
+          <p:cNvPr id="3" name="Shape 1"/>
+          <p:cNvSpPr/>
+          <p:nvPr/>
+        </p:nvSpPr>
+        <p:spPr>
+          <a:xfrm>
+            <a:off x="566928" y="384048"/>
+            <a:ext cx="329184" cy="329184"/>
+          </a:xfrm>
+          <a:prstGeom prst="roundRect">
+            <a:avLst>
+              <a:gd name="adj" fmla="val 22222"/>
+            </a:avLst>
+          </a:prstGeom>
+          <a:solidFill>
+            <a:srgbClr val="7F1416"/>
+          </a:solidFill>
+          <a:ln/>
+        </p:spPr>
+      </p:sp>
+      <p:sp>
+        <p:nvSpPr>
+          <p:cNvPr id="4" name="Text 2"/>
+          <p:cNvSpPr txBox="1"/>
+          <p:nvPr/>
+        </p:nvSpPr>
+        <p:spPr>
+          <a:xfrm>
+            <a:off x="566928" y="384048"/>
+            <a:ext cx="329184" cy="329184"/>
+          </a:xfrm>
+          <a:prstGeom prst="rect">
+            <a:avLst/>
+          </a:prstGeom>
+          <a:noFill/>
+          <a:ln/>
+        </p:spPr>
+        <p:txBody>
+          <a:bodyPr wrap="square" lIns="0" tIns="0" rIns="0" bIns="0" rtlCol="0" anchor="ctr"/>
+          <a:lstStyle/>
+          <a:p>
+            <a:pPr algn="ctr" indent="0" marL="0">
+              <a:buNone/>
+            </a:pPr>
+            <a:r>
+              <a:rPr lang="en-US" sz="1600" b="1" dirty="0">
+                <a:solidFill>
+                  <a:srgbClr val="FFFFFF"/>
+                </a:solidFill>
+                <a:latin typeface="Cambria" pitchFamily="34" charset="0"/>
+                <a:ea typeface="Cambria" pitchFamily="34" charset="-122"/>
+                <a:cs typeface="Cambria" pitchFamily="34" charset="-120"/>
+              </a:rPr>
+              <a:t>Z</a:t>
+            </a:r>
+            <a:endParaRPr lang="en-US" sz="1600" dirty="0"/>
+          </a:p>
+        </p:txBody>
+      </p:sp>
+      <p:sp>
+        <p:nvSpPr>
+          <p:cNvPr id="5" name="Text 3"/>
+          <p:cNvSpPr txBox="1"/>
+          <p:nvPr/>
+        </p:nvSpPr>
+        <p:spPr>
+          <a:xfrm>
+            <a:off x="1024128" y="384048"/>
+            <a:ext cx="7315200" cy="329184"/>
+          </a:xfrm>
+          <a:prstGeom prst="rect">
+            <a:avLst/>
+          </a:prstGeom>
+          <a:noFill/>
+          <a:ln/>
+        </p:spPr>
+        <p:txBody>
+          <a:bodyPr wrap="square" lIns="0" tIns="0" rIns="0" bIns="0" rtlCol="0" anchor="ctr"/>
+          <a:lstStyle/>
+          <a:p>
+            <a:pPr indent="0" marL="0">
+              <a:buNone/>
+            </a:pPr>
+            <a:r>
+              <a:rPr lang="en-US" sz="1100" b="1" spc="200" kern="0" dirty="0">
+                <a:solidFill>
+                  <a:srgbClr val="A9A09E"/>
+                </a:solidFill>
+                <a:latin typeface="Calibri" pitchFamily="34" charset="0"/>
+                <a:ea typeface="Calibri" pitchFamily="34" charset="-122"/>
+                <a:cs typeface="Calibri" pitchFamily="34" charset="-120"/>
+              </a:rPr>
+              <a:t>ACTIVITY LOG</a:t>
+            </a:r>
+            <a:endParaRPr lang="en-US" sz="1100" dirty="0"/>
+          </a:p>
+        </p:txBody>
+      </p:sp>
+      <p:sp>
+        <p:nvSpPr>
+          <p:cNvPr id="6" name="Text 4"/>
+          <p:cNvSpPr txBox="1"/>
+          <p:nvPr/>
+        </p:nvSpPr>
+        <p:spPr>
+          <a:xfrm>
+            <a:off x="566928" y="868680"/>
+            <a:ext cx="11064240" cy="685800"/>
+          </a:xfrm>
+          <a:prstGeom prst="rect">
+            <a:avLst/>
+          </a:prstGeom>
+          <a:noFill/>
+          <a:ln/>
+        </p:spPr>
+        <p:txBody>
+          <a:bodyPr wrap="square" lIns="0" tIns="0" rIns="0" bIns="0" rtlCol="0" anchor="ctr"/>
+          <a:lstStyle/>
+          <a:p>
+            <a:pPr indent="0" marL="0">
+              <a:buNone/>
+            </a:pPr>
+            <a:r>
+              <a:rPr lang="en-US" sz="3400" b="1" dirty="0">
+                <a:solidFill>
+                  <a:srgbClr val="F4F1F0"/>
+                </a:solidFill>
+                <a:latin typeface="Cambria" pitchFamily="34" charset="0"/>
+                <a:ea typeface="Cambria" pitchFamily="34" charset="-122"/>
+                <a:cs typeface="Cambria" pitchFamily="34" charset="-120"/>
+              </a:rPr>
+              <a:t>One record that crosses every module</a:t>
+            </a:r>
+            <a:endParaRPr lang="en-US" sz="3400" dirty="0"/>
+          </a:p>
+        </p:txBody>
+      </p:sp>
+      <p:sp>
+        <p:nvSpPr>
+          <p:cNvPr id="7" name="Text 5"/>
+          <p:cNvSpPr txBox="1"/>
+          <p:nvPr/>
+        </p:nvSpPr>
+        <p:spPr>
+          <a:xfrm>
+            <a:off x="566928" y="1828800"/>
+            <a:ext cx="4937760" cy="3200400"/>
+          </a:xfrm>
+          <a:prstGeom prst="rect">
+            <a:avLst/>
+          </a:prstGeom>
+          <a:noFill/>
+          <a:ln/>
+        </p:spPr>
+        <p:txBody>
+          <a:bodyPr wrap="square" rtlCol="0" anchor="ctr"/>
+          <a:lstStyle/>
+          <a:p>
+            <a:pPr marL="342900" indent="-342900">
+              <a:lnSpc>
+                <a:spcPts val="2000"/>
+              </a:lnSpc>
+              <a:spcAft>
+                <a:spcPts val="1000"/>
+              </a:spcAft>
+              <a:buSzPct val="100000"/>
+              <a:buChar char="•"/>
+            </a:pPr>
+            <a:r>
+              <a:rPr lang="en-US" sz="1400" dirty="0">
+                <a:solidFill>
+                  <a:srgbClr val="F4F1F0"/>
+                </a:solidFill>
+                <a:latin typeface="Calibri" pitchFamily="34" charset="0"/>
+                <a:ea typeface="Calibri" pitchFamily="34" charset="-122"/>
+                <a:cs typeface="Calibri" pitchFamily="34" charset="-120"/>
+              </a:rPr>
+              <a:t>Every action anybody takes, newest first, with the person’s name and designation.</a:t>
+            </a:r>
+            <a:endParaRPr lang="en-US" sz="1400" dirty="0"/>
+          </a:p>
+          <a:p>
+            <a:pPr marL="342900" indent="-342900">
+              <a:lnSpc>
+                <a:spcPts val="2000"/>
+              </a:lnSpc>
+              <a:spcAft>
+                <a:spcPts val="1000"/>
+              </a:spcAft>
+              <a:buSzPct val="100000"/>
+              <a:buChar char="•"/>
+            </a:pPr>
+            <a:r>
+              <a:rPr lang="en-US" sz="1400" dirty="0">
+                <a:solidFill>
+                  <a:srgbClr val="F4F1F0"/>
+                </a:solidFill>
+                <a:latin typeface="Calibri" pitchFamily="34" charset="0"/>
+                <a:ea typeface="Calibri" pitchFamily="34" charset="-122"/>
+                <a:cs typeface="Calibri" pitchFamily="34" charset="-120"/>
+              </a:rPr>
+              <a:t>Filter by person, module, action or date; search the text.</a:t>
+            </a:r>
+            <a:endParaRPr lang="en-US" sz="1400" dirty="0"/>
+          </a:p>
+          <a:p>
+            <a:pPr marL="342900" indent="-342900">
+              <a:lnSpc>
+                <a:spcPts val="2000"/>
+              </a:lnSpc>
+              <a:spcAft>
+                <a:spcPts val="1000"/>
+              </a:spcAft>
+              <a:buSzPct val="100000"/>
+              <a:buChar char="•"/>
+            </a:pPr>
+            <a:r>
+              <a:rPr lang="en-US" sz="1400" dirty="0">
+                <a:solidFill>
+                  <a:srgbClr val="F4F1F0"/>
+                </a:solidFill>
+                <a:latin typeface="Calibri" pitchFamily="34" charset="0"/>
+                <a:ea typeface="Calibri" pitchFamily="34" charset="-122"/>
+                <a:cs typeface="Calibri" pitchFamily="34" charset="-120"/>
+              </a:rPr>
+              <a:t>Where a change has a before and an after, the entry shows both.</a:t>
+            </a:r>
+            <a:endParaRPr lang="en-US" sz="1400" dirty="0"/>
+          </a:p>
+          <a:p>
+            <a:pPr marL="342900" indent="-342900">
+              <a:lnSpc>
+                <a:spcPts val="2000"/>
+              </a:lnSpc>
+              <a:spcAft>
+                <a:spcPts val="1000"/>
+              </a:spcAft>
+              <a:buSzPct val="100000"/>
+              <a:buChar char="•"/>
+            </a:pPr>
+            <a:r>
+              <a:rPr lang="en-US" sz="1400" dirty="0">
+                <a:solidFill>
+                  <a:srgbClr val="F4F1F0"/>
+                </a:solidFill>
+                <a:latin typeface="Calibri" pitchFamily="34" charset="0"/>
+                <a:ea typeface="Calibri" pitchFamily="34" charset="-122"/>
+                <a:cs typeface="Calibri" pitchFamily="34" charset="-120"/>
+              </a:rPr>
+              <a:t>Nothing here can be edited or removed, from this screen or any other.</a:t>
+            </a:r>
+            <a:endParaRPr lang="en-US" sz="1400" dirty="0"/>
+          </a:p>
+          <a:p>
+            <a:pPr marL="342900" indent="-342900">
+              <a:lnSpc>
+                <a:spcPts val="2000"/>
+              </a:lnSpc>
+              <a:spcAft>
+                <a:spcPts val="1000"/>
+              </a:spcAft>
+              <a:buSzPct val="100000"/>
+              <a:buChar char="•"/>
+            </a:pPr>
+            <a:r>
+              <a:rPr lang="en-US" sz="1400" dirty="0">
+                <a:solidFill>
+                  <a:srgbClr val="F4F1F0"/>
+                </a:solidFill>
+                <a:latin typeface="Calibri" pitchFamily="34" charset="0"/>
+                <a:ea typeface="Calibri" pitchFamily="34" charset="-122"/>
+                <a:cs typeface="Calibri" pitchFamily="34" charset="-120"/>
+              </a:rPr>
+              <a:t>The asset history, the review trail and the time-sheet log all still exist — this is the view that crosses them.</a:t>
+            </a:r>
+            <a:endParaRPr lang="en-US" sz="1400" dirty="0"/>
+          </a:p>
+        </p:txBody>
+      </p:sp>
+      <p:sp>
+        <p:nvSpPr>
+          <p:cNvPr id="8" name="Shape 6"/>
+          <p:cNvSpPr/>
+          <p:nvPr/>
+        </p:nvSpPr>
+        <p:spPr>
+          <a:xfrm>
+            <a:off x="566928" y="5532120"/>
+            <a:ext cx="4937760" cy="777240"/>
+          </a:xfrm>
+          <a:prstGeom prst="roundRect">
+            <a:avLst>
+              <a:gd name="adj" fmla="val 7059"/>
+            </a:avLst>
+          </a:prstGeom>
+          <a:solidFill>
+            <a:srgbClr val="1E1A19"/>
+          </a:solidFill>
+          <a:ln w="12700">
+            <a:solidFill>
+              <a:srgbClr val="2C2524"/>
+            </a:solidFill>
+            <a:prstDash val="solid"/>
+          </a:ln>
+        </p:spPr>
+      </p:sp>
+      <p:sp>
+        <p:nvSpPr>
+          <p:cNvPr id="9" name="Text 7"/>
+          <p:cNvSpPr txBox="1"/>
+          <p:nvPr/>
+        </p:nvSpPr>
+        <p:spPr>
+          <a:xfrm>
+            <a:off x="749808" y="5532120"/>
+            <a:ext cx="4572000" cy="777240"/>
+          </a:xfrm>
+          <a:prstGeom prst="rect">
+            <a:avLst/>
+          </a:prstGeom>
+          <a:noFill/>
+          <a:ln/>
+        </p:spPr>
+        <p:txBody>
+          <a:bodyPr wrap="square" lIns="0" tIns="0" rIns="0" bIns="0" rtlCol="0" anchor="ctr"/>
+          <a:lstStyle/>
+          <a:p>
+            <a:pPr indent="0" marL="0">
+              <a:buNone/>
+            </a:pPr>
+            <a:r>
+              <a:rPr lang="en-US" sz="1000" b="1" spc="200" kern="0" dirty="0">
+                <a:solidFill>
+                  <a:srgbClr val="B8323A"/>
+                </a:solidFill>
+                <a:latin typeface="Calibri" pitchFamily="34" charset="0"/>
+                <a:ea typeface="Calibri" pitchFamily="34" charset="-122"/>
+                <a:cs typeface="Calibri" pitchFamily="34" charset="-120"/>
+              </a:rPr>
+              <a:t>WHO  </a:t>
+            </a:r>
+            <a:pPr indent="0" marL="0">
+              <a:buNone/>
+            </a:pPr>
+            <a:r>
+              <a:rPr lang="en-US" sz="1200" dirty="0">
+                <a:solidFill>
+                  <a:srgbClr val="F4F1F0"/>
+                </a:solidFill>
+                <a:latin typeface="Calibri" pitchFamily="34" charset="0"/>
+                <a:ea typeface="Calibri" pitchFamily="34" charset="-122"/>
+                <a:cs typeface="Calibri" pitchFamily="34" charset="-120"/>
+              </a:rPr>
+              <a:t>Studio leadership — 7 designations. Readable, filterable, exportable, editable by nobody.</a:t>
+            </a:r>
+            <a:endParaRPr lang="en-US" sz="1000" dirty="0"/>
+          </a:p>
+        </p:txBody>
+      </p:sp>
+      <p:pic>
+        <p:nvPicPr>
+          <p:cNvPr id="10" name="Image 0" descr="preencoded.png">    </p:cNvPr>
+          <p:cNvPicPr>
+            <a:picLocks noChangeAspect="1"/>
+          </p:cNvPicPr>
+          <p:nvPr/>
+        </p:nvPicPr>
+        <p:blipFill>
+          <a:blip r:embed="rId1"/>
+          <a:stretch>
+            <a:fillRect/>
+          </a:stretch>
+        </p:blipFill>
+        <p:spPr>
+          <a:xfrm>
+            <a:off x="5989320" y="1528779"/>
+            <a:ext cx="5632704" cy="4166201"/>
+          </a:xfrm>
+          <a:prstGeom prst="rect">
+            <a:avLst/>
+          </a:prstGeom>
+          <a:effectLst>
+            <a:outerShdw sx="100000" sy="100000" kx="0" ky="0" algn="bl" rotWithShape="0" blurRad="177800" dist="50800" dir="5400000">
+              <a:srgbClr val="000000">
+                <a:alpha val="55000"/>
+              </a:srgbClr>
+            </a:outerShdw>
+          </a:effectLst>
+        </p:spPr>
+      </p:pic>
+      <p:sp>
+        <p:nvSpPr>
+          <p:cNvPr id="11" name="Text 8"/>
+          <p:cNvSpPr txBox="1"/>
+          <p:nvPr/>
+        </p:nvSpPr>
+        <p:spPr>
+          <a:xfrm>
+            <a:off x="5989320" y="5804709"/>
+            <a:ext cx="5632704" cy="457200"/>
+          </a:xfrm>
+          <a:prstGeom prst="rect">
+            <a:avLst/>
+          </a:prstGeom>
+          <a:noFill/>
+          <a:ln/>
+        </p:spPr>
+        <p:txBody>
+          <a:bodyPr wrap="square" lIns="0" tIns="0" rIns="0" bIns="0" rtlCol="0" anchor="ctr"/>
+          <a:lstStyle/>
+          <a:p>
+            <a:pPr algn="ctr" indent="0" marL="0">
+              <a:buNone/>
+            </a:pPr>
+            <a:r>
+              <a:rPr lang="en-US" sz="1000" i="1" dirty="0">
+                <a:solidFill>
+                  <a:srgbClr val="A9A09E"/>
+                </a:solidFill>
+                <a:latin typeface="Calibri" pitchFamily="34" charset="0"/>
+                <a:ea typeface="Calibri" pitchFamily="34" charset="-122"/>
+                <a:cs typeface="Calibri" pitchFamily="34" charset="-120"/>
+              </a:rPr>
+              <a:t>The Activity Log (first screenful).</a:t>
+            </a:r>
+            <a:endParaRPr lang="en-US" sz="1000" dirty="0"/>
+          </a:p>
+        </p:txBody>
+      </p:sp>
+    </p:spTree>
+  </p:cSld>
+  <p:clrMapOvr>
+    <a:masterClrMapping/>
+  </p:clrMapOvr>
+</p:sld>
+</file>
+
+<file path=ppt/slides/slide28.xml><?xml version="1.0" encoding="utf-8"?>
+<p:sld xmlns:a="http://schemas.openxmlformats.org/drawingml/2006/main" xmlns:r="http://schemas.openxmlformats.org/officeDocument/2006/relationships" xmlns:p="http://schemas.openxmlformats.org/presentationml/2006/main">
+  <p:cSld name="Slide 28">
     <p:bg>
       <p:bgPr>
         <a:solidFill>
@@ -15008,7 +15623,7 @@
                 <a:ea typeface="Calibri" pitchFamily="34" charset="-122"/>
                 <a:cs typeface="Calibri" pitchFamily="34" charset="-120"/>
               </a:rPr>
-              <a:t>27</a:t>
+              <a:t>28</a:t>
             </a:r>
             <a:endParaRPr lang="en-US" sz="1000" dirty="0"/>
           </a:p>

--- a/docs/ZVKY-FORGE-Overview.pptx
+++ b/docs/ZVKY-FORGE-Overview.pptx
@@ -33,9 +33,10 @@
     <p:sldId id="281" r:id="rId27"/>
     <p:sldId id="282" r:id="rId28"/>
     <p:sldId id="283" r:id="rId29"/>
+    <p:sldId id="284" r:id="rId30"/>
   </p:sldIdLst>
   <p:notesMasterIdLst>
-    <p:notesMasterId r:id="rId30"/>
+    <p:notesMasterId r:id="rId31"/>
   </p:notesMasterIdLst>
   <p:sldSz cx="12192000" cy="6858000"/>
   <p:notesSz cx="6858000" cy="12192000"/>
@@ -1409,7 +1410,7 @@
           <a:p>
             <a:r>
               <a:rPr lang="en-US" dirty="0"/>
-              <a:t>Flag this one in induction: the permissions here are narrow out of the box, and a studio must grant them before producers and directors can use the feature.</a:t>
+              <a:t/>
             </a:r>
             <a:endParaRPr lang="en-US" dirty="0"/>
           </a:p>
@@ -1585,7 +1586,7 @@
           <a:p>
             <a:r>
               <a:rPr lang="en-US" dirty="0"/>
-              <a:t/>
+              <a:t>Flag this one in induction: the permissions here are narrow out of the box, and a studio must grant them before producers and directors can use the feature.</a:t>
             </a:r>
             <a:endParaRPr lang="en-US" dirty="0"/>
           </a:p>
@@ -2025,7 +2026,7 @@
           <a:p>
             <a:r>
               <a:rPr lang="en-US" dirty="0"/>
-              <a:t>These twelve bands are generated from the permission table, not written by hand. Appendix A of the manual lists every designation in each.</a:t>
+              <a:t/>
             </a:r>
             <a:endParaRPr lang="en-US" dirty="0"/>
           </a:p>
@@ -2113,7 +2114,7 @@
           <a:p>
             <a:r>
               <a:rPr lang="en-US" dirty="0"/>
-              <a:t/>
+              <a:t>These twelve bands are generated from the permission table, not written by hand. Appendix A of the manual lists every designation in each.</a:t>
             </a:r>
             <a:endParaRPr lang="en-US" dirty="0"/>
           </a:p>
@@ -2289,7 +2290,7 @@
           <a:p>
             <a:r>
               <a:rPr lang="en-US" dirty="0"/>
-              <a:t>The standing rule: every feature prompt from here on should say what the documentation needs added.</a:t>
+              <a:t/>
             </a:r>
             <a:endParaRPr lang="en-US" dirty="0"/>
           </a:p>
@@ -2313,6 +2314,94 @@
             <a:fld id="{F7021451-1387-4CA6-816F-3879F97B5CBC}" type="slidenum">
               <a:rPr lang="en-US"/>
               <a:t>28</a:t>
+            </a:fld>
+            <a:endParaRPr lang="en-US"/>
+          </a:p>
+        </p:txBody>
+      </p:sp>
+    </p:spTree>
+    <p:extLst>
+      <p:ext uri="{BB962C8B-B14F-4D97-AF65-F5344CB8AC3E}">
+        <p14:creationId xmlns:p14="http://schemas.microsoft.com/office/powerpoint/2010/main" val="1024086991"/>
+      </p:ext>
+    </p:extLst>
+  </p:cSld>
+  <p:clrMapOvr>
+    <a:masterClrMapping/>
+  </p:clrMapOvr>
+</p:notes>
+</file>
+
+<file path=ppt/notesSlides/notesSlide29.xml><?xml version="1.0" encoding="utf-8"?>
+<p:notes xmlns:a="http://schemas.openxmlformats.org/drawingml/2006/main" xmlns:r="http://schemas.openxmlformats.org/officeDocument/2006/relationships" xmlns:p="http://schemas.openxmlformats.org/presentationml/2006/main">
+  <p:cSld>
+    <p:spTree>
+      <p:nvGrpSpPr>
+        <p:cNvPr id="1" name=""/>
+        <p:cNvGrpSpPr/>
+        <p:nvPr/>
+      </p:nvGrpSpPr>
+      <p:grpSpPr>
+        <a:xfrm>
+          <a:off x="0" y="0"/>
+          <a:ext cx="0" cy="0"/>
+          <a:chOff x="0" y="0"/>
+          <a:chExt cx="0" cy="0"/>
+        </a:xfrm>
+      </p:grpSpPr>
+      <p:sp>
+        <p:nvSpPr>
+          <p:cNvPr id="2" name="Slide Image Placeholder 1"/>
+          <p:cNvSpPr>
+            <a:spLocks noGrp="1" noRot="1" noChangeAspect="1"/>
+          </p:cNvSpPr>
+          <p:nvPr>
+            <p:ph type="sldImg"/>
+          </p:nvPr>
+        </p:nvSpPr>
+        <p:spPr/>
+      </p:sp>
+      <p:sp>
+        <p:nvSpPr>
+          <p:cNvPr id="3" name="Notes Placeholder 2"/>
+          <p:cNvSpPr>
+            <a:spLocks noGrp="1"/>
+          </p:cNvSpPr>
+          <p:nvPr>
+            <p:ph type="body" idx="1"/>
+          </p:nvPr>
+        </p:nvSpPr>
+        <p:spPr/>
+        <p:txBody>
+          <a:bodyPr/>
+          <a:lstStyle/>
+          <a:p>
+            <a:r>
+              <a:rPr lang="en-US" dirty="0"/>
+              <a:t>The standing rule: every feature prompt from here on should say what the documentation needs added.</a:t>
+            </a:r>
+            <a:endParaRPr lang="en-US" dirty="0"/>
+          </a:p>
+        </p:txBody>
+      </p:sp>
+      <p:sp>
+        <p:nvSpPr>
+          <p:cNvPr id="4" name="Slide Number Placeholder 3"/>
+          <p:cNvSpPr>
+            <a:spLocks noGrp="1"/>
+          </p:cNvSpPr>
+          <p:nvPr>
+            <p:ph type="sldNum" sz="quarter" idx="10"/>
+          </p:nvPr>
+        </p:nvSpPr>
+        <p:spPr/>
+        <p:txBody>
+          <a:bodyPr/>
+          <a:lstStyle/>
+          <a:p>
+            <a:fld id="{F7021451-1387-4CA6-816F-3879F97B5CBC}" type="slidenum">
+              <a:rPr lang="en-US"/>
+              <a:t>29</a:t>
             </a:fld>
             <a:endParaRPr lang="en-US"/>
           </a:p>
@@ -3528,7 +3617,7 @@
                 <a:ea typeface="Calibri" pitchFamily="34" charset="-122"/>
                 <a:cs typeface="Calibri" pitchFamily="34" charset="-120"/>
               </a:rPr>
-              <a:t>Internal induction deck  ·  built 2026-09-04</a:t>
+              <a:t>Internal induction deck  ·  built 2026-09-05</a:t>
             </a:r>
             <a:endParaRPr lang="en-US" sz="1100" dirty="0"/>
           </a:p>
@@ -6632,7 +6721,7 @@
                 <a:ea typeface="Calibri" pitchFamily="34" charset="-122"/>
                 <a:cs typeface="Calibri" pitchFamily="34" charset="-120"/>
               </a:rPr>
-              <a:t>ONE AT A TIME</a:t>
+              <a:t>BULK ASSIGN</a:t>
             </a:r>
             <a:endParaRPr lang="en-US" sz="1100" dirty="0"/>
           </a:p>
@@ -6671,7 +6760,7 @@
                 <a:ea typeface="Cambria" pitchFamily="34" charset="-122"/>
                 <a:cs typeface="Cambria" pitchFamily="34" charset="-120"/>
               </a:rPr>
-              <a:t>One active task, enforced</a:t>
+              <a:t>Hand out and schedule a batch in one action</a:t>
             </a:r>
             <a:endParaRPr lang="en-US" sz="3400" dirty="0"/>
           </a:p>
@@ -6717,7 +6806,7 @@
                 <a:ea typeface="Calibri" pitchFamily="34" charset="-122"/>
                 <a:cs typeface="Calibri" pitchFamily="34" charset="-120"/>
               </a:rPr>
-              <a:t>While one of your assets is open, Accept and Start on every other one is disabled.</a:t>
+              <a:t>Tick the assets on the Assets List — Inactive sub-tab — and press Assign &amp; Schedule.</a:t>
             </a:r>
             <a:endParaRPr lang="en-US" sz="1400" dirty="0"/>
           </a:p>
@@ -6741,7 +6830,7 @@
                 <a:ea typeface="Calibri" pitchFamily="34" charset="-122"/>
                 <a:cs typeface="Calibri" pitchFamily="34" charset="-120"/>
               </a:rPr>
-              <a:t>The message names the asset that is holding you up.</a:t>
+              <a:t>One assignee, one Start Date, one End Date, applied to all of them. Each field is optional.</a:t>
             </a:r>
             <a:endParaRPr lang="en-US" sz="1400" dirty="0"/>
           </a:p>
@@ -6765,7 +6854,7 @@
                 <a:ea typeface="Calibri" pitchFamily="34" charset="-122"/>
                 <a:cs typeface="Calibri" pitchFamily="34" charset="-120"/>
               </a:rPr>
-              <a:t>Submit the open one and every other unlocks immediately.</a:t>
+              <a:t>Only work nobody has started. Anything already on somebody’s desk is skipped and listed with the reason.</a:t>
             </a:r>
             <a:endParaRPr lang="en-US" sz="1400" dirty="0"/>
           </a:p>
@@ -6789,7 +6878,7 @@
                 <a:ea typeface="Calibri" pitchFamily="34" charset="-122"/>
                 <a:cs typeface="Calibri" pitchFamily="34" charset="-120"/>
               </a:rPr>
-              <a:t>Enforced on the server as well as the screen, so a second browser tab does not get round it.</a:t>
+              <a:t>Each asset gets its own Round, its own history line and its own notification, exactly as a single assignment does.</a:t>
             </a:r>
             <a:endParaRPr lang="en-US" sz="1400" dirty="0"/>
           </a:p>
@@ -6813,7 +6902,7 @@
                 <a:ea typeface="Calibri" pitchFamily="34" charset="-122"/>
                 <a:cs typeface="Calibri" pitchFamily="34" charset="-120"/>
               </a:rPr>
-              <a:t>It restricts starting your own work and nothing else — reviewing, approving and time sheets are untouched.</a:t>
+              <a:t>The button says how many of your selection it will touch before you press it.</a:t>
             </a:r>
             <a:endParaRPr lang="en-US" sz="1400" dirty="0"/>
           </a:p>
@@ -6893,7 +6982,7 @@
                 <a:ea typeface="Calibri" pitchFamily="34" charset="-122"/>
                 <a:cs typeface="Calibri" pitchFamily="34" charset="-120"/>
               </a:rPr>
-              <a:t>Applies to everybody who accepts work. A lead with an asset under way still runs their queue.</a:t>
+              <a:t>Super Admin alone out of the box. Granted in Settings to the coordinators who plan work — which opens the bulk panel without widening whose assets anybody may touch.</a:t>
             </a:r>
             <a:endParaRPr lang="en-US" sz="1000" dirty="0"/>
           </a:p>
@@ -6915,8 +7004,8 @@
         </p:blipFill>
         <p:spPr>
           <a:xfrm>
-            <a:off x="7882677" y="1371600"/>
-            <a:ext cx="1845991" cy="4480560"/>
+            <a:off x="5989320" y="2811948"/>
+            <a:ext cx="5632704" cy="1599865"/>
           </a:xfrm>
           <a:prstGeom prst="rect">
             <a:avLst/>
@@ -6938,7 +7027,7 @@
         </p:nvSpPr>
         <p:spPr>
           <a:xfrm>
-            <a:off x="5989320" y="5961888"/>
+            <a:off x="5989320" y="4521540"/>
             <a:ext cx="5632704" cy="457200"/>
           </a:xfrm>
           <a:prstGeom prst="rect">
@@ -6963,7 +7052,7 @@
                 <a:ea typeface="Calibri" pitchFamily="34" charset="-122"/>
                 <a:cs typeface="Calibri" pitchFamily="34" charset="-120"/>
               </a:rPr>
-              <a:t>A second asset, refused, naming the open one.</a:t>
+              <a:t>The Assets List, where a batch is selected.</a:t>
             </a:r>
             <a:endParaRPr lang="en-US" sz="1000" dirty="0"/>
           </a:p>
@@ -7134,7 +7223,7 @@
                 <a:ea typeface="Calibri" pitchFamily="34" charset="-122"/>
                 <a:cs typeface="Calibri" pitchFamily="34" charset="-120"/>
               </a:rPr>
-              <a:t>HOLD</a:t>
+              <a:t>ONE AT A TIME</a:t>
             </a:r>
             <a:endParaRPr lang="en-US" sz="1100" dirty="0"/>
           </a:p>
@@ -7173,7 +7262,7 @@
                 <a:ea typeface="Cambria" pitchFamily="34" charset="-122"/>
                 <a:cs typeface="Cambria" pitchFamily="34" charset="-120"/>
               </a:rPr>
-              <a:t>Put a task down without handing it in</a:t>
+              <a:t>One active task, enforced</a:t>
             </a:r>
             <a:endParaRPr lang="en-US" sz="3400" dirty="0"/>
           </a:p>
@@ -7219,7 +7308,7 @@
                 <a:ea typeface="Calibri" pitchFamily="34" charset="-122"/>
                 <a:cs typeface="Calibri" pitchFamily="34" charset="-120"/>
               </a:rPr>
-              <a:t>Hold stops the count on a task and frees you to start another one.</a:t>
+              <a:t>While one of your assets is open, Accept and Start on every other one is disabled.</a:t>
             </a:r>
             <a:endParaRPr lang="en-US" sz="1400" dirty="0"/>
           </a:p>
@@ -7243,7 +7332,7 @@
                 <a:ea typeface="Calibri" pitchFamily="34" charset="-122"/>
                 <a:cs typeface="Calibri" pitchFamily="34" charset="-120"/>
               </a:rPr>
-              <a:t>The held time is left out of that asset’s Time Spent. Say why in a line, or leave it blank.</a:t>
+              <a:t>The message names the asset that is holding you up.</a:t>
             </a:r>
             <a:endParaRPr lang="en-US" sz="1400" dirty="0"/>
           </a:p>
@@ -7267,7 +7356,7 @@
                 <a:ea typeface="Calibri" pitchFamily="34" charset="-122"/>
                 <a:cs typeface="Calibri" pitchFamily="34" charset="-120"/>
               </a:rPr>
-              <a:t>It stays in its stage and carries an On hold badge, so a lead can see the work has stopped.</a:t>
+              <a:t>Submit the open one and every other unlocks immediately.</a:t>
             </a:r>
             <a:endParaRPr lang="en-US" sz="1400" dirty="0"/>
           </a:p>
@@ -7291,7 +7380,7 @@
                 <a:ea typeface="Calibri" pitchFamily="34" charset="-122"/>
                 <a:cs typeface="Calibri" pitchFamily="34" charset="-120"/>
               </a:rPr>
-              <a:t>Resume obeys the same one-task rule as starting, so holding is not a way around it.</a:t>
+              <a:t>Enforced on the server as well as the screen, so a second browser tab does not get round it.</a:t>
             </a:r>
             <a:endParaRPr lang="en-US" sz="1400" dirty="0"/>
           </a:p>
@@ -7315,7 +7404,7 @@
                 <a:ea typeface="Calibri" pitchFamily="34" charset="-122"/>
                 <a:cs typeface="Calibri" pitchFamily="34" charset="-120"/>
               </a:rPr>
-              <a:t>Time Spent now depends on people pressing the button, exactly as the Time Sheet does.</a:t>
+              <a:t>It restricts starting your own work and nothing else — reviewing, approving and time sheets are untouched.</a:t>
             </a:r>
             <a:endParaRPr lang="en-US" sz="1400" dirty="0"/>
           </a:p>
@@ -7395,7 +7484,7 @@
                 <a:ea typeface="Calibri" pitchFamily="34" charset="-122"/>
                 <a:cs typeface="Calibri" pitchFamily="34" charset="-120"/>
               </a:rPr>
-              <a:t>The person the task is assigned to, with Hold / Resume Own Task — on for every designation by default, and switchable off in Settings. Nobody can hold somebody else’s task in this version.</a:t>
+              <a:t>Applies to everybody who accepts work. A lead with an asset under way still runs their queue.</a:t>
             </a:r>
             <a:endParaRPr lang="en-US" sz="1000" dirty="0"/>
           </a:p>
@@ -7465,7 +7554,7 @@
                 <a:ea typeface="Calibri" pitchFamily="34" charset="-122"/>
                 <a:cs typeface="Calibri" pitchFamily="34" charset="-120"/>
               </a:rPr>
-              <a:t>A task in progress, where the Hold button sits.</a:t>
+              <a:t>A second asset, refused, naming the open one.</a:t>
             </a:r>
             <a:endParaRPr lang="en-US" sz="1000" dirty="0"/>
           </a:p>
@@ -7636,7 +7725,7 @@
                 <a:ea typeface="Calibri" pitchFamily="34" charset="-122"/>
                 <a:cs typeface="Calibri" pitchFamily="34" charset="-120"/>
               </a:rPr>
-              <a:t>FIRST REVIEW GATE</a:t>
+              <a:t>HOLD</a:t>
             </a:r>
             <a:endParaRPr lang="en-US" sz="1100" dirty="0"/>
           </a:p>
@@ -7675,7 +7764,7 @@
                 <a:ea typeface="Cambria" pitchFamily="34" charset="-122"/>
                 <a:cs typeface="Cambria" pitchFamily="34" charset="-120"/>
               </a:rPr>
-              <a:t>The team lead sees it first</a:t>
+              <a:t>Put a task down without handing it in</a:t>
             </a:r>
             <a:endParaRPr lang="en-US" sz="3400" dirty="0"/>
           </a:p>
@@ -7721,7 +7810,7 @@
                 <a:ea typeface="Calibri" pitchFamily="34" charset="-122"/>
                 <a:cs typeface="Calibri" pitchFamily="34" charset="-120"/>
               </a:rPr>
-              <a:t>Approve to send it on to the Creative Director.</a:t>
+              <a:t>Hold stops the count on a task and frees you to start another one.</a:t>
             </a:r>
             <a:endParaRPr lang="en-US" sz="1400" dirty="0"/>
           </a:p>
@@ -7745,7 +7834,7 @@
                 <a:ea typeface="Calibri" pitchFamily="34" charset="-122"/>
                 <a:cs typeface="Calibri" pitchFamily="34" charset="-120"/>
               </a:rPr>
-              <a:t>Request changes to send it back as TL Feedbacks, with a note.</a:t>
+              <a:t>The held time is left out of that asset’s Time Spent. Say why in a line, or leave it blank.</a:t>
             </a:r>
             <a:endParaRPr lang="en-US" sz="1400" dirty="0"/>
           </a:p>
@@ -7769,7 +7858,7 @@
                 <a:ea typeface="Calibri" pitchFamily="34" charset="-122"/>
                 <a:cs typeface="Calibri" pitchFamily="34" charset="-120"/>
               </a:rPr>
-              <a:t>A studio without a Creative Director gate can send straight to Approved for Client, if the reviewer holds that permission.</a:t>
+              <a:t>It stays in its stage and carries an On hold badge, so a lead can see the work has stopped.</a:t>
             </a:r>
             <a:endParaRPr lang="en-US" sz="1400" dirty="0"/>
           </a:p>
@@ -7793,7 +7882,31 @@
                 <a:ea typeface="Calibri" pitchFamily="34" charset="-122"/>
                 <a:cs typeface="Calibri" pitchFamily="34" charset="-120"/>
               </a:rPr>
-              <a:t>Rework comes back through this same gate.</a:t>
+              <a:t>Resume obeys the same one-task rule as starting, so holding is not a way around it.</a:t>
+            </a:r>
+            <a:endParaRPr lang="en-US" sz="1400" dirty="0"/>
+          </a:p>
+          <a:p>
+            <a:pPr marL="342900" indent="-342900">
+              <a:lnSpc>
+                <a:spcPts val="2000"/>
+              </a:lnSpc>
+              <a:spcAft>
+                <a:spcPts val="1000"/>
+              </a:spcAft>
+              <a:buSzPct val="100000"/>
+              <a:buChar char="•"/>
+            </a:pPr>
+            <a:r>
+              <a:rPr lang="en-US" sz="1400" dirty="0">
+                <a:solidFill>
+                  <a:srgbClr val="F4F1F0"/>
+                </a:solidFill>
+                <a:latin typeface="Calibri" pitchFamily="34" charset="0"/>
+                <a:ea typeface="Calibri" pitchFamily="34" charset="-122"/>
+                <a:cs typeface="Calibri" pitchFamily="34" charset="-120"/>
+              </a:rPr>
+              <a:t>Time Spent now depends on people pressing the button, exactly as the Time Sheet does.</a:t>
             </a:r>
             <a:endParaRPr lang="en-US" sz="1400" dirty="0"/>
           </a:p>
@@ -7873,7 +7986,7 @@
                 <a:ea typeface="Calibri" pitchFamily="34" charset="-122"/>
                 <a:cs typeface="Calibri" pitchFamily="34" charset="-120"/>
               </a:rPr>
-              <a:t>First review gate — 23 designations: leads, supervisors, production and creative direction.</a:t>
+              <a:t>The person the task is assigned to, with Hold / Resume Own Task — on for every designation by default, and switchable off in Settings. Nobody can hold somebody else’s task in this version.</a:t>
             </a:r>
             <a:endParaRPr lang="en-US" sz="1000" dirty="0"/>
           </a:p>
@@ -7943,7 +8056,7 @@
                 <a:ea typeface="Calibri" pitchFamily="34" charset="-122"/>
                 <a:cs typeface="Calibri" pitchFamily="34" charset="-120"/>
               </a:rPr>
-              <a:t>An asset at TL Review.</a:t>
+              <a:t>A task in progress, where the Hold button sits.</a:t>
             </a:r>
             <a:endParaRPr lang="en-US" sz="1000" dirty="0"/>
           </a:p>
@@ -8114,7 +8227,7 @@
                 <a:ea typeface="Calibri" pitchFamily="34" charset="-122"/>
                 <a:cs typeface="Calibri" pitchFamily="34" charset="-120"/>
               </a:rPr>
-              <a:t>SECOND REVIEW GATE</a:t>
+              <a:t>FIRST REVIEW GATE</a:t>
             </a:r>
             <a:endParaRPr lang="en-US" sz="1100" dirty="0"/>
           </a:p>
@@ -8153,7 +8266,7 @@
                 <a:ea typeface="Cambria" pitchFamily="34" charset="-122"/>
                 <a:cs typeface="Cambria" pitchFamily="34" charset="-120"/>
               </a:rPr>
-              <a:t>The Creative Director, and the relay</a:t>
+              <a:t>The team lead sees it first</a:t>
             </a:r>
             <a:endParaRPr lang="en-US" sz="3400" dirty="0"/>
           </a:p>
@@ -8199,7 +8312,7 @@
                 <a:ea typeface="Calibri" pitchFamily="34" charset="-122"/>
                 <a:cs typeface="Calibri" pitchFamily="34" charset="-120"/>
               </a:rPr>
-              <a:t>Approve for client, or Submit Feedback — one action, not two competing decisions.</a:t>
+              <a:t>Approve to send it on to the Creative Director.</a:t>
             </a:r>
             <a:endParaRPr lang="en-US" sz="1400" dirty="0"/>
           </a:p>
@@ -8223,7 +8336,7 @@
                 <a:ea typeface="Calibri" pitchFamily="34" charset="-122"/>
                 <a:cs typeface="Calibri" pitchFamily="34" charset="-120"/>
               </a:rPr>
-              <a:t>Feedback goes to CD Feedbacks, which sits with the team lead first.</a:t>
+              <a:t>Request changes to send it back as TL Feedbacks, with a note.</a:t>
             </a:r>
             <a:endParaRPr lang="en-US" sz="1400" dirty="0"/>
           </a:p>
@@ -8247,7 +8360,7 @@
                 <a:ea typeface="Calibri" pitchFamily="34" charset="-122"/>
                 <a:cs typeface="Calibri" pitchFamily="34" charset="-120"/>
               </a:rPr>
-              <a:t>The lead reads the notes, adds their own reading, and relays them to the artist.</a:t>
+              <a:t>A studio without a Creative Director gate can send straight to Approved for Client, if the reviewer holds that permission.</a:t>
             </a:r>
             <a:endParaRPr lang="en-US" sz="1400" dirty="0"/>
           </a:p>
@@ -8271,7 +8384,7 @@
                 <a:ea typeface="Calibri" pitchFamily="34" charset="-122"/>
                 <a:cs typeface="Calibri" pitchFamily="34" charset="-120"/>
               </a:rPr>
-              <a:t>Until they do, the artist cannot start the rework — and the application says so plainly.</a:t>
+              <a:t>Rework comes back through this same gate.</a:t>
             </a:r>
             <a:endParaRPr lang="en-US" sz="1400" dirty="0"/>
           </a:p>
@@ -8351,7 +8464,7 @@
                 <a:ea typeface="Calibri" pitchFamily="34" charset="-122"/>
                 <a:cs typeface="Calibri" pitchFamily="34" charset="-120"/>
               </a:rPr>
-              <a:t>Creative direction — 9 designations: art direction and above.</a:t>
+              <a:t>First review gate — 23 designations: leads, supervisors, production and creative direction.</a:t>
             </a:r>
             <a:endParaRPr lang="en-US" sz="1000" dirty="0"/>
           </a:p>
@@ -8421,7 +8534,7 @@
                 <a:ea typeface="Calibri" pitchFamily="34" charset="-122"/>
                 <a:cs typeface="Calibri" pitchFamily="34" charset="-120"/>
               </a:rPr>
-              <a:t>An asset at CD Review.</a:t>
+              <a:t>An asset at TL Review.</a:t>
             </a:r>
             <a:endParaRPr lang="en-US" sz="1000" dirty="0"/>
           </a:p>
@@ -8592,7 +8705,7 @@
                 <a:ea typeface="Calibri" pitchFamily="34" charset="-122"/>
                 <a:cs typeface="Calibri" pitchFamily="34" charset="-120"/>
               </a:rPr>
-              <a:t>DELIVERY</a:t>
+              <a:t>SECOND REVIEW GATE</a:t>
             </a:r>
             <a:endParaRPr lang="en-US" sz="1100" dirty="0"/>
           </a:p>
@@ -8631,7 +8744,7 @@
                 <a:ea typeface="Cambria" pitchFamily="34" charset="-122"/>
                 <a:cs typeface="Cambria" pitchFamily="34" charset="-120"/>
               </a:rPr>
-              <a:t>Two ways out of the studio</a:t>
+              <a:t>The Creative Director, and the relay</a:t>
             </a:r>
             <a:endParaRPr lang="en-US" sz="3400" dirty="0"/>
           </a:p>
@@ -8677,7 +8790,7 @@
                 <a:ea typeface="Calibri" pitchFamily="34" charset="-122"/>
                 <a:cs typeface="Calibri" pitchFamily="34" charset="-120"/>
               </a:rPr>
-              <a:t>Deliver — handed over, and the asset is Delivered. One step.</a:t>
+              <a:t>Approve for client, or Submit Feedback — one action, not two competing decisions.</a:t>
             </a:r>
             <a:endParaRPr lang="en-US" sz="1400" dirty="0"/>
           </a:p>
@@ -8701,7 +8814,7 @@
                 <a:ea typeface="Calibri" pitchFamily="34" charset="-122"/>
                 <a:cs typeface="Calibri" pitchFamily="34" charset="-120"/>
               </a:rPr>
-              <a:t>Send to client review — the asset waits at Awaiting Client Feedback.</a:t>
+              <a:t>Feedback goes to CD Feedbacks, which sits with the team lead first.</a:t>
             </a:r>
             <a:endParaRPr lang="en-US" sz="1400" dirty="0"/>
           </a:p>
@@ -8725,7 +8838,7 @@
                 <a:ea typeface="Calibri" pitchFamily="34" charset="-122"/>
                 <a:cs typeface="Calibri" pitchFamily="34" charset="-120"/>
               </a:rPr>
-              <a:t>Client approved sends it to Delivered; client changes send it back to TL Feedbacks and round again.</a:t>
+              <a:t>The lead reads the notes, adds their own reading, and relays them to the artist.</a:t>
             </a:r>
             <a:endParaRPr lang="en-US" sz="1400" dirty="0"/>
           </a:p>
@@ -8749,7 +8862,7 @@
                 <a:ea typeface="Calibri" pitchFamily="34" charset="-122"/>
                 <a:cs typeface="Calibri" pitchFamily="34" charset="-120"/>
               </a:rPr>
-              <a:t>A studio uses whichever route matches how it works with that client.</a:t>
+              <a:t>Until they do, the artist cannot start the rework — and the application says so plainly.</a:t>
             </a:r>
             <a:endParaRPr lang="en-US" sz="1400" dirty="0"/>
           </a:p>
@@ -8829,7 +8942,7 @@
                 <a:ea typeface="Calibri" pitchFamily="34" charset="-122"/>
                 <a:cs typeface="Calibri" pitchFamily="34" charset="-120"/>
               </a:rPr>
-              <a:t>Delivery — 18 designations. The whole client-feedback loop is Super Admin only until granted.</a:t>
+              <a:t>Creative direction — 9 designations: art direction and above.</a:t>
             </a:r>
             <a:endParaRPr lang="en-US" sz="1000" dirty="0"/>
           </a:p>
@@ -8851,8 +8964,8 @@
         </p:blipFill>
         <p:spPr>
           <a:xfrm>
-            <a:off x="5989320" y="2795305"/>
-            <a:ext cx="5632704" cy="1633151"/>
+            <a:off x="7882677" y="1371600"/>
+            <a:ext cx="1845991" cy="4480560"/>
           </a:xfrm>
           <a:prstGeom prst="rect">
             <a:avLst/>
@@ -8874,7 +8987,7 @@
         </p:nvSpPr>
         <p:spPr>
           <a:xfrm>
-            <a:off x="5989320" y="4538183"/>
+            <a:off x="5989320" y="5961888"/>
             <a:ext cx="5632704" cy="457200"/>
           </a:xfrm>
           <a:prstGeom prst="rect">
@@ -8899,7 +9012,7 @@
                 <a:ea typeface="Calibri" pitchFamily="34" charset="-122"/>
                 <a:cs typeface="Calibri" pitchFamily="34" charset="-120"/>
               </a:rPr>
-              <a:t>The later columns on the board.</a:t>
+              <a:t>An asset at CD Review.</a:t>
             </a:r>
             <a:endParaRPr lang="en-US" sz="1000" dirty="0"/>
           </a:p>
@@ -9070,7 +9183,7 @@
                 <a:ea typeface="Calibri" pitchFamily="34" charset="-122"/>
                 <a:cs typeface="Calibri" pitchFamily="34" charset="-120"/>
               </a:rPr>
-              <a:t>PROJECT REVIEWS</a:t>
+              <a:t>DELIVERY</a:t>
             </a:r>
             <a:endParaRPr lang="en-US" sz="1100" dirty="0"/>
           </a:p>
@@ -9109,7 +9222,7 @@
                 <a:ea typeface="Cambria" pitchFamily="34" charset="-122"/>
                 <a:cs typeface="Cambria" pitchFamily="34" charset="-120"/>
               </a:rPr>
-              <a:t>A project, not an asset</a:t>
+              <a:t>Two ways out of the studio</a:t>
             </a:r>
             <a:endParaRPr lang="en-US" sz="3400" dirty="0"/>
           </a:p>
@@ -9155,7 +9268,7 @@
                 <a:ea typeface="Calibri" pitchFamily="34" charset="-122"/>
                 <a:cs typeface="Calibri" pitchFamily="34" charset="-120"/>
               </a:rPr>
-              <a:t>A producer sends a project to the Creative Director with a question.</a:t>
+              <a:t>Deliver — handed over, and the asset is Delivered. One step.</a:t>
             </a:r>
             <a:endParaRPr lang="en-US" sz="1400" dirty="0"/>
           </a:p>
@@ -9179,7 +9292,7 @@
                 <a:ea typeface="Calibri" pitchFamily="34" charset="-122"/>
                 <a:cs typeface="Calibri" pitchFamily="34" charset="-120"/>
               </a:rPr>
-              <a:t>It lands in the reviewer’s Pending Actions, which carries a count and highlights while something waits.</a:t>
+              <a:t>Send to client review — the asset waits at Awaiting Client Feedback.</a:t>
             </a:r>
             <a:endParaRPr lang="en-US" sz="1400" dirty="0"/>
           </a:p>
@@ -9203,7 +9316,7 @@
                 <a:ea typeface="Calibri" pitchFamily="34" charset="-122"/>
                 <a:cs typeface="Calibri" pitchFamily="34" charset="-120"/>
               </a:rPr>
-              <a:t>The reviewer answers with Submit Feedback; the submitter is notified at once.</a:t>
+              <a:t>Client approved sends it to Delivered; client changes send it back to TL Feedbacks and round again.</a:t>
             </a:r>
             <a:endParaRPr lang="en-US" sz="1400" dirty="0"/>
           </a:p>
@@ -9227,31 +9340,7 @@
                 <a:ea typeface="Calibri" pitchFamily="34" charset="-122"/>
                 <a:cs typeface="Calibri" pitchFamily="34" charset="-120"/>
               </a:rPr>
-              <a:t>The submitter reads it and presses Acknowledge and Close.</a:t>
-            </a:r>
-            <a:endParaRPr lang="en-US" sz="1400" dirty="0"/>
-          </a:p>
-          <a:p>
-            <a:pPr marL="342900" indent="-342900">
-              <a:lnSpc>
-                <a:spcPts val="2000"/>
-              </a:lnSpc>
-              <a:spcAft>
-                <a:spcPts val="1000"/>
-              </a:spcAft>
-              <a:buSzPct val="100000"/>
-              <a:buChar char="•"/>
-            </a:pPr>
-            <a:r>
-              <a:rPr lang="en-US" sz="1400" dirty="0">
-                <a:solidFill>
-                  <a:srgbClr val="F4F1F0"/>
-                </a:solidFill>
-                <a:latin typeface="Calibri" pitchFamily="34" charset="0"/>
-                <a:ea typeface="Calibri" pitchFamily="34" charset="-122"/>
-                <a:cs typeface="Calibri" pitchFamily="34" charset="-120"/>
-              </a:rPr>
-              <a:t>Your own submissions never appear in your queue to answer, only in your queue to read.</a:t>
+              <a:t>A studio uses whichever route matches how it works with that client.</a:t>
             </a:r>
             <a:endParaRPr lang="en-US" sz="1400" dirty="0"/>
           </a:p>
@@ -9331,7 +9420,7 @@
                 <a:ea typeface="Calibri" pitchFamily="34" charset="-122"/>
                 <a:cs typeface="Calibri" pitchFamily="34" charset="-120"/>
               </a:rPr>
-              <a:t>Creative Art Director and Super Admin. Sending, and seeing your own submissions, are Super Admin only until granted.</a:t>
+              <a:t>Delivery — 18 designations. The whole client-feedback loop is Super Admin only until granted.</a:t>
             </a:r>
             <a:endParaRPr lang="en-US" sz="1000" dirty="0"/>
           </a:p>
@@ -9353,8 +9442,8 @@
         </p:blipFill>
         <p:spPr>
           <a:xfrm>
-            <a:off x="5989320" y="1811110"/>
-            <a:ext cx="5632704" cy="3601539"/>
+            <a:off x="5989320" y="2795305"/>
+            <a:ext cx="5632704" cy="1633151"/>
           </a:xfrm>
           <a:prstGeom prst="rect">
             <a:avLst/>
@@ -9376,7 +9465,7 @@
         </p:nvSpPr>
         <p:spPr>
           <a:xfrm>
-            <a:off x="5989320" y="5522378"/>
+            <a:off x="5989320" y="4538183"/>
             <a:ext cx="5632704" cy="457200"/>
           </a:xfrm>
           <a:prstGeom prst="rect">
@@ -9401,7 +9490,7 @@
                 <a:ea typeface="Calibri" pitchFamily="34" charset="-122"/>
                 <a:cs typeface="Calibri" pitchFamily="34" charset="-120"/>
               </a:rPr>
-              <a:t>Pending Actions, as the Creative Director.</a:t>
+              <a:t>The later columns on the board.</a:t>
             </a:r>
             <a:endParaRPr lang="en-US" sz="1000" dirty="0"/>
           </a:p>
@@ -10241,7 +10330,7 @@
                 <a:ea typeface="Calibri" pitchFamily="34" charset="-122"/>
                 <a:cs typeface="Calibri" pitchFamily="34" charset="-120"/>
               </a:rPr>
-              <a:t>TIME SHEET</a:t>
+              <a:t>PROJECT REVIEWS</a:t>
             </a:r>
             <a:endParaRPr lang="en-US" sz="1100" dirty="0"/>
           </a:p>
@@ -10280,7 +10369,7 @@
                 <a:ea typeface="Cambria" pitchFamily="34" charset="-122"/>
                 <a:cs typeface="Cambria" pitchFamily="34" charset="-120"/>
               </a:rPr>
-              <a:t>A day at a time, in IST</a:t>
+              <a:t>A project, not an asset</a:t>
             </a:r>
             <a:endParaRPr lang="en-US" sz="3400" dirty="0"/>
           </a:p>
@@ -10326,7 +10415,7 @@
                 <a:ea typeface="Calibri" pitchFamily="34" charset="-122"/>
                 <a:cs typeface="Calibri" pitchFamily="34" charset="-120"/>
               </a:rPr>
-              <a:t>The working window is printed above the week — 09:30 to 19:00 IST, lunch 13:00 to 14:00, 8 hours a day.</a:t>
+              <a:t>A producer sends a project to the Creative Director with a question.</a:t>
             </a:r>
             <a:endParaRPr lang="en-US" sz="1400" dirty="0"/>
           </a:p>
@@ -10350,7 +10439,7 @@
                 <a:ea typeface="Calibri" pitchFamily="34" charset="-122"/>
                 <a:cs typeface="Calibri" pitchFamily="34" charset="-120"/>
               </a:rPr>
-              <a:t>Lines outside the day are refused; the lunch hour is taken out of any line that crosses it.</a:t>
+              <a:t>It lands in the reviewer’s Pending Actions, which carries a count and highlights while something waits.</a:t>
             </a:r>
             <a:endParaRPr lang="en-US" sz="1400" dirty="0"/>
           </a:p>
@@ -10374,7 +10463,7 @@
                 <a:ea typeface="Calibri" pitchFamily="34" charset="-122"/>
                 <a:cs typeface="Calibri" pitchFamily="34" charset="-120"/>
               </a:rPr>
-              <a:t>Submission is daily. A submitted day is with your approver and no longer yours to edit.</a:t>
+              <a:t>The reviewer answers with Submit Feedback; the submitter is notified at once.</a:t>
             </a:r>
             <a:endParaRPr lang="en-US" sz="1400" dirty="0"/>
           </a:p>
@@ -10398,7 +10487,7 @@
                 <a:ea typeface="Calibri" pitchFamily="34" charset="-122"/>
                 <a:cs typeface="Calibri" pitchFamily="34" charset="-120"/>
               </a:rPr>
-              <a:t>Approvers see their team’s days, with the count carried on the tab.</a:t>
+              <a:t>The submitter reads it and presses Acknowledge and Close.</a:t>
             </a:r>
             <a:endParaRPr lang="en-US" sz="1400" dirty="0"/>
           </a:p>
@@ -10422,7 +10511,7 @@
                 <a:ea typeface="Calibri" pitchFamily="34" charset="-122"/>
                 <a:cs typeface="Calibri" pitchFamily="34" charset="-120"/>
               </a:rPr>
-              <a:t>Every rule reads the configured window — change it in Settings and the rules change with it.</a:t>
+              <a:t>Your own submissions never appear in your queue to answer, only in your queue to read.</a:t>
             </a:r>
             <a:endParaRPr lang="en-US" sz="1400" dirty="0"/>
           </a:p>
@@ -10502,7 +10591,7 @@
                 <a:ea typeface="Calibri" pitchFamily="34" charset="-122"/>
                 <a:cs typeface="Calibri" pitchFamily="34" charset="-120"/>
               </a:rPr>
-              <a:t>Everybody fills in their own. Approving sits with leads and producers — 18 designations.</a:t>
+              <a:t>Creative Art Director and Super Admin. Sending, and seeing your own submissions, are Super Admin only until granted.</a:t>
             </a:r>
             <a:endParaRPr lang="en-US" sz="1000" dirty="0"/>
           </a:p>
@@ -10524,8 +10613,8 @@
         </p:blipFill>
         <p:spPr>
           <a:xfrm>
-            <a:off x="5989320" y="2312451"/>
-            <a:ext cx="5632704" cy="2598859"/>
+            <a:off x="5989320" y="1811110"/>
+            <a:ext cx="5632704" cy="3601539"/>
           </a:xfrm>
           <a:prstGeom prst="rect">
             <a:avLst/>
@@ -10547,7 +10636,7 @@
         </p:nvSpPr>
         <p:spPr>
           <a:xfrm>
-            <a:off x="5989320" y="5021037"/>
+            <a:off x="5989320" y="5522378"/>
             <a:ext cx="5632704" cy="457200"/>
           </a:xfrm>
           <a:prstGeom prst="rect">
@@ -10572,7 +10661,7 @@
                 <a:ea typeface="Calibri" pitchFamily="34" charset="-122"/>
                 <a:cs typeface="Calibri" pitchFamily="34" charset="-120"/>
               </a:rPr>
-              <a:t>A week: Submitted, Approved and Draft days.</a:t>
+              <a:t>Pending Actions, as the Creative Director.</a:t>
             </a:r>
             <a:endParaRPr lang="en-US" sz="1000" dirty="0"/>
           </a:p>
@@ -10743,7 +10832,7 @@
                 <a:ea typeface="Calibri" pitchFamily="34" charset="-122"/>
                 <a:cs typeface="Calibri" pitchFamily="34" charset="-120"/>
               </a:rPr>
-              <a:t>REPORTS</a:t>
+              <a:t>TIME SHEET</a:t>
             </a:r>
             <a:endParaRPr lang="en-US" sz="1100" dirty="0"/>
           </a:p>
@@ -10782,7 +10871,7 @@
                 <a:ea typeface="Cambria" pitchFamily="34" charset="-122"/>
                 <a:cs typeface="Cambria" pitchFamily="34" charset="-120"/>
               </a:rPr>
-              <a:t>Estimate against actual, and time with nothing open</a:t>
+              <a:t>A day at a time, in IST</a:t>
             </a:r>
             <a:endParaRPr lang="en-US" sz="3400" dirty="0"/>
           </a:p>
@@ -10828,7 +10917,7 @@
                 <a:ea typeface="Calibri" pitchFamily="34" charset="-122"/>
                 <a:cs typeface="Calibri" pitchFamily="34" charset="-120"/>
               </a:rPr>
-              <a:t>Efficiency compares each asset’s man hours against Time Spent, by user, asset, project or scope of work.</a:t>
+              <a:t>The working window is printed above the week — 09:30 to 19:00 IST, lunch 13:00 to 14:00, 8 hours a day.</a:t>
             </a:r>
             <a:endParaRPr lang="en-US" sz="1400" dirty="0"/>
           </a:p>
@@ -10852,7 +10941,7 @@
                 <a:ea typeface="Calibri" pitchFamily="34" charset="-122"/>
                 <a:cs typeface="Calibri" pitchFamily="34" charset="-120"/>
               </a:rPr>
-              <a:t>It says how many assets had time held back, and Idle counts that same held time as idle — the two reports are meant to disagree there.</a:t>
+              <a:t>Lines outside the day are refused; the lunch hour is taken out of any line that crosses it.</a:t>
             </a:r>
             <a:endParaRPr lang="en-US" sz="1400" dirty="0"/>
           </a:p>
@@ -10876,7 +10965,7 @@
                 <a:ea typeface="Calibri" pitchFamily="34" charset="-122"/>
                 <a:cs typeface="Calibri" pitchFamily="34" charset="-120"/>
               </a:rPr>
-              <a:t>Idle is working time during which somebody had nothing started.</a:t>
+              <a:t>Submission is daily. A submitted day is with your approver and no longer yours to edit.</a:t>
             </a:r>
             <a:endParaRPr lang="en-US" sz="1400" dirty="0"/>
           </a:p>
@@ -10900,7 +10989,7 @@
                 <a:ea typeface="Calibri" pitchFamily="34" charset="-122"/>
                 <a:cs typeface="Calibri" pitchFamily="34" charset="-120"/>
               </a:rPr>
-              <a:t>Idle counts against the configured working hours, so evenings and lunch are not counted as idle.</a:t>
+              <a:t>Approvers see their team’s days, with the count carried on the tab.</a:t>
             </a:r>
             <a:endParaRPr lang="en-US" sz="1400" dirty="0"/>
           </a:p>
@@ -10924,31 +11013,7 @@
                 <a:ea typeface="Calibri" pitchFamily="34" charset="-122"/>
                 <a:cs typeface="Calibri" pitchFamily="34" charset="-120"/>
               </a:rPr>
-              <a:t>Idle Now answers the immediate question: who has nothing open right now.</a:t>
-            </a:r>
-            <a:endParaRPr lang="en-US" sz="1400" dirty="0"/>
-          </a:p>
-          <a:p>
-            <a:pPr marL="342900" indent="-342900">
-              <a:lnSpc>
-                <a:spcPts val="2000"/>
-              </a:lnSpc>
-              <a:spcAft>
-                <a:spcPts val="1000"/>
-              </a:spcAft>
-              <a:buSzPct val="100000"/>
-              <a:buChar char="•"/>
-            </a:pPr>
-            <a:r>
-              <a:rPr lang="en-US" sz="1400" dirty="0">
-                <a:solidFill>
-                  <a:srgbClr val="F4F1F0"/>
-                </a:solidFill>
-                <a:latin typeface="Calibri" pitchFamily="34" charset="0"/>
-                <a:ea typeface="Calibri" pitchFamily="34" charset="-122"/>
-                <a:cs typeface="Calibri" pitchFamily="34" charset="-120"/>
-              </a:rPr>
-              <a:t>Every report exports to Excel and PDF, named after the view you were looking at.</a:t>
+              <a:t>Every rule reads the configured window — change it in Settings and the rules change with it.</a:t>
             </a:r>
             <a:endParaRPr lang="en-US" sz="1400" dirty="0"/>
           </a:p>
@@ -11028,7 +11093,7 @@
                 <a:ea typeface="Calibri" pitchFamily="34" charset="-122"/>
                 <a:cs typeface="Calibri" pitchFamily="34" charset="-120"/>
               </a:rPr>
-              <a:t>Studio leadership — 7 designations, plus anyone given View Reports. Team Lead is a common addition.</a:t>
+              <a:t>Everybody fills in their own. Approving sits with leads and producers — 18 designations.</a:t>
             </a:r>
             <a:endParaRPr lang="en-US" sz="1000" dirty="0"/>
           </a:p>
@@ -11050,8 +11115,8 @@
         </p:blipFill>
         <p:spPr>
           <a:xfrm>
-            <a:off x="5989320" y="1918014"/>
-            <a:ext cx="5632704" cy="3387732"/>
+            <a:off x="5989320" y="2312451"/>
+            <a:ext cx="5632704" cy="2598859"/>
           </a:xfrm>
           <a:prstGeom prst="rect">
             <a:avLst/>
@@ -11073,7 +11138,7 @@
         </p:nvSpPr>
         <p:spPr>
           <a:xfrm>
-            <a:off x="5989320" y="5415474"/>
+            <a:off x="5989320" y="5021037"/>
             <a:ext cx="5632704" cy="457200"/>
           </a:xfrm>
           <a:prstGeom prst="rect">
@@ -11098,7 +11163,7 @@
                 <a:ea typeface="Calibri" pitchFamily="34" charset="-122"/>
                 <a:cs typeface="Calibri" pitchFamily="34" charset="-120"/>
               </a:rPr>
-              <a:t>The Idle report.</a:t>
+              <a:t>A week: Submitted, Approved and Draft days.</a:t>
             </a:r>
             <a:endParaRPr lang="en-US" sz="1000" dirty="0"/>
           </a:p>
@@ -11269,7 +11334,7 @@
                 <a:ea typeface="Calibri" pitchFamily="34" charset="-122"/>
                 <a:cs typeface="Calibri" pitchFamily="34" charset="-120"/>
               </a:rPr>
-              <a:t>PEOPLE</a:t>
+              <a:t>REPORTS</a:t>
             </a:r>
             <a:endParaRPr lang="en-US" sz="1100" dirty="0"/>
           </a:p>
@@ -11308,7 +11373,7 @@
                 <a:ea typeface="Cambria" pitchFamily="34" charset="-122"/>
                 <a:cs typeface="Cambria" pitchFamily="34" charset="-120"/>
               </a:rPr>
-              <a:t>The staff list, and your own team</a:t>
+              <a:t>Estimate against actual, and time with nothing open</a:t>
             </a:r>
             <a:endParaRPr lang="en-US" sz="3400" dirty="0"/>
           </a:p>
@@ -11354,7 +11419,7 @@
                 <a:ea typeface="Calibri" pitchFamily="34" charset="-122"/>
                 <a:cs typeface="Calibri" pitchFamily="34" charset="-120"/>
               </a:rPr>
-              <a:t>Add a person with their name, sign-in email, designation, reporting line and project.</a:t>
+              <a:t>Efficiency compares each asset’s man hours against Time Spent, by user, asset, project or scope of work.</a:t>
             </a:r>
             <a:endParaRPr lang="en-US" sz="1400" dirty="0"/>
           </a:p>
@@ -11378,7 +11443,7 @@
                 <a:ea typeface="Calibri" pitchFamily="34" charset="-122"/>
                 <a:cs typeface="Calibri" pitchFamily="34" charset="-120"/>
               </a:rPr>
-              <a:t>What a designation can do comes from the tier behind it — pick the closest match.</a:t>
+              <a:t>It says how many assets had time held back, and Idle counts that same held time as idle — the two reports are meant to disagree there.</a:t>
             </a:r>
             <a:endParaRPr lang="en-US" sz="1400" dirty="0"/>
           </a:p>
@@ -11402,7 +11467,7 @@
                 <a:ea typeface="Calibri" pitchFamily="34" charset="-122"/>
                 <a:cs typeface="Calibri" pitchFamily="34" charset="-120"/>
               </a:rPr>
-              <a:t>Bulk import takes name, email and role as required columns.</a:t>
+              <a:t>Idle is working time during which somebody had nothing started.</a:t>
             </a:r>
             <a:endParaRPr lang="en-US" sz="1400" dirty="0"/>
           </a:p>
@@ -11426,7 +11491,55 @@
                 <a:ea typeface="Calibri" pitchFamily="34" charset="-122"/>
                 <a:cs typeface="Calibri" pitchFamily="34" charset="-120"/>
               </a:rPr>
-              <a:t>My Team shows the people who report to you, what they are carrying and how far along it is.</a:t>
+              <a:t>Idle counts against the configured working hours, so evenings and lunch are not counted as idle.</a:t>
+            </a:r>
+            <a:endParaRPr lang="en-US" sz="1400" dirty="0"/>
+          </a:p>
+          <a:p>
+            <a:pPr marL="342900" indent="-342900">
+              <a:lnSpc>
+                <a:spcPts val="2000"/>
+              </a:lnSpc>
+              <a:spcAft>
+                <a:spcPts val="1000"/>
+              </a:spcAft>
+              <a:buSzPct val="100000"/>
+              <a:buChar char="•"/>
+            </a:pPr>
+            <a:r>
+              <a:rPr lang="en-US" sz="1400" dirty="0">
+                <a:solidFill>
+                  <a:srgbClr val="F4F1F0"/>
+                </a:solidFill>
+                <a:latin typeface="Calibri" pitchFamily="34" charset="0"/>
+                <a:ea typeface="Calibri" pitchFamily="34" charset="-122"/>
+                <a:cs typeface="Calibri" pitchFamily="34" charset="-120"/>
+              </a:rPr>
+              <a:t>Idle Now answers the immediate question: who has nothing open right now.</a:t>
+            </a:r>
+            <a:endParaRPr lang="en-US" sz="1400" dirty="0"/>
+          </a:p>
+          <a:p>
+            <a:pPr marL="342900" indent="-342900">
+              <a:lnSpc>
+                <a:spcPts val="2000"/>
+              </a:lnSpc>
+              <a:spcAft>
+                <a:spcPts val="1000"/>
+              </a:spcAft>
+              <a:buSzPct val="100000"/>
+              <a:buChar char="•"/>
+            </a:pPr>
+            <a:r>
+              <a:rPr lang="en-US" sz="1400" dirty="0">
+                <a:solidFill>
+                  <a:srgbClr val="F4F1F0"/>
+                </a:solidFill>
+                <a:latin typeface="Calibri" pitchFamily="34" charset="0"/>
+                <a:ea typeface="Calibri" pitchFamily="34" charset="-122"/>
+                <a:cs typeface="Calibri" pitchFamily="34" charset="-120"/>
+              </a:rPr>
+              <a:t>Every report exports to Excel and PDF, named after the view you were looking at.</a:t>
             </a:r>
             <a:endParaRPr lang="en-US" sz="1400" dirty="0"/>
           </a:p>
@@ -11506,7 +11619,7 @@
                 <a:ea typeface="Calibri" pitchFamily="34" charset="-122"/>
                 <a:cs typeface="Calibri" pitchFamily="34" charset="-120"/>
               </a:rPr>
-              <a:t>Administration — 8 designations. My Team is open to anyone who supervises people — 14.</a:t>
+              <a:t>Studio leadership — 7 designations, plus anyone given View Reports. Team Lead is a common addition.</a:t>
             </a:r>
             <a:endParaRPr lang="en-US" sz="1000" dirty="0"/>
           </a:p>
@@ -11528,8 +11641,8 @@
         </p:blipFill>
         <p:spPr>
           <a:xfrm>
-            <a:off x="5989320" y="2869086"/>
-            <a:ext cx="5632704" cy="1485589"/>
+            <a:off x="5989320" y="1918014"/>
+            <a:ext cx="5632704" cy="3387732"/>
           </a:xfrm>
           <a:prstGeom prst="rect">
             <a:avLst/>
@@ -11551,7 +11664,7 @@
         </p:nvSpPr>
         <p:spPr>
           <a:xfrm>
-            <a:off x="5989320" y="4464402"/>
+            <a:off x="5989320" y="5415474"/>
             <a:ext cx="5632704" cy="457200"/>
           </a:xfrm>
           <a:prstGeom prst="rect">
@@ -11576,7 +11689,7 @@
                 <a:ea typeface="Calibri" pitchFamily="34" charset="-122"/>
                 <a:cs typeface="Calibri" pitchFamily="34" charset="-120"/>
               </a:rPr>
-              <a:t>My Team, as a Team Lead.</a:t>
+              <a:t>The Idle report.</a:t>
             </a:r>
             <a:endParaRPr lang="en-US" sz="1000" dirty="0"/>
           </a:p>
@@ -11747,7 +11860,7 @@
                 <a:ea typeface="Calibri" pitchFamily="34" charset="-122"/>
                 <a:cs typeface="Calibri" pitchFamily="34" charset="-120"/>
               </a:rPr>
-              <a:t>YOU</a:t>
+              <a:t>PEOPLE</a:t>
             </a:r>
             <a:endParaRPr lang="en-US" sz="1100" dirty="0"/>
           </a:p>
@@ -11786,7 +11899,7 @@
                 <a:ea typeface="Cambria" pitchFamily="34" charset="-122"/>
                 <a:cs typeface="Cambria" pitchFamily="34" charset="-120"/>
               </a:rPr>
-              <a:t>Notifications, your photo, your password</a:t>
+              <a:t>The staff list, and your own team</a:t>
             </a:r>
             <a:endParaRPr lang="en-US" sz="3400" dirty="0"/>
           </a:p>
@@ -11832,7 +11945,7 @@
                 <a:ea typeface="Calibri" pitchFamily="34" charset="-122"/>
                 <a:cs typeface="Calibri" pitchFamily="34" charset="-120"/>
               </a:rPr>
-              <a:t>The bell carries unread notifications: work assigned to you, reviews coming back, feedback landing, time sheets waiting.</a:t>
+              <a:t>Add a person with their name, sign-in email, designation, reporting line and project.</a:t>
             </a:r>
             <a:endParaRPr lang="en-US" sz="1400" dirty="0"/>
           </a:p>
@@ -11856,7 +11969,7 @@
                 <a:ea typeface="Calibri" pitchFamily="34" charset="-122"/>
                 <a:cs typeface="Calibri" pitchFamily="34" charset="-120"/>
               </a:rPr>
-              <a:t>Profile holds your photo, which then appears everywhere you are represented.</a:t>
+              <a:t>What a designation can do comes from the tier behind it — pick the closest match.</a:t>
             </a:r>
             <a:endParaRPr lang="en-US" sz="1400" dirty="0"/>
           </a:p>
@@ -11880,7 +11993,7 @@
                 <a:ea typeface="Calibri" pitchFamily="34" charset="-122"/>
                 <a:cs typeface="Calibri" pitchFamily="34" charset="-120"/>
               </a:rPr>
-              <a:t>Profile also holds your password.</a:t>
+              <a:t>Bulk import takes name, email and role as required columns.</a:t>
             </a:r>
             <a:endParaRPr lang="en-US" sz="1400" dirty="0"/>
           </a:p>
@@ -11904,7 +12017,7 @@
                 <a:ea typeface="Calibri" pitchFamily="34" charset="-122"/>
                 <a:cs typeface="Calibri" pitchFamily="34" charset="-120"/>
               </a:rPr>
-              <a:t>Changing your password signs out every other session — deliberately, since a password is changed because it may be known.</a:t>
+              <a:t>My Team shows the people who report to you, what they are carrying and how far along it is.</a:t>
             </a:r>
             <a:endParaRPr lang="en-US" sz="1400" dirty="0"/>
           </a:p>
@@ -11984,7 +12097,7 @@
                 <a:ea typeface="Calibri" pitchFamily="34" charset="-122"/>
                 <a:cs typeface="Calibri" pitchFamily="34" charset="-120"/>
               </a:rPr>
-              <a:t>Everybody, for themselves.</a:t>
+              <a:t>Administration — 8 designations. My Team is open to anyone who supervises people — 14.</a:t>
             </a:r>
             <a:endParaRPr lang="en-US" sz="1000" dirty="0"/>
           </a:p>
@@ -12006,8 +12119,8 @@
         </p:blipFill>
         <p:spPr>
           <a:xfrm>
-            <a:off x="5989320" y="2023074"/>
-            <a:ext cx="5632704" cy="3177612"/>
+            <a:off x="5989320" y="2869086"/>
+            <a:ext cx="5632704" cy="1485589"/>
           </a:xfrm>
           <a:prstGeom prst="rect">
             <a:avLst/>
@@ -12029,7 +12142,7 @@
         </p:nvSpPr>
         <p:spPr>
           <a:xfrm>
-            <a:off x="5989320" y="5310414"/>
+            <a:off x="5989320" y="4464402"/>
             <a:ext cx="5632704" cy="457200"/>
           </a:xfrm>
           <a:prstGeom prst="rect">
@@ -12054,7 +12167,7 @@
                 <a:ea typeface="Calibri" pitchFamily="34" charset="-122"/>
                 <a:cs typeface="Calibri" pitchFamily="34" charset="-120"/>
               </a:rPr>
-              <a:t>The Profile panel.</a:t>
+              <a:t>My Team, as a Team Lead.</a:t>
             </a:r>
             <a:endParaRPr lang="en-US" sz="1000" dirty="0"/>
           </a:p>
@@ -12225,7 +12338,7 @@
                 <a:ea typeface="Calibri" pitchFamily="34" charset="-122"/>
                 <a:cs typeface="Calibri" pitchFamily="34" charset="-120"/>
               </a:rPr>
-              <a:t>SETTINGS</a:t>
+              <a:t>YOU</a:t>
             </a:r>
             <a:endParaRPr lang="en-US" sz="1100" dirty="0"/>
           </a:p>
@@ -12264,7 +12377,7 @@
                 <a:ea typeface="Cambria" pitchFamily="34" charset="-122"/>
                 <a:cs typeface="Cambria" pitchFamily="34" charset="-120"/>
               </a:rPr>
-              <a:t>Not one screen, but the ones you hold</a:t>
+              <a:t>Notifications, your photo, your password</a:t>
             </a:r>
             <a:endParaRPr lang="en-US" sz="3400" dirty="0"/>
           </a:p>
@@ -12310,7 +12423,7 @@
                 <a:ea typeface="Calibri" pitchFamily="34" charset="-122"/>
                 <a:cs typeface="Calibri" pitchFamily="34" charset="-120"/>
               </a:rPr>
-              <a:t>Working hours and lunch — the window the Time Sheet and the Idle report both read.</a:t>
+              <a:t>The bell carries unread notifications: work assigned to you, reviews coming back, feedback landing, time sheets waiting.</a:t>
             </a:r>
             <a:endParaRPr lang="en-US" sz="1400" dirty="0"/>
           </a:p>
@@ -12334,7 +12447,7 @@
                 <a:ea typeface="Calibri" pitchFamily="34" charset="-122"/>
                 <a:cs typeface="Calibri" pitchFamily="34" charset="-120"/>
               </a:rPr>
-              <a:t>Branding — the studio name and the colour used across the application.</a:t>
+              <a:t>Profile holds your photo, which then appears everywhere you are represented.</a:t>
             </a:r>
             <a:endParaRPr lang="en-US" sz="1400" dirty="0"/>
           </a:p>
@@ -12358,7 +12471,7 @@
                 <a:ea typeface="Calibri" pitchFamily="34" charset="-122"/>
                 <a:cs typeface="Calibri" pitchFamily="34" charset="-120"/>
               </a:rPr>
-              <a:t>Four value lists: Scope of Work, Priorities, Categories and Roles.</a:t>
+              <a:t>Profile also holds your password.</a:t>
             </a:r>
             <a:endParaRPr lang="en-US" sz="1400" dirty="0"/>
           </a:p>
@@ -12382,31 +12495,7 @@
                 <a:ea typeface="Calibri" pitchFamily="34" charset="-122"/>
                 <a:cs typeface="Calibri" pitchFamily="34" charset="-120"/>
               </a:rPr>
-              <a:t>Renaming a value is safe; a value in use cannot be deleted, only deactivated.</a:t>
-            </a:r>
-            <a:endParaRPr lang="en-US" sz="1400" dirty="0"/>
-          </a:p>
-          <a:p>
-            <a:pPr marL="342900" indent="-342900">
-              <a:lnSpc>
-                <a:spcPts val="2000"/>
-              </a:lnSpc>
-              <a:spcAft>
-                <a:spcPts val="1000"/>
-              </a:spcAft>
-              <a:buSzPct val="100000"/>
-              <a:buChar char="•"/>
-            </a:pPr>
-            <a:r>
-              <a:rPr lang="en-US" sz="1400" dirty="0">
-                <a:solidFill>
-                  <a:srgbClr val="F4F1F0"/>
-                </a:solidFill>
-                <a:latin typeface="Calibri" pitchFamily="34" charset="0"/>
-                <a:ea typeface="Calibri" pitchFamily="34" charset="-122"/>
-                <a:cs typeface="Calibri" pitchFamily="34" charset="-120"/>
-              </a:rPr>
-              <a:t>A person given one Settings permission gets this page with exactly that one section on it.</a:t>
+              <a:t>Changing your password signs out every other session — deliberately, since a password is changed because it may be known.</a:t>
             </a:r>
             <a:endParaRPr lang="en-US" sz="1400" dirty="0"/>
           </a:p>
@@ -12486,7 +12575,7 @@
                 <a:ea typeface="Calibri" pitchFamily="34" charset="-122"/>
                 <a:cs typeface="Calibri" pitchFamily="34" charset="-120"/>
               </a:rPr>
-              <a:t>Studio leadership — 7 designations, one permission per section.</a:t>
+              <a:t>Everybody, for themselves.</a:t>
             </a:r>
             <a:endParaRPr lang="en-US" sz="1000" dirty="0"/>
           </a:p>
@@ -12508,8 +12597,8 @@
         </p:blipFill>
         <p:spPr>
           <a:xfrm>
-            <a:off x="5989320" y="2786972"/>
-            <a:ext cx="5632704" cy="1649816"/>
+            <a:off x="5989320" y="2023074"/>
+            <a:ext cx="5632704" cy="3177612"/>
           </a:xfrm>
           <a:prstGeom prst="rect">
             <a:avLst/>
@@ -12531,7 +12620,7 @@
         </p:nvSpPr>
         <p:spPr>
           <a:xfrm>
-            <a:off x="5989320" y="4546516"/>
+            <a:off x="5989320" y="5310414"/>
             <a:ext cx="5632704" cy="457200"/>
           </a:xfrm>
           <a:prstGeom prst="rect">
@@ -12556,7 +12645,7 @@
                 <a:ea typeface="Calibri" pitchFamily="34" charset="-122"/>
                 <a:cs typeface="Calibri" pitchFamily="34" charset="-120"/>
               </a:rPr>
-              <a:t>The working-hours control.</a:t>
+              <a:t>The Profile panel.</a:t>
             </a:r>
             <a:endParaRPr lang="en-US" sz="1000" dirty="0"/>
           </a:p>
@@ -12727,7 +12816,7 @@
                 <a:ea typeface="Calibri" pitchFamily="34" charset="-122"/>
                 <a:cs typeface="Calibri" pitchFamily="34" charset="-120"/>
               </a:rPr>
-              <a:t>PERMISSIONS</a:t>
+              <a:t>SETTINGS</a:t>
             </a:r>
             <a:endParaRPr lang="en-US" sz="1100" dirty="0"/>
           </a:p>
@@ -12766,7 +12855,7 @@
                 <a:ea typeface="Cambria" pitchFamily="34" charset="-122"/>
                 <a:cs typeface="Cambria" pitchFamily="34" charset="-120"/>
               </a:rPr>
-              <a:t>Twelve access bands, not sixty role lists</a:t>
+              <a:t>Not one screen, but the ones you hold</a:t>
             </a:r>
             <a:endParaRPr lang="en-US" sz="3400" dirty="0"/>
           </a:p>
@@ -12780,32 +12869,135 @@
         </p:nvSpPr>
         <p:spPr>
           <a:xfrm>
-            <a:off x="566928" y="1554480"/>
-            <a:ext cx="6035040" cy="457200"/>
-          </a:xfrm>
-          <a:prstGeom prst="rect">
-            <a:avLst/>
-          </a:prstGeom>
-          <a:noFill/>
-          <a:ln/>
-        </p:spPr>
-        <p:txBody>
-          <a:bodyPr wrap="square" lIns="0" tIns="0" rIns="0" bIns="0" rtlCol="0" anchor="ctr"/>
-          <a:lstStyle/>
-          <a:p>
-            <a:pPr indent="0" marL="0">
-              <a:buNone/>
+            <a:off x="566928" y="1828800"/>
+            <a:ext cx="4937760" cy="3200400"/>
+          </a:xfrm>
+          <a:prstGeom prst="rect">
+            <a:avLst/>
+          </a:prstGeom>
+          <a:noFill/>
+          <a:ln/>
+        </p:spPr>
+        <p:txBody>
+          <a:bodyPr wrap="square" rtlCol="0" anchor="ctr"/>
+          <a:lstStyle/>
+          <a:p>
+            <a:pPr marL="342900" indent="-342900">
+              <a:lnSpc>
+                <a:spcPts val="2000"/>
+              </a:lnSpc>
+              <a:spcAft>
+                <a:spcPts val="1000"/>
+              </a:spcAft>
+              <a:buSzPct val="100000"/>
+              <a:buChar char="•"/>
             </a:pPr>
             <a:r>
               <a:rPr lang="en-US" sz="1400" dirty="0">
                 <a:solidFill>
-                  <a:srgbClr val="A9A09E"/>
-                </a:solidFill>
-                <a:latin typeface="Calibri" pitchFamily="34" charset="0"/>
-                <a:ea typeface="Calibri" pitchFamily="34" charset="-122"/>
-                <a:cs typeface="Calibri" pitchFamily="34" charset="-120"/>
-              </a:rPr>
-              <a:t>58 permissions across 60 designations, in only twelve distinct groups of holders.</a:t>
+                  <a:srgbClr val="F4F1F0"/>
+                </a:solidFill>
+                <a:latin typeface="Calibri" pitchFamily="34" charset="0"/>
+                <a:ea typeface="Calibri" pitchFamily="34" charset="-122"/>
+                <a:cs typeface="Calibri" pitchFamily="34" charset="-120"/>
+              </a:rPr>
+              <a:t>Working hours and lunch — the window the Time Sheet and the Idle report both read.</a:t>
+            </a:r>
+            <a:endParaRPr lang="en-US" sz="1400" dirty="0"/>
+          </a:p>
+          <a:p>
+            <a:pPr marL="342900" indent="-342900">
+              <a:lnSpc>
+                <a:spcPts val="2000"/>
+              </a:lnSpc>
+              <a:spcAft>
+                <a:spcPts val="1000"/>
+              </a:spcAft>
+              <a:buSzPct val="100000"/>
+              <a:buChar char="•"/>
+            </a:pPr>
+            <a:r>
+              <a:rPr lang="en-US" sz="1400" dirty="0">
+                <a:solidFill>
+                  <a:srgbClr val="F4F1F0"/>
+                </a:solidFill>
+                <a:latin typeface="Calibri" pitchFamily="34" charset="0"/>
+                <a:ea typeface="Calibri" pitchFamily="34" charset="-122"/>
+                <a:cs typeface="Calibri" pitchFamily="34" charset="-120"/>
+              </a:rPr>
+              <a:t>Branding — the studio name and the colour used across the application.</a:t>
+            </a:r>
+            <a:endParaRPr lang="en-US" sz="1400" dirty="0"/>
+          </a:p>
+          <a:p>
+            <a:pPr marL="342900" indent="-342900">
+              <a:lnSpc>
+                <a:spcPts val="2000"/>
+              </a:lnSpc>
+              <a:spcAft>
+                <a:spcPts val="1000"/>
+              </a:spcAft>
+              <a:buSzPct val="100000"/>
+              <a:buChar char="•"/>
+            </a:pPr>
+            <a:r>
+              <a:rPr lang="en-US" sz="1400" dirty="0">
+                <a:solidFill>
+                  <a:srgbClr val="F4F1F0"/>
+                </a:solidFill>
+                <a:latin typeface="Calibri" pitchFamily="34" charset="0"/>
+                <a:ea typeface="Calibri" pitchFamily="34" charset="-122"/>
+                <a:cs typeface="Calibri" pitchFamily="34" charset="-120"/>
+              </a:rPr>
+              <a:t>Four value lists: Scope of Work, Priorities, Categories and Roles.</a:t>
+            </a:r>
+            <a:endParaRPr lang="en-US" sz="1400" dirty="0"/>
+          </a:p>
+          <a:p>
+            <a:pPr marL="342900" indent="-342900">
+              <a:lnSpc>
+                <a:spcPts val="2000"/>
+              </a:lnSpc>
+              <a:spcAft>
+                <a:spcPts val="1000"/>
+              </a:spcAft>
+              <a:buSzPct val="100000"/>
+              <a:buChar char="•"/>
+            </a:pPr>
+            <a:r>
+              <a:rPr lang="en-US" sz="1400" dirty="0">
+                <a:solidFill>
+                  <a:srgbClr val="F4F1F0"/>
+                </a:solidFill>
+                <a:latin typeface="Calibri" pitchFamily="34" charset="0"/>
+                <a:ea typeface="Calibri" pitchFamily="34" charset="-122"/>
+                <a:cs typeface="Calibri" pitchFamily="34" charset="-120"/>
+              </a:rPr>
+              <a:t>Renaming a value is safe; a value in use cannot be deleted, only deactivated.</a:t>
+            </a:r>
+            <a:endParaRPr lang="en-US" sz="1400" dirty="0"/>
+          </a:p>
+          <a:p>
+            <a:pPr marL="342900" indent="-342900">
+              <a:lnSpc>
+                <a:spcPts val="2000"/>
+              </a:lnSpc>
+              <a:spcAft>
+                <a:spcPts val="1000"/>
+              </a:spcAft>
+              <a:buSzPct val="100000"/>
+              <a:buChar char="•"/>
+            </a:pPr>
+            <a:r>
+              <a:rPr lang="en-US" sz="1400" dirty="0">
+                <a:solidFill>
+                  <a:srgbClr val="F4F1F0"/>
+                </a:solidFill>
+                <a:latin typeface="Calibri" pitchFamily="34" charset="0"/>
+                <a:ea typeface="Calibri" pitchFamily="34" charset="-122"/>
+                <a:cs typeface="Calibri" pitchFamily="34" charset="-120"/>
+              </a:rPr>
+              <a:t>A person given one Settings permission gets this page with exactly that one section on it.</a:t>
             </a:r>
             <a:endParaRPr lang="en-US" sz="1400" dirty="0"/>
           </a:p>
@@ -12819,8 +13011,8 @@
         </p:nvSpPr>
         <p:spPr>
           <a:xfrm>
-            <a:off x="566928" y="2286000"/>
-            <a:ext cx="3493008" cy="777240"/>
+            <a:off x="566928" y="5532120"/>
+            <a:ext cx="4937760" cy="777240"/>
           </a:xfrm>
           <a:prstGeom prst="roundRect">
             <a:avLst>
@@ -12846,24 +13038,38 @@
         </p:nvSpPr>
         <p:spPr>
           <a:xfrm>
-            <a:off x="731520" y="2340864"/>
-            <a:ext cx="2560320" cy="384048"/>
-          </a:xfrm>
-          <a:prstGeom prst="rect">
-            <a:avLst/>
-          </a:prstGeom>
-          <a:noFill/>
-          <a:ln/>
-        </p:spPr>
-        <p:txBody>
-          <a:bodyPr wrap="square" lIns="0" tIns="0" rIns="0" bIns="0" rtlCol="0" anchor="t"/>
+            <a:off x="749808" y="5532120"/>
+            <a:ext cx="4572000" cy="777240"/>
+          </a:xfrm>
+          <a:prstGeom prst="rect">
+            <a:avLst/>
+          </a:prstGeom>
+          <a:noFill/>
+          <a:ln/>
+        </p:spPr>
+        <p:txBody>
+          <a:bodyPr wrap="square" lIns="0" tIns="0" rIns="0" bIns="0" rtlCol="0" anchor="ctr"/>
           <a:lstStyle/>
           <a:p>
             <a:pPr indent="0" marL="0">
               <a:buNone/>
             </a:pPr>
             <a:r>
-              <a:rPr lang="en-US" sz="1200" b="1" dirty="0">
+              <a:rPr lang="en-US" sz="1000" b="1" spc="200" kern="0" dirty="0">
+                <a:solidFill>
+                  <a:srgbClr val="B8323A"/>
+                </a:solidFill>
+                <a:latin typeface="Calibri" pitchFamily="34" charset="0"/>
+                <a:ea typeface="Calibri" pitchFamily="34" charset="-122"/>
+                <a:cs typeface="Calibri" pitchFamily="34" charset="-120"/>
+              </a:rPr>
+              <a:t>WHO  </a:t>
+            </a:r>
+            <a:pPr indent="0" marL="0">
+              <a:buNone/>
+            </a:pPr>
+            <a:r>
+              <a:rPr lang="en-US" sz="1200" dirty="0">
                 <a:solidFill>
                   <a:srgbClr val="F4F1F0"/>
                 </a:solidFill>
@@ -12871,38 +13077,69 @@
                 <a:ea typeface="Calibri" pitchFamily="34" charset="-122"/>
                 <a:cs typeface="Calibri" pitchFamily="34" charset="-120"/>
               </a:rPr>
-              <a:t>Everyone</a:t>
-            </a:r>
-            <a:endParaRPr lang="en-US" sz="1200" dirty="0"/>
-          </a:p>
-        </p:txBody>
-      </p:sp>
-      <p:sp>
-        <p:nvSpPr>
-          <p:cNvPr id="10" name="Text 8"/>
-          <p:cNvSpPr txBox="1"/>
-          <p:nvPr/>
-        </p:nvSpPr>
-        <p:spPr>
-          <a:xfrm>
-            <a:off x="731520" y="2697480"/>
-            <a:ext cx="2743200" cy="292608"/>
-          </a:xfrm>
-          <a:prstGeom prst="rect">
-            <a:avLst/>
-          </a:prstGeom>
-          <a:noFill/>
-          <a:ln/>
-        </p:spPr>
-        <p:txBody>
-          <a:bodyPr wrap="square" lIns="0" tIns="0" rIns="0" bIns="0" rtlCol="0" anchor="ctr"/>
-          <a:lstStyle/>
-          <a:p>
-            <a:pPr indent="0" marL="0">
-              <a:buNone/>
-            </a:pPr>
-            <a:r>
-              <a:rPr lang="en-US" sz="1100" dirty="0">
+              <a:t>Studio leadership — 7 designations, one permission per section.</a:t>
+            </a:r>
+            <a:endParaRPr lang="en-US" sz="1000" dirty="0"/>
+          </a:p>
+        </p:txBody>
+      </p:sp>
+      <p:pic>
+        <p:nvPicPr>
+          <p:cNvPr id="10" name="Image 0" descr="preencoded.png">    </p:cNvPr>
+          <p:cNvPicPr>
+            <a:picLocks noChangeAspect="1"/>
+          </p:cNvPicPr>
+          <p:nvPr/>
+        </p:nvPicPr>
+        <p:blipFill>
+          <a:blip r:embed="rId1"/>
+          <a:stretch>
+            <a:fillRect/>
+          </a:stretch>
+        </p:blipFill>
+        <p:spPr>
+          <a:xfrm>
+            <a:off x="5989320" y="2786972"/>
+            <a:ext cx="5632704" cy="1649816"/>
+          </a:xfrm>
+          <a:prstGeom prst="rect">
+            <a:avLst/>
+          </a:prstGeom>
+          <a:effectLst>
+            <a:outerShdw sx="100000" sy="100000" kx="0" ky="0" algn="bl" rotWithShape="0" blurRad="177800" dist="50800" dir="5400000">
+              <a:srgbClr val="000000">
+                <a:alpha val="55000"/>
+              </a:srgbClr>
+            </a:outerShdw>
+          </a:effectLst>
+        </p:spPr>
+      </p:pic>
+      <p:sp>
+        <p:nvSpPr>
+          <p:cNvPr id="11" name="Text 8"/>
+          <p:cNvSpPr txBox="1"/>
+          <p:nvPr/>
+        </p:nvSpPr>
+        <p:spPr>
+          <a:xfrm>
+            <a:off x="5989320" y="4546516"/>
+            <a:ext cx="5632704" cy="457200"/>
+          </a:xfrm>
+          <a:prstGeom prst="rect">
+            <a:avLst/>
+          </a:prstGeom>
+          <a:noFill/>
+          <a:ln/>
+        </p:spPr>
+        <p:txBody>
+          <a:bodyPr wrap="square" lIns="0" tIns="0" rIns="0" bIns="0" rtlCol="0" anchor="ctr"/>
+          <a:lstStyle/>
+          <a:p>
+            <a:pPr algn="ctr" indent="0" marL="0">
+              <a:buNone/>
+            </a:pPr>
+            <a:r>
+              <a:rPr lang="en-US" sz="1000" i="1" dirty="0">
                 <a:solidFill>
                   <a:srgbClr val="A9A09E"/>
                 </a:solidFill>
@@ -12910,1671 +13147,9 @@
                 <a:ea typeface="Calibri" pitchFamily="34" charset="-122"/>
                 <a:cs typeface="Calibri" pitchFamily="34" charset="-120"/>
               </a:rPr>
-              <a:t>2 permissions</a:t>
-            </a:r>
-            <a:endParaRPr lang="en-US" sz="1100" dirty="0"/>
-          </a:p>
-        </p:txBody>
-      </p:sp>
-      <p:sp>
-        <p:nvSpPr>
-          <p:cNvPr id="11" name="Text 9"/>
-          <p:cNvSpPr txBox="1"/>
-          <p:nvPr/>
-        </p:nvSpPr>
-        <p:spPr>
-          <a:xfrm>
-            <a:off x="3328416" y="2377440"/>
-            <a:ext cx="566928" cy="594360"/>
-          </a:xfrm>
-          <a:prstGeom prst="rect">
-            <a:avLst/>
-          </a:prstGeom>
-          <a:noFill/>
-          <a:ln/>
-        </p:spPr>
-        <p:txBody>
-          <a:bodyPr wrap="square" lIns="0" tIns="0" rIns="0" bIns="0" rtlCol="0" anchor="ctr"/>
-          <a:lstStyle/>
-          <a:p>
-            <a:pPr algn="r" indent="0" marL="0">
-              <a:buNone/>
-            </a:pPr>
-            <a:r>
-              <a:rPr lang="en-US" sz="2000" b="1" dirty="0">
-                <a:solidFill>
-                  <a:srgbClr val="B8323A"/>
-                </a:solidFill>
-                <a:latin typeface="Cambria" pitchFamily="34" charset="0"/>
-                <a:ea typeface="Cambria" pitchFamily="34" charset="-122"/>
-                <a:cs typeface="Cambria" pitchFamily="34" charset="-120"/>
-              </a:rPr>
-              <a:t>60</a:t>
-            </a:r>
-            <a:endParaRPr lang="en-US" sz="2000" dirty="0"/>
-          </a:p>
-        </p:txBody>
-      </p:sp>
-      <p:sp>
-        <p:nvSpPr>
-          <p:cNvPr id="12" name="Shape 10"/>
-          <p:cNvSpPr/>
-          <p:nvPr/>
-        </p:nvSpPr>
-        <p:spPr>
-          <a:xfrm>
-            <a:off x="4279392" y="2286000"/>
-            <a:ext cx="3493008" cy="777240"/>
-          </a:xfrm>
-          <a:prstGeom prst="roundRect">
-            <a:avLst>
-              <a:gd name="adj" fmla="val 7059"/>
-            </a:avLst>
-          </a:prstGeom>
-          <a:solidFill>
-            <a:srgbClr val="1E1A19"/>
-          </a:solidFill>
-          <a:ln w="12700">
-            <a:solidFill>
-              <a:srgbClr val="2C2524"/>
-            </a:solidFill>
-            <a:prstDash val="solid"/>
-          </a:ln>
-        </p:spPr>
-      </p:sp>
-      <p:sp>
-        <p:nvSpPr>
-          <p:cNvPr id="13" name="Text 11"/>
-          <p:cNvSpPr txBox="1"/>
-          <p:nvPr/>
-        </p:nvSpPr>
-        <p:spPr>
-          <a:xfrm>
-            <a:off x="4443984" y="2340864"/>
-            <a:ext cx="2560320" cy="384048"/>
-          </a:xfrm>
-          <a:prstGeom prst="rect">
-            <a:avLst/>
-          </a:prstGeom>
-          <a:noFill/>
-          <a:ln/>
-        </p:spPr>
-        <p:txBody>
-          <a:bodyPr wrap="square" lIns="0" tIns="0" rIns="0" bIns="0" rtlCol="0" anchor="t"/>
-          <a:lstStyle/>
-          <a:p>
-            <a:pPr indent="0" marL="0">
-              <a:buNone/>
-            </a:pPr>
-            <a:r>
-              <a:rPr lang="en-US" sz="1200" b="1" dirty="0">
-                <a:solidFill>
-                  <a:srgbClr val="F4F1F0"/>
-                </a:solidFill>
-                <a:latin typeface="Calibri" pitchFamily="34" charset="0"/>
-                <a:ea typeface="Calibri" pitchFamily="34" charset="-122"/>
-                <a:cs typeface="Calibri" pitchFamily="34" charset="-120"/>
-              </a:rPr>
-              <a:t>Everyone who works on assets</a:t>
-            </a:r>
-            <a:endParaRPr lang="en-US" sz="1200" dirty="0"/>
-          </a:p>
-        </p:txBody>
-      </p:sp>
-      <p:sp>
-        <p:nvSpPr>
-          <p:cNvPr id="14" name="Text 12"/>
-          <p:cNvSpPr txBox="1"/>
-          <p:nvPr/>
-        </p:nvSpPr>
-        <p:spPr>
-          <a:xfrm>
-            <a:off x="4443984" y="2697480"/>
-            <a:ext cx="2743200" cy="292608"/>
-          </a:xfrm>
-          <a:prstGeom prst="rect">
-            <a:avLst/>
-          </a:prstGeom>
-          <a:noFill/>
-          <a:ln/>
-        </p:spPr>
-        <p:txBody>
-          <a:bodyPr wrap="square" lIns="0" tIns="0" rIns="0" bIns="0" rtlCol="0" anchor="ctr"/>
-          <a:lstStyle/>
-          <a:p>
-            <a:pPr indent="0" marL="0">
-              <a:buNone/>
-            </a:pPr>
-            <a:r>
-              <a:rPr lang="en-US" sz="1100" dirty="0">
-                <a:solidFill>
-                  <a:srgbClr val="A9A09E"/>
-                </a:solidFill>
-                <a:latin typeface="Calibri" pitchFamily="34" charset="0"/>
-                <a:ea typeface="Calibri" pitchFamily="34" charset="-122"/>
-                <a:cs typeface="Calibri" pitchFamily="34" charset="-120"/>
-              </a:rPr>
-              <a:t>2 permissions</a:t>
-            </a:r>
-            <a:endParaRPr lang="en-US" sz="1100" dirty="0"/>
-          </a:p>
-        </p:txBody>
-      </p:sp>
-      <p:sp>
-        <p:nvSpPr>
-          <p:cNvPr id="15" name="Text 13"/>
-          <p:cNvSpPr txBox="1"/>
-          <p:nvPr/>
-        </p:nvSpPr>
-        <p:spPr>
-          <a:xfrm>
-            <a:off x="7040880" y="2377440"/>
-            <a:ext cx="566928" cy="594360"/>
-          </a:xfrm>
-          <a:prstGeom prst="rect">
-            <a:avLst/>
-          </a:prstGeom>
-          <a:noFill/>
-          <a:ln/>
-        </p:spPr>
-        <p:txBody>
-          <a:bodyPr wrap="square" lIns="0" tIns="0" rIns="0" bIns="0" rtlCol="0" anchor="ctr"/>
-          <a:lstStyle/>
-          <a:p>
-            <a:pPr algn="r" indent="0" marL="0">
-              <a:buNone/>
-            </a:pPr>
-            <a:r>
-              <a:rPr lang="en-US" sz="2000" b="1" dirty="0">
-                <a:solidFill>
-                  <a:srgbClr val="B8323A"/>
-                </a:solidFill>
-                <a:latin typeface="Cambria" pitchFamily="34" charset="0"/>
-                <a:ea typeface="Cambria" pitchFamily="34" charset="-122"/>
-                <a:cs typeface="Cambria" pitchFamily="34" charset="-120"/>
-              </a:rPr>
-              <a:t>51</a:t>
-            </a:r>
-            <a:endParaRPr lang="en-US" sz="2000" dirty="0"/>
-          </a:p>
-        </p:txBody>
-      </p:sp>
-      <p:sp>
-        <p:nvSpPr>
-          <p:cNvPr id="16" name="Shape 14"/>
-          <p:cNvSpPr/>
-          <p:nvPr/>
-        </p:nvSpPr>
-        <p:spPr>
-          <a:xfrm>
-            <a:off x="7991856" y="2286000"/>
-            <a:ext cx="3493008" cy="777240"/>
-          </a:xfrm>
-          <a:prstGeom prst="roundRect">
-            <a:avLst>
-              <a:gd name="adj" fmla="val 7059"/>
-            </a:avLst>
-          </a:prstGeom>
-          <a:solidFill>
-            <a:srgbClr val="1E1A19"/>
-          </a:solidFill>
-          <a:ln w="12700">
-            <a:solidFill>
-              <a:srgbClr val="2C2524"/>
-            </a:solidFill>
-            <a:prstDash val="solid"/>
-          </a:ln>
-        </p:spPr>
-      </p:sp>
-      <p:sp>
-        <p:nvSpPr>
-          <p:cNvPr id="17" name="Text 15"/>
-          <p:cNvSpPr txBox="1"/>
-          <p:nvPr/>
-        </p:nvSpPr>
-        <p:spPr>
-          <a:xfrm>
-            <a:off x="8156448" y="2340864"/>
-            <a:ext cx="2560320" cy="384048"/>
-          </a:xfrm>
-          <a:prstGeom prst="rect">
-            <a:avLst/>
-          </a:prstGeom>
-          <a:noFill/>
-          <a:ln/>
-        </p:spPr>
-        <p:txBody>
-          <a:bodyPr wrap="square" lIns="0" tIns="0" rIns="0" bIns="0" rtlCol="0" anchor="t"/>
-          <a:lstStyle/>
-          <a:p>
-            <a:pPr indent="0" marL="0">
-              <a:buNone/>
-            </a:pPr>
-            <a:r>
-              <a:rPr lang="en-US" sz="1200" b="1" dirty="0">
-                <a:solidFill>
-                  <a:srgbClr val="F4F1F0"/>
-                </a:solidFill>
-                <a:latin typeface="Calibri" pitchFamily="34" charset="0"/>
-                <a:ea typeface="Calibri" pitchFamily="34" charset="-122"/>
-                <a:cs typeface="Calibri" pitchFamily="34" charset="-120"/>
-              </a:rPr>
-              <a:t>Production planning</a:t>
-            </a:r>
-            <a:endParaRPr lang="en-US" sz="1200" dirty="0"/>
-          </a:p>
-        </p:txBody>
-      </p:sp>
-      <p:sp>
-        <p:nvSpPr>
-          <p:cNvPr id="18" name="Text 16"/>
-          <p:cNvSpPr txBox="1"/>
-          <p:nvPr/>
-        </p:nvSpPr>
-        <p:spPr>
-          <a:xfrm>
-            <a:off x="8156448" y="2697480"/>
-            <a:ext cx="2743200" cy="292608"/>
-          </a:xfrm>
-          <a:prstGeom prst="rect">
-            <a:avLst/>
-          </a:prstGeom>
-          <a:noFill/>
-          <a:ln/>
-        </p:spPr>
-        <p:txBody>
-          <a:bodyPr wrap="square" lIns="0" tIns="0" rIns="0" bIns="0" rtlCol="0" anchor="ctr"/>
-          <a:lstStyle/>
-          <a:p>
-            <a:pPr indent="0" marL="0">
-              <a:buNone/>
-            </a:pPr>
-            <a:r>
-              <a:rPr lang="en-US" sz="1100" dirty="0">
-                <a:solidFill>
-                  <a:srgbClr val="A9A09E"/>
-                </a:solidFill>
-                <a:latin typeface="Calibri" pitchFamily="34" charset="0"/>
-                <a:ea typeface="Calibri" pitchFamily="34" charset="-122"/>
-                <a:cs typeface="Calibri" pitchFamily="34" charset="-120"/>
-              </a:rPr>
-              <a:t>2 permissions</a:t>
-            </a:r>
-            <a:endParaRPr lang="en-US" sz="1100" dirty="0"/>
-          </a:p>
-        </p:txBody>
-      </p:sp>
-      <p:sp>
-        <p:nvSpPr>
-          <p:cNvPr id="19" name="Text 17"/>
-          <p:cNvSpPr txBox="1"/>
-          <p:nvPr/>
-        </p:nvSpPr>
-        <p:spPr>
-          <a:xfrm>
-            <a:off x="10753344" y="2377440"/>
-            <a:ext cx="566928" cy="594360"/>
-          </a:xfrm>
-          <a:prstGeom prst="rect">
-            <a:avLst/>
-          </a:prstGeom>
-          <a:noFill/>
-          <a:ln/>
-        </p:spPr>
-        <p:txBody>
-          <a:bodyPr wrap="square" lIns="0" tIns="0" rIns="0" bIns="0" rtlCol="0" anchor="ctr"/>
-          <a:lstStyle/>
-          <a:p>
-            <a:pPr algn="r" indent="0" marL="0">
-              <a:buNone/>
-            </a:pPr>
-            <a:r>
-              <a:rPr lang="en-US" sz="2000" b="1" dirty="0">
-                <a:solidFill>
-                  <a:srgbClr val="B8323A"/>
-                </a:solidFill>
-                <a:latin typeface="Cambria" pitchFamily="34" charset="0"/>
-                <a:ea typeface="Cambria" pitchFamily="34" charset="-122"/>
-                <a:cs typeface="Cambria" pitchFamily="34" charset="-120"/>
-              </a:rPr>
-              <a:t>23</a:t>
-            </a:r>
-            <a:endParaRPr lang="en-US" sz="2000" dirty="0"/>
-          </a:p>
-        </p:txBody>
-      </p:sp>
-      <p:sp>
-        <p:nvSpPr>
-          <p:cNvPr id="20" name="Shape 18"/>
-          <p:cNvSpPr/>
-          <p:nvPr/>
-        </p:nvSpPr>
-        <p:spPr>
-          <a:xfrm>
-            <a:off x="566928" y="3200400"/>
-            <a:ext cx="3493008" cy="777240"/>
-          </a:xfrm>
-          <a:prstGeom prst="roundRect">
-            <a:avLst>
-              <a:gd name="adj" fmla="val 7059"/>
-            </a:avLst>
-          </a:prstGeom>
-          <a:solidFill>
-            <a:srgbClr val="1E1A19"/>
-          </a:solidFill>
-          <a:ln w="12700">
-            <a:solidFill>
-              <a:srgbClr val="2C2524"/>
-            </a:solidFill>
-            <a:prstDash val="solid"/>
-          </a:ln>
-        </p:spPr>
-      </p:sp>
-      <p:sp>
-        <p:nvSpPr>
-          <p:cNvPr id="21" name="Text 19"/>
-          <p:cNvSpPr txBox="1"/>
-          <p:nvPr/>
-        </p:nvSpPr>
-        <p:spPr>
-          <a:xfrm>
-            <a:off x="731520" y="3255264"/>
-            <a:ext cx="2560320" cy="384048"/>
-          </a:xfrm>
-          <a:prstGeom prst="rect">
-            <a:avLst/>
-          </a:prstGeom>
-          <a:noFill/>
-          <a:ln/>
-        </p:spPr>
-        <p:txBody>
-          <a:bodyPr wrap="square" lIns="0" tIns="0" rIns="0" bIns="0" rtlCol="0" anchor="t"/>
-          <a:lstStyle/>
-          <a:p>
-            <a:pPr indent="0" marL="0">
-              <a:buNone/>
-            </a:pPr>
-            <a:r>
-              <a:rPr lang="en-US" sz="1200" b="1" dirty="0">
-                <a:solidFill>
-                  <a:srgbClr val="F4F1F0"/>
-                </a:solidFill>
-                <a:latin typeface="Calibri" pitchFamily="34" charset="0"/>
-                <a:ea typeface="Calibri" pitchFamily="34" charset="-122"/>
-                <a:cs typeface="Calibri" pitchFamily="34" charset="-120"/>
-              </a:rPr>
-              <a:t>First review gate</a:t>
-            </a:r>
-            <a:endParaRPr lang="en-US" sz="1200" dirty="0"/>
-          </a:p>
-        </p:txBody>
-      </p:sp>
-      <p:sp>
-        <p:nvSpPr>
-          <p:cNvPr id="22" name="Text 20"/>
-          <p:cNvSpPr txBox="1"/>
-          <p:nvPr/>
-        </p:nvSpPr>
-        <p:spPr>
-          <a:xfrm>
-            <a:off x="731520" y="3611880"/>
-            <a:ext cx="2743200" cy="292608"/>
-          </a:xfrm>
-          <a:prstGeom prst="rect">
-            <a:avLst/>
-          </a:prstGeom>
-          <a:noFill/>
-          <a:ln/>
-        </p:spPr>
-        <p:txBody>
-          <a:bodyPr wrap="square" lIns="0" tIns="0" rIns="0" bIns="0" rtlCol="0" anchor="ctr"/>
-          <a:lstStyle/>
-          <a:p>
-            <a:pPr indent="0" marL="0">
-              <a:buNone/>
-            </a:pPr>
-            <a:r>
-              <a:rPr lang="en-US" sz="1100" dirty="0">
-                <a:solidFill>
-                  <a:srgbClr val="A9A09E"/>
-                </a:solidFill>
-                <a:latin typeface="Calibri" pitchFamily="34" charset="0"/>
-                <a:ea typeface="Calibri" pitchFamily="34" charset="-122"/>
-                <a:cs typeface="Calibri" pitchFamily="34" charset="-120"/>
-              </a:rPr>
-              <a:t>1 permission</a:t>
-            </a:r>
-            <a:endParaRPr lang="en-US" sz="1100" dirty="0"/>
-          </a:p>
-        </p:txBody>
-      </p:sp>
-      <p:sp>
-        <p:nvSpPr>
-          <p:cNvPr id="23" name="Text 21"/>
-          <p:cNvSpPr txBox="1"/>
-          <p:nvPr/>
-        </p:nvSpPr>
-        <p:spPr>
-          <a:xfrm>
-            <a:off x="3328416" y="3291840"/>
-            <a:ext cx="566928" cy="594360"/>
-          </a:xfrm>
-          <a:prstGeom prst="rect">
-            <a:avLst/>
-          </a:prstGeom>
-          <a:noFill/>
-          <a:ln/>
-        </p:spPr>
-        <p:txBody>
-          <a:bodyPr wrap="square" lIns="0" tIns="0" rIns="0" bIns="0" rtlCol="0" anchor="ctr"/>
-          <a:lstStyle/>
-          <a:p>
-            <a:pPr algn="r" indent="0" marL="0">
-              <a:buNone/>
-            </a:pPr>
-            <a:r>
-              <a:rPr lang="en-US" sz="2000" b="1" dirty="0">
-                <a:solidFill>
-                  <a:srgbClr val="B8323A"/>
-                </a:solidFill>
-                <a:latin typeface="Cambria" pitchFamily="34" charset="0"/>
-                <a:ea typeface="Cambria" pitchFamily="34" charset="-122"/>
-                <a:cs typeface="Cambria" pitchFamily="34" charset="-120"/>
-              </a:rPr>
-              <a:t>23</a:t>
-            </a:r>
-            <a:endParaRPr lang="en-US" sz="2000" dirty="0"/>
-          </a:p>
-        </p:txBody>
-      </p:sp>
-      <p:sp>
-        <p:nvSpPr>
-          <p:cNvPr id="24" name="Shape 22"/>
-          <p:cNvSpPr/>
-          <p:nvPr/>
-        </p:nvSpPr>
-        <p:spPr>
-          <a:xfrm>
-            <a:off x="4279392" y="3200400"/>
-            <a:ext cx="3493008" cy="777240"/>
-          </a:xfrm>
-          <a:prstGeom prst="roundRect">
-            <a:avLst>
-              <a:gd name="adj" fmla="val 7059"/>
-            </a:avLst>
-          </a:prstGeom>
-          <a:solidFill>
-            <a:srgbClr val="1E1A19"/>
-          </a:solidFill>
-          <a:ln w="12700">
-            <a:solidFill>
-              <a:srgbClr val="2C2524"/>
-            </a:solidFill>
-            <a:prstDash val="solid"/>
-          </a:ln>
-        </p:spPr>
-      </p:sp>
-      <p:sp>
-        <p:nvSpPr>
-          <p:cNvPr id="25" name="Text 23"/>
-          <p:cNvSpPr txBox="1"/>
-          <p:nvPr/>
-        </p:nvSpPr>
-        <p:spPr>
-          <a:xfrm>
-            <a:off x="4443984" y="3255264"/>
-            <a:ext cx="2560320" cy="384048"/>
-          </a:xfrm>
-          <a:prstGeom prst="rect">
-            <a:avLst/>
-          </a:prstGeom>
-          <a:noFill/>
-          <a:ln/>
-        </p:spPr>
-        <p:txBody>
-          <a:bodyPr wrap="square" lIns="0" tIns="0" rIns="0" bIns="0" rtlCol="0" anchor="t"/>
-          <a:lstStyle/>
-          <a:p>
-            <a:pPr indent="0" marL="0">
-              <a:buNone/>
-            </a:pPr>
-            <a:r>
-              <a:rPr lang="en-US" sz="1200" b="1" dirty="0">
-                <a:solidFill>
-                  <a:srgbClr val="F4F1F0"/>
-                </a:solidFill>
-                <a:latin typeface="Calibri" pitchFamily="34" charset="0"/>
-                <a:ea typeface="Calibri" pitchFamily="34" charset="-122"/>
-                <a:cs typeface="Calibri" pitchFamily="34" charset="-120"/>
-              </a:rPr>
-              <a:t>Leads and producers</a:t>
-            </a:r>
-            <a:endParaRPr lang="en-US" sz="1200" dirty="0"/>
-          </a:p>
-        </p:txBody>
-      </p:sp>
-      <p:sp>
-        <p:nvSpPr>
-          <p:cNvPr id="26" name="Text 24"/>
-          <p:cNvSpPr txBox="1"/>
-          <p:nvPr/>
-        </p:nvSpPr>
-        <p:spPr>
-          <a:xfrm>
-            <a:off x="4443984" y="3611880"/>
-            <a:ext cx="2743200" cy="292608"/>
-          </a:xfrm>
-          <a:prstGeom prst="rect">
-            <a:avLst/>
-          </a:prstGeom>
-          <a:noFill/>
-          <a:ln/>
-        </p:spPr>
-        <p:txBody>
-          <a:bodyPr wrap="square" lIns="0" tIns="0" rIns="0" bIns="0" rtlCol="0" anchor="ctr"/>
-          <a:lstStyle/>
-          <a:p>
-            <a:pPr indent="0" marL="0">
-              <a:buNone/>
-            </a:pPr>
-            <a:r>
-              <a:rPr lang="en-US" sz="1100" dirty="0">
-                <a:solidFill>
-                  <a:srgbClr val="A9A09E"/>
-                </a:solidFill>
-                <a:latin typeface="Calibri" pitchFamily="34" charset="0"/>
-                <a:ea typeface="Calibri" pitchFamily="34" charset="-122"/>
-                <a:cs typeface="Calibri" pitchFamily="34" charset="-120"/>
-              </a:rPr>
-              <a:t>3 permissions</a:t>
-            </a:r>
-            <a:endParaRPr lang="en-US" sz="1100" dirty="0"/>
-          </a:p>
-        </p:txBody>
-      </p:sp>
-      <p:sp>
-        <p:nvSpPr>
-          <p:cNvPr id="27" name="Text 25"/>
-          <p:cNvSpPr txBox="1"/>
-          <p:nvPr/>
-        </p:nvSpPr>
-        <p:spPr>
-          <a:xfrm>
-            <a:off x="7040880" y="3291840"/>
-            <a:ext cx="566928" cy="594360"/>
-          </a:xfrm>
-          <a:prstGeom prst="rect">
-            <a:avLst/>
-          </a:prstGeom>
-          <a:noFill/>
-          <a:ln/>
-        </p:spPr>
-        <p:txBody>
-          <a:bodyPr wrap="square" lIns="0" tIns="0" rIns="0" bIns="0" rtlCol="0" anchor="ctr"/>
-          <a:lstStyle/>
-          <a:p>
-            <a:pPr algn="r" indent="0" marL="0">
-              <a:buNone/>
-            </a:pPr>
-            <a:r>
-              <a:rPr lang="en-US" sz="2000" b="1" dirty="0">
-                <a:solidFill>
-                  <a:srgbClr val="B8323A"/>
-                </a:solidFill>
-                <a:latin typeface="Cambria" pitchFamily="34" charset="0"/>
-                <a:ea typeface="Cambria" pitchFamily="34" charset="-122"/>
-                <a:cs typeface="Cambria" pitchFamily="34" charset="-120"/>
-              </a:rPr>
-              <a:t>18</a:t>
-            </a:r>
-            <a:endParaRPr lang="en-US" sz="2000" dirty="0"/>
-          </a:p>
-        </p:txBody>
-      </p:sp>
-      <p:sp>
-        <p:nvSpPr>
-          <p:cNvPr id="28" name="Shape 26"/>
-          <p:cNvSpPr/>
-          <p:nvPr/>
-        </p:nvSpPr>
-        <p:spPr>
-          <a:xfrm>
-            <a:off x="7991856" y="3200400"/>
-            <a:ext cx="3493008" cy="777240"/>
-          </a:xfrm>
-          <a:prstGeom prst="roundRect">
-            <a:avLst>
-              <a:gd name="adj" fmla="val 7059"/>
-            </a:avLst>
-          </a:prstGeom>
-          <a:solidFill>
-            <a:srgbClr val="1E1A19"/>
-          </a:solidFill>
-          <a:ln w="12700">
-            <a:solidFill>
-              <a:srgbClr val="2C2524"/>
-            </a:solidFill>
-            <a:prstDash val="solid"/>
-          </a:ln>
-        </p:spPr>
-      </p:sp>
-      <p:sp>
-        <p:nvSpPr>
-          <p:cNvPr id="29" name="Text 27"/>
-          <p:cNvSpPr txBox="1"/>
-          <p:nvPr/>
-        </p:nvSpPr>
-        <p:spPr>
-          <a:xfrm>
-            <a:off x="8156448" y="3255264"/>
-            <a:ext cx="2560320" cy="384048"/>
-          </a:xfrm>
-          <a:prstGeom prst="rect">
-            <a:avLst/>
-          </a:prstGeom>
-          <a:noFill/>
-          <a:ln/>
-        </p:spPr>
-        <p:txBody>
-          <a:bodyPr wrap="square" lIns="0" tIns="0" rIns="0" bIns="0" rtlCol="0" anchor="t"/>
-          <a:lstStyle/>
-          <a:p>
-            <a:pPr indent="0" marL="0">
-              <a:buNone/>
-            </a:pPr>
-            <a:r>
-              <a:rPr lang="en-US" sz="1200" b="1" dirty="0">
-                <a:solidFill>
-                  <a:srgbClr val="F4F1F0"/>
-                </a:solidFill>
-                <a:latin typeface="Calibri" pitchFamily="34" charset="0"/>
-                <a:ea typeface="Calibri" pitchFamily="34" charset="-122"/>
-                <a:cs typeface="Calibri" pitchFamily="34" charset="-120"/>
-              </a:rPr>
-              <a:t>Anyone who supervises people</a:t>
-            </a:r>
-            <a:endParaRPr lang="en-US" sz="1200" dirty="0"/>
-          </a:p>
-        </p:txBody>
-      </p:sp>
-      <p:sp>
-        <p:nvSpPr>
-          <p:cNvPr id="30" name="Text 28"/>
-          <p:cNvSpPr txBox="1"/>
-          <p:nvPr/>
-        </p:nvSpPr>
-        <p:spPr>
-          <a:xfrm>
-            <a:off x="8156448" y="3611880"/>
-            <a:ext cx="2743200" cy="292608"/>
-          </a:xfrm>
-          <a:prstGeom prst="rect">
-            <a:avLst/>
-          </a:prstGeom>
-          <a:noFill/>
-          <a:ln/>
-        </p:spPr>
-        <p:txBody>
-          <a:bodyPr wrap="square" lIns="0" tIns="0" rIns="0" bIns="0" rtlCol="0" anchor="ctr"/>
-          <a:lstStyle/>
-          <a:p>
-            <a:pPr indent="0" marL="0">
-              <a:buNone/>
-            </a:pPr>
-            <a:r>
-              <a:rPr lang="en-US" sz="1100" dirty="0">
-                <a:solidFill>
-                  <a:srgbClr val="A9A09E"/>
-                </a:solidFill>
-                <a:latin typeface="Calibri" pitchFamily="34" charset="0"/>
-                <a:ea typeface="Calibri" pitchFamily="34" charset="-122"/>
-                <a:cs typeface="Calibri" pitchFamily="34" charset="-120"/>
-              </a:rPr>
-              <a:t>1 permission</a:t>
-            </a:r>
-            <a:endParaRPr lang="en-US" sz="1100" dirty="0"/>
-          </a:p>
-        </p:txBody>
-      </p:sp>
-      <p:sp>
-        <p:nvSpPr>
-          <p:cNvPr id="31" name="Text 29"/>
-          <p:cNvSpPr txBox="1"/>
-          <p:nvPr/>
-        </p:nvSpPr>
-        <p:spPr>
-          <a:xfrm>
-            <a:off x="10753344" y="3291840"/>
-            <a:ext cx="566928" cy="594360"/>
-          </a:xfrm>
-          <a:prstGeom prst="rect">
-            <a:avLst/>
-          </a:prstGeom>
-          <a:noFill/>
-          <a:ln/>
-        </p:spPr>
-        <p:txBody>
-          <a:bodyPr wrap="square" lIns="0" tIns="0" rIns="0" bIns="0" rtlCol="0" anchor="ctr"/>
-          <a:lstStyle/>
-          <a:p>
-            <a:pPr algn="r" indent="0" marL="0">
-              <a:buNone/>
-            </a:pPr>
-            <a:r>
-              <a:rPr lang="en-US" sz="2000" b="1" dirty="0">
-                <a:solidFill>
-                  <a:srgbClr val="B8323A"/>
-                </a:solidFill>
-                <a:latin typeface="Cambria" pitchFamily="34" charset="0"/>
-                <a:ea typeface="Cambria" pitchFamily="34" charset="-122"/>
-                <a:cs typeface="Cambria" pitchFamily="34" charset="-120"/>
-              </a:rPr>
-              <a:t>14</a:t>
-            </a:r>
-            <a:endParaRPr lang="en-US" sz="2000" dirty="0"/>
-          </a:p>
-        </p:txBody>
-      </p:sp>
-      <p:sp>
-        <p:nvSpPr>
-          <p:cNvPr id="32" name="Shape 30"/>
-          <p:cNvSpPr/>
-          <p:nvPr/>
-        </p:nvSpPr>
-        <p:spPr>
-          <a:xfrm>
-            <a:off x="566928" y="4114800"/>
-            <a:ext cx="3493008" cy="777240"/>
-          </a:xfrm>
-          <a:prstGeom prst="roundRect">
-            <a:avLst>
-              <a:gd name="adj" fmla="val 7059"/>
-            </a:avLst>
-          </a:prstGeom>
-          <a:solidFill>
-            <a:srgbClr val="1E1A19"/>
-          </a:solidFill>
-          <a:ln w="12700">
-            <a:solidFill>
-              <a:srgbClr val="2C2524"/>
-            </a:solidFill>
-            <a:prstDash val="solid"/>
-          </a:ln>
-        </p:spPr>
-      </p:sp>
-      <p:sp>
-        <p:nvSpPr>
-          <p:cNvPr id="33" name="Text 31"/>
-          <p:cNvSpPr txBox="1"/>
-          <p:nvPr/>
-        </p:nvSpPr>
-        <p:spPr>
-          <a:xfrm>
-            <a:off x="731520" y="4169664"/>
-            <a:ext cx="2560320" cy="384048"/>
-          </a:xfrm>
-          <a:prstGeom prst="rect">
-            <a:avLst/>
-          </a:prstGeom>
-          <a:noFill/>
-          <a:ln/>
-        </p:spPr>
-        <p:txBody>
-          <a:bodyPr wrap="square" lIns="0" tIns="0" rIns="0" bIns="0" rtlCol="0" anchor="t"/>
-          <a:lstStyle/>
-          <a:p>
-            <a:pPr indent="0" marL="0">
-              <a:buNone/>
-            </a:pPr>
-            <a:r>
-              <a:rPr lang="en-US" sz="1200" b="1" dirty="0">
-                <a:solidFill>
-                  <a:srgbClr val="F4F1F0"/>
-                </a:solidFill>
-                <a:latin typeface="Calibri" pitchFamily="34" charset="0"/>
-                <a:ea typeface="Calibri" pitchFamily="34" charset="-122"/>
-                <a:cs typeface="Calibri" pitchFamily="34" charset="-120"/>
-              </a:rPr>
-              <a:t>Delivery</a:t>
-            </a:r>
-            <a:endParaRPr lang="en-US" sz="1200" dirty="0"/>
-          </a:p>
-        </p:txBody>
-      </p:sp>
-      <p:sp>
-        <p:nvSpPr>
-          <p:cNvPr id="34" name="Text 32"/>
-          <p:cNvSpPr txBox="1"/>
-          <p:nvPr/>
-        </p:nvSpPr>
-        <p:spPr>
-          <a:xfrm>
-            <a:off x="731520" y="4526280"/>
-            <a:ext cx="2743200" cy="292608"/>
-          </a:xfrm>
-          <a:prstGeom prst="rect">
-            <a:avLst/>
-          </a:prstGeom>
-          <a:noFill/>
-          <a:ln/>
-        </p:spPr>
-        <p:txBody>
-          <a:bodyPr wrap="square" lIns="0" tIns="0" rIns="0" bIns="0" rtlCol="0" anchor="ctr"/>
-          <a:lstStyle/>
-          <a:p>
-            <a:pPr indent="0" marL="0">
-              <a:buNone/>
-            </a:pPr>
-            <a:r>
-              <a:rPr lang="en-US" sz="1100" dirty="0">
-                <a:solidFill>
-                  <a:srgbClr val="A9A09E"/>
-                </a:solidFill>
-                <a:latin typeface="Calibri" pitchFamily="34" charset="0"/>
-                <a:ea typeface="Calibri" pitchFamily="34" charset="-122"/>
-                <a:cs typeface="Calibri" pitchFamily="34" charset="-120"/>
-              </a:rPr>
-              <a:t>1 permission</a:t>
-            </a:r>
-            <a:endParaRPr lang="en-US" sz="1100" dirty="0"/>
-          </a:p>
-        </p:txBody>
-      </p:sp>
-      <p:sp>
-        <p:nvSpPr>
-          <p:cNvPr id="35" name="Text 33"/>
-          <p:cNvSpPr txBox="1"/>
-          <p:nvPr/>
-        </p:nvSpPr>
-        <p:spPr>
-          <a:xfrm>
-            <a:off x="3328416" y="4206240"/>
-            <a:ext cx="566928" cy="594360"/>
-          </a:xfrm>
-          <a:prstGeom prst="rect">
-            <a:avLst/>
-          </a:prstGeom>
-          <a:noFill/>
-          <a:ln/>
-        </p:spPr>
-        <p:txBody>
-          <a:bodyPr wrap="square" lIns="0" tIns="0" rIns="0" bIns="0" rtlCol="0" anchor="ctr"/>
-          <a:lstStyle/>
-          <a:p>
-            <a:pPr algn="r" indent="0" marL="0">
-              <a:buNone/>
-            </a:pPr>
-            <a:r>
-              <a:rPr lang="en-US" sz="2000" b="1" dirty="0">
-                <a:solidFill>
-                  <a:srgbClr val="B8323A"/>
-                </a:solidFill>
-                <a:latin typeface="Cambria" pitchFamily="34" charset="0"/>
-                <a:ea typeface="Cambria" pitchFamily="34" charset="-122"/>
-                <a:cs typeface="Cambria" pitchFamily="34" charset="-120"/>
-              </a:rPr>
-              <a:t>18</a:t>
-            </a:r>
-            <a:endParaRPr lang="en-US" sz="2000" dirty="0"/>
-          </a:p>
-        </p:txBody>
-      </p:sp>
-      <p:sp>
-        <p:nvSpPr>
-          <p:cNvPr id="36" name="Shape 34"/>
-          <p:cNvSpPr/>
-          <p:nvPr/>
-        </p:nvSpPr>
-        <p:spPr>
-          <a:xfrm>
-            <a:off x="4279392" y="4114800"/>
-            <a:ext cx="3493008" cy="777240"/>
-          </a:xfrm>
-          <a:prstGeom prst="roundRect">
-            <a:avLst>
-              <a:gd name="adj" fmla="val 7059"/>
-            </a:avLst>
-          </a:prstGeom>
-          <a:solidFill>
-            <a:srgbClr val="1E1A19"/>
-          </a:solidFill>
-          <a:ln w="12700">
-            <a:solidFill>
-              <a:srgbClr val="2C2524"/>
-            </a:solidFill>
-            <a:prstDash val="solid"/>
-          </a:ln>
-        </p:spPr>
-      </p:sp>
-      <p:sp>
-        <p:nvSpPr>
-          <p:cNvPr id="37" name="Text 35"/>
-          <p:cNvSpPr txBox="1"/>
-          <p:nvPr/>
-        </p:nvSpPr>
-        <p:spPr>
-          <a:xfrm>
-            <a:off x="4443984" y="4169664"/>
-            <a:ext cx="2560320" cy="384048"/>
-          </a:xfrm>
-          <a:prstGeom prst="rect">
-            <a:avLst/>
-          </a:prstGeom>
-          <a:noFill/>
-          <a:ln/>
-        </p:spPr>
-        <p:txBody>
-          <a:bodyPr wrap="square" lIns="0" tIns="0" rIns="0" bIns="0" rtlCol="0" anchor="t"/>
-          <a:lstStyle/>
-          <a:p>
-            <a:pPr indent="0" marL="0">
-              <a:buNone/>
-            </a:pPr>
-            <a:r>
-              <a:rPr lang="en-US" sz="1200" b="1" dirty="0">
-                <a:solidFill>
-                  <a:srgbClr val="F4F1F0"/>
-                </a:solidFill>
-                <a:latin typeface="Calibri" pitchFamily="34" charset="0"/>
-                <a:ea typeface="Calibri" pitchFamily="34" charset="-122"/>
-                <a:cs typeface="Calibri" pitchFamily="34" charset="-120"/>
-              </a:rPr>
-              <a:t>Creative direction</a:t>
-            </a:r>
-            <a:endParaRPr lang="en-US" sz="1200" dirty="0"/>
-          </a:p>
-        </p:txBody>
-      </p:sp>
-      <p:sp>
-        <p:nvSpPr>
-          <p:cNvPr id="38" name="Text 36"/>
-          <p:cNvSpPr txBox="1"/>
-          <p:nvPr/>
-        </p:nvSpPr>
-        <p:spPr>
-          <a:xfrm>
-            <a:off x="4443984" y="4526280"/>
-            <a:ext cx="2743200" cy="292608"/>
-          </a:xfrm>
-          <a:prstGeom prst="rect">
-            <a:avLst/>
-          </a:prstGeom>
-          <a:noFill/>
-          <a:ln/>
-        </p:spPr>
-        <p:txBody>
-          <a:bodyPr wrap="square" lIns="0" tIns="0" rIns="0" bIns="0" rtlCol="0" anchor="ctr"/>
-          <a:lstStyle/>
-          <a:p>
-            <a:pPr indent="0" marL="0">
-              <a:buNone/>
-            </a:pPr>
-            <a:r>
-              <a:rPr lang="en-US" sz="1100" dirty="0">
-                <a:solidFill>
-                  <a:srgbClr val="A9A09E"/>
-                </a:solidFill>
-                <a:latin typeface="Calibri" pitchFamily="34" charset="0"/>
-                <a:ea typeface="Calibri" pitchFamily="34" charset="-122"/>
-                <a:cs typeface="Calibri" pitchFamily="34" charset="-120"/>
-              </a:rPr>
-              <a:t>2 permissions</a:t>
-            </a:r>
-            <a:endParaRPr lang="en-US" sz="1100" dirty="0"/>
-          </a:p>
-        </p:txBody>
-      </p:sp>
-      <p:sp>
-        <p:nvSpPr>
-          <p:cNvPr id="39" name="Text 37"/>
-          <p:cNvSpPr txBox="1"/>
-          <p:nvPr/>
-        </p:nvSpPr>
-        <p:spPr>
-          <a:xfrm>
-            <a:off x="7040880" y="4206240"/>
-            <a:ext cx="566928" cy="594360"/>
-          </a:xfrm>
-          <a:prstGeom prst="rect">
-            <a:avLst/>
-          </a:prstGeom>
-          <a:noFill/>
-          <a:ln/>
-        </p:spPr>
-        <p:txBody>
-          <a:bodyPr wrap="square" lIns="0" tIns="0" rIns="0" bIns="0" rtlCol="0" anchor="ctr"/>
-          <a:lstStyle/>
-          <a:p>
-            <a:pPr algn="r" indent="0" marL="0">
-              <a:buNone/>
-            </a:pPr>
-            <a:r>
-              <a:rPr lang="en-US" sz="2000" b="1" dirty="0">
-                <a:solidFill>
-                  <a:srgbClr val="B8323A"/>
-                </a:solidFill>
-                <a:latin typeface="Cambria" pitchFamily="34" charset="0"/>
-                <a:ea typeface="Cambria" pitchFamily="34" charset="-122"/>
-                <a:cs typeface="Cambria" pitchFamily="34" charset="-120"/>
-              </a:rPr>
-              <a:t>9</a:t>
-            </a:r>
-            <a:endParaRPr lang="en-US" sz="2000" dirty="0"/>
-          </a:p>
-        </p:txBody>
-      </p:sp>
-      <p:sp>
-        <p:nvSpPr>
-          <p:cNvPr id="40" name="Shape 38"/>
-          <p:cNvSpPr/>
-          <p:nvPr/>
-        </p:nvSpPr>
-        <p:spPr>
-          <a:xfrm>
-            <a:off x="7991856" y="4114800"/>
-            <a:ext cx="3493008" cy="777240"/>
-          </a:xfrm>
-          <a:prstGeom prst="roundRect">
-            <a:avLst>
-              <a:gd name="adj" fmla="val 7059"/>
-            </a:avLst>
-          </a:prstGeom>
-          <a:solidFill>
-            <a:srgbClr val="1E1A19"/>
-          </a:solidFill>
-          <a:ln w="12700">
-            <a:solidFill>
-              <a:srgbClr val="2C2524"/>
-            </a:solidFill>
-            <a:prstDash val="solid"/>
-          </a:ln>
-        </p:spPr>
-      </p:sp>
-      <p:sp>
-        <p:nvSpPr>
-          <p:cNvPr id="41" name="Text 39"/>
-          <p:cNvSpPr txBox="1"/>
-          <p:nvPr/>
-        </p:nvSpPr>
-        <p:spPr>
-          <a:xfrm>
-            <a:off x="8156448" y="4169664"/>
-            <a:ext cx="2560320" cy="384048"/>
-          </a:xfrm>
-          <a:prstGeom prst="rect">
-            <a:avLst/>
-          </a:prstGeom>
-          <a:noFill/>
-          <a:ln/>
-        </p:spPr>
-        <p:txBody>
-          <a:bodyPr wrap="square" lIns="0" tIns="0" rIns="0" bIns="0" rtlCol="0" anchor="t"/>
-          <a:lstStyle/>
-          <a:p>
-            <a:pPr indent="0" marL="0">
-              <a:buNone/>
-            </a:pPr>
-            <a:r>
-              <a:rPr lang="en-US" sz="1200" b="1" dirty="0">
-                <a:solidFill>
-                  <a:srgbClr val="F4F1F0"/>
-                </a:solidFill>
-                <a:latin typeface="Calibri" pitchFamily="34" charset="0"/>
-                <a:ea typeface="Calibri" pitchFamily="34" charset="-122"/>
-                <a:cs typeface="Calibri" pitchFamily="34" charset="-120"/>
-              </a:rPr>
-              <a:t>Administration</a:t>
-            </a:r>
-            <a:endParaRPr lang="en-US" sz="1200" dirty="0"/>
-          </a:p>
-        </p:txBody>
-      </p:sp>
-      <p:sp>
-        <p:nvSpPr>
-          <p:cNvPr id="42" name="Text 40"/>
-          <p:cNvSpPr txBox="1"/>
-          <p:nvPr/>
-        </p:nvSpPr>
-        <p:spPr>
-          <a:xfrm>
-            <a:off x="8156448" y="4526280"/>
-            <a:ext cx="2743200" cy="292608"/>
-          </a:xfrm>
-          <a:prstGeom prst="rect">
-            <a:avLst/>
-          </a:prstGeom>
-          <a:noFill/>
-          <a:ln/>
-        </p:spPr>
-        <p:txBody>
-          <a:bodyPr wrap="square" lIns="0" tIns="0" rIns="0" bIns="0" rtlCol="0" anchor="ctr"/>
-          <a:lstStyle/>
-          <a:p>
-            <a:pPr indent="0" marL="0">
-              <a:buNone/>
-            </a:pPr>
-            <a:r>
-              <a:rPr lang="en-US" sz="1100" dirty="0">
-                <a:solidFill>
-                  <a:srgbClr val="A9A09E"/>
-                </a:solidFill>
-                <a:latin typeface="Calibri" pitchFamily="34" charset="0"/>
-                <a:ea typeface="Calibri" pitchFamily="34" charset="-122"/>
-                <a:cs typeface="Calibri" pitchFamily="34" charset="-120"/>
-              </a:rPr>
-              <a:t>18 permissions</a:t>
-            </a:r>
-            <a:endParaRPr lang="en-US" sz="1100" dirty="0"/>
-          </a:p>
-        </p:txBody>
-      </p:sp>
-      <p:sp>
-        <p:nvSpPr>
-          <p:cNvPr id="43" name="Text 41"/>
-          <p:cNvSpPr txBox="1"/>
-          <p:nvPr/>
-        </p:nvSpPr>
-        <p:spPr>
-          <a:xfrm>
-            <a:off x="10753344" y="4206240"/>
-            <a:ext cx="566928" cy="594360"/>
-          </a:xfrm>
-          <a:prstGeom prst="rect">
-            <a:avLst/>
-          </a:prstGeom>
-          <a:noFill/>
-          <a:ln/>
-        </p:spPr>
-        <p:txBody>
-          <a:bodyPr wrap="square" lIns="0" tIns="0" rIns="0" bIns="0" rtlCol="0" anchor="ctr"/>
-          <a:lstStyle/>
-          <a:p>
-            <a:pPr algn="r" indent="0" marL="0">
-              <a:buNone/>
-            </a:pPr>
-            <a:r>
-              <a:rPr lang="en-US" sz="2000" b="1" dirty="0">
-                <a:solidFill>
-                  <a:srgbClr val="B8323A"/>
-                </a:solidFill>
-                <a:latin typeface="Cambria" pitchFamily="34" charset="0"/>
-                <a:ea typeface="Cambria" pitchFamily="34" charset="-122"/>
-                <a:cs typeface="Cambria" pitchFamily="34" charset="-120"/>
-              </a:rPr>
-              <a:t>8</a:t>
-            </a:r>
-            <a:endParaRPr lang="en-US" sz="2000" dirty="0"/>
-          </a:p>
-        </p:txBody>
-      </p:sp>
-      <p:sp>
-        <p:nvSpPr>
-          <p:cNvPr id="44" name="Shape 42"/>
-          <p:cNvSpPr/>
-          <p:nvPr/>
-        </p:nvSpPr>
-        <p:spPr>
-          <a:xfrm>
-            <a:off x="566928" y="5029200"/>
-            <a:ext cx="3493008" cy="777240"/>
-          </a:xfrm>
-          <a:prstGeom prst="roundRect">
-            <a:avLst>
-              <a:gd name="adj" fmla="val 7059"/>
-            </a:avLst>
-          </a:prstGeom>
-          <a:solidFill>
-            <a:srgbClr val="1E1A19"/>
-          </a:solidFill>
-          <a:ln w="12700">
-            <a:solidFill>
-              <a:srgbClr val="2C2524"/>
-            </a:solidFill>
-            <a:prstDash val="solid"/>
-          </a:ln>
-        </p:spPr>
-      </p:sp>
-      <p:sp>
-        <p:nvSpPr>
-          <p:cNvPr id="45" name="Text 43"/>
-          <p:cNvSpPr txBox="1"/>
-          <p:nvPr/>
-        </p:nvSpPr>
-        <p:spPr>
-          <a:xfrm>
-            <a:off x="731520" y="5084064"/>
-            <a:ext cx="2560320" cy="384048"/>
-          </a:xfrm>
-          <a:prstGeom prst="rect">
-            <a:avLst/>
-          </a:prstGeom>
-          <a:noFill/>
-          <a:ln/>
-        </p:spPr>
-        <p:txBody>
-          <a:bodyPr wrap="square" lIns="0" tIns="0" rIns="0" bIns="0" rtlCol="0" anchor="t"/>
-          <a:lstStyle/>
-          <a:p>
-            <a:pPr indent="0" marL="0">
-              <a:buNone/>
-            </a:pPr>
-            <a:r>
-              <a:rPr lang="en-US" sz="1200" b="1" dirty="0">
-                <a:solidFill>
-                  <a:srgbClr val="F4F1F0"/>
-                </a:solidFill>
-                <a:latin typeface="Calibri" pitchFamily="34" charset="0"/>
-                <a:ea typeface="Calibri" pitchFamily="34" charset="-122"/>
-                <a:cs typeface="Calibri" pitchFamily="34" charset="-120"/>
-              </a:rPr>
-              <a:t>Studio leadership</a:t>
-            </a:r>
-            <a:endParaRPr lang="en-US" sz="1200" dirty="0"/>
-          </a:p>
-        </p:txBody>
-      </p:sp>
-      <p:sp>
-        <p:nvSpPr>
-          <p:cNvPr id="46" name="Text 44"/>
-          <p:cNvSpPr txBox="1"/>
-          <p:nvPr/>
-        </p:nvSpPr>
-        <p:spPr>
-          <a:xfrm>
-            <a:off x="731520" y="5440680"/>
-            <a:ext cx="2743200" cy="292608"/>
-          </a:xfrm>
-          <a:prstGeom prst="rect">
-            <a:avLst/>
-          </a:prstGeom>
-          <a:noFill/>
-          <a:ln/>
-        </p:spPr>
-        <p:txBody>
-          <a:bodyPr wrap="square" lIns="0" tIns="0" rIns="0" bIns="0" rtlCol="0" anchor="ctr"/>
-          <a:lstStyle/>
-          <a:p>
-            <a:pPr indent="0" marL="0">
-              <a:buNone/>
-            </a:pPr>
-            <a:r>
-              <a:rPr lang="en-US" sz="1100" dirty="0">
-                <a:solidFill>
-                  <a:srgbClr val="A9A09E"/>
-                </a:solidFill>
-                <a:latin typeface="Calibri" pitchFamily="34" charset="0"/>
-                <a:ea typeface="Calibri" pitchFamily="34" charset="-122"/>
-                <a:cs typeface="Calibri" pitchFamily="34" charset="-120"/>
-              </a:rPr>
-              <a:t>15 permissions</a:t>
-            </a:r>
-            <a:endParaRPr lang="en-US" sz="1100" dirty="0"/>
-          </a:p>
-        </p:txBody>
-      </p:sp>
-      <p:sp>
-        <p:nvSpPr>
-          <p:cNvPr id="47" name="Text 45"/>
-          <p:cNvSpPr txBox="1"/>
-          <p:nvPr/>
-        </p:nvSpPr>
-        <p:spPr>
-          <a:xfrm>
-            <a:off x="3328416" y="5120640"/>
-            <a:ext cx="566928" cy="594360"/>
-          </a:xfrm>
-          <a:prstGeom prst="rect">
-            <a:avLst/>
-          </a:prstGeom>
-          <a:noFill/>
-          <a:ln/>
-        </p:spPr>
-        <p:txBody>
-          <a:bodyPr wrap="square" lIns="0" tIns="0" rIns="0" bIns="0" rtlCol="0" anchor="ctr"/>
-          <a:lstStyle/>
-          <a:p>
-            <a:pPr algn="r" indent="0" marL="0">
-              <a:buNone/>
-            </a:pPr>
-            <a:r>
-              <a:rPr lang="en-US" sz="2000" b="1" dirty="0">
-                <a:solidFill>
-                  <a:srgbClr val="B8323A"/>
-                </a:solidFill>
-                <a:latin typeface="Cambria" pitchFamily="34" charset="0"/>
-                <a:ea typeface="Cambria" pitchFamily="34" charset="-122"/>
-                <a:cs typeface="Cambria" pitchFamily="34" charset="-120"/>
-              </a:rPr>
-              <a:t>7</a:t>
-            </a:r>
-            <a:endParaRPr lang="en-US" sz="2000" dirty="0"/>
-          </a:p>
-        </p:txBody>
-      </p:sp>
-      <p:sp>
-        <p:nvSpPr>
-          <p:cNvPr id="48" name="Shape 46"/>
-          <p:cNvSpPr/>
-          <p:nvPr/>
-        </p:nvSpPr>
-        <p:spPr>
-          <a:xfrm>
-            <a:off x="4279392" y="5029200"/>
-            <a:ext cx="3493008" cy="777240"/>
-          </a:xfrm>
-          <a:prstGeom prst="roundRect">
-            <a:avLst>
-              <a:gd name="adj" fmla="val 7059"/>
-            </a:avLst>
-          </a:prstGeom>
-          <a:solidFill>
-            <a:srgbClr val="1E1A19"/>
-          </a:solidFill>
-          <a:ln w="12700">
-            <a:solidFill>
-              <a:srgbClr val="2C2524"/>
-            </a:solidFill>
-            <a:prstDash val="solid"/>
-          </a:ln>
-        </p:spPr>
-      </p:sp>
-      <p:sp>
-        <p:nvSpPr>
-          <p:cNvPr id="49" name="Text 47"/>
-          <p:cNvSpPr txBox="1"/>
-          <p:nvPr/>
-        </p:nvSpPr>
-        <p:spPr>
-          <a:xfrm>
-            <a:off x="4443984" y="5084064"/>
-            <a:ext cx="2560320" cy="384048"/>
-          </a:xfrm>
-          <a:prstGeom prst="rect">
-            <a:avLst/>
-          </a:prstGeom>
-          <a:noFill/>
-          <a:ln/>
-        </p:spPr>
-        <p:txBody>
-          <a:bodyPr wrap="square" lIns="0" tIns="0" rIns="0" bIns="0" rtlCol="0" anchor="t"/>
-          <a:lstStyle/>
-          <a:p>
-            <a:pPr indent="0" marL="0">
-              <a:buNone/>
-            </a:pPr>
-            <a:r>
-              <a:rPr lang="en-US" sz="1200" b="1" dirty="0">
-                <a:solidFill>
-                  <a:srgbClr val="F4F1F0"/>
-                </a:solidFill>
-                <a:latin typeface="Calibri" pitchFamily="34" charset="0"/>
-                <a:ea typeface="Calibri" pitchFamily="34" charset="-122"/>
-                <a:cs typeface="Calibri" pitchFamily="34" charset="-120"/>
-              </a:rPr>
-              <a:t>Creative Art Director and Super Admin</a:t>
-            </a:r>
-            <a:endParaRPr lang="en-US" sz="1200" dirty="0"/>
-          </a:p>
-        </p:txBody>
-      </p:sp>
-      <p:sp>
-        <p:nvSpPr>
-          <p:cNvPr id="50" name="Text 48"/>
-          <p:cNvSpPr txBox="1"/>
-          <p:nvPr/>
-        </p:nvSpPr>
-        <p:spPr>
-          <a:xfrm>
-            <a:off x="4443984" y="5440680"/>
-            <a:ext cx="2743200" cy="292608"/>
-          </a:xfrm>
-          <a:prstGeom prst="rect">
-            <a:avLst/>
-          </a:prstGeom>
-          <a:noFill/>
-          <a:ln/>
-        </p:spPr>
-        <p:txBody>
-          <a:bodyPr wrap="square" lIns="0" tIns="0" rIns="0" bIns="0" rtlCol="0" anchor="ctr"/>
-          <a:lstStyle/>
-          <a:p>
-            <a:pPr indent="0" marL="0">
-              <a:buNone/>
-            </a:pPr>
-            <a:r>
-              <a:rPr lang="en-US" sz="1100" dirty="0">
-                <a:solidFill>
-                  <a:srgbClr val="A9A09E"/>
-                </a:solidFill>
-                <a:latin typeface="Calibri" pitchFamily="34" charset="0"/>
-                <a:ea typeface="Calibri" pitchFamily="34" charset="-122"/>
-                <a:cs typeface="Calibri" pitchFamily="34" charset="-120"/>
-              </a:rPr>
-              <a:t>3 permissions</a:t>
-            </a:r>
-            <a:endParaRPr lang="en-US" sz="1100" dirty="0"/>
-          </a:p>
-        </p:txBody>
-      </p:sp>
-      <p:sp>
-        <p:nvSpPr>
-          <p:cNvPr id="51" name="Text 49"/>
-          <p:cNvSpPr txBox="1"/>
-          <p:nvPr/>
-        </p:nvSpPr>
-        <p:spPr>
-          <a:xfrm>
-            <a:off x="7040880" y="5120640"/>
-            <a:ext cx="566928" cy="594360"/>
-          </a:xfrm>
-          <a:prstGeom prst="rect">
-            <a:avLst/>
-          </a:prstGeom>
-          <a:noFill/>
-          <a:ln/>
-        </p:spPr>
-        <p:txBody>
-          <a:bodyPr wrap="square" lIns="0" tIns="0" rIns="0" bIns="0" rtlCol="0" anchor="ctr"/>
-          <a:lstStyle/>
-          <a:p>
-            <a:pPr algn="r" indent="0" marL="0">
-              <a:buNone/>
-            </a:pPr>
-            <a:r>
-              <a:rPr lang="en-US" sz="2000" b="1" dirty="0">
-                <a:solidFill>
-                  <a:srgbClr val="B8323A"/>
-                </a:solidFill>
-                <a:latin typeface="Cambria" pitchFamily="34" charset="0"/>
-                <a:ea typeface="Cambria" pitchFamily="34" charset="-122"/>
-                <a:cs typeface="Cambria" pitchFamily="34" charset="-120"/>
-              </a:rPr>
-              <a:t>2</a:t>
-            </a:r>
-            <a:endParaRPr lang="en-US" sz="2000" dirty="0"/>
-          </a:p>
-        </p:txBody>
-      </p:sp>
-      <p:sp>
-        <p:nvSpPr>
-          <p:cNvPr id="52" name="Shape 50"/>
-          <p:cNvSpPr/>
-          <p:nvPr/>
-        </p:nvSpPr>
-        <p:spPr>
-          <a:xfrm>
-            <a:off x="7991856" y="5029200"/>
-            <a:ext cx="3493008" cy="777240"/>
-          </a:xfrm>
-          <a:prstGeom prst="roundRect">
-            <a:avLst>
-              <a:gd name="adj" fmla="val 7059"/>
-            </a:avLst>
-          </a:prstGeom>
-          <a:solidFill>
-            <a:srgbClr val="1E1A19"/>
-          </a:solidFill>
-          <a:ln w="12700">
-            <a:solidFill>
-              <a:srgbClr val="2C2524"/>
-            </a:solidFill>
-            <a:prstDash val="solid"/>
-          </a:ln>
-        </p:spPr>
-      </p:sp>
-      <p:sp>
-        <p:nvSpPr>
-          <p:cNvPr id="53" name="Text 51"/>
-          <p:cNvSpPr txBox="1"/>
-          <p:nvPr/>
-        </p:nvSpPr>
-        <p:spPr>
-          <a:xfrm>
-            <a:off x="8156448" y="5084064"/>
-            <a:ext cx="2560320" cy="384048"/>
-          </a:xfrm>
-          <a:prstGeom prst="rect">
-            <a:avLst/>
-          </a:prstGeom>
-          <a:noFill/>
-          <a:ln/>
-        </p:spPr>
-        <p:txBody>
-          <a:bodyPr wrap="square" lIns="0" tIns="0" rIns="0" bIns="0" rtlCol="0" anchor="t"/>
-          <a:lstStyle/>
-          <a:p>
-            <a:pPr indent="0" marL="0">
-              <a:buNone/>
-            </a:pPr>
-            <a:r>
-              <a:rPr lang="en-US" sz="1200" b="1" dirty="0">
-                <a:solidFill>
-                  <a:srgbClr val="F4F1F0"/>
-                </a:solidFill>
-                <a:latin typeface="Calibri" pitchFamily="34" charset="0"/>
-                <a:ea typeface="Calibri" pitchFamily="34" charset="-122"/>
-                <a:cs typeface="Calibri" pitchFamily="34" charset="-120"/>
-              </a:rPr>
-              <a:t>Super Admin only</a:t>
-            </a:r>
-            <a:endParaRPr lang="en-US" sz="1200" dirty="0"/>
-          </a:p>
-        </p:txBody>
-      </p:sp>
-      <p:sp>
-        <p:nvSpPr>
-          <p:cNvPr id="54" name="Text 52"/>
-          <p:cNvSpPr txBox="1"/>
-          <p:nvPr/>
-        </p:nvSpPr>
-        <p:spPr>
-          <a:xfrm>
-            <a:off x="8156448" y="5440680"/>
-            <a:ext cx="2743200" cy="292608"/>
-          </a:xfrm>
-          <a:prstGeom prst="rect">
-            <a:avLst/>
-          </a:prstGeom>
-          <a:noFill/>
-          <a:ln/>
-        </p:spPr>
-        <p:txBody>
-          <a:bodyPr wrap="square" lIns="0" tIns="0" rIns="0" bIns="0" rtlCol="0" anchor="ctr"/>
-          <a:lstStyle/>
-          <a:p>
-            <a:pPr indent="0" marL="0">
-              <a:buNone/>
-            </a:pPr>
-            <a:r>
-              <a:rPr lang="en-US" sz="1100" dirty="0">
-                <a:solidFill>
-                  <a:srgbClr val="A9A09E"/>
-                </a:solidFill>
-                <a:latin typeface="Calibri" pitchFamily="34" charset="0"/>
-                <a:ea typeface="Calibri" pitchFamily="34" charset="-122"/>
-                <a:cs typeface="Calibri" pitchFamily="34" charset="-120"/>
-              </a:rPr>
-              <a:t>8 permissions</a:t>
-            </a:r>
-            <a:endParaRPr lang="en-US" sz="1100" dirty="0"/>
-          </a:p>
-        </p:txBody>
-      </p:sp>
-      <p:sp>
-        <p:nvSpPr>
-          <p:cNvPr id="55" name="Text 53"/>
-          <p:cNvSpPr txBox="1"/>
-          <p:nvPr/>
-        </p:nvSpPr>
-        <p:spPr>
-          <a:xfrm>
-            <a:off x="10753344" y="5120640"/>
-            <a:ext cx="566928" cy="594360"/>
-          </a:xfrm>
-          <a:prstGeom prst="rect">
-            <a:avLst/>
-          </a:prstGeom>
-          <a:noFill/>
-          <a:ln/>
-        </p:spPr>
-        <p:txBody>
-          <a:bodyPr wrap="square" lIns="0" tIns="0" rIns="0" bIns="0" rtlCol="0" anchor="ctr"/>
-          <a:lstStyle/>
-          <a:p>
-            <a:pPr algn="r" indent="0" marL="0">
-              <a:buNone/>
-            </a:pPr>
-            <a:r>
-              <a:rPr lang="en-US" sz="2000" b="1" dirty="0">
-                <a:solidFill>
-                  <a:srgbClr val="B8323A"/>
-                </a:solidFill>
-                <a:latin typeface="Cambria" pitchFamily="34" charset="0"/>
-                <a:ea typeface="Cambria" pitchFamily="34" charset="-122"/>
-                <a:cs typeface="Cambria" pitchFamily="34" charset="-120"/>
-              </a:rPr>
-              <a:t>1</a:t>
-            </a:r>
-            <a:endParaRPr lang="en-US" sz="2000" dirty="0"/>
-          </a:p>
-        </p:txBody>
-      </p:sp>
-      <p:sp>
-        <p:nvSpPr>
-          <p:cNvPr id="56" name="Text 54"/>
-          <p:cNvSpPr txBox="1"/>
-          <p:nvPr/>
-        </p:nvSpPr>
-        <p:spPr>
-          <a:xfrm>
-            <a:off x="566928" y="5989320"/>
-            <a:ext cx="10881360" cy="548640"/>
-          </a:xfrm>
-          <a:prstGeom prst="rect">
-            <a:avLst/>
-          </a:prstGeom>
-          <a:noFill/>
-          <a:ln/>
-        </p:spPr>
-        <p:txBody>
-          <a:bodyPr wrap="square" lIns="0" tIns="0" rIns="0" bIns="0" rtlCol="0" anchor="ctr"/>
-          <a:lstStyle/>
-          <a:p>
-            <a:pPr indent="0" marL="0">
-              <a:buNone/>
-            </a:pPr>
-            <a:r>
-              <a:rPr lang="en-US" sz="1300" dirty="0">
-                <a:solidFill>
-                  <a:srgbClr val="A9A09E"/>
-                </a:solidFill>
-                <a:latin typeface="Calibri" pitchFamily="34" charset="0"/>
-                <a:ea typeface="Calibri" pitchFamily="34" charset="-122"/>
-                <a:cs typeface="Calibri" pitchFamily="34" charset="-120"/>
-              </a:rPr>
-              <a:t>The large number on each card is how many designations hold that band. Super Admin holds everything, including any permission added in future, without anybody switching it on.</a:t>
-            </a:r>
-            <a:endParaRPr lang="en-US" sz="1300" dirty="0"/>
+              <a:t>The working-hours control.</a:t>
+            </a:r>
+            <a:endParaRPr lang="en-US" sz="1000" dirty="0"/>
           </a:p>
         </p:txBody>
       </p:sp>
@@ -14782,7 +13357,7 @@
                 <a:ea typeface="Cambria" pitchFamily="34" charset="-122"/>
                 <a:cs typeface="Cambria" pitchFamily="34" charset="-120"/>
               </a:rPr>
-              <a:t>One screen decides what everybody else may do</a:t>
+              <a:t>Twelve access bands, not sixty role lists</a:t>
             </a:r>
             <a:endParaRPr lang="en-US" sz="3400" dirty="0"/>
           </a:p>
@@ -14796,111 +13371,32 @@
         </p:nvSpPr>
         <p:spPr>
           <a:xfrm>
-            <a:off x="566928" y="1828800"/>
-            <a:ext cx="4937760" cy="3200400"/>
-          </a:xfrm>
-          <a:prstGeom prst="rect">
-            <a:avLst/>
-          </a:prstGeom>
-          <a:noFill/>
-          <a:ln/>
-        </p:spPr>
-        <p:txBody>
-          <a:bodyPr wrap="square" rtlCol="0" anchor="ctr"/>
-          <a:lstStyle/>
-          <a:p>
-            <a:pPr marL="342900" indent="-342900">
-              <a:lnSpc>
-                <a:spcPts val="2000"/>
-              </a:lnSpc>
-              <a:spcAft>
-                <a:spcPts val="1000"/>
-              </a:spcAft>
-              <a:buSzPct val="100000"/>
-              <a:buChar char="•"/>
+            <a:off x="566928" y="1554480"/>
+            <a:ext cx="6035040" cy="457200"/>
+          </a:xfrm>
+          <a:prstGeom prst="rect">
+            <a:avLst/>
+          </a:prstGeom>
+          <a:noFill/>
+          <a:ln/>
+        </p:spPr>
+        <p:txBody>
+          <a:bodyPr wrap="square" lIns="0" tIns="0" rIns="0" bIns="0" rtlCol="0" anchor="ctr"/>
+          <a:lstStyle/>
+          <a:p>
+            <a:pPr indent="0" marL="0">
+              <a:buNone/>
             </a:pPr>
             <a:r>
               <a:rPr lang="en-US" sz="1400" dirty="0">
                 <a:solidFill>
-                  <a:srgbClr val="F4F1F0"/>
-                </a:solidFill>
-                <a:latin typeface="Calibri" pitchFamily="34" charset="0"/>
-                <a:ea typeface="Calibri" pitchFamily="34" charset="-122"/>
-                <a:cs typeface="Calibri" pitchFamily="34" charset="-120"/>
-              </a:rPr>
-              <a:t>Choose a designation, tick the actions it should hold, save.</a:t>
-            </a:r>
-            <a:endParaRPr lang="en-US" sz="1400" dirty="0"/>
-          </a:p>
-          <a:p>
-            <a:pPr marL="342900" indent="-342900">
-              <a:lnSpc>
-                <a:spcPts val="2000"/>
-              </a:lnSpc>
-              <a:spcAft>
-                <a:spcPts val="1000"/>
-              </a:spcAft>
-              <a:buSzPct val="100000"/>
-              <a:buChar char="•"/>
-            </a:pPr>
-            <a:r>
-              <a:rPr lang="en-US" sz="1400" dirty="0">
-                <a:solidFill>
-                  <a:srgbClr val="F4F1F0"/>
-                </a:solidFill>
-                <a:latin typeface="Calibri" pitchFamily="34" charset="0"/>
-                <a:ea typeface="Calibri" pitchFamily="34" charset="-122"/>
-                <a:cs typeface="Calibri" pitchFamily="34" charset="-120"/>
-              </a:rPr>
-              <a:t>The change applies to everybody holding that designation, on their next request.</a:t>
-            </a:r>
-            <a:endParaRPr lang="en-US" sz="1400" dirty="0"/>
-          </a:p>
-          <a:p>
-            <a:pPr marL="342900" indent="-342900">
-              <a:lnSpc>
-                <a:spcPts val="2000"/>
-              </a:lnSpc>
-              <a:spcAft>
-                <a:spcPts val="1000"/>
-              </a:spcAft>
-              <a:buSzPct val="100000"/>
-              <a:buChar char="•"/>
-            </a:pPr>
-            <a:r>
-              <a:rPr lang="en-US" sz="1400" dirty="0">
-                <a:solidFill>
-                  <a:srgbClr val="F4F1F0"/>
-                </a:solidFill>
-                <a:latin typeface="Calibri" pitchFamily="34" charset="0"/>
-                <a:ea typeface="Calibri" pitchFamily="34" charset="-122"/>
-                <a:cs typeface="Calibri" pitchFamily="34" charset="-120"/>
-              </a:rPr>
-              <a:t>Super Admin holds every permission and cannot be edited down.</a:t>
-            </a:r>
-            <a:endParaRPr lang="en-US" sz="1400" dirty="0"/>
-          </a:p>
-          <a:p>
-            <a:pPr marL="342900" indent="-342900">
-              <a:lnSpc>
-                <a:spcPts val="2000"/>
-              </a:lnSpc>
-              <a:spcAft>
-                <a:spcPts val="1000"/>
-              </a:spcAft>
-              <a:buSzPct val="100000"/>
-              <a:buChar char="•"/>
-            </a:pPr>
-            <a:r>
-              <a:rPr lang="en-US" sz="1400" dirty="0">
-                <a:solidFill>
-                  <a:srgbClr val="F4F1F0"/>
-                </a:solidFill>
-                <a:latin typeface="Calibri" pitchFamily="34" charset="0"/>
-                <a:ea typeface="Calibri" pitchFamily="34" charset="-122"/>
-                <a:cs typeface="Calibri" pitchFamily="34" charset="-120"/>
-              </a:rPr>
-              <a:t>Every change is written to the Activity Log — the designation, the permission and the direction.</a:t>
+                  <a:srgbClr val="A9A09E"/>
+                </a:solidFill>
+                <a:latin typeface="Calibri" pitchFamily="34" charset="0"/>
+                <a:ea typeface="Calibri" pitchFamily="34" charset="-122"/>
+                <a:cs typeface="Calibri" pitchFamily="34" charset="-120"/>
+              </a:rPr>
+              <a:t>59 permissions across 60 designations, in only twelve distinct groups of holders.</a:t>
             </a:r>
             <a:endParaRPr lang="en-US" sz="1400" dirty="0"/>
           </a:p>
@@ -14914,8 +13410,8 @@
         </p:nvSpPr>
         <p:spPr>
           <a:xfrm>
-            <a:off x="566928" y="5532120"/>
-            <a:ext cx="4937760" cy="777240"/>
+            <a:off x="566928" y="2286000"/>
+            <a:ext cx="3493008" cy="777240"/>
           </a:xfrm>
           <a:prstGeom prst="roundRect">
             <a:avLst>
@@ -14941,38 +13437,168 @@
         </p:nvSpPr>
         <p:spPr>
           <a:xfrm>
-            <a:off x="749808" y="5532120"/>
-            <a:ext cx="4572000" cy="777240"/>
-          </a:xfrm>
-          <a:prstGeom prst="rect">
-            <a:avLst/>
-          </a:prstGeom>
-          <a:noFill/>
-          <a:ln/>
-        </p:spPr>
-        <p:txBody>
-          <a:bodyPr wrap="square" lIns="0" tIns="0" rIns="0" bIns="0" rtlCol="0" anchor="ctr"/>
+            <a:off x="731520" y="2340864"/>
+            <a:ext cx="2560320" cy="384048"/>
+          </a:xfrm>
+          <a:prstGeom prst="rect">
+            <a:avLst/>
+          </a:prstGeom>
+          <a:noFill/>
+          <a:ln/>
+        </p:spPr>
+        <p:txBody>
+          <a:bodyPr wrap="square" lIns="0" tIns="0" rIns="0" bIns="0" rtlCol="0" anchor="t"/>
           <a:lstStyle/>
           <a:p>
             <a:pPr indent="0" marL="0">
               <a:buNone/>
             </a:pPr>
             <a:r>
-              <a:rPr lang="en-US" sz="1000" b="1" spc="200" kern="0" dirty="0">
+              <a:rPr lang="en-US" sz="1200" b="1" dirty="0">
+                <a:solidFill>
+                  <a:srgbClr val="F4F1F0"/>
+                </a:solidFill>
+                <a:latin typeface="Calibri" pitchFamily="34" charset="0"/>
+                <a:ea typeface="Calibri" pitchFamily="34" charset="-122"/>
+                <a:cs typeface="Calibri" pitchFamily="34" charset="-120"/>
+              </a:rPr>
+              <a:t>Everyone</a:t>
+            </a:r>
+            <a:endParaRPr lang="en-US" sz="1200" dirty="0"/>
+          </a:p>
+        </p:txBody>
+      </p:sp>
+      <p:sp>
+        <p:nvSpPr>
+          <p:cNvPr id="10" name="Text 8"/>
+          <p:cNvSpPr txBox="1"/>
+          <p:nvPr/>
+        </p:nvSpPr>
+        <p:spPr>
+          <a:xfrm>
+            <a:off x="731520" y="2697480"/>
+            <a:ext cx="2743200" cy="292608"/>
+          </a:xfrm>
+          <a:prstGeom prst="rect">
+            <a:avLst/>
+          </a:prstGeom>
+          <a:noFill/>
+          <a:ln/>
+        </p:spPr>
+        <p:txBody>
+          <a:bodyPr wrap="square" lIns="0" tIns="0" rIns="0" bIns="0" rtlCol="0" anchor="ctr"/>
+          <a:lstStyle/>
+          <a:p>
+            <a:pPr indent="0" marL="0">
+              <a:buNone/>
+            </a:pPr>
+            <a:r>
+              <a:rPr lang="en-US" sz="1100" dirty="0">
+                <a:solidFill>
+                  <a:srgbClr val="A9A09E"/>
+                </a:solidFill>
+                <a:latin typeface="Calibri" pitchFamily="34" charset="0"/>
+                <a:ea typeface="Calibri" pitchFamily="34" charset="-122"/>
+                <a:cs typeface="Calibri" pitchFamily="34" charset="-120"/>
+              </a:rPr>
+              <a:t>3 permissions</a:t>
+            </a:r>
+            <a:endParaRPr lang="en-US" sz="1100" dirty="0"/>
+          </a:p>
+        </p:txBody>
+      </p:sp>
+      <p:sp>
+        <p:nvSpPr>
+          <p:cNvPr id="11" name="Text 9"/>
+          <p:cNvSpPr txBox="1"/>
+          <p:nvPr/>
+        </p:nvSpPr>
+        <p:spPr>
+          <a:xfrm>
+            <a:off x="3328416" y="2377440"/>
+            <a:ext cx="566928" cy="594360"/>
+          </a:xfrm>
+          <a:prstGeom prst="rect">
+            <a:avLst/>
+          </a:prstGeom>
+          <a:noFill/>
+          <a:ln/>
+        </p:spPr>
+        <p:txBody>
+          <a:bodyPr wrap="square" lIns="0" tIns="0" rIns="0" bIns="0" rtlCol="0" anchor="ctr"/>
+          <a:lstStyle/>
+          <a:p>
+            <a:pPr algn="r" indent="0" marL="0">
+              <a:buNone/>
+            </a:pPr>
+            <a:r>
+              <a:rPr lang="en-US" sz="2000" b="1" dirty="0">
                 <a:solidFill>
                   <a:srgbClr val="B8323A"/>
                 </a:solidFill>
-                <a:latin typeface="Calibri" pitchFamily="34" charset="0"/>
-                <a:ea typeface="Calibri" pitchFamily="34" charset="-122"/>
-                <a:cs typeface="Calibri" pitchFamily="34" charset="-120"/>
-              </a:rPr>
-              <a:t>WHO  </a:t>
-            </a:r>
+                <a:latin typeface="Cambria" pitchFamily="34" charset="0"/>
+                <a:ea typeface="Cambria" pitchFamily="34" charset="-122"/>
+                <a:cs typeface="Cambria" pitchFamily="34" charset="-120"/>
+              </a:rPr>
+              <a:t>60</a:t>
+            </a:r>
+            <a:endParaRPr lang="en-US" sz="2000" dirty="0"/>
+          </a:p>
+        </p:txBody>
+      </p:sp>
+      <p:sp>
+        <p:nvSpPr>
+          <p:cNvPr id="12" name="Shape 10"/>
+          <p:cNvSpPr/>
+          <p:nvPr/>
+        </p:nvSpPr>
+        <p:spPr>
+          <a:xfrm>
+            <a:off x="4279392" y="2286000"/>
+            <a:ext cx="3493008" cy="777240"/>
+          </a:xfrm>
+          <a:prstGeom prst="roundRect">
+            <a:avLst>
+              <a:gd name="adj" fmla="val 7059"/>
+            </a:avLst>
+          </a:prstGeom>
+          <a:solidFill>
+            <a:srgbClr val="1E1A19"/>
+          </a:solidFill>
+          <a:ln w="12700">
+            <a:solidFill>
+              <a:srgbClr val="2C2524"/>
+            </a:solidFill>
+            <a:prstDash val="solid"/>
+          </a:ln>
+        </p:spPr>
+      </p:sp>
+      <p:sp>
+        <p:nvSpPr>
+          <p:cNvPr id="13" name="Text 11"/>
+          <p:cNvSpPr txBox="1"/>
+          <p:nvPr/>
+        </p:nvSpPr>
+        <p:spPr>
+          <a:xfrm>
+            <a:off x="4443984" y="2340864"/>
+            <a:ext cx="2560320" cy="384048"/>
+          </a:xfrm>
+          <a:prstGeom prst="rect">
+            <a:avLst/>
+          </a:prstGeom>
+          <a:noFill/>
+          <a:ln/>
+        </p:spPr>
+        <p:txBody>
+          <a:bodyPr wrap="square" lIns="0" tIns="0" rIns="0" bIns="0" rtlCol="0" anchor="t"/>
+          <a:lstStyle/>
+          <a:p>
             <a:pPr indent="0" marL="0">
               <a:buNone/>
             </a:pPr>
             <a:r>
-              <a:rPr lang="en-US" sz="1200" dirty="0">
+              <a:rPr lang="en-US" sz="1200" b="1" dirty="0">
                 <a:solidFill>
                   <a:srgbClr val="F4F1F0"/>
                 </a:solidFill>
@@ -14980,69 +13606,38 @@
                 <a:ea typeface="Calibri" pitchFamily="34" charset="-122"/>
                 <a:cs typeface="Calibri" pitchFamily="34" charset="-120"/>
               </a:rPr>
-              <a:t>Super Admin, and nobody else.</a:t>
-            </a:r>
-            <a:endParaRPr lang="en-US" sz="1000" dirty="0"/>
-          </a:p>
-        </p:txBody>
-      </p:sp>
-      <p:pic>
-        <p:nvPicPr>
-          <p:cNvPr id="10" name="Image 0" descr="preencoded.png">    </p:cNvPr>
-          <p:cNvPicPr>
-            <a:picLocks noChangeAspect="1"/>
-          </p:cNvPicPr>
-          <p:nvPr/>
-        </p:nvPicPr>
-        <p:blipFill>
-          <a:blip r:embed="rId1"/>
-          <a:stretch>
-            <a:fillRect/>
-          </a:stretch>
-        </p:blipFill>
-        <p:spPr>
-          <a:xfrm>
-            <a:off x="5989320" y="1570441"/>
-            <a:ext cx="5632704" cy="4082877"/>
-          </a:xfrm>
-          <a:prstGeom prst="rect">
-            <a:avLst/>
-          </a:prstGeom>
-          <a:effectLst>
-            <a:outerShdw sx="100000" sy="100000" kx="0" ky="0" algn="bl" rotWithShape="0" blurRad="177800" dist="50800" dir="5400000">
-              <a:srgbClr val="000000">
-                <a:alpha val="55000"/>
-              </a:srgbClr>
-            </a:outerShdw>
-          </a:effectLst>
-        </p:spPr>
-      </p:pic>
-      <p:sp>
-        <p:nvSpPr>
-          <p:cNvPr id="11" name="Text 8"/>
-          <p:cNvSpPr txBox="1"/>
-          <p:nvPr/>
-        </p:nvSpPr>
-        <p:spPr>
-          <a:xfrm>
-            <a:off x="5989320" y="5763047"/>
-            <a:ext cx="5632704" cy="457200"/>
-          </a:xfrm>
-          <a:prstGeom prst="rect">
-            <a:avLst/>
-          </a:prstGeom>
-          <a:noFill/>
-          <a:ln/>
-        </p:spPr>
-        <p:txBody>
-          <a:bodyPr wrap="square" lIns="0" tIns="0" rIns="0" bIns="0" rtlCol="0" anchor="ctr"/>
-          <a:lstStyle/>
-          <a:p>
-            <a:pPr algn="ctr" indent="0" marL="0">
-              <a:buNone/>
-            </a:pPr>
-            <a:r>
-              <a:rPr lang="en-US" sz="1000" i="1" dirty="0">
+              <a:t>Everyone who works on assets</a:t>
+            </a:r>
+            <a:endParaRPr lang="en-US" sz="1200" dirty="0"/>
+          </a:p>
+        </p:txBody>
+      </p:sp>
+      <p:sp>
+        <p:nvSpPr>
+          <p:cNvPr id="14" name="Text 12"/>
+          <p:cNvSpPr txBox="1"/>
+          <p:nvPr/>
+        </p:nvSpPr>
+        <p:spPr>
+          <a:xfrm>
+            <a:off x="4443984" y="2697480"/>
+            <a:ext cx="2743200" cy="292608"/>
+          </a:xfrm>
+          <a:prstGeom prst="rect">
+            <a:avLst/>
+          </a:prstGeom>
+          <a:noFill/>
+          <a:ln/>
+        </p:spPr>
+        <p:txBody>
+          <a:bodyPr wrap="square" lIns="0" tIns="0" rIns="0" bIns="0" rtlCol="0" anchor="ctr"/>
+          <a:lstStyle/>
+          <a:p>
+            <a:pPr indent="0" marL="0">
+              <a:buNone/>
+            </a:pPr>
+            <a:r>
+              <a:rPr lang="en-US" sz="1100" dirty="0">
                 <a:solidFill>
                   <a:srgbClr val="A9A09E"/>
                 </a:solidFill>
@@ -15050,9 +13645,1527 @@
                 <a:ea typeface="Calibri" pitchFamily="34" charset="-122"/>
                 <a:cs typeface="Calibri" pitchFamily="34" charset="-120"/>
               </a:rPr>
-              <a:t>The permission grid for one designation (first screenful).</a:t>
-            </a:r>
-            <a:endParaRPr lang="en-US" sz="1000" dirty="0"/>
+              <a:t>2 permissions</a:t>
+            </a:r>
+            <a:endParaRPr lang="en-US" sz="1100" dirty="0"/>
+          </a:p>
+        </p:txBody>
+      </p:sp>
+      <p:sp>
+        <p:nvSpPr>
+          <p:cNvPr id="15" name="Text 13"/>
+          <p:cNvSpPr txBox="1"/>
+          <p:nvPr/>
+        </p:nvSpPr>
+        <p:spPr>
+          <a:xfrm>
+            <a:off x="7040880" y="2377440"/>
+            <a:ext cx="566928" cy="594360"/>
+          </a:xfrm>
+          <a:prstGeom prst="rect">
+            <a:avLst/>
+          </a:prstGeom>
+          <a:noFill/>
+          <a:ln/>
+        </p:spPr>
+        <p:txBody>
+          <a:bodyPr wrap="square" lIns="0" tIns="0" rIns="0" bIns="0" rtlCol="0" anchor="ctr"/>
+          <a:lstStyle/>
+          <a:p>
+            <a:pPr algn="r" indent="0" marL="0">
+              <a:buNone/>
+            </a:pPr>
+            <a:r>
+              <a:rPr lang="en-US" sz="2000" b="1" dirty="0">
+                <a:solidFill>
+                  <a:srgbClr val="B8323A"/>
+                </a:solidFill>
+                <a:latin typeface="Cambria" pitchFamily="34" charset="0"/>
+                <a:ea typeface="Cambria" pitchFamily="34" charset="-122"/>
+                <a:cs typeface="Cambria" pitchFamily="34" charset="-120"/>
+              </a:rPr>
+              <a:t>51</a:t>
+            </a:r>
+            <a:endParaRPr lang="en-US" sz="2000" dirty="0"/>
+          </a:p>
+        </p:txBody>
+      </p:sp>
+      <p:sp>
+        <p:nvSpPr>
+          <p:cNvPr id="16" name="Shape 14"/>
+          <p:cNvSpPr/>
+          <p:nvPr/>
+        </p:nvSpPr>
+        <p:spPr>
+          <a:xfrm>
+            <a:off x="7991856" y="2286000"/>
+            <a:ext cx="3493008" cy="777240"/>
+          </a:xfrm>
+          <a:prstGeom prst="roundRect">
+            <a:avLst>
+              <a:gd name="adj" fmla="val 7059"/>
+            </a:avLst>
+          </a:prstGeom>
+          <a:solidFill>
+            <a:srgbClr val="1E1A19"/>
+          </a:solidFill>
+          <a:ln w="12700">
+            <a:solidFill>
+              <a:srgbClr val="2C2524"/>
+            </a:solidFill>
+            <a:prstDash val="solid"/>
+          </a:ln>
+        </p:spPr>
+      </p:sp>
+      <p:sp>
+        <p:nvSpPr>
+          <p:cNvPr id="17" name="Text 15"/>
+          <p:cNvSpPr txBox="1"/>
+          <p:nvPr/>
+        </p:nvSpPr>
+        <p:spPr>
+          <a:xfrm>
+            <a:off x="8156448" y="2340864"/>
+            <a:ext cx="2560320" cy="384048"/>
+          </a:xfrm>
+          <a:prstGeom prst="rect">
+            <a:avLst/>
+          </a:prstGeom>
+          <a:noFill/>
+          <a:ln/>
+        </p:spPr>
+        <p:txBody>
+          <a:bodyPr wrap="square" lIns="0" tIns="0" rIns="0" bIns="0" rtlCol="0" anchor="t"/>
+          <a:lstStyle/>
+          <a:p>
+            <a:pPr indent="0" marL="0">
+              <a:buNone/>
+            </a:pPr>
+            <a:r>
+              <a:rPr lang="en-US" sz="1200" b="1" dirty="0">
+                <a:solidFill>
+                  <a:srgbClr val="F4F1F0"/>
+                </a:solidFill>
+                <a:latin typeface="Calibri" pitchFamily="34" charset="0"/>
+                <a:ea typeface="Calibri" pitchFamily="34" charset="-122"/>
+                <a:cs typeface="Calibri" pitchFamily="34" charset="-120"/>
+              </a:rPr>
+              <a:t>Production planning</a:t>
+            </a:r>
+            <a:endParaRPr lang="en-US" sz="1200" dirty="0"/>
+          </a:p>
+        </p:txBody>
+      </p:sp>
+      <p:sp>
+        <p:nvSpPr>
+          <p:cNvPr id="18" name="Text 16"/>
+          <p:cNvSpPr txBox="1"/>
+          <p:nvPr/>
+        </p:nvSpPr>
+        <p:spPr>
+          <a:xfrm>
+            <a:off x="8156448" y="2697480"/>
+            <a:ext cx="2743200" cy="292608"/>
+          </a:xfrm>
+          <a:prstGeom prst="rect">
+            <a:avLst/>
+          </a:prstGeom>
+          <a:noFill/>
+          <a:ln/>
+        </p:spPr>
+        <p:txBody>
+          <a:bodyPr wrap="square" lIns="0" tIns="0" rIns="0" bIns="0" rtlCol="0" anchor="ctr"/>
+          <a:lstStyle/>
+          <a:p>
+            <a:pPr indent="0" marL="0">
+              <a:buNone/>
+            </a:pPr>
+            <a:r>
+              <a:rPr lang="en-US" sz="1100" dirty="0">
+                <a:solidFill>
+                  <a:srgbClr val="A9A09E"/>
+                </a:solidFill>
+                <a:latin typeface="Calibri" pitchFamily="34" charset="0"/>
+                <a:ea typeface="Calibri" pitchFamily="34" charset="-122"/>
+                <a:cs typeface="Calibri" pitchFamily="34" charset="-120"/>
+              </a:rPr>
+              <a:t>2 permissions</a:t>
+            </a:r>
+            <a:endParaRPr lang="en-US" sz="1100" dirty="0"/>
+          </a:p>
+        </p:txBody>
+      </p:sp>
+      <p:sp>
+        <p:nvSpPr>
+          <p:cNvPr id="19" name="Text 17"/>
+          <p:cNvSpPr txBox="1"/>
+          <p:nvPr/>
+        </p:nvSpPr>
+        <p:spPr>
+          <a:xfrm>
+            <a:off x="10753344" y="2377440"/>
+            <a:ext cx="566928" cy="594360"/>
+          </a:xfrm>
+          <a:prstGeom prst="rect">
+            <a:avLst/>
+          </a:prstGeom>
+          <a:noFill/>
+          <a:ln/>
+        </p:spPr>
+        <p:txBody>
+          <a:bodyPr wrap="square" lIns="0" tIns="0" rIns="0" bIns="0" rtlCol="0" anchor="ctr"/>
+          <a:lstStyle/>
+          <a:p>
+            <a:pPr algn="r" indent="0" marL="0">
+              <a:buNone/>
+            </a:pPr>
+            <a:r>
+              <a:rPr lang="en-US" sz="2000" b="1" dirty="0">
+                <a:solidFill>
+                  <a:srgbClr val="B8323A"/>
+                </a:solidFill>
+                <a:latin typeface="Cambria" pitchFamily="34" charset="0"/>
+                <a:ea typeface="Cambria" pitchFamily="34" charset="-122"/>
+                <a:cs typeface="Cambria" pitchFamily="34" charset="-120"/>
+              </a:rPr>
+              <a:t>23</a:t>
+            </a:r>
+            <a:endParaRPr lang="en-US" sz="2000" dirty="0"/>
+          </a:p>
+        </p:txBody>
+      </p:sp>
+      <p:sp>
+        <p:nvSpPr>
+          <p:cNvPr id="20" name="Shape 18"/>
+          <p:cNvSpPr/>
+          <p:nvPr/>
+        </p:nvSpPr>
+        <p:spPr>
+          <a:xfrm>
+            <a:off x="566928" y="3200400"/>
+            <a:ext cx="3493008" cy="777240"/>
+          </a:xfrm>
+          <a:prstGeom prst="roundRect">
+            <a:avLst>
+              <a:gd name="adj" fmla="val 7059"/>
+            </a:avLst>
+          </a:prstGeom>
+          <a:solidFill>
+            <a:srgbClr val="1E1A19"/>
+          </a:solidFill>
+          <a:ln w="12700">
+            <a:solidFill>
+              <a:srgbClr val="2C2524"/>
+            </a:solidFill>
+            <a:prstDash val="solid"/>
+          </a:ln>
+        </p:spPr>
+      </p:sp>
+      <p:sp>
+        <p:nvSpPr>
+          <p:cNvPr id="21" name="Text 19"/>
+          <p:cNvSpPr txBox="1"/>
+          <p:nvPr/>
+        </p:nvSpPr>
+        <p:spPr>
+          <a:xfrm>
+            <a:off x="731520" y="3255264"/>
+            <a:ext cx="2560320" cy="384048"/>
+          </a:xfrm>
+          <a:prstGeom prst="rect">
+            <a:avLst/>
+          </a:prstGeom>
+          <a:noFill/>
+          <a:ln/>
+        </p:spPr>
+        <p:txBody>
+          <a:bodyPr wrap="square" lIns="0" tIns="0" rIns="0" bIns="0" rtlCol="0" anchor="t"/>
+          <a:lstStyle/>
+          <a:p>
+            <a:pPr indent="0" marL="0">
+              <a:buNone/>
+            </a:pPr>
+            <a:r>
+              <a:rPr lang="en-US" sz="1200" b="1" dirty="0">
+                <a:solidFill>
+                  <a:srgbClr val="F4F1F0"/>
+                </a:solidFill>
+                <a:latin typeface="Calibri" pitchFamily="34" charset="0"/>
+                <a:ea typeface="Calibri" pitchFamily="34" charset="-122"/>
+                <a:cs typeface="Calibri" pitchFamily="34" charset="-120"/>
+              </a:rPr>
+              <a:t>First review gate</a:t>
+            </a:r>
+            <a:endParaRPr lang="en-US" sz="1200" dirty="0"/>
+          </a:p>
+        </p:txBody>
+      </p:sp>
+      <p:sp>
+        <p:nvSpPr>
+          <p:cNvPr id="22" name="Text 20"/>
+          <p:cNvSpPr txBox="1"/>
+          <p:nvPr/>
+        </p:nvSpPr>
+        <p:spPr>
+          <a:xfrm>
+            <a:off x="731520" y="3611880"/>
+            <a:ext cx="2743200" cy="292608"/>
+          </a:xfrm>
+          <a:prstGeom prst="rect">
+            <a:avLst/>
+          </a:prstGeom>
+          <a:noFill/>
+          <a:ln/>
+        </p:spPr>
+        <p:txBody>
+          <a:bodyPr wrap="square" lIns="0" tIns="0" rIns="0" bIns="0" rtlCol="0" anchor="ctr"/>
+          <a:lstStyle/>
+          <a:p>
+            <a:pPr indent="0" marL="0">
+              <a:buNone/>
+            </a:pPr>
+            <a:r>
+              <a:rPr lang="en-US" sz="1100" dirty="0">
+                <a:solidFill>
+                  <a:srgbClr val="A9A09E"/>
+                </a:solidFill>
+                <a:latin typeface="Calibri" pitchFamily="34" charset="0"/>
+                <a:ea typeface="Calibri" pitchFamily="34" charset="-122"/>
+                <a:cs typeface="Calibri" pitchFamily="34" charset="-120"/>
+              </a:rPr>
+              <a:t>1 permission</a:t>
+            </a:r>
+            <a:endParaRPr lang="en-US" sz="1100" dirty="0"/>
+          </a:p>
+        </p:txBody>
+      </p:sp>
+      <p:sp>
+        <p:nvSpPr>
+          <p:cNvPr id="23" name="Text 21"/>
+          <p:cNvSpPr txBox="1"/>
+          <p:nvPr/>
+        </p:nvSpPr>
+        <p:spPr>
+          <a:xfrm>
+            <a:off x="3328416" y="3291840"/>
+            <a:ext cx="566928" cy="594360"/>
+          </a:xfrm>
+          <a:prstGeom prst="rect">
+            <a:avLst/>
+          </a:prstGeom>
+          <a:noFill/>
+          <a:ln/>
+        </p:spPr>
+        <p:txBody>
+          <a:bodyPr wrap="square" lIns="0" tIns="0" rIns="0" bIns="0" rtlCol="0" anchor="ctr"/>
+          <a:lstStyle/>
+          <a:p>
+            <a:pPr algn="r" indent="0" marL="0">
+              <a:buNone/>
+            </a:pPr>
+            <a:r>
+              <a:rPr lang="en-US" sz="2000" b="1" dirty="0">
+                <a:solidFill>
+                  <a:srgbClr val="B8323A"/>
+                </a:solidFill>
+                <a:latin typeface="Cambria" pitchFamily="34" charset="0"/>
+                <a:ea typeface="Cambria" pitchFamily="34" charset="-122"/>
+                <a:cs typeface="Cambria" pitchFamily="34" charset="-120"/>
+              </a:rPr>
+              <a:t>23</a:t>
+            </a:r>
+            <a:endParaRPr lang="en-US" sz="2000" dirty="0"/>
+          </a:p>
+        </p:txBody>
+      </p:sp>
+      <p:sp>
+        <p:nvSpPr>
+          <p:cNvPr id="24" name="Shape 22"/>
+          <p:cNvSpPr/>
+          <p:nvPr/>
+        </p:nvSpPr>
+        <p:spPr>
+          <a:xfrm>
+            <a:off x="4279392" y="3200400"/>
+            <a:ext cx="3493008" cy="777240"/>
+          </a:xfrm>
+          <a:prstGeom prst="roundRect">
+            <a:avLst>
+              <a:gd name="adj" fmla="val 7059"/>
+            </a:avLst>
+          </a:prstGeom>
+          <a:solidFill>
+            <a:srgbClr val="1E1A19"/>
+          </a:solidFill>
+          <a:ln w="12700">
+            <a:solidFill>
+              <a:srgbClr val="2C2524"/>
+            </a:solidFill>
+            <a:prstDash val="solid"/>
+          </a:ln>
+        </p:spPr>
+      </p:sp>
+      <p:sp>
+        <p:nvSpPr>
+          <p:cNvPr id="25" name="Text 23"/>
+          <p:cNvSpPr txBox="1"/>
+          <p:nvPr/>
+        </p:nvSpPr>
+        <p:spPr>
+          <a:xfrm>
+            <a:off x="4443984" y="3255264"/>
+            <a:ext cx="2560320" cy="384048"/>
+          </a:xfrm>
+          <a:prstGeom prst="rect">
+            <a:avLst/>
+          </a:prstGeom>
+          <a:noFill/>
+          <a:ln/>
+        </p:spPr>
+        <p:txBody>
+          <a:bodyPr wrap="square" lIns="0" tIns="0" rIns="0" bIns="0" rtlCol="0" anchor="t"/>
+          <a:lstStyle/>
+          <a:p>
+            <a:pPr indent="0" marL="0">
+              <a:buNone/>
+            </a:pPr>
+            <a:r>
+              <a:rPr lang="en-US" sz="1200" b="1" dirty="0">
+                <a:solidFill>
+                  <a:srgbClr val="F4F1F0"/>
+                </a:solidFill>
+                <a:latin typeface="Calibri" pitchFamily="34" charset="0"/>
+                <a:ea typeface="Calibri" pitchFamily="34" charset="-122"/>
+                <a:cs typeface="Calibri" pitchFamily="34" charset="-120"/>
+              </a:rPr>
+              <a:t>Leads and producers</a:t>
+            </a:r>
+            <a:endParaRPr lang="en-US" sz="1200" dirty="0"/>
+          </a:p>
+        </p:txBody>
+      </p:sp>
+      <p:sp>
+        <p:nvSpPr>
+          <p:cNvPr id="26" name="Text 24"/>
+          <p:cNvSpPr txBox="1"/>
+          <p:nvPr/>
+        </p:nvSpPr>
+        <p:spPr>
+          <a:xfrm>
+            <a:off x="4443984" y="3611880"/>
+            <a:ext cx="2743200" cy="292608"/>
+          </a:xfrm>
+          <a:prstGeom prst="rect">
+            <a:avLst/>
+          </a:prstGeom>
+          <a:noFill/>
+          <a:ln/>
+        </p:spPr>
+        <p:txBody>
+          <a:bodyPr wrap="square" lIns="0" tIns="0" rIns="0" bIns="0" rtlCol="0" anchor="ctr"/>
+          <a:lstStyle/>
+          <a:p>
+            <a:pPr indent="0" marL="0">
+              <a:buNone/>
+            </a:pPr>
+            <a:r>
+              <a:rPr lang="en-US" sz="1100" dirty="0">
+                <a:solidFill>
+                  <a:srgbClr val="A9A09E"/>
+                </a:solidFill>
+                <a:latin typeface="Calibri" pitchFamily="34" charset="0"/>
+                <a:ea typeface="Calibri" pitchFamily="34" charset="-122"/>
+                <a:cs typeface="Calibri" pitchFamily="34" charset="-120"/>
+              </a:rPr>
+              <a:t>3 permissions</a:t>
+            </a:r>
+            <a:endParaRPr lang="en-US" sz="1100" dirty="0"/>
+          </a:p>
+        </p:txBody>
+      </p:sp>
+      <p:sp>
+        <p:nvSpPr>
+          <p:cNvPr id="27" name="Text 25"/>
+          <p:cNvSpPr txBox="1"/>
+          <p:nvPr/>
+        </p:nvSpPr>
+        <p:spPr>
+          <a:xfrm>
+            <a:off x="7040880" y="3291840"/>
+            <a:ext cx="566928" cy="594360"/>
+          </a:xfrm>
+          <a:prstGeom prst="rect">
+            <a:avLst/>
+          </a:prstGeom>
+          <a:noFill/>
+          <a:ln/>
+        </p:spPr>
+        <p:txBody>
+          <a:bodyPr wrap="square" lIns="0" tIns="0" rIns="0" bIns="0" rtlCol="0" anchor="ctr"/>
+          <a:lstStyle/>
+          <a:p>
+            <a:pPr algn="r" indent="0" marL="0">
+              <a:buNone/>
+            </a:pPr>
+            <a:r>
+              <a:rPr lang="en-US" sz="2000" b="1" dirty="0">
+                <a:solidFill>
+                  <a:srgbClr val="B8323A"/>
+                </a:solidFill>
+                <a:latin typeface="Cambria" pitchFamily="34" charset="0"/>
+                <a:ea typeface="Cambria" pitchFamily="34" charset="-122"/>
+                <a:cs typeface="Cambria" pitchFamily="34" charset="-120"/>
+              </a:rPr>
+              <a:t>18</a:t>
+            </a:r>
+            <a:endParaRPr lang="en-US" sz="2000" dirty="0"/>
+          </a:p>
+        </p:txBody>
+      </p:sp>
+      <p:sp>
+        <p:nvSpPr>
+          <p:cNvPr id="28" name="Shape 26"/>
+          <p:cNvSpPr/>
+          <p:nvPr/>
+        </p:nvSpPr>
+        <p:spPr>
+          <a:xfrm>
+            <a:off x="7991856" y="3200400"/>
+            <a:ext cx="3493008" cy="777240"/>
+          </a:xfrm>
+          <a:prstGeom prst="roundRect">
+            <a:avLst>
+              <a:gd name="adj" fmla="val 7059"/>
+            </a:avLst>
+          </a:prstGeom>
+          <a:solidFill>
+            <a:srgbClr val="1E1A19"/>
+          </a:solidFill>
+          <a:ln w="12700">
+            <a:solidFill>
+              <a:srgbClr val="2C2524"/>
+            </a:solidFill>
+            <a:prstDash val="solid"/>
+          </a:ln>
+        </p:spPr>
+      </p:sp>
+      <p:sp>
+        <p:nvSpPr>
+          <p:cNvPr id="29" name="Text 27"/>
+          <p:cNvSpPr txBox="1"/>
+          <p:nvPr/>
+        </p:nvSpPr>
+        <p:spPr>
+          <a:xfrm>
+            <a:off x="8156448" y="3255264"/>
+            <a:ext cx="2560320" cy="384048"/>
+          </a:xfrm>
+          <a:prstGeom prst="rect">
+            <a:avLst/>
+          </a:prstGeom>
+          <a:noFill/>
+          <a:ln/>
+        </p:spPr>
+        <p:txBody>
+          <a:bodyPr wrap="square" lIns="0" tIns="0" rIns="0" bIns="0" rtlCol="0" anchor="t"/>
+          <a:lstStyle/>
+          <a:p>
+            <a:pPr indent="0" marL="0">
+              <a:buNone/>
+            </a:pPr>
+            <a:r>
+              <a:rPr lang="en-US" sz="1200" b="1" dirty="0">
+                <a:solidFill>
+                  <a:srgbClr val="F4F1F0"/>
+                </a:solidFill>
+                <a:latin typeface="Calibri" pitchFamily="34" charset="0"/>
+                <a:ea typeface="Calibri" pitchFamily="34" charset="-122"/>
+                <a:cs typeface="Calibri" pitchFamily="34" charset="-120"/>
+              </a:rPr>
+              <a:t>Anyone who supervises people</a:t>
+            </a:r>
+            <a:endParaRPr lang="en-US" sz="1200" dirty="0"/>
+          </a:p>
+        </p:txBody>
+      </p:sp>
+      <p:sp>
+        <p:nvSpPr>
+          <p:cNvPr id="30" name="Text 28"/>
+          <p:cNvSpPr txBox="1"/>
+          <p:nvPr/>
+        </p:nvSpPr>
+        <p:spPr>
+          <a:xfrm>
+            <a:off x="8156448" y="3611880"/>
+            <a:ext cx="2743200" cy="292608"/>
+          </a:xfrm>
+          <a:prstGeom prst="rect">
+            <a:avLst/>
+          </a:prstGeom>
+          <a:noFill/>
+          <a:ln/>
+        </p:spPr>
+        <p:txBody>
+          <a:bodyPr wrap="square" lIns="0" tIns="0" rIns="0" bIns="0" rtlCol="0" anchor="ctr"/>
+          <a:lstStyle/>
+          <a:p>
+            <a:pPr indent="0" marL="0">
+              <a:buNone/>
+            </a:pPr>
+            <a:r>
+              <a:rPr lang="en-US" sz="1100" dirty="0">
+                <a:solidFill>
+                  <a:srgbClr val="A9A09E"/>
+                </a:solidFill>
+                <a:latin typeface="Calibri" pitchFamily="34" charset="0"/>
+                <a:ea typeface="Calibri" pitchFamily="34" charset="-122"/>
+                <a:cs typeface="Calibri" pitchFamily="34" charset="-120"/>
+              </a:rPr>
+              <a:t>1 permission</a:t>
+            </a:r>
+            <a:endParaRPr lang="en-US" sz="1100" dirty="0"/>
+          </a:p>
+        </p:txBody>
+      </p:sp>
+      <p:sp>
+        <p:nvSpPr>
+          <p:cNvPr id="31" name="Text 29"/>
+          <p:cNvSpPr txBox="1"/>
+          <p:nvPr/>
+        </p:nvSpPr>
+        <p:spPr>
+          <a:xfrm>
+            <a:off x="10753344" y="3291840"/>
+            <a:ext cx="566928" cy="594360"/>
+          </a:xfrm>
+          <a:prstGeom prst="rect">
+            <a:avLst/>
+          </a:prstGeom>
+          <a:noFill/>
+          <a:ln/>
+        </p:spPr>
+        <p:txBody>
+          <a:bodyPr wrap="square" lIns="0" tIns="0" rIns="0" bIns="0" rtlCol="0" anchor="ctr"/>
+          <a:lstStyle/>
+          <a:p>
+            <a:pPr algn="r" indent="0" marL="0">
+              <a:buNone/>
+            </a:pPr>
+            <a:r>
+              <a:rPr lang="en-US" sz="2000" b="1" dirty="0">
+                <a:solidFill>
+                  <a:srgbClr val="B8323A"/>
+                </a:solidFill>
+                <a:latin typeface="Cambria" pitchFamily="34" charset="0"/>
+                <a:ea typeface="Cambria" pitchFamily="34" charset="-122"/>
+                <a:cs typeface="Cambria" pitchFamily="34" charset="-120"/>
+              </a:rPr>
+              <a:t>14</a:t>
+            </a:r>
+            <a:endParaRPr lang="en-US" sz="2000" dirty="0"/>
+          </a:p>
+        </p:txBody>
+      </p:sp>
+      <p:sp>
+        <p:nvSpPr>
+          <p:cNvPr id="32" name="Shape 30"/>
+          <p:cNvSpPr/>
+          <p:nvPr/>
+        </p:nvSpPr>
+        <p:spPr>
+          <a:xfrm>
+            <a:off x="566928" y="4114800"/>
+            <a:ext cx="3493008" cy="777240"/>
+          </a:xfrm>
+          <a:prstGeom prst="roundRect">
+            <a:avLst>
+              <a:gd name="adj" fmla="val 7059"/>
+            </a:avLst>
+          </a:prstGeom>
+          <a:solidFill>
+            <a:srgbClr val="1E1A19"/>
+          </a:solidFill>
+          <a:ln w="12700">
+            <a:solidFill>
+              <a:srgbClr val="2C2524"/>
+            </a:solidFill>
+            <a:prstDash val="solid"/>
+          </a:ln>
+        </p:spPr>
+      </p:sp>
+      <p:sp>
+        <p:nvSpPr>
+          <p:cNvPr id="33" name="Text 31"/>
+          <p:cNvSpPr txBox="1"/>
+          <p:nvPr/>
+        </p:nvSpPr>
+        <p:spPr>
+          <a:xfrm>
+            <a:off x="731520" y="4169664"/>
+            <a:ext cx="2560320" cy="384048"/>
+          </a:xfrm>
+          <a:prstGeom prst="rect">
+            <a:avLst/>
+          </a:prstGeom>
+          <a:noFill/>
+          <a:ln/>
+        </p:spPr>
+        <p:txBody>
+          <a:bodyPr wrap="square" lIns="0" tIns="0" rIns="0" bIns="0" rtlCol="0" anchor="t"/>
+          <a:lstStyle/>
+          <a:p>
+            <a:pPr indent="0" marL="0">
+              <a:buNone/>
+            </a:pPr>
+            <a:r>
+              <a:rPr lang="en-US" sz="1200" b="1" dirty="0">
+                <a:solidFill>
+                  <a:srgbClr val="F4F1F0"/>
+                </a:solidFill>
+                <a:latin typeface="Calibri" pitchFamily="34" charset="0"/>
+                <a:ea typeface="Calibri" pitchFamily="34" charset="-122"/>
+                <a:cs typeface="Calibri" pitchFamily="34" charset="-120"/>
+              </a:rPr>
+              <a:t>Delivery</a:t>
+            </a:r>
+            <a:endParaRPr lang="en-US" sz="1200" dirty="0"/>
+          </a:p>
+        </p:txBody>
+      </p:sp>
+      <p:sp>
+        <p:nvSpPr>
+          <p:cNvPr id="34" name="Text 32"/>
+          <p:cNvSpPr txBox="1"/>
+          <p:nvPr/>
+        </p:nvSpPr>
+        <p:spPr>
+          <a:xfrm>
+            <a:off x="731520" y="4526280"/>
+            <a:ext cx="2743200" cy="292608"/>
+          </a:xfrm>
+          <a:prstGeom prst="rect">
+            <a:avLst/>
+          </a:prstGeom>
+          <a:noFill/>
+          <a:ln/>
+        </p:spPr>
+        <p:txBody>
+          <a:bodyPr wrap="square" lIns="0" tIns="0" rIns="0" bIns="0" rtlCol="0" anchor="ctr"/>
+          <a:lstStyle/>
+          <a:p>
+            <a:pPr indent="0" marL="0">
+              <a:buNone/>
+            </a:pPr>
+            <a:r>
+              <a:rPr lang="en-US" sz="1100" dirty="0">
+                <a:solidFill>
+                  <a:srgbClr val="A9A09E"/>
+                </a:solidFill>
+                <a:latin typeface="Calibri" pitchFamily="34" charset="0"/>
+                <a:ea typeface="Calibri" pitchFamily="34" charset="-122"/>
+                <a:cs typeface="Calibri" pitchFamily="34" charset="-120"/>
+              </a:rPr>
+              <a:t>1 permission</a:t>
+            </a:r>
+            <a:endParaRPr lang="en-US" sz="1100" dirty="0"/>
+          </a:p>
+        </p:txBody>
+      </p:sp>
+      <p:sp>
+        <p:nvSpPr>
+          <p:cNvPr id="35" name="Text 33"/>
+          <p:cNvSpPr txBox="1"/>
+          <p:nvPr/>
+        </p:nvSpPr>
+        <p:spPr>
+          <a:xfrm>
+            <a:off x="3328416" y="4206240"/>
+            <a:ext cx="566928" cy="594360"/>
+          </a:xfrm>
+          <a:prstGeom prst="rect">
+            <a:avLst/>
+          </a:prstGeom>
+          <a:noFill/>
+          <a:ln/>
+        </p:spPr>
+        <p:txBody>
+          <a:bodyPr wrap="square" lIns="0" tIns="0" rIns="0" bIns="0" rtlCol="0" anchor="ctr"/>
+          <a:lstStyle/>
+          <a:p>
+            <a:pPr algn="r" indent="0" marL="0">
+              <a:buNone/>
+            </a:pPr>
+            <a:r>
+              <a:rPr lang="en-US" sz="2000" b="1" dirty="0">
+                <a:solidFill>
+                  <a:srgbClr val="B8323A"/>
+                </a:solidFill>
+                <a:latin typeface="Cambria" pitchFamily="34" charset="0"/>
+                <a:ea typeface="Cambria" pitchFamily="34" charset="-122"/>
+                <a:cs typeface="Cambria" pitchFamily="34" charset="-120"/>
+              </a:rPr>
+              <a:t>18</a:t>
+            </a:r>
+            <a:endParaRPr lang="en-US" sz="2000" dirty="0"/>
+          </a:p>
+        </p:txBody>
+      </p:sp>
+      <p:sp>
+        <p:nvSpPr>
+          <p:cNvPr id="36" name="Shape 34"/>
+          <p:cNvSpPr/>
+          <p:nvPr/>
+        </p:nvSpPr>
+        <p:spPr>
+          <a:xfrm>
+            <a:off x="4279392" y="4114800"/>
+            <a:ext cx="3493008" cy="777240"/>
+          </a:xfrm>
+          <a:prstGeom prst="roundRect">
+            <a:avLst>
+              <a:gd name="adj" fmla="val 7059"/>
+            </a:avLst>
+          </a:prstGeom>
+          <a:solidFill>
+            <a:srgbClr val="1E1A19"/>
+          </a:solidFill>
+          <a:ln w="12700">
+            <a:solidFill>
+              <a:srgbClr val="2C2524"/>
+            </a:solidFill>
+            <a:prstDash val="solid"/>
+          </a:ln>
+        </p:spPr>
+      </p:sp>
+      <p:sp>
+        <p:nvSpPr>
+          <p:cNvPr id="37" name="Text 35"/>
+          <p:cNvSpPr txBox="1"/>
+          <p:nvPr/>
+        </p:nvSpPr>
+        <p:spPr>
+          <a:xfrm>
+            <a:off x="4443984" y="4169664"/>
+            <a:ext cx="2560320" cy="384048"/>
+          </a:xfrm>
+          <a:prstGeom prst="rect">
+            <a:avLst/>
+          </a:prstGeom>
+          <a:noFill/>
+          <a:ln/>
+        </p:spPr>
+        <p:txBody>
+          <a:bodyPr wrap="square" lIns="0" tIns="0" rIns="0" bIns="0" rtlCol="0" anchor="t"/>
+          <a:lstStyle/>
+          <a:p>
+            <a:pPr indent="0" marL="0">
+              <a:buNone/>
+            </a:pPr>
+            <a:r>
+              <a:rPr lang="en-US" sz="1200" b="1" dirty="0">
+                <a:solidFill>
+                  <a:srgbClr val="F4F1F0"/>
+                </a:solidFill>
+                <a:latin typeface="Calibri" pitchFamily="34" charset="0"/>
+                <a:ea typeface="Calibri" pitchFamily="34" charset="-122"/>
+                <a:cs typeface="Calibri" pitchFamily="34" charset="-120"/>
+              </a:rPr>
+              <a:t>Creative direction</a:t>
+            </a:r>
+            <a:endParaRPr lang="en-US" sz="1200" dirty="0"/>
+          </a:p>
+        </p:txBody>
+      </p:sp>
+      <p:sp>
+        <p:nvSpPr>
+          <p:cNvPr id="38" name="Text 36"/>
+          <p:cNvSpPr txBox="1"/>
+          <p:nvPr/>
+        </p:nvSpPr>
+        <p:spPr>
+          <a:xfrm>
+            <a:off x="4443984" y="4526280"/>
+            <a:ext cx="2743200" cy="292608"/>
+          </a:xfrm>
+          <a:prstGeom prst="rect">
+            <a:avLst/>
+          </a:prstGeom>
+          <a:noFill/>
+          <a:ln/>
+        </p:spPr>
+        <p:txBody>
+          <a:bodyPr wrap="square" lIns="0" tIns="0" rIns="0" bIns="0" rtlCol="0" anchor="ctr"/>
+          <a:lstStyle/>
+          <a:p>
+            <a:pPr indent="0" marL="0">
+              <a:buNone/>
+            </a:pPr>
+            <a:r>
+              <a:rPr lang="en-US" sz="1100" dirty="0">
+                <a:solidFill>
+                  <a:srgbClr val="A9A09E"/>
+                </a:solidFill>
+                <a:latin typeface="Calibri" pitchFamily="34" charset="0"/>
+                <a:ea typeface="Calibri" pitchFamily="34" charset="-122"/>
+                <a:cs typeface="Calibri" pitchFamily="34" charset="-120"/>
+              </a:rPr>
+              <a:t>2 permissions</a:t>
+            </a:r>
+            <a:endParaRPr lang="en-US" sz="1100" dirty="0"/>
+          </a:p>
+        </p:txBody>
+      </p:sp>
+      <p:sp>
+        <p:nvSpPr>
+          <p:cNvPr id="39" name="Text 37"/>
+          <p:cNvSpPr txBox="1"/>
+          <p:nvPr/>
+        </p:nvSpPr>
+        <p:spPr>
+          <a:xfrm>
+            <a:off x="7040880" y="4206240"/>
+            <a:ext cx="566928" cy="594360"/>
+          </a:xfrm>
+          <a:prstGeom prst="rect">
+            <a:avLst/>
+          </a:prstGeom>
+          <a:noFill/>
+          <a:ln/>
+        </p:spPr>
+        <p:txBody>
+          <a:bodyPr wrap="square" lIns="0" tIns="0" rIns="0" bIns="0" rtlCol="0" anchor="ctr"/>
+          <a:lstStyle/>
+          <a:p>
+            <a:pPr algn="r" indent="0" marL="0">
+              <a:buNone/>
+            </a:pPr>
+            <a:r>
+              <a:rPr lang="en-US" sz="2000" b="1" dirty="0">
+                <a:solidFill>
+                  <a:srgbClr val="B8323A"/>
+                </a:solidFill>
+                <a:latin typeface="Cambria" pitchFamily="34" charset="0"/>
+                <a:ea typeface="Cambria" pitchFamily="34" charset="-122"/>
+                <a:cs typeface="Cambria" pitchFamily="34" charset="-120"/>
+              </a:rPr>
+              <a:t>9</a:t>
+            </a:r>
+            <a:endParaRPr lang="en-US" sz="2000" dirty="0"/>
+          </a:p>
+        </p:txBody>
+      </p:sp>
+      <p:sp>
+        <p:nvSpPr>
+          <p:cNvPr id="40" name="Shape 38"/>
+          <p:cNvSpPr/>
+          <p:nvPr/>
+        </p:nvSpPr>
+        <p:spPr>
+          <a:xfrm>
+            <a:off x="7991856" y="4114800"/>
+            <a:ext cx="3493008" cy="777240"/>
+          </a:xfrm>
+          <a:prstGeom prst="roundRect">
+            <a:avLst>
+              <a:gd name="adj" fmla="val 7059"/>
+            </a:avLst>
+          </a:prstGeom>
+          <a:solidFill>
+            <a:srgbClr val="1E1A19"/>
+          </a:solidFill>
+          <a:ln w="12700">
+            <a:solidFill>
+              <a:srgbClr val="2C2524"/>
+            </a:solidFill>
+            <a:prstDash val="solid"/>
+          </a:ln>
+        </p:spPr>
+      </p:sp>
+      <p:sp>
+        <p:nvSpPr>
+          <p:cNvPr id="41" name="Text 39"/>
+          <p:cNvSpPr txBox="1"/>
+          <p:nvPr/>
+        </p:nvSpPr>
+        <p:spPr>
+          <a:xfrm>
+            <a:off x="8156448" y="4169664"/>
+            <a:ext cx="2560320" cy="384048"/>
+          </a:xfrm>
+          <a:prstGeom prst="rect">
+            <a:avLst/>
+          </a:prstGeom>
+          <a:noFill/>
+          <a:ln/>
+        </p:spPr>
+        <p:txBody>
+          <a:bodyPr wrap="square" lIns="0" tIns="0" rIns="0" bIns="0" rtlCol="0" anchor="t"/>
+          <a:lstStyle/>
+          <a:p>
+            <a:pPr indent="0" marL="0">
+              <a:buNone/>
+            </a:pPr>
+            <a:r>
+              <a:rPr lang="en-US" sz="1200" b="1" dirty="0">
+                <a:solidFill>
+                  <a:srgbClr val="F4F1F0"/>
+                </a:solidFill>
+                <a:latin typeface="Calibri" pitchFamily="34" charset="0"/>
+                <a:ea typeface="Calibri" pitchFamily="34" charset="-122"/>
+                <a:cs typeface="Calibri" pitchFamily="34" charset="-120"/>
+              </a:rPr>
+              <a:t>Administration</a:t>
+            </a:r>
+            <a:endParaRPr lang="en-US" sz="1200" dirty="0"/>
+          </a:p>
+        </p:txBody>
+      </p:sp>
+      <p:sp>
+        <p:nvSpPr>
+          <p:cNvPr id="42" name="Text 40"/>
+          <p:cNvSpPr txBox="1"/>
+          <p:nvPr/>
+        </p:nvSpPr>
+        <p:spPr>
+          <a:xfrm>
+            <a:off x="8156448" y="4526280"/>
+            <a:ext cx="2743200" cy="292608"/>
+          </a:xfrm>
+          <a:prstGeom prst="rect">
+            <a:avLst/>
+          </a:prstGeom>
+          <a:noFill/>
+          <a:ln/>
+        </p:spPr>
+        <p:txBody>
+          <a:bodyPr wrap="square" lIns="0" tIns="0" rIns="0" bIns="0" rtlCol="0" anchor="ctr"/>
+          <a:lstStyle/>
+          <a:p>
+            <a:pPr indent="0" marL="0">
+              <a:buNone/>
+            </a:pPr>
+            <a:r>
+              <a:rPr lang="en-US" sz="1100" dirty="0">
+                <a:solidFill>
+                  <a:srgbClr val="A9A09E"/>
+                </a:solidFill>
+                <a:latin typeface="Calibri" pitchFamily="34" charset="0"/>
+                <a:ea typeface="Calibri" pitchFamily="34" charset="-122"/>
+                <a:cs typeface="Calibri" pitchFamily="34" charset="-120"/>
+              </a:rPr>
+              <a:t>18 permissions</a:t>
+            </a:r>
+            <a:endParaRPr lang="en-US" sz="1100" dirty="0"/>
+          </a:p>
+        </p:txBody>
+      </p:sp>
+      <p:sp>
+        <p:nvSpPr>
+          <p:cNvPr id="43" name="Text 41"/>
+          <p:cNvSpPr txBox="1"/>
+          <p:nvPr/>
+        </p:nvSpPr>
+        <p:spPr>
+          <a:xfrm>
+            <a:off x="10753344" y="4206240"/>
+            <a:ext cx="566928" cy="594360"/>
+          </a:xfrm>
+          <a:prstGeom prst="rect">
+            <a:avLst/>
+          </a:prstGeom>
+          <a:noFill/>
+          <a:ln/>
+        </p:spPr>
+        <p:txBody>
+          <a:bodyPr wrap="square" lIns="0" tIns="0" rIns="0" bIns="0" rtlCol="0" anchor="ctr"/>
+          <a:lstStyle/>
+          <a:p>
+            <a:pPr algn="r" indent="0" marL="0">
+              <a:buNone/>
+            </a:pPr>
+            <a:r>
+              <a:rPr lang="en-US" sz="2000" b="1" dirty="0">
+                <a:solidFill>
+                  <a:srgbClr val="B8323A"/>
+                </a:solidFill>
+                <a:latin typeface="Cambria" pitchFamily="34" charset="0"/>
+                <a:ea typeface="Cambria" pitchFamily="34" charset="-122"/>
+                <a:cs typeface="Cambria" pitchFamily="34" charset="-120"/>
+              </a:rPr>
+              <a:t>8</a:t>
+            </a:r>
+            <a:endParaRPr lang="en-US" sz="2000" dirty="0"/>
+          </a:p>
+        </p:txBody>
+      </p:sp>
+      <p:sp>
+        <p:nvSpPr>
+          <p:cNvPr id="44" name="Shape 42"/>
+          <p:cNvSpPr/>
+          <p:nvPr/>
+        </p:nvSpPr>
+        <p:spPr>
+          <a:xfrm>
+            <a:off x="566928" y="5029200"/>
+            <a:ext cx="3493008" cy="777240"/>
+          </a:xfrm>
+          <a:prstGeom prst="roundRect">
+            <a:avLst>
+              <a:gd name="adj" fmla="val 7059"/>
+            </a:avLst>
+          </a:prstGeom>
+          <a:solidFill>
+            <a:srgbClr val="1E1A19"/>
+          </a:solidFill>
+          <a:ln w="12700">
+            <a:solidFill>
+              <a:srgbClr val="2C2524"/>
+            </a:solidFill>
+            <a:prstDash val="solid"/>
+          </a:ln>
+        </p:spPr>
+      </p:sp>
+      <p:sp>
+        <p:nvSpPr>
+          <p:cNvPr id="45" name="Text 43"/>
+          <p:cNvSpPr txBox="1"/>
+          <p:nvPr/>
+        </p:nvSpPr>
+        <p:spPr>
+          <a:xfrm>
+            <a:off x="731520" y="5084064"/>
+            <a:ext cx="2560320" cy="384048"/>
+          </a:xfrm>
+          <a:prstGeom prst="rect">
+            <a:avLst/>
+          </a:prstGeom>
+          <a:noFill/>
+          <a:ln/>
+        </p:spPr>
+        <p:txBody>
+          <a:bodyPr wrap="square" lIns="0" tIns="0" rIns="0" bIns="0" rtlCol="0" anchor="t"/>
+          <a:lstStyle/>
+          <a:p>
+            <a:pPr indent="0" marL="0">
+              <a:buNone/>
+            </a:pPr>
+            <a:r>
+              <a:rPr lang="en-US" sz="1200" b="1" dirty="0">
+                <a:solidFill>
+                  <a:srgbClr val="F4F1F0"/>
+                </a:solidFill>
+                <a:latin typeface="Calibri" pitchFamily="34" charset="0"/>
+                <a:ea typeface="Calibri" pitchFamily="34" charset="-122"/>
+                <a:cs typeface="Calibri" pitchFamily="34" charset="-120"/>
+              </a:rPr>
+              <a:t>Studio leadership</a:t>
+            </a:r>
+            <a:endParaRPr lang="en-US" sz="1200" dirty="0"/>
+          </a:p>
+        </p:txBody>
+      </p:sp>
+      <p:sp>
+        <p:nvSpPr>
+          <p:cNvPr id="46" name="Text 44"/>
+          <p:cNvSpPr txBox="1"/>
+          <p:nvPr/>
+        </p:nvSpPr>
+        <p:spPr>
+          <a:xfrm>
+            <a:off x="731520" y="5440680"/>
+            <a:ext cx="2743200" cy="292608"/>
+          </a:xfrm>
+          <a:prstGeom prst="rect">
+            <a:avLst/>
+          </a:prstGeom>
+          <a:noFill/>
+          <a:ln/>
+        </p:spPr>
+        <p:txBody>
+          <a:bodyPr wrap="square" lIns="0" tIns="0" rIns="0" bIns="0" rtlCol="0" anchor="ctr"/>
+          <a:lstStyle/>
+          <a:p>
+            <a:pPr indent="0" marL="0">
+              <a:buNone/>
+            </a:pPr>
+            <a:r>
+              <a:rPr lang="en-US" sz="1100" dirty="0">
+                <a:solidFill>
+                  <a:srgbClr val="A9A09E"/>
+                </a:solidFill>
+                <a:latin typeface="Calibri" pitchFamily="34" charset="0"/>
+                <a:ea typeface="Calibri" pitchFamily="34" charset="-122"/>
+                <a:cs typeface="Calibri" pitchFamily="34" charset="-120"/>
+              </a:rPr>
+              <a:t>15 permissions</a:t>
+            </a:r>
+            <a:endParaRPr lang="en-US" sz="1100" dirty="0"/>
+          </a:p>
+        </p:txBody>
+      </p:sp>
+      <p:sp>
+        <p:nvSpPr>
+          <p:cNvPr id="47" name="Text 45"/>
+          <p:cNvSpPr txBox="1"/>
+          <p:nvPr/>
+        </p:nvSpPr>
+        <p:spPr>
+          <a:xfrm>
+            <a:off x="3328416" y="5120640"/>
+            <a:ext cx="566928" cy="594360"/>
+          </a:xfrm>
+          <a:prstGeom prst="rect">
+            <a:avLst/>
+          </a:prstGeom>
+          <a:noFill/>
+          <a:ln/>
+        </p:spPr>
+        <p:txBody>
+          <a:bodyPr wrap="square" lIns="0" tIns="0" rIns="0" bIns="0" rtlCol="0" anchor="ctr"/>
+          <a:lstStyle/>
+          <a:p>
+            <a:pPr algn="r" indent="0" marL="0">
+              <a:buNone/>
+            </a:pPr>
+            <a:r>
+              <a:rPr lang="en-US" sz="2000" b="1" dirty="0">
+                <a:solidFill>
+                  <a:srgbClr val="B8323A"/>
+                </a:solidFill>
+                <a:latin typeface="Cambria" pitchFamily="34" charset="0"/>
+                <a:ea typeface="Cambria" pitchFamily="34" charset="-122"/>
+                <a:cs typeface="Cambria" pitchFamily="34" charset="-120"/>
+              </a:rPr>
+              <a:t>7</a:t>
+            </a:r>
+            <a:endParaRPr lang="en-US" sz="2000" dirty="0"/>
+          </a:p>
+        </p:txBody>
+      </p:sp>
+      <p:sp>
+        <p:nvSpPr>
+          <p:cNvPr id="48" name="Shape 46"/>
+          <p:cNvSpPr/>
+          <p:nvPr/>
+        </p:nvSpPr>
+        <p:spPr>
+          <a:xfrm>
+            <a:off x="4279392" y="5029200"/>
+            <a:ext cx="3493008" cy="777240"/>
+          </a:xfrm>
+          <a:prstGeom prst="roundRect">
+            <a:avLst>
+              <a:gd name="adj" fmla="val 7059"/>
+            </a:avLst>
+          </a:prstGeom>
+          <a:solidFill>
+            <a:srgbClr val="1E1A19"/>
+          </a:solidFill>
+          <a:ln w="12700">
+            <a:solidFill>
+              <a:srgbClr val="2C2524"/>
+            </a:solidFill>
+            <a:prstDash val="solid"/>
+          </a:ln>
+        </p:spPr>
+      </p:sp>
+      <p:sp>
+        <p:nvSpPr>
+          <p:cNvPr id="49" name="Text 47"/>
+          <p:cNvSpPr txBox="1"/>
+          <p:nvPr/>
+        </p:nvSpPr>
+        <p:spPr>
+          <a:xfrm>
+            <a:off x="4443984" y="5084064"/>
+            <a:ext cx="2560320" cy="384048"/>
+          </a:xfrm>
+          <a:prstGeom prst="rect">
+            <a:avLst/>
+          </a:prstGeom>
+          <a:noFill/>
+          <a:ln/>
+        </p:spPr>
+        <p:txBody>
+          <a:bodyPr wrap="square" lIns="0" tIns="0" rIns="0" bIns="0" rtlCol="0" anchor="t"/>
+          <a:lstStyle/>
+          <a:p>
+            <a:pPr indent="0" marL="0">
+              <a:buNone/>
+            </a:pPr>
+            <a:r>
+              <a:rPr lang="en-US" sz="1200" b="1" dirty="0">
+                <a:solidFill>
+                  <a:srgbClr val="F4F1F0"/>
+                </a:solidFill>
+                <a:latin typeface="Calibri" pitchFamily="34" charset="0"/>
+                <a:ea typeface="Calibri" pitchFamily="34" charset="-122"/>
+                <a:cs typeface="Calibri" pitchFamily="34" charset="-120"/>
+              </a:rPr>
+              <a:t>Creative Art Director and Super Admin</a:t>
+            </a:r>
+            <a:endParaRPr lang="en-US" sz="1200" dirty="0"/>
+          </a:p>
+        </p:txBody>
+      </p:sp>
+      <p:sp>
+        <p:nvSpPr>
+          <p:cNvPr id="50" name="Text 48"/>
+          <p:cNvSpPr txBox="1"/>
+          <p:nvPr/>
+        </p:nvSpPr>
+        <p:spPr>
+          <a:xfrm>
+            <a:off x="4443984" y="5440680"/>
+            <a:ext cx="2743200" cy="292608"/>
+          </a:xfrm>
+          <a:prstGeom prst="rect">
+            <a:avLst/>
+          </a:prstGeom>
+          <a:noFill/>
+          <a:ln/>
+        </p:spPr>
+        <p:txBody>
+          <a:bodyPr wrap="square" lIns="0" tIns="0" rIns="0" bIns="0" rtlCol="0" anchor="ctr"/>
+          <a:lstStyle/>
+          <a:p>
+            <a:pPr indent="0" marL="0">
+              <a:buNone/>
+            </a:pPr>
+            <a:r>
+              <a:rPr lang="en-US" sz="1100" dirty="0">
+                <a:solidFill>
+                  <a:srgbClr val="A9A09E"/>
+                </a:solidFill>
+                <a:latin typeface="Calibri" pitchFamily="34" charset="0"/>
+                <a:ea typeface="Calibri" pitchFamily="34" charset="-122"/>
+                <a:cs typeface="Calibri" pitchFamily="34" charset="-120"/>
+              </a:rPr>
+              <a:t>3 permissions</a:t>
+            </a:r>
+            <a:endParaRPr lang="en-US" sz="1100" dirty="0"/>
+          </a:p>
+        </p:txBody>
+      </p:sp>
+      <p:sp>
+        <p:nvSpPr>
+          <p:cNvPr id="51" name="Text 49"/>
+          <p:cNvSpPr txBox="1"/>
+          <p:nvPr/>
+        </p:nvSpPr>
+        <p:spPr>
+          <a:xfrm>
+            <a:off x="7040880" y="5120640"/>
+            <a:ext cx="566928" cy="594360"/>
+          </a:xfrm>
+          <a:prstGeom prst="rect">
+            <a:avLst/>
+          </a:prstGeom>
+          <a:noFill/>
+          <a:ln/>
+        </p:spPr>
+        <p:txBody>
+          <a:bodyPr wrap="square" lIns="0" tIns="0" rIns="0" bIns="0" rtlCol="0" anchor="ctr"/>
+          <a:lstStyle/>
+          <a:p>
+            <a:pPr algn="r" indent="0" marL="0">
+              <a:buNone/>
+            </a:pPr>
+            <a:r>
+              <a:rPr lang="en-US" sz="2000" b="1" dirty="0">
+                <a:solidFill>
+                  <a:srgbClr val="B8323A"/>
+                </a:solidFill>
+                <a:latin typeface="Cambria" pitchFamily="34" charset="0"/>
+                <a:ea typeface="Cambria" pitchFamily="34" charset="-122"/>
+                <a:cs typeface="Cambria" pitchFamily="34" charset="-120"/>
+              </a:rPr>
+              <a:t>2</a:t>
+            </a:r>
+            <a:endParaRPr lang="en-US" sz="2000" dirty="0"/>
+          </a:p>
+        </p:txBody>
+      </p:sp>
+      <p:sp>
+        <p:nvSpPr>
+          <p:cNvPr id="52" name="Shape 50"/>
+          <p:cNvSpPr/>
+          <p:nvPr/>
+        </p:nvSpPr>
+        <p:spPr>
+          <a:xfrm>
+            <a:off x="7991856" y="5029200"/>
+            <a:ext cx="3493008" cy="777240"/>
+          </a:xfrm>
+          <a:prstGeom prst="roundRect">
+            <a:avLst>
+              <a:gd name="adj" fmla="val 7059"/>
+            </a:avLst>
+          </a:prstGeom>
+          <a:solidFill>
+            <a:srgbClr val="1E1A19"/>
+          </a:solidFill>
+          <a:ln w="12700">
+            <a:solidFill>
+              <a:srgbClr val="2C2524"/>
+            </a:solidFill>
+            <a:prstDash val="solid"/>
+          </a:ln>
+        </p:spPr>
+      </p:sp>
+      <p:sp>
+        <p:nvSpPr>
+          <p:cNvPr id="53" name="Text 51"/>
+          <p:cNvSpPr txBox="1"/>
+          <p:nvPr/>
+        </p:nvSpPr>
+        <p:spPr>
+          <a:xfrm>
+            <a:off x="8156448" y="5084064"/>
+            <a:ext cx="2560320" cy="384048"/>
+          </a:xfrm>
+          <a:prstGeom prst="rect">
+            <a:avLst/>
+          </a:prstGeom>
+          <a:noFill/>
+          <a:ln/>
+        </p:spPr>
+        <p:txBody>
+          <a:bodyPr wrap="square" lIns="0" tIns="0" rIns="0" bIns="0" rtlCol="0" anchor="t"/>
+          <a:lstStyle/>
+          <a:p>
+            <a:pPr indent="0" marL="0">
+              <a:buNone/>
+            </a:pPr>
+            <a:r>
+              <a:rPr lang="en-US" sz="1200" b="1" dirty="0">
+                <a:solidFill>
+                  <a:srgbClr val="F4F1F0"/>
+                </a:solidFill>
+                <a:latin typeface="Calibri" pitchFamily="34" charset="0"/>
+                <a:ea typeface="Calibri" pitchFamily="34" charset="-122"/>
+                <a:cs typeface="Calibri" pitchFamily="34" charset="-120"/>
+              </a:rPr>
+              <a:t>Super Admin only</a:t>
+            </a:r>
+            <a:endParaRPr lang="en-US" sz="1200" dirty="0"/>
+          </a:p>
+        </p:txBody>
+      </p:sp>
+      <p:sp>
+        <p:nvSpPr>
+          <p:cNvPr id="54" name="Text 52"/>
+          <p:cNvSpPr txBox="1"/>
+          <p:nvPr/>
+        </p:nvSpPr>
+        <p:spPr>
+          <a:xfrm>
+            <a:off x="8156448" y="5440680"/>
+            <a:ext cx="2743200" cy="292608"/>
+          </a:xfrm>
+          <a:prstGeom prst="rect">
+            <a:avLst/>
+          </a:prstGeom>
+          <a:noFill/>
+          <a:ln/>
+        </p:spPr>
+        <p:txBody>
+          <a:bodyPr wrap="square" lIns="0" tIns="0" rIns="0" bIns="0" rtlCol="0" anchor="ctr"/>
+          <a:lstStyle/>
+          <a:p>
+            <a:pPr indent="0" marL="0">
+              <a:buNone/>
+            </a:pPr>
+            <a:r>
+              <a:rPr lang="en-US" sz="1100" dirty="0">
+                <a:solidFill>
+                  <a:srgbClr val="A9A09E"/>
+                </a:solidFill>
+                <a:latin typeface="Calibri" pitchFamily="34" charset="0"/>
+                <a:ea typeface="Calibri" pitchFamily="34" charset="-122"/>
+                <a:cs typeface="Calibri" pitchFamily="34" charset="-120"/>
+              </a:rPr>
+              <a:t>8 permissions</a:t>
+            </a:r>
+            <a:endParaRPr lang="en-US" sz="1100" dirty="0"/>
+          </a:p>
+        </p:txBody>
+      </p:sp>
+      <p:sp>
+        <p:nvSpPr>
+          <p:cNvPr id="55" name="Text 53"/>
+          <p:cNvSpPr txBox="1"/>
+          <p:nvPr/>
+        </p:nvSpPr>
+        <p:spPr>
+          <a:xfrm>
+            <a:off x="10753344" y="5120640"/>
+            <a:ext cx="566928" cy="594360"/>
+          </a:xfrm>
+          <a:prstGeom prst="rect">
+            <a:avLst/>
+          </a:prstGeom>
+          <a:noFill/>
+          <a:ln/>
+        </p:spPr>
+        <p:txBody>
+          <a:bodyPr wrap="square" lIns="0" tIns="0" rIns="0" bIns="0" rtlCol="0" anchor="ctr"/>
+          <a:lstStyle/>
+          <a:p>
+            <a:pPr algn="r" indent="0" marL="0">
+              <a:buNone/>
+            </a:pPr>
+            <a:r>
+              <a:rPr lang="en-US" sz="2000" b="1" dirty="0">
+                <a:solidFill>
+                  <a:srgbClr val="B8323A"/>
+                </a:solidFill>
+                <a:latin typeface="Cambria" pitchFamily="34" charset="0"/>
+                <a:ea typeface="Cambria" pitchFamily="34" charset="-122"/>
+                <a:cs typeface="Cambria" pitchFamily="34" charset="-120"/>
+              </a:rPr>
+              <a:t>1</a:t>
+            </a:r>
+            <a:endParaRPr lang="en-US" sz="2000" dirty="0"/>
+          </a:p>
+        </p:txBody>
+      </p:sp>
+      <p:sp>
+        <p:nvSpPr>
+          <p:cNvPr id="56" name="Text 54"/>
+          <p:cNvSpPr txBox="1"/>
+          <p:nvPr/>
+        </p:nvSpPr>
+        <p:spPr>
+          <a:xfrm>
+            <a:off x="566928" y="5989320"/>
+            <a:ext cx="10881360" cy="548640"/>
+          </a:xfrm>
+          <a:prstGeom prst="rect">
+            <a:avLst/>
+          </a:prstGeom>
+          <a:noFill/>
+          <a:ln/>
+        </p:spPr>
+        <p:txBody>
+          <a:bodyPr wrap="square" lIns="0" tIns="0" rIns="0" bIns="0" rtlCol="0" anchor="ctr"/>
+          <a:lstStyle/>
+          <a:p>
+            <a:pPr indent="0" marL="0">
+              <a:buNone/>
+            </a:pPr>
+            <a:r>
+              <a:rPr lang="en-US" sz="1300" dirty="0">
+                <a:solidFill>
+                  <a:srgbClr val="A9A09E"/>
+                </a:solidFill>
+                <a:latin typeface="Calibri" pitchFamily="34" charset="0"/>
+                <a:ea typeface="Calibri" pitchFamily="34" charset="-122"/>
+                <a:cs typeface="Calibri" pitchFamily="34" charset="-120"/>
+              </a:rPr>
+              <a:t>The large number on each card is how many designations hold that band. Super Admin holds everything, including any permission added in future, without anybody switching it on.</a:t>
+            </a:r>
+            <a:endParaRPr lang="en-US" sz="1300" dirty="0"/>
           </a:p>
         </p:txBody>
       </p:sp>
@@ -15221,7 +15334,7 @@
                 <a:ea typeface="Calibri" pitchFamily="34" charset="-122"/>
                 <a:cs typeface="Calibri" pitchFamily="34" charset="-120"/>
               </a:rPr>
-              <a:t>ACTIVITY LOG</a:t>
+              <a:t>PERMISSIONS</a:t>
             </a:r>
             <a:endParaRPr lang="en-US" sz="1100" dirty="0"/>
           </a:p>
@@ -15260,7 +15373,7 @@
                 <a:ea typeface="Cambria" pitchFamily="34" charset="-122"/>
                 <a:cs typeface="Cambria" pitchFamily="34" charset="-120"/>
               </a:rPr>
-              <a:t>One record that crosses every module</a:t>
+              <a:t>One screen decides what everybody else may do</a:t>
             </a:r>
             <a:endParaRPr lang="en-US" sz="3400" dirty="0"/>
           </a:p>
@@ -15306,7 +15419,7 @@
                 <a:ea typeface="Calibri" pitchFamily="34" charset="-122"/>
                 <a:cs typeface="Calibri" pitchFamily="34" charset="-120"/>
               </a:rPr>
-              <a:t>Every action anybody takes, newest first, with the person’s name and designation.</a:t>
+              <a:t>Choose a designation, tick the actions it should hold, save.</a:t>
             </a:r>
             <a:endParaRPr lang="en-US" sz="1400" dirty="0"/>
           </a:p>
@@ -15330,7 +15443,7 @@
                 <a:ea typeface="Calibri" pitchFamily="34" charset="-122"/>
                 <a:cs typeface="Calibri" pitchFamily="34" charset="-120"/>
               </a:rPr>
-              <a:t>Filter by person, module, action or date; search the text.</a:t>
+              <a:t>The change applies to everybody holding that designation, on their next request.</a:t>
             </a:r>
             <a:endParaRPr lang="en-US" sz="1400" dirty="0"/>
           </a:p>
@@ -15354,7 +15467,7 @@
                 <a:ea typeface="Calibri" pitchFamily="34" charset="-122"/>
                 <a:cs typeface="Calibri" pitchFamily="34" charset="-120"/>
               </a:rPr>
-              <a:t>Where a change has a before and an after, the entry shows both.</a:t>
+              <a:t>Super Admin holds every permission and cannot be edited down.</a:t>
             </a:r>
             <a:endParaRPr lang="en-US" sz="1400" dirty="0"/>
           </a:p>
@@ -15378,31 +15491,7 @@
                 <a:ea typeface="Calibri" pitchFamily="34" charset="-122"/>
                 <a:cs typeface="Calibri" pitchFamily="34" charset="-120"/>
               </a:rPr>
-              <a:t>Nothing here can be edited or removed, from this screen or any other.</a:t>
-            </a:r>
-            <a:endParaRPr lang="en-US" sz="1400" dirty="0"/>
-          </a:p>
-          <a:p>
-            <a:pPr marL="342900" indent="-342900">
-              <a:lnSpc>
-                <a:spcPts val="2000"/>
-              </a:lnSpc>
-              <a:spcAft>
-                <a:spcPts val="1000"/>
-              </a:spcAft>
-              <a:buSzPct val="100000"/>
-              <a:buChar char="•"/>
-            </a:pPr>
-            <a:r>
-              <a:rPr lang="en-US" sz="1400" dirty="0">
-                <a:solidFill>
-                  <a:srgbClr val="F4F1F0"/>
-                </a:solidFill>
-                <a:latin typeface="Calibri" pitchFamily="34" charset="0"/>
-                <a:ea typeface="Calibri" pitchFamily="34" charset="-122"/>
-                <a:cs typeface="Calibri" pitchFamily="34" charset="-120"/>
-              </a:rPr>
-              <a:t>The asset history, the review trail and the time-sheet log all still exist — this is the view that crosses them.</a:t>
+              <a:t>Every change is written to the Activity Log — the designation, the permission and the direction.</a:t>
             </a:r>
             <a:endParaRPr lang="en-US" sz="1400" dirty="0"/>
           </a:p>
@@ -15482,7 +15571,7 @@
                 <a:ea typeface="Calibri" pitchFamily="34" charset="-122"/>
                 <a:cs typeface="Calibri" pitchFamily="34" charset="-120"/>
               </a:rPr>
-              <a:t>Studio leadership — 7 designations. Readable, filterable, exportable, editable by nobody.</a:t>
+              <a:t>Super Admin, and nobody else.</a:t>
             </a:r>
             <a:endParaRPr lang="en-US" sz="1000" dirty="0"/>
           </a:p>
@@ -15504,8 +15593,8 @@
         </p:blipFill>
         <p:spPr>
           <a:xfrm>
-            <a:off x="5989320" y="1528779"/>
-            <a:ext cx="5632704" cy="4166201"/>
+            <a:off x="5989320" y="1570441"/>
+            <a:ext cx="5632704" cy="4082877"/>
           </a:xfrm>
           <a:prstGeom prst="rect">
             <a:avLst/>
@@ -15527,7 +15616,7 @@
         </p:nvSpPr>
         <p:spPr>
           <a:xfrm>
-            <a:off x="5989320" y="5804709"/>
+            <a:off x="5989320" y="5763047"/>
             <a:ext cx="5632704" cy="457200"/>
           </a:xfrm>
           <a:prstGeom prst="rect">
@@ -15552,7 +15641,7 @@
                 <a:ea typeface="Calibri" pitchFamily="34" charset="-122"/>
                 <a:cs typeface="Calibri" pitchFamily="34" charset="-120"/>
               </a:rPr>
-              <a:t>The Activity Log (first screenful).</a:t>
+              <a:t>The permission grid for one designation (first screenful).</a:t>
             </a:r>
             <a:endParaRPr lang="en-US" sz="1000" dirty="0"/>
           </a:p>
@@ -15569,6 +15658,508 @@
 <file path=ppt/slides/slide28.xml><?xml version="1.0" encoding="utf-8"?>
 <p:sld xmlns:a="http://schemas.openxmlformats.org/drawingml/2006/main" xmlns:r="http://schemas.openxmlformats.org/officeDocument/2006/relationships" xmlns:p="http://schemas.openxmlformats.org/presentationml/2006/main">
   <p:cSld name="Slide 28">
+    <p:bg>
+      <p:bgPr>
+        <a:solidFill>
+          <a:srgbClr val="141110"/>
+        </a:solidFill>
+      </p:bgPr>
+    </p:bg>
+    <p:spTree>
+      <p:nvGrpSpPr>
+        <p:cNvPr id="1" name=""/>
+        <p:cNvGrpSpPr/>
+        <p:nvPr/>
+      </p:nvGrpSpPr>
+      <p:grpSpPr>
+        <a:xfrm>
+          <a:off x="0" y="0"/>
+          <a:ext cx="0" cy="0"/>
+          <a:chOff x="0" y="0"/>
+          <a:chExt cx="0" cy="0"/>
+        </a:xfrm>
+      </p:grpSpPr>
+      <p:sp>
+        <p:nvSpPr>
+          <p:cNvPr id="2" name="Text 0"/>
+          <p:cNvSpPr txBox="1"/>
+          <p:nvPr/>
+        </p:nvSpPr>
+        <p:spPr>
+          <a:xfrm>
+            <a:off x="11411712" y="6355080"/>
+            <a:ext cx="457200" cy="274320"/>
+          </a:xfrm>
+          <a:prstGeom prst="rect">
+            <a:avLst/>
+          </a:prstGeom>
+          <a:noFill/>
+          <a:ln/>
+        </p:spPr>
+        <p:txBody>
+          <a:bodyPr wrap="square" lIns="0" tIns="0" rIns="0" bIns="0" rtlCol="0" anchor="ctr"/>
+          <a:lstStyle/>
+          <a:p>
+            <a:pPr algn="r" indent="0" marL="0">
+              <a:buNone/>
+            </a:pPr>
+            <a:r>
+              <a:rPr lang="en-US" sz="1000" dirty="0">
+                <a:solidFill>
+                  <a:srgbClr val="A9A09E"/>
+                </a:solidFill>
+                <a:latin typeface="Calibri" pitchFamily="34" charset="0"/>
+                <a:ea typeface="Calibri" pitchFamily="34" charset="-122"/>
+                <a:cs typeface="Calibri" pitchFamily="34" charset="-120"/>
+              </a:rPr>
+              <a:t>28</a:t>
+            </a:r>
+            <a:endParaRPr lang="en-US" sz="1000" dirty="0"/>
+          </a:p>
+        </p:txBody>
+      </p:sp>
+      <p:sp>
+        <p:nvSpPr>
+          <p:cNvPr id="3" name="Shape 1"/>
+          <p:cNvSpPr/>
+          <p:nvPr/>
+        </p:nvSpPr>
+        <p:spPr>
+          <a:xfrm>
+            <a:off x="566928" y="384048"/>
+            <a:ext cx="329184" cy="329184"/>
+          </a:xfrm>
+          <a:prstGeom prst="roundRect">
+            <a:avLst>
+              <a:gd name="adj" fmla="val 22222"/>
+            </a:avLst>
+          </a:prstGeom>
+          <a:solidFill>
+            <a:srgbClr val="7F1416"/>
+          </a:solidFill>
+          <a:ln/>
+        </p:spPr>
+      </p:sp>
+      <p:sp>
+        <p:nvSpPr>
+          <p:cNvPr id="4" name="Text 2"/>
+          <p:cNvSpPr txBox="1"/>
+          <p:nvPr/>
+        </p:nvSpPr>
+        <p:spPr>
+          <a:xfrm>
+            <a:off x="566928" y="384048"/>
+            <a:ext cx="329184" cy="329184"/>
+          </a:xfrm>
+          <a:prstGeom prst="rect">
+            <a:avLst/>
+          </a:prstGeom>
+          <a:noFill/>
+          <a:ln/>
+        </p:spPr>
+        <p:txBody>
+          <a:bodyPr wrap="square" lIns="0" tIns="0" rIns="0" bIns="0" rtlCol="0" anchor="ctr"/>
+          <a:lstStyle/>
+          <a:p>
+            <a:pPr algn="ctr" indent="0" marL="0">
+              <a:buNone/>
+            </a:pPr>
+            <a:r>
+              <a:rPr lang="en-US" sz="1600" b="1" dirty="0">
+                <a:solidFill>
+                  <a:srgbClr val="FFFFFF"/>
+                </a:solidFill>
+                <a:latin typeface="Cambria" pitchFamily="34" charset="0"/>
+                <a:ea typeface="Cambria" pitchFamily="34" charset="-122"/>
+                <a:cs typeface="Cambria" pitchFamily="34" charset="-120"/>
+              </a:rPr>
+              <a:t>Z</a:t>
+            </a:r>
+            <a:endParaRPr lang="en-US" sz="1600" dirty="0"/>
+          </a:p>
+        </p:txBody>
+      </p:sp>
+      <p:sp>
+        <p:nvSpPr>
+          <p:cNvPr id="5" name="Text 3"/>
+          <p:cNvSpPr txBox="1"/>
+          <p:nvPr/>
+        </p:nvSpPr>
+        <p:spPr>
+          <a:xfrm>
+            <a:off x="1024128" y="384048"/>
+            <a:ext cx="7315200" cy="329184"/>
+          </a:xfrm>
+          <a:prstGeom prst="rect">
+            <a:avLst/>
+          </a:prstGeom>
+          <a:noFill/>
+          <a:ln/>
+        </p:spPr>
+        <p:txBody>
+          <a:bodyPr wrap="square" lIns="0" tIns="0" rIns="0" bIns="0" rtlCol="0" anchor="ctr"/>
+          <a:lstStyle/>
+          <a:p>
+            <a:pPr indent="0" marL="0">
+              <a:buNone/>
+            </a:pPr>
+            <a:r>
+              <a:rPr lang="en-US" sz="1100" b="1" spc="200" kern="0" dirty="0">
+                <a:solidFill>
+                  <a:srgbClr val="A9A09E"/>
+                </a:solidFill>
+                <a:latin typeface="Calibri" pitchFamily="34" charset="0"/>
+                <a:ea typeface="Calibri" pitchFamily="34" charset="-122"/>
+                <a:cs typeface="Calibri" pitchFamily="34" charset="-120"/>
+              </a:rPr>
+              <a:t>ACTIVITY LOG</a:t>
+            </a:r>
+            <a:endParaRPr lang="en-US" sz="1100" dirty="0"/>
+          </a:p>
+        </p:txBody>
+      </p:sp>
+      <p:sp>
+        <p:nvSpPr>
+          <p:cNvPr id="6" name="Text 4"/>
+          <p:cNvSpPr txBox="1"/>
+          <p:nvPr/>
+        </p:nvSpPr>
+        <p:spPr>
+          <a:xfrm>
+            <a:off x="566928" y="868680"/>
+            <a:ext cx="11064240" cy="685800"/>
+          </a:xfrm>
+          <a:prstGeom prst="rect">
+            <a:avLst/>
+          </a:prstGeom>
+          <a:noFill/>
+          <a:ln/>
+        </p:spPr>
+        <p:txBody>
+          <a:bodyPr wrap="square" lIns="0" tIns="0" rIns="0" bIns="0" rtlCol="0" anchor="ctr"/>
+          <a:lstStyle/>
+          <a:p>
+            <a:pPr indent="0" marL="0">
+              <a:buNone/>
+            </a:pPr>
+            <a:r>
+              <a:rPr lang="en-US" sz="3400" b="1" dirty="0">
+                <a:solidFill>
+                  <a:srgbClr val="F4F1F0"/>
+                </a:solidFill>
+                <a:latin typeface="Cambria" pitchFamily="34" charset="0"/>
+                <a:ea typeface="Cambria" pitchFamily="34" charset="-122"/>
+                <a:cs typeface="Cambria" pitchFamily="34" charset="-120"/>
+              </a:rPr>
+              <a:t>One record that crosses every module</a:t>
+            </a:r>
+            <a:endParaRPr lang="en-US" sz="3400" dirty="0"/>
+          </a:p>
+        </p:txBody>
+      </p:sp>
+      <p:sp>
+        <p:nvSpPr>
+          <p:cNvPr id="7" name="Text 5"/>
+          <p:cNvSpPr txBox="1"/>
+          <p:nvPr/>
+        </p:nvSpPr>
+        <p:spPr>
+          <a:xfrm>
+            <a:off x="566928" y="1828800"/>
+            <a:ext cx="4937760" cy="3200400"/>
+          </a:xfrm>
+          <a:prstGeom prst="rect">
+            <a:avLst/>
+          </a:prstGeom>
+          <a:noFill/>
+          <a:ln/>
+        </p:spPr>
+        <p:txBody>
+          <a:bodyPr wrap="square" rtlCol="0" anchor="ctr"/>
+          <a:lstStyle/>
+          <a:p>
+            <a:pPr marL="342900" indent="-342900">
+              <a:lnSpc>
+                <a:spcPts val="2000"/>
+              </a:lnSpc>
+              <a:spcAft>
+                <a:spcPts val="1000"/>
+              </a:spcAft>
+              <a:buSzPct val="100000"/>
+              <a:buChar char="•"/>
+            </a:pPr>
+            <a:r>
+              <a:rPr lang="en-US" sz="1400" dirty="0">
+                <a:solidFill>
+                  <a:srgbClr val="F4F1F0"/>
+                </a:solidFill>
+                <a:latin typeface="Calibri" pitchFamily="34" charset="0"/>
+                <a:ea typeface="Calibri" pitchFamily="34" charset="-122"/>
+                <a:cs typeface="Calibri" pitchFamily="34" charset="-120"/>
+              </a:rPr>
+              <a:t>Every action anybody takes, newest first, with the person’s name and designation.</a:t>
+            </a:r>
+            <a:endParaRPr lang="en-US" sz="1400" dirty="0"/>
+          </a:p>
+          <a:p>
+            <a:pPr marL="342900" indent="-342900">
+              <a:lnSpc>
+                <a:spcPts val="2000"/>
+              </a:lnSpc>
+              <a:spcAft>
+                <a:spcPts val="1000"/>
+              </a:spcAft>
+              <a:buSzPct val="100000"/>
+              <a:buChar char="•"/>
+            </a:pPr>
+            <a:r>
+              <a:rPr lang="en-US" sz="1400" dirty="0">
+                <a:solidFill>
+                  <a:srgbClr val="F4F1F0"/>
+                </a:solidFill>
+                <a:latin typeface="Calibri" pitchFamily="34" charset="0"/>
+                <a:ea typeface="Calibri" pitchFamily="34" charset="-122"/>
+                <a:cs typeface="Calibri" pitchFamily="34" charset="-120"/>
+              </a:rPr>
+              <a:t>Filter by person, module, action or date; search the text.</a:t>
+            </a:r>
+            <a:endParaRPr lang="en-US" sz="1400" dirty="0"/>
+          </a:p>
+          <a:p>
+            <a:pPr marL="342900" indent="-342900">
+              <a:lnSpc>
+                <a:spcPts val="2000"/>
+              </a:lnSpc>
+              <a:spcAft>
+                <a:spcPts val="1000"/>
+              </a:spcAft>
+              <a:buSzPct val="100000"/>
+              <a:buChar char="•"/>
+            </a:pPr>
+            <a:r>
+              <a:rPr lang="en-US" sz="1400" dirty="0">
+                <a:solidFill>
+                  <a:srgbClr val="F4F1F0"/>
+                </a:solidFill>
+                <a:latin typeface="Calibri" pitchFamily="34" charset="0"/>
+                <a:ea typeface="Calibri" pitchFamily="34" charset="-122"/>
+                <a:cs typeface="Calibri" pitchFamily="34" charset="-120"/>
+              </a:rPr>
+              <a:t>Where a change has a before and an after, the entry shows both.</a:t>
+            </a:r>
+            <a:endParaRPr lang="en-US" sz="1400" dirty="0"/>
+          </a:p>
+          <a:p>
+            <a:pPr marL="342900" indent="-342900">
+              <a:lnSpc>
+                <a:spcPts val="2000"/>
+              </a:lnSpc>
+              <a:spcAft>
+                <a:spcPts val="1000"/>
+              </a:spcAft>
+              <a:buSzPct val="100000"/>
+              <a:buChar char="•"/>
+            </a:pPr>
+            <a:r>
+              <a:rPr lang="en-US" sz="1400" dirty="0">
+                <a:solidFill>
+                  <a:srgbClr val="F4F1F0"/>
+                </a:solidFill>
+                <a:latin typeface="Calibri" pitchFamily="34" charset="0"/>
+                <a:ea typeface="Calibri" pitchFamily="34" charset="-122"/>
+                <a:cs typeface="Calibri" pitchFamily="34" charset="-120"/>
+              </a:rPr>
+              <a:t>Nothing here can be edited or removed, from this screen or any other.</a:t>
+            </a:r>
+            <a:endParaRPr lang="en-US" sz="1400" dirty="0"/>
+          </a:p>
+          <a:p>
+            <a:pPr marL="342900" indent="-342900">
+              <a:lnSpc>
+                <a:spcPts val="2000"/>
+              </a:lnSpc>
+              <a:spcAft>
+                <a:spcPts val="1000"/>
+              </a:spcAft>
+              <a:buSzPct val="100000"/>
+              <a:buChar char="•"/>
+            </a:pPr>
+            <a:r>
+              <a:rPr lang="en-US" sz="1400" dirty="0">
+                <a:solidFill>
+                  <a:srgbClr val="F4F1F0"/>
+                </a:solidFill>
+                <a:latin typeface="Calibri" pitchFamily="34" charset="0"/>
+                <a:ea typeface="Calibri" pitchFamily="34" charset="-122"/>
+                <a:cs typeface="Calibri" pitchFamily="34" charset="-120"/>
+              </a:rPr>
+              <a:t>The asset history, the review trail and the time-sheet log all still exist — this is the view that crosses them.</a:t>
+            </a:r>
+            <a:endParaRPr lang="en-US" sz="1400" dirty="0"/>
+          </a:p>
+        </p:txBody>
+      </p:sp>
+      <p:sp>
+        <p:nvSpPr>
+          <p:cNvPr id="8" name="Shape 6"/>
+          <p:cNvSpPr/>
+          <p:nvPr/>
+        </p:nvSpPr>
+        <p:spPr>
+          <a:xfrm>
+            <a:off x="566928" y="5532120"/>
+            <a:ext cx="4937760" cy="777240"/>
+          </a:xfrm>
+          <a:prstGeom prst="roundRect">
+            <a:avLst>
+              <a:gd name="adj" fmla="val 7059"/>
+            </a:avLst>
+          </a:prstGeom>
+          <a:solidFill>
+            <a:srgbClr val="1E1A19"/>
+          </a:solidFill>
+          <a:ln w="12700">
+            <a:solidFill>
+              <a:srgbClr val="2C2524"/>
+            </a:solidFill>
+            <a:prstDash val="solid"/>
+          </a:ln>
+        </p:spPr>
+      </p:sp>
+      <p:sp>
+        <p:nvSpPr>
+          <p:cNvPr id="9" name="Text 7"/>
+          <p:cNvSpPr txBox="1"/>
+          <p:nvPr/>
+        </p:nvSpPr>
+        <p:spPr>
+          <a:xfrm>
+            <a:off x="749808" y="5532120"/>
+            <a:ext cx="4572000" cy="777240"/>
+          </a:xfrm>
+          <a:prstGeom prst="rect">
+            <a:avLst/>
+          </a:prstGeom>
+          <a:noFill/>
+          <a:ln/>
+        </p:spPr>
+        <p:txBody>
+          <a:bodyPr wrap="square" lIns="0" tIns="0" rIns="0" bIns="0" rtlCol="0" anchor="ctr"/>
+          <a:lstStyle/>
+          <a:p>
+            <a:pPr indent="0" marL="0">
+              <a:buNone/>
+            </a:pPr>
+            <a:r>
+              <a:rPr lang="en-US" sz="1000" b="1" spc="200" kern="0" dirty="0">
+                <a:solidFill>
+                  <a:srgbClr val="B8323A"/>
+                </a:solidFill>
+                <a:latin typeface="Calibri" pitchFamily="34" charset="0"/>
+                <a:ea typeface="Calibri" pitchFamily="34" charset="-122"/>
+                <a:cs typeface="Calibri" pitchFamily="34" charset="-120"/>
+              </a:rPr>
+              <a:t>WHO  </a:t>
+            </a:r>
+            <a:pPr indent="0" marL="0">
+              <a:buNone/>
+            </a:pPr>
+            <a:r>
+              <a:rPr lang="en-US" sz="1200" dirty="0">
+                <a:solidFill>
+                  <a:srgbClr val="F4F1F0"/>
+                </a:solidFill>
+                <a:latin typeface="Calibri" pitchFamily="34" charset="0"/>
+                <a:ea typeface="Calibri" pitchFamily="34" charset="-122"/>
+                <a:cs typeface="Calibri" pitchFamily="34" charset="-120"/>
+              </a:rPr>
+              <a:t>Studio leadership — 7 designations. Readable, filterable, exportable, editable by nobody.</a:t>
+            </a:r>
+            <a:endParaRPr lang="en-US" sz="1000" dirty="0"/>
+          </a:p>
+        </p:txBody>
+      </p:sp>
+      <p:pic>
+        <p:nvPicPr>
+          <p:cNvPr id="10" name="Image 0" descr="preencoded.png">    </p:cNvPr>
+          <p:cNvPicPr>
+            <a:picLocks noChangeAspect="1"/>
+          </p:cNvPicPr>
+          <p:nvPr/>
+        </p:nvPicPr>
+        <p:blipFill>
+          <a:blip r:embed="rId1"/>
+          <a:stretch>
+            <a:fillRect/>
+          </a:stretch>
+        </p:blipFill>
+        <p:spPr>
+          <a:xfrm>
+            <a:off x="5989320" y="1528779"/>
+            <a:ext cx="5632704" cy="4166201"/>
+          </a:xfrm>
+          <a:prstGeom prst="rect">
+            <a:avLst/>
+          </a:prstGeom>
+          <a:effectLst>
+            <a:outerShdw sx="100000" sy="100000" kx="0" ky="0" algn="bl" rotWithShape="0" blurRad="177800" dist="50800" dir="5400000">
+              <a:srgbClr val="000000">
+                <a:alpha val="55000"/>
+              </a:srgbClr>
+            </a:outerShdw>
+          </a:effectLst>
+        </p:spPr>
+      </p:pic>
+      <p:sp>
+        <p:nvSpPr>
+          <p:cNvPr id="11" name="Text 8"/>
+          <p:cNvSpPr txBox="1"/>
+          <p:nvPr/>
+        </p:nvSpPr>
+        <p:spPr>
+          <a:xfrm>
+            <a:off x="5989320" y="5804709"/>
+            <a:ext cx="5632704" cy="457200"/>
+          </a:xfrm>
+          <a:prstGeom prst="rect">
+            <a:avLst/>
+          </a:prstGeom>
+          <a:noFill/>
+          <a:ln/>
+        </p:spPr>
+        <p:txBody>
+          <a:bodyPr wrap="square" lIns="0" tIns="0" rIns="0" bIns="0" rtlCol="0" anchor="ctr"/>
+          <a:lstStyle/>
+          <a:p>
+            <a:pPr algn="ctr" indent="0" marL="0">
+              <a:buNone/>
+            </a:pPr>
+            <a:r>
+              <a:rPr lang="en-US" sz="1000" i="1" dirty="0">
+                <a:solidFill>
+                  <a:srgbClr val="A9A09E"/>
+                </a:solidFill>
+                <a:latin typeface="Calibri" pitchFamily="34" charset="0"/>
+                <a:ea typeface="Calibri" pitchFamily="34" charset="-122"/>
+                <a:cs typeface="Calibri" pitchFamily="34" charset="-120"/>
+              </a:rPr>
+              <a:t>The Activity Log (first screenful).</a:t>
+            </a:r>
+            <a:endParaRPr lang="en-US" sz="1000" dirty="0"/>
+          </a:p>
+        </p:txBody>
+      </p:sp>
+    </p:spTree>
+  </p:cSld>
+  <p:clrMapOvr>
+    <a:masterClrMapping/>
+  </p:clrMapOvr>
+</p:sld>
+</file>
+
+<file path=ppt/slides/slide29.xml><?xml version="1.0" encoding="utf-8"?>
+<p:sld xmlns:a="http://schemas.openxmlformats.org/drawingml/2006/main" xmlns:r="http://schemas.openxmlformats.org/officeDocument/2006/relationships" xmlns:p="http://schemas.openxmlformats.org/presentationml/2006/main">
+  <p:cSld name="Slide 29">
     <p:bg>
       <p:bgPr>
         <a:solidFill>
@@ -15623,7 +16214,7 @@
                 <a:ea typeface="Calibri" pitchFamily="34" charset="-122"/>
                 <a:cs typeface="Calibri" pitchFamily="34" charset="-120"/>
               </a:rPr>
-              <a:t>28</a:t>
+              <a:t>29</a:t>
             </a:r>
             <a:endParaRPr lang="en-US" sz="1000" dirty="0"/>
           </a:p>

--- a/docs/ZVKY-FORGE-Overview.pptx
+++ b/docs/ZVKY-FORGE-Overview.pptx
@@ -34,9 +34,10 @@
     <p:sldId id="282" r:id="rId28"/>
     <p:sldId id="283" r:id="rId29"/>
     <p:sldId id="284" r:id="rId30"/>
+    <p:sldId id="285" r:id="rId31"/>
   </p:sldIdLst>
   <p:notesMasterIdLst>
-    <p:notesMasterId r:id="rId31"/>
+    <p:notesMasterId r:id="rId32"/>
   </p:notesMasterIdLst>
   <p:sldSz cx="12192000" cy="6858000"/>
   <p:notesSz cx="6858000" cy="12192000"/>
@@ -1586,7 +1587,7 @@
           <a:p>
             <a:r>
               <a:rPr lang="en-US" dirty="0"/>
-              <a:t>Flag this one in induction: the permissions here are narrow out of the box, and a studio must grant them before producers and directors can use the feature.</a:t>
+              <a:t/>
             </a:r>
             <a:endParaRPr lang="en-US" dirty="0"/>
           </a:p>
@@ -1674,7 +1675,7 @@
           <a:p>
             <a:r>
               <a:rPr lang="en-US" dirty="0"/>
-              <a:t/>
+              <a:t>Flag this one in induction: the permissions here are narrow out of the box, and a studio must grant them before producers and directors can use the feature.</a:t>
             </a:r>
             <a:endParaRPr lang="en-US" dirty="0"/>
           </a:p>
@@ -2114,7 +2115,7 @@
           <a:p>
             <a:r>
               <a:rPr lang="en-US" dirty="0"/>
-              <a:t>These twelve bands are generated from the permission table, not written by hand. Appendix A of the manual lists every designation in each.</a:t>
+              <a:t/>
             </a:r>
             <a:endParaRPr lang="en-US" dirty="0"/>
           </a:p>
@@ -2202,7 +2203,7 @@
           <a:p>
             <a:r>
               <a:rPr lang="en-US" dirty="0"/>
-              <a:t/>
+              <a:t>These twelve bands are generated from the permission table, not written by hand. Appendix A of the manual lists every designation in each.</a:t>
             </a:r>
             <a:endParaRPr lang="en-US" dirty="0"/>
           </a:p>
@@ -2378,7 +2379,7 @@
           <a:p>
             <a:r>
               <a:rPr lang="en-US" dirty="0"/>
-              <a:t>The standing rule: every feature prompt from here on should say what the documentation needs added.</a:t>
+              <a:t/>
             </a:r>
             <a:endParaRPr lang="en-US" dirty="0"/>
           </a:p>
@@ -2490,6 +2491,94 @@
             <a:fld id="{F7021451-1387-4CA6-816F-3879F97B5CBC}" type="slidenum">
               <a:rPr lang="en-US"/>
               <a:t>3</a:t>
+            </a:fld>
+            <a:endParaRPr lang="en-US"/>
+          </a:p>
+        </p:txBody>
+      </p:sp>
+    </p:spTree>
+    <p:extLst>
+      <p:ext uri="{BB962C8B-B14F-4D97-AF65-F5344CB8AC3E}">
+        <p14:creationId xmlns:p14="http://schemas.microsoft.com/office/powerpoint/2010/main" val="1024086991"/>
+      </p:ext>
+    </p:extLst>
+  </p:cSld>
+  <p:clrMapOvr>
+    <a:masterClrMapping/>
+  </p:clrMapOvr>
+</p:notes>
+</file>
+
+<file path=ppt/notesSlides/notesSlide30.xml><?xml version="1.0" encoding="utf-8"?>
+<p:notes xmlns:a="http://schemas.openxmlformats.org/drawingml/2006/main" xmlns:r="http://schemas.openxmlformats.org/officeDocument/2006/relationships" xmlns:p="http://schemas.openxmlformats.org/presentationml/2006/main">
+  <p:cSld>
+    <p:spTree>
+      <p:nvGrpSpPr>
+        <p:cNvPr id="1" name=""/>
+        <p:cNvGrpSpPr/>
+        <p:nvPr/>
+      </p:nvGrpSpPr>
+      <p:grpSpPr>
+        <a:xfrm>
+          <a:off x="0" y="0"/>
+          <a:ext cx="0" cy="0"/>
+          <a:chOff x="0" y="0"/>
+          <a:chExt cx="0" cy="0"/>
+        </a:xfrm>
+      </p:grpSpPr>
+      <p:sp>
+        <p:nvSpPr>
+          <p:cNvPr id="2" name="Slide Image Placeholder 1"/>
+          <p:cNvSpPr>
+            <a:spLocks noGrp="1" noRot="1" noChangeAspect="1"/>
+          </p:cNvSpPr>
+          <p:nvPr>
+            <p:ph type="sldImg"/>
+          </p:nvPr>
+        </p:nvSpPr>
+        <p:spPr/>
+      </p:sp>
+      <p:sp>
+        <p:nvSpPr>
+          <p:cNvPr id="3" name="Notes Placeholder 2"/>
+          <p:cNvSpPr>
+            <a:spLocks noGrp="1"/>
+          </p:cNvSpPr>
+          <p:nvPr>
+            <p:ph type="body" idx="1"/>
+          </p:nvPr>
+        </p:nvSpPr>
+        <p:spPr/>
+        <p:txBody>
+          <a:bodyPr/>
+          <a:lstStyle/>
+          <a:p>
+            <a:r>
+              <a:rPr lang="en-US" dirty="0"/>
+              <a:t>The standing rule: every feature prompt from here on should say what the documentation needs added.</a:t>
+            </a:r>
+            <a:endParaRPr lang="en-US" dirty="0"/>
+          </a:p>
+        </p:txBody>
+      </p:sp>
+      <p:sp>
+        <p:nvSpPr>
+          <p:cNvPr id="4" name="Slide Number Placeholder 3"/>
+          <p:cNvSpPr>
+            <a:spLocks noGrp="1"/>
+          </p:cNvSpPr>
+          <p:nvPr>
+            <p:ph type="sldNum" sz="quarter" idx="10"/>
+          </p:nvPr>
+        </p:nvSpPr>
+        <p:spPr/>
+        <p:txBody>
+          <a:bodyPr/>
+          <a:lstStyle/>
+          <a:p>
+            <a:fld id="{F7021451-1387-4CA6-816F-3879F97B5CBC}" type="slidenum">
+              <a:rPr lang="en-US"/>
+              <a:t>30</a:t>
             </a:fld>
             <a:endParaRPr lang="en-US"/>
           </a:p>
@@ -6721,7 +6810,7 @@
                 <a:ea typeface="Calibri" pitchFamily="34" charset="-122"/>
                 <a:cs typeface="Calibri" pitchFamily="34" charset="-120"/>
               </a:rPr>
-              <a:t>BULK ASSIGN</a:t>
+              <a:t>PROJECTS</a:t>
             </a:r>
             <a:endParaRPr lang="en-US" sz="1100" dirty="0"/>
           </a:p>
@@ -6760,7 +6849,7 @@
                 <a:ea typeface="Cambria" pitchFamily="34" charset="-122"/>
                 <a:cs typeface="Cambria" pitchFamily="34" charset="-120"/>
               </a:rPr>
-              <a:t>Hand out and schedule a batch in one action</a:t>
+              <a:t>What a project is, and how it is going</a:t>
             </a:r>
             <a:endParaRPr lang="en-US" sz="3400" dirty="0"/>
           </a:p>
@@ -6806,7 +6895,7 @@
                 <a:ea typeface="Calibri" pitchFamily="34" charset="-122"/>
                 <a:cs typeface="Calibri" pitchFamily="34" charset="-120"/>
               </a:rPr>
-              <a:t>Tick the assets on the Assets List — Inactive sub-tab — and press Assign &amp; Schedule.</a:t>
+              <a:t>Category, Start Date and End Date describe the project. They are set on Add Project and are plain information — nothing warns or blocks when an end date passes.</a:t>
             </a:r>
             <a:endParaRPr lang="en-US" sz="1400" dirty="0"/>
           </a:p>
@@ -6830,7 +6919,7 @@
                 <a:ea typeface="Calibri" pitchFamily="34" charset="-122"/>
                 <a:cs typeface="Calibri" pitchFamily="34" charset="-120"/>
               </a:rPr>
-              <a:t>One assignee, one Start Date, one End Date, applied to all of them. Each field is optional.</a:t>
+              <a:t>"+ Add Category" creates a category from inside the form and selects it straight away.</a:t>
             </a:r>
             <a:endParaRPr lang="en-US" sz="1400" dirty="0"/>
           </a:p>
@@ -6854,7 +6943,7 @@
                 <a:ea typeface="Calibri" pitchFamily="34" charset="-122"/>
                 <a:cs typeface="Calibri" pitchFamily="34" charset="-120"/>
               </a:rPr>
-              <a:t>Only work nobody has started. Anything already on somebody’s desk is skipped and listed with the reason.</a:t>
+              <a:t>Total Bid Hours adds up every asset’s Man Hours — every asset, at every stage, including delivered ones.</a:t>
             </a:r>
             <a:endParaRPr lang="en-US" sz="1400" dirty="0"/>
           </a:p>
@@ -6878,7 +6967,7 @@
                 <a:ea typeface="Calibri" pitchFamily="34" charset="-122"/>
                 <a:cs typeface="Calibri" pitchFamily="34" charset="-120"/>
               </a:rPr>
-              <a:t>Each asset gets its own Round, its own history line and its own notification, exactly as a single assignment does.</a:t>
+              <a:t>Spent Time adds up every round of every asset, held time excluded. The same figure the Efficiency report shows.</a:t>
             </a:r>
             <a:endParaRPr lang="en-US" sz="1400" dirty="0"/>
           </a:p>
@@ -6902,7 +6991,7 @@
                 <a:ea typeface="Calibri" pitchFamily="34" charset="-122"/>
                 <a:cs typeface="Calibri" pitchFamily="34" charset="-120"/>
               </a:rPr>
-              <a:t>The button says how many of your selection it will touch before you press it.</a:t>
+              <a:t>Neither figure is stored. Both are counted from the assets each time the tab is drawn, so they are never out of date.</a:t>
             </a:r>
             <a:endParaRPr lang="en-US" sz="1400" dirty="0"/>
           </a:p>
@@ -6982,7 +7071,7 @@
                 <a:ea typeface="Calibri" pitchFamily="34" charset="-122"/>
                 <a:cs typeface="Calibri" pitchFamily="34" charset="-120"/>
               </a:rPr>
-              <a:t>Super Admin alone out of the box. Granted in Settings to the coordinators who plan work — which opens the bulk panel without widening whose assets anybody may touch.</a:t>
+              <a:t>Anyone who can see clients sees the columns. Creating and editing projects is the existing project permission; managing the Project Categories list is its own Settings permission, separate from asset categories.</a:t>
             </a:r>
             <a:endParaRPr lang="en-US" sz="1000" dirty="0"/>
           </a:p>
@@ -7004,8 +7093,8 @@
         </p:blipFill>
         <p:spPr>
           <a:xfrm>
-            <a:off x="5989320" y="2811948"/>
-            <a:ext cx="5632704" cy="1599865"/>
+            <a:off x="5989320" y="2725319"/>
+            <a:ext cx="5632704" cy="1773122"/>
           </a:xfrm>
           <a:prstGeom prst="rect">
             <a:avLst/>
@@ -7027,7 +7116,7 @@
         </p:nvSpPr>
         <p:spPr>
           <a:xfrm>
-            <a:off x="5989320" y="4521540"/>
+            <a:off x="5989320" y="4608169"/>
             <a:ext cx="5632704" cy="457200"/>
           </a:xfrm>
           <a:prstGeom prst="rect">
@@ -7052,7 +7141,7 @@
                 <a:ea typeface="Calibri" pitchFamily="34" charset="-122"/>
                 <a:cs typeface="Calibri" pitchFamily="34" charset="-120"/>
               </a:rPr>
-              <a:t>The Assets List, where a batch is selected.</a:t>
+              <a:t>The projects under a client.</a:t>
             </a:r>
             <a:endParaRPr lang="en-US" sz="1000" dirty="0"/>
           </a:p>
@@ -7223,7 +7312,7 @@
                 <a:ea typeface="Calibri" pitchFamily="34" charset="-122"/>
                 <a:cs typeface="Calibri" pitchFamily="34" charset="-120"/>
               </a:rPr>
-              <a:t>ONE AT A TIME</a:t>
+              <a:t>BULK ASSIGN</a:t>
             </a:r>
             <a:endParaRPr lang="en-US" sz="1100" dirty="0"/>
           </a:p>
@@ -7262,7 +7351,7 @@
                 <a:ea typeface="Cambria" pitchFamily="34" charset="-122"/>
                 <a:cs typeface="Cambria" pitchFamily="34" charset="-120"/>
               </a:rPr>
-              <a:t>One active task, enforced</a:t>
+              <a:t>Hand out and schedule a batch in one action</a:t>
             </a:r>
             <a:endParaRPr lang="en-US" sz="3400" dirty="0"/>
           </a:p>
@@ -7308,7 +7397,7 @@
                 <a:ea typeface="Calibri" pitchFamily="34" charset="-122"/>
                 <a:cs typeface="Calibri" pitchFamily="34" charset="-120"/>
               </a:rPr>
-              <a:t>While one of your assets is open, Accept and Start on every other one is disabled.</a:t>
+              <a:t>Tick the assets on the Assets List — Inactive sub-tab — and press Assign &amp; Schedule.</a:t>
             </a:r>
             <a:endParaRPr lang="en-US" sz="1400" dirty="0"/>
           </a:p>
@@ -7332,7 +7421,7 @@
                 <a:ea typeface="Calibri" pitchFamily="34" charset="-122"/>
                 <a:cs typeface="Calibri" pitchFamily="34" charset="-120"/>
               </a:rPr>
-              <a:t>The message names the asset that is holding you up.</a:t>
+              <a:t>One assignee, one Start Date, one End Date, applied to all of them. Each field is optional.</a:t>
             </a:r>
             <a:endParaRPr lang="en-US" sz="1400" dirty="0"/>
           </a:p>
@@ -7356,7 +7445,7 @@
                 <a:ea typeface="Calibri" pitchFamily="34" charset="-122"/>
                 <a:cs typeface="Calibri" pitchFamily="34" charset="-120"/>
               </a:rPr>
-              <a:t>Submit the open one and every other unlocks immediately.</a:t>
+              <a:t>Only work nobody has started. Anything already on somebody’s desk is skipped and listed with the reason.</a:t>
             </a:r>
             <a:endParaRPr lang="en-US" sz="1400" dirty="0"/>
           </a:p>
@@ -7380,7 +7469,7 @@
                 <a:ea typeface="Calibri" pitchFamily="34" charset="-122"/>
                 <a:cs typeface="Calibri" pitchFamily="34" charset="-120"/>
               </a:rPr>
-              <a:t>Enforced on the server as well as the screen, so a second browser tab does not get round it.</a:t>
+              <a:t>Each asset gets its own Round, its own history line and its own notification, exactly as a single assignment does.</a:t>
             </a:r>
             <a:endParaRPr lang="en-US" sz="1400" dirty="0"/>
           </a:p>
@@ -7404,7 +7493,7 @@
                 <a:ea typeface="Calibri" pitchFamily="34" charset="-122"/>
                 <a:cs typeface="Calibri" pitchFamily="34" charset="-120"/>
               </a:rPr>
-              <a:t>It restricts starting your own work and nothing else — reviewing, approving and time sheets are untouched.</a:t>
+              <a:t>The button says how many of your selection it will touch before you press it.</a:t>
             </a:r>
             <a:endParaRPr lang="en-US" sz="1400" dirty="0"/>
           </a:p>
@@ -7484,7 +7573,7 @@
                 <a:ea typeface="Calibri" pitchFamily="34" charset="-122"/>
                 <a:cs typeface="Calibri" pitchFamily="34" charset="-120"/>
               </a:rPr>
-              <a:t>Applies to everybody who accepts work. A lead with an asset under way still runs their queue.</a:t>
+              <a:t>Super Admin alone out of the box. Granted in Settings to the coordinators who plan work — which opens the bulk panel without widening whose assets anybody may touch.</a:t>
             </a:r>
             <a:endParaRPr lang="en-US" sz="1000" dirty="0"/>
           </a:p>
@@ -7506,8 +7595,8 @@
         </p:blipFill>
         <p:spPr>
           <a:xfrm>
-            <a:off x="7882677" y="1371600"/>
-            <a:ext cx="1845991" cy="4480560"/>
+            <a:off x="5989320" y="2811948"/>
+            <a:ext cx="5632704" cy="1599865"/>
           </a:xfrm>
           <a:prstGeom prst="rect">
             <a:avLst/>
@@ -7529,7 +7618,7 @@
         </p:nvSpPr>
         <p:spPr>
           <a:xfrm>
-            <a:off x="5989320" y="5961888"/>
+            <a:off x="5989320" y="4521540"/>
             <a:ext cx="5632704" cy="457200"/>
           </a:xfrm>
           <a:prstGeom prst="rect">
@@ -7554,7 +7643,7 @@
                 <a:ea typeface="Calibri" pitchFamily="34" charset="-122"/>
                 <a:cs typeface="Calibri" pitchFamily="34" charset="-120"/>
               </a:rPr>
-              <a:t>A second asset, refused, naming the open one.</a:t>
+              <a:t>The Assets List, where a batch is selected.</a:t>
             </a:r>
             <a:endParaRPr lang="en-US" sz="1000" dirty="0"/>
           </a:p>
@@ -7725,7 +7814,7 @@
                 <a:ea typeface="Calibri" pitchFamily="34" charset="-122"/>
                 <a:cs typeface="Calibri" pitchFamily="34" charset="-120"/>
               </a:rPr>
-              <a:t>HOLD</a:t>
+              <a:t>ONE AT A TIME</a:t>
             </a:r>
             <a:endParaRPr lang="en-US" sz="1100" dirty="0"/>
           </a:p>
@@ -7764,7 +7853,7 @@
                 <a:ea typeface="Cambria" pitchFamily="34" charset="-122"/>
                 <a:cs typeface="Cambria" pitchFamily="34" charset="-120"/>
               </a:rPr>
-              <a:t>Put a task down without handing it in</a:t>
+              <a:t>One active task, enforced</a:t>
             </a:r>
             <a:endParaRPr lang="en-US" sz="3400" dirty="0"/>
           </a:p>
@@ -7810,7 +7899,7 @@
                 <a:ea typeface="Calibri" pitchFamily="34" charset="-122"/>
                 <a:cs typeface="Calibri" pitchFamily="34" charset="-120"/>
               </a:rPr>
-              <a:t>Hold stops the count on a task and frees you to start another one.</a:t>
+              <a:t>While one of your assets is open, Accept and Start on every other one is disabled.</a:t>
             </a:r>
             <a:endParaRPr lang="en-US" sz="1400" dirty="0"/>
           </a:p>
@@ -7834,7 +7923,7 @@
                 <a:ea typeface="Calibri" pitchFamily="34" charset="-122"/>
                 <a:cs typeface="Calibri" pitchFamily="34" charset="-120"/>
               </a:rPr>
-              <a:t>The held time is left out of that asset’s Time Spent. Say why in a line, or leave it blank.</a:t>
+              <a:t>The message names the asset that is holding you up.</a:t>
             </a:r>
             <a:endParaRPr lang="en-US" sz="1400" dirty="0"/>
           </a:p>
@@ -7858,7 +7947,7 @@
                 <a:ea typeface="Calibri" pitchFamily="34" charset="-122"/>
                 <a:cs typeface="Calibri" pitchFamily="34" charset="-120"/>
               </a:rPr>
-              <a:t>It stays in its stage and carries an On hold badge, so a lead can see the work has stopped.</a:t>
+              <a:t>Submit the open one and every other unlocks immediately.</a:t>
             </a:r>
             <a:endParaRPr lang="en-US" sz="1400" dirty="0"/>
           </a:p>
@@ -7882,7 +7971,7 @@
                 <a:ea typeface="Calibri" pitchFamily="34" charset="-122"/>
                 <a:cs typeface="Calibri" pitchFamily="34" charset="-120"/>
               </a:rPr>
-              <a:t>Resume obeys the same one-task rule as starting, so holding is not a way around it.</a:t>
+              <a:t>Enforced on the server as well as the screen, so a second browser tab does not get round it.</a:t>
             </a:r>
             <a:endParaRPr lang="en-US" sz="1400" dirty="0"/>
           </a:p>
@@ -7906,7 +7995,7 @@
                 <a:ea typeface="Calibri" pitchFamily="34" charset="-122"/>
                 <a:cs typeface="Calibri" pitchFamily="34" charset="-120"/>
               </a:rPr>
-              <a:t>Time Spent now depends on people pressing the button, exactly as the Time Sheet does.</a:t>
+              <a:t>It restricts starting your own work and nothing else — reviewing, approving and time sheets are untouched.</a:t>
             </a:r>
             <a:endParaRPr lang="en-US" sz="1400" dirty="0"/>
           </a:p>
@@ -7986,7 +8075,7 @@
                 <a:ea typeface="Calibri" pitchFamily="34" charset="-122"/>
                 <a:cs typeface="Calibri" pitchFamily="34" charset="-120"/>
               </a:rPr>
-              <a:t>The person the task is assigned to, with Hold / Resume Own Task — on for every designation by default, and switchable off in Settings. Nobody can hold somebody else’s task in this version.</a:t>
+              <a:t>Applies to everybody who accepts work. A lead with an asset under way still runs their queue.</a:t>
             </a:r>
             <a:endParaRPr lang="en-US" sz="1000" dirty="0"/>
           </a:p>
@@ -8056,7 +8145,7 @@
                 <a:ea typeface="Calibri" pitchFamily="34" charset="-122"/>
                 <a:cs typeface="Calibri" pitchFamily="34" charset="-120"/>
               </a:rPr>
-              <a:t>A task in progress, where the Hold button sits.</a:t>
+              <a:t>A second asset, refused, naming the open one.</a:t>
             </a:r>
             <a:endParaRPr lang="en-US" sz="1000" dirty="0"/>
           </a:p>
@@ -8227,7 +8316,7 @@
                 <a:ea typeface="Calibri" pitchFamily="34" charset="-122"/>
                 <a:cs typeface="Calibri" pitchFamily="34" charset="-120"/>
               </a:rPr>
-              <a:t>FIRST REVIEW GATE</a:t>
+              <a:t>HOLD</a:t>
             </a:r>
             <a:endParaRPr lang="en-US" sz="1100" dirty="0"/>
           </a:p>
@@ -8266,7 +8355,7 @@
                 <a:ea typeface="Cambria" pitchFamily="34" charset="-122"/>
                 <a:cs typeface="Cambria" pitchFamily="34" charset="-120"/>
               </a:rPr>
-              <a:t>The team lead sees it first</a:t>
+              <a:t>Put a task down without handing it in</a:t>
             </a:r>
             <a:endParaRPr lang="en-US" sz="3400" dirty="0"/>
           </a:p>
@@ -8312,7 +8401,7 @@
                 <a:ea typeface="Calibri" pitchFamily="34" charset="-122"/>
                 <a:cs typeface="Calibri" pitchFamily="34" charset="-120"/>
               </a:rPr>
-              <a:t>Approve to send it on to the Creative Director.</a:t>
+              <a:t>Hold stops the count on a task and frees you to start another one.</a:t>
             </a:r>
             <a:endParaRPr lang="en-US" sz="1400" dirty="0"/>
           </a:p>
@@ -8336,7 +8425,7 @@
                 <a:ea typeface="Calibri" pitchFamily="34" charset="-122"/>
                 <a:cs typeface="Calibri" pitchFamily="34" charset="-120"/>
               </a:rPr>
-              <a:t>Request changes to send it back as TL Feedbacks, with a note.</a:t>
+              <a:t>The held time is left out of that asset’s Time Spent. Say why in a line, or leave it blank.</a:t>
             </a:r>
             <a:endParaRPr lang="en-US" sz="1400" dirty="0"/>
           </a:p>
@@ -8360,7 +8449,7 @@
                 <a:ea typeface="Calibri" pitchFamily="34" charset="-122"/>
                 <a:cs typeface="Calibri" pitchFamily="34" charset="-120"/>
               </a:rPr>
-              <a:t>A studio without a Creative Director gate can send straight to Approved for Client, if the reviewer holds that permission.</a:t>
+              <a:t>It stays in its stage and carries an On hold badge, so a lead can see the work has stopped.</a:t>
             </a:r>
             <a:endParaRPr lang="en-US" sz="1400" dirty="0"/>
           </a:p>
@@ -8384,7 +8473,31 @@
                 <a:ea typeface="Calibri" pitchFamily="34" charset="-122"/>
                 <a:cs typeface="Calibri" pitchFamily="34" charset="-120"/>
               </a:rPr>
-              <a:t>Rework comes back through this same gate.</a:t>
+              <a:t>Resume obeys the same one-task rule as starting, so holding is not a way around it.</a:t>
+            </a:r>
+            <a:endParaRPr lang="en-US" sz="1400" dirty="0"/>
+          </a:p>
+          <a:p>
+            <a:pPr marL="342900" indent="-342900">
+              <a:lnSpc>
+                <a:spcPts val="2000"/>
+              </a:lnSpc>
+              <a:spcAft>
+                <a:spcPts val="1000"/>
+              </a:spcAft>
+              <a:buSzPct val="100000"/>
+              <a:buChar char="•"/>
+            </a:pPr>
+            <a:r>
+              <a:rPr lang="en-US" sz="1400" dirty="0">
+                <a:solidFill>
+                  <a:srgbClr val="F4F1F0"/>
+                </a:solidFill>
+                <a:latin typeface="Calibri" pitchFamily="34" charset="0"/>
+                <a:ea typeface="Calibri" pitchFamily="34" charset="-122"/>
+                <a:cs typeface="Calibri" pitchFamily="34" charset="-120"/>
+              </a:rPr>
+              <a:t>Time Spent now depends on people pressing the button, exactly as the Time Sheet does.</a:t>
             </a:r>
             <a:endParaRPr lang="en-US" sz="1400" dirty="0"/>
           </a:p>
@@ -8464,7 +8577,7 @@
                 <a:ea typeface="Calibri" pitchFamily="34" charset="-122"/>
                 <a:cs typeface="Calibri" pitchFamily="34" charset="-120"/>
               </a:rPr>
-              <a:t>First review gate — 23 designations: leads, supervisors, production and creative direction.</a:t>
+              <a:t>The person the task is assigned to, with Hold / Resume Own Task — on for every designation by default, and switchable off in Settings. Nobody can hold somebody else’s task in this version.</a:t>
             </a:r>
             <a:endParaRPr lang="en-US" sz="1000" dirty="0"/>
           </a:p>
@@ -8534,7 +8647,7 @@
                 <a:ea typeface="Calibri" pitchFamily="34" charset="-122"/>
                 <a:cs typeface="Calibri" pitchFamily="34" charset="-120"/>
               </a:rPr>
-              <a:t>An asset at TL Review.</a:t>
+              <a:t>A task in progress, where the Hold button sits.</a:t>
             </a:r>
             <a:endParaRPr lang="en-US" sz="1000" dirty="0"/>
           </a:p>
@@ -8705,7 +8818,7 @@
                 <a:ea typeface="Calibri" pitchFamily="34" charset="-122"/>
                 <a:cs typeface="Calibri" pitchFamily="34" charset="-120"/>
               </a:rPr>
-              <a:t>SECOND REVIEW GATE</a:t>
+              <a:t>FIRST REVIEW GATE</a:t>
             </a:r>
             <a:endParaRPr lang="en-US" sz="1100" dirty="0"/>
           </a:p>
@@ -8744,7 +8857,7 @@
                 <a:ea typeface="Cambria" pitchFamily="34" charset="-122"/>
                 <a:cs typeface="Cambria" pitchFamily="34" charset="-120"/>
               </a:rPr>
-              <a:t>The Creative Director, and the relay</a:t>
+              <a:t>The team lead sees it first</a:t>
             </a:r>
             <a:endParaRPr lang="en-US" sz="3400" dirty="0"/>
           </a:p>
@@ -8790,7 +8903,7 @@
                 <a:ea typeface="Calibri" pitchFamily="34" charset="-122"/>
                 <a:cs typeface="Calibri" pitchFamily="34" charset="-120"/>
               </a:rPr>
-              <a:t>Approve for client, or Submit Feedback — one action, not two competing decisions.</a:t>
+              <a:t>Approve to send it on to the Creative Director.</a:t>
             </a:r>
             <a:endParaRPr lang="en-US" sz="1400" dirty="0"/>
           </a:p>
@@ -8814,7 +8927,7 @@
                 <a:ea typeface="Calibri" pitchFamily="34" charset="-122"/>
                 <a:cs typeface="Calibri" pitchFamily="34" charset="-120"/>
               </a:rPr>
-              <a:t>Feedback goes to CD Feedbacks, which sits with the team lead first.</a:t>
+              <a:t>Request changes to send it back as TL Feedbacks, with a note.</a:t>
             </a:r>
             <a:endParaRPr lang="en-US" sz="1400" dirty="0"/>
           </a:p>
@@ -8838,7 +8951,7 @@
                 <a:ea typeface="Calibri" pitchFamily="34" charset="-122"/>
                 <a:cs typeface="Calibri" pitchFamily="34" charset="-120"/>
               </a:rPr>
-              <a:t>The lead reads the notes, adds their own reading, and relays them to the artist.</a:t>
+              <a:t>A studio without a Creative Director gate can send straight to Approved for Client, if the reviewer holds that permission.</a:t>
             </a:r>
             <a:endParaRPr lang="en-US" sz="1400" dirty="0"/>
           </a:p>
@@ -8862,7 +8975,7 @@
                 <a:ea typeface="Calibri" pitchFamily="34" charset="-122"/>
                 <a:cs typeface="Calibri" pitchFamily="34" charset="-120"/>
               </a:rPr>
-              <a:t>Until they do, the artist cannot start the rework — and the application says so plainly.</a:t>
+              <a:t>Rework comes back through this same gate.</a:t>
             </a:r>
             <a:endParaRPr lang="en-US" sz="1400" dirty="0"/>
           </a:p>
@@ -8942,7 +9055,7 @@
                 <a:ea typeface="Calibri" pitchFamily="34" charset="-122"/>
                 <a:cs typeface="Calibri" pitchFamily="34" charset="-120"/>
               </a:rPr>
-              <a:t>Creative direction — 9 designations: art direction and above.</a:t>
+              <a:t>First review gate — 23 designations: leads, supervisors, production and creative direction.</a:t>
             </a:r>
             <a:endParaRPr lang="en-US" sz="1000" dirty="0"/>
           </a:p>
@@ -9012,7 +9125,7 @@
                 <a:ea typeface="Calibri" pitchFamily="34" charset="-122"/>
                 <a:cs typeface="Calibri" pitchFamily="34" charset="-120"/>
               </a:rPr>
-              <a:t>An asset at CD Review.</a:t>
+              <a:t>An asset at TL Review.</a:t>
             </a:r>
             <a:endParaRPr lang="en-US" sz="1000" dirty="0"/>
           </a:p>
@@ -9183,7 +9296,7 @@
                 <a:ea typeface="Calibri" pitchFamily="34" charset="-122"/>
                 <a:cs typeface="Calibri" pitchFamily="34" charset="-120"/>
               </a:rPr>
-              <a:t>DELIVERY</a:t>
+              <a:t>SECOND REVIEW GATE</a:t>
             </a:r>
             <a:endParaRPr lang="en-US" sz="1100" dirty="0"/>
           </a:p>
@@ -9222,7 +9335,7 @@
                 <a:ea typeface="Cambria" pitchFamily="34" charset="-122"/>
                 <a:cs typeface="Cambria" pitchFamily="34" charset="-120"/>
               </a:rPr>
-              <a:t>Two ways out of the studio</a:t>
+              <a:t>The Creative Director, and the relay</a:t>
             </a:r>
             <a:endParaRPr lang="en-US" sz="3400" dirty="0"/>
           </a:p>
@@ -9268,7 +9381,7 @@
                 <a:ea typeface="Calibri" pitchFamily="34" charset="-122"/>
                 <a:cs typeface="Calibri" pitchFamily="34" charset="-120"/>
               </a:rPr>
-              <a:t>Deliver — handed over, and the asset is Delivered. One step.</a:t>
+              <a:t>Approve for client, or Submit Feedback — one action, not two competing decisions.</a:t>
             </a:r>
             <a:endParaRPr lang="en-US" sz="1400" dirty="0"/>
           </a:p>
@@ -9292,7 +9405,7 @@
                 <a:ea typeface="Calibri" pitchFamily="34" charset="-122"/>
                 <a:cs typeface="Calibri" pitchFamily="34" charset="-120"/>
               </a:rPr>
-              <a:t>Send to client review — the asset waits at Awaiting Client Feedback.</a:t>
+              <a:t>Feedback goes to CD Feedbacks, which sits with the team lead first.</a:t>
             </a:r>
             <a:endParaRPr lang="en-US" sz="1400" dirty="0"/>
           </a:p>
@@ -9316,7 +9429,7 @@
                 <a:ea typeface="Calibri" pitchFamily="34" charset="-122"/>
                 <a:cs typeface="Calibri" pitchFamily="34" charset="-120"/>
               </a:rPr>
-              <a:t>Client approved sends it to Delivered; client changes send it back to TL Feedbacks and round again.</a:t>
+              <a:t>The lead reads the notes, adds their own reading, and relays them to the artist.</a:t>
             </a:r>
             <a:endParaRPr lang="en-US" sz="1400" dirty="0"/>
           </a:p>
@@ -9340,7 +9453,7 @@
                 <a:ea typeface="Calibri" pitchFamily="34" charset="-122"/>
                 <a:cs typeface="Calibri" pitchFamily="34" charset="-120"/>
               </a:rPr>
-              <a:t>A studio uses whichever route matches how it works with that client.</a:t>
+              <a:t>Until they do, the artist cannot start the rework — and the application says so plainly.</a:t>
             </a:r>
             <a:endParaRPr lang="en-US" sz="1400" dirty="0"/>
           </a:p>
@@ -9420,7 +9533,7 @@
                 <a:ea typeface="Calibri" pitchFamily="34" charset="-122"/>
                 <a:cs typeface="Calibri" pitchFamily="34" charset="-120"/>
               </a:rPr>
-              <a:t>Delivery — 18 designations. The whole client-feedback loop is Super Admin only until granted.</a:t>
+              <a:t>Creative direction — 9 designations: art direction and above.</a:t>
             </a:r>
             <a:endParaRPr lang="en-US" sz="1000" dirty="0"/>
           </a:p>
@@ -9442,8 +9555,8 @@
         </p:blipFill>
         <p:spPr>
           <a:xfrm>
-            <a:off x="5989320" y="2795305"/>
-            <a:ext cx="5632704" cy="1633151"/>
+            <a:off x="7882677" y="1371600"/>
+            <a:ext cx="1845991" cy="4480560"/>
           </a:xfrm>
           <a:prstGeom prst="rect">
             <a:avLst/>
@@ -9465,7 +9578,7 @@
         </p:nvSpPr>
         <p:spPr>
           <a:xfrm>
-            <a:off x="5989320" y="4538183"/>
+            <a:off x="5989320" y="5961888"/>
             <a:ext cx="5632704" cy="457200"/>
           </a:xfrm>
           <a:prstGeom prst="rect">
@@ -9490,7 +9603,7 @@
                 <a:ea typeface="Calibri" pitchFamily="34" charset="-122"/>
                 <a:cs typeface="Calibri" pitchFamily="34" charset="-120"/>
               </a:rPr>
-              <a:t>The later columns on the board.</a:t>
+              <a:t>An asset at CD Review.</a:t>
             </a:r>
             <a:endParaRPr lang="en-US" sz="1000" dirty="0"/>
           </a:p>
@@ -10330,7 +10443,7 @@
                 <a:ea typeface="Calibri" pitchFamily="34" charset="-122"/>
                 <a:cs typeface="Calibri" pitchFamily="34" charset="-120"/>
               </a:rPr>
-              <a:t>PROJECT REVIEWS</a:t>
+              <a:t>DELIVERY</a:t>
             </a:r>
             <a:endParaRPr lang="en-US" sz="1100" dirty="0"/>
           </a:p>
@@ -10369,7 +10482,7 @@
                 <a:ea typeface="Cambria" pitchFamily="34" charset="-122"/>
                 <a:cs typeface="Cambria" pitchFamily="34" charset="-120"/>
               </a:rPr>
-              <a:t>A project, not an asset</a:t>
+              <a:t>Two ways out of the studio</a:t>
             </a:r>
             <a:endParaRPr lang="en-US" sz="3400" dirty="0"/>
           </a:p>
@@ -10415,7 +10528,7 @@
                 <a:ea typeface="Calibri" pitchFamily="34" charset="-122"/>
                 <a:cs typeface="Calibri" pitchFamily="34" charset="-120"/>
               </a:rPr>
-              <a:t>A producer sends a project to the Creative Director with a question.</a:t>
+              <a:t>Deliver — handed over, and the asset is Delivered. One step.</a:t>
             </a:r>
             <a:endParaRPr lang="en-US" sz="1400" dirty="0"/>
           </a:p>
@@ -10439,7 +10552,7 @@
                 <a:ea typeface="Calibri" pitchFamily="34" charset="-122"/>
                 <a:cs typeface="Calibri" pitchFamily="34" charset="-120"/>
               </a:rPr>
-              <a:t>It lands in the reviewer’s Pending Actions, which carries a count and highlights while something waits.</a:t>
+              <a:t>Send to client review — the asset waits at Awaiting Client Feedback.</a:t>
             </a:r>
             <a:endParaRPr lang="en-US" sz="1400" dirty="0"/>
           </a:p>
@@ -10463,7 +10576,7 @@
                 <a:ea typeface="Calibri" pitchFamily="34" charset="-122"/>
                 <a:cs typeface="Calibri" pitchFamily="34" charset="-120"/>
               </a:rPr>
-              <a:t>The reviewer answers with Submit Feedback; the submitter is notified at once.</a:t>
+              <a:t>Client approved sends it to Delivered; client changes send it back to TL Feedbacks and round again.</a:t>
             </a:r>
             <a:endParaRPr lang="en-US" sz="1400" dirty="0"/>
           </a:p>
@@ -10487,31 +10600,7 @@
                 <a:ea typeface="Calibri" pitchFamily="34" charset="-122"/>
                 <a:cs typeface="Calibri" pitchFamily="34" charset="-120"/>
               </a:rPr>
-              <a:t>The submitter reads it and presses Acknowledge and Close.</a:t>
-            </a:r>
-            <a:endParaRPr lang="en-US" sz="1400" dirty="0"/>
-          </a:p>
-          <a:p>
-            <a:pPr marL="342900" indent="-342900">
-              <a:lnSpc>
-                <a:spcPts val="2000"/>
-              </a:lnSpc>
-              <a:spcAft>
-                <a:spcPts val="1000"/>
-              </a:spcAft>
-              <a:buSzPct val="100000"/>
-              <a:buChar char="•"/>
-            </a:pPr>
-            <a:r>
-              <a:rPr lang="en-US" sz="1400" dirty="0">
-                <a:solidFill>
-                  <a:srgbClr val="F4F1F0"/>
-                </a:solidFill>
-                <a:latin typeface="Calibri" pitchFamily="34" charset="0"/>
-                <a:ea typeface="Calibri" pitchFamily="34" charset="-122"/>
-                <a:cs typeface="Calibri" pitchFamily="34" charset="-120"/>
-              </a:rPr>
-              <a:t>Your own submissions never appear in your queue to answer, only in your queue to read.</a:t>
+              <a:t>A studio uses whichever route matches how it works with that client.</a:t>
             </a:r>
             <a:endParaRPr lang="en-US" sz="1400" dirty="0"/>
           </a:p>
@@ -10591,7 +10680,7 @@
                 <a:ea typeface="Calibri" pitchFamily="34" charset="-122"/>
                 <a:cs typeface="Calibri" pitchFamily="34" charset="-120"/>
               </a:rPr>
-              <a:t>Creative Art Director and Super Admin. Sending, and seeing your own submissions, are Super Admin only until granted.</a:t>
+              <a:t>Delivery — 18 designations. The whole client-feedback loop is Super Admin only until granted.</a:t>
             </a:r>
             <a:endParaRPr lang="en-US" sz="1000" dirty="0"/>
           </a:p>
@@ -10613,8 +10702,8 @@
         </p:blipFill>
         <p:spPr>
           <a:xfrm>
-            <a:off x="5989320" y="1811110"/>
-            <a:ext cx="5632704" cy="3601539"/>
+            <a:off x="5989320" y="2795305"/>
+            <a:ext cx="5632704" cy="1633151"/>
           </a:xfrm>
           <a:prstGeom prst="rect">
             <a:avLst/>
@@ -10636,7 +10725,7 @@
         </p:nvSpPr>
         <p:spPr>
           <a:xfrm>
-            <a:off x="5989320" y="5522378"/>
+            <a:off x="5989320" y="4538183"/>
             <a:ext cx="5632704" cy="457200"/>
           </a:xfrm>
           <a:prstGeom prst="rect">
@@ -10661,7 +10750,7 @@
                 <a:ea typeface="Calibri" pitchFamily="34" charset="-122"/>
                 <a:cs typeface="Calibri" pitchFamily="34" charset="-120"/>
               </a:rPr>
-              <a:t>Pending Actions, as the Creative Director.</a:t>
+              <a:t>The later columns on the board.</a:t>
             </a:r>
             <a:endParaRPr lang="en-US" sz="1000" dirty="0"/>
           </a:p>
@@ -10832,7 +10921,7 @@
                 <a:ea typeface="Calibri" pitchFamily="34" charset="-122"/>
                 <a:cs typeface="Calibri" pitchFamily="34" charset="-120"/>
               </a:rPr>
-              <a:t>TIME SHEET</a:t>
+              <a:t>PROJECT REVIEWS</a:t>
             </a:r>
             <a:endParaRPr lang="en-US" sz="1100" dirty="0"/>
           </a:p>
@@ -10871,7 +10960,7 @@
                 <a:ea typeface="Cambria" pitchFamily="34" charset="-122"/>
                 <a:cs typeface="Cambria" pitchFamily="34" charset="-120"/>
               </a:rPr>
-              <a:t>A day at a time, in IST</a:t>
+              <a:t>A project, not an asset</a:t>
             </a:r>
             <a:endParaRPr lang="en-US" sz="3400" dirty="0"/>
           </a:p>
@@ -10917,7 +11006,7 @@
                 <a:ea typeface="Calibri" pitchFamily="34" charset="-122"/>
                 <a:cs typeface="Calibri" pitchFamily="34" charset="-120"/>
               </a:rPr>
-              <a:t>The working window is printed above the week — 09:30 to 19:00 IST, lunch 13:00 to 14:00, 8 hours a day.</a:t>
+              <a:t>A producer sends a project to the Creative Director with a question.</a:t>
             </a:r>
             <a:endParaRPr lang="en-US" sz="1400" dirty="0"/>
           </a:p>
@@ -10941,7 +11030,7 @@
                 <a:ea typeface="Calibri" pitchFamily="34" charset="-122"/>
                 <a:cs typeface="Calibri" pitchFamily="34" charset="-120"/>
               </a:rPr>
-              <a:t>Lines outside the day are refused; the lunch hour is taken out of any line that crosses it.</a:t>
+              <a:t>It lands in the reviewer’s Pending Actions, which carries a count and highlights while something waits.</a:t>
             </a:r>
             <a:endParaRPr lang="en-US" sz="1400" dirty="0"/>
           </a:p>
@@ -10965,7 +11054,7 @@
                 <a:ea typeface="Calibri" pitchFamily="34" charset="-122"/>
                 <a:cs typeface="Calibri" pitchFamily="34" charset="-120"/>
               </a:rPr>
-              <a:t>Submission is daily. A submitted day is with your approver and no longer yours to edit.</a:t>
+              <a:t>The reviewer answers with Submit Feedback; the submitter is notified at once.</a:t>
             </a:r>
             <a:endParaRPr lang="en-US" sz="1400" dirty="0"/>
           </a:p>
@@ -10989,7 +11078,7 @@
                 <a:ea typeface="Calibri" pitchFamily="34" charset="-122"/>
                 <a:cs typeface="Calibri" pitchFamily="34" charset="-120"/>
               </a:rPr>
-              <a:t>Approvers see their team’s days, with the count carried on the tab.</a:t>
+              <a:t>The submitter reads it and presses Acknowledge and Close.</a:t>
             </a:r>
             <a:endParaRPr lang="en-US" sz="1400" dirty="0"/>
           </a:p>
@@ -11013,7 +11102,7 @@
                 <a:ea typeface="Calibri" pitchFamily="34" charset="-122"/>
                 <a:cs typeface="Calibri" pitchFamily="34" charset="-120"/>
               </a:rPr>
-              <a:t>Every rule reads the configured window — change it in Settings and the rules change with it.</a:t>
+              <a:t>Your own submissions never appear in your queue to answer, only in your queue to read.</a:t>
             </a:r>
             <a:endParaRPr lang="en-US" sz="1400" dirty="0"/>
           </a:p>
@@ -11093,7 +11182,7 @@
                 <a:ea typeface="Calibri" pitchFamily="34" charset="-122"/>
                 <a:cs typeface="Calibri" pitchFamily="34" charset="-120"/>
               </a:rPr>
-              <a:t>Everybody fills in their own. Approving sits with leads and producers — 18 designations.</a:t>
+              <a:t>Creative Art Director and Super Admin. Sending, and seeing your own submissions, are Super Admin only until granted.</a:t>
             </a:r>
             <a:endParaRPr lang="en-US" sz="1000" dirty="0"/>
           </a:p>
@@ -11115,8 +11204,8 @@
         </p:blipFill>
         <p:spPr>
           <a:xfrm>
-            <a:off x="5989320" y="2312451"/>
-            <a:ext cx="5632704" cy="2598859"/>
+            <a:off x="5989320" y="1811110"/>
+            <a:ext cx="5632704" cy="3601539"/>
           </a:xfrm>
           <a:prstGeom prst="rect">
             <a:avLst/>
@@ -11138,7 +11227,7 @@
         </p:nvSpPr>
         <p:spPr>
           <a:xfrm>
-            <a:off x="5989320" y="5021037"/>
+            <a:off x="5989320" y="5522378"/>
             <a:ext cx="5632704" cy="457200"/>
           </a:xfrm>
           <a:prstGeom prst="rect">
@@ -11163,7 +11252,7 @@
                 <a:ea typeface="Calibri" pitchFamily="34" charset="-122"/>
                 <a:cs typeface="Calibri" pitchFamily="34" charset="-120"/>
               </a:rPr>
-              <a:t>A week: Submitted, Approved and Draft days.</a:t>
+              <a:t>Pending Actions, as the Creative Director.</a:t>
             </a:r>
             <a:endParaRPr lang="en-US" sz="1000" dirty="0"/>
           </a:p>
@@ -11334,7 +11423,7 @@
                 <a:ea typeface="Calibri" pitchFamily="34" charset="-122"/>
                 <a:cs typeface="Calibri" pitchFamily="34" charset="-120"/>
               </a:rPr>
-              <a:t>REPORTS</a:t>
+              <a:t>TIME SHEET</a:t>
             </a:r>
             <a:endParaRPr lang="en-US" sz="1100" dirty="0"/>
           </a:p>
@@ -11373,7 +11462,7 @@
                 <a:ea typeface="Cambria" pitchFamily="34" charset="-122"/>
                 <a:cs typeface="Cambria" pitchFamily="34" charset="-120"/>
               </a:rPr>
-              <a:t>Estimate against actual, and time with nothing open</a:t>
+              <a:t>A day at a time, in IST</a:t>
             </a:r>
             <a:endParaRPr lang="en-US" sz="3400" dirty="0"/>
           </a:p>
@@ -11419,7 +11508,7 @@
                 <a:ea typeface="Calibri" pitchFamily="34" charset="-122"/>
                 <a:cs typeface="Calibri" pitchFamily="34" charset="-120"/>
               </a:rPr>
-              <a:t>Efficiency compares each asset’s man hours against Time Spent, by user, asset, project or scope of work.</a:t>
+              <a:t>The working window is printed above the week — 09:30 to 19:00 IST, lunch 13:00 to 14:00, 8 hours a day.</a:t>
             </a:r>
             <a:endParaRPr lang="en-US" sz="1400" dirty="0"/>
           </a:p>
@@ -11443,7 +11532,7 @@
                 <a:ea typeface="Calibri" pitchFamily="34" charset="-122"/>
                 <a:cs typeface="Calibri" pitchFamily="34" charset="-120"/>
               </a:rPr>
-              <a:t>It says how many assets had time held back, and Idle counts that same held time as idle — the two reports are meant to disagree there.</a:t>
+              <a:t>Lines outside the day are refused; the lunch hour is taken out of any line that crosses it.</a:t>
             </a:r>
             <a:endParaRPr lang="en-US" sz="1400" dirty="0"/>
           </a:p>
@@ -11467,7 +11556,7 @@
                 <a:ea typeface="Calibri" pitchFamily="34" charset="-122"/>
                 <a:cs typeface="Calibri" pitchFamily="34" charset="-120"/>
               </a:rPr>
-              <a:t>Idle is working time during which somebody had nothing started.</a:t>
+              <a:t>Submission is daily. A submitted day is with your approver and no longer yours to edit.</a:t>
             </a:r>
             <a:endParaRPr lang="en-US" sz="1400" dirty="0"/>
           </a:p>
@@ -11491,7 +11580,7 @@
                 <a:ea typeface="Calibri" pitchFamily="34" charset="-122"/>
                 <a:cs typeface="Calibri" pitchFamily="34" charset="-120"/>
               </a:rPr>
-              <a:t>Idle counts against the configured working hours, so evenings and lunch are not counted as idle.</a:t>
+              <a:t>Approvers see their team’s days, with the count carried on the tab.</a:t>
             </a:r>
             <a:endParaRPr lang="en-US" sz="1400" dirty="0"/>
           </a:p>
@@ -11515,31 +11604,7 @@
                 <a:ea typeface="Calibri" pitchFamily="34" charset="-122"/>
                 <a:cs typeface="Calibri" pitchFamily="34" charset="-120"/>
               </a:rPr>
-              <a:t>Idle Now answers the immediate question: who has nothing open right now.</a:t>
-            </a:r>
-            <a:endParaRPr lang="en-US" sz="1400" dirty="0"/>
-          </a:p>
-          <a:p>
-            <a:pPr marL="342900" indent="-342900">
-              <a:lnSpc>
-                <a:spcPts val="2000"/>
-              </a:lnSpc>
-              <a:spcAft>
-                <a:spcPts val="1000"/>
-              </a:spcAft>
-              <a:buSzPct val="100000"/>
-              <a:buChar char="•"/>
-            </a:pPr>
-            <a:r>
-              <a:rPr lang="en-US" sz="1400" dirty="0">
-                <a:solidFill>
-                  <a:srgbClr val="F4F1F0"/>
-                </a:solidFill>
-                <a:latin typeface="Calibri" pitchFamily="34" charset="0"/>
-                <a:ea typeface="Calibri" pitchFamily="34" charset="-122"/>
-                <a:cs typeface="Calibri" pitchFamily="34" charset="-120"/>
-              </a:rPr>
-              <a:t>Every report exports to Excel and PDF, named after the view you were looking at.</a:t>
+              <a:t>Every rule reads the configured window — change it in Settings and the rules change with it.</a:t>
             </a:r>
             <a:endParaRPr lang="en-US" sz="1400" dirty="0"/>
           </a:p>
@@ -11619,7 +11684,7 @@
                 <a:ea typeface="Calibri" pitchFamily="34" charset="-122"/>
                 <a:cs typeface="Calibri" pitchFamily="34" charset="-120"/>
               </a:rPr>
-              <a:t>Studio leadership — 7 designations, plus anyone given View Reports. Team Lead is a common addition.</a:t>
+              <a:t>Everybody fills in their own. Approving sits with leads and producers — 18 designations.</a:t>
             </a:r>
             <a:endParaRPr lang="en-US" sz="1000" dirty="0"/>
           </a:p>
@@ -11641,8 +11706,8 @@
         </p:blipFill>
         <p:spPr>
           <a:xfrm>
-            <a:off x="5989320" y="1918014"/>
-            <a:ext cx="5632704" cy="3387732"/>
+            <a:off x="5989320" y="2312451"/>
+            <a:ext cx="5632704" cy="2598859"/>
           </a:xfrm>
           <a:prstGeom prst="rect">
             <a:avLst/>
@@ -11664,7 +11729,7 @@
         </p:nvSpPr>
         <p:spPr>
           <a:xfrm>
-            <a:off x="5989320" y="5415474"/>
+            <a:off x="5989320" y="5021037"/>
             <a:ext cx="5632704" cy="457200"/>
           </a:xfrm>
           <a:prstGeom prst="rect">
@@ -11689,7 +11754,7 @@
                 <a:ea typeface="Calibri" pitchFamily="34" charset="-122"/>
                 <a:cs typeface="Calibri" pitchFamily="34" charset="-120"/>
               </a:rPr>
-              <a:t>The Idle report.</a:t>
+              <a:t>A week: Submitted, Approved and Draft days.</a:t>
             </a:r>
             <a:endParaRPr lang="en-US" sz="1000" dirty="0"/>
           </a:p>
@@ -11860,7 +11925,7 @@
                 <a:ea typeface="Calibri" pitchFamily="34" charset="-122"/>
                 <a:cs typeface="Calibri" pitchFamily="34" charset="-120"/>
               </a:rPr>
-              <a:t>PEOPLE</a:t>
+              <a:t>REPORTS</a:t>
             </a:r>
             <a:endParaRPr lang="en-US" sz="1100" dirty="0"/>
           </a:p>
@@ -11899,7 +11964,7 @@
                 <a:ea typeface="Cambria" pitchFamily="34" charset="-122"/>
                 <a:cs typeface="Cambria" pitchFamily="34" charset="-120"/>
               </a:rPr>
-              <a:t>The staff list, and your own team</a:t>
+              <a:t>Estimate against actual, and time with nothing open</a:t>
             </a:r>
             <a:endParaRPr lang="en-US" sz="3400" dirty="0"/>
           </a:p>
@@ -11945,7 +12010,7 @@
                 <a:ea typeface="Calibri" pitchFamily="34" charset="-122"/>
                 <a:cs typeface="Calibri" pitchFamily="34" charset="-120"/>
               </a:rPr>
-              <a:t>Add a person with their name, sign-in email, designation, reporting line and project.</a:t>
+              <a:t>Efficiency compares each asset’s man hours against Time Spent, by user, asset, project or scope of work.</a:t>
             </a:r>
             <a:endParaRPr lang="en-US" sz="1400" dirty="0"/>
           </a:p>
@@ -11969,7 +12034,7 @@
                 <a:ea typeface="Calibri" pitchFamily="34" charset="-122"/>
                 <a:cs typeface="Calibri" pitchFamily="34" charset="-120"/>
               </a:rPr>
-              <a:t>What a designation can do comes from the tier behind it — pick the closest match.</a:t>
+              <a:t>It says how many assets had time held back, and Idle counts that same held time as idle — the two reports are meant to disagree there.</a:t>
             </a:r>
             <a:endParaRPr lang="en-US" sz="1400" dirty="0"/>
           </a:p>
@@ -11993,7 +12058,7 @@
                 <a:ea typeface="Calibri" pitchFamily="34" charset="-122"/>
                 <a:cs typeface="Calibri" pitchFamily="34" charset="-120"/>
               </a:rPr>
-              <a:t>Bulk import takes name, email and role as required columns.</a:t>
+              <a:t>Idle is working time during which somebody had nothing started.</a:t>
             </a:r>
             <a:endParaRPr lang="en-US" sz="1400" dirty="0"/>
           </a:p>
@@ -12017,7 +12082,55 @@
                 <a:ea typeface="Calibri" pitchFamily="34" charset="-122"/>
                 <a:cs typeface="Calibri" pitchFamily="34" charset="-120"/>
               </a:rPr>
-              <a:t>My Team shows the people who report to you, what they are carrying and how far along it is.</a:t>
+              <a:t>Idle counts against the configured working hours, so evenings and lunch are not counted as idle.</a:t>
+            </a:r>
+            <a:endParaRPr lang="en-US" sz="1400" dirty="0"/>
+          </a:p>
+          <a:p>
+            <a:pPr marL="342900" indent="-342900">
+              <a:lnSpc>
+                <a:spcPts val="2000"/>
+              </a:lnSpc>
+              <a:spcAft>
+                <a:spcPts val="1000"/>
+              </a:spcAft>
+              <a:buSzPct val="100000"/>
+              <a:buChar char="•"/>
+            </a:pPr>
+            <a:r>
+              <a:rPr lang="en-US" sz="1400" dirty="0">
+                <a:solidFill>
+                  <a:srgbClr val="F4F1F0"/>
+                </a:solidFill>
+                <a:latin typeface="Calibri" pitchFamily="34" charset="0"/>
+                <a:ea typeface="Calibri" pitchFamily="34" charset="-122"/>
+                <a:cs typeface="Calibri" pitchFamily="34" charset="-120"/>
+              </a:rPr>
+              <a:t>Idle Now answers the immediate question: who has nothing open right now.</a:t>
+            </a:r>
+            <a:endParaRPr lang="en-US" sz="1400" dirty="0"/>
+          </a:p>
+          <a:p>
+            <a:pPr marL="342900" indent="-342900">
+              <a:lnSpc>
+                <a:spcPts val="2000"/>
+              </a:lnSpc>
+              <a:spcAft>
+                <a:spcPts val="1000"/>
+              </a:spcAft>
+              <a:buSzPct val="100000"/>
+              <a:buChar char="•"/>
+            </a:pPr>
+            <a:r>
+              <a:rPr lang="en-US" sz="1400" dirty="0">
+                <a:solidFill>
+                  <a:srgbClr val="F4F1F0"/>
+                </a:solidFill>
+                <a:latin typeface="Calibri" pitchFamily="34" charset="0"/>
+                <a:ea typeface="Calibri" pitchFamily="34" charset="-122"/>
+                <a:cs typeface="Calibri" pitchFamily="34" charset="-120"/>
+              </a:rPr>
+              <a:t>Every report exports to Excel and PDF, named after the view you were looking at.</a:t>
             </a:r>
             <a:endParaRPr lang="en-US" sz="1400" dirty="0"/>
           </a:p>
@@ -12097,7 +12210,7 @@
                 <a:ea typeface="Calibri" pitchFamily="34" charset="-122"/>
                 <a:cs typeface="Calibri" pitchFamily="34" charset="-120"/>
               </a:rPr>
-              <a:t>Administration — 8 designations. My Team is open to anyone who supervises people — 14.</a:t>
+              <a:t>Studio leadership — 7 designations, plus anyone given View Reports. Team Lead is a common addition.</a:t>
             </a:r>
             <a:endParaRPr lang="en-US" sz="1000" dirty="0"/>
           </a:p>
@@ -12119,8 +12232,8 @@
         </p:blipFill>
         <p:spPr>
           <a:xfrm>
-            <a:off x="5989320" y="2869086"/>
-            <a:ext cx="5632704" cy="1485589"/>
+            <a:off x="5989320" y="1918014"/>
+            <a:ext cx="5632704" cy="3387732"/>
           </a:xfrm>
           <a:prstGeom prst="rect">
             <a:avLst/>
@@ -12142,7 +12255,7 @@
         </p:nvSpPr>
         <p:spPr>
           <a:xfrm>
-            <a:off x="5989320" y="4464402"/>
+            <a:off x="5989320" y="5415474"/>
             <a:ext cx="5632704" cy="457200"/>
           </a:xfrm>
           <a:prstGeom prst="rect">
@@ -12167,7 +12280,7 @@
                 <a:ea typeface="Calibri" pitchFamily="34" charset="-122"/>
                 <a:cs typeface="Calibri" pitchFamily="34" charset="-120"/>
               </a:rPr>
-              <a:t>My Team, as a Team Lead.</a:t>
+              <a:t>The Idle report.</a:t>
             </a:r>
             <a:endParaRPr lang="en-US" sz="1000" dirty="0"/>
           </a:p>
@@ -12338,7 +12451,7 @@
                 <a:ea typeface="Calibri" pitchFamily="34" charset="-122"/>
                 <a:cs typeface="Calibri" pitchFamily="34" charset="-120"/>
               </a:rPr>
-              <a:t>YOU</a:t>
+              <a:t>PEOPLE</a:t>
             </a:r>
             <a:endParaRPr lang="en-US" sz="1100" dirty="0"/>
           </a:p>
@@ -12377,7 +12490,7 @@
                 <a:ea typeface="Cambria" pitchFamily="34" charset="-122"/>
                 <a:cs typeface="Cambria" pitchFamily="34" charset="-120"/>
               </a:rPr>
-              <a:t>Notifications, your photo, your password</a:t>
+              <a:t>The staff list, and your own team</a:t>
             </a:r>
             <a:endParaRPr lang="en-US" sz="3400" dirty="0"/>
           </a:p>
@@ -12423,7 +12536,7 @@
                 <a:ea typeface="Calibri" pitchFamily="34" charset="-122"/>
                 <a:cs typeface="Calibri" pitchFamily="34" charset="-120"/>
               </a:rPr>
-              <a:t>The bell carries unread notifications: work assigned to you, reviews coming back, feedback landing, time sheets waiting.</a:t>
+              <a:t>Add a person with their name, sign-in email, designation, reporting line and project.</a:t>
             </a:r>
             <a:endParaRPr lang="en-US" sz="1400" dirty="0"/>
           </a:p>
@@ -12447,7 +12560,7 @@
                 <a:ea typeface="Calibri" pitchFamily="34" charset="-122"/>
                 <a:cs typeface="Calibri" pitchFamily="34" charset="-120"/>
               </a:rPr>
-              <a:t>Profile holds your photo, which then appears everywhere you are represented.</a:t>
+              <a:t>What a designation can do comes from the tier behind it — pick the closest match.</a:t>
             </a:r>
             <a:endParaRPr lang="en-US" sz="1400" dirty="0"/>
           </a:p>
@@ -12471,7 +12584,7 @@
                 <a:ea typeface="Calibri" pitchFamily="34" charset="-122"/>
                 <a:cs typeface="Calibri" pitchFamily="34" charset="-120"/>
               </a:rPr>
-              <a:t>Profile also holds your password.</a:t>
+              <a:t>Bulk import takes name, email and role as required columns.</a:t>
             </a:r>
             <a:endParaRPr lang="en-US" sz="1400" dirty="0"/>
           </a:p>
@@ -12495,7 +12608,7 @@
                 <a:ea typeface="Calibri" pitchFamily="34" charset="-122"/>
                 <a:cs typeface="Calibri" pitchFamily="34" charset="-120"/>
               </a:rPr>
-              <a:t>Changing your password signs out every other session — deliberately, since a password is changed because it may be known.</a:t>
+              <a:t>My Team shows the people who report to you, what they are carrying and how far along it is.</a:t>
             </a:r>
             <a:endParaRPr lang="en-US" sz="1400" dirty="0"/>
           </a:p>
@@ -12575,7 +12688,7 @@
                 <a:ea typeface="Calibri" pitchFamily="34" charset="-122"/>
                 <a:cs typeface="Calibri" pitchFamily="34" charset="-120"/>
               </a:rPr>
-              <a:t>Everybody, for themselves.</a:t>
+              <a:t>Administration — 8 designations. My Team is open to anyone who supervises people — 14.</a:t>
             </a:r>
             <a:endParaRPr lang="en-US" sz="1000" dirty="0"/>
           </a:p>
@@ -12597,8 +12710,8 @@
         </p:blipFill>
         <p:spPr>
           <a:xfrm>
-            <a:off x="5989320" y="2023074"/>
-            <a:ext cx="5632704" cy="3177612"/>
+            <a:off x="5989320" y="2869086"/>
+            <a:ext cx="5632704" cy="1485589"/>
           </a:xfrm>
           <a:prstGeom prst="rect">
             <a:avLst/>
@@ -12620,7 +12733,7 @@
         </p:nvSpPr>
         <p:spPr>
           <a:xfrm>
-            <a:off x="5989320" y="5310414"/>
+            <a:off x="5989320" y="4464402"/>
             <a:ext cx="5632704" cy="457200"/>
           </a:xfrm>
           <a:prstGeom prst="rect">
@@ -12645,7 +12758,7 @@
                 <a:ea typeface="Calibri" pitchFamily="34" charset="-122"/>
                 <a:cs typeface="Calibri" pitchFamily="34" charset="-120"/>
               </a:rPr>
-              <a:t>The Profile panel.</a:t>
+              <a:t>My Team, as a Team Lead.</a:t>
             </a:r>
             <a:endParaRPr lang="en-US" sz="1000" dirty="0"/>
           </a:p>
@@ -12816,7 +12929,7 @@
                 <a:ea typeface="Calibri" pitchFamily="34" charset="-122"/>
                 <a:cs typeface="Calibri" pitchFamily="34" charset="-120"/>
               </a:rPr>
-              <a:t>SETTINGS</a:t>
+              <a:t>YOU</a:t>
             </a:r>
             <a:endParaRPr lang="en-US" sz="1100" dirty="0"/>
           </a:p>
@@ -12855,7 +12968,7 @@
                 <a:ea typeface="Cambria" pitchFamily="34" charset="-122"/>
                 <a:cs typeface="Cambria" pitchFamily="34" charset="-120"/>
               </a:rPr>
-              <a:t>Not one screen, but the ones you hold</a:t>
+              <a:t>Notifications, your photo, your password</a:t>
             </a:r>
             <a:endParaRPr lang="en-US" sz="3400" dirty="0"/>
           </a:p>
@@ -12901,7 +13014,7 @@
                 <a:ea typeface="Calibri" pitchFamily="34" charset="-122"/>
                 <a:cs typeface="Calibri" pitchFamily="34" charset="-120"/>
               </a:rPr>
-              <a:t>Working hours and lunch — the window the Time Sheet and the Idle report both read.</a:t>
+              <a:t>The bell carries unread notifications: work assigned to you, reviews coming back, feedback landing, time sheets waiting.</a:t>
             </a:r>
             <a:endParaRPr lang="en-US" sz="1400" dirty="0"/>
           </a:p>
@@ -12925,7 +13038,7 @@
                 <a:ea typeface="Calibri" pitchFamily="34" charset="-122"/>
                 <a:cs typeface="Calibri" pitchFamily="34" charset="-120"/>
               </a:rPr>
-              <a:t>Branding — the studio name and the colour used across the application.</a:t>
+              <a:t>Profile holds your photo, which then appears everywhere you are represented.</a:t>
             </a:r>
             <a:endParaRPr lang="en-US" sz="1400" dirty="0"/>
           </a:p>
@@ -12949,7 +13062,7 @@
                 <a:ea typeface="Calibri" pitchFamily="34" charset="-122"/>
                 <a:cs typeface="Calibri" pitchFamily="34" charset="-120"/>
               </a:rPr>
-              <a:t>Four value lists: Scope of Work, Priorities, Categories and Roles.</a:t>
+              <a:t>Profile also holds your password.</a:t>
             </a:r>
             <a:endParaRPr lang="en-US" sz="1400" dirty="0"/>
           </a:p>
@@ -12973,31 +13086,7 @@
                 <a:ea typeface="Calibri" pitchFamily="34" charset="-122"/>
                 <a:cs typeface="Calibri" pitchFamily="34" charset="-120"/>
               </a:rPr>
-              <a:t>Renaming a value is safe; a value in use cannot be deleted, only deactivated.</a:t>
-            </a:r>
-            <a:endParaRPr lang="en-US" sz="1400" dirty="0"/>
-          </a:p>
-          <a:p>
-            <a:pPr marL="342900" indent="-342900">
-              <a:lnSpc>
-                <a:spcPts val="2000"/>
-              </a:lnSpc>
-              <a:spcAft>
-                <a:spcPts val="1000"/>
-              </a:spcAft>
-              <a:buSzPct val="100000"/>
-              <a:buChar char="•"/>
-            </a:pPr>
-            <a:r>
-              <a:rPr lang="en-US" sz="1400" dirty="0">
-                <a:solidFill>
-                  <a:srgbClr val="F4F1F0"/>
-                </a:solidFill>
-                <a:latin typeface="Calibri" pitchFamily="34" charset="0"/>
-                <a:ea typeface="Calibri" pitchFamily="34" charset="-122"/>
-                <a:cs typeface="Calibri" pitchFamily="34" charset="-120"/>
-              </a:rPr>
-              <a:t>A person given one Settings permission gets this page with exactly that one section on it.</a:t>
+              <a:t>Changing your password signs out every other session — deliberately, since a password is changed because it may be known.</a:t>
             </a:r>
             <a:endParaRPr lang="en-US" sz="1400" dirty="0"/>
           </a:p>
@@ -13077,7 +13166,7 @@
                 <a:ea typeface="Calibri" pitchFamily="34" charset="-122"/>
                 <a:cs typeface="Calibri" pitchFamily="34" charset="-120"/>
               </a:rPr>
-              <a:t>Studio leadership — 7 designations, one permission per section.</a:t>
+              <a:t>Everybody, for themselves.</a:t>
             </a:r>
             <a:endParaRPr lang="en-US" sz="1000" dirty="0"/>
           </a:p>
@@ -13099,8 +13188,8 @@
         </p:blipFill>
         <p:spPr>
           <a:xfrm>
-            <a:off x="5989320" y="2786972"/>
-            <a:ext cx="5632704" cy="1649816"/>
+            <a:off x="5989320" y="2023074"/>
+            <a:ext cx="5632704" cy="3177612"/>
           </a:xfrm>
           <a:prstGeom prst="rect">
             <a:avLst/>
@@ -13122,7 +13211,7 @@
         </p:nvSpPr>
         <p:spPr>
           <a:xfrm>
-            <a:off x="5989320" y="4546516"/>
+            <a:off x="5989320" y="5310414"/>
             <a:ext cx="5632704" cy="457200"/>
           </a:xfrm>
           <a:prstGeom prst="rect">
@@ -13147,7 +13236,7 @@
                 <a:ea typeface="Calibri" pitchFamily="34" charset="-122"/>
                 <a:cs typeface="Calibri" pitchFamily="34" charset="-120"/>
               </a:rPr>
-              <a:t>The working-hours control.</a:t>
+              <a:t>The Profile panel.</a:t>
             </a:r>
             <a:endParaRPr lang="en-US" sz="1000" dirty="0"/>
           </a:p>
@@ -13318,7 +13407,7 @@
                 <a:ea typeface="Calibri" pitchFamily="34" charset="-122"/>
                 <a:cs typeface="Calibri" pitchFamily="34" charset="-120"/>
               </a:rPr>
-              <a:t>PERMISSIONS</a:t>
+              <a:t>SETTINGS</a:t>
             </a:r>
             <a:endParaRPr lang="en-US" sz="1100" dirty="0"/>
           </a:p>
@@ -13357,7 +13446,7 @@
                 <a:ea typeface="Cambria" pitchFamily="34" charset="-122"/>
                 <a:cs typeface="Cambria" pitchFamily="34" charset="-120"/>
               </a:rPr>
-              <a:t>Twelve access bands, not sixty role lists</a:t>
+              <a:t>Not one screen, but the ones you hold</a:t>
             </a:r>
             <a:endParaRPr lang="en-US" sz="3400" dirty="0"/>
           </a:p>
@@ -13371,32 +13460,135 @@
         </p:nvSpPr>
         <p:spPr>
           <a:xfrm>
-            <a:off x="566928" y="1554480"/>
-            <a:ext cx="6035040" cy="457200"/>
-          </a:xfrm>
-          <a:prstGeom prst="rect">
-            <a:avLst/>
-          </a:prstGeom>
-          <a:noFill/>
-          <a:ln/>
-        </p:spPr>
-        <p:txBody>
-          <a:bodyPr wrap="square" lIns="0" tIns="0" rIns="0" bIns="0" rtlCol="0" anchor="ctr"/>
-          <a:lstStyle/>
-          <a:p>
-            <a:pPr indent="0" marL="0">
-              <a:buNone/>
+            <a:off x="566928" y="1828800"/>
+            <a:ext cx="4937760" cy="3200400"/>
+          </a:xfrm>
+          <a:prstGeom prst="rect">
+            <a:avLst/>
+          </a:prstGeom>
+          <a:noFill/>
+          <a:ln/>
+        </p:spPr>
+        <p:txBody>
+          <a:bodyPr wrap="square" rtlCol="0" anchor="ctr"/>
+          <a:lstStyle/>
+          <a:p>
+            <a:pPr marL="342900" indent="-342900">
+              <a:lnSpc>
+                <a:spcPts val="2000"/>
+              </a:lnSpc>
+              <a:spcAft>
+                <a:spcPts val="1000"/>
+              </a:spcAft>
+              <a:buSzPct val="100000"/>
+              <a:buChar char="•"/>
             </a:pPr>
             <a:r>
               <a:rPr lang="en-US" sz="1400" dirty="0">
                 <a:solidFill>
-                  <a:srgbClr val="A9A09E"/>
-                </a:solidFill>
-                <a:latin typeface="Calibri" pitchFamily="34" charset="0"/>
-                <a:ea typeface="Calibri" pitchFamily="34" charset="-122"/>
-                <a:cs typeface="Calibri" pitchFamily="34" charset="-120"/>
-              </a:rPr>
-              <a:t>59 permissions across 60 designations, in only twelve distinct groups of holders.</a:t>
+                  <a:srgbClr val="F4F1F0"/>
+                </a:solidFill>
+                <a:latin typeface="Calibri" pitchFamily="34" charset="0"/>
+                <a:ea typeface="Calibri" pitchFamily="34" charset="-122"/>
+                <a:cs typeface="Calibri" pitchFamily="34" charset="-120"/>
+              </a:rPr>
+              <a:t>Working hours and lunch — the window the Time Sheet and the Idle report both read.</a:t>
+            </a:r>
+            <a:endParaRPr lang="en-US" sz="1400" dirty="0"/>
+          </a:p>
+          <a:p>
+            <a:pPr marL="342900" indent="-342900">
+              <a:lnSpc>
+                <a:spcPts val="2000"/>
+              </a:lnSpc>
+              <a:spcAft>
+                <a:spcPts val="1000"/>
+              </a:spcAft>
+              <a:buSzPct val="100000"/>
+              <a:buChar char="•"/>
+            </a:pPr>
+            <a:r>
+              <a:rPr lang="en-US" sz="1400" dirty="0">
+                <a:solidFill>
+                  <a:srgbClr val="F4F1F0"/>
+                </a:solidFill>
+                <a:latin typeface="Calibri" pitchFamily="34" charset="0"/>
+                <a:ea typeface="Calibri" pitchFamily="34" charset="-122"/>
+                <a:cs typeface="Calibri" pitchFamily="34" charset="-120"/>
+              </a:rPr>
+              <a:t>Branding — the studio name and the colour used across the application.</a:t>
+            </a:r>
+            <a:endParaRPr lang="en-US" sz="1400" dirty="0"/>
+          </a:p>
+          <a:p>
+            <a:pPr marL="342900" indent="-342900">
+              <a:lnSpc>
+                <a:spcPts val="2000"/>
+              </a:lnSpc>
+              <a:spcAft>
+                <a:spcPts val="1000"/>
+              </a:spcAft>
+              <a:buSzPct val="100000"/>
+              <a:buChar char="•"/>
+            </a:pPr>
+            <a:r>
+              <a:rPr lang="en-US" sz="1400" dirty="0">
+                <a:solidFill>
+                  <a:srgbClr val="F4F1F0"/>
+                </a:solidFill>
+                <a:latin typeface="Calibri" pitchFamily="34" charset="0"/>
+                <a:ea typeface="Calibri" pitchFamily="34" charset="-122"/>
+                <a:cs typeface="Calibri" pitchFamily="34" charset="-120"/>
+              </a:rPr>
+              <a:t>Four value lists: Scope of Work, Priorities, Categories and Roles.</a:t>
+            </a:r>
+            <a:endParaRPr lang="en-US" sz="1400" dirty="0"/>
+          </a:p>
+          <a:p>
+            <a:pPr marL="342900" indent="-342900">
+              <a:lnSpc>
+                <a:spcPts val="2000"/>
+              </a:lnSpc>
+              <a:spcAft>
+                <a:spcPts val="1000"/>
+              </a:spcAft>
+              <a:buSzPct val="100000"/>
+              <a:buChar char="•"/>
+            </a:pPr>
+            <a:r>
+              <a:rPr lang="en-US" sz="1400" dirty="0">
+                <a:solidFill>
+                  <a:srgbClr val="F4F1F0"/>
+                </a:solidFill>
+                <a:latin typeface="Calibri" pitchFamily="34" charset="0"/>
+                <a:ea typeface="Calibri" pitchFamily="34" charset="-122"/>
+                <a:cs typeface="Calibri" pitchFamily="34" charset="-120"/>
+              </a:rPr>
+              <a:t>Renaming a value is safe; a value in use cannot be deleted, only deactivated.</a:t>
+            </a:r>
+            <a:endParaRPr lang="en-US" sz="1400" dirty="0"/>
+          </a:p>
+          <a:p>
+            <a:pPr marL="342900" indent="-342900">
+              <a:lnSpc>
+                <a:spcPts val="2000"/>
+              </a:lnSpc>
+              <a:spcAft>
+                <a:spcPts val="1000"/>
+              </a:spcAft>
+              <a:buSzPct val="100000"/>
+              <a:buChar char="•"/>
+            </a:pPr>
+            <a:r>
+              <a:rPr lang="en-US" sz="1400" dirty="0">
+                <a:solidFill>
+                  <a:srgbClr val="F4F1F0"/>
+                </a:solidFill>
+                <a:latin typeface="Calibri" pitchFamily="34" charset="0"/>
+                <a:ea typeface="Calibri" pitchFamily="34" charset="-122"/>
+                <a:cs typeface="Calibri" pitchFamily="34" charset="-120"/>
+              </a:rPr>
+              <a:t>A person given one Settings permission gets this page with exactly that one section on it.</a:t>
             </a:r>
             <a:endParaRPr lang="en-US" sz="1400" dirty="0"/>
           </a:p>
@@ -13410,8 +13602,8 @@
         </p:nvSpPr>
         <p:spPr>
           <a:xfrm>
-            <a:off x="566928" y="2286000"/>
-            <a:ext cx="3493008" cy="777240"/>
+            <a:off x="566928" y="5532120"/>
+            <a:ext cx="4937760" cy="777240"/>
           </a:xfrm>
           <a:prstGeom prst="roundRect">
             <a:avLst>
@@ -13437,24 +13629,38 @@
         </p:nvSpPr>
         <p:spPr>
           <a:xfrm>
-            <a:off x="731520" y="2340864"/>
-            <a:ext cx="2560320" cy="384048"/>
-          </a:xfrm>
-          <a:prstGeom prst="rect">
-            <a:avLst/>
-          </a:prstGeom>
-          <a:noFill/>
-          <a:ln/>
-        </p:spPr>
-        <p:txBody>
-          <a:bodyPr wrap="square" lIns="0" tIns="0" rIns="0" bIns="0" rtlCol="0" anchor="t"/>
+            <a:off x="749808" y="5532120"/>
+            <a:ext cx="4572000" cy="777240"/>
+          </a:xfrm>
+          <a:prstGeom prst="rect">
+            <a:avLst/>
+          </a:prstGeom>
+          <a:noFill/>
+          <a:ln/>
+        </p:spPr>
+        <p:txBody>
+          <a:bodyPr wrap="square" lIns="0" tIns="0" rIns="0" bIns="0" rtlCol="0" anchor="ctr"/>
           <a:lstStyle/>
           <a:p>
             <a:pPr indent="0" marL="0">
               <a:buNone/>
             </a:pPr>
             <a:r>
-              <a:rPr lang="en-US" sz="1200" b="1" dirty="0">
+              <a:rPr lang="en-US" sz="1000" b="1" spc="200" kern="0" dirty="0">
+                <a:solidFill>
+                  <a:srgbClr val="B8323A"/>
+                </a:solidFill>
+                <a:latin typeface="Calibri" pitchFamily="34" charset="0"/>
+                <a:ea typeface="Calibri" pitchFamily="34" charset="-122"/>
+                <a:cs typeface="Calibri" pitchFamily="34" charset="-120"/>
+              </a:rPr>
+              <a:t>WHO  </a:t>
+            </a:r>
+            <a:pPr indent="0" marL="0">
+              <a:buNone/>
+            </a:pPr>
+            <a:r>
+              <a:rPr lang="en-US" sz="1200" dirty="0">
                 <a:solidFill>
                   <a:srgbClr val="F4F1F0"/>
                 </a:solidFill>
@@ -13462,38 +13668,69 @@
                 <a:ea typeface="Calibri" pitchFamily="34" charset="-122"/>
                 <a:cs typeface="Calibri" pitchFamily="34" charset="-120"/>
               </a:rPr>
-              <a:t>Everyone</a:t>
-            </a:r>
-            <a:endParaRPr lang="en-US" sz="1200" dirty="0"/>
-          </a:p>
-        </p:txBody>
-      </p:sp>
-      <p:sp>
-        <p:nvSpPr>
-          <p:cNvPr id="10" name="Text 8"/>
-          <p:cNvSpPr txBox="1"/>
-          <p:nvPr/>
-        </p:nvSpPr>
-        <p:spPr>
-          <a:xfrm>
-            <a:off x="731520" y="2697480"/>
-            <a:ext cx="2743200" cy="292608"/>
-          </a:xfrm>
-          <a:prstGeom prst="rect">
-            <a:avLst/>
-          </a:prstGeom>
-          <a:noFill/>
-          <a:ln/>
-        </p:spPr>
-        <p:txBody>
-          <a:bodyPr wrap="square" lIns="0" tIns="0" rIns="0" bIns="0" rtlCol="0" anchor="ctr"/>
-          <a:lstStyle/>
-          <a:p>
-            <a:pPr indent="0" marL="0">
-              <a:buNone/>
-            </a:pPr>
-            <a:r>
-              <a:rPr lang="en-US" sz="1100" dirty="0">
+              <a:t>Studio leadership — 7 designations, one permission per section.</a:t>
+            </a:r>
+            <a:endParaRPr lang="en-US" sz="1000" dirty="0"/>
+          </a:p>
+        </p:txBody>
+      </p:sp>
+      <p:pic>
+        <p:nvPicPr>
+          <p:cNvPr id="10" name="Image 0" descr="preencoded.png">    </p:cNvPr>
+          <p:cNvPicPr>
+            <a:picLocks noChangeAspect="1"/>
+          </p:cNvPicPr>
+          <p:nvPr/>
+        </p:nvPicPr>
+        <p:blipFill>
+          <a:blip r:embed="rId1"/>
+          <a:stretch>
+            <a:fillRect/>
+          </a:stretch>
+        </p:blipFill>
+        <p:spPr>
+          <a:xfrm>
+            <a:off x="5989320" y="2786972"/>
+            <a:ext cx="5632704" cy="1649816"/>
+          </a:xfrm>
+          <a:prstGeom prst="rect">
+            <a:avLst/>
+          </a:prstGeom>
+          <a:effectLst>
+            <a:outerShdw sx="100000" sy="100000" kx="0" ky="0" algn="bl" rotWithShape="0" blurRad="177800" dist="50800" dir="5400000">
+              <a:srgbClr val="000000">
+                <a:alpha val="55000"/>
+              </a:srgbClr>
+            </a:outerShdw>
+          </a:effectLst>
+        </p:spPr>
+      </p:pic>
+      <p:sp>
+        <p:nvSpPr>
+          <p:cNvPr id="11" name="Text 8"/>
+          <p:cNvSpPr txBox="1"/>
+          <p:nvPr/>
+        </p:nvSpPr>
+        <p:spPr>
+          <a:xfrm>
+            <a:off x="5989320" y="4546516"/>
+            <a:ext cx="5632704" cy="457200"/>
+          </a:xfrm>
+          <a:prstGeom prst="rect">
+            <a:avLst/>
+          </a:prstGeom>
+          <a:noFill/>
+          <a:ln/>
+        </p:spPr>
+        <p:txBody>
+          <a:bodyPr wrap="square" lIns="0" tIns="0" rIns="0" bIns="0" rtlCol="0" anchor="ctr"/>
+          <a:lstStyle/>
+          <a:p>
+            <a:pPr algn="ctr" indent="0" marL="0">
+              <a:buNone/>
+            </a:pPr>
+            <a:r>
+              <a:rPr lang="en-US" sz="1000" i="1" dirty="0">
                 <a:solidFill>
                   <a:srgbClr val="A9A09E"/>
                 </a:solidFill>
@@ -13501,1671 +13738,9 @@
                 <a:ea typeface="Calibri" pitchFamily="34" charset="-122"/>
                 <a:cs typeface="Calibri" pitchFamily="34" charset="-120"/>
               </a:rPr>
-              <a:t>3 permissions</a:t>
-            </a:r>
-            <a:endParaRPr lang="en-US" sz="1100" dirty="0"/>
-          </a:p>
-        </p:txBody>
-      </p:sp>
-      <p:sp>
-        <p:nvSpPr>
-          <p:cNvPr id="11" name="Text 9"/>
-          <p:cNvSpPr txBox="1"/>
-          <p:nvPr/>
-        </p:nvSpPr>
-        <p:spPr>
-          <a:xfrm>
-            <a:off x="3328416" y="2377440"/>
-            <a:ext cx="566928" cy="594360"/>
-          </a:xfrm>
-          <a:prstGeom prst="rect">
-            <a:avLst/>
-          </a:prstGeom>
-          <a:noFill/>
-          <a:ln/>
-        </p:spPr>
-        <p:txBody>
-          <a:bodyPr wrap="square" lIns="0" tIns="0" rIns="0" bIns="0" rtlCol="0" anchor="ctr"/>
-          <a:lstStyle/>
-          <a:p>
-            <a:pPr algn="r" indent="0" marL="0">
-              <a:buNone/>
-            </a:pPr>
-            <a:r>
-              <a:rPr lang="en-US" sz="2000" b="1" dirty="0">
-                <a:solidFill>
-                  <a:srgbClr val="B8323A"/>
-                </a:solidFill>
-                <a:latin typeface="Cambria" pitchFamily="34" charset="0"/>
-                <a:ea typeface="Cambria" pitchFamily="34" charset="-122"/>
-                <a:cs typeface="Cambria" pitchFamily="34" charset="-120"/>
-              </a:rPr>
-              <a:t>60</a:t>
-            </a:r>
-            <a:endParaRPr lang="en-US" sz="2000" dirty="0"/>
-          </a:p>
-        </p:txBody>
-      </p:sp>
-      <p:sp>
-        <p:nvSpPr>
-          <p:cNvPr id="12" name="Shape 10"/>
-          <p:cNvSpPr/>
-          <p:nvPr/>
-        </p:nvSpPr>
-        <p:spPr>
-          <a:xfrm>
-            <a:off x="4279392" y="2286000"/>
-            <a:ext cx="3493008" cy="777240"/>
-          </a:xfrm>
-          <a:prstGeom prst="roundRect">
-            <a:avLst>
-              <a:gd name="adj" fmla="val 7059"/>
-            </a:avLst>
-          </a:prstGeom>
-          <a:solidFill>
-            <a:srgbClr val="1E1A19"/>
-          </a:solidFill>
-          <a:ln w="12700">
-            <a:solidFill>
-              <a:srgbClr val="2C2524"/>
-            </a:solidFill>
-            <a:prstDash val="solid"/>
-          </a:ln>
-        </p:spPr>
-      </p:sp>
-      <p:sp>
-        <p:nvSpPr>
-          <p:cNvPr id="13" name="Text 11"/>
-          <p:cNvSpPr txBox="1"/>
-          <p:nvPr/>
-        </p:nvSpPr>
-        <p:spPr>
-          <a:xfrm>
-            <a:off x="4443984" y="2340864"/>
-            <a:ext cx="2560320" cy="384048"/>
-          </a:xfrm>
-          <a:prstGeom prst="rect">
-            <a:avLst/>
-          </a:prstGeom>
-          <a:noFill/>
-          <a:ln/>
-        </p:spPr>
-        <p:txBody>
-          <a:bodyPr wrap="square" lIns="0" tIns="0" rIns="0" bIns="0" rtlCol="0" anchor="t"/>
-          <a:lstStyle/>
-          <a:p>
-            <a:pPr indent="0" marL="0">
-              <a:buNone/>
-            </a:pPr>
-            <a:r>
-              <a:rPr lang="en-US" sz="1200" b="1" dirty="0">
-                <a:solidFill>
-                  <a:srgbClr val="F4F1F0"/>
-                </a:solidFill>
-                <a:latin typeface="Calibri" pitchFamily="34" charset="0"/>
-                <a:ea typeface="Calibri" pitchFamily="34" charset="-122"/>
-                <a:cs typeface="Calibri" pitchFamily="34" charset="-120"/>
-              </a:rPr>
-              <a:t>Everyone who works on assets</a:t>
-            </a:r>
-            <a:endParaRPr lang="en-US" sz="1200" dirty="0"/>
-          </a:p>
-        </p:txBody>
-      </p:sp>
-      <p:sp>
-        <p:nvSpPr>
-          <p:cNvPr id="14" name="Text 12"/>
-          <p:cNvSpPr txBox="1"/>
-          <p:nvPr/>
-        </p:nvSpPr>
-        <p:spPr>
-          <a:xfrm>
-            <a:off x="4443984" y="2697480"/>
-            <a:ext cx="2743200" cy="292608"/>
-          </a:xfrm>
-          <a:prstGeom prst="rect">
-            <a:avLst/>
-          </a:prstGeom>
-          <a:noFill/>
-          <a:ln/>
-        </p:spPr>
-        <p:txBody>
-          <a:bodyPr wrap="square" lIns="0" tIns="0" rIns="0" bIns="0" rtlCol="0" anchor="ctr"/>
-          <a:lstStyle/>
-          <a:p>
-            <a:pPr indent="0" marL="0">
-              <a:buNone/>
-            </a:pPr>
-            <a:r>
-              <a:rPr lang="en-US" sz="1100" dirty="0">
-                <a:solidFill>
-                  <a:srgbClr val="A9A09E"/>
-                </a:solidFill>
-                <a:latin typeface="Calibri" pitchFamily="34" charset="0"/>
-                <a:ea typeface="Calibri" pitchFamily="34" charset="-122"/>
-                <a:cs typeface="Calibri" pitchFamily="34" charset="-120"/>
-              </a:rPr>
-              <a:t>2 permissions</a:t>
-            </a:r>
-            <a:endParaRPr lang="en-US" sz="1100" dirty="0"/>
-          </a:p>
-        </p:txBody>
-      </p:sp>
-      <p:sp>
-        <p:nvSpPr>
-          <p:cNvPr id="15" name="Text 13"/>
-          <p:cNvSpPr txBox="1"/>
-          <p:nvPr/>
-        </p:nvSpPr>
-        <p:spPr>
-          <a:xfrm>
-            <a:off x="7040880" y="2377440"/>
-            <a:ext cx="566928" cy="594360"/>
-          </a:xfrm>
-          <a:prstGeom prst="rect">
-            <a:avLst/>
-          </a:prstGeom>
-          <a:noFill/>
-          <a:ln/>
-        </p:spPr>
-        <p:txBody>
-          <a:bodyPr wrap="square" lIns="0" tIns="0" rIns="0" bIns="0" rtlCol="0" anchor="ctr"/>
-          <a:lstStyle/>
-          <a:p>
-            <a:pPr algn="r" indent="0" marL="0">
-              <a:buNone/>
-            </a:pPr>
-            <a:r>
-              <a:rPr lang="en-US" sz="2000" b="1" dirty="0">
-                <a:solidFill>
-                  <a:srgbClr val="B8323A"/>
-                </a:solidFill>
-                <a:latin typeface="Cambria" pitchFamily="34" charset="0"/>
-                <a:ea typeface="Cambria" pitchFamily="34" charset="-122"/>
-                <a:cs typeface="Cambria" pitchFamily="34" charset="-120"/>
-              </a:rPr>
-              <a:t>51</a:t>
-            </a:r>
-            <a:endParaRPr lang="en-US" sz="2000" dirty="0"/>
-          </a:p>
-        </p:txBody>
-      </p:sp>
-      <p:sp>
-        <p:nvSpPr>
-          <p:cNvPr id="16" name="Shape 14"/>
-          <p:cNvSpPr/>
-          <p:nvPr/>
-        </p:nvSpPr>
-        <p:spPr>
-          <a:xfrm>
-            <a:off x="7991856" y="2286000"/>
-            <a:ext cx="3493008" cy="777240"/>
-          </a:xfrm>
-          <a:prstGeom prst="roundRect">
-            <a:avLst>
-              <a:gd name="adj" fmla="val 7059"/>
-            </a:avLst>
-          </a:prstGeom>
-          <a:solidFill>
-            <a:srgbClr val="1E1A19"/>
-          </a:solidFill>
-          <a:ln w="12700">
-            <a:solidFill>
-              <a:srgbClr val="2C2524"/>
-            </a:solidFill>
-            <a:prstDash val="solid"/>
-          </a:ln>
-        </p:spPr>
-      </p:sp>
-      <p:sp>
-        <p:nvSpPr>
-          <p:cNvPr id="17" name="Text 15"/>
-          <p:cNvSpPr txBox="1"/>
-          <p:nvPr/>
-        </p:nvSpPr>
-        <p:spPr>
-          <a:xfrm>
-            <a:off x="8156448" y="2340864"/>
-            <a:ext cx="2560320" cy="384048"/>
-          </a:xfrm>
-          <a:prstGeom prst="rect">
-            <a:avLst/>
-          </a:prstGeom>
-          <a:noFill/>
-          <a:ln/>
-        </p:spPr>
-        <p:txBody>
-          <a:bodyPr wrap="square" lIns="0" tIns="0" rIns="0" bIns="0" rtlCol="0" anchor="t"/>
-          <a:lstStyle/>
-          <a:p>
-            <a:pPr indent="0" marL="0">
-              <a:buNone/>
-            </a:pPr>
-            <a:r>
-              <a:rPr lang="en-US" sz="1200" b="1" dirty="0">
-                <a:solidFill>
-                  <a:srgbClr val="F4F1F0"/>
-                </a:solidFill>
-                <a:latin typeface="Calibri" pitchFamily="34" charset="0"/>
-                <a:ea typeface="Calibri" pitchFamily="34" charset="-122"/>
-                <a:cs typeface="Calibri" pitchFamily="34" charset="-120"/>
-              </a:rPr>
-              <a:t>Production planning</a:t>
-            </a:r>
-            <a:endParaRPr lang="en-US" sz="1200" dirty="0"/>
-          </a:p>
-        </p:txBody>
-      </p:sp>
-      <p:sp>
-        <p:nvSpPr>
-          <p:cNvPr id="18" name="Text 16"/>
-          <p:cNvSpPr txBox="1"/>
-          <p:nvPr/>
-        </p:nvSpPr>
-        <p:spPr>
-          <a:xfrm>
-            <a:off x="8156448" y="2697480"/>
-            <a:ext cx="2743200" cy="292608"/>
-          </a:xfrm>
-          <a:prstGeom prst="rect">
-            <a:avLst/>
-          </a:prstGeom>
-          <a:noFill/>
-          <a:ln/>
-        </p:spPr>
-        <p:txBody>
-          <a:bodyPr wrap="square" lIns="0" tIns="0" rIns="0" bIns="0" rtlCol="0" anchor="ctr"/>
-          <a:lstStyle/>
-          <a:p>
-            <a:pPr indent="0" marL="0">
-              <a:buNone/>
-            </a:pPr>
-            <a:r>
-              <a:rPr lang="en-US" sz="1100" dirty="0">
-                <a:solidFill>
-                  <a:srgbClr val="A9A09E"/>
-                </a:solidFill>
-                <a:latin typeface="Calibri" pitchFamily="34" charset="0"/>
-                <a:ea typeface="Calibri" pitchFamily="34" charset="-122"/>
-                <a:cs typeface="Calibri" pitchFamily="34" charset="-120"/>
-              </a:rPr>
-              <a:t>2 permissions</a:t>
-            </a:r>
-            <a:endParaRPr lang="en-US" sz="1100" dirty="0"/>
-          </a:p>
-        </p:txBody>
-      </p:sp>
-      <p:sp>
-        <p:nvSpPr>
-          <p:cNvPr id="19" name="Text 17"/>
-          <p:cNvSpPr txBox="1"/>
-          <p:nvPr/>
-        </p:nvSpPr>
-        <p:spPr>
-          <a:xfrm>
-            <a:off x="10753344" y="2377440"/>
-            <a:ext cx="566928" cy="594360"/>
-          </a:xfrm>
-          <a:prstGeom prst="rect">
-            <a:avLst/>
-          </a:prstGeom>
-          <a:noFill/>
-          <a:ln/>
-        </p:spPr>
-        <p:txBody>
-          <a:bodyPr wrap="square" lIns="0" tIns="0" rIns="0" bIns="0" rtlCol="0" anchor="ctr"/>
-          <a:lstStyle/>
-          <a:p>
-            <a:pPr algn="r" indent="0" marL="0">
-              <a:buNone/>
-            </a:pPr>
-            <a:r>
-              <a:rPr lang="en-US" sz="2000" b="1" dirty="0">
-                <a:solidFill>
-                  <a:srgbClr val="B8323A"/>
-                </a:solidFill>
-                <a:latin typeface="Cambria" pitchFamily="34" charset="0"/>
-                <a:ea typeface="Cambria" pitchFamily="34" charset="-122"/>
-                <a:cs typeface="Cambria" pitchFamily="34" charset="-120"/>
-              </a:rPr>
-              <a:t>23</a:t>
-            </a:r>
-            <a:endParaRPr lang="en-US" sz="2000" dirty="0"/>
-          </a:p>
-        </p:txBody>
-      </p:sp>
-      <p:sp>
-        <p:nvSpPr>
-          <p:cNvPr id="20" name="Shape 18"/>
-          <p:cNvSpPr/>
-          <p:nvPr/>
-        </p:nvSpPr>
-        <p:spPr>
-          <a:xfrm>
-            <a:off x="566928" y="3200400"/>
-            <a:ext cx="3493008" cy="777240"/>
-          </a:xfrm>
-          <a:prstGeom prst="roundRect">
-            <a:avLst>
-              <a:gd name="adj" fmla="val 7059"/>
-            </a:avLst>
-          </a:prstGeom>
-          <a:solidFill>
-            <a:srgbClr val="1E1A19"/>
-          </a:solidFill>
-          <a:ln w="12700">
-            <a:solidFill>
-              <a:srgbClr val="2C2524"/>
-            </a:solidFill>
-            <a:prstDash val="solid"/>
-          </a:ln>
-        </p:spPr>
-      </p:sp>
-      <p:sp>
-        <p:nvSpPr>
-          <p:cNvPr id="21" name="Text 19"/>
-          <p:cNvSpPr txBox="1"/>
-          <p:nvPr/>
-        </p:nvSpPr>
-        <p:spPr>
-          <a:xfrm>
-            <a:off x="731520" y="3255264"/>
-            <a:ext cx="2560320" cy="384048"/>
-          </a:xfrm>
-          <a:prstGeom prst="rect">
-            <a:avLst/>
-          </a:prstGeom>
-          <a:noFill/>
-          <a:ln/>
-        </p:spPr>
-        <p:txBody>
-          <a:bodyPr wrap="square" lIns="0" tIns="0" rIns="0" bIns="0" rtlCol="0" anchor="t"/>
-          <a:lstStyle/>
-          <a:p>
-            <a:pPr indent="0" marL="0">
-              <a:buNone/>
-            </a:pPr>
-            <a:r>
-              <a:rPr lang="en-US" sz="1200" b="1" dirty="0">
-                <a:solidFill>
-                  <a:srgbClr val="F4F1F0"/>
-                </a:solidFill>
-                <a:latin typeface="Calibri" pitchFamily="34" charset="0"/>
-                <a:ea typeface="Calibri" pitchFamily="34" charset="-122"/>
-                <a:cs typeface="Calibri" pitchFamily="34" charset="-120"/>
-              </a:rPr>
-              <a:t>First review gate</a:t>
-            </a:r>
-            <a:endParaRPr lang="en-US" sz="1200" dirty="0"/>
-          </a:p>
-        </p:txBody>
-      </p:sp>
-      <p:sp>
-        <p:nvSpPr>
-          <p:cNvPr id="22" name="Text 20"/>
-          <p:cNvSpPr txBox="1"/>
-          <p:nvPr/>
-        </p:nvSpPr>
-        <p:spPr>
-          <a:xfrm>
-            <a:off x="731520" y="3611880"/>
-            <a:ext cx="2743200" cy="292608"/>
-          </a:xfrm>
-          <a:prstGeom prst="rect">
-            <a:avLst/>
-          </a:prstGeom>
-          <a:noFill/>
-          <a:ln/>
-        </p:spPr>
-        <p:txBody>
-          <a:bodyPr wrap="square" lIns="0" tIns="0" rIns="0" bIns="0" rtlCol="0" anchor="ctr"/>
-          <a:lstStyle/>
-          <a:p>
-            <a:pPr indent="0" marL="0">
-              <a:buNone/>
-            </a:pPr>
-            <a:r>
-              <a:rPr lang="en-US" sz="1100" dirty="0">
-                <a:solidFill>
-                  <a:srgbClr val="A9A09E"/>
-                </a:solidFill>
-                <a:latin typeface="Calibri" pitchFamily="34" charset="0"/>
-                <a:ea typeface="Calibri" pitchFamily="34" charset="-122"/>
-                <a:cs typeface="Calibri" pitchFamily="34" charset="-120"/>
-              </a:rPr>
-              <a:t>1 permission</a:t>
-            </a:r>
-            <a:endParaRPr lang="en-US" sz="1100" dirty="0"/>
-          </a:p>
-        </p:txBody>
-      </p:sp>
-      <p:sp>
-        <p:nvSpPr>
-          <p:cNvPr id="23" name="Text 21"/>
-          <p:cNvSpPr txBox="1"/>
-          <p:nvPr/>
-        </p:nvSpPr>
-        <p:spPr>
-          <a:xfrm>
-            <a:off x="3328416" y="3291840"/>
-            <a:ext cx="566928" cy="594360"/>
-          </a:xfrm>
-          <a:prstGeom prst="rect">
-            <a:avLst/>
-          </a:prstGeom>
-          <a:noFill/>
-          <a:ln/>
-        </p:spPr>
-        <p:txBody>
-          <a:bodyPr wrap="square" lIns="0" tIns="0" rIns="0" bIns="0" rtlCol="0" anchor="ctr"/>
-          <a:lstStyle/>
-          <a:p>
-            <a:pPr algn="r" indent="0" marL="0">
-              <a:buNone/>
-            </a:pPr>
-            <a:r>
-              <a:rPr lang="en-US" sz="2000" b="1" dirty="0">
-                <a:solidFill>
-                  <a:srgbClr val="B8323A"/>
-                </a:solidFill>
-                <a:latin typeface="Cambria" pitchFamily="34" charset="0"/>
-                <a:ea typeface="Cambria" pitchFamily="34" charset="-122"/>
-                <a:cs typeface="Cambria" pitchFamily="34" charset="-120"/>
-              </a:rPr>
-              <a:t>23</a:t>
-            </a:r>
-            <a:endParaRPr lang="en-US" sz="2000" dirty="0"/>
-          </a:p>
-        </p:txBody>
-      </p:sp>
-      <p:sp>
-        <p:nvSpPr>
-          <p:cNvPr id="24" name="Shape 22"/>
-          <p:cNvSpPr/>
-          <p:nvPr/>
-        </p:nvSpPr>
-        <p:spPr>
-          <a:xfrm>
-            <a:off x="4279392" y="3200400"/>
-            <a:ext cx="3493008" cy="777240"/>
-          </a:xfrm>
-          <a:prstGeom prst="roundRect">
-            <a:avLst>
-              <a:gd name="adj" fmla="val 7059"/>
-            </a:avLst>
-          </a:prstGeom>
-          <a:solidFill>
-            <a:srgbClr val="1E1A19"/>
-          </a:solidFill>
-          <a:ln w="12700">
-            <a:solidFill>
-              <a:srgbClr val="2C2524"/>
-            </a:solidFill>
-            <a:prstDash val="solid"/>
-          </a:ln>
-        </p:spPr>
-      </p:sp>
-      <p:sp>
-        <p:nvSpPr>
-          <p:cNvPr id="25" name="Text 23"/>
-          <p:cNvSpPr txBox="1"/>
-          <p:nvPr/>
-        </p:nvSpPr>
-        <p:spPr>
-          <a:xfrm>
-            <a:off x="4443984" y="3255264"/>
-            <a:ext cx="2560320" cy="384048"/>
-          </a:xfrm>
-          <a:prstGeom prst="rect">
-            <a:avLst/>
-          </a:prstGeom>
-          <a:noFill/>
-          <a:ln/>
-        </p:spPr>
-        <p:txBody>
-          <a:bodyPr wrap="square" lIns="0" tIns="0" rIns="0" bIns="0" rtlCol="0" anchor="t"/>
-          <a:lstStyle/>
-          <a:p>
-            <a:pPr indent="0" marL="0">
-              <a:buNone/>
-            </a:pPr>
-            <a:r>
-              <a:rPr lang="en-US" sz="1200" b="1" dirty="0">
-                <a:solidFill>
-                  <a:srgbClr val="F4F1F0"/>
-                </a:solidFill>
-                <a:latin typeface="Calibri" pitchFamily="34" charset="0"/>
-                <a:ea typeface="Calibri" pitchFamily="34" charset="-122"/>
-                <a:cs typeface="Calibri" pitchFamily="34" charset="-120"/>
-              </a:rPr>
-              <a:t>Leads and producers</a:t>
-            </a:r>
-            <a:endParaRPr lang="en-US" sz="1200" dirty="0"/>
-          </a:p>
-        </p:txBody>
-      </p:sp>
-      <p:sp>
-        <p:nvSpPr>
-          <p:cNvPr id="26" name="Text 24"/>
-          <p:cNvSpPr txBox="1"/>
-          <p:nvPr/>
-        </p:nvSpPr>
-        <p:spPr>
-          <a:xfrm>
-            <a:off x="4443984" y="3611880"/>
-            <a:ext cx="2743200" cy="292608"/>
-          </a:xfrm>
-          <a:prstGeom prst="rect">
-            <a:avLst/>
-          </a:prstGeom>
-          <a:noFill/>
-          <a:ln/>
-        </p:spPr>
-        <p:txBody>
-          <a:bodyPr wrap="square" lIns="0" tIns="0" rIns="0" bIns="0" rtlCol="0" anchor="ctr"/>
-          <a:lstStyle/>
-          <a:p>
-            <a:pPr indent="0" marL="0">
-              <a:buNone/>
-            </a:pPr>
-            <a:r>
-              <a:rPr lang="en-US" sz="1100" dirty="0">
-                <a:solidFill>
-                  <a:srgbClr val="A9A09E"/>
-                </a:solidFill>
-                <a:latin typeface="Calibri" pitchFamily="34" charset="0"/>
-                <a:ea typeface="Calibri" pitchFamily="34" charset="-122"/>
-                <a:cs typeface="Calibri" pitchFamily="34" charset="-120"/>
-              </a:rPr>
-              <a:t>3 permissions</a:t>
-            </a:r>
-            <a:endParaRPr lang="en-US" sz="1100" dirty="0"/>
-          </a:p>
-        </p:txBody>
-      </p:sp>
-      <p:sp>
-        <p:nvSpPr>
-          <p:cNvPr id="27" name="Text 25"/>
-          <p:cNvSpPr txBox="1"/>
-          <p:nvPr/>
-        </p:nvSpPr>
-        <p:spPr>
-          <a:xfrm>
-            <a:off x="7040880" y="3291840"/>
-            <a:ext cx="566928" cy="594360"/>
-          </a:xfrm>
-          <a:prstGeom prst="rect">
-            <a:avLst/>
-          </a:prstGeom>
-          <a:noFill/>
-          <a:ln/>
-        </p:spPr>
-        <p:txBody>
-          <a:bodyPr wrap="square" lIns="0" tIns="0" rIns="0" bIns="0" rtlCol="0" anchor="ctr"/>
-          <a:lstStyle/>
-          <a:p>
-            <a:pPr algn="r" indent="0" marL="0">
-              <a:buNone/>
-            </a:pPr>
-            <a:r>
-              <a:rPr lang="en-US" sz="2000" b="1" dirty="0">
-                <a:solidFill>
-                  <a:srgbClr val="B8323A"/>
-                </a:solidFill>
-                <a:latin typeface="Cambria" pitchFamily="34" charset="0"/>
-                <a:ea typeface="Cambria" pitchFamily="34" charset="-122"/>
-                <a:cs typeface="Cambria" pitchFamily="34" charset="-120"/>
-              </a:rPr>
-              <a:t>18</a:t>
-            </a:r>
-            <a:endParaRPr lang="en-US" sz="2000" dirty="0"/>
-          </a:p>
-        </p:txBody>
-      </p:sp>
-      <p:sp>
-        <p:nvSpPr>
-          <p:cNvPr id="28" name="Shape 26"/>
-          <p:cNvSpPr/>
-          <p:nvPr/>
-        </p:nvSpPr>
-        <p:spPr>
-          <a:xfrm>
-            <a:off x="7991856" y="3200400"/>
-            <a:ext cx="3493008" cy="777240"/>
-          </a:xfrm>
-          <a:prstGeom prst="roundRect">
-            <a:avLst>
-              <a:gd name="adj" fmla="val 7059"/>
-            </a:avLst>
-          </a:prstGeom>
-          <a:solidFill>
-            <a:srgbClr val="1E1A19"/>
-          </a:solidFill>
-          <a:ln w="12700">
-            <a:solidFill>
-              <a:srgbClr val="2C2524"/>
-            </a:solidFill>
-            <a:prstDash val="solid"/>
-          </a:ln>
-        </p:spPr>
-      </p:sp>
-      <p:sp>
-        <p:nvSpPr>
-          <p:cNvPr id="29" name="Text 27"/>
-          <p:cNvSpPr txBox="1"/>
-          <p:nvPr/>
-        </p:nvSpPr>
-        <p:spPr>
-          <a:xfrm>
-            <a:off x="8156448" y="3255264"/>
-            <a:ext cx="2560320" cy="384048"/>
-          </a:xfrm>
-          <a:prstGeom prst="rect">
-            <a:avLst/>
-          </a:prstGeom>
-          <a:noFill/>
-          <a:ln/>
-        </p:spPr>
-        <p:txBody>
-          <a:bodyPr wrap="square" lIns="0" tIns="0" rIns="0" bIns="0" rtlCol="0" anchor="t"/>
-          <a:lstStyle/>
-          <a:p>
-            <a:pPr indent="0" marL="0">
-              <a:buNone/>
-            </a:pPr>
-            <a:r>
-              <a:rPr lang="en-US" sz="1200" b="1" dirty="0">
-                <a:solidFill>
-                  <a:srgbClr val="F4F1F0"/>
-                </a:solidFill>
-                <a:latin typeface="Calibri" pitchFamily="34" charset="0"/>
-                <a:ea typeface="Calibri" pitchFamily="34" charset="-122"/>
-                <a:cs typeface="Calibri" pitchFamily="34" charset="-120"/>
-              </a:rPr>
-              <a:t>Anyone who supervises people</a:t>
-            </a:r>
-            <a:endParaRPr lang="en-US" sz="1200" dirty="0"/>
-          </a:p>
-        </p:txBody>
-      </p:sp>
-      <p:sp>
-        <p:nvSpPr>
-          <p:cNvPr id="30" name="Text 28"/>
-          <p:cNvSpPr txBox="1"/>
-          <p:nvPr/>
-        </p:nvSpPr>
-        <p:spPr>
-          <a:xfrm>
-            <a:off x="8156448" y="3611880"/>
-            <a:ext cx="2743200" cy="292608"/>
-          </a:xfrm>
-          <a:prstGeom prst="rect">
-            <a:avLst/>
-          </a:prstGeom>
-          <a:noFill/>
-          <a:ln/>
-        </p:spPr>
-        <p:txBody>
-          <a:bodyPr wrap="square" lIns="0" tIns="0" rIns="0" bIns="0" rtlCol="0" anchor="ctr"/>
-          <a:lstStyle/>
-          <a:p>
-            <a:pPr indent="0" marL="0">
-              <a:buNone/>
-            </a:pPr>
-            <a:r>
-              <a:rPr lang="en-US" sz="1100" dirty="0">
-                <a:solidFill>
-                  <a:srgbClr val="A9A09E"/>
-                </a:solidFill>
-                <a:latin typeface="Calibri" pitchFamily="34" charset="0"/>
-                <a:ea typeface="Calibri" pitchFamily="34" charset="-122"/>
-                <a:cs typeface="Calibri" pitchFamily="34" charset="-120"/>
-              </a:rPr>
-              <a:t>1 permission</a:t>
-            </a:r>
-            <a:endParaRPr lang="en-US" sz="1100" dirty="0"/>
-          </a:p>
-        </p:txBody>
-      </p:sp>
-      <p:sp>
-        <p:nvSpPr>
-          <p:cNvPr id="31" name="Text 29"/>
-          <p:cNvSpPr txBox="1"/>
-          <p:nvPr/>
-        </p:nvSpPr>
-        <p:spPr>
-          <a:xfrm>
-            <a:off x="10753344" y="3291840"/>
-            <a:ext cx="566928" cy="594360"/>
-          </a:xfrm>
-          <a:prstGeom prst="rect">
-            <a:avLst/>
-          </a:prstGeom>
-          <a:noFill/>
-          <a:ln/>
-        </p:spPr>
-        <p:txBody>
-          <a:bodyPr wrap="square" lIns="0" tIns="0" rIns="0" bIns="0" rtlCol="0" anchor="ctr"/>
-          <a:lstStyle/>
-          <a:p>
-            <a:pPr algn="r" indent="0" marL="0">
-              <a:buNone/>
-            </a:pPr>
-            <a:r>
-              <a:rPr lang="en-US" sz="2000" b="1" dirty="0">
-                <a:solidFill>
-                  <a:srgbClr val="B8323A"/>
-                </a:solidFill>
-                <a:latin typeface="Cambria" pitchFamily="34" charset="0"/>
-                <a:ea typeface="Cambria" pitchFamily="34" charset="-122"/>
-                <a:cs typeface="Cambria" pitchFamily="34" charset="-120"/>
-              </a:rPr>
-              <a:t>14</a:t>
-            </a:r>
-            <a:endParaRPr lang="en-US" sz="2000" dirty="0"/>
-          </a:p>
-        </p:txBody>
-      </p:sp>
-      <p:sp>
-        <p:nvSpPr>
-          <p:cNvPr id="32" name="Shape 30"/>
-          <p:cNvSpPr/>
-          <p:nvPr/>
-        </p:nvSpPr>
-        <p:spPr>
-          <a:xfrm>
-            <a:off x="566928" y="4114800"/>
-            <a:ext cx="3493008" cy="777240"/>
-          </a:xfrm>
-          <a:prstGeom prst="roundRect">
-            <a:avLst>
-              <a:gd name="adj" fmla="val 7059"/>
-            </a:avLst>
-          </a:prstGeom>
-          <a:solidFill>
-            <a:srgbClr val="1E1A19"/>
-          </a:solidFill>
-          <a:ln w="12700">
-            <a:solidFill>
-              <a:srgbClr val="2C2524"/>
-            </a:solidFill>
-            <a:prstDash val="solid"/>
-          </a:ln>
-        </p:spPr>
-      </p:sp>
-      <p:sp>
-        <p:nvSpPr>
-          <p:cNvPr id="33" name="Text 31"/>
-          <p:cNvSpPr txBox="1"/>
-          <p:nvPr/>
-        </p:nvSpPr>
-        <p:spPr>
-          <a:xfrm>
-            <a:off x="731520" y="4169664"/>
-            <a:ext cx="2560320" cy="384048"/>
-          </a:xfrm>
-          <a:prstGeom prst="rect">
-            <a:avLst/>
-          </a:prstGeom>
-          <a:noFill/>
-          <a:ln/>
-        </p:spPr>
-        <p:txBody>
-          <a:bodyPr wrap="square" lIns="0" tIns="0" rIns="0" bIns="0" rtlCol="0" anchor="t"/>
-          <a:lstStyle/>
-          <a:p>
-            <a:pPr indent="0" marL="0">
-              <a:buNone/>
-            </a:pPr>
-            <a:r>
-              <a:rPr lang="en-US" sz="1200" b="1" dirty="0">
-                <a:solidFill>
-                  <a:srgbClr val="F4F1F0"/>
-                </a:solidFill>
-                <a:latin typeface="Calibri" pitchFamily="34" charset="0"/>
-                <a:ea typeface="Calibri" pitchFamily="34" charset="-122"/>
-                <a:cs typeface="Calibri" pitchFamily="34" charset="-120"/>
-              </a:rPr>
-              <a:t>Delivery</a:t>
-            </a:r>
-            <a:endParaRPr lang="en-US" sz="1200" dirty="0"/>
-          </a:p>
-        </p:txBody>
-      </p:sp>
-      <p:sp>
-        <p:nvSpPr>
-          <p:cNvPr id="34" name="Text 32"/>
-          <p:cNvSpPr txBox="1"/>
-          <p:nvPr/>
-        </p:nvSpPr>
-        <p:spPr>
-          <a:xfrm>
-            <a:off x="731520" y="4526280"/>
-            <a:ext cx="2743200" cy="292608"/>
-          </a:xfrm>
-          <a:prstGeom prst="rect">
-            <a:avLst/>
-          </a:prstGeom>
-          <a:noFill/>
-          <a:ln/>
-        </p:spPr>
-        <p:txBody>
-          <a:bodyPr wrap="square" lIns="0" tIns="0" rIns="0" bIns="0" rtlCol="0" anchor="ctr"/>
-          <a:lstStyle/>
-          <a:p>
-            <a:pPr indent="0" marL="0">
-              <a:buNone/>
-            </a:pPr>
-            <a:r>
-              <a:rPr lang="en-US" sz="1100" dirty="0">
-                <a:solidFill>
-                  <a:srgbClr val="A9A09E"/>
-                </a:solidFill>
-                <a:latin typeface="Calibri" pitchFamily="34" charset="0"/>
-                <a:ea typeface="Calibri" pitchFamily="34" charset="-122"/>
-                <a:cs typeface="Calibri" pitchFamily="34" charset="-120"/>
-              </a:rPr>
-              <a:t>1 permission</a:t>
-            </a:r>
-            <a:endParaRPr lang="en-US" sz="1100" dirty="0"/>
-          </a:p>
-        </p:txBody>
-      </p:sp>
-      <p:sp>
-        <p:nvSpPr>
-          <p:cNvPr id="35" name="Text 33"/>
-          <p:cNvSpPr txBox="1"/>
-          <p:nvPr/>
-        </p:nvSpPr>
-        <p:spPr>
-          <a:xfrm>
-            <a:off x="3328416" y="4206240"/>
-            <a:ext cx="566928" cy="594360"/>
-          </a:xfrm>
-          <a:prstGeom prst="rect">
-            <a:avLst/>
-          </a:prstGeom>
-          <a:noFill/>
-          <a:ln/>
-        </p:spPr>
-        <p:txBody>
-          <a:bodyPr wrap="square" lIns="0" tIns="0" rIns="0" bIns="0" rtlCol="0" anchor="ctr"/>
-          <a:lstStyle/>
-          <a:p>
-            <a:pPr algn="r" indent="0" marL="0">
-              <a:buNone/>
-            </a:pPr>
-            <a:r>
-              <a:rPr lang="en-US" sz="2000" b="1" dirty="0">
-                <a:solidFill>
-                  <a:srgbClr val="B8323A"/>
-                </a:solidFill>
-                <a:latin typeface="Cambria" pitchFamily="34" charset="0"/>
-                <a:ea typeface="Cambria" pitchFamily="34" charset="-122"/>
-                <a:cs typeface="Cambria" pitchFamily="34" charset="-120"/>
-              </a:rPr>
-              <a:t>18</a:t>
-            </a:r>
-            <a:endParaRPr lang="en-US" sz="2000" dirty="0"/>
-          </a:p>
-        </p:txBody>
-      </p:sp>
-      <p:sp>
-        <p:nvSpPr>
-          <p:cNvPr id="36" name="Shape 34"/>
-          <p:cNvSpPr/>
-          <p:nvPr/>
-        </p:nvSpPr>
-        <p:spPr>
-          <a:xfrm>
-            <a:off x="4279392" y="4114800"/>
-            <a:ext cx="3493008" cy="777240"/>
-          </a:xfrm>
-          <a:prstGeom prst="roundRect">
-            <a:avLst>
-              <a:gd name="adj" fmla="val 7059"/>
-            </a:avLst>
-          </a:prstGeom>
-          <a:solidFill>
-            <a:srgbClr val="1E1A19"/>
-          </a:solidFill>
-          <a:ln w="12700">
-            <a:solidFill>
-              <a:srgbClr val="2C2524"/>
-            </a:solidFill>
-            <a:prstDash val="solid"/>
-          </a:ln>
-        </p:spPr>
-      </p:sp>
-      <p:sp>
-        <p:nvSpPr>
-          <p:cNvPr id="37" name="Text 35"/>
-          <p:cNvSpPr txBox="1"/>
-          <p:nvPr/>
-        </p:nvSpPr>
-        <p:spPr>
-          <a:xfrm>
-            <a:off x="4443984" y="4169664"/>
-            <a:ext cx="2560320" cy="384048"/>
-          </a:xfrm>
-          <a:prstGeom prst="rect">
-            <a:avLst/>
-          </a:prstGeom>
-          <a:noFill/>
-          <a:ln/>
-        </p:spPr>
-        <p:txBody>
-          <a:bodyPr wrap="square" lIns="0" tIns="0" rIns="0" bIns="0" rtlCol="0" anchor="t"/>
-          <a:lstStyle/>
-          <a:p>
-            <a:pPr indent="0" marL="0">
-              <a:buNone/>
-            </a:pPr>
-            <a:r>
-              <a:rPr lang="en-US" sz="1200" b="1" dirty="0">
-                <a:solidFill>
-                  <a:srgbClr val="F4F1F0"/>
-                </a:solidFill>
-                <a:latin typeface="Calibri" pitchFamily="34" charset="0"/>
-                <a:ea typeface="Calibri" pitchFamily="34" charset="-122"/>
-                <a:cs typeface="Calibri" pitchFamily="34" charset="-120"/>
-              </a:rPr>
-              <a:t>Creative direction</a:t>
-            </a:r>
-            <a:endParaRPr lang="en-US" sz="1200" dirty="0"/>
-          </a:p>
-        </p:txBody>
-      </p:sp>
-      <p:sp>
-        <p:nvSpPr>
-          <p:cNvPr id="38" name="Text 36"/>
-          <p:cNvSpPr txBox="1"/>
-          <p:nvPr/>
-        </p:nvSpPr>
-        <p:spPr>
-          <a:xfrm>
-            <a:off x="4443984" y="4526280"/>
-            <a:ext cx="2743200" cy="292608"/>
-          </a:xfrm>
-          <a:prstGeom prst="rect">
-            <a:avLst/>
-          </a:prstGeom>
-          <a:noFill/>
-          <a:ln/>
-        </p:spPr>
-        <p:txBody>
-          <a:bodyPr wrap="square" lIns="0" tIns="0" rIns="0" bIns="0" rtlCol="0" anchor="ctr"/>
-          <a:lstStyle/>
-          <a:p>
-            <a:pPr indent="0" marL="0">
-              <a:buNone/>
-            </a:pPr>
-            <a:r>
-              <a:rPr lang="en-US" sz="1100" dirty="0">
-                <a:solidFill>
-                  <a:srgbClr val="A9A09E"/>
-                </a:solidFill>
-                <a:latin typeface="Calibri" pitchFamily="34" charset="0"/>
-                <a:ea typeface="Calibri" pitchFamily="34" charset="-122"/>
-                <a:cs typeface="Calibri" pitchFamily="34" charset="-120"/>
-              </a:rPr>
-              <a:t>2 permissions</a:t>
-            </a:r>
-            <a:endParaRPr lang="en-US" sz="1100" dirty="0"/>
-          </a:p>
-        </p:txBody>
-      </p:sp>
-      <p:sp>
-        <p:nvSpPr>
-          <p:cNvPr id="39" name="Text 37"/>
-          <p:cNvSpPr txBox="1"/>
-          <p:nvPr/>
-        </p:nvSpPr>
-        <p:spPr>
-          <a:xfrm>
-            <a:off x="7040880" y="4206240"/>
-            <a:ext cx="566928" cy="594360"/>
-          </a:xfrm>
-          <a:prstGeom prst="rect">
-            <a:avLst/>
-          </a:prstGeom>
-          <a:noFill/>
-          <a:ln/>
-        </p:spPr>
-        <p:txBody>
-          <a:bodyPr wrap="square" lIns="0" tIns="0" rIns="0" bIns="0" rtlCol="0" anchor="ctr"/>
-          <a:lstStyle/>
-          <a:p>
-            <a:pPr algn="r" indent="0" marL="0">
-              <a:buNone/>
-            </a:pPr>
-            <a:r>
-              <a:rPr lang="en-US" sz="2000" b="1" dirty="0">
-                <a:solidFill>
-                  <a:srgbClr val="B8323A"/>
-                </a:solidFill>
-                <a:latin typeface="Cambria" pitchFamily="34" charset="0"/>
-                <a:ea typeface="Cambria" pitchFamily="34" charset="-122"/>
-                <a:cs typeface="Cambria" pitchFamily="34" charset="-120"/>
-              </a:rPr>
-              <a:t>9</a:t>
-            </a:r>
-            <a:endParaRPr lang="en-US" sz="2000" dirty="0"/>
-          </a:p>
-        </p:txBody>
-      </p:sp>
-      <p:sp>
-        <p:nvSpPr>
-          <p:cNvPr id="40" name="Shape 38"/>
-          <p:cNvSpPr/>
-          <p:nvPr/>
-        </p:nvSpPr>
-        <p:spPr>
-          <a:xfrm>
-            <a:off x="7991856" y="4114800"/>
-            <a:ext cx="3493008" cy="777240"/>
-          </a:xfrm>
-          <a:prstGeom prst="roundRect">
-            <a:avLst>
-              <a:gd name="adj" fmla="val 7059"/>
-            </a:avLst>
-          </a:prstGeom>
-          <a:solidFill>
-            <a:srgbClr val="1E1A19"/>
-          </a:solidFill>
-          <a:ln w="12700">
-            <a:solidFill>
-              <a:srgbClr val="2C2524"/>
-            </a:solidFill>
-            <a:prstDash val="solid"/>
-          </a:ln>
-        </p:spPr>
-      </p:sp>
-      <p:sp>
-        <p:nvSpPr>
-          <p:cNvPr id="41" name="Text 39"/>
-          <p:cNvSpPr txBox="1"/>
-          <p:nvPr/>
-        </p:nvSpPr>
-        <p:spPr>
-          <a:xfrm>
-            <a:off x="8156448" y="4169664"/>
-            <a:ext cx="2560320" cy="384048"/>
-          </a:xfrm>
-          <a:prstGeom prst="rect">
-            <a:avLst/>
-          </a:prstGeom>
-          <a:noFill/>
-          <a:ln/>
-        </p:spPr>
-        <p:txBody>
-          <a:bodyPr wrap="square" lIns="0" tIns="0" rIns="0" bIns="0" rtlCol="0" anchor="t"/>
-          <a:lstStyle/>
-          <a:p>
-            <a:pPr indent="0" marL="0">
-              <a:buNone/>
-            </a:pPr>
-            <a:r>
-              <a:rPr lang="en-US" sz="1200" b="1" dirty="0">
-                <a:solidFill>
-                  <a:srgbClr val="F4F1F0"/>
-                </a:solidFill>
-                <a:latin typeface="Calibri" pitchFamily="34" charset="0"/>
-                <a:ea typeface="Calibri" pitchFamily="34" charset="-122"/>
-                <a:cs typeface="Calibri" pitchFamily="34" charset="-120"/>
-              </a:rPr>
-              <a:t>Administration</a:t>
-            </a:r>
-            <a:endParaRPr lang="en-US" sz="1200" dirty="0"/>
-          </a:p>
-        </p:txBody>
-      </p:sp>
-      <p:sp>
-        <p:nvSpPr>
-          <p:cNvPr id="42" name="Text 40"/>
-          <p:cNvSpPr txBox="1"/>
-          <p:nvPr/>
-        </p:nvSpPr>
-        <p:spPr>
-          <a:xfrm>
-            <a:off x="8156448" y="4526280"/>
-            <a:ext cx="2743200" cy="292608"/>
-          </a:xfrm>
-          <a:prstGeom prst="rect">
-            <a:avLst/>
-          </a:prstGeom>
-          <a:noFill/>
-          <a:ln/>
-        </p:spPr>
-        <p:txBody>
-          <a:bodyPr wrap="square" lIns="0" tIns="0" rIns="0" bIns="0" rtlCol="0" anchor="ctr"/>
-          <a:lstStyle/>
-          <a:p>
-            <a:pPr indent="0" marL="0">
-              <a:buNone/>
-            </a:pPr>
-            <a:r>
-              <a:rPr lang="en-US" sz="1100" dirty="0">
-                <a:solidFill>
-                  <a:srgbClr val="A9A09E"/>
-                </a:solidFill>
-                <a:latin typeface="Calibri" pitchFamily="34" charset="0"/>
-                <a:ea typeface="Calibri" pitchFamily="34" charset="-122"/>
-                <a:cs typeface="Calibri" pitchFamily="34" charset="-120"/>
-              </a:rPr>
-              <a:t>18 permissions</a:t>
-            </a:r>
-            <a:endParaRPr lang="en-US" sz="1100" dirty="0"/>
-          </a:p>
-        </p:txBody>
-      </p:sp>
-      <p:sp>
-        <p:nvSpPr>
-          <p:cNvPr id="43" name="Text 41"/>
-          <p:cNvSpPr txBox="1"/>
-          <p:nvPr/>
-        </p:nvSpPr>
-        <p:spPr>
-          <a:xfrm>
-            <a:off x="10753344" y="4206240"/>
-            <a:ext cx="566928" cy="594360"/>
-          </a:xfrm>
-          <a:prstGeom prst="rect">
-            <a:avLst/>
-          </a:prstGeom>
-          <a:noFill/>
-          <a:ln/>
-        </p:spPr>
-        <p:txBody>
-          <a:bodyPr wrap="square" lIns="0" tIns="0" rIns="0" bIns="0" rtlCol="0" anchor="ctr"/>
-          <a:lstStyle/>
-          <a:p>
-            <a:pPr algn="r" indent="0" marL="0">
-              <a:buNone/>
-            </a:pPr>
-            <a:r>
-              <a:rPr lang="en-US" sz="2000" b="1" dirty="0">
-                <a:solidFill>
-                  <a:srgbClr val="B8323A"/>
-                </a:solidFill>
-                <a:latin typeface="Cambria" pitchFamily="34" charset="0"/>
-                <a:ea typeface="Cambria" pitchFamily="34" charset="-122"/>
-                <a:cs typeface="Cambria" pitchFamily="34" charset="-120"/>
-              </a:rPr>
-              <a:t>8</a:t>
-            </a:r>
-            <a:endParaRPr lang="en-US" sz="2000" dirty="0"/>
-          </a:p>
-        </p:txBody>
-      </p:sp>
-      <p:sp>
-        <p:nvSpPr>
-          <p:cNvPr id="44" name="Shape 42"/>
-          <p:cNvSpPr/>
-          <p:nvPr/>
-        </p:nvSpPr>
-        <p:spPr>
-          <a:xfrm>
-            <a:off x="566928" y="5029200"/>
-            <a:ext cx="3493008" cy="777240"/>
-          </a:xfrm>
-          <a:prstGeom prst="roundRect">
-            <a:avLst>
-              <a:gd name="adj" fmla="val 7059"/>
-            </a:avLst>
-          </a:prstGeom>
-          <a:solidFill>
-            <a:srgbClr val="1E1A19"/>
-          </a:solidFill>
-          <a:ln w="12700">
-            <a:solidFill>
-              <a:srgbClr val="2C2524"/>
-            </a:solidFill>
-            <a:prstDash val="solid"/>
-          </a:ln>
-        </p:spPr>
-      </p:sp>
-      <p:sp>
-        <p:nvSpPr>
-          <p:cNvPr id="45" name="Text 43"/>
-          <p:cNvSpPr txBox="1"/>
-          <p:nvPr/>
-        </p:nvSpPr>
-        <p:spPr>
-          <a:xfrm>
-            <a:off x="731520" y="5084064"/>
-            <a:ext cx="2560320" cy="384048"/>
-          </a:xfrm>
-          <a:prstGeom prst="rect">
-            <a:avLst/>
-          </a:prstGeom>
-          <a:noFill/>
-          <a:ln/>
-        </p:spPr>
-        <p:txBody>
-          <a:bodyPr wrap="square" lIns="0" tIns="0" rIns="0" bIns="0" rtlCol="0" anchor="t"/>
-          <a:lstStyle/>
-          <a:p>
-            <a:pPr indent="0" marL="0">
-              <a:buNone/>
-            </a:pPr>
-            <a:r>
-              <a:rPr lang="en-US" sz="1200" b="1" dirty="0">
-                <a:solidFill>
-                  <a:srgbClr val="F4F1F0"/>
-                </a:solidFill>
-                <a:latin typeface="Calibri" pitchFamily="34" charset="0"/>
-                <a:ea typeface="Calibri" pitchFamily="34" charset="-122"/>
-                <a:cs typeface="Calibri" pitchFamily="34" charset="-120"/>
-              </a:rPr>
-              <a:t>Studio leadership</a:t>
-            </a:r>
-            <a:endParaRPr lang="en-US" sz="1200" dirty="0"/>
-          </a:p>
-        </p:txBody>
-      </p:sp>
-      <p:sp>
-        <p:nvSpPr>
-          <p:cNvPr id="46" name="Text 44"/>
-          <p:cNvSpPr txBox="1"/>
-          <p:nvPr/>
-        </p:nvSpPr>
-        <p:spPr>
-          <a:xfrm>
-            <a:off x="731520" y="5440680"/>
-            <a:ext cx="2743200" cy="292608"/>
-          </a:xfrm>
-          <a:prstGeom prst="rect">
-            <a:avLst/>
-          </a:prstGeom>
-          <a:noFill/>
-          <a:ln/>
-        </p:spPr>
-        <p:txBody>
-          <a:bodyPr wrap="square" lIns="0" tIns="0" rIns="0" bIns="0" rtlCol="0" anchor="ctr"/>
-          <a:lstStyle/>
-          <a:p>
-            <a:pPr indent="0" marL="0">
-              <a:buNone/>
-            </a:pPr>
-            <a:r>
-              <a:rPr lang="en-US" sz="1100" dirty="0">
-                <a:solidFill>
-                  <a:srgbClr val="A9A09E"/>
-                </a:solidFill>
-                <a:latin typeface="Calibri" pitchFamily="34" charset="0"/>
-                <a:ea typeface="Calibri" pitchFamily="34" charset="-122"/>
-                <a:cs typeface="Calibri" pitchFamily="34" charset="-120"/>
-              </a:rPr>
-              <a:t>15 permissions</a:t>
-            </a:r>
-            <a:endParaRPr lang="en-US" sz="1100" dirty="0"/>
-          </a:p>
-        </p:txBody>
-      </p:sp>
-      <p:sp>
-        <p:nvSpPr>
-          <p:cNvPr id="47" name="Text 45"/>
-          <p:cNvSpPr txBox="1"/>
-          <p:nvPr/>
-        </p:nvSpPr>
-        <p:spPr>
-          <a:xfrm>
-            <a:off x="3328416" y="5120640"/>
-            <a:ext cx="566928" cy="594360"/>
-          </a:xfrm>
-          <a:prstGeom prst="rect">
-            <a:avLst/>
-          </a:prstGeom>
-          <a:noFill/>
-          <a:ln/>
-        </p:spPr>
-        <p:txBody>
-          <a:bodyPr wrap="square" lIns="0" tIns="0" rIns="0" bIns="0" rtlCol="0" anchor="ctr"/>
-          <a:lstStyle/>
-          <a:p>
-            <a:pPr algn="r" indent="0" marL="0">
-              <a:buNone/>
-            </a:pPr>
-            <a:r>
-              <a:rPr lang="en-US" sz="2000" b="1" dirty="0">
-                <a:solidFill>
-                  <a:srgbClr val="B8323A"/>
-                </a:solidFill>
-                <a:latin typeface="Cambria" pitchFamily="34" charset="0"/>
-                <a:ea typeface="Cambria" pitchFamily="34" charset="-122"/>
-                <a:cs typeface="Cambria" pitchFamily="34" charset="-120"/>
-              </a:rPr>
-              <a:t>7</a:t>
-            </a:r>
-            <a:endParaRPr lang="en-US" sz="2000" dirty="0"/>
-          </a:p>
-        </p:txBody>
-      </p:sp>
-      <p:sp>
-        <p:nvSpPr>
-          <p:cNvPr id="48" name="Shape 46"/>
-          <p:cNvSpPr/>
-          <p:nvPr/>
-        </p:nvSpPr>
-        <p:spPr>
-          <a:xfrm>
-            <a:off x="4279392" y="5029200"/>
-            <a:ext cx="3493008" cy="777240"/>
-          </a:xfrm>
-          <a:prstGeom prst="roundRect">
-            <a:avLst>
-              <a:gd name="adj" fmla="val 7059"/>
-            </a:avLst>
-          </a:prstGeom>
-          <a:solidFill>
-            <a:srgbClr val="1E1A19"/>
-          </a:solidFill>
-          <a:ln w="12700">
-            <a:solidFill>
-              <a:srgbClr val="2C2524"/>
-            </a:solidFill>
-            <a:prstDash val="solid"/>
-          </a:ln>
-        </p:spPr>
-      </p:sp>
-      <p:sp>
-        <p:nvSpPr>
-          <p:cNvPr id="49" name="Text 47"/>
-          <p:cNvSpPr txBox="1"/>
-          <p:nvPr/>
-        </p:nvSpPr>
-        <p:spPr>
-          <a:xfrm>
-            <a:off x="4443984" y="5084064"/>
-            <a:ext cx="2560320" cy="384048"/>
-          </a:xfrm>
-          <a:prstGeom prst="rect">
-            <a:avLst/>
-          </a:prstGeom>
-          <a:noFill/>
-          <a:ln/>
-        </p:spPr>
-        <p:txBody>
-          <a:bodyPr wrap="square" lIns="0" tIns="0" rIns="0" bIns="0" rtlCol="0" anchor="t"/>
-          <a:lstStyle/>
-          <a:p>
-            <a:pPr indent="0" marL="0">
-              <a:buNone/>
-            </a:pPr>
-            <a:r>
-              <a:rPr lang="en-US" sz="1200" b="1" dirty="0">
-                <a:solidFill>
-                  <a:srgbClr val="F4F1F0"/>
-                </a:solidFill>
-                <a:latin typeface="Calibri" pitchFamily="34" charset="0"/>
-                <a:ea typeface="Calibri" pitchFamily="34" charset="-122"/>
-                <a:cs typeface="Calibri" pitchFamily="34" charset="-120"/>
-              </a:rPr>
-              <a:t>Creative Art Director and Super Admin</a:t>
-            </a:r>
-            <a:endParaRPr lang="en-US" sz="1200" dirty="0"/>
-          </a:p>
-        </p:txBody>
-      </p:sp>
-      <p:sp>
-        <p:nvSpPr>
-          <p:cNvPr id="50" name="Text 48"/>
-          <p:cNvSpPr txBox="1"/>
-          <p:nvPr/>
-        </p:nvSpPr>
-        <p:spPr>
-          <a:xfrm>
-            <a:off x="4443984" y="5440680"/>
-            <a:ext cx="2743200" cy="292608"/>
-          </a:xfrm>
-          <a:prstGeom prst="rect">
-            <a:avLst/>
-          </a:prstGeom>
-          <a:noFill/>
-          <a:ln/>
-        </p:spPr>
-        <p:txBody>
-          <a:bodyPr wrap="square" lIns="0" tIns="0" rIns="0" bIns="0" rtlCol="0" anchor="ctr"/>
-          <a:lstStyle/>
-          <a:p>
-            <a:pPr indent="0" marL="0">
-              <a:buNone/>
-            </a:pPr>
-            <a:r>
-              <a:rPr lang="en-US" sz="1100" dirty="0">
-                <a:solidFill>
-                  <a:srgbClr val="A9A09E"/>
-                </a:solidFill>
-                <a:latin typeface="Calibri" pitchFamily="34" charset="0"/>
-                <a:ea typeface="Calibri" pitchFamily="34" charset="-122"/>
-                <a:cs typeface="Calibri" pitchFamily="34" charset="-120"/>
-              </a:rPr>
-              <a:t>3 permissions</a:t>
-            </a:r>
-            <a:endParaRPr lang="en-US" sz="1100" dirty="0"/>
-          </a:p>
-        </p:txBody>
-      </p:sp>
-      <p:sp>
-        <p:nvSpPr>
-          <p:cNvPr id="51" name="Text 49"/>
-          <p:cNvSpPr txBox="1"/>
-          <p:nvPr/>
-        </p:nvSpPr>
-        <p:spPr>
-          <a:xfrm>
-            <a:off x="7040880" y="5120640"/>
-            <a:ext cx="566928" cy="594360"/>
-          </a:xfrm>
-          <a:prstGeom prst="rect">
-            <a:avLst/>
-          </a:prstGeom>
-          <a:noFill/>
-          <a:ln/>
-        </p:spPr>
-        <p:txBody>
-          <a:bodyPr wrap="square" lIns="0" tIns="0" rIns="0" bIns="0" rtlCol="0" anchor="ctr"/>
-          <a:lstStyle/>
-          <a:p>
-            <a:pPr algn="r" indent="0" marL="0">
-              <a:buNone/>
-            </a:pPr>
-            <a:r>
-              <a:rPr lang="en-US" sz="2000" b="1" dirty="0">
-                <a:solidFill>
-                  <a:srgbClr val="B8323A"/>
-                </a:solidFill>
-                <a:latin typeface="Cambria" pitchFamily="34" charset="0"/>
-                <a:ea typeface="Cambria" pitchFamily="34" charset="-122"/>
-                <a:cs typeface="Cambria" pitchFamily="34" charset="-120"/>
-              </a:rPr>
-              <a:t>2</a:t>
-            </a:r>
-            <a:endParaRPr lang="en-US" sz="2000" dirty="0"/>
-          </a:p>
-        </p:txBody>
-      </p:sp>
-      <p:sp>
-        <p:nvSpPr>
-          <p:cNvPr id="52" name="Shape 50"/>
-          <p:cNvSpPr/>
-          <p:nvPr/>
-        </p:nvSpPr>
-        <p:spPr>
-          <a:xfrm>
-            <a:off x="7991856" y="5029200"/>
-            <a:ext cx="3493008" cy="777240"/>
-          </a:xfrm>
-          <a:prstGeom prst="roundRect">
-            <a:avLst>
-              <a:gd name="adj" fmla="val 7059"/>
-            </a:avLst>
-          </a:prstGeom>
-          <a:solidFill>
-            <a:srgbClr val="1E1A19"/>
-          </a:solidFill>
-          <a:ln w="12700">
-            <a:solidFill>
-              <a:srgbClr val="2C2524"/>
-            </a:solidFill>
-            <a:prstDash val="solid"/>
-          </a:ln>
-        </p:spPr>
-      </p:sp>
-      <p:sp>
-        <p:nvSpPr>
-          <p:cNvPr id="53" name="Text 51"/>
-          <p:cNvSpPr txBox="1"/>
-          <p:nvPr/>
-        </p:nvSpPr>
-        <p:spPr>
-          <a:xfrm>
-            <a:off x="8156448" y="5084064"/>
-            <a:ext cx="2560320" cy="384048"/>
-          </a:xfrm>
-          <a:prstGeom prst="rect">
-            <a:avLst/>
-          </a:prstGeom>
-          <a:noFill/>
-          <a:ln/>
-        </p:spPr>
-        <p:txBody>
-          <a:bodyPr wrap="square" lIns="0" tIns="0" rIns="0" bIns="0" rtlCol="0" anchor="t"/>
-          <a:lstStyle/>
-          <a:p>
-            <a:pPr indent="0" marL="0">
-              <a:buNone/>
-            </a:pPr>
-            <a:r>
-              <a:rPr lang="en-US" sz="1200" b="1" dirty="0">
-                <a:solidFill>
-                  <a:srgbClr val="F4F1F0"/>
-                </a:solidFill>
-                <a:latin typeface="Calibri" pitchFamily="34" charset="0"/>
-                <a:ea typeface="Calibri" pitchFamily="34" charset="-122"/>
-                <a:cs typeface="Calibri" pitchFamily="34" charset="-120"/>
-              </a:rPr>
-              <a:t>Super Admin only</a:t>
-            </a:r>
-            <a:endParaRPr lang="en-US" sz="1200" dirty="0"/>
-          </a:p>
-        </p:txBody>
-      </p:sp>
-      <p:sp>
-        <p:nvSpPr>
-          <p:cNvPr id="54" name="Text 52"/>
-          <p:cNvSpPr txBox="1"/>
-          <p:nvPr/>
-        </p:nvSpPr>
-        <p:spPr>
-          <a:xfrm>
-            <a:off x="8156448" y="5440680"/>
-            <a:ext cx="2743200" cy="292608"/>
-          </a:xfrm>
-          <a:prstGeom prst="rect">
-            <a:avLst/>
-          </a:prstGeom>
-          <a:noFill/>
-          <a:ln/>
-        </p:spPr>
-        <p:txBody>
-          <a:bodyPr wrap="square" lIns="0" tIns="0" rIns="0" bIns="0" rtlCol="0" anchor="ctr"/>
-          <a:lstStyle/>
-          <a:p>
-            <a:pPr indent="0" marL="0">
-              <a:buNone/>
-            </a:pPr>
-            <a:r>
-              <a:rPr lang="en-US" sz="1100" dirty="0">
-                <a:solidFill>
-                  <a:srgbClr val="A9A09E"/>
-                </a:solidFill>
-                <a:latin typeface="Calibri" pitchFamily="34" charset="0"/>
-                <a:ea typeface="Calibri" pitchFamily="34" charset="-122"/>
-                <a:cs typeface="Calibri" pitchFamily="34" charset="-120"/>
-              </a:rPr>
-              <a:t>8 permissions</a:t>
-            </a:r>
-            <a:endParaRPr lang="en-US" sz="1100" dirty="0"/>
-          </a:p>
-        </p:txBody>
-      </p:sp>
-      <p:sp>
-        <p:nvSpPr>
-          <p:cNvPr id="55" name="Text 53"/>
-          <p:cNvSpPr txBox="1"/>
-          <p:nvPr/>
-        </p:nvSpPr>
-        <p:spPr>
-          <a:xfrm>
-            <a:off x="10753344" y="5120640"/>
-            <a:ext cx="566928" cy="594360"/>
-          </a:xfrm>
-          <a:prstGeom prst="rect">
-            <a:avLst/>
-          </a:prstGeom>
-          <a:noFill/>
-          <a:ln/>
-        </p:spPr>
-        <p:txBody>
-          <a:bodyPr wrap="square" lIns="0" tIns="0" rIns="0" bIns="0" rtlCol="0" anchor="ctr"/>
-          <a:lstStyle/>
-          <a:p>
-            <a:pPr algn="r" indent="0" marL="0">
-              <a:buNone/>
-            </a:pPr>
-            <a:r>
-              <a:rPr lang="en-US" sz="2000" b="1" dirty="0">
-                <a:solidFill>
-                  <a:srgbClr val="B8323A"/>
-                </a:solidFill>
-                <a:latin typeface="Cambria" pitchFamily="34" charset="0"/>
-                <a:ea typeface="Cambria" pitchFamily="34" charset="-122"/>
-                <a:cs typeface="Cambria" pitchFamily="34" charset="-120"/>
-              </a:rPr>
-              <a:t>1</a:t>
-            </a:r>
-            <a:endParaRPr lang="en-US" sz="2000" dirty="0"/>
-          </a:p>
-        </p:txBody>
-      </p:sp>
-      <p:sp>
-        <p:nvSpPr>
-          <p:cNvPr id="56" name="Text 54"/>
-          <p:cNvSpPr txBox="1"/>
-          <p:nvPr/>
-        </p:nvSpPr>
-        <p:spPr>
-          <a:xfrm>
-            <a:off x="566928" y="5989320"/>
-            <a:ext cx="10881360" cy="548640"/>
-          </a:xfrm>
-          <a:prstGeom prst="rect">
-            <a:avLst/>
-          </a:prstGeom>
-          <a:noFill/>
-          <a:ln/>
-        </p:spPr>
-        <p:txBody>
-          <a:bodyPr wrap="square" lIns="0" tIns="0" rIns="0" bIns="0" rtlCol="0" anchor="ctr"/>
-          <a:lstStyle/>
-          <a:p>
-            <a:pPr indent="0" marL="0">
-              <a:buNone/>
-            </a:pPr>
-            <a:r>
-              <a:rPr lang="en-US" sz="1300" dirty="0">
-                <a:solidFill>
-                  <a:srgbClr val="A9A09E"/>
-                </a:solidFill>
-                <a:latin typeface="Calibri" pitchFamily="34" charset="0"/>
-                <a:ea typeface="Calibri" pitchFamily="34" charset="-122"/>
-                <a:cs typeface="Calibri" pitchFamily="34" charset="-120"/>
-              </a:rPr>
-              <a:t>The large number on each card is how many designations hold that band. Super Admin holds everything, including any permission added in future, without anybody switching it on.</a:t>
-            </a:r>
-            <a:endParaRPr lang="en-US" sz="1300" dirty="0"/>
+              <a:t>The working-hours control.</a:t>
+            </a:r>
+            <a:endParaRPr lang="en-US" sz="1000" dirty="0"/>
           </a:p>
         </p:txBody>
       </p:sp>
@@ -15373,7 +13948,7 @@
                 <a:ea typeface="Cambria" pitchFamily="34" charset="-122"/>
                 <a:cs typeface="Cambria" pitchFamily="34" charset="-120"/>
               </a:rPr>
-              <a:t>One screen decides what everybody else may do</a:t>
+              <a:t>Twelve access bands, not sixty role lists</a:t>
             </a:r>
             <a:endParaRPr lang="en-US" sz="3400" dirty="0"/>
           </a:p>
@@ -15387,111 +13962,32 @@
         </p:nvSpPr>
         <p:spPr>
           <a:xfrm>
-            <a:off x="566928" y="1828800"/>
-            <a:ext cx="4937760" cy="3200400"/>
-          </a:xfrm>
-          <a:prstGeom prst="rect">
-            <a:avLst/>
-          </a:prstGeom>
-          <a:noFill/>
-          <a:ln/>
-        </p:spPr>
-        <p:txBody>
-          <a:bodyPr wrap="square" rtlCol="0" anchor="ctr"/>
-          <a:lstStyle/>
-          <a:p>
-            <a:pPr marL="342900" indent="-342900">
-              <a:lnSpc>
-                <a:spcPts val="2000"/>
-              </a:lnSpc>
-              <a:spcAft>
-                <a:spcPts val="1000"/>
-              </a:spcAft>
-              <a:buSzPct val="100000"/>
-              <a:buChar char="•"/>
+            <a:off x="566928" y="1554480"/>
+            <a:ext cx="6035040" cy="457200"/>
+          </a:xfrm>
+          <a:prstGeom prst="rect">
+            <a:avLst/>
+          </a:prstGeom>
+          <a:noFill/>
+          <a:ln/>
+        </p:spPr>
+        <p:txBody>
+          <a:bodyPr wrap="square" lIns="0" tIns="0" rIns="0" bIns="0" rtlCol="0" anchor="ctr"/>
+          <a:lstStyle/>
+          <a:p>
+            <a:pPr indent="0" marL="0">
+              <a:buNone/>
             </a:pPr>
             <a:r>
               <a:rPr lang="en-US" sz="1400" dirty="0">
                 <a:solidFill>
-                  <a:srgbClr val="F4F1F0"/>
-                </a:solidFill>
-                <a:latin typeface="Calibri" pitchFamily="34" charset="0"/>
-                <a:ea typeface="Calibri" pitchFamily="34" charset="-122"/>
-                <a:cs typeface="Calibri" pitchFamily="34" charset="-120"/>
-              </a:rPr>
-              <a:t>Choose a designation, tick the actions it should hold, save.</a:t>
-            </a:r>
-            <a:endParaRPr lang="en-US" sz="1400" dirty="0"/>
-          </a:p>
-          <a:p>
-            <a:pPr marL="342900" indent="-342900">
-              <a:lnSpc>
-                <a:spcPts val="2000"/>
-              </a:lnSpc>
-              <a:spcAft>
-                <a:spcPts val="1000"/>
-              </a:spcAft>
-              <a:buSzPct val="100000"/>
-              <a:buChar char="•"/>
-            </a:pPr>
-            <a:r>
-              <a:rPr lang="en-US" sz="1400" dirty="0">
-                <a:solidFill>
-                  <a:srgbClr val="F4F1F0"/>
-                </a:solidFill>
-                <a:latin typeface="Calibri" pitchFamily="34" charset="0"/>
-                <a:ea typeface="Calibri" pitchFamily="34" charset="-122"/>
-                <a:cs typeface="Calibri" pitchFamily="34" charset="-120"/>
-              </a:rPr>
-              <a:t>The change applies to everybody holding that designation, on their next request.</a:t>
-            </a:r>
-            <a:endParaRPr lang="en-US" sz="1400" dirty="0"/>
-          </a:p>
-          <a:p>
-            <a:pPr marL="342900" indent="-342900">
-              <a:lnSpc>
-                <a:spcPts val="2000"/>
-              </a:lnSpc>
-              <a:spcAft>
-                <a:spcPts val="1000"/>
-              </a:spcAft>
-              <a:buSzPct val="100000"/>
-              <a:buChar char="•"/>
-            </a:pPr>
-            <a:r>
-              <a:rPr lang="en-US" sz="1400" dirty="0">
-                <a:solidFill>
-                  <a:srgbClr val="F4F1F0"/>
-                </a:solidFill>
-                <a:latin typeface="Calibri" pitchFamily="34" charset="0"/>
-                <a:ea typeface="Calibri" pitchFamily="34" charset="-122"/>
-                <a:cs typeface="Calibri" pitchFamily="34" charset="-120"/>
-              </a:rPr>
-              <a:t>Super Admin holds every permission and cannot be edited down.</a:t>
-            </a:r>
-            <a:endParaRPr lang="en-US" sz="1400" dirty="0"/>
-          </a:p>
-          <a:p>
-            <a:pPr marL="342900" indent="-342900">
-              <a:lnSpc>
-                <a:spcPts val="2000"/>
-              </a:lnSpc>
-              <a:spcAft>
-                <a:spcPts val="1000"/>
-              </a:spcAft>
-              <a:buSzPct val="100000"/>
-              <a:buChar char="•"/>
-            </a:pPr>
-            <a:r>
-              <a:rPr lang="en-US" sz="1400" dirty="0">
-                <a:solidFill>
-                  <a:srgbClr val="F4F1F0"/>
-                </a:solidFill>
-                <a:latin typeface="Calibri" pitchFamily="34" charset="0"/>
-                <a:ea typeface="Calibri" pitchFamily="34" charset="-122"/>
-                <a:cs typeface="Calibri" pitchFamily="34" charset="-120"/>
-              </a:rPr>
-              <a:t>Every change is written to the Activity Log — the designation, the permission and the direction.</a:t>
+                  <a:srgbClr val="A9A09E"/>
+                </a:solidFill>
+                <a:latin typeface="Calibri" pitchFamily="34" charset="0"/>
+                <a:ea typeface="Calibri" pitchFamily="34" charset="-122"/>
+                <a:cs typeface="Calibri" pitchFamily="34" charset="-120"/>
+              </a:rPr>
+              <a:t>60 permissions across 60 designations, in only twelve distinct groups of holders.</a:t>
             </a:r>
             <a:endParaRPr lang="en-US" sz="1400" dirty="0"/>
           </a:p>
@@ -15505,8 +14001,8 @@
         </p:nvSpPr>
         <p:spPr>
           <a:xfrm>
-            <a:off x="566928" y="5532120"/>
-            <a:ext cx="4937760" cy="777240"/>
+            <a:off x="566928" y="2286000"/>
+            <a:ext cx="3493008" cy="777240"/>
           </a:xfrm>
           <a:prstGeom prst="roundRect">
             <a:avLst>
@@ -15532,38 +14028,168 @@
         </p:nvSpPr>
         <p:spPr>
           <a:xfrm>
-            <a:off x="749808" y="5532120"/>
-            <a:ext cx="4572000" cy="777240"/>
-          </a:xfrm>
-          <a:prstGeom prst="rect">
-            <a:avLst/>
-          </a:prstGeom>
-          <a:noFill/>
-          <a:ln/>
-        </p:spPr>
-        <p:txBody>
-          <a:bodyPr wrap="square" lIns="0" tIns="0" rIns="0" bIns="0" rtlCol="0" anchor="ctr"/>
+            <a:off x="731520" y="2340864"/>
+            <a:ext cx="2560320" cy="384048"/>
+          </a:xfrm>
+          <a:prstGeom prst="rect">
+            <a:avLst/>
+          </a:prstGeom>
+          <a:noFill/>
+          <a:ln/>
+        </p:spPr>
+        <p:txBody>
+          <a:bodyPr wrap="square" lIns="0" tIns="0" rIns="0" bIns="0" rtlCol="0" anchor="t"/>
           <a:lstStyle/>
           <a:p>
             <a:pPr indent="0" marL="0">
               <a:buNone/>
             </a:pPr>
             <a:r>
-              <a:rPr lang="en-US" sz="1000" b="1" spc="200" kern="0" dirty="0">
+              <a:rPr lang="en-US" sz="1200" b="1" dirty="0">
+                <a:solidFill>
+                  <a:srgbClr val="F4F1F0"/>
+                </a:solidFill>
+                <a:latin typeface="Calibri" pitchFamily="34" charset="0"/>
+                <a:ea typeface="Calibri" pitchFamily="34" charset="-122"/>
+                <a:cs typeface="Calibri" pitchFamily="34" charset="-120"/>
+              </a:rPr>
+              <a:t>Everyone</a:t>
+            </a:r>
+            <a:endParaRPr lang="en-US" sz="1200" dirty="0"/>
+          </a:p>
+        </p:txBody>
+      </p:sp>
+      <p:sp>
+        <p:nvSpPr>
+          <p:cNvPr id="10" name="Text 8"/>
+          <p:cNvSpPr txBox="1"/>
+          <p:nvPr/>
+        </p:nvSpPr>
+        <p:spPr>
+          <a:xfrm>
+            <a:off x="731520" y="2697480"/>
+            <a:ext cx="2743200" cy="292608"/>
+          </a:xfrm>
+          <a:prstGeom prst="rect">
+            <a:avLst/>
+          </a:prstGeom>
+          <a:noFill/>
+          <a:ln/>
+        </p:spPr>
+        <p:txBody>
+          <a:bodyPr wrap="square" lIns="0" tIns="0" rIns="0" bIns="0" rtlCol="0" anchor="ctr"/>
+          <a:lstStyle/>
+          <a:p>
+            <a:pPr indent="0" marL="0">
+              <a:buNone/>
+            </a:pPr>
+            <a:r>
+              <a:rPr lang="en-US" sz="1100" dirty="0">
+                <a:solidFill>
+                  <a:srgbClr val="A9A09E"/>
+                </a:solidFill>
+                <a:latin typeface="Calibri" pitchFamily="34" charset="0"/>
+                <a:ea typeface="Calibri" pitchFamily="34" charset="-122"/>
+                <a:cs typeface="Calibri" pitchFamily="34" charset="-120"/>
+              </a:rPr>
+              <a:t>3 permissions</a:t>
+            </a:r>
+            <a:endParaRPr lang="en-US" sz="1100" dirty="0"/>
+          </a:p>
+        </p:txBody>
+      </p:sp>
+      <p:sp>
+        <p:nvSpPr>
+          <p:cNvPr id="11" name="Text 9"/>
+          <p:cNvSpPr txBox="1"/>
+          <p:nvPr/>
+        </p:nvSpPr>
+        <p:spPr>
+          <a:xfrm>
+            <a:off x="3328416" y="2377440"/>
+            <a:ext cx="566928" cy="594360"/>
+          </a:xfrm>
+          <a:prstGeom prst="rect">
+            <a:avLst/>
+          </a:prstGeom>
+          <a:noFill/>
+          <a:ln/>
+        </p:spPr>
+        <p:txBody>
+          <a:bodyPr wrap="square" lIns="0" tIns="0" rIns="0" bIns="0" rtlCol="0" anchor="ctr"/>
+          <a:lstStyle/>
+          <a:p>
+            <a:pPr algn="r" indent="0" marL="0">
+              <a:buNone/>
+            </a:pPr>
+            <a:r>
+              <a:rPr lang="en-US" sz="2000" b="1" dirty="0">
                 <a:solidFill>
                   <a:srgbClr val="B8323A"/>
                 </a:solidFill>
-                <a:latin typeface="Calibri" pitchFamily="34" charset="0"/>
-                <a:ea typeface="Calibri" pitchFamily="34" charset="-122"/>
-                <a:cs typeface="Calibri" pitchFamily="34" charset="-120"/>
-              </a:rPr>
-              <a:t>WHO  </a:t>
-            </a:r>
+                <a:latin typeface="Cambria" pitchFamily="34" charset="0"/>
+                <a:ea typeface="Cambria" pitchFamily="34" charset="-122"/>
+                <a:cs typeface="Cambria" pitchFamily="34" charset="-120"/>
+              </a:rPr>
+              <a:t>60</a:t>
+            </a:r>
+            <a:endParaRPr lang="en-US" sz="2000" dirty="0"/>
+          </a:p>
+        </p:txBody>
+      </p:sp>
+      <p:sp>
+        <p:nvSpPr>
+          <p:cNvPr id="12" name="Shape 10"/>
+          <p:cNvSpPr/>
+          <p:nvPr/>
+        </p:nvSpPr>
+        <p:spPr>
+          <a:xfrm>
+            <a:off x="4279392" y="2286000"/>
+            <a:ext cx="3493008" cy="777240"/>
+          </a:xfrm>
+          <a:prstGeom prst="roundRect">
+            <a:avLst>
+              <a:gd name="adj" fmla="val 7059"/>
+            </a:avLst>
+          </a:prstGeom>
+          <a:solidFill>
+            <a:srgbClr val="1E1A19"/>
+          </a:solidFill>
+          <a:ln w="12700">
+            <a:solidFill>
+              <a:srgbClr val="2C2524"/>
+            </a:solidFill>
+            <a:prstDash val="solid"/>
+          </a:ln>
+        </p:spPr>
+      </p:sp>
+      <p:sp>
+        <p:nvSpPr>
+          <p:cNvPr id="13" name="Text 11"/>
+          <p:cNvSpPr txBox="1"/>
+          <p:nvPr/>
+        </p:nvSpPr>
+        <p:spPr>
+          <a:xfrm>
+            <a:off x="4443984" y="2340864"/>
+            <a:ext cx="2560320" cy="384048"/>
+          </a:xfrm>
+          <a:prstGeom prst="rect">
+            <a:avLst/>
+          </a:prstGeom>
+          <a:noFill/>
+          <a:ln/>
+        </p:spPr>
+        <p:txBody>
+          <a:bodyPr wrap="square" lIns="0" tIns="0" rIns="0" bIns="0" rtlCol="0" anchor="t"/>
+          <a:lstStyle/>
+          <a:p>
             <a:pPr indent="0" marL="0">
               <a:buNone/>
             </a:pPr>
             <a:r>
-              <a:rPr lang="en-US" sz="1200" dirty="0">
+              <a:rPr lang="en-US" sz="1200" b="1" dirty="0">
                 <a:solidFill>
                   <a:srgbClr val="F4F1F0"/>
                 </a:solidFill>
@@ -15571,69 +14197,38 @@
                 <a:ea typeface="Calibri" pitchFamily="34" charset="-122"/>
                 <a:cs typeface="Calibri" pitchFamily="34" charset="-120"/>
               </a:rPr>
-              <a:t>Super Admin, and nobody else.</a:t>
-            </a:r>
-            <a:endParaRPr lang="en-US" sz="1000" dirty="0"/>
-          </a:p>
-        </p:txBody>
-      </p:sp>
-      <p:pic>
-        <p:nvPicPr>
-          <p:cNvPr id="10" name="Image 0" descr="preencoded.png">    </p:cNvPr>
-          <p:cNvPicPr>
-            <a:picLocks noChangeAspect="1"/>
-          </p:cNvPicPr>
-          <p:nvPr/>
-        </p:nvPicPr>
-        <p:blipFill>
-          <a:blip r:embed="rId1"/>
-          <a:stretch>
-            <a:fillRect/>
-          </a:stretch>
-        </p:blipFill>
-        <p:spPr>
-          <a:xfrm>
-            <a:off x="5989320" y="1570441"/>
-            <a:ext cx="5632704" cy="4082877"/>
-          </a:xfrm>
-          <a:prstGeom prst="rect">
-            <a:avLst/>
-          </a:prstGeom>
-          <a:effectLst>
-            <a:outerShdw sx="100000" sy="100000" kx="0" ky="0" algn="bl" rotWithShape="0" blurRad="177800" dist="50800" dir="5400000">
-              <a:srgbClr val="000000">
-                <a:alpha val="55000"/>
-              </a:srgbClr>
-            </a:outerShdw>
-          </a:effectLst>
-        </p:spPr>
-      </p:pic>
-      <p:sp>
-        <p:nvSpPr>
-          <p:cNvPr id="11" name="Text 8"/>
-          <p:cNvSpPr txBox="1"/>
-          <p:nvPr/>
-        </p:nvSpPr>
-        <p:spPr>
-          <a:xfrm>
-            <a:off x="5989320" y="5763047"/>
-            <a:ext cx="5632704" cy="457200"/>
-          </a:xfrm>
-          <a:prstGeom prst="rect">
-            <a:avLst/>
-          </a:prstGeom>
-          <a:noFill/>
-          <a:ln/>
-        </p:spPr>
-        <p:txBody>
-          <a:bodyPr wrap="square" lIns="0" tIns="0" rIns="0" bIns="0" rtlCol="0" anchor="ctr"/>
-          <a:lstStyle/>
-          <a:p>
-            <a:pPr algn="ctr" indent="0" marL="0">
-              <a:buNone/>
-            </a:pPr>
-            <a:r>
-              <a:rPr lang="en-US" sz="1000" i="1" dirty="0">
+              <a:t>Everyone who works on assets</a:t>
+            </a:r>
+            <a:endParaRPr lang="en-US" sz="1200" dirty="0"/>
+          </a:p>
+        </p:txBody>
+      </p:sp>
+      <p:sp>
+        <p:nvSpPr>
+          <p:cNvPr id="14" name="Text 12"/>
+          <p:cNvSpPr txBox="1"/>
+          <p:nvPr/>
+        </p:nvSpPr>
+        <p:spPr>
+          <a:xfrm>
+            <a:off x="4443984" y="2697480"/>
+            <a:ext cx="2743200" cy="292608"/>
+          </a:xfrm>
+          <a:prstGeom prst="rect">
+            <a:avLst/>
+          </a:prstGeom>
+          <a:noFill/>
+          <a:ln/>
+        </p:spPr>
+        <p:txBody>
+          <a:bodyPr wrap="square" lIns="0" tIns="0" rIns="0" bIns="0" rtlCol="0" anchor="ctr"/>
+          <a:lstStyle/>
+          <a:p>
+            <a:pPr indent="0" marL="0">
+              <a:buNone/>
+            </a:pPr>
+            <a:r>
+              <a:rPr lang="en-US" sz="1100" dirty="0">
                 <a:solidFill>
                   <a:srgbClr val="A9A09E"/>
                 </a:solidFill>
@@ -15641,9 +14236,1527 @@
                 <a:ea typeface="Calibri" pitchFamily="34" charset="-122"/>
                 <a:cs typeface="Calibri" pitchFamily="34" charset="-120"/>
               </a:rPr>
-              <a:t>The permission grid for one designation (first screenful).</a:t>
-            </a:r>
-            <a:endParaRPr lang="en-US" sz="1000" dirty="0"/>
+              <a:t>2 permissions</a:t>
+            </a:r>
+            <a:endParaRPr lang="en-US" sz="1100" dirty="0"/>
+          </a:p>
+        </p:txBody>
+      </p:sp>
+      <p:sp>
+        <p:nvSpPr>
+          <p:cNvPr id="15" name="Text 13"/>
+          <p:cNvSpPr txBox="1"/>
+          <p:nvPr/>
+        </p:nvSpPr>
+        <p:spPr>
+          <a:xfrm>
+            <a:off x="7040880" y="2377440"/>
+            <a:ext cx="566928" cy="594360"/>
+          </a:xfrm>
+          <a:prstGeom prst="rect">
+            <a:avLst/>
+          </a:prstGeom>
+          <a:noFill/>
+          <a:ln/>
+        </p:spPr>
+        <p:txBody>
+          <a:bodyPr wrap="square" lIns="0" tIns="0" rIns="0" bIns="0" rtlCol="0" anchor="ctr"/>
+          <a:lstStyle/>
+          <a:p>
+            <a:pPr algn="r" indent="0" marL="0">
+              <a:buNone/>
+            </a:pPr>
+            <a:r>
+              <a:rPr lang="en-US" sz="2000" b="1" dirty="0">
+                <a:solidFill>
+                  <a:srgbClr val="B8323A"/>
+                </a:solidFill>
+                <a:latin typeface="Cambria" pitchFamily="34" charset="0"/>
+                <a:ea typeface="Cambria" pitchFamily="34" charset="-122"/>
+                <a:cs typeface="Cambria" pitchFamily="34" charset="-120"/>
+              </a:rPr>
+              <a:t>51</a:t>
+            </a:r>
+            <a:endParaRPr lang="en-US" sz="2000" dirty="0"/>
+          </a:p>
+        </p:txBody>
+      </p:sp>
+      <p:sp>
+        <p:nvSpPr>
+          <p:cNvPr id="16" name="Shape 14"/>
+          <p:cNvSpPr/>
+          <p:nvPr/>
+        </p:nvSpPr>
+        <p:spPr>
+          <a:xfrm>
+            <a:off x="7991856" y="2286000"/>
+            <a:ext cx="3493008" cy="777240"/>
+          </a:xfrm>
+          <a:prstGeom prst="roundRect">
+            <a:avLst>
+              <a:gd name="adj" fmla="val 7059"/>
+            </a:avLst>
+          </a:prstGeom>
+          <a:solidFill>
+            <a:srgbClr val="1E1A19"/>
+          </a:solidFill>
+          <a:ln w="12700">
+            <a:solidFill>
+              <a:srgbClr val="2C2524"/>
+            </a:solidFill>
+            <a:prstDash val="solid"/>
+          </a:ln>
+        </p:spPr>
+      </p:sp>
+      <p:sp>
+        <p:nvSpPr>
+          <p:cNvPr id="17" name="Text 15"/>
+          <p:cNvSpPr txBox="1"/>
+          <p:nvPr/>
+        </p:nvSpPr>
+        <p:spPr>
+          <a:xfrm>
+            <a:off x="8156448" y="2340864"/>
+            <a:ext cx="2560320" cy="384048"/>
+          </a:xfrm>
+          <a:prstGeom prst="rect">
+            <a:avLst/>
+          </a:prstGeom>
+          <a:noFill/>
+          <a:ln/>
+        </p:spPr>
+        <p:txBody>
+          <a:bodyPr wrap="square" lIns="0" tIns="0" rIns="0" bIns="0" rtlCol="0" anchor="t"/>
+          <a:lstStyle/>
+          <a:p>
+            <a:pPr indent="0" marL="0">
+              <a:buNone/>
+            </a:pPr>
+            <a:r>
+              <a:rPr lang="en-US" sz="1200" b="1" dirty="0">
+                <a:solidFill>
+                  <a:srgbClr val="F4F1F0"/>
+                </a:solidFill>
+                <a:latin typeface="Calibri" pitchFamily="34" charset="0"/>
+                <a:ea typeface="Calibri" pitchFamily="34" charset="-122"/>
+                <a:cs typeface="Calibri" pitchFamily="34" charset="-120"/>
+              </a:rPr>
+              <a:t>Production planning</a:t>
+            </a:r>
+            <a:endParaRPr lang="en-US" sz="1200" dirty="0"/>
+          </a:p>
+        </p:txBody>
+      </p:sp>
+      <p:sp>
+        <p:nvSpPr>
+          <p:cNvPr id="18" name="Text 16"/>
+          <p:cNvSpPr txBox="1"/>
+          <p:nvPr/>
+        </p:nvSpPr>
+        <p:spPr>
+          <a:xfrm>
+            <a:off x="8156448" y="2697480"/>
+            <a:ext cx="2743200" cy="292608"/>
+          </a:xfrm>
+          <a:prstGeom prst="rect">
+            <a:avLst/>
+          </a:prstGeom>
+          <a:noFill/>
+          <a:ln/>
+        </p:spPr>
+        <p:txBody>
+          <a:bodyPr wrap="square" lIns="0" tIns="0" rIns="0" bIns="0" rtlCol="0" anchor="ctr"/>
+          <a:lstStyle/>
+          <a:p>
+            <a:pPr indent="0" marL="0">
+              <a:buNone/>
+            </a:pPr>
+            <a:r>
+              <a:rPr lang="en-US" sz="1100" dirty="0">
+                <a:solidFill>
+                  <a:srgbClr val="A9A09E"/>
+                </a:solidFill>
+                <a:latin typeface="Calibri" pitchFamily="34" charset="0"/>
+                <a:ea typeface="Calibri" pitchFamily="34" charset="-122"/>
+                <a:cs typeface="Calibri" pitchFamily="34" charset="-120"/>
+              </a:rPr>
+              <a:t>2 permissions</a:t>
+            </a:r>
+            <a:endParaRPr lang="en-US" sz="1100" dirty="0"/>
+          </a:p>
+        </p:txBody>
+      </p:sp>
+      <p:sp>
+        <p:nvSpPr>
+          <p:cNvPr id="19" name="Text 17"/>
+          <p:cNvSpPr txBox="1"/>
+          <p:nvPr/>
+        </p:nvSpPr>
+        <p:spPr>
+          <a:xfrm>
+            <a:off x="10753344" y="2377440"/>
+            <a:ext cx="566928" cy="594360"/>
+          </a:xfrm>
+          <a:prstGeom prst="rect">
+            <a:avLst/>
+          </a:prstGeom>
+          <a:noFill/>
+          <a:ln/>
+        </p:spPr>
+        <p:txBody>
+          <a:bodyPr wrap="square" lIns="0" tIns="0" rIns="0" bIns="0" rtlCol="0" anchor="ctr"/>
+          <a:lstStyle/>
+          <a:p>
+            <a:pPr algn="r" indent="0" marL="0">
+              <a:buNone/>
+            </a:pPr>
+            <a:r>
+              <a:rPr lang="en-US" sz="2000" b="1" dirty="0">
+                <a:solidFill>
+                  <a:srgbClr val="B8323A"/>
+                </a:solidFill>
+                <a:latin typeface="Cambria" pitchFamily="34" charset="0"/>
+                <a:ea typeface="Cambria" pitchFamily="34" charset="-122"/>
+                <a:cs typeface="Cambria" pitchFamily="34" charset="-120"/>
+              </a:rPr>
+              <a:t>23</a:t>
+            </a:r>
+            <a:endParaRPr lang="en-US" sz="2000" dirty="0"/>
+          </a:p>
+        </p:txBody>
+      </p:sp>
+      <p:sp>
+        <p:nvSpPr>
+          <p:cNvPr id="20" name="Shape 18"/>
+          <p:cNvSpPr/>
+          <p:nvPr/>
+        </p:nvSpPr>
+        <p:spPr>
+          <a:xfrm>
+            <a:off x="566928" y="3200400"/>
+            <a:ext cx="3493008" cy="777240"/>
+          </a:xfrm>
+          <a:prstGeom prst="roundRect">
+            <a:avLst>
+              <a:gd name="adj" fmla="val 7059"/>
+            </a:avLst>
+          </a:prstGeom>
+          <a:solidFill>
+            <a:srgbClr val="1E1A19"/>
+          </a:solidFill>
+          <a:ln w="12700">
+            <a:solidFill>
+              <a:srgbClr val="2C2524"/>
+            </a:solidFill>
+            <a:prstDash val="solid"/>
+          </a:ln>
+        </p:spPr>
+      </p:sp>
+      <p:sp>
+        <p:nvSpPr>
+          <p:cNvPr id="21" name="Text 19"/>
+          <p:cNvSpPr txBox="1"/>
+          <p:nvPr/>
+        </p:nvSpPr>
+        <p:spPr>
+          <a:xfrm>
+            <a:off x="731520" y="3255264"/>
+            <a:ext cx="2560320" cy="384048"/>
+          </a:xfrm>
+          <a:prstGeom prst="rect">
+            <a:avLst/>
+          </a:prstGeom>
+          <a:noFill/>
+          <a:ln/>
+        </p:spPr>
+        <p:txBody>
+          <a:bodyPr wrap="square" lIns="0" tIns="0" rIns="0" bIns="0" rtlCol="0" anchor="t"/>
+          <a:lstStyle/>
+          <a:p>
+            <a:pPr indent="0" marL="0">
+              <a:buNone/>
+            </a:pPr>
+            <a:r>
+              <a:rPr lang="en-US" sz="1200" b="1" dirty="0">
+                <a:solidFill>
+                  <a:srgbClr val="F4F1F0"/>
+                </a:solidFill>
+                <a:latin typeface="Calibri" pitchFamily="34" charset="0"/>
+                <a:ea typeface="Calibri" pitchFamily="34" charset="-122"/>
+                <a:cs typeface="Calibri" pitchFamily="34" charset="-120"/>
+              </a:rPr>
+              <a:t>First review gate</a:t>
+            </a:r>
+            <a:endParaRPr lang="en-US" sz="1200" dirty="0"/>
+          </a:p>
+        </p:txBody>
+      </p:sp>
+      <p:sp>
+        <p:nvSpPr>
+          <p:cNvPr id="22" name="Text 20"/>
+          <p:cNvSpPr txBox="1"/>
+          <p:nvPr/>
+        </p:nvSpPr>
+        <p:spPr>
+          <a:xfrm>
+            <a:off x="731520" y="3611880"/>
+            <a:ext cx="2743200" cy="292608"/>
+          </a:xfrm>
+          <a:prstGeom prst="rect">
+            <a:avLst/>
+          </a:prstGeom>
+          <a:noFill/>
+          <a:ln/>
+        </p:spPr>
+        <p:txBody>
+          <a:bodyPr wrap="square" lIns="0" tIns="0" rIns="0" bIns="0" rtlCol="0" anchor="ctr"/>
+          <a:lstStyle/>
+          <a:p>
+            <a:pPr indent="0" marL="0">
+              <a:buNone/>
+            </a:pPr>
+            <a:r>
+              <a:rPr lang="en-US" sz="1100" dirty="0">
+                <a:solidFill>
+                  <a:srgbClr val="A9A09E"/>
+                </a:solidFill>
+                <a:latin typeface="Calibri" pitchFamily="34" charset="0"/>
+                <a:ea typeface="Calibri" pitchFamily="34" charset="-122"/>
+                <a:cs typeface="Calibri" pitchFamily="34" charset="-120"/>
+              </a:rPr>
+              <a:t>1 permission</a:t>
+            </a:r>
+            <a:endParaRPr lang="en-US" sz="1100" dirty="0"/>
+          </a:p>
+        </p:txBody>
+      </p:sp>
+      <p:sp>
+        <p:nvSpPr>
+          <p:cNvPr id="23" name="Text 21"/>
+          <p:cNvSpPr txBox="1"/>
+          <p:nvPr/>
+        </p:nvSpPr>
+        <p:spPr>
+          <a:xfrm>
+            <a:off x="3328416" y="3291840"/>
+            <a:ext cx="566928" cy="594360"/>
+          </a:xfrm>
+          <a:prstGeom prst="rect">
+            <a:avLst/>
+          </a:prstGeom>
+          <a:noFill/>
+          <a:ln/>
+        </p:spPr>
+        <p:txBody>
+          <a:bodyPr wrap="square" lIns="0" tIns="0" rIns="0" bIns="0" rtlCol="0" anchor="ctr"/>
+          <a:lstStyle/>
+          <a:p>
+            <a:pPr algn="r" indent="0" marL="0">
+              <a:buNone/>
+            </a:pPr>
+            <a:r>
+              <a:rPr lang="en-US" sz="2000" b="1" dirty="0">
+                <a:solidFill>
+                  <a:srgbClr val="B8323A"/>
+                </a:solidFill>
+                <a:latin typeface="Cambria" pitchFamily="34" charset="0"/>
+                <a:ea typeface="Cambria" pitchFamily="34" charset="-122"/>
+                <a:cs typeface="Cambria" pitchFamily="34" charset="-120"/>
+              </a:rPr>
+              <a:t>23</a:t>
+            </a:r>
+            <a:endParaRPr lang="en-US" sz="2000" dirty="0"/>
+          </a:p>
+        </p:txBody>
+      </p:sp>
+      <p:sp>
+        <p:nvSpPr>
+          <p:cNvPr id="24" name="Shape 22"/>
+          <p:cNvSpPr/>
+          <p:nvPr/>
+        </p:nvSpPr>
+        <p:spPr>
+          <a:xfrm>
+            <a:off x="4279392" y="3200400"/>
+            <a:ext cx="3493008" cy="777240"/>
+          </a:xfrm>
+          <a:prstGeom prst="roundRect">
+            <a:avLst>
+              <a:gd name="adj" fmla="val 7059"/>
+            </a:avLst>
+          </a:prstGeom>
+          <a:solidFill>
+            <a:srgbClr val="1E1A19"/>
+          </a:solidFill>
+          <a:ln w="12700">
+            <a:solidFill>
+              <a:srgbClr val="2C2524"/>
+            </a:solidFill>
+            <a:prstDash val="solid"/>
+          </a:ln>
+        </p:spPr>
+      </p:sp>
+      <p:sp>
+        <p:nvSpPr>
+          <p:cNvPr id="25" name="Text 23"/>
+          <p:cNvSpPr txBox="1"/>
+          <p:nvPr/>
+        </p:nvSpPr>
+        <p:spPr>
+          <a:xfrm>
+            <a:off x="4443984" y="3255264"/>
+            <a:ext cx="2560320" cy="384048"/>
+          </a:xfrm>
+          <a:prstGeom prst="rect">
+            <a:avLst/>
+          </a:prstGeom>
+          <a:noFill/>
+          <a:ln/>
+        </p:spPr>
+        <p:txBody>
+          <a:bodyPr wrap="square" lIns="0" tIns="0" rIns="0" bIns="0" rtlCol="0" anchor="t"/>
+          <a:lstStyle/>
+          <a:p>
+            <a:pPr indent="0" marL="0">
+              <a:buNone/>
+            </a:pPr>
+            <a:r>
+              <a:rPr lang="en-US" sz="1200" b="1" dirty="0">
+                <a:solidFill>
+                  <a:srgbClr val="F4F1F0"/>
+                </a:solidFill>
+                <a:latin typeface="Calibri" pitchFamily="34" charset="0"/>
+                <a:ea typeface="Calibri" pitchFamily="34" charset="-122"/>
+                <a:cs typeface="Calibri" pitchFamily="34" charset="-120"/>
+              </a:rPr>
+              <a:t>Leads and producers</a:t>
+            </a:r>
+            <a:endParaRPr lang="en-US" sz="1200" dirty="0"/>
+          </a:p>
+        </p:txBody>
+      </p:sp>
+      <p:sp>
+        <p:nvSpPr>
+          <p:cNvPr id="26" name="Text 24"/>
+          <p:cNvSpPr txBox="1"/>
+          <p:nvPr/>
+        </p:nvSpPr>
+        <p:spPr>
+          <a:xfrm>
+            <a:off x="4443984" y="3611880"/>
+            <a:ext cx="2743200" cy="292608"/>
+          </a:xfrm>
+          <a:prstGeom prst="rect">
+            <a:avLst/>
+          </a:prstGeom>
+          <a:noFill/>
+          <a:ln/>
+        </p:spPr>
+        <p:txBody>
+          <a:bodyPr wrap="square" lIns="0" tIns="0" rIns="0" bIns="0" rtlCol="0" anchor="ctr"/>
+          <a:lstStyle/>
+          <a:p>
+            <a:pPr indent="0" marL="0">
+              <a:buNone/>
+            </a:pPr>
+            <a:r>
+              <a:rPr lang="en-US" sz="1100" dirty="0">
+                <a:solidFill>
+                  <a:srgbClr val="A9A09E"/>
+                </a:solidFill>
+                <a:latin typeface="Calibri" pitchFamily="34" charset="0"/>
+                <a:ea typeface="Calibri" pitchFamily="34" charset="-122"/>
+                <a:cs typeface="Calibri" pitchFamily="34" charset="-120"/>
+              </a:rPr>
+              <a:t>3 permissions</a:t>
+            </a:r>
+            <a:endParaRPr lang="en-US" sz="1100" dirty="0"/>
+          </a:p>
+        </p:txBody>
+      </p:sp>
+      <p:sp>
+        <p:nvSpPr>
+          <p:cNvPr id="27" name="Text 25"/>
+          <p:cNvSpPr txBox="1"/>
+          <p:nvPr/>
+        </p:nvSpPr>
+        <p:spPr>
+          <a:xfrm>
+            <a:off x="7040880" y="3291840"/>
+            <a:ext cx="566928" cy="594360"/>
+          </a:xfrm>
+          <a:prstGeom prst="rect">
+            <a:avLst/>
+          </a:prstGeom>
+          <a:noFill/>
+          <a:ln/>
+        </p:spPr>
+        <p:txBody>
+          <a:bodyPr wrap="square" lIns="0" tIns="0" rIns="0" bIns="0" rtlCol="0" anchor="ctr"/>
+          <a:lstStyle/>
+          <a:p>
+            <a:pPr algn="r" indent="0" marL="0">
+              <a:buNone/>
+            </a:pPr>
+            <a:r>
+              <a:rPr lang="en-US" sz="2000" b="1" dirty="0">
+                <a:solidFill>
+                  <a:srgbClr val="B8323A"/>
+                </a:solidFill>
+                <a:latin typeface="Cambria" pitchFamily="34" charset="0"/>
+                <a:ea typeface="Cambria" pitchFamily="34" charset="-122"/>
+                <a:cs typeface="Cambria" pitchFamily="34" charset="-120"/>
+              </a:rPr>
+              <a:t>18</a:t>
+            </a:r>
+            <a:endParaRPr lang="en-US" sz="2000" dirty="0"/>
+          </a:p>
+        </p:txBody>
+      </p:sp>
+      <p:sp>
+        <p:nvSpPr>
+          <p:cNvPr id="28" name="Shape 26"/>
+          <p:cNvSpPr/>
+          <p:nvPr/>
+        </p:nvSpPr>
+        <p:spPr>
+          <a:xfrm>
+            <a:off x="7991856" y="3200400"/>
+            <a:ext cx="3493008" cy="777240"/>
+          </a:xfrm>
+          <a:prstGeom prst="roundRect">
+            <a:avLst>
+              <a:gd name="adj" fmla="val 7059"/>
+            </a:avLst>
+          </a:prstGeom>
+          <a:solidFill>
+            <a:srgbClr val="1E1A19"/>
+          </a:solidFill>
+          <a:ln w="12700">
+            <a:solidFill>
+              <a:srgbClr val="2C2524"/>
+            </a:solidFill>
+            <a:prstDash val="solid"/>
+          </a:ln>
+        </p:spPr>
+      </p:sp>
+      <p:sp>
+        <p:nvSpPr>
+          <p:cNvPr id="29" name="Text 27"/>
+          <p:cNvSpPr txBox="1"/>
+          <p:nvPr/>
+        </p:nvSpPr>
+        <p:spPr>
+          <a:xfrm>
+            <a:off x="8156448" y="3255264"/>
+            <a:ext cx="2560320" cy="384048"/>
+          </a:xfrm>
+          <a:prstGeom prst="rect">
+            <a:avLst/>
+          </a:prstGeom>
+          <a:noFill/>
+          <a:ln/>
+        </p:spPr>
+        <p:txBody>
+          <a:bodyPr wrap="square" lIns="0" tIns="0" rIns="0" bIns="0" rtlCol="0" anchor="t"/>
+          <a:lstStyle/>
+          <a:p>
+            <a:pPr indent="0" marL="0">
+              <a:buNone/>
+            </a:pPr>
+            <a:r>
+              <a:rPr lang="en-US" sz="1200" b="1" dirty="0">
+                <a:solidFill>
+                  <a:srgbClr val="F4F1F0"/>
+                </a:solidFill>
+                <a:latin typeface="Calibri" pitchFamily="34" charset="0"/>
+                <a:ea typeface="Calibri" pitchFamily="34" charset="-122"/>
+                <a:cs typeface="Calibri" pitchFamily="34" charset="-120"/>
+              </a:rPr>
+              <a:t>Anyone who supervises people</a:t>
+            </a:r>
+            <a:endParaRPr lang="en-US" sz="1200" dirty="0"/>
+          </a:p>
+        </p:txBody>
+      </p:sp>
+      <p:sp>
+        <p:nvSpPr>
+          <p:cNvPr id="30" name="Text 28"/>
+          <p:cNvSpPr txBox="1"/>
+          <p:nvPr/>
+        </p:nvSpPr>
+        <p:spPr>
+          <a:xfrm>
+            <a:off x="8156448" y="3611880"/>
+            <a:ext cx="2743200" cy="292608"/>
+          </a:xfrm>
+          <a:prstGeom prst="rect">
+            <a:avLst/>
+          </a:prstGeom>
+          <a:noFill/>
+          <a:ln/>
+        </p:spPr>
+        <p:txBody>
+          <a:bodyPr wrap="square" lIns="0" tIns="0" rIns="0" bIns="0" rtlCol="0" anchor="ctr"/>
+          <a:lstStyle/>
+          <a:p>
+            <a:pPr indent="0" marL="0">
+              <a:buNone/>
+            </a:pPr>
+            <a:r>
+              <a:rPr lang="en-US" sz="1100" dirty="0">
+                <a:solidFill>
+                  <a:srgbClr val="A9A09E"/>
+                </a:solidFill>
+                <a:latin typeface="Calibri" pitchFamily="34" charset="0"/>
+                <a:ea typeface="Calibri" pitchFamily="34" charset="-122"/>
+                <a:cs typeface="Calibri" pitchFamily="34" charset="-120"/>
+              </a:rPr>
+              <a:t>1 permission</a:t>
+            </a:r>
+            <a:endParaRPr lang="en-US" sz="1100" dirty="0"/>
+          </a:p>
+        </p:txBody>
+      </p:sp>
+      <p:sp>
+        <p:nvSpPr>
+          <p:cNvPr id="31" name="Text 29"/>
+          <p:cNvSpPr txBox="1"/>
+          <p:nvPr/>
+        </p:nvSpPr>
+        <p:spPr>
+          <a:xfrm>
+            <a:off x="10753344" y="3291840"/>
+            <a:ext cx="566928" cy="594360"/>
+          </a:xfrm>
+          <a:prstGeom prst="rect">
+            <a:avLst/>
+          </a:prstGeom>
+          <a:noFill/>
+          <a:ln/>
+        </p:spPr>
+        <p:txBody>
+          <a:bodyPr wrap="square" lIns="0" tIns="0" rIns="0" bIns="0" rtlCol="0" anchor="ctr"/>
+          <a:lstStyle/>
+          <a:p>
+            <a:pPr algn="r" indent="0" marL="0">
+              <a:buNone/>
+            </a:pPr>
+            <a:r>
+              <a:rPr lang="en-US" sz="2000" b="1" dirty="0">
+                <a:solidFill>
+                  <a:srgbClr val="B8323A"/>
+                </a:solidFill>
+                <a:latin typeface="Cambria" pitchFamily="34" charset="0"/>
+                <a:ea typeface="Cambria" pitchFamily="34" charset="-122"/>
+                <a:cs typeface="Cambria" pitchFamily="34" charset="-120"/>
+              </a:rPr>
+              <a:t>14</a:t>
+            </a:r>
+            <a:endParaRPr lang="en-US" sz="2000" dirty="0"/>
+          </a:p>
+        </p:txBody>
+      </p:sp>
+      <p:sp>
+        <p:nvSpPr>
+          <p:cNvPr id="32" name="Shape 30"/>
+          <p:cNvSpPr/>
+          <p:nvPr/>
+        </p:nvSpPr>
+        <p:spPr>
+          <a:xfrm>
+            <a:off x="566928" y="4114800"/>
+            <a:ext cx="3493008" cy="777240"/>
+          </a:xfrm>
+          <a:prstGeom prst="roundRect">
+            <a:avLst>
+              <a:gd name="adj" fmla="val 7059"/>
+            </a:avLst>
+          </a:prstGeom>
+          <a:solidFill>
+            <a:srgbClr val="1E1A19"/>
+          </a:solidFill>
+          <a:ln w="12700">
+            <a:solidFill>
+              <a:srgbClr val="2C2524"/>
+            </a:solidFill>
+            <a:prstDash val="solid"/>
+          </a:ln>
+        </p:spPr>
+      </p:sp>
+      <p:sp>
+        <p:nvSpPr>
+          <p:cNvPr id="33" name="Text 31"/>
+          <p:cNvSpPr txBox="1"/>
+          <p:nvPr/>
+        </p:nvSpPr>
+        <p:spPr>
+          <a:xfrm>
+            <a:off x="731520" y="4169664"/>
+            <a:ext cx="2560320" cy="384048"/>
+          </a:xfrm>
+          <a:prstGeom prst="rect">
+            <a:avLst/>
+          </a:prstGeom>
+          <a:noFill/>
+          <a:ln/>
+        </p:spPr>
+        <p:txBody>
+          <a:bodyPr wrap="square" lIns="0" tIns="0" rIns="0" bIns="0" rtlCol="0" anchor="t"/>
+          <a:lstStyle/>
+          <a:p>
+            <a:pPr indent="0" marL="0">
+              <a:buNone/>
+            </a:pPr>
+            <a:r>
+              <a:rPr lang="en-US" sz="1200" b="1" dirty="0">
+                <a:solidFill>
+                  <a:srgbClr val="F4F1F0"/>
+                </a:solidFill>
+                <a:latin typeface="Calibri" pitchFamily="34" charset="0"/>
+                <a:ea typeface="Calibri" pitchFamily="34" charset="-122"/>
+                <a:cs typeface="Calibri" pitchFamily="34" charset="-120"/>
+              </a:rPr>
+              <a:t>Delivery</a:t>
+            </a:r>
+            <a:endParaRPr lang="en-US" sz="1200" dirty="0"/>
+          </a:p>
+        </p:txBody>
+      </p:sp>
+      <p:sp>
+        <p:nvSpPr>
+          <p:cNvPr id="34" name="Text 32"/>
+          <p:cNvSpPr txBox="1"/>
+          <p:nvPr/>
+        </p:nvSpPr>
+        <p:spPr>
+          <a:xfrm>
+            <a:off x="731520" y="4526280"/>
+            <a:ext cx="2743200" cy="292608"/>
+          </a:xfrm>
+          <a:prstGeom prst="rect">
+            <a:avLst/>
+          </a:prstGeom>
+          <a:noFill/>
+          <a:ln/>
+        </p:spPr>
+        <p:txBody>
+          <a:bodyPr wrap="square" lIns="0" tIns="0" rIns="0" bIns="0" rtlCol="0" anchor="ctr"/>
+          <a:lstStyle/>
+          <a:p>
+            <a:pPr indent="0" marL="0">
+              <a:buNone/>
+            </a:pPr>
+            <a:r>
+              <a:rPr lang="en-US" sz="1100" dirty="0">
+                <a:solidFill>
+                  <a:srgbClr val="A9A09E"/>
+                </a:solidFill>
+                <a:latin typeface="Calibri" pitchFamily="34" charset="0"/>
+                <a:ea typeface="Calibri" pitchFamily="34" charset="-122"/>
+                <a:cs typeface="Calibri" pitchFamily="34" charset="-120"/>
+              </a:rPr>
+              <a:t>1 permission</a:t>
+            </a:r>
+            <a:endParaRPr lang="en-US" sz="1100" dirty="0"/>
+          </a:p>
+        </p:txBody>
+      </p:sp>
+      <p:sp>
+        <p:nvSpPr>
+          <p:cNvPr id="35" name="Text 33"/>
+          <p:cNvSpPr txBox="1"/>
+          <p:nvPr/>
+        </p:nvSpPr>
+        <p:spPr>
+          <a:xfrm>
+            <a:off x="3328416" y="4206240"/>
+            <a:ext cx="566928" cy="594360"/>
+          </a:xfrm>
+          <a:prstGeom prst="rect">
+            <a:avLst/>
+          </a:prstGeom>
+          <a:noFill/>
+          <a:ln/>
+        </p:spPr>
+        <p:txBody>
+          <a:bodyPr wrap="square" lIns="0" tIns="0" rIns="0" bIns="0" rtlCol="0" anchor="ctr"/>
+          <a:lstStyle/>
+          <a:p>
+            <a:pPr algn="r" indent="0" marL="0">
+              <a:buNone/>
+            </a:pPr>
+            <a:r>
+              <a:rPr lang="en-US" sz="2000" b="1" dirty="0">
+                <a:solidFill>
+                  <a:srgbClr val="B8323A"/>
+                </a:solidFill>
+                <a:latin typeface="Cambria" pitchFamily="34" charset="0"/>
+                <a:ea typeface="Cambria" pitchFamily="34" charset="-122"/>
+                <a:cs typeface="Cambria" pitchFamily="34" charset="-120"/>
+              </a:rPr>
+              <a:t>18</a:t>
+            </a:r>
+            <a:endParaRPr lang="en-US" sz="2000" dirty="0"/>
+          </a:p>
+        </p:txBody>
+      </p:sp>
+      <p:sp>
+        <p:nvSpPr>
+          <p:cNvPr id="36" name="Shape 34"/>
+          <p:cNvSpPr/>
+          <p:nvPr/>
+        </p:nvSpPr>
+        <p:spPr>
+          <a:xfrm>
+            <a:off x="4279392" y="4114800"/>
+            <a:ext cx="3493008" cy="777240"/>
+          </a:xfrm>
+          <a:prstGeom prst="roundRect">
+            <a:avLst>
+              <a:gd name="adj" fmla="val 7059"/>
+            </a:avLst>
+          </a:prstGeom>
+          <a:solidFill>
+            <a:srgbClr val="1E1A19"/>
+          </a:solidFill>
+          <a:ln w="12700">
+            <a:solidFill>
+              <a:srgbClr val="2C2524"/>
+            </a:solidFill>
+            <a:prstDash val="solid"/>
+          </a:ln>
+        </p:spPr>
+      </p:sp>
+      <p:sp>
+        <p:nvSpPr>
+          <p:cNvPr id="37" name="Text 35"/>
+          <p:cNvSpPr txBox="1"/>
+          <p:nvPr/>
+        </p:nvSpPr>
+        <p:spPr>
+          <a:xfrm>
+            <a:off x="4443984" y="4169664"/>
+            <a:ext cx="2560320" cy="384048"/>
+          </a:xfrm>
+          <a:prstGeom prst="rect">
+            <a:avLst/>
+          </a:prstGeom>
+          <a:noFill/>
+          <a:ln/>
+        </p:spPr>
+        <p:txBody>
+          <a:bodyPr wrap="square" lIns="0" tIns="0" rIns="0" bIns="0" rtlCol="0" anchor="t"/>
+          <a:lstStyle/>
+          <a:p>
+            <a:pPr indent="0" marL="0">
+              <a:buNone/>
+            </a:pPr>
+            <a:r>
+              <a:rPr lang="en-US" sz="1200" b="1" dirty="0">
+                <a:solidFill>
+                  <a:srgbClr val="F4F1F0"/>
+                </a:solidFill>
+                <a:latin typeface="Calibri" pitchFamily="34" charset="0"/>
+                <a:ea typeface="Calibri" pitchFamily="34" charset="-122"/>
+                <a:cs typeface="Calibri" pitchFamily="34" charset="-120"/>
+              </a:rPr>
+              <a:t>Creative direction</a:t>
+            </a:r>
+            <a:endParaRPr lang="en-US" sz="1200" dirty="0"/>
+          </a:p>
+        </p:txBody>
+      </p:sp>
+      <p:sp>
+        <p:nvSpPr>
+          <p:cNvPr id="38" name="Text 36"/>
+          <p:cNvSpPr txBox="1"/>
+          <p:nvPr/>
+        </p:nvSpPr>
+        <p:spPr>
+          <a:xfrm>
+            <a:off x="4443984" y="4526280"/>
+            <a:ext cx="2743200" cy="292608"/>
+          </a:xfrm>
+          <a:prstGeom prst="rect">
+            <a:avLst/>
+          </a:prstGeom>
+          <a:noFill/>
+          <a:ln/>
+        </p:spPr>
+        <p:txBody>
+          <a:bodyPr wrap="square" lIns="0" tIns="0" rIns="0" bIns="0" rtlCol="0" anchor="ctr"/>
+          <a:lstStyle/>
+          <a:p>
+            <a:pPr indent="0" marL="0">
+              <a:buNone/>
+            </a:pPr>
+            <a:r>
+              <a:rPr lang="en-US" sz="1100" dirty="0">
+                <a:solidFill>
+                  <a:srgbClr val="A9A09E"/>
+                </a:solidFill>
+                <a:latin typeface="Calibri" pitchFamily="34" charset="0"/>
+                <a:ea typeface="Calibri" pitchFamily="34" charset="-122"/>
+                <a:cs typeface="Calibri" pitchFamily="34" charset="-120"/>
+              </a:rPr>
+              <a:t>2 permissions</a:t>
+            </a:r>
+            <a:endParaRPr lang="en-US" sz="1100" dirty="0"/>
+          </a:p>
+        </p:txBody>
+      </p:sp>
+      <p:sp>
+        <p:nvSpPr>
+          <p:cNvPr id="39" name="Text 37"/>
+          <p:cNvSpPr txBox="1"/>
+          <p:nvPr/>
+        </p:nvSpPr>
+        <p:spPr>
+          <a:xfrm>
+            <a:off x="7040880" y="4206240"/>
+            <a:ext cx="566928" cy="594360"/>
+          </a:xfrm>
+          <a:prstGeom prst="rect">
+            <a:avLst/>
+          </a:prstGeom>
+          <a:noFill/>
+          <a:ln/>
+        </p:spPr>
+        <p:txBody>
+          <a:bodyPr wrap="square" lIns="0" tIns="0" rIns="0" bIns="0" rtlCol="0" anchor="ctr"/>
+          <a:lstStyle/>
+          <a:p>
+            <a:pPr algn="r" indent="0" marL="0">
+              <a:buNone/>
+            </a:pPr>
+            <a:r>
+              <a:rPr lang="en-US" sz="2000" b="1" dirty="0">
+                <a:solidFill>
+                  <a:srgbClr val="B8323A"/>
+                </a:solidFill>
+                <a:latin typeface="Cambria" pitchFamily="34" charset="0"/>
+                <a:ea typeface="Cambria" pitchFamily="34" charset="-122"/>
+                <a:cs typeface="Cambria" pitchFamily="34" charset="-120"/>
+              </a:rPr>
+              <a:t>9</a:t>
+            </a:r>
+            <a:endParaRPr lang="en-US" sz="2000" dirty="0"/>
+          </a:p>
+        </p:txBody>
+      </p:sp>
+      <p:sp>
+        <p:nvSpPr>
+          <p:cNvPr id="40" name="Shape 38"/>
+          <p:cNvSpPr/>
+          <p:nvPr/>
+        </p:nvSpPr>
+        <p:spPr>
+          <a:xfrm>
+            <a:off x="7991856" y="4114800"/>
+            <a:ext cx="3493008" cy="777240"/>
+          </a:xfrm>
+          <a:prstGeom prst="roundRect">
+            <a:avLst>
+              <a:gd name="adj" fmla="val 7059"/>
+            </a:avLst>
+          </a:prstGeom>
+          <a:solidFill>
+            <a:srgbClr val="1E1A19"/>
+          </a:solidFill>
+          <a:ln w="12700">
+            <a:solidFill>
+              <a:srgbClr val="2C2524"/>
+            </a:solidFill>
+            <a:prstDash val="solid"/>
+          </a:ln>
+        </p:spPr>
+      </p:sp>
+      <p:sp>
+        <p:nvSpPr>
+          <p:cNvPr id="41" name="Text 39"/>
+          <p:cNvSpPr txBox="1"/>
+          <p:nvPr/>
+        </p:nvSpPr>
+        <p:spPr>
+          <a:xfrm>
+            <a:off x="8156448" y="4169664"/>
+            <a:ext cx="2560320" cy="384048"/>
+          </a:xfrm>
+          <a:prstGeom prst="rect">
+            <a:avLst/>
+          </a:prstGeom>
+          <a:noFill/>
+          <a:ln/>
+        </p:spPr>
+        <p:txBody>
+          <a:bodyPr wrap="square" lIns="0" tIns="0" rIns="0" bIns="0" rtlCol="0" anchor="t"/>
+          <a:lstStyle/>
+          <a:p>
+            <a:pPr indent="0" marL="0">
+              <a:buNone/>
+            </a:pPr>
+            <a:r>
+              <a:rPr lang="en-US" sz="1200" b="1" dirty="0">
+                <a:solidFill>
+                  <a:srgbClr val="F4F1F0"/>
+                </a:solidFill>
+                <a:latin typeface="Calibri" pitchFamily="34" charset="0"/>
+                <a:ea typeface="Calibri" pitchFamily="34" charset="-122"/>
+                <a:cs typeface="Calibri" pitchFamily="34" charset="-120"/>
+              </a:rPr>
+              <a:t>Administration</a:t>
+            </a:r>
+            <a:endParaRPr lang="en-US" sz="1200" dirty="0"/>
+          </a:p>
+        </p:txBody>
+      </p:sp>
+      <p:sp>
+        <p:nvSpPr>
+          <p:cNvPr id="42" name="Text 40"/>
+          <p:cNvSpPr txBox="1"/>
+          <p:nvPr/>
+        </p:nvSpPr>
+        <p:spPr>
+          <a:xfrm>
+            <a:off x="8156448" y="4526280"/>
+            <a:ext cx="2743200" cy="292608"/>
+          </a:xfrm>
+          <a:prstGeom prst="rect">
+            <a:avLst/>
+          </a:prstGeom>
+          <a:noFill/>
+          <a:ln/>
+        </p:spPr>
+        <p:txBody>
+          <a:bodyPr wrap="square" lIns="0" tIns="0" rIns="0" bIns="0" rtlCol="0" anchor="ctr"/>
+          <a:lstStyle/>
+          <a:p>
+            <a:pPr indent="0" marL="0">
+              <a:buNone/>
+            </a:pPr>
+            <a:r>
+              <a:rPr lang="en-US" sz="1100" dirty="0">
+                <a:solidFill>
+                  <a:srgbClr val="A9A09E"/>
+                </a:solidFill>
+                <a:latin typeface="Calibri" pitchFamily="34" charset="0"/>
+                <a:ea typeface="Calibri" pitchFamily="34" charset="-122"/>
+                <a:cs typeface="Calibri" pitchFamily="34" charset="-120"/>
+              </a:rPr>
+              <a:t>18 permissions</a:t>
+            </a:r>
+            <a:endParaRPr lang="en-US" sz="1100" dirty="0"/>
+          </a:p>
+        </p:txBody>
+      </p:sp>
+      <p:sp>
+        <p:nvSpPr>
+          <p:cNvPr id="43" name="Text 41"/>
+          <p:cNvSpPr txBox="1"/>
+          <p:nvPr/>
+        </p:nvSpPr>
+        <p:spPr>
+          <a:xfrm>
+            <a:off x="10753344" y="4206240"/>
+            <a:ext cx="566928" cy="594360"/>
+          </a:xfrm>
+          <a:prstGeom prst="rect">
+            <a:avLst/>
+          </a:prstGeom>
+          <a:noFill/>
+          <a:ln/>
+        </p:spPr>
+        <p:txBody>
+          <a:bodyPr wrap="square" lIns="0" tIns="0" rIns="0" bIns="0" rtlCol="0" anchor="ctr"/>
+          <a:lstStyle/>
+          <a:p>
+            <a:pPr algn="r" indent="0" marL="0">
+              <a:buNone/>
+            </a:pPr>
+            <a:r>
+              <a:rPr lang="en-US" sz="2000" b="1" dirty="0">
+                <a:solidFill>
+                  <a:srgbClr val="B8323A"/>
+                </a:solidFill>
+                <a:latin typeface="Cambria" pitchFamily="34" charset="0"/>
+                <a:ea typeface="Cambria" pitchFamily="34" charset="-122"/>
+                <a:cs typeface="Cambria" pitchFamily="34" charset="-120"/>
+              </a:rPr>
+              <a:t>8</a:t>
+            </a:r>
+            <a:endParaRPr lang="en-US" sz="2000" dirty="0"/>
+          </a:p>
+        </p:txBody>
+      </p:sp>
+      <p:sp>
+        <p:nvSpPr>
+          <p:cNvPr id="44" name="Shape 42"/>
+          <p:cNvSpPr/>
+          <p:nvPr/>
+        </p:nvSpPr>
+        <p:spPr>
+          <a:xfrm>
+            <a:off x="566928" y="5029200"/>
+            <a:ext cx="3493008" cy="777240"/>
+          </a:xfrm>
+          <a:prstGeom prst="roundRect">
+            <a:avLst>
+              <a:gd name="adj" fmla="val 7059"/>
+            </a:avLst>
+          </a:prstGeom>
+          <a:solidFill>
+            <a:srgbClr val="1E1A19"/>
+          </a:solidFill>
+          <a:ln w="12700">
+            <a:solidFill>
+              <a:srgbClr val="2C2524"/>
+            </a:solidFill>
+            <a:prstDash val="solid"/>
+          </a:ln>
+        </p:spPr>
+      </p:sp>
+      <p:sp>
+        <p:nvSpPr>
+          <p:cNvPr id="45" name="Text 43"/>
+          <p:cNvSpPr txBox="1"/>
+          <p:nvPr/>
+        </p:nvSpPr>
+        <p:spPr>
+          <a:xfrm>
+            <a:off x="731520" y="5084064"/>
+            <a:ext cx="2560320" cy="384048"/>
+          </a:xfrm>
+          <a:prstGeom prst="rect">
+            <a:avLst/>
+          </a:prstGeom>
+          <a:noFill/>
+          <a:ln/>
+        </p:spPr>
+        <p:txBody>
+          <a:bodyPr wrap="square" lIns="0" tIns="0" rIns="0" bIns="0" rtlCol="0" anchor="t"/>
+          <a:lstStyle/>
+          <a:p>
+            <a:pPr indent="0" marL="0">
+              <a:buNone/>
+            </a:pPr>
+            <a:r>
+              <a:rPr lang="en-US" sz="1200" b="1" dirty="0">
+                <a:solidFill>
+                  <a:srgbClr val="F4F1F0"/>
+                </a:solidFill>
+                <a:latin typeface="Calibri" pitchFamily="34" charset="0"/>
+                <a:ea typeface="Calibri" pitchFamily="34" charset="-122"/>
+                <a:cs typeface="Calibri" pitchFamily="34" charset="-120"/>
+              </a:rPr>
+              <a:t>Studio leadership</a:t>
+            </a:r>
+            <a:endParaRPr lang="en-US" sz="1200" dirty="0"/>
+          </a:p>
+        </p:txBody>
+      </p:sp>
+      <p:sp>
+        <p:nvSpPr>
+          <p:cNvPr id="46" name="Text 44"/>
+          <p:cNvSpPr txBox="1"/>
+          <p:nvPr/>
+        </p:nvSpPr>
+        <p:spPr>
+          <a:xfrm>
+            <a:off x="731520" y="5440680"/>
+            <a:ext cx="2743200" cy="292608"/>
+          </a:xfrm>
+          <a:prstGeom prst="rect">
+            <a:avLst/>
+          </a:prstGeom>
+          <a:noFill/>
+          <a:ln/>
+        </p:spPr>
+        <p:txBody>
+          <a:bodyPr wrap="square" lIns="0" tIns="0" rIns="0" bIns="0" rtlCol="0" anchor="ctr"/>
+          <a:lstStyle/>
+          <a:p>
+            <a:pPr indent="0" marL="0">
+              <a:buNone/>
+            </a:pPr>
+            <a:r>
+              <a:rPr lang="en-US" sz="1100" dirty="0">
+                <a:solidFill>
+                  <a:srgbClr val="A9A09E"/>
+                </a:solidFill>
+                <a:latin typeface="Calibri" pitchFamily="34" charset="0"/>
+                <a:ea typeface="Calibri" pitchFamily="34" charset="-122"/>
+                <a:cs typeface="Calibri" pitchFamily="34" charset="-120"/>
+              </a:rPr>
+              <a:t>15 permissions</a:t>
+            </a:r>
+            <a:endParaRPr lang="en-US" sz="1100" dirty="0"/>
+          </a:p>
+        </p:txBody>
+      </p:sp>
+      <p:sp>
+        <p:nvSpPr>
+          <p:cNvPr id="47" name="Text 45"/>
+          <p:cNvSpPr txBox="1"/>
+          <p:nvPr/>
+        </p:nvSpPr>
+        <p:spPr>
+          <a:xfrm>
+            <a:off x="3328416" y="5120640"/>
+            <a:ext cx="566928" cy="594360"/>
+          </a:xfrm>
+          <a:prstGeom prst="rect">
+            <a:avLst/>
+          </a:prstGeom>
+          <a:noFill/>
+          <a:ln/>
+        </p:spPr>
+        <p:txBody>
+          <a:bodyPr wrap="square" lIns="0" tIns="0" rIns="0" bIns="0" rtlCol="0" anchor="ctr"/>
+          <a:lstStyle/>
+          <a:p>
+            <a:pPr algn="r" indent="0" marL="0">
+              <a:buNone/>
+            </a:pPr>
+            <a:r>
+              <a:rPr lang="en-US" sz="2000" b="1" dirty="0">
+                <a:solidFill>
+                  <a:srgbClr val="B8323A"/>
+                </a:solidFill>
+                <a:latin typeface="Cambria" pitchFamily="34" charset="0"/>
+                <a:ea typeface="Cambria" pitchFamily="34" charset="-122"/>
+                <a:cs typeface="Cambria" pitchFamily="34" charset="-120"/>
+              </a:rPr>
+              <a:t>7</a:t>
+            </a:r>
+            <a:endParaRPr lang="en-US" sz="2000" dirty="0"/>
+          </a:p>
+        </p:txBody>
+      </p:sp>
+      <p:sp>
+        <p:nvSpPr>
+          <p:cNvPr id="48" name="Shape 46"/>
+          <p:cNvSpPr/>
+          <p:nvPr/>
+        </p:nvSpPr>
+        <p:spPr>
+          <a:xfrm>
+            <a:off x="4279392" y="5029200"/>
+            <a:ext cx="3493008" cy="777240"/>
+          </a:xfrm>
+          <a:prstGeom prst="roundRect">
+            <a:avLst>
+              <a:gd name="adj" fmla="val 7059"/>
+            </a:avLst>
+          </a:prstGeom>
+          <a:solidFill>
+            <a:srgbClr val="1E1A19"/>
+          </a:solidFill>
+          <a:ln w="12700">
+            <a:solidFill>
+              <a:srgbClr val="2C2524"/>
+            </a:solidFill>
+            <a:prstDash val="solid"/>
+          </a:ln>
+        </p:spPr>
+      </p:sp>
+      <p:sp>
+        <p:nvSpPr>
+          <p:cNvPr id="49" name="Text 47"/>
+          <p:cNvSpPr txBox="1"/>
+          <p:nvPr/>
+        </p:nvSpPr>
+        <p:spPr>
+          <a:xfrm>
+            <a:off x="4443984" y="5084064"/>
+            <a:ext cx="2560320" cy="384048"/>
+          </a:xfrm>
+          <a:prstGeom prst="rect">
+            <a:avLst/>
+          </a:prstGeom>
+          <a:noFill/>
+          <a:ln/>
+        </p:spPr>
+        <p:txBody>
+          <a:bodyPr wrap="square" lIns="0" tIns="0" rIns="0" bIns="0" rtlCol="0" anchor="t"/>
+          <a:lstStyle/>
+          <a:p>
+            <a:pPr indent="0" marL="0">
+              <a:buNone/>
+            </a:pPr>
+            <a:r>
+              <a:rPr lang="en-US" sz="1200" b="1" dirty="0">
+                <a:solidFill>
+                  <a:srgbClr val="F4F1F0"/>
+                </a:solidFill>
+                <a:latin typeface="Calibri" pitchFamily="34" charset="0"/>
+                <a:ea typeface="Calibri" pitchFamily="34" charset="-122"/>
+                <a:cs typeface="Calibri" pitchFamily="34" charset="-120"/>
+              </a:rPr>
+              <a:t>Creative Art Director and Super Admin</a:t>
+            </a:r>
+            <a:endParaRPr lang="en-US" sz="1200" dirty="0"/>
+          </a:p>
+        </p:txBody>
+      </p:sp>
+      <p:sp>
+        <p:nvSpPr>
+          <p:cNvPr id="50" name="Text 48"/>
+          <p:cNvSpPr txBox="1"/>
+          <p:nvPr/>
+        </p:nvSpPr>
+        <p:spPr>
+          <a:xfrm>
+            <a:off x="4443984" y="5440680"/>
+            <a:ext cx="2743200" cy="292608"/>
+          </a:xfrm>
+          <a:prstGeom prst="rect">
+            <a:avLst/>
+          </a:prstGeom>
+          <a:noFill/>
+          <a:ln/>
+        </p:spPr>
+        <p:txBody>
+          <a:bodyPr wrap="square" lIns="0" tIns="0" rIns="0" bIns="0" rtlCol="0" anchor="ctr"/>
+          <a:lstStyle/>
+          <a:p>
+            <a:pPr indent="0" marL="0">
+              <a:buNone/>
+            </a:pPr>
+            <a:r>
+              <a:rPr lang="en-US" sz="1100" dirty="0">
+                <a:solidFill>
+                  <a:srgbClr val="A9A09E"/>
+                </a:solidFill>
+                <a:latin typeface="Calibri" pitchFamily="34" charset="0"/>
+                <a:ea typeface="Calibri" pitchFamily="34" charset="-122"/>
+                <a:cs typeface="Calibri" pitchFamily="34" charset="-120"/>
+              </a:rPr>
+              <a:t>3 permissions</a:t>
+            </a:r>
+            <a:endParaRPr lang="en-US" sz="1100" dirty="0"/>
+          </a:p>
+        </p:txBody>
+      </p:sp>
+      <p:sp>
+        <p:nvSpPr>
+          <p:cNvPr id="51" name="Text 49"/>
+          <p:cNvSpPr txBox="1"/>
+          <p:nvPr/>
+        </p:nvSpPr>
+        <p:spPr>
+          <a:xfrm>
+            <a:off x="7040880" y="5120640"/>
+            <a:ext cx="566928" cy="594360"/>
+          </a:xfrm>
+          <a:prstGeom prst="rect">
+            <a:avLst/>
+          </a:prstGeom>
+          <a:noFill/>
+          <a:ln/>
+        </p:spPr>
+        <p:txBody>
+          <a:bodyPr wrap="square" lIns="0" tIns="0" rIns="0" bIns="0" rtlCol="0" anchor="ctr"/>
+          <a:lstStyle/>
+          <a:p>
+            <a:pPr algn="r" indent="0" marL="0">
+              <a:buNone/>
+            </a:pPr>
+            <a:r>
+              <a:rPr lang="en-US" sz="2000" b="1" dirty="0">
+                <a:solidFill>
+                  <a:srgbClr val="B8323A"/>
+                </a:solidFill>
+                <a:latin typeface="Cambria" pitchFamily="34" charset="0"/>
+                <a:ea typeface="Cambria" pitchFamily="34" charset="-122"/>
+                <a:cs typeface="Cambria" pitchFamily="34" charset="-120"/>
+              </a:rPr>
+              <a:t>2</a:t>
+            </a:r>
+            <a:endParaRPr lang="en-US" sz="2000" dirty="0"/>
+          </a:p>
+        </p:txBody>
+      </p:sp>
+      <p:sp>
+        <p:nvSpPr>
+          <p:cNvPr id="52" name="Shape 50"/>
+          <p:cNvSpPr/>
+          <p:nvPr/>
+        </p:nvSpPr>
+        <p:spPr>
+          <a:xfrm>
+            <a:off x="7991856" y="5029200"/>
+            <a:ext cx="3493008" cy="777240"/>
+          </a:xfrm>
+          <a:prstGeom prst="roundRect">
+            <a:avLst>
+              <a:gd name="adj" fmla="val 7059"/>
+            </a:avLst>
+          </a:prstGeom>
+          <a:solidFill>
+            <a:srgbClr val="1E1A19"/>
+          </a:solidFill>
+          <a:ln w="12700">
+            <a:solidFill>
+              <a:srgbClr val="2C2524"/>
+            </a:solidFill>
+            <a:prstDash val="solid"/>
+          </a:ln>
+        </p:spPr>
+      </p:sp>
+      <p:sp>
+        <p:nvSpPr>
+          <p:cNvPr id="53" name="Text 51"/>
+          <p:cNvSpPr txBox="1"/>
+          <p:nvPr/>
+        </p:nvSpPr>
+        <p:spPr>
+          <a:xfrm>
+            <a:off x="8156448" y="5084064"/>
+            <a:ext cx="2560320" cy="384048"/>
+          </a:xfrm>
+          <a:prstGeom prst="rect">
+            <a:avLst/>
+          </a:prstGeom>
+          <a:noFill/>
+          <a:ln/>
+        </p:spPr>
+        <p:txBody>
+          <a:bodyPr wrap="square" lIns="0" tIns="0" rIns="0" bIns="0" rtlCol="0" anchor="t"/>
+          <a:lstStyle/>
+          <a:p>
+            <a:pPr indent="0" marL="0">
+              <a:buNone/>
+            </a:pPr>
+            <a:r>
+              <a:rPr lang="en-US" sz="1200" b="1" dirty="0">
+                <a:solidFill>
+                  <a:srgbClr val="F4F1F0"/>
+                </a:solidFill>
+                <a:latin typeface="Calibri" pitchFamily="34" charset="0"/>
+                <a:ea typeface="Calibri" pitchFamily="34" charset="-122"/>
+                <a:cs typeface="Calibri" pitchFamily="34" charset="-120"/>
+              </a:rPr>
+              <a:t>Super Admin only</a:t>
+            </a:r>
+            <a:endParaRPr lang="en-US" sz="1200" dirty="0"/>
+          </a:p>
+        </p:txBody>
+      </p:sp>
+      <p:sp>
+        <p:nvSpPr>
+          <p:cNvPr id="54" name="Text 52"/>
+          <p:cNvSpPr txBox="1"/>
+          <p:nvPr/>
+        </p:nvSpPr>
+        <p:spPr>
+          <a:xfrm>
+            <a:off x="8156448" y="5440680"/>
+            <a:ext cx="2743200" cy="292608"/>
+          </a:xfrm>
+          <a:prstGeom prst="rect">
+            <a:avLst/>
+          </a:prstGeom>
+          <a:noFill/>
+          <a:ln/>
+        </p:spPr>
+        <p:txBody>
+          <a:bodyPr wrap="square" lIns="0" tIns="0" rIns="0" bIns="0" rtlCol="0" anchor="ctr"/>
+          <a:lstStyle/>
+          <a:p>
+            <a:pPr indent="0" marL="0">
+              <a:buNone/>
+            </a:pPr>
+            <a:r>
+              <a:rPr lang="en-US" sz="1100" dirty="0">
+                <a:solidFill>
+                  <a:srgbClr val="A9A09E"/>
+                </a:solidFill>
+                <a:latin typeface="Calibri" pitchFamily="34" charset="0"/>
+                <a:ea typeface="Calibri" pitchFamily="34" charset="-122"/>
+                <a:cs typeface="Calibri" pitchFamily="34" charset="-120"/>
+              </a:rPr>
+              <a:t>9 permissions</a:t>
+            </a:r>
+            <a:endParaRPr lang="en-US" sz="1100" dirty="0"/>
+          </a:p>
+        </p:txBody>
+      </p:sp>
+      <p:sp>
+        <p:nvSpPr>
+          <p:cNvPr id="55" name="Text 53"/>
+          <p:cNvSpPr txBox="1"/>
+          <p:nvPr/>
+        </p:nvSpPr>
+        <p:spPr>
+          <a:xfrm>
+            <a:off x="10753344" y="5120640"/>
+            <a:ext cx="566928" cy="594360"/>
+          </a:xfrm>
+          <a:prstGeom prst="rect">
+            <a:avLst/>
+          </a:prstGeom>
+          <a:noFill/>
+          <a:ln/>
+        </p:spPr>
+        <p:txBody>
+          <a:bodyPr wrap="square" lIns="0" tIns="0" rIns="0" bIns="0" rtlCol="0" anchor="ctr"/>
+          <a:lstStyle/>
+          <a:p>
+            <a:pPr algn="r" indent="0" marL="0">
+              <a:buNone/>
+            </a:pPr>
+            <a:r>
+              <a:rPr lang="en-US" sz="2000" b="1" dirty="0">
+                <a:solidFill>
+                  <a:srgbClr val="B8323A"/>
+                </a:solidFill>
+                <a:latin typeface="Cambria" pitchFamily="34" charset="0"/>
+                <a:ea typeface="Cambria" pitchFamily="34" charset="-122"/>
+                <a:cs typeface="Cambria" pitchFamily="34" charset="-120"/>
+              </a:rPr>
+              <a:t>1</a:t>
+            </a:r>
+            <a:endParaRPr lang="en-US" sz="2000" dirty="0"/>
+          </a:p>
+        </p:txBody>
+      </p:sp>
+      <p:sp>
+        <p:nvSpPr>
+          <p:cNvPr id="56" name="Text 54"/>
+          <p:cNvSpPr txBox="1"/>
+          <p:nvPr/>
+        </p:nvSpPr>
+        <p:spPr>
+          <a:xfrm>
+            <a:off x="566928" y="5989320"/>
+            <a:ext cx="10881360" cy="548640"/>
+          </a:xfrm>
+          <a:prstGeom prst="rect">
+            <a:avLst/>
+          </a:prstGeom>
+          <a:noFill/>
+          <a:ln/>
+        </p:spPr>
+        <p:txBody>
+          <a:bodyPr wrap="square" lIns="0" tIns="0" rIns="0" bIns="0" rtlCol="0" anchor="ctr"/>
+          <a:lstStyle/>
+          <a:p>
+            <a:pPr indent="0" marL="0">
+              <a:buNone/>
+            </a:pPr>
+            <a:r>
+              <a:rPr lang="en-US" sz="1300" dirty="0">
+                <a:solidFill>
+                  <a:srgbClr val="A9A09E"/>
+                </a:solidFill>
+                <a:latin typeface="Calibri" pitchFamily="34" charset="0"/>
+                <a:ea typeface="Calibri" pitchFamily="34" charset="-122"/>
+                <a:cs typeface="Calibri" pitchFamily="34" charset="-120"/>
+              </a:rPr>
+              <a:t>The large number on each card is how many designations hold that band. Super Admin holds everything, including any permission added in future, without anybody switching it on.</a:t>
+            </a:r>
+            <a:endParaRPr lang="en-US" sz="1300" dirty="0"/>
           </a:p>
         </p:txBody>
       </p:sp>
@@ -15812,7 +15925,7 @@
                 <a:ea typeface="Calibri" pitchFamily="34" charset="-122"/>
                 <a:cs typeface="Calibri" pitchFamily="34" charset="-120"/>
               </a:rPr>
-              <a:t>ACTIVITY LOG</a:t>
+              <a:t>PERMISSIONS</a:t>
             </a:r>
             <a:endParaRPr lang="en-US" sz="1100" dirty="0"/>
           </a:p>
@@ -15851,7 +15964,7 @@
                 <a:ea typeface="Cambria" pitchFamily="34" charset="-122"/>
                 <a:cs typeface="Cambria" pitchFamily="34" charset="-120"/>
               </a:rPr>
-              <a:t>One record that crosses every module</a:t>
+              <a:t>One screen decides what everybody else may do</a:t>
             </a:r>
             <a:endParaRPr lang="en-US" sz="3400" dirty="0"/>
           </a:p>
@@ -15897,7 +16010,7 @@
                 <a:ea typeface="Calibri" pitchFamily="34" charset="-122"/>
                 <a:cs typeface="Calibri" pitchFamily="34" charset="-120"/>
               </a:rPr>
-              <a:t>Every action anybody takes, newest first, with the person’s name and designation.</a:t>
+              <a:t>Choose a designation, tick the actions it should hold, save.</a:t>
             </a:r>
             <a:endParaRPr lang="en-US" sz="1400" dirty="0"/>
           </a:p>
@@ -15921,7 +16034,7 @@
                 <a:ea typeface="Calibri" pitchFamily="34" charset="-122"/>
                 <a:cs typeface="Calibri" pitchFamily="34" charset="-120"/>
               </a:rPr>
-              <a:t>Filter by person, module, action or date; search the text.</a:t>
+              <a:t>The change applies to everybody holding that designation, on their next request.</a:t>
             </a:r>
             <a:endParaRPr lang="en-US" sz="1400" dirty="0"/>
           </a:p>
@@ -15945,7 +16058,7 @@
                 <a:ea typeface="Calibri" pitchFamily="34" charset="-122"/>
                 <a:cs typeface="Calibri" pitchFamily="34" charset="-120"/>
               </a:rPr>
-              <a:t>Where a change has a before and an after, the entry shows both.</a:t>
+              <a:t>Super Admin holds every permission and cannot be edited down.</a:t>
             </a:r>
             <a:endParaRPr lang="en-US" sz="1400" dirty="0"/>
           </a:p>
@@ -15969,31 +16082,7 @@
                 <a:ea typeface="Calibri" pitchFamily="34" charset="-122"/>
                 <a:cs typeface="Calibri" pitchFamily="34" charset="-120"/>
               </a:rPr>
-              <a:t>Nothing here can be edited or removed, from this screen or any other.</a:t>
-            </a:r>
-            <a:endParaRPr lang="en-US" sz="1400" dirty="0"/>
-          </a:p>
-          <a:p>
-            <a:pPr marL="342900" indent="-342900">
-              <a:lnSpc>
-                <a:spcPts val="2000"/>
-              </a:lnSpc>
-              <a:spcAft>
-                <a:spcPts val="1000"/>
-              </a:spcAft>
-              <a:buSzPct val="100000"/>
-              <a:buChar char="•"/>
-            </a:pPr>
-            <a:r>
-              <a:rPr lang="en-US" sz="1400" dirty="0">
-                <a:solidFill>
-                  <a:srgbClr val="F4F1F0"/>
-                </a:solidFill>
-                <a:latin typeface="Calibri" pitchFamily="34" charset="0"/>
-                <a:ea typeface="Calibri" pitchFamily="34" charset="-122"/>
-                <a:cs typeface="Calibri" pitchFamily="34" charset="-120"/>
-              </a:rPr>
-              <a:t>The asset history, the review trail and the time-sheet log all still exist — this is the view that crosses them.</a:t>
+              <a:t>Every change is written to the Activity Log — the designation, the permission and the direction.</a:t>
             </a:r>
             <a:endParaRPr lang="en-US" sz="1400" dirty="0"/>
           </a:p>
@@ -16073,7 +16162,7 @@
                 <a:ea typeface="Calibri" pitchFamily="34" charset="-122"/>
                 <a:cs typeface="Calibri" pitchFamily="34" charset="-120"/>
               </a:rPr>
-              <a:t>Studio leadership — 7 designations. Readable, filterable, exportable, editable by nobody.</a:t>
+              <a:t>Super Admin, and nobody else.</a:t>
             </a:r>
             <a:endParaRPr lang="en-US" sz="1000" dirty="0"/>
           </a:p>
@@ -16095,8 +16184,8 @@
         </p:blipFill>
         <p:spPr>
           <a:xfrm>
-            <a:off x="5989320" y="1528779"/>
-            <a:ext cx="5632704" cy="4166201"/>
+            <a:off x="5989320" y="1570441"/>
+            <a:ext cx="5632704" cy="4082877"/>
           </a:xfrm>
           <a:prstGeom prst="rect">
             <a:avLst/>
@@ -16118,7 +16207,7 @@
         </p:nvSpPr>
         <p:spPr>
           <a:xfrm>
-            <a:off x="5989320" y="5804709"/>
+            <a:off x="5989320" y="5763047"/>
             <a:ext cx="5632704" cy="457200"/>
           </a:xfrm>
           <a:prstGeom prst="rect">
@@ -16143,7 +16232,7 @@
                 <a:ea typeface="Calibri" pitchFamily="34" charset="-122"/>
                 <a:cs typeface="Calibri" pitchFamily="34" charset="-120"/>
               </a:rPr>
-              <a:t>The Activity Log (first screenful).</a:t>
+              <a:t>The permission grid for one designation (first screenful).</a:t>
             </a:r>
             <a:endParaRPr lang="en-US" sz="1000" dirty="0"/>
           </a:p>
@@ -16163,7 +16252,7 @@
     <p:bg>
       <p:bgPr>
         <a:solidFill>
-          <a:srgbClr val="0B0908"/>
+          <a:srgbClr val="141110"/>
         </a:solidFill>
       </p:bgPr>
     </p:bg>
@@ -16314,7 +16403,7 @@
                 <a:ea typeface="Calibri" pitchFamily="34" charset="-122"/>
                 <a:cs typeface="Calibri" pitchFamily="34" charset="-120"/>
               </a:rPr>
-              <a:t>KEEPING IT CURRENT</a:t>
+              <a:t>ACTIVITY LOG</a:t>
             </a:r>
             <a:endParaRPr lang="en-US" sz="1100" dirty="0"/>
           </a:p>
@@ -16353,7 +16442,7 @@
                 <a:ea typeface="Cambria" pitchFamily="34" charset="-122"/>
                 <a:cs typeface="Cambria" pitchFamily="34" charset="-120"/>
               </a:rPr>
-              <a:t>The documentation is built, not written</a:t>
+              <a:t>One record that crosses every module</a:t>
             </a:r>
             <a:endParaRPr lang="en-US" sz="3400" dirty="0"/>
           </a:p>
@@ -16361,18 +16450,160 @@
       </p:sp>
       <p:sp>
         <p:nvSpPr>
-          <p:cNvPr id="7" name="Shape 5"/>
+          <p:cNvPr id="7" name="Text 5"/>
+          <p:cNvSpPr txBox="1"/>
+          <p:nvPr/>
+        </p:nvSpPr>
+        <p:spPr>
+          <a:xfrm>
+            <a:off x="566928" y="1828800"/>
+            <a:ext cx="4937760" cy="3200400"/>
+          </a:xfrm>
+          <a:prstGeom prst="rect">
+            <a:avLst/>
+          </a:prstGeom>
+          <a:noFill/>
+          <a:ln/>
+        </p:spPr>
+        <p:txBody>
+          <a:bodyPr wrap="square" rtlCol="0" anchor="ctr"/>
+          <a:lstStyle/>
+          <a:p>
+            <a:pPr marL="342900" indent="-342900">
+              <a:lnSpc>
+                <a:spcPts val="2000"/>
+              </a:lnSpc>
+              <a:spcAft>
+                <a:spcPts val="1000"/>
+              </a:spcAft>
+              <a:buSzPct val="100000"/>
+              <a:buChar char="•"/>
+            </a:pPr>
+            <a:r>
+              <a:rPr lang="en-US" sz="1400" dirty="0">
+                <a:solidFill>
+                  <a:srgbClr val="F4F1F0"/>
+                </a:solidFill>
+                <a:latin typeface="Calibri" pitchFamily="34" charset="0"/>
+                <a:ea typeface="Calibri" pitchFamily="34" charset="-122"/>
+                <a:cs typeface="Calibri" pitchFamily="34" charset="-120"/>
+              </a:rPr>
+              <a:t>Every action anybody takes, newest first, with the person’s name and designation.</a:t>
+            </a:r>
+            <a:endParaRPr lang="en-US" sz="1400" dirty="0"/>
+          </a:p>
+          <a:p>
+            <a:pPr marL="342900" indent="-342900">
+              <a:lnSpc>
+                <a:spcPts val="2000"/>
+              </a:lnSpc>
+              <a:spcAft>
+                <a:spcPts val="1000"/>
+              </a:spcAft>
+              <a:buSzPct val="100000"/>
+              <a:buChar char="•"/>
+            </a:pPr>
+            <a:r>
+              <a:rPr lang="en-US" sz="1400" dirty="0">
+                <a:solidFill>
+                  <a:srgbClr val="F4F1F0"/>
+                </a:solidFill>
+                <a:latin typeface="Calibri" pitchFamily="34" charset="0"/>
+                <a:ea typeface="Calibri" pitchFamily="34" charset="-122"/>
+                <a:cs typeface="Calibri" pitchFamily="34" charset="-120"/>
+              </a:rPr>
+              <a:t>Filter by person, module, action or date; search the text.</a:t>
+            </a:r>
+            <a:endParaRPr lang="en-US" sz="1400" dirty="0"/>
+          </a:p>
+          <a:p>
+            <a:pPr marL="342900" indent="-342900">
+              <a:lnSpc>
+                <a:spcPts val="2000"/>
+              </a:lnSpc>
+              <a:spcAft>
+                <a:spcPts val="1000"/>
+              </a:spcAft>
+              <a:buSzPct val="100000"/>
+              <a:buChar char="•"/>
+            </a:pPr>
+            <a:r>
+              <a:rPr lang="en-US" sz="1400" dirty="0">
+                <a:solidFill>
+                  <a:srgbClr val="F4F1F0"/>
+                </a:solidFill>
+                <a:latin typeface="Calibri" pitchFamily="34" charset="0"/>
+                <a:ea typeface="Calibri" pitchFamily="34" charset="-122"/>
+                <a:cs typeface="Calibri" pitchFamily="34" charset="-120"/>
+              </a:rPr>
+              <a:t>Where a change has a before and an after, the entry shows both.</a:t>
+            </a:r>
+            <a:endParaRPr lang="en-US" sz="1400" dirty="0"/>
+          </a:p>
+          <a:p>
+            <a:pPr marL="342900" indent="-342900">
+              <a:lnSpc>
+                <a:spcPts val="2000"/>
+              </a:lnSpc>
+              <a:spcAft>
+                <a:spcPts val="1000"/>
+              </a:spcAft>
+              <a:buSzPct val="100000"/>
+              <a:buChar char="•"/>
+            </a:pPr>
+            <a:r>
+              <a:rPr lang="en-US" sz="1400" dirty="0">
+                <a:solidFill>
+                  <a:srgbClr val="F4F1F0"/>
+                </a:solidFill>
+                <a:latin typeface="Calibri" pitchFamily="34" charset="0"/>
+                <a:ea typeface="Calibri" pitchFamily="34" charset="-122"/>
+                <a:cs typeface="Calibri" pitchFamily="34" charset="-120"/>
+              </a:rPr>
+              <a:t>Nothing here can be edited or removed, from this screen or any other.</a:t>
+            </a:r>
+            <a:endParaRPr lang="en-US" sz="1400" dirty="0"/>
+          </a:p>
+          <a:p>
+            <a:pPr marL="342900" indent="-342900">
+              <a:lnSpc>
+                <a:spcPts val="2000"/>
+              </a:lnSpc>
+              <a:spcAft>
+                <a:spcPts val="1000"/>
+              </a:spcAft>
+              <a:buSzPct val="100000"/>
+              <a:buChar char="•"/>
+            </a:pPr>
+            <a:r>
+              <a:rPr lang="en-US" sz="1400" dirty="0">
+                <a:solidFill>
+                  <a:srgbClr val="F4F1F0"/>
+                </a:solidFill>
+                <a:latin typeface="Calibri" pitchFamily="34" charset="0"/>
+                <a:ea typeface="Calibri" pitchFamily="34" charset="-122"/>
+                <a:cs typeface="Calibri" pitchFamily="34" charset="-120"/>
+              </a:rPr>
+              <a:t>The asset history, the review trail and the time-sheet log all still exist — this is the view that crosses them.</a:t>
+            </a:r>
+            <a:endParaRPr lang="en-US" sz="1400" dirty="0"/>
+          </a:p>
+        </p:txBody>
+      </p:sp>
+      <p:sp>
+        <p:nvSpPr>
+          <p:cNvPr id="8" name="Shape 6"/>
           <p:cNvSpPr/>
           <p:nvPr/>
         </p:nvSpPr>
         <p:spPr>
           <a:xfrm>
-            <a:off x="566928" y="2011680"/>
-            <a:ext cx="3493008" cy="2148840"/>
+            <a:off x="566928" y="5532120"/>
+            <a:ext cx="4937760" cy="777240"/>
           </a:xfrm>
           <a:prstGeom prst="roundRect">
             <a:avLst>
-              <a:gd name="adj" fmla="val 3404"/>
+              <a:gd name="adj" fmla="val 7059"/>
             </a:avLst>
           </a:prstGeom>
           <a:solidFill>
@@ -16388,14 +16619,14 @@
       </p:sp>
       <p:sp>
         <p:nvSpPr>
-          <p:cNvPr id="8" name="Text 6"/>
-          <p:cNvSpPr txBox="1"/>
-          <p:nvPr/>
-        </p:nvSpPr>
-        <p:spPr>
-          <a:xfrm>
-            <a:off x="795528" y="2194560"/>
-            <a:ext cx="3017520" cy="365760"/>
+          <p:cNvPr id="9" name="Text 7"/>
+          <p:cNvSpPr txBox="1"/>
+          <p:nvPr/>
+        </p:nvSpPr>
+        <p:spPr>
+          <a:xfrm>
+            <a:off x="749808" y="5532120"/>
+            <a:ext cx="4572000" cy="777240"/>
           </a:xfrm>
           <a:prstGeom prst="rect">
             <a:avLst/>
@@ -16411,45 +16642,17 @@
               <a:buNone/>
             </a:pPr>
             <a:r>
-              <a:rPr lang="en-US" sz="1500" b="1" dirty="0">
+              <a:rPr lang="en-US" sz="1000" b="1" spc="200" kern="0" dirty="0">
                 <a:solidFill>
                   <a:srgbClr val="B8323A"/>
                 </a:solidFill>
-                <a:latin typeface="Cambria" pitchFamily="34" charset="0"/>
-                <a:ea typeface="Cambria" pitchFamily="34" charset="-122"/>
-                <a:cs typeface="Cambria" pitchFamily="34" charset="-120"/>
-              </a:rPr>
-              <a:t>Screenshots</a:t>
-            </a:r>
-            <a:endParaRPr lang="en-US" sz="1500" dirty="0"/>
-          </a:p>
-        </p:txBody>
-      </p:sp>
-      <p:sp>
-        <p:nvSpPr>
-          <p:cNvPr id="9" name="Text 7"/>
-          <p:cNvSpPr txBox="1"/>
-          <p:nvPr/>
-        </p:nvSpPr>
-        <p:spPr>
-          <a:xfrm>
-            <a:off x="795528" y="2606040"/>
-            <a:ext cx="3063240" cy="1417320"/>
-          </a:xfrm>
-          <a:prstGeom prst="rect">
-            <a:avLst/>
-          </a:prstGeom>
-          <a:noFill/>
-          <a:ln/>
-        </p:spPr>
-        <p:txBody>
-          <a:bodyPr wrap="square" lIns="0" tIns="0" rIns="0" bIns="0" rtlCol="0" anchor="t"/>
-          <a:lstStyle/>
-          <a:p>
+                <a:latin typeface="Calibri" pitchFamily="34" charset="0"/>
+                <a:ea typeface="Calibri" pitchFamily="34" charset="-122"/>
+                <a:cs typeface="Calibri" pitchFamily="34" charset="-120"/>
+              </a:rPr>
+              <a:t>WHO  </a:t>
+            </a:r>
             <a:pPr indent="0" marL="0">
-              <a:lnSpc>
-                <a:spcPts val="1700"/>
-              </a:lnSpc>
               <a:buNone/>
             </a:pPr>
             <a:r>
@@ -16461,382 +16664,79 @@
                 <a:ea typeface="Calibri" pitchFamily="34" charset="-122"/>
                 <a:cs typeface="Calibri" pitchFamily="34" charset="-120"/>
               </a:rPr>
-              <a:t>Captured by a script that signs in as each demo designation and drives the real buttons. A rebuild cannot leave last month’s picture behind.</a:t>
-            </a:r>
-            <a:endParaRPr lang="en-US" sz="1200" dirty="0"/>
-          </a:p>
-        </p:txBody>
-      </p:sp>
-      <p:sp>
-        <p:nvSpPr>
-          <p:cNvPr id="10" name="Shape 8"/>
-          <p:cNvSpPr/>
-          <p:nvPr/>
-        </p:nvSpPr>
-        <p:spPr>
-          <a:xfrm>
-            <a:off x="4279392" y="2011680"/>
-            <a:ext cx="3493008" cy="2148840"/>
-          </a:xfrm>
-          <a:prstGeom prst="roundRect">
-            <a:avLst>
-              <a:gd name="adj" fmla="val 3404"/>
-            </a:avLst>
-          </a:prstGeom>
-          <a:solidFill>
-            <a:srgbClr val="1E1A19"/>
-          </a:solidFill>
-          <a:ln w="12700">
-            <a:solidFill>
-              <a:srgbClr val="2C2524"/>
-            </a:solidFill>
-            <a:prstDash val="solid"/>
-          </a:ln>
-        </p:spPr>
-      </p:sp>
-      <p:sp>
-        <p:nvSpPr>
-          <p:cNvPr id="11" name="Text 9"/>
-          <p:cNvSpPr txBox="1"/>
-          <p:nvPr/>
-        </p:nvSpPr>
-        <p:spPr>
-          <a:xfrm>
-            <a:off x="4507992" y="2194560"/>
-            <a:ext cx="3017520" cy="365760"/>
-          </a:xfrm>
-          <a:prstGeom prst="rect">
-            <a:avLst/>
-          </a:prstGeom>
-          <a:noFill/>
-          <a:ln/>
-        </p:spPr>
-        <p:txBody>
-          <a:bodyPr wrap="square" lIns="0" tIns="0" rIns="0" bIns="0" rtlCol="0" anchor="ctr"/>
-          <a:lstStyle/>
-          <a:p>
-            <a:pPr indent="0" marL="0">
-              <a:buNone/>
-            </a:pPr>
-            <a:r>
-              <a:rPr lang="en-US" sz="1500" b="1" dirty="0">
-                <a:solidFill>
-                  <a:srgbClr val="B8323A"/>
-                </a:solidFill>
-                <a:latin typeface="Cambria" pitchFamily="34" charset="0"/>
-                <a:ea typeface="Cambria" pitchFamily="34" charset="-122"/>
-                <a:cs typeface="Cambria" pitchFamily="34" charset="-120"/>
-              </a:rPr>
-              <a:t>Permission tables</a:t>
-            </a:r>
-            <a:endParaRPr lang="en-US" sz="1500" dirty="0"/>
-          </a:p>
-        </p:txBody>
-      </p:sp>
-      <p:sp>
-        <p:nvSpPr>
-          <p:cNvPr id="12" name="Text 10"/>
-          <p:cNvSpPr txBox="1"/>
-          <p:nvPr/>
-        </p:nvSpPr>
-        <p:spPr>
-          <a:xfrm>
-            <a:off x="4507992" y="2606040"/>
-            <a:ext cx="3063240" cy="1417320"/>
-          </a:xfrm>
-          <a:prstGeom prst="rect">
-            <a:avLst/>
-          </a:prstGeom>
-          <a:noFill/>
-          <a:ln/>
-        </p:spPr>
-        <p:txBody>
-          <a:bodyPr wrap="square" lIns="0" tIns="0" rIns="0" bIns="0" rtlCol="0" anchor="t"/>
-          <a:lstStyle/>
-          <a:p>
-            <a:pPr indent="0" marL="0">
-              <a:lnSpc>
-                <a:spcPts val="1700"/>
-              </a:lnSpc>
-              <a:buNone/>
-            </a:pPr>
-            <a:r>
-              <a:rPr lang="en-US" sz="1200" dirty="0">
-                <a:solidFill>
-                  <a:srgbClr val="F4F1F0"/>
-                </a:solidFill>
-                <a:latin typeface="Calibri" pitchFamily="34" charset="0"/>
-                <a:ea typeface="Calibri" pitchFamily="34" charset="-122"/>
-                <a:cs typeface="Calibri" pitchFamily="34" charset="-120"/>
-              </a:rPr>
-              <a:t>Read out of a pristine deployment, so they say what the software ships with rather than what somebody remembers.</a:t>
-            </a:r>
-            <a:endParaRPr lang="en-US" sz="1200" dirty="0"/>
-          </a:p>
-        </p:txBody>
-      </p:sp>
-      <p:sp>
-        <p:nvSpPr>
-          <p:cNvPr id="13" name="Shape 11"/>
-          <p:cNvSpPr/>
-          <p:nvPr/>
-        </p:nvSpPr>
-        <p:spPr>
-          <a:xfrm>
-            <a:off x="7991856" y="2011680"/>
-            <a:ext cx="3493008" cy="2148840"/>
-          </a:xfrm>
-          <a:prstGeom prst="roundRect">
-            <a:avLst>
-              <a:gd name="adj" fmla="val 3404"/>
-            </a:avLst>
-          </a:prstGeom>
-          <a:solidFill>
-            <a:srgbClr val="1E1A19"/>
-          </a:solidFill>
-          <a:ln w="12700">
-            <a:solidFill>
-              <a:srgbClr val="2C2524"/>
-            </a:solidFill>
-            <a:prstDash val="solid"/>
-          </a:ln>
-        </p:spPr>
-      </p:sp>
-      <p:sp>
-        <p:nvSpPr>
-          <p:cNvPr id="14" name="Text 12"/>
-          <p:cNvSpPr txBox="1"/>
-          <p:nvPr/>
-        </p:nvSpPr>
-        <p:spPr>
-          <a:xfrm>
-            <a:off x="8220456" y="2194560"/>
-            <a:ext cx="3017520" cy="365760"/>
-          </a:xfrm>
-          <a:prstGeom prst="rect">
-            <a:avLst/>
-          </a:prstGeom>
-          <a:noFill/>
-          <a:ln/>
-        </p:spPr>
-        <p:txBody>
-          <a:bodyPr wrap="square" lIns="0" tIns="0" rIns="0" bIns="0" rtlCol="0" anchor="ctr"/>
-          <a:lstStyle/>
-          <a:p>
-            <a:pPr indent="0" marL="0">
-              <a:buNone/>
-            </a:pPr>
-            <a:r>
-              <a:rPr lang="en-US" sz="1500" b="1" dirty="0">
-                <a:solidFill>
-                  <a:srgbClr val="B8323A"/>
-                </a:solidFill>
-                <a:latin typeface="Cambria" pitchFamily="34" charset="0"/>
-                <a:ea typeface="Cambria" pitchFamily="34" charset="-122"/>
-                <a:cs typeface="Cambria" pitchFamily="34" charset="-120"/>
-              </a:rPr>
-              <a:t>Access bands</a:t>
-            </a:r>
-            <a:endParaRPr lang="en-US" sz="1500" dirty="0"/>
-          </a:p>
-        </p:txBody>
-      </p:sp>
-      <p:sp>
-        <p:nvSpPr>
-          <p:cNvPr id="15" name="Text 13"/>
-          <p:cNvSpPr txBox="1"/>
-          <p:nvPr/>
-        </p:nvSpPr>
-        <p:spPr>
-          <a:xfrm>
-            <a:off x="8220456" y="2606040"/>
-            <a:ext cx="3063240" cy="1417320"/>
-          </a:xfrm>
-          <a:prstGeom prst="rect">
-            <a:avLst/>
-          </a:prstGeom>
-          <a:noFill/>
-          <a:ln/>
-        </p:spPr>
-        <p:txBody>
-          <a:bodyPr wrap="square" lIns="0" tIns="0" rIns="0" bIns="0" rtlCol="0" anchor="t"/>
-          <a:lstStyle/>
-          <a:p>
-            <a:pPr indent="0" marL="0">
-              <a:lnSpc>
-                <a:spcPts val="1700"/>
-              </a:lnSpc>
-              <a:buNone/>
-            </a:pPr>
-            <a:r>
-              <a:rPr lang="en-US" sz="1200" dirty="0">
-                <a:solidFill>
-                  <a:srgbClr val="F4F1F0"/>
-                </a:solidFill>
-                <a:latin typeface="Calibri" pitchFamily="34" charset="0"/>
-                <a:ea typeface="Calibri" pitchFamily="34" charset="-122"/>
-                <a:cs typeface="Calibri" pitchFamily="34" charset="-120"/>
-              </a:rPr>
-              <a:t>Derived from those tables. A new permission appears in the manual on the next build with nobody editing it.</a:t>
-            </a:r>
-            <a:endParaRPr lang="en-US" sz="1200" dirty="0"/>
-          </a:p>
-        </p:txBody>
-      </p:sp>
-      <p:sp>
-        <p:nvSpPr>
-          <p:cNvPr id="16" name="Text 14"/>
-          <p:cNvSpPr txBox="1"/>
-          <p:nvPr/>
-        </p:nvSpPr>
-        <p:spPr>
-          <a:xfrm>
-            <a:off x="566928" y="4434840"/>
-            <a:ext cx="10881360" cy="365760"/>
-          </a:xfrm>
-          <a:prstGeom prst="rect">
-            <a:avLst/>
-          </a:prstGeom>
-          <a:noFill/>
-          <a:ln/>
-        </p:spPr>
-        <p:txBody>
-          <a:bodyPr wrap="square" lIns="0" tIns="0" rIns="0" bIns="0" rtlCol="0" anchor="ctr"/>
-          <a:lstStyle/>
-          <a:p>
-            <a:pPr indent="0" marL="0">
-              <a:buNone/>
-            </a:pPr>
-            <a:r>
-              <a:rPr lang="en-US" sz="1700" b="1" dirty="0">
-                <a:solidFill>
-                  <a:srgbClr val="F4F1F0"/>
-                </a:solidFill>
-                <a:latin typeface="Cambria" pitchFamily="34" charset="0"/>
-                <a:ea typeface="Cambria" pitchFamily="34" charset="-122"/>
-                <a:cs typeface="Cambria" pitchFamily="34" charset="-120"/>
-              </a:rPr>
-              <a:t>What a new feature needs</a:t>
-            </a:r>
-            <a:endParaRPr lang="en-US" sz="1700" dirty="0"/>
-          </a:p>
-        </p:txBody>
-      </p:sp>
-      <p:sp>
-        <p:nvSpPr>
-          <p:cNvPr id="17" name="Text 15"/>
-          <p:cNvSpPr txBox="1"/>
-          <p:nvPr/>
-        </p:nvSpPr>
-        <p:spPr>
-          <a:xfrm>
-            <a:off x="566928" y="4800600"/>
-            <a:ext cx="10881360" cy="1463040"/>
-          </a:xfrm>
-          <a:prstGeom prst="rect">
-            <a:avLst/>
-          </a:prstGeom>
-          <a:noFill/>
-          <a:ln/>
-        </p:spPr>
-        <p:txBody>
-          <a:bodyPr wrap="square" rtlCol="0" anchor="ctr"/>
-          <a:lstStyle/>
-          <a:p>
-            <a:pPr marL="342900" indent="-342900">
-              <a:lnSpc>
-                <a:spcPts val="2000"/>
-              </a:lnSpc>
-              <a:spcAft>
-                <a:spcPts val="1000"/>
-              </a:spcAft>
-              <a:buSzPct val="100000"/>
-              <a:buChar char="•"/>
-            </a:pPr>
-            <a:r>
-              <a:rPr lang="en-US" sz="1300" dirty="0">
-                <a:solidFill>
-                  <a:srgbClr val="F4F1F0"/>
-                </a:solidFill>
-                <a:latin typeface="Calibri" pitchFamily="34" charset="0"/>
-                <a:ea typeface="Calibri" pitchFamily="34" charset="-122"/>
-                <a:cs typeface="Calibri" pitchFamily="34" charset="-120"/>
-              </a:rPr>
-              <a:t>A section in the right chapter of the manual, written as steps somebody can follow.</a:t>
-            </a:r>
-            <a:endParaRPr lang="en-US" sz="1300" dirty="0"/>
-          </a:p>
-          <a:p>
-            <a:pPr marL="342900" indent="-342900">
-              <a:lnSpc>
-                <a:spcPts val="2000"/>
-              </a:lnSpc>
-              <a:spcAft>
-                <a:spcPts val="1000"/>
-              </a:spcAft>
-              <a:buSzPct val="100000"/>
-              <a:buChar char="•"/>
-            </a:pPr>
-            <a:r>
-              <a:rPr lang="en-US" sz="1300" dirty="0">
-                <a:solidFill>
-                  <a:srgbClr val="F4F1F0"/>
-                </a:solidFill>
-                <a:latin typeface="Calibri" pitchFamily="34" charset="0"/>
-                <a:ea typeface="Calibri" pitchFamily="34" charset="-122"/>
-                <a:cs typeface="Calibri" pitchFamily="34" charset="-120"/>
-              </a:rPr>
-              <a:t>A screenshot, added to the capture script so it is re-taken on every build.</a:t>
-            </a:r>
-            <a:endParaRPr lang="en-US" sz="1300" dirty="0"/>
-          </a:p>
-          <a:p>
-            <a:pPr marL="342900" indent="-342900">
-              <a:lnSpc>
-                <a:spcPts val="2000"/>
-              </a:lnSpc>
-              <a:spcAft>
-                <a:spcPts val="1000"/>
-              </a:spcAft>
-              <a:buSzPct val="100000"/>
-              <a:buChar char="•"/>
-            </a:pPr>
-            <a:r>
-              <a:rPr lang="en-US" sz="1300" dirty="0">
-                <a:solidFill>
-                  <a:srgbClr val="F4F1F0"/>
-                </a:solidFill>
-                <a:latin typeface="Calibri" pitchFamily="34" charset="0"/>
-                <a:ea typeface="Calibri" pitchFamily="34" charset="-122"/>
-                <a:cs typeface="Calibri" pitchFamily="34" charset="-120"/>
-              </a:rPr>
-              <a:t>A role note naming the access band — which the permission tables already know about.</a:t>
-            </a:r>
-            <a:endParaRPr lang="en-US" sz="1300" dirty="0"/>
-          </a:p>
-          <a:p>
-            <a:pPr marL="342900" indent="-342900">
-              <a:lnSpc>
-                <a:spcPts val="2000"/>
-              </a:lnSpc>
-              <a:spcAft>
-                <a:spcPts val="1000"/>
-              </a:spcAft>
-              <a:buSzPct val="100000"/>
-              <a:buChar char="•"/>
-            </a:pPr>
-            <a:r>
-              <a:rPr lang="en-US" sz="1300" dirty="0">
-                <a:solidFill>
-                  <a:srgbClr val="F4F1F0"/>
-                </a:solidFill>
-                <a:latin typeface="Calibri" pitchFamily="34" charset="0"/>
-                <a:ea typeface="Calibri" pitchFamily="34" charset="-122"/>
-                <a:cs typeface="Calibri" pitchFamily="34" charset="-120"/>
-              </a:rPr>
-              <a:t>A slide here, if it is something a new joiner needs to know exists.</a:t>
-            </a:r>
-            <a:endParaRPr lang="en-US" sz="1300" dirty="0"/>
+              <a:t>Studio leadership — 7 designations. Readable, filterable, exportable, editable by nobody.</a:t>
+            </a:r>
+            <a:endParaRPr lang="en-US" sz="1000" dirty="0"/>
+          </a:p>
+        </p:txBody>
+      </p:sp>
+      <p:pic>
+        <p:nvPicPr>
+          <p:cNvPr id="10" name="Image 0" descr="preencoded.png">    </p:cNvPr>
+          <p:cNvPicPr>
+            <a:picLocks noChangeAspect="1"/>
+          </p:cNvPicPr>
+          <p:nvPr/>
+        </p:nvPicPr>
+        <p:blipFill>
+          <a:blip r:embed="rId1"/>
+          <a:stretch>
+            <a:fillRect/>
+          </a:stretch>
+        </p:blipFill>
+        <p:spPr>
+          <a:xfrm>
+            <a:off x="5989320" y="1528779"/>
+            <a:ext cx="5632704" cy="4166201"/>
+          </a:xfrm>
+          <a:prstGeom prst="rect">
+            <a:avLst/>
+          </a:prstGeom>
+          <a:effectLst>
+            <a:outerShdw sx="100000" sy="100000" kx="0" ky="0" algn="bl" rotWithShape="0" blurRad="177800" dist="50800" dir="5400000">
+              <a:srgbClr val="000000">
+                <a:alpha val="55000"/>
+              </a:srgbClr>
+            </a:outerShdw>
+          </a:effectLst>
+        </p:spPr>
+      </p:pic>
+      <p:sp>
+        <p:nvSpPr>
+          <p:cNvPr id="11" name="Text 8"/>
+          <p:cNvSpPr txBox="1"/>
+          <p:nvPr/>
+        </p:nvSpPr>
+        <p:spPr>
+          <a:xfrm>
+            <a:off x="5989320" y="5804709"/>
+            <a:ext cx="5632704" cy="457200"/>
+          </a:xfrm>
+          <a:prstGeom prst="rect">
+            <a:avLst/>
+          </a:prstGeom>
+          <a:noFill/>
+          <a:ln/>
+        </p:spPr>
+        <p:txBody>
+          <a:bodyPr wrap="square" lIns="0" tIns="0" rIns="0" bIns="0" rtlCol="0" anchor="ctr"/>
+          <a:lstStyle/>
+          <a:p>
+            <a:pPr algn="ctr" indent="0" marL="0">
+              <a:buNone/>
+            </a:pPr>
+            <a:r>
+              <a:rPr lang="en-US" sz="1000" i="1" dirty="0">
+                <a:solidFill>
+                  <a:srgbClr val="A9A09E"/>
+                </a:solidFill>
+                <a:latin typeface="Calibri" pitchFamily="34" charset="0"/>
+                <a:ea typeface="Calibri" pitchFamily="34" charset="-122"/>
+                <a:cs typeface="Calibri" pitchFamily="34" charset="-120"/>
+              </a:rPr>
+              <a:t>The Activity Log (first screenful).</a:t>
+            </a:r>
+            <a:endParaRPr lang="en-US" sz="1000" dirty="0"/>
           </a:p>
         </p:txBody>
       </p:sp>
@@ -18293,6 +18193,697 @@
                 <a:cs typeface="Calibri" pitchFamily="34" charset="-120"/>
               </a:rPr>
               <a:t>27</a:t>
+            </a:r>
+            <a:endParaRPr lang="en-US" sz="1300" dirty="0"/>
+          </a:p>
+        </p:txBody>
+      </p:sp>
+    </p:spTree>
+  </p:cSld>
+  <p:clrMapOvr>
+    <a:masterClrMapping/>
+  </p:clrMapOvr>
+</p:sld>
+</file>
+
+<file path=ppt/slides/slide30.xml><?xml version="1.0" encoding="utf-8"?>
+<p:sld xmlns:a="http://schemas.openxmlformats.org/drawingml/2006/main" xmlns:r="http://schemas.openxmlformats.org/officeDocument/2006/relationships" xmlns:p="http://schemas.openxmlformats.org/presentationml/2006/main">
+  <p:cSld name="Slide 30">
+    <p:bg>
+      <p:bgPr>
+        <a:solidFill>
+          <a:srgbClr val="0B0908"/>
+        </a:solidFill>
+      </p:bgPr>
+    </p:bg>
+    <p:spTree>
+      <p:nvGrpSpPr>
+        <p:cNvPr id="1" name=""/>
+        <p:cNvGrpSpPr/>
+        <p:nvPr/>
+      </p:nvGrpSpPr>
+      <p:grpSpPr>
+        <a:xfrm>
+          <a:off x="0" y="0"/>
+          <a:ext cx="0" cy="0"/>
+          <a:chOff x="0" y="0"/>
+          <a:chExt cx="0" cy="0"/>
+        </a:xfrm>
+      </p:grpSpPr>
+      <p:sp>
+        <p:nvSpPr>
+          <p:cNvPr id="2" name="Text 0"/>
+          <p:cNvSpPr txBox="1"/>
+          <p:nvPr/>
+        </p:nvSpPr>
+        <p:spPr>
+          <a:xfrm>
+            <a:off x="11411712" y="6355080"/>
+            <a:ext cx="457200" cy="274320"/>
+          </a:xfrm>
+          <a:prstGeom prst="rect">
+            <a:avLst/>
+          </a:prstGeom>
+          <a:noFill/>
+          <a:ln/>
+        </p:spPr>
+        <p:txBody>
+          <a:bodyPr wrap="square" lIns="0" tIns="0" rIns="0" bIns="0" rtlCol="0" anchor="ctr"/>
+          <a:lstStyle/>
+          <a:p>
+            <a:pPr algn="r" indent="0" marL="0">
+              <a:buNone/>
+            </a:pPr>
+            <a:r>
+              <a:rPr lang="en-US" sz="1000" dirty="0">
+                <a:solidFill>
+                  <a:srgbClr val="A9A09E"/>
+                </a:solidFill>
+                <a:latin typeface="Calibri" pitchFamily="34" charset="0"/>
+                <a:ea typeface="Calibri" pitchFamily="34" charset="-122"/>
+                <a:cs typeface="Calibri" pitchFamily="34" charset="-120"/>
+              </a:rPr>
+              <a:t>30</a:t>
+            </a:r>
+            <a:endParaRPr lang="en-US" sz="1000" dirty="0"/>
+          </a:p>
+        </p:txBody>
+      </p:sp>
+      <p:sp>
+        <p:nvSpPr>
+          <p:cNvPr id="3" name="Shape 1"/>
+          <p:cNvSpPr/>
+          <p:nvPr/>
+        </p:nvSpPr>
+        <p:spPr>
+          <a:xfrm>
+            <a:off x="566928" y="384048"/>
+            <a:ext cx="329184" cy="329184"/>
+          </a:xfrm>
+          <a:prstGeom prst="roundRect">
+            <a:avLst>
+              <a:gd name="adj" fmla="val 22222"/>
+            </a:avLst>
+          </a:prstGeom>
+          <a:solidFill>
+            <a:srgbClr val="7F1416"/>
+          </a:solidFill>
+          <a:ln/>
+        </p:spPr>
+      </p:sp>
+      <p:sp>
+        <p:nvSpPr>
+          <p:cNvPr id="4" name="Text 2"/>
+          <p:cNvSpPr txBox="1"/>
+          <p:nvPr/>
+        </p:nvSpPr>
+        <p:spPr>
+          <a:xfrm>
+            <a:off x="566928" y="384048"/>
+            <a:ext cx="329184" cy="329184"/>
+          </a:xfrm>
+          <a:prstGeom prst="rect">
+            <a:avLst/>
+          </a:prstGeom>
+          <a:noFill/>
+          <a:ln/>
+        </p:spPr>
+        <p:txBody>
+          <a:bodyPr wrap="square" lIns="0" tIns="0" rIns="0" bIns="0" rtlCol="0" anchor="ctr"/>
+          <a:lstStyle/>
+          <a:p>
+            <a:pPr algn="ctr" indent="0" marL="0">
+              <a:buNone/>
+            </a:pPr>
+            <a:r>
+              <a:rPr lang="en-US" sz="1600" b="1" dirty="0">
+                <a:solidFill>
+                  <a:srgbClr val="FFFFFF"/>
+                </a:solidFill>
+                <a:latin typeface="Cambria" pitchFamily="34" charset="0"/>
+                <a:ea typeface="Cambria" pitchFamily="34" charset="-122"/>
+                <a:cs typeface="Cambria" pitchFamily="34" charset="-120"/>
+              </a:rPr>
+              <a:t>Z</a:t>
+            </a:r>
+            <a:endParaRPr lang="en-US" sz="1600" dirty="0"/>
+          </a:p>
+        </p:txBody>
+      </p:sp>
+      <p:sp>
+        <p:nvSpPr>
+          <p:cNvPr id="5" name="Text 3"/>
+          <p:cNvSpPr txBox="1"/>
+          <p:nvPr/>
+        </p:nvSpPr>
+        <p:spPr>
+          <a:xfrm>
+            <a:off x="1024128" y="384048"/>
+            <a:ext cx="7315200" cy="329184"/>
+          </a:xfrm>
+          <a:prstGeom prst="rect">
+            <a:avLst/>
+          </a:prstGeom>
+          <a:noFill/>
+          <a:ln/>
+        </p:spPr>
+        <p:txBody>
+          <a:bodyPr wrap="square" lIns="0" tIns="0" rIns="0" bIns="0" rtlCol="0" anchor="ctr"/>
+          <a:lstStyle/>
+          <a:p>
+            <a:pPr indent="0" marL="0">
+              <a:buNone/>
+            </a:pPr>
+            <a:r>
+              <a:rPr lang="en-US" sz="1100" b="1" spc="200" kern="0" dirty="0">
+                <a:solidFill>
+                  <a:srgbClr val="A9A09E"/>
+                </a:solidFill>
+                <a:latin typeface="Calibri" pitchFamily="34" charset="0"/>
+                <a:ea typeface="Calibri" pitchFamily="34" charset="-122"/>
+                <a:cs typeface="Calibri" pitchFamily="34" charset="-120"/>
+              </a:rPr>
+              <a:t>KEEPING IT CURRENT</a:t>
+            </a:r>
+            <a:endParaRPr lang="en-US" sz="1100" dirty="0"/>
+          </a:p>
+        </p:txBody>
+      </p:sp>
+      <p:sp>
+        <p:nvSpPr>
+          <p:cNvPr id="6" name="Text 4"/>
+          <p:cNvSpPr txBox="1"/>
+          <p:nvPr/>
+        </p:nvSpPr>
+        <p:spPr>
+          <a:xfrm>
+            <a:off x="566928" y="868680"/>
+            <a:ext cx="11064240" cy="685800"/>
+          </a:xfrm>
+          <a:prstGeom prst="rect">
+            <a:avLst/>
+          </a:prstGeom>
+          <a:noFill/>
+          <a:ln/>
+        </p:spPr>
+        <p:txBody>
+          <a:bodyPr wrap="square" lIns="0" tIns="0" rIns="0" bIns="0" rtlCol="0" anchor="ctr"/>
+          <a:lstStyle/>
+          <a:p>
+            <a:pPr indent="0" marL="0">
+              <a:buNone/>
+            </a:pPr>
+            <a:r>
+              <a:rPr lang="en-US" sz="3400" b="1" dirty="0">
+                <a:solidFill>
+                  <a:srgbClr val="F4F1F0"/>
+                </a:solidFill>
+                <a:latin typeface="Cambria" pitchFamily="34" charset="0"/>
+                <a:ea typeface="Cambria" pitchFamily="34" charset="-122"/>
+                <a:cs typeface="Cambria" pitchFamily="34" charset="-120"/>
+              </a:rPr>
+              <a:t>The documentation is built, not written</a:t>
+            </a:r>
+            <a:endParaRPr lang="en-US" sz="3400" dirty="0"/>
+          </a:p>
+        </p:txBody>
+      </p:sp>
+      <p:sp>
+        <p:nvSpPr>
+          <p:cNvPr id="7" name="Shape 5"/>
+          <p:cNvSpPr/>
+          <p:nvPr/>
+        </p:nvSpPr>
+        <p:spPr>
+          <a:xfrm>
+            <a:off x="566928" y="2011680"/>
+            <a:ext cx="3493008" cy="2148840"/>
+          </a:xfrm>
+          <a:prstGeom prst="roundRect">
+            <a:avLst>
+              <a:gd name="adj" fmla="val 3404"/>
+            </a:avLst>
+          </a:prstGeom>
+          <a:solidFill>
+            <a:srgbClr val="1E1A19"/>
+          </a:solidFill>
+          <a:ln w="12700">
+            <a:solidFill>
+              <a:srgbClr val="2C2524"/>
+            </a:solidFill>
+            <a:prstDash val="solid"/>
+          </a:ln>
+        </p:spPr>
+      </p:sp>
+      <p:sp>
+        <p:nvSpPr>
+          <p:cNvPr id="8" name="Text 6"/>
+          <p:cNvSpPr txBox="1"/>
+          <p:nvPr/>
+        </p:nvSpPr>
+        <p:spPr>
+          <a:xfrm>
+            <a:off x="795528" y="2194560"/>
+            <a:ext cx="3017520" cy="365760"/>
+          </a:xfrm>
+          <a:prstGeom prst="rect">
+            <a:avLst/>
+          </a:prstGeom>
+          <a:noFill/>
+          <a:ln/>
+        </p:spPr>
+        <p:txBody>
+          <a:bodyPr wrap="square" lIns="0" tIns="0" rIns="0" bIns="0" rtlCol="0" anchor="ctr"/>
+          <a:lstStyle/>
+          <a:p>
+            <a:pPr indent="0" marL="0">
+              <a:buNone/>
+            </a:pPr>
+            <a:r>
+              <a:rPr lang="en-US" sz="1500" b="1" dirty="0">
+                <a:solidFill>
+                  <a:srgbClr val="B8323A"/>
+                </a:solidFill>
+                <a:latin typeface="Cambria" pitchFamily="34" charset="0"/>
+                <a:ea typeface="Cambria" pitchFamily="34" charset="-122"/>
+                <a:cs typeface="Cambria" pitchFamily="34" charset="-120"/>
+              </a:rPr>
+              <a:t>Screenshots</a:t>
+            </a:r>
+            <a:endParaRPr lang="en-US" sz="1500" dirty="0"/>
+          </a:p>
+        </p:txBody>
+      </p:sp>
+      <p:sp>
+        <p:nvSpPr>
+          <p:cNvPr id="9" name="Text 7"/>
+          <p:cNvSpPr txBox="1"/>
+          <p:nvPr/>
+        </p:nvSpPr>
+        <p:spPr>
+          <a:xfrm>
+            <a:off x="795528" y="2606040"/>
+            <a:ext cx="3063240" cy="1417320"/>
+          </a:xfrm>
+          <a:prstGeom prst="rect">
+            <a:avLst/>
+          </a:prstGeom>
+          <a:noFill/>
+          <a:ln/>
+        </p:spPr>
+        <p:txBody>
+          <a:bodyPr wrap="square" lIns="0" tIns="0" rIns="0" bIns="0" rtlCol="0" anchor="t"/>
+          <a:lstStyle/>
+          <a:p>
+            <a:pPr indent="0" marL="0">
+              <a:lnSpc>
+                <a:spcPts val="1700"/>
+              </a:lnSpc>
+              <a:buNone/>
+            </a:pPr>
+            <a:r>
+              <a:rPr lang="en-US" sz="1200" dirty="0">
+                <a:solidFill>
+                  <a:srgbClr val="F4F1F0"/>
+                </a:solidFill>
+                <a:latin typeface="Calibri" pitchFamily="34" charset="0"/>
+                <a:ea typeface="Calibri" pitchFamily="34" charset="-122"/>
+                <a:cs typeface="Calibri" pitchFamily="34" charset="-120"/>
+              </a:rPr>
+              <a:t>Captured by a script that signs in as each demo designation and drives the real buttons. A rebuild cannot leave last month’s picture behind.</a:t>
+            </a:r>
+            <a:endParaRPr lang="en-US" sz="1200" dirty="0"/>
+          </a:p>
+        </p:txBody>
+      </p:sp>
+      <p:sp>
+        <p:nvSpPr>
+          <p:cNvPr id="10" name="Shape 8"/>
+          <p:cNvSpPr/>
+          <p:nvPr/>
+        </p:nvSpPr>
+        <p:spPr>
+          <a:xfrm>
+            <a:off x="4279392" y="2011680"/>
+            <a:ext cx="3493008" cy="2148840"/>
+          </a:xfrm>
+          <a:prstGeom prst="roundRect">
+            <a:avLst>
+              <a:gd name="adj" fmla="val 3404"/>
+            </a:avLst>
+          </a:prstGeom>
+          <a:solidFill>
+            <a:srgbClr val="1E1A19"/>
+          </a:solidFill>
+          <a:ln w="12700">
+            <a:solidFill>
+              <a:srgbClr val="2C2524"/>
+            </a:solidFill>
+            <a:prstDash val="solid"/>
+          </a:ln>
+        </p:spPr>
+      </p:sp>
+      <p:sp>
+        <p:nvSpPr>
+          <p:cNvPr id="11" name="Text 9"/>
+          <p:cNvSpPr txBox="1"/>
+          <p:nvPr/>
+        </p:nvSpPr>
+        <p:spPr>
+          <a:xfrm>
+            <a:off x="4507992" y="2194560"/>
+            <a:ext cx="3017520" cy="365760"/>
+          </a:xfrm>
+          <a:prstGeom prst="rect">
+            <a:avLst/>
+          </a:prstGeom>
+          <a:noFill/>
+          <a:ln/>
+        </p:spPr>
+        <p:txBody>
+          <a:bodyPr wrap="square" lIns="0" tIns="0" rIns="0" bIns="0" rtlCol="0" anchor="ctr"/>
+          <a:lstStyle/>
+          <a:p>
+            <a:pPr indent="0" marL="0">
+              <a:buNone/>
+            </a:pPr>
+            <a:r>
+              <a:rPr lang="en-US" sz="1500" b="1" dirty="0">
+                <a:solidFill>
+                  <a:srgbClr val="B8323A"/>
+                </a:solidFill>
+                <a:latin typeface="Cambria" pitchFamily="34" charset="0"/>
+                <a:ea typeface="Cambria" pitchFamily="34" charset="-122"/>
+                <a:cs typeface="Cambria" pitchFamily="34" charset="-120"/>
+              </a:rPr>
+              <a:t>Permission tables</a:t>
+            </a:r>
+            <a:endParaRPr lang="en-US" sz="1500" dirty="0"/>
+          </a:p>
+        </p:txBody>
+      </p:sp>
+      <p:sp>
+        <p:nvSpPr>
+          <p:cNvPr id="12" name="Text 10"/>
+          <p:cNvSpPr txBox="1"/>
+          <p:nvPr/>
+        </p:nvSpPr>
+        <p:spPr>
+          <a:xfrm>
+            <a:off x="4507992" y="2606040"/>
+            <a:ext cx="3063240" cy="1417320"/>
+          </a:xfrm>
+          <a:prstGeom prst="rect">
+            <a:avLst/>
+          </a:prstGeom>
+          <a:noFill/>
+          <a:ln/>
+        </p:spPr>
+        <p:txBody>
+          <a:bodyPr wrap="square" lIns="0" tIns="0" rIns="0" bIns="0" rtlCol="0" anchor="t"/>
+          <a:lstStyle/>
+          <a:p>
+            <a:pPr indent="0" marL="0">
+              <a:lnSpc>
+                <a:spcPts val="1700"/>
+              </a:lnSpc>
+              <a:buNone/>
+            </a:pPr>
+            <a:r>
+              <a:rPr lang="en-US" sz="1200" dirty="0">
+                <a:solidFill>
+                  <a:srgbClr val="F4F1F0"/>
+                </a:solidFill>
+                <a:latin typeface="Calibri" pitchFamily="34" charset="0"/>
+                <a:ea typeface="Calibri" pitchFamily="34" charset="-122"/>
+                <a:cs typeface="Calibri" pitchFamily="34" charset="-120"/>
+              </a:rPr>
+              <a:t>Read out of a pristine deployment, so they say what the software ships with rather than what somebody remembers.</a:t>
+            </a:r>
+            <a:endParaRPr lang="en-US" sz="1200" dirty="0"/>
+          </a:p>
+        </p:txBody>
+      </p:sp>
+      <p:sp>
+        <p:nvSpPr>
+          <p:cNvPr id="13" name="Shape 11"/>
+          <p:cNvSpPr/>
+          <p:nvPr/>
+        </p:nvSpPr>
+        <p:spPr>
+          <a:xfrm>
+            <a:off x="7991856" y="2011680"/>
+            <a:ext cx="3493008" cy="2148840"/>
+          </a:xfrm>
+          <a:prstGeom prst="roundRect">
+            <a:avLst>
+              <a:gd name="adj" fmla="val 3404"/>
+            </a:avLst>
+          </a:prstGeom>
+          <a:solidFill>
+            <a:srgbClr val="1E1A19"/>
+          </a:solidFill>
+          <a:ln w="12700">
+            <a:solidFill>
+              <a:srgbClr val="2C2524"/>
+            </a:solidFill>
+            <a:prstDash val="solid"/>
+          </a:ln>
+        </p:spPr>
+      </p:sp>
+      <p:sp>
+        <p:nvSpPr>
+          <p:cNvPr id="14" name="Text 12"/>
+          <p:cNvSpPr txBox="1"/>
+          <p:nvPr/>
+        </p:nvSpPr>
+        <p:spPr>
+          <a:xfrm>
+            <a:off x="8220456" y="2194560"/>
+            <a:ext cx="3017520" cy="365760"/>
+          </a:xfrm>
+          <a:prstGeom prst="rect">
+            <a:avLst/>
+          </a:prstGeom>
+          <a:noFill/>
+          <a:ln/>
+        </p:spPr>
+        <p:txBody>
+          <a:bodyPr wrap="square" lIns="0" tIns="0" rIns="0" bIns="0" rtlCol="0" anchor="ctr"/>
+          <a:lstStyle/>
+          <a:p>
+            <a:pPr indent="0" marL="0">
+              <a:buNone/>
+            </a:pPr>
+            <a:r>
+              <a:rPr lang="en-US" sz="1500" b="1" dirty="0">
+                <a:solidFill>
+                  <a:srgbClr val="B8323A"/>
+                </a:solidFill>
+                <a:latin typeface="Cambria" pitchFamily="34" charset="0"/>
+                <a:ea typeface="Cambria" pitchFamily="34" charset="-122"/>
+                <a:cs typeface="Cambria" pitchFamily="34" charset="-120"/>
+              </a:rPr>
+              <a:t>Access bands</a:t>
+            </a:r>
+            <a:endParaRPr lang="en-US" sz="1500" dirty="0"/>
+          </a:p>
+        </p:txBody>
+      </p:sp>
+      <p:sp>
+        <p:nvSpPr>
+          <p:cNvPr id="15" name="Text 13"/>
+          <p:cNvSpPr txBox="1"/>
+          <p:nvPr/>
+        </p:nvSpPr>
+        <p:spPr>
+          <a:xfrm>
+            <a:off x="8220456" y="2606040"/>
+            <a:ext cx="3063240" cy="1417320"/>
+          </a:xfrm>
+          <a:prstGeom prst="rect">
+            <a:avLst/>
+          </a:prstGeom>
+          <a:noFill/>
+          <a:ln/>
+        </p:spPr>
+        <p:txBody>
+          <a:bodyPr wrap="square" lIns="0" tIns="0" rIns="0" bIns="0" rtlCol="0" anchor="t"/>
+          <a:lstStyle/>
+          <a:p>
+            <a:pPr indent="0" marL="0">
+              <a:lnSpc>
+                <a:spcPts val="1700"/>
+              </a:lnSpc>
+              <a:buNone/>
+            </a:pPr>
+            <a:r>
+              <a:rPr lang="en-US" sz="1200" dirty="0">
+                <a:solidFill>
+                  <a:srgbClr val="F4F1F0"/>
+                </a:solidFill>
+                <a:latin typeface="Calibri" pitchFamily="34" charset="0"/>
+                <a:ea typeface="Calibri" pitchFamily="34" charset="-122"/>
+                <a:cs typeface="Calibri" pitchFamily="34" charset="-120"/>
+              </a:rPr>
+              <a:t>Derived from those tables. A new permission appears in the manual on the next build with nobody editing it.</a:t>
+            </a:r>
+            <a:endParaRPr lang="en-US" sz="1200" dirty="0"/>
+          </a:p>
+        </p:txBody>
+      </p:sp>
+      <p:sp>
+        <p:nvSpPr>
+          <p:cNvPr id="16" name="Text 14"/>
+          <p:cNvSpPr txBox="1"/>
+          <p:nvPr/>
+        </p:nvSpPr>
+        <p:spPr>
+          <a:xfrm>
+            <a:off x="566928" y="4434840"/>
+            <a:ext cx="10881360" cy="365760"/>
+          </a:xfrm>
+          <a:prstGeom prst="rect">
+            <a:avLst/>
+          </a:prstGeom>
+          <a:noFill/>
+          <a:ln/>
+        </p:spPr>
+        <p:txBody>
+          <a:bodyPr wrap="square" lIns="0" tIns="0" rIns="0" bIns="0" rtlCol="0" anchor="ctr"/>
+          <a:lstStyle/>
+          <a:p>
+            <a:pPr indent="0" marL="0">
+              <a:buNone/>
+            </a:pPr>
+            <a:r>
+              <a:rPr lang="en-US" sz="1700" b="1" dirty="0">
+                <a:solidFill>
+                  <a:srgbClr val="F4F1F0"/>
+                </a:solidFill>
+                <a:latin typeface="Cambria" pitchFamily="34" charset="0"/>
+                <a:ea typeface="Cambria" pitchFamily="34" charset="-122"/>
+                <a:cs typeface="Cambria" pitchFamily="34" charset="-120"/>
+              </a:rPr>
+              <a:t>What a new feature needs</a:t>
+            </a:r>
+            <a:endParaRPr lang="en-US" sz="1700" dirty="0"/>
+          </a:p>
+        </p:txBody>
+      </p:sp>
+      <p:sp>
+        <p:nvSpPr>
+          <p:cNvPr id="17" name="Text 15"/>
+          <p:cNvSpPr txBox="1"/>
+          <p:nvPr/>
+        </p:nvSpPr>
+        <p:spPr>
+          <a:xfrm>
+            <a:off x="566928" y="4800600"/>
+            <a:ext cx="10881360" cy="1463040"/>
+          </a:xfrm>
+          <a:prstGeom prst="rect">
+            <a:avLst/>
+          </a:prstGeom>
+          <a:noFill/>
+          <a:ln/>
+        </p:spPr>
+        <p:txBody>
+          <a:bodyPr wrap="square" rtlCol="0" anchor="ctr"/>
+          <a:lstStyle/>
+          <a:p>
+            <a:pPr marL="342900" indent="-342900">
+              <a:lnSpc>
+                <a:spcPts val="2000"/>
+              </a:lnSpc>
+              <a:spcAft>
+                <a:spcPts val="1000"/>
+              </a:spcAft>
+              <a:buSzPct val="100000"/>
+              <a:buChar char="•"/>
+            </a:pPr>
+            <a:r>
+              <a:rPr lang="en-US" sz="1300" dirty="0">
+                <a:solidFill>
+                  <a:srgbClr val="F4F1F0"/>
+                </a:solidFill>
+                <a:latin typeface="Calibri" pitchFamily="34" charset="0"/>
+                <a:ea typeface="Calibri" pitchFamily="34" charset="-122"/>
+                <a:cs typeface="Calibri" pitchFamily="34" charset="-120"/>
+              </a:rPr>
+              <a:t>A section in the right chapter of the manual, written as steps somebody can follow.</a:t>
+            </a:r>
+            <a:endParaRPr lang="en-US" sz="1300" dirty="0"/>
+          </a:p>
+          <a:p>
+            <a:pPr marL="342900" indent="-342900">
+              <a:lnSpc>
+                <a:spcPts val="2000"/>
+              </a:lnSpc>
+              <a:spcAft>
+                <a:spcPts val="1000"/>
+              </a:spcAft>
+              <a:buSzPct val="100000"/>
+              <a:buChar char="•"/>
+            </a:pPr>
+            <a:r>
+              <a:rPr lang="en-US" sz="1300" dirty="0">
+                <a:solidFill>
+                  <a:srgbClr val="F4F1F0"/>
+                </a:solidFill>
+                <a:latin typeface="Calibri" pitchFamily="34" charset="0"/>
+                <a:ea typeface="Calibri" pitchFamily="34" charset="-122"/>
+                <a:cs typeface="Calibri" pitchFamily="34" charset="-120"/>
+              </a:rPr>
+              <a:t>A screenshot, added to the capture script so it is re-taken on every build.</a:t>
+            </a:r>
+            <a:endParaRPr lang="en-US" sz="1300" dirty="0"/>
+          </a:p>
+          <a:p>
+            <a:pPr marL="342900" indent="-342900">
+              <a:lnSpc>
+                <a:spcPts val="2000"/>
+              </a:lnSpc>
+              <a:spcAft>
+                <a:spcPts val="1000"/>
+              </a:spcAft>
+              <a:buSzPct val="100000"/>
+              <a:buChar char="•"/>
+            </a:pPr>
+            <a:r>
+              <a:rPr lang="en-US" sz="1300" dirty="0">
+                <a:solidFill>
+                  <a:srgbClr val="F4F1F0"/>
+                </a:solidFill>
+                <a:latin typeface="Calibri" pitchFamily="34" charset="0"/>
+                <a:ea typeface="Calibri" pitchFamily="34" charset="-122"/>
+                <a:cs typeface="Calibri" pitchFamily="34" charset="-120"/>
+              </a:rPr>
+              <a:t>A role note naming the access band — which the permission tables already know about.</a:t>
+            </a:r>
+            <a:endParaRPr lang="en-US" sz="1300" dirty="0"/>
+          </a:p>
+          <a:p>
+            <a:pPr marL="342900" indent="-342900">
+              <a:lnSpc>
+                <a:spcPts val="2000"/>
+              </a:lnSpc>
+              <a:spcAft>
+                <a:spcPts val="1000"/>
+              </a:spcAft>
+              <a:buSzPct val="100000"/>
+              <a:buChar char="•"/>
+            </a:pPr>
+            <a:r>
+              <a:rPr lang="en-US" sz="1300" dirty="0">
+                <a:solidFill>
+                  <a:srgbClr val="F4F1F0"/>
+                </a:solidFill>
+                <a:latin typeface="Calibri" pitchFamily="34" charset="0"/>
+                <a:ea typeface="Calibri" pitchFamily="34" charset="-122"/>
+                <a:cs typeface="Calibri" pitchFamily="34" charset="-120"/>
+              </a:rPr>
+              <a:t>A slide here, if it is something a new joiner needs to know exists.</a:t>
             </a:r>
             <a:endParaRPr lang="en-US" sz="1300" dirty="0"/>
           </a:p>

--- a/docs/ZVKY-FORGE-Overview.pptx
+++ b/docs/ZVKY-FORGE-Overview.pptx
@@ -11508,7 +11508,7 @@
                 <a:ea typeface="Calibri" pitchFamily="34" charset="-122"/>
                 <a:cs typeface="Calibri" pitchFamily="34" charset="-120"/>
               </a:rPr>
-              <a:t>The working window is printed above the week — 09:30 to 19:00 IST, lunch 13:00 to 14:00, 8 hours a day.</a:t>
+              <a:t>A line is a number of HOURS against a project, an asset or non-project time. No start and end times.</a:t>
             </a:r>
             <a:endParaRPr lang="en-US" sz="1400" dirty="0"/>
           </a:p>
@@ -11532,7 +11532,7 @@
                 <a:ea typeface="Calibri" pitchFamily="34" charset="-122"/>
                 <a:cs typeface="Calibri" pitchFamily="34" charset="-120"/>
               </a:rPr>
-              <a:t>Lines outside the day are refused; the lunch hour is taken out of any line that crosses it.</a:t>
+              <a:t>Pick an asset and the hours it recorded that day are offered — a suggestion in a field you can change.</a:t>
             </a:r>
             <a:endParaRPr lang="en-US" sz="1400" dirty="0"/>
           </a:p>
@@ -11556,7 +11556,7 @@
                 <a:ea typeface="Calibri" pitchFamily="34" charset="-122"/>
                 <a:cs typeface="Calibri" pitchFamily="34" charset="-120"/>
               </a:rPr>
-              <a:t>Submission is daily. A submitted day is with your approver and no longer yours to edit.</a:t>
+              <a:t>A day over 8 hours is flagged, not refused. A long day is real; a form that refuses one is not.</a:t>
             </a:r>
             <a:endParaRPr lang="en-US" sz="1400" dirty="0"/>
           </a:p>
@@ -11580,7 +11580,7 @@
                 <a:ea typeface="Calibri" pitchFamily="34" charset="-122"/>
                 <a:cs typeface="Calibri" pitchFamily="34" charset="-120"/>
               </a:rPr>
-              <a:t>Approvers see their team’s days, with the count carried on the tab.</a:t>
+              <a:t>Submission is daily, and nobody approves it. Submitting locks the day; its owner can reopen it.</a:t>
             </a:r>
             <a:endParaRPr lang="en-US" sz="1400" dirty="0"/>
           </a:p>
@@ -11604,7 +11604,7 @@
                 <a:ea typeface="Calibri" pitchFamily="34" charset="-122"/>
                 <a:cs typeface="Calibri" pitchFamily="34" charset="-120"/>
               </a:rPr>
-              <a:t>Every rule reads the configured window — change it in Settings and the rules change with it.</a:t>
+              <a:t>A lead reads their team’s hours and nothing more — the approval queue is gone.</a:t>
             </a:r>
             <a:endParaRPr lang="en-US" sz="1400" dirty="0"/>
           </a:p>
@@ -11684,7 +11684,7 @@
                 <a:ea typeface="Calibri" pitchFamily="34" charset="-122"/>
                 <a:cs typeface="Calibri" pitchFamily="34" charset="-120"/>
               </a:rPr>
-              <a:t>Everybody fills in their own. Approving sits with leads and producers — 18 designations.</a:t>
+              <a:t>Everybody fills in their own. Reading a team’s sits with leads and producers — 18 designations. There is no Approve Timesheets permission any more.</a:t>
             </a:r>
             <a:endParaRPr lang="en-US" sz="1000" dirty="0"/>
           </a:p>
@@ -11754,7 +11754,7 @@
                 <a:ea typeface="Calibri" pitchFamily="34" charset="-122"/>
                 <a:cs typeface="Calibri" pitchFamily="34" charset="-120"/>
               </a:rPr>
-              <a:t>A week: Submitted, Approved and Draft days.</a:t>
+              <a:t>A week of Draft and Submitted days.</a:t>
             </a:r>
             <a:endParaRPr lang="en-US" sz="1000" dirty="0"/>
           </a:p>
@@ -13492,7 +13492,7 @@
                 <a:ea typeface="Calibri" pitchFamily="34" charset="-122"/>
                 <a:cs typeface="Calibri" pitchFamily="34" charset="-120"/>
               </a:rPr>
-              <a:t>Working hours and lunch — the window the Time Sheet and the Idle report both read.</a:t>
+              <a:t>Working hours — the standard day the Idle report measures against.</a:t>
             </a:r>
             <a:endParaRPr lang="en-US" sz="1400" dirty="0"/>
           </a:p>
@@ -13540,7 +13540,7 @@
                 <a:ea typeface="Calibri" pitchFamily="34" charset="-122"/>
                 <a:cs typeface="Calibri" pitchFamily="34" charset="-120"/>
               </a:rPr>
-              <a:t>Four value lists: Scope of Work, Priorities, Categories and Roles.</a:t>
+              <a:t>Five value lists: Scope of Work, Priorities, Asset Categories, Project Categories and Roles.</a:t>
             </a:r>
             <a:endParaRPr lang="en-US" sz="1400" dirty="0"/>
           </a:p>
@@ -14668,7 +14668,7 @@
                 <a:ea typeface="Calibri" pitchFamily="34" charset="-122"/>
                 <a:cs typeface="Calibri" pitchFamily="34" charset="-120"/>
               </a:rPr>
-              <a:t>3 permissions</a:t>
+              <a:t>2 permissions</a:t>
             </a:r>
             <a:endParaRPr lang="en-US" sz="1100" dirty="0"/>
           </a:p>
@@ -15388,7 +15388,7 @@
                 <a:ea typeface="Calibri" pitchFamily="34" charset="-122"/>
                 <a:cs typeface="Calibri" pitchFamily="34" charset="-120"/>
               </a:rPr>
-              <a:t>15 permissions</a:t>
+              <a:t>16 permissions</a:t>
             </a:r>
             <a:endParaRPr lang="en-US" sz="1100" dirty="0"/>
           </a:p>

--- a/docs/ZVKY-FORGE-Overview.pptx
+++ b/docs/ZVKY-FORGE-Overview.pptx
@@ -35,9 +35,10 @@
     <p:sldId id="283" r:id="rId29"/>
     <p:sldId id="284" r:id="rId30"/>
     <p:sldId id="285" r:id="rId31"/>
+    <p:sldId id="286" r:id="rId32"/>
   </p:sldIdLst>
   <p:notesMasterIdLst>
-    <p:notesMasterId r:id="rId32"/>
+    <p:notesMasterId r:id="rId33"/>
   </p:notesMasterIdLst>
   <p:sldSz cx="12192000" cy="6858000"/>
   <p:notesSz cx="6858000" cy="12192000"/>
@@ -2203,7 +2204,7 @@
           <a:p>
             <a:r>
               <a:rPr lang="en-US" dirty="0"/>
-              <a:t>These twelve bands are generated from the permission table, not written by hand. Appendix A of the manual lists every designation in each.</a:t>
+              <a:t/>
             </a:r>
             <a:endParaRPr lang="en-US" dirty="0"/>
           </a:p>
@@ -2291,7 +2292,7 @@
           <a:p>
             <a:r>
               <a:rPr lang="en-US" dirty="0"/>
-              <a:t/>
+              <a:t>These thirteen bands are generated from the permission table, not written by hand. Appendix A of the manual lists every designation in each.</a:t>
             </a:r>
             <a:endParaRPr lang="en-US" dirty="0"/>
           </a:p>
@@ -2555,7 +2556,7 @@
           <a:p>
             <a:r>
               <a:rPr lang="en-US" dirty="0"/>
-              <a:t>The standing rule: every feature prompt from here on should say what the documentation needs added.</a:t>
+              <a:t/>
             </a:r>
             <a:endParaRPr lang="en-US" dirty="0"/>
           </a:p>
@@ -2579,6 +2580,94 @@
             <a:fld id="{F7021451-1387-4CA6-816F-3879F97B5CBC}" type="slidenum">
               <a:rPr lang="en-US"/>
               <a:t>30</a:t>
+            </a:fld>
+            <a:endParaRPr lang="en-US"/>
+          </a:p>
+        </p:txBody>
+      </p:sp>
+    </p:spTree>
+    <p:extLst>
+      <p:ext uri="{BB962C8B-B14F-4D97-AF65-F5344CB8AC3E}">
+        <p14:creationId xmlns:p14="http://schemas.microsoft.com/office/powerpoint/2010/main" val="1024086991"/>
+      </p:ext>
+    </p:extLst>
+  </p:cSld>
+  <p:clrMapOvr>
+    <a:masterClrMapping/>
+  </p:clrMapOvr>
+</p:notes>
+</file>
+
+<file path=ppt/notesSlides/notesSlide31.xml><?xml version="1.0" encoding="utf-8"?>
+<p:notes xmlns:a="http://schemas.openxmlformats.org/drawingml/2006/main" xmlns:r="http://schemas.openxmlformats.org/officeDocument/2006/relationships" xmlns:p="http://schemas.openxmlformats.org/presentationml/2006/main">
+  <p:cSld>
+    <p:spTree>
+      <p:nvGrpSpPr>
+        <p:cNvPr id="1" name=""/>
+        <p:cNvGrpSpPr/>
+        <p:nvPr/>
+      </p:nvGrpSpPr>
+      <p:grpSpPr>
+        <a:xfrm>
+          <a:off x="0" y="0"/>
+          <a:ext cx="0" cy="0"/>
+          <a:chOff x="0" y="0"/>
+          <a:chExt cx="0" cy="0"/>
+        </a:xfrm>
+      </p:grpSpPr>
+      <p:sp>
+        <p:nvSpPr>
+          <p:cNvPr id="2" name="Slide Image Placeholder 1"/>
+          <p:cNvSpPr>
+            <a:spLocks noGrp="1" noRot="1" noChangeAspect="1"/>
+          </p:cNvSpPr>
+          <p:nvPr>
+            <p:ph type="sldImg"/>
+          </p:nvPr>
+        </p:nvSpPr>
+        <p:spPr/>
+      </p:sp>
+      <p:sp>
+        <p:nvSpPr>
+          <p:cNvPr id="3" name="Notes Placeholder 2"/>
+          <p:cNvSpPr>
+            <a:spLocks noGrp="1"/>
+          </p:cNvSpPr>
+          <p:nvPr>
+            <p:ph type="body" idx="1"/>
+          </p:nvPr>
+        </p:nvSpPr>
+        <p:spPr/>
+        <p:txBody>
+          <a:bodyPr/>
+          <a:lstStyle/>
+          <a:p>
+            <a:r>
+              <a:rPr lang="en-US" dirty="0"/>
+              <a:t>The standing rule: every feature prompt from here on should say what the documentation needs added.</a:t>
+            </a:r>
+            <a:endParaRPr lang="en-US" dirty="0"/>
+          </a:p>
+        </p:txBody>
+      </p:sp>
+      <p:sp>
+        <p:nvSpPr>
+          <p:cNvPr id="4" name="Slide Number Placeholder 3"/>
+          <p:cNvSpPr>
+            <a:spLocks noGrp="1"/>
+          </p:cNvSpPr>
+          <p:nvPr>
+            <p:ph type="sldNum" sz="quarter" idx="10"/>
+          </p:nvPr>
+        </p:nvSpPr>
+        <p:spPr/>
+        <p:txBody>
+          <a:bodyPr/>
+          <a:lstStyle/>
+          <a:p>
+            <a:fld id="{F7021451-1387-4CA6-816F-3879F97B5CBC}" type="slidenum">
+              <a:rPr lang="en-US"/>
+              <a:t>31</a:t>
             </a:fld>
             <a:endParaRPr lang="en-US"/>
           </a:p>
@@ -10089,7 +10178,7 @@
                 <a:ea typeface="Cambria" pitchFamily="34" charset="-122"/>
                 <a:cs typeface="Cambria" pitchFamily="34" charset="-120"/>
               </a:rPr>
-              <a:t>58</a:t>
+              <a:t>62</a:t>
             </a:r>
             <a:endParaRPr lang="en-US" sz="5400" dirty="0"/>
           </a:p>
@@ -11706,8 +11795,8 @@
         </p:blipFill>
         <p:spPr>
           <a:xfrm>
-            <a:off x="5989320" y="2312451"/>
-            <a:ext cx="5632704" cy="2598859"/>
+            <a:off x="5989320" y="2345627"/>
+            <a:ext cx="5632704" cy="2532505"/>
           </a:xfrm>
           <a:prstGeom prst="rect">
             <a:avLst/>
@@ -11729,7 +11818,7 @@
         </p:nvSpPr>
         <p:spPr>
           <a:xfrm>
-            <a:off x="5989320" y="5021037"/>
+            <a:off x="5989320" y="4987861"/>
             <a:ext cx="5632704" cy="457200"/>
           </a:xfrm>
           <a:prstGeom prst="rect">
@@ -12929,7 +13018,7 @@
                 <a:ea typeface="Calibri" pitchFamily="34" charset="-122"/>
                 <a:cs typeface="Calibri" pitchFamily="34" charset="-120"/>
               </a:rPr>
-              <a:t>YOU</a:t>
+              <a:t>CHAT</a:t>
             </a:r>
             <a:endParaRPr lang="en-US" sz="1100" dirty="0"/>
           </a:p>
@@ -12968,7 +13057,7 @@
                 <a:ea typeface="Cambria" pitchFamily="34" charset="-122"/>
                 <a:cs typeface="Cambria" pitchFamily="34" charset="-120"/>
               </a:rPr>
-              <a:t>Notifications, your photo, your password</a:t>
+              <a:t>Talk to anybody; groups are for the people who run work</a:t>
             </a:r>
             <a:endParaRPr lang="en-US" sz="3400" dirty="0"/>
           </a:p>
@@ -13014,7 +13103,7 @@
                 <a:ea typeface="Calibri" pitchFamily="34" charset="-122"/>
                 <a:cs typeface="Calibri" pitchFamily="34" charset="-120"/>
               </a:rPr>
-              <a:t>The bell carries unread notifications: work assigned to you, reviews coming back, feedback landing, time sheets waiting.</a:t>
+              <a:t>The speech-bubble icon beside the bell. One to one with anybody in the studio, with no permission needed.</a:t>
             </a:r>
             <a:endParaRPr lang="en-US" sz="1400" dirty="0"/>
           </a:p>
@@ -13038,7 +13127,7 @@
                 <a:ea typeface="Calibri" pitchFamily="34" charset="-122"/>
                 <a:cs typeface="Calibri" pitchFamily="34" charset="-120"/>
               </a:rPr>
-              <a:t>Profile holds your photo, which then appears everywhere you are represented.</a:t>
+              <a:t>Groups hold thirty people, counting whoever made them, and are started by Leads, Production and Creative Direction.</a:t>
             </a:r>
             <a:endParaRPr lang="en-US" sz="1400" dirty="0"/>
           </a:p>
@@ -13062,7 +13151,7 @@
                 <a:ea typeface="Calibri" pitchFamily="34" charset="-122"/>
                 <a:cs typeface="Calibri" pitchFamily="34" charset="-120"/>
               </a:rPr>
-              <a:t>Profile also holds your password.</a:t>
+              <a:t>The owner renames the group, adds and removes people; anybody can leave. An owner who leaves hands it on.</a:t>
             </a:r>
             <a:endParaRPr lang="en-US" sz="1400" dirty="0"/>
           </a:p>
@@ -13086,7 +13175,31 @@
                 <a:ea typeface="Calibri" pitchFamily="34" charset="-122"/>
                 <a:cs typeface="Calibri" pitchFamily="34" charset="-120"/>
               </a:rPr>
-              <a:t>Changing your password signs out every other session — deliberately, since a password is changed because it may be known.</a:t>
+              <a:t>Files: .png, .jpg, .svg, .webp, .mov, .mp4 up to 30MB — deleted after eight hours. The message stays and says the file expired.</a:t>
+            </a:r>
+            <a:endParaRPr lang="en-US" sz="1400" dirty="0"/>
+          </a:p>
+          <a:p>
+            <a:pPr marL="342900" indent="-342900">
+              <a:lnSpc>
+                <a:spcPts val="2000"/>
+              </a:lnSpc>
+              <a:spcAft>
+                <a:spcPts val="1000"/>
+              </a:spcAft>
+              <a:buSzPct val="100000"/>
+              <a:buChar char="•"/>
+            </a:pPr>
+            <a:r>
+              <a:rPr lang="en-US" sz="1400" dirty="0">
+                <a:solidFill>
+                  <a:srgbClr val="F4F1F0"/>
+                </a:solidFill>
+                <a:latin typeface="Calibri" pitchFamily="34" charset="0"/>
+                <a:ea typeface="Calibri" pitchFamily="34" charset="-122"/>
+                <a:cs typeface="Calibri" pitchFamily="34" charset="-120"/>
+              </a:rPr>
+              <a:t>Private to the people in it. No Super Admin view, no export, and no permission that could create one.</a:t>
             </a:r>
             <a:endParaRPr lang="en-US" sz="1400" dirty="0"/>
           </a:p>
@@ -13166,7 +13279,7 @@
                 <a:ea typeface="Calibri" pitchFamily="34" charset="-122"/>
                 <a:cs typeface="Calibri" pitchFamily="34" charset="-120"/>
               </a:rPr>
-              <a:t>Everybody, for themselves.</a:t>
+              <a:t>Everybody chats. Production planning and creative direction — 25 designations — may start a group.</a:t>
             </a:r>
             <a:endParaRPr lang="en-US" sz="1000" dirty="0"/>
           </a:p>
@@ -13188,8 +13301,8 @@
         </p:blipFill>
         <p:spPr>
           <a:xfrm>
-            <a:off x="5989320" y="2023074"/>
-            <a:ext cx="5632704" cy="3177612"/>
+            <a:off x="5989320" y="2430413"/>
+            <a:ext cx="5632704" cy="2362934"/>
           </a:xfrm>
           <a:prstGeom prst="rect">
             <a:avLst/>
@@ -13211,7 +13324,7 @@
         </p:nvSpPr>
         <p:spPr>
           <a:xfrm>
-            <a:off x="5989320" y="5310414"/>
+            <a:off x="5989320" y="4903075"/>
             <a:ext cx="5632704" cy="457200"/>
           </a:xfrm>
           <a:prstGeom prst="rect">
@@ -13236,7 +13349,7 @@
                 <a:ea typeface="Calibri" pitchFamily="34" charset="-122"/>
                 <a:cs typeface="Calibri" pitchFamily="34" charset="-120"/>
               </a:rPr>
-              <a:t>The Profile panel.</a:t>
+              <a:t>A one-to-one conversation.</a:t>
             </a:r>
             <a:endParaRPr lang="en-US" sz="1000" dirty="0"/>
           </a:p>
@@ -13407,7 +13520,7 @@
                 <a:ea typeface="Calibri" pitchFamily="34" charset="-122"/>
                 <a:cs typeface="Calibri" pitchFamily="34" charset="-120"/>
               </a:rPr>
-              <a:t>SETTINGS</a:t>
+              <a:t>YOU</a:t>
             </a:r>
             <a:endParaRPr lang="en-US" sz="1100" dirty="0"/>
           </a:p>
@@ -13446,7 +13559,7 @@
                 <a:ea typeface="Cambria" pitchFamily="34" charset="-122"/>
                 <a:cs typeface="Cambria" pitchFamily="34" charset="-120"/>
               </a:rPr>
-              <a:t>Not one screen, but the ones you hold</a:t>
+              <a:t>Notifications, your photo, your password</a:t>
             </a:r>
             <a:endParaRPr lang="en-US" sz="3400" dirty="0"/>
           </a:p>
@@ -13492,7 +13605,7 @@
                 <a:ea typeface="Calibri" pitchFamily="34" charset="-122"/>
                 <a:cs typeface="Calibri" pitchFamily="34" charset="-120"/>
               </a:rPr>
-              <a:t>Working hours — the standard day the Idle report measures against.</a:t>
+              <a:t>The bell carries unread notifications: work assigned to you, reviews coming back, feedback landing.</a:t>
             </a:r>
             <a:endParaRPr lang="en-US" sz="1400" dirty="0"/>
           </a:p>
@@ -13516,7 +13629,7 @@
                 <a:ea typeface="Calibri" pitchFamily="34" charset="-122"/>
                 <a:cs typeface="Calibri" pitchFamily="34" charset="-120"/>
               </a:rPr>
-              <a:t>Branding — the studio name and the colour used across the application.</a:t>
+              <a:t>Profile holds your photo, which then appears everywhere you are represented.</a:t>
             </a:r>
             <a:endParaRPr lang="en-US" sz="1400" dirty="0"/>
           </a:p>
@@ -13540,7 +13653,7 @@
                 <a:ea typeface="Calibri" pitchFamily="34" charset="-122"/>
                 <a:cs typeface="Calibri" pitchFamily="34" charset="-120"/>
               </a:rPr>
-              <a:t>Five value lists: Scope of Work, Priorities, Asset Categories, Project Categories and Roles.</a:t>
+              <a:t>Profile also holds your password.</a:t>
             </a:r>
             <a:endParaRPr lang="en-US" sz="1400" dirty="0"/>
           </a:p>
@@ -13564,31 +13677,7 @@
                 <a:ea typeface="Calibri" pitchFamily="34" charset="-122"/>
                 <a:cs typeface="Calibri" pitchFamily="34" charset="-120"/>
               </a:rPr>
-              <a:t>Renaming a value is safe; a value in use cannot be deleted, only deactivated.</a:t>
-            </a:r>
-            <a:endParaRPr lang="en-US" sz="1400" dirty="0"/>
-          </a:p>
-          <a:p>
-            <a:pPr marL="342900" indent="-342900">
-              <a:lnSpc>
-                <a:spcPts val="2000"/>
-              </a:lnSpc>
-              <a:spcAft>
-                <a:spcPts val="1000"/>
-              </a:spcAft>
-              <a:buSzPct val="100000"/>
-              <a:buChar char="•"/>
-            </a:pPr>
-            <a:r>
-              <a:rPr lang="en-US" sz="1400" dirty="0">
-                <a:solidFill>
-                  <a:srgbClr val="F4F1F0"/>
-                </a:solidFill>
-                <a:latin typeface="Calibri" pitchFamily="34" charset="0"/>
-                <a:ea typeface="Calibri" pitchFamily="34" charset="-122"/>
-                <a:cs typeface="Calibri" pitchFamily="34" charset="-120"/>
-              </a:rPr>
-              <a:t>A person given one Settings permission gets this page with exactly that one section on it.</a:t>
+              <a:t>Changing your password signs out every other session — deliberately, since a password is changed because it may be known.</a:t>
             </a:r>
             <a:endParaRPr lang="en-US" sz="1400" dirty="0"/>
           </a:p>
@@ -13668,7 +13757,7 @@
                 <a:ea typeface="Calibri" pitchFamily="34" charset="-122"/>
                 <a:cs typeface="Calibri" pitchFamily="34" charset="-120"/>
               </a:rPr>
-              <a:t>Studio leadership — 7 designations, one permission per section.</a:t>
+              <a:t>Everybody, for themselves.</a:t>
             </a:r>
             <a:endParaRPr lang="en-US" sz="1000" dirty="0"/>
           </a:p>
@@ -13690,8 +13779,8 @@
         </p:blipFill>
         <p:spPr>
           <a:xfrm>
-            <a:off x="5989320" y="2786972"/>
-            <a:ext cx="5632704" cy="1649816"/>
+            <a:off x="5989320" y="2023074"/>
+            <a:ext cx="5632704" cy="3177612"/>
           </a:xfrm>
           <a:prstGeom prst="rect">
             <a:avLst/>
@@ -13713,7 +13802,7 @@
         </p:nvSpPr>
         <p:spPr>
           <a:xfrm>
-            <a:off x="5989320" y="4546516"/>
+            <a:off x="5989320" y="5310414"/>
             <a:ext cx="5632704" cy="457200"/>
           </a:xfrm>
           <a:prstGeom prst="rect">
@@ -13738,7 +13827,7 @@
                 <a:ea typeface="Calibri" pitchFamily="34" charset="-122"/>
                 <a:cs typeface="Calibri" pitchFamily="34" charset="-120"/>
               </a:rPr>
-              <a:t>The working-hours control.</a:t>
+              <a:t>The Profile panel.</a:t>
             </a:r>
             <a:endParaRPr lang="en-US" sz="1000" dirty="0"/>
           </a:p>
@@ -13909,7 +13998,7 @@
                 <a:ea typeface="Calibri" pitchFamily="34" charset="-122"/>
                 <a:cs typeface="Calibri" pitchFamily="34" charset="-120"/>
               </a:rPr>
-              <a:t>PERMISSIONS</a:t>
+              <a:t>SETTINGS</a:t>
             </a:r>
             <a:endParaRPr lang="en-US" sz="1100" dirty="0"/>
           </a:p>
@@ -13948,7 +14037,7 @@
                 <a:ea typeface="Cambria" pitchFamily="34" charset="-122"/>
                 <a:cs typeface="Cambria" pitchFamily="34" charset="-120"/>
               </a:rPr>
-              <a:t>Twelve access bands, not sixty role lists</a:t>
+              <a:t>Not one screen, but the ones you hold</a:t>
             </a:r>
             <a:endParaRPr lang="en-US" sz="3400" dirty="0"/>
           </a:p>
@@ -13962,32 +14051,135 @@
         </p:nvSpPr>
         <p:spPr>
           <a:xfrm>
-            <a:off x="566928" y="1554480"/>
-            <a:ext cx="6035040" cy="457200"/>
-          </a:xfrm>
-          <a:prstGeom prst="rect">
-            <a:avLst/>
-          </a:prstGeom>
-          <a:noFill/>
-          <a:ln/>
-        </p:spPr>
-        <p:txBody>
-          <a:bodyPr wrap="square" lIns="0" tIns="0" rIns="0" bIns="0" rtlCol="0" anchor="ctr"/>
-          <a:lstStyle/>
-          <a:p>
-            <a:pPr indent="0" marL="0">
-              <a:buNone/>
+            <a:off x="566928" y="1828800"/>
+            <a:ext cx="4937760" cy="3200400"/>
+          </a:xfrm>
+          <a:prstGeom prst="rect">
+            <a:avLst/>
+          </a:prstGeom>
+          <a:noFill/>
+          <a:ln/>
+        </p:spPr>
+        <p:txBody>
+          <a:bodyPr wrap="square" rtlCol="0" anchor="ctr"/>
+          <a:lstStyle/>
+          <a:p>
+            <a:pPr marL="342900" indent="-342900">
+              <a:lnSpc>
+                <a:spcPts val="2000"/>
+              </a:lnSpc>
+              <a:spcAft>
+                <a:spcPts val="1000"/>
+              </a:spcAft>
+              <a:buSzPct val="100000"/>
+              <a:buChar char="•"/>
             </a:pPr>
             <a:r>
               <a:rPr lang="en-US" sz="1400" dirty="0">
                 <a:solidFill>
-                  <a:srgbClr val="A9A09E"/>
-                </a:solidFill>
-                <a:latin typeface="Calibri" pitchFamily="34" charset="0"/>
-                <a:ea typeface="Calibri" pitchFamily="34" charset="-122"/>
-                <a:cs typeface="Calibri" pitchFamily="34" charset="-120"/>
-              </a:rPr>
-              <a:t>60 permissions across 60 designations, in only twelve distinct groups of holders.</a:t>
+                  <a:srgbClr val="F4F1F0"/>
+                </a:solidFill>
+                <a:latin typeface="Calibri" pitchFamily="34" charset="0"/>
+                <a:ea typeface="Calibri" pitchFamily="34" charset="-122"/>
+                <a:cs typeface="Calibri" pitchFamily="34" charset="-120"/>
+              </a:rPr>
+              <a:t>Working hours — the standard day the Idle report measures against.</a:t>
+            </a:r>
+            <a:endParaRPr lang="en-US" sz="1400" dirty="0"/>
+          </a:p>
+          <a:p>
+            <a:pPr marL="342900" indent="-342900">
+              <a:lnSpc>
+                <a:spcPts val="2000"/>
+              </a:lnSpc>
+              <a:spcAft>
+                <a:spcPts val="1000"/>
+              </a:spcAft>
+              <a:buSzPct val="100000"/>
+              <a:buChar char="•"/>
+            </a:pPr>
+            <a:r>
+              <a:rPr lang="en-US" sz="1400" dirty="0">
+                <a:solidFill>
+                  <a:srgbClr val="F4F1F0"/>
+                </a:solidFill>
+                <a:latin typeface="Calibri" pitchFamily="34" charset="0"/>
+                <a:ea typeface="Calibri" pitchFamily="34" charset="-122"/>
+                <a:cs typeface="Calibri" pitchFamily="34" charset="-120"/>
+              </a:rPr>
+              <a:t>Branding — the studio name and the colour used across the application.</a:t>
+            </a:r>
+            <a:endParaRPr lang="en-US" sz="1400" dirty="0"/>
+          </a:p>
+          <a:p>
+            <a:pPr marL="342900" indent="-342900">
+              <a:lnSpc>
+                <a:spcPts val="2000"/>
+              </a:lnSpc>
+              <a:spcAft>
+                <a:spcPts val="1000"/>
+              </a:spcAft>
+              <a:buSzPct val="100000"/>
+              <a:buChar char="•"/>
+            </a:pPr>
+            <a:r>
+              <a:rPr lang="en-US" sz="1400" dirty="0">
+                <a:solidFill>
+                  <a:srgbClr val="F4F1F0"/>
+                </a:solidFill>
+                <a:latin typeface="Calibri" pitchFamily="34" charset="0"/>
+                <a:ea typeface="Calibri" pitchFamily="34" charset="-122"/>
+                <a:cs typeface="Calibri" pitchFamily="34" charset="-120"/>
+              </a:rPr>
+              <a:t>Five value lists: Scope of Work, Priorities, Asset Categories, Project Categories and Roles.</a:t>
+            </a:r>
+            <a:endParaRPr lang="en-US" sz="1400" dirty="0"/>
+          </a:p>
+          <a:p>
+            <a:pPr marL="342900" indent="-342900">
+              <a:lnSpc>
+                <a:spcPts val="2000"/>
+              </a:lnSpc>
+              <a:spcAft>
+                <a:spcPts val="1000"/>
+              </a:spcAft>
+              <a:buSzPct val="100000"/>
+              <a:buChar char="•"/>
+            </a:pPr>
+            <a:r>
+              <a:rPr lang="en-US" sz="1400" dirty="0">
+                <a:solidFill>
+                  <a:srgbClr val="F4F1F0"/>
+                </a:solidFill>
+                <a:latin typeface="Calibri" pitchFamily="34" charset="0"/>
+                <a:ea typeface="Calibri" pitchFamily="34" charset="-122"/>
+                <a:cs typeface="Calibri" pitchFamily="34" charset="-120"/>
+              </a:rPr>
+              <a:t>Renaming a value is safe; a value in use cannot be deleted, only deactivated.</a:t>
+            </a:r>
+            <a:endParaRPr lang="en-US" sz="1400" dirty="0"/>
+          </a:p>
+          <a:p>
+            <a:pPr marL="342900" indent="-342900">
+              <a:lnSpc>
+                <a:spcPts val="2000"/>
+              </a:lnSpc>
+              <a:spcAft>
+                <a:spcPts val="1000"/>
+              </a:spcAft>
+              <a:buSzPct val="100000"/>
+              <a:buChar char="•"/>
+            </a:pPr>
+            <a:r>
+              <a:rPr lang="en-US" sz="1400" dirty="0">
+                <a:solidFill>
+                  <a:srgbClr val="F4F1F0"/>
+                </a:solidFill>
+                <a:latin typeface="Calibri" pitchFamily="34" charset="0"/>
+                <a:ea typeface="Calibri" pitchFamily="34" charset="-122"/>
+                <a:cs typeface="Calibri" pitchFamily="34" charset="-120"/>
+              </a:rPr>
+              <a:t>A person given one Settings permission gets this page with exactly that one section on it.</a:t>
             </a:r>
             <a:endParaRPr lang="en-US" sz="1400" dirty="0"/>
           </a:p>
@@ -14001,8 +14193,8 @@
         </p:nvSpPr>
         <p:spPr>
           <a:xfrm>
-            <a:off x="566928" y="2286000"/>
-            <a:ext cx="3493008" cy="777240"/>
+            <a:off x="566928" y="5532120"/>
+            <a:ext cx="4937760" cy="777240"/>
           </a:xfrm>
           <a:prstGeom prst="roundRect">
             <a:avLst>
@@ -14028,24 +14220,38 @@
         </p:nvSpPr>
         <p:spPr>
           <a:xfrm>
-            <a:off x="731520" y="2340864"/>
-            <a:ext cx="2560320" cy="384048"/>
-          </a:xfrm>
-          <a:prstGeom prst="rect">
-            <a:avLst/>
-          </a:prstGeom>
-          <a:noFill/>
-          <a:ln/>
-        </p:spPr>
-        <p:txBody>
-          <a:bodyPr wrap="square" lIns="0" tIns="0" rIns="0" bIns="0" rtlCol="0" anchor="t"/>
+            <a:off x="749808" y="5532120"/>
+            <a:ext cx="4572000" cy="777240"/>
+          </a:xfrm>
+          <a:prstGeom prst="rect">
+            <a:avLst/>
+          </a:prstGeom>
+          <a:noFill/>
+          <a:ln/>
+        </p:spPr>
+        <p:txBody>
+          <a:bodyPr wrap="square" lIns="0" tIns="0" rIns="0" bIns="0" rtlCol="0" anchor="ctr"/>
           <a:lstStyle/>
           <a:p>
             <a:pPr indent="0" marL="0">
               <a:buNone/>
             </a:pPr>
             <a:r>
-              <a:rPr lang="en-US" sz="1200" b="1" dirty="0">
+              <a:rPr lang="en-US" sz="1000" b="1" spc="200" kern="0" dirty="0">
+                <a:solidFill>
+                  <a:srgbClr val="B8323A"/>
+                </a:solidFill>
+                <a:latin typeface="Calibri" pitchFamily="34" charset="0"/>
+                <a:ea typeface="Calibri" pitchFamily="34" charset="-122"/>
+                <a:cs typeface="Calibri" pitchFamily="34" charset="-120"/>
+              </a:rPr>
+              <a:t>WHO  </a:t>
+            </a:r>
+            <a:pPr indent="0" marL="0">
+              <a:buNone/>
+            </a:pPr>
+            <a:r>
+              <a:rPr lang="en-US" sz="1200" dirty="0">
                 <a:solidFill>
                   <a:srgbClr val="F4F1F0"/>
                 </a:solidFill>
@@ -14053,38 +14259,69 @@
                 <a:ea typeface="Calibri" pitchFamily="34" charset="-122"/>
                 <a:cs typeface="Calibri" pitchFamily="34" charset="-120"/>
               </a:rPr>
-              <a:t>Everyone</a:t>
-            </a:r>
-            <a:endParaRPr lang="en-US" sz="1200" dirty="0"/>
-          </a:p>
-        </p:txBody>
-      </p:sp>
-      <p:sp>
-        <p:nvSpPr>
-          <p:cNvPr id="10" name="Text 8"/>
-          <p:cNvSpPr txBox="1"/>
-          <p:nvPr/>
-        </p:nvSpPr>
-        <p:spPr>
-          <a:xfrm>
-            <a:off x="731520" y="2697480"/>
-            <a:ext cx="2743200" cy="292608"/>
-          </a:xfrm>
-          <a:prstGeom prst="rect">
-            <a:avLst/>
-          </a:prstGeom>
-          <a:noFill/>
-          <a:ln/>
-        </p:spPr>
-        <p:txBody>
-          <a:bodyPr wrap="square" lIns="0" tIns="0" rIns="0" bIns="0" rtlCol="0" anchor="ctr"/>
-          <a:lstStyle/>
-          <a:p>
-            <a:pPr indent="0" marL="0">
-              <a:buNone/>
-            </a:pPr>
-            <a:r>
-              <a:rPr lang="en-US" sz="1100" dirty="0">
+              <a:t>Studio leadership — 7 designations, one permission per section.</a:t>
+            </a:r>
+            <a:endParaRPr lang="en-US" sz="1000" dirty="0"/>
+          </a:p>
+        </p:txBody>
+      </p:sp>
+      <p:pic>
+        <p:nvPicPr>
+          <p:cNvPr id="10" name="Image 0" descr="preencoded.png">    </p:cNvPr>
+          <p:cNvPicPr>
+            <a:picLocks noChangeAspect="1"/>
+          </p:cNvPicPr>
+          <p:nvPr/>
+        </p:nvPicPr>
+        <p:blipFill>
+          <a:blip r:embed="rId1"/>
+          <a:stretch>
+            <a:fillRect/>
+          </a:stretch>
+        </p:blipFill>
+        <p:spPr>
+          <a:xfrm>
+            <a:off x="5989320" y="2786972"/>
+            <a:ext cx="5632704" cy="1649816"/>
+          </a:xfrm>
+          <a:prstGeom prst="rect">
+            <a:avLst/>
+          </a:prstGeom>
+          <a:effectLst>
+            <a:outerShdw sx="100000" sy="100000" kx="0" ky="0" algn="bl" rotWithShape="0" blurRad="177800" dist="50800" dir="5400000">
+              <a:srgbClr val="000000">
+                <a:alpha val="55000"/>
+              </a:srgbClr>
+            </a:outerShdw>
+          </a:effectLst>
+        </p:spPr>
+      </p:pic>
+      <p:sp>
+        <p:nvSpPr>
+          <p:cNvPr id="11" name="Text 8"/>
+          <p:cNvSpPr txBox="1"/>
+          <p:nvPr/>
+        </p:nvSpPr>
+        <p:spPr>
+          <a:xfrm>
+            <a:off x="5989320" y="4546516"/>
+            <a:ext cx="5632704" cy="457200"/>
+          </a:xfrm>
+          <a:prstGeom prst="rect">
+            <a:avLst/>
+          </a:prstGeom>
+          <a:noFill/>
+          <a:ln/>
+        </p:spPr>
+        <p:txBody>
+          <a:bodyPr wrap="square" lIns="0" tIns="0" rIns="0" bIns="0" rtlCol="0" anchor="ctr"/>
+          <a:lstStyle/>
+          <a:p>
+            <a:pPr algn="ctr" indent="0" marL="0">
+              <a:buNone/>
+            </a:pPr>
+            <a:r>
+              <a:rPr lang="en-US" sz="1000" i="1" dirty="0">
                 <a:solidFill>
                   <a:srgbClr val="A9A09E"/>
                 </a:solidFill>
@@ -14092,1671 +14329,9 @@
                 <a:ea typeface="Calibri" pitchFamily="34" charset="-122"/>
                 <a:cs typeface="Calibri" pitchFamily="34" charset="-120"/>
               </a:rPr>
-              <a:t>3 permissions</a:t>
-            </a:r>
-            <a:endParaRPr lang="en-US" sz="1100" dirty="0"/>
-          </a:p>
-        </p:txBody>
-      </p:sp>
-      <p:sp>
-        <p:nvSpPr>
-          <p:cNvPr id="11" name="Text 9"/>
-          <p:cNvSpPr txBox="1"/>
-          <p:nvPr/>
-        </p:nvSpPr>
-        <p:spPr>
-          <a:xfrm>
-            <a:off x="3328416" y="2377440"/>
-            <a:ext cx="566928" cy="594360"/>
-          </a:xfrm>
-          <a:prstGeom prst="rect">
-            <a:avLst/>
-          </a:prstGeom>
-          <a:noFill/>
-          <a:ln/>
-        </p:spPr>
-        <p:txBody>
-          <a:bodyPr wrap="square" lIns="0" tIns="0" rIns="0" bIns="0" rtlCol="0" anchor="ctr"/>
-          <a:lstStyle/>
-          <a:p>
-            <a:pPr algn="r" indent="0" marL="0">
-              <a:buNone/>
-            </a:pPr>
-            <a:r>
-              <a:rPr lang="en-US" sz="2000" b="1" dirty="0">
-                <a:solidFill>
-                  <a:srgbClr val="B8323A"/>
-                </a:solidFill>
-                <a:latin typeface="Cambria" pitchFamily="34" charset="0"/>
-                <a:ea typeface="Cambria" pitchFamily="34" charset="-122"/>
-                <a:cs typeface="Cambria" pitchFamily="34" charset="-120"/>
-              </a:rPr>
-              <a:t>60</a:t>
-            </a:r>
-            <a:endParaRPr lang="en-US" sz="2000" dirty="0"/>
-          </a:p>
-        </p:txBody>
-      </p:sp>
-      <p:sp>
-        <p:nvSpPr>
-          <p:cNvPr id="12" name="Shape 10"/>
-          <p:cNvSpPr/>
-          <p:nvPr/>
-        </p:nvSpPr>
-        <p:spPr>
-          <a:xfrm>
-            <a:off x="4279392" y="2286000"/>
-            <a:ext cx="3493008" cy="777240"/>
-          </a:xfrm>
-          <a:prstGeom prst="roundRect">
-            <a:avLst>
-              <a:gd name="adj" fmla="val 7059"/>
-            </a:avLst>
-          </a:prstGeom>
-          <a:solidFill>
-            <a:srgbClr val="1E1A19"/>
-          </a:solidFill>
-          <a:ln w="12700">
-            <a:solidFill>
-              <a:srgbClr val="2C2524"/>
-            </a:solidFill>
-            <a:prstDash val="solid"/>
-          </a:ln>
-        </p:spPr>
-      </p:sp>
-      <p:sp>
-        <p:nvSpPr>
-          <p:cNvPr id="13" name="Text 11"/>
-          <p:cNvSpPr txBox="1"/>
-          <p:nvPr/>
-        </p:nvSpPr>
-        <p:spPr>
-          <a:xfrm>
-            <a:off x="4443984" y="2340864"/>
-            <a:ext cx="2560320" cy="384048"/>
-          </a:xfrm>
-          <a:prstGeom prst="rect">
-            <a:avLst/>
-          </a:prstGeom>
-          <a:noFill/>
-          <a:ln/>
-        </p:spPr>
-        <p:txBody>
-          <a:bodyPr wrap="square" lIns="0" tIns="0" rIns="0" bIns="0" rtlCol="0" anchor="t"/>
-          <a:lstStyle/>
-          <a:p>
-            <a:pPr indent="0" marL="0">
-              <a:buNone/>
-            </a:pPr>
-            <a:r>
-              <a:rPr lang="en-US" sz="1200" b="1" dirty="0">
-                <a:solidFill>
-                  <a:srgbClr val="F4F1F0"/>
-                </a:solidFill>
-                <a:latin typeface="Calibri" pitchFamily="34" charset="0"/>
-                <a:ea typeface="Calibri" pitchFamily="34" charset="-122"/>
-                <a:cs typeface="Calibri" pitchFamily="34" charset="-120"/>
-              </a:rPr>
-              <a:t>Everyone who works on assets</a:t>
-            </a:r>
-            <a:endParaRPr lang="en-US" sz="1200" dirty="0"/>
-          </a:p>
-        </p:txBody>
-      </p:sp>
-      <p:sp>
-        <p:nvSpPr>
-          <p:cNvPr id="14" name="Text 12"/>
-          <p:cNvSpPr txBox="1"/>
-          <p:nvPr/>
-        </p:nvSpPr>
-        <p:spPr>
-          <a:xfrm>
-            <a:off x="4443984" y="2697480"/>
-            <a:ext cx="2743200" cy="292608"/>
-          </a:xfrm>
-          <a:prstGeom prst="rect">
-            <a:avLst/>
-          </a:prstGeom>
-          <a:noFill/>
-          <a:ln/>
-        </p:spPr>
-        <p:txBody>
-          <a:bodyPr wrap="square" lIns="0" tIns="0" rIns="0" bIns="0" rtlCol="0" anchor="ctr"/>
-          <a:lstStyle/>
-          <a:p>
-            <a:pPr indent="0" marL="0">
-              <a:buNone/>
-            </a:pPr>
-            <a:r>
-              <a:rPr lang="en-US" sz="1100" dirty="0">
-                <a:solidFill>
-                  <a:srgbClr val="A9A09E"/>
-                </a:solidFill>
-                <a:latin typeface="Calibri" pitchFamily="34" charset="0"/>
-                <a:ea typeface="Calibri" pitchFamily="34" charset="-122"/>
-                <a:cs typeface="Calibri" pitchFamily="34" charset="-120"/>
-              </a:rPr>
-              <a:t>2 permissions</a:t>
-            </a:r>
-            <a:endParaRPr lang="en-US" sz="1100" dirty="0"/>
-          </a:p>
-        </p:txBody>
-      </p:sp>
-      <p:sp>
-        <p:nvSpPr>
-          <p:cNvPr id="15" name="Text 13"/>
-          <p:cNvSpPr txBox="1"/>
-          <p:nvPr/>
-        </p:nvSpPr>
-        <p:spPr>
-          <a:xfrm>
-            <a:off x="7040880" y="2377440"/>
-            <a:ext cx="566928" cy="594360"/>
-          </a:xfrm>
-          <a:prstGeom prst="rect">
-            <a:avLst/>
-          </a:prstGeom>
-          <a:noFill/>
-          <a:ln/>
-        </p:spPr>
-        <p:txBody>
-          <a:bodyPr wrap="square" lIns="0" tIns="0" rIns="0" bIns="0" rtlCol="0" anchor="ctr"/>
-          <a:lstStyle/>
-          <a:p>
-            <a:pPr algn="r" indent="0" marL="0">
-              <a:buNone/>
-            </a:pPr>
-            <a:r>
-              <a:rPr lang="en-US" sz="2000" b="1" dirty="0">
-                <a:solidFill>
-                  <a:srgbClr val="B8323A"/>
-                </a:solidFill>
-                <a:latin typeface="Cambria" pitchFamily="34" charset="0"/>
-                <a:ea typeface="Cambria" pitchFamily="34" charset="-122"/>
-                <a:cs typeface="Cambria" pitchFamily="34" charset="-120"/>
-              </a:rPr>
-              <a:t>51</a:t>
-            </a:r>
-            <a:endParaRPr lang="en-US" sz="2000" dirty="0"/>
-          </a:p>
-        </p:txBody>
-      </p:sp>
-      <p:sp>
-        <p:nvSpPr>
-          <p:cNvPr id="16" name="Shape 14"/>
-          <p:cNvSpPr/>
-          <p:nvPr/>
-        </p:nvSpPr>
-        <p:spPr>
-          <a:xfrm>
-            <a:off x="7991856" y="2286000"/>
-            <a:ext cx="3493008" cy="777240"/>
-          </a:xfrm>
-          <a:prstGeom prst="roundRect">
-            <a:avLst>
-              <a:gd name="adj" fmla="val 7059"/>
-            </a:avLst>
-          </a:prstGeom>
-          <a:solidFill>
-            <a:srgbClr val="1E1A19"/>
-          </a:solidFill>
-          <a:ln w="12700">
-            <a:solidFill>
-              <a:srgbClr val="2C2524"/>
-            </a:solidFill>
-            <a:prstDash val="solid"/>
-          </a:ln>
-        </p:spPr>
-      </p:sp>
-      <p:sp>
-        <p:nvSpPr>
-          <p:cNvPr id="17" name="Text 15"/>
-          <p:cNvSpPr txBox="1"/>
-          <p:nvPr/>
-        </p:nvSpPr>
-        <p:spPr>
-          <a:xfrm>
-            <a:off x="8156448" y="2340864"/>
-            <a:ext cx="2560320" cy="384048"/>
-          </a:xfrm>
-          <a:prstGeom prst="rect">
-            <a:avLst/>
-          </a:prstGeom>
-          <a:noFill/>
-          <a:ln/>
-        </p:spPr>
-        <p:txBody>
-          <a:bodyPr wrap="square" lIns="0" tIns="0" rIns="0" bIns="0" rtlCol="0" anchor="t"/>
-          <a:lstStyle/>
-          <a:p>
-            <a:pPr indent="0" marL="0">
-              <a:buNone/>
-            </a:pPr>
-            <a:r>
-              <a:rPr lang="en-US" sz="1200" b="1" dirty="0">
-                <a:solidFill>
-                  <a:srgbClr val="F4F1F0"/>
-                </a:solidFill>
-                <a:latin typeface="Calibri" pitchFamily="34" charset="0"/>
-                <a:ea typeface="Calibri" pitchFamily="34" charset="-122"/>
-                <a:cs typeface="Calibri" pitchFamily="34" charset="-120"/>
-              </a:rPr>
-              <a:t>Production planning</a:t>
-            </a:r>
-            <a:endParaRPr lang="en-US" sz="1200" dirty="0"/>
-          </a:p>
-        </p:txBody>
-      </p:sp>
-      <p:sp>
-        <p:nvSpPr>
-          <p:cNvPr id="18" name="Text 16"/>
-          <p:cNvSpPr txBox="1"/>
-          <p:nvPr/>
-        </p:nvSpPr>
-        <p:spPr>
-          <a:xfrm>
-            <a:off x="8156448" y="2697480"/>
-            <a:ext cx="2743200" cy="292608"/>
-          </a:xfrm>
-          <a:prstGeom prst="rect">
-            <a:avLst/>
-          </a:prstGeom>
-          <a:noFill/>
-          <a:ln/>
-        </p:spPr>
-        <p:txBody>
-          <a:bodyPr wrap="square" lIns="0" tIns="0" rIns="0" bIns="0" rtlCol="0" anchor="ctr"/>
-          <a:lstStyle/>
-          <a:p>
-            <a:pPr indent="0" marL="0">
-              <a:buNone/>
-            </a:pPr>
-            <a:r>
-              <a:rPr lang="en-US" sz="1100" dirty="0">
-                <a:solidFill>
-                  <a:srgbClr val="A9A09E"/>
-                </a:solidFill>
-                <a:latin typeface="Calibri" pitchFamily="34" charset="0"/>
-                <a:ea typeface="Calibri" pitchFamily="34" charset="-122"/>
-                <a:cs typeface="Calibri" pitchFamily="34" charset="-120"/>
-              </a:rPr>
-              <a:t>2 permissions</a:t>
-            </a:r>
-            <a:endParaRPr lang="en-US" sz="1100" dirty="0"/>
-          </a:p>
-        </p:txBody>
-      </p:sp>
-      <p:sp>
-        <p:nvSpPr>
-          <p:cNvPr id="19" name="Text 17"/>
-          <p:cNvSpPr txBox="1"/>
-          <p:nvPr/>
-        </p:nvSpPr>
-        <p:spPr>
-          <a:xfrm>
-            <a:off x="10753344" y="2377440"/>
-            <a:ext cx="566928" cy="594360"/>
-          </a:xfrm>
-          <a:prstGeom prst="rect">
-            <a:avLst/>
-          </a:prstGeom>
-          <a:noFill/>
-          <a:ln/>
-        </p:spPr>
-        <p:txBody>
-          <a:bodyPr wrap="square" lIns="0" tIns="0" rIns="0" bIns="0" rtlCol="0" anchor="ctr"/>
-          <a:lstStyle/>
-          <a:p>
-            <a:pPr algn="r" indent="0" marL="0">
-              <a:buNone/>
-            </a:pPr>
-            <a:r>
-              <a:rPr lang="en-US" sz="2000" b="1" dirty="0">
-                <a:solidFill>
-                  <a:srgbClr val="B8323A"/>
-                </a:solidFill>
-                <a:latin typeface="Cambria" pitchFamily="34" charset="0"/>
-                <a:ea typeface="Cambria" pitchFamily="34" charset="-122"/>
-                <a:cs typeface="Cambria" pitchFamily="34" charset="-120"/>
-              </a:rPr>
-              <a:t>23</a:t>
-            </a:r>
-            <a:endParaRPr lang="en-US" sz="2000" dirty="0"/>
-          </a:p>
-        </p:txBody>
-      </p:sp>
-      <p:sp>
-        <p:nvSpPr>
-          <p:cNvPr id="20" name="Shape 18"/>
-          <p:cNvSpPr/>
-          <p:nvPr/>
-        </p:nvSpPr>
-        <p:spPr>
-          <a:xfrm>
-            <a:off x="566928" y="3200400"/>
-            <a:ext cx="3493008" cy="777240"/>
-          </a:xfrm>
-          <a:prstGeom prst="roundRect">
-            <a:avLst>
-              <a:gd name="adj" fmla="val 7059"/>
-            </a:avLst>
-          </a:prstGeom>
-          <a:solidFill>
-            <a:srgbClr val="1E1A19"/>
-          </a:solidFill>
-          <a:ln w="12700">
-            <a:solidFill>
-              <a:srgbClr val="2C2524"/>
-            </a:solidFill>
-            <a:prstDash val="solid"/>
-          </a:ln>
-        </p:spPr>
-      </p:sp>
-      <p:sp>
-        <p:nvSpPr>
-          <p:cNvPr id="21" name="Text 19"/>
-          <p:cNvSpPr txBox="1"/>
-          <p:nvPr/>
-        </p:nvSpPr>
-        <p:spPr>
-          <a:xfrm>
-            <a:off x="731520" y="3255264"/>
-            <a:ext cx="2560320" cy="384048"/>
-          </a:xfrm>
-          <a:prstGeom prst="rect">
-            <a:avLst/>
-          </a:prstGeom>
-          <a:noFill/>
-          <a:ln/>
-        </p:spPr>
-        <p:txBody>
-          <a:bodyPr wrap="square" lIns="0" tIns="0" rIns="0" bIns="0" rtlCol="0" anchor="t"/>
-          <a:lstStyle/>
-          <a:p>
-            <a:pPr indent="0" marL="0">
-              <a:buNone/>
-            </a:pPr>
-            <a:r>
-              <a:rPr lang="en-US" sz="1200" b="1" dirty="0">
-                <a:solidFill>
-                  <a:srgbClr val="F4F1F0"/>
-                </a:solidFill>
-                <a:latin typeface="Calibri" pitchFamily="34" charset="0"/>
-                <a:ea typeface="Calibri" pitchFamily="34" charset="-122"/>
-                <a:cs typeface="Calibri" pitchFamily="34" charset="-120"/>
-              </a:rPr>
-              <a:t>First review gate</a:t>
-            </a:r>
-            <a:endParaRPr lang="en-US" sz="1200" dirty="0"/>
-          </a:p>
-        </p:txBody>
-      </p:sp>
-      <p:sp>
-        <p:nvSpPr>
-          <p:cNvPr id="22" name="Text 20"/>
-          <p:cNvSpPr txBox="1"/>
-          <p:nvPr/>
-        </p:nvSpPr>
-        <p:spPr>
-          <a:xfrm>
-            <a:off x="731520" y="3611880"/>
-            <a:ext cx="2743200" cy="292608"/>
-          </a:xfrm>
-          <a:prstGeom prst="rect">
-            <a:avLst/>
-          </a:prstGeom>
-          <a:noFill/>
-          <a:ln/>
-        </p:spPr>
-        <p:txBody>
-          <a:bodyPr wrap="square" lIns="0" tIns="0" rIns="0" bIns="0" rtlCol="0" anchor="ctr"/>
-          <a:lstStyle/>
-          <a:p>
-            <a:pPr indent="0" marL="0">
-              <a:buNone/>
-            </a:pPr>
-            <a:r>
-              <a:rPr lang="en-US" sz="1100" dirty="0">
-                <a:solidFill>
-                  <a:srgbClr val="A9A09E"/>
-                </a:solidFill>
-                <a:latin typeface="Calibri" pitchFamily="34" charset="0"/>
-                <a:ea typeface="Calibri" pitchFamily="34" charset="-122"/>
-                <a:cs typeface="Calibri" pitchFamily="34" charset="-120"/>
-              </a:rPr>
-              <a:t>1 permission</a:t>
-            </a:r>
-            <a:endParaRPr lang="en-US" sz="1100" dirty="0"/>
-          </a:p>
-        </p:txBody>
-      </p:sp>
-      <p:sp>
-        <p:nvSpPr>
-          <p:cNvPr id="23" name="Text 21"/>
-          <p:cNvSpPr txBox="1"/>
-          <p:nvPr/>
-        </p:nvSpPr>
-        <p:spPr>
-          <a:xfrm>
-            <a:off x="3328416" y="3291840"/>
-            <a:ext cx="566928" cy="594360"/>
-          </a:xfrm>
-          <a:prstGeom prst="rect">
-            <a:avLst/>
-          </a:prstGeom>
-          <a:noFill/>
-          <a:ln/>
-        </p:spPr>
-        <p:txBody>
-          <a:bodyPr wrap="square" lIns="0" tIns="0" rIns="0" bIns="0" rtlCol="0" anchor="ctr"/>
-          <a:lstStyle/>
-          <a:p>
-            <a:pPr algn="r" indent="0" marL="0">
-              <a:buNone/>
-            </a:pPr>
-            <a:r>
-              <a:rPr lang="en-US" sz="2000" b="1" dirty="0">
-                <a:solidFill>
-                  <a:srgbClr val="B8323A"/>
-                </a:solidFill>
-                <a:latin typeface="Cambria" pitchFamily="34" charset="0"/>
-                <a:ea typeface="Cambria" pitchFamily="34" charset="-122"/>
-                <a:cs typeface="Cambria" pitchFamily="34" charset="-120"/>
-              </a:rPr>
-              <a:t>23</a:t>
-            </a:r>
-            <a:endParaRPr lang="en-US" sz="2000" dirty="0"/>
-          </a:p>
-        </p:txBody>
-      </p:sp>
-      <p:sp>
-        <p:nvSpPr>
-          <p:cNvPr id="24" name="Shape 22"/>
-          <p:cNvSpPr/>
-          <p:nvPr/>
-        </p:nvSpPr>
-        <p:spPr>
-          <a:xfrm>
-            <a:off x="4279392" y="3200400"/>
-            <a:ext cx="3493008" cy="777240"/>
-          </a:xfrm>
-          <a:prstGeom prst="roundRect">
-            <a:avLst>
-              <a:gd name="adj" fmla="val 7059"/>
-            </a:avLst>
-          </a:prstGeom>
-          <a:solidFill>
-            <a:srgbClr val="1E1A19"/>
-          </a:solidFill>
-          <a:ln w="12700">
-            <a:solidFill>
-              <a:srgbClr val="2C2524"/>
-            </a:solidFill>
-            <a:prstDash val="solid"/>
-          </a:ln>
-        </p:spPr>
-      </p:sp>
-      <p:sp>
-        <p:nvSpPr>
-          <p:cNvPr id="25" name="Text 23"/>
-          <p:cNvSpPr txBox="1"/>
-          <p:nvPr/>
-        </p:nvSpPr>
-        <p:spPr>
-          <a:xfrm>
-            <a:off x="4443984" y="3255264"/>
-            <a:ext cx="2560320" cy="384048"/>
-          </a:xfrm>
-          <a:prstGeom prst="rect">
-            <a:avLst/>
-          </a:prstGeom>
-          <a:noFill/>
-          <a:ln/>
-        </p:spPr>
-        <p:txBody>
-          <a:bodyPr wrap="square" lIns="0" tIns="0" rIns="0" bIns="0" rtlCol="0" anchor="t"/>
-          <a:lstStyle/>
-          <a:p>
-            <a:pPr indent="0" marL="0">
-              <a:buNone/>
-            </a:pPr>
-            <a:r>
-              <a:rPr lang="en-US" sz="1200" b="1" dirty="0">
-                <a:solidFill>
-                  <a:srgbClr val="F4F1F0"/>
-                </a:solidFill>
-                <a:latin typeface="Calibri" pitchFamily="34" charset="0"/>
-                <a:ea typeface="Calibri" pitchFamily="34" charset="-122"/>
-                <a:cs typeface="Calibri" pitchFamily="34" charset="-120"/>
-              </a:rPr>
-              <a:t>Leads and producers</a:t>
-            </a:r>
-            <a:endParaRPr lang="en-US" sz="1200" dirty="0"/>
-          </a:p>
-        </p:txBody>
-      </p:sp>
-      <p:sp>
-        <p:nvSpPr>
-          <p:cNvPr id="26" name="Text 24"/>
-          <p:cNvSpPr txBox="1"/>
-          <p:nvPr/>
-        </p:nvSpPr>
-        <p:spPr>
-          <a:xfrm>
-            <a:off x="4443984" y="3611880"/>
-            <a:ext cx="2743200" cy="292608"/>
-          </a:xfrm>
-          <a:prstGeom prst="rect">
-            <a:avLst/>
-          </a:prstGeom>
-          <a:noFill/>
-          <a:ln/>
-        </p:spPr>
-        <p:txBody>
-          <a:bodyPr wrap="square" lIns="0" tIns="0" rIns="0" bIns="0" rtlCol="0" anchor="ctr"/>
-          <a:lstStyle/>
-          <a:p>
-            <a:pPr indent="0" marL="0">
-              <a:buNone/>
-            </a:pPr>
-            <a:r>
-              <a:rPr lang="en-US" sz="1100" dirty="0">
-                <a:solidFill>
-                  <a:srgbClr val="A9A09E"/>
-                </a:solidFill>
-                <a:latin typeface="Calibri" pitchFamily="34" charset="0"/>
-                <a:ea typeface="Calibri" pitchFamily="34" charset="-122"/>
-                <a:cs typeface="Calibri" pitchFamily="34" charset="-120"/>
-              </a:rPr>
-              <a:t>2 permissions</a:t>
-            </a:r>
-            <a:endParaRPr lang="en-US" sz="1100" dirty="0"/>
-          </a:p>
-        </p:txBody>
-      </p:sp>
-      <p:sp>
-        <p:nvSpPr>
-          <p:cNvPr id="27" name="Text 25"/>
-          <p:cNvSpPr txBox="1"/>
-          <p:nvPr/>
-        </p:nvSpPr>
-        <p:spPr>
-          <a:xfrm>
-            <a:off x="7040880" y="3291840"/>
-            <a:ext cx="566928" cy="594360"/>
-          </a:xfrm>
-          <a:prstGeom prst="rect">
-            <a:avLst/>
-          </a:prstGeom>
-          <a:noFill/>
-          <a:ln/>
-        </p:spPr>
-        <p:txBody>
-          <a:bodyPr wrap="square" lIns="0" tIns="0" rIns="0" bIns="0" rtlCol="0" anchor="ctr"/>
-          <a:lstStyle/>
-          <a:p>
-            <a:pPr algn="r" indent="0" marL="0">
-              <a:buNone/>
-            </a:pPr>
-            <a:r>
-              <a:rPr lang="en-US" sz="2000" b="1" dirty="0">
-                <a:solidFill>
-                  <a:srgbClr val="B8323A"/>
-                </a:solidFill>
-                <a:latin typeface="Cambria" pitchFamily="34" charset="0"/>
-                <a:ea typeface="Cambria" pitchFamily="34" charset="-122"/>
-                <a:cs typeface="Cambria" pitchFamily="34" charset="-120"/>
-              </a:rPr>
-              <a:t>18</a:t>
-            </a:r>
-            <a:endParaRPr lang="en-US" sz="2000" dirty="0"/>
-          </a:p>
-        </p:txBody>
-      </p:sp>
-      <p:sp>
-        <p:nvSpPr>
-          <p:cNvPr id="28" name="Shape 26"/>
-          <p:cNvSpPr/>
-          <p:nvPr/>
-        </p:nvSpPr>
-        <p:spPr>
-          <a:xfrm>
-            <a:off x="7991856" y="3200400"/>
-            <a:ext cx="3493008" cy="777240"/>
-          </a:xfrm>
-          <a:prstGeom prst="roundRect">
-            <a:avLst>
-              <a:gd name="adj" fmla="val 7059"/>
-            </a:avLst>
-          </a:prstGeom>
-          <a:solidFill>
-            <a:srgbClr val="1E1A19"/>
-          </a:solidFill>
-          <a:ln w="12700">
-            <a:solidFill>
-              <a:srgbClr val="2C2524"/>
-            </a:solidFill>
-            <a:prstDash val="solid"/>
-          </a:ln>
-        </p:spPr>
-      </p:sp>
-      <p:sp>
-        <p:nvSpPr>
-          <p:cNvPr id="29" name="Text 27"/>
-          <p:cNvSpPr txBox="1"/>
-          <p:nvPr/>
-        </p:nvSpPr>
-        <p:spPr>
-          <a:xfrm>
-            <a:off x="8156448" y="3255264"/>
-            <a:ext cx="2560320" cy="384048"/>
-          </a:xfrm>
-          <a:prstGeom prst="rect">
-            <a:avLst/>
-          </a:prstGeom>
-          <a:noFill/>
-          <a:ln/>
-        </p:spPr>
-        <p:txBody>
-          <a:bodyPr wrap="square" lIns="0" tIns="0" rIns="0" bIns="0" rtlCol="0" anchor="t"/>
-          <a:lstStyle/>
-          <a:p>
-            <a:pPr indent="0" marL="0">
-              <a:buNone/>
-            </a:pPr>
-            <a:r>
-              <a:rPr lang="en-US" sz="1200" b="1" dirty="0">
-                <a:solidFill>
-                  <a:srgbClr val="F4F1F0"/>
-                </a:solidFill>
-                <a:latin typeface="Calibri" pitchFamily="34" charset="0"/>
-                <a:ea typeface="Calibri" pitchFamily="34" charset="-122"/>
-                <a:cs typeface="Calibri" pitchFamily="34" charset="-120"/>
-              </a:rPr>
-              <a:t>Anyone who supervises people</a:t>
-            </a:r>
-            <a:endParaRPr lang="en-US" sz="1200" dirty="0"/>
-          </a:p>
-        </p:txBody>
-      </p:sp>
-      <p:sp>
-        <p:nvSpPr>
-          <p:cNvPr id="30" name="Text 28"/>
-          <p:cNvSpPr txBox="1"/>
-          <p:nvPr/>
-        </p:nvSpPr>
-        <p:spPr>
-          <a:xfrm>
-            <a:off x="8156448" y="3611880"/>
-            <a:ext cx="2743200" cy="292608"/>
-          </a:xfrm>
-          <a:prstGeom prst="rect">
-            <a:avLst/>
-          </a:prstGeom>
-          <a:noFill/>
-          <a:ln/>
-        </p:spPr>
-        <p:txBody>
-          <a:bodyPr wrap="square" lIns="0" tIns="0" rIns="0" bIns="0" rtlCol="0" anchor="ctr"/>
-          <a:lstStyle/>
-          <a:p>
-            <a:pPr indent="0" marL="0">
-              <a:buNone/>
-            </a:pPr>
-            <a:r>
-              <a:rPr lang="en-US" sz="1100" dirty="0">
-                <a:solidFill>
-                  <a:srgbClr val="A9A09E"/>
-                </a:solidFill>
-                <a:latin typeface="Calibri" pitchFamily="34" charset="0"/>
-                <a:ea typeface="Calibri" pitchFamily="34" charset="-122"/>
-                <a:cs typeface="Calibri" pitchFamily="34" charset="-120"/>
-              </a:rPr>
-              <a:t>1 permission</a:t>
-            </a:r>
-            <a:endParaRPr lang="en-US" sz="1100" dirty="0"/>
-          </a:p>
-        </p:txBody>
-      </p:sp>
-      <p:sp>
-        <p:nvSpPr>
-          <p:cNvPr id="31" name="Text 29"/>
-          <p:cNvSpPr txBox="1"/>
-          <p:nvPr/>
-        </p:nvSpPr>
-        <p:spPr>
-          <a:xfrm>
-            <a:off x="10753344" y="3291840"/>
-            <a:ext cx="566928" cy="594360"/>
-          </a:xfrm>
-          <a:prstGeom prst="rect">
-            <a:avLst/>
-          </a:prstGeom>
-          <a:noFill/>
-          <a:ln/>
-        </p:spPr>
-        <p:txBody>
-          <a:bodyPr wrap="square" lIns="0" tIns="0" rIns="0" bIns="0" rtlCol="0" anchor="ctr"/>
-          <a:lstStyle/>
-          <a:p>
-            <a:pPr algn="r" indent="0" marL="0">
-              <a:buNone/>
-            </a:pPr>
-            <a:r>
-              <a:rPr lang="en-US" sz="2000" b="1" dirty="0">
-                <a:solidFill>
-                  <a:srgbClr val="B8323A"/>
-                </a:solidFill>
-                <a:latin typeface="Cambria" pitchFamily="34" charset="0"/>
-                <a:ea typeface="Cambria" pitchFamily="34" charset="-122"/>
-                <a:cs typeface="Cambria" pitchFamily="34" charset="-120"/>
-              </a:rPr>
-              <a:t>14</a:t>
-            </a:r>
-            <a:endParaRPr lang="en-US" sz="2000" dirty="0"/>
-          </a:p>
-        </p:txBody>
-      </p:sp>
-      <p:sp>
-        <p:nvSpPr>
-          <p:cNvPr id="32" name="Shape 30"/>
-          <p:cNvSpPr/>
-          <p:nvPr/>
-        </p:nvSpPr>
-        <p:spPr>
-          <a:xfrm>
-            <a:off x="566928" y="4114800"/>
-            <a:ext cx="3493008" cy="777240"/>
-          </a:xfrm>
-          <a:prstGeom prst="roundRect">
-            <a:avLst>
-              <a:gd name="adj" fmla="val 7059"/>
-            </a:avLst>
-          </a:prstGeom>
-          <a:solidFill>
-            <a:srgbClr val="1E1A19"/>
-          </a:solidFill>
-          <a:ln w="12700">
-            <a:solidFill>
-              <a:srgbClr val="2C2524"/>
-            </a:solidFill>
-            <a:prstDash val="solid"/>
-          </a:ln>
-        </p:spPr>
-      </p:sp>
-      <p:sp>
-        <p:nvSpPr>
-          <p:cNvPr id="33" name="Text 31"/>
-          <p:cNvSpPr txBox="1"/>
-          <p:nvPr/>
-        </p:nvSpPr>
-        <p:spPr>
-          <a:xfrm>
-            <a:off x="731520" y="4169664"/>
-            <a:ext cx="2560320" cy="384048"/>
-          </a:xfrm>
-          <a:prstGeom prst="rect">
-            <a:avLst/>
-          </a:prstGeom>
-          <a:noFill/>
-          <a:ln/>
-        </p:spPr>
-        <p:txBody>
-          <a:bodyPr wrap="square" lIns="0" tIns="0" rIns="0" bIns="0" rtlCol="0" anchor="t"/>
-          <a:lstStyle/>
-          <a:p>
-            <a:pPr indent="0" marL="0">
-              <a:buNone/>
-            </a:pPr>
-            <a:r>
-              <a:rPr lang="en-US" sz="1200" b="1" dirty="0">
-                <a:solidFill>
-                  <a:srgbClr val="F4F1F0"/>
-                </a:solidFill>
-                <a:latin typeface="Calibri" pitchFamily="34" charset="0"/>
-                <a:ea typeface="Calibri" pitchFamily="34" charset="-122"/>
-                <a:cs typeface="Calibri" pitchFamily="34" charset="-120"/>
-              </a:rPr>
-              <a:t>Delivery</a:t>
-            </a:r>
-            <a:endParaRPr lang="en-US" sz="1200" dirty="0"/>
-          </a:p>
-        </p:txBody>
-      </p:sp>
-      <p:sp>
-        <p:nvSpPr>
-          <p:cNvPr id="34" name="Text 32"/>
-          <p:cNvSpPr txBox="1"/>
-          <p:nvPr/>
-        </p:nvSpPr>
-        <p:spPr>
-          <a:xfrm>
-            <a:off x="731520" y="4526280"/>
-            <a:ext cx="2743200" cy="292608"/>
-          </a:xfrm>
-          <a:prstGeom prst="rect">
-            <a:avLst/>
-          </a:prstGeom>
-          <a:noFill/>
-          <a:ln/>
-        </p:spPr>
-        <p:txBody>
-          <a:bodyPr wrap="square" lIns="0" tIns="0" rIns="0" bIns="0" rtlCol="0" anchor="ctr"/>
-          <a:lstStyle/>
-          <a:p>
-            <a:pPr indent="0" marL="0">
-              <a:buNone/>
-            </a:pPr>
-            <a:r>
-              <a:rPr lang="en-US" sz="1100" dirty="0">
-                <a:solidFill>
-                  <a:srgbClr val="A9A09E"/>
-                </a:solidFill>
-                <a:latin typeface="Calibri" pitchFamily="34" charset="0"/>
-                <a:ea typeface="Calibri" pitchFamily="34" charset="-122"/>
-                <a:cs typeface="Calibri" pitchFamily="34" charset="-120"/>
-              </a:rPr>
-              <a:t>1 permission</a:t>
-            </a:r>
-            <a:endParaRPr lang="en-US" sz="1100" dirty="0"/>
-          </a:p>
-        </p:txBody>
-      </p:sp>
-      <p:sp>
-        <p:nvSpPr>
-          <p:cNvPr id="35" name="Text 33"/>
-          <p:cNvSpPr txBox="1"/>
-          <p:nvPr/>
-        </p:nvSpPr>
-        <p:spPr>
-          <a:xfrm>
-            <a:off x="3328416" y="4206240"/>
-            <a:ext cx="566928" cy="594360"/>
-          </a:xfrm>
-          <a:prstGeom prst="rect">
-            <a:avLst/>
-          </a:prstGeom>
-          <a:noFill/>
-          <a:ln/>
-        </p:spPr>
-        <p:txBody>
-          <a:bodyPr wrap="square" lIns="0" tIns="0" rIns="0" bIns="0" rtlCol="0" anchor="ctr"/>
-          <a:lstStyle/>
-          <a:p>
-            <a:pPr algn="r" indent="0" marL="0">
-              <a:buNone/>
-            </a:pPr>
-            <a:r>
-              <a:rPr lang="en-US" sz="2000" b="1" dirty="0">
-                <a:solidFill>
-                  <a:srgbClr val="B8323A"/>
-                </a:solidFill>
-                <a:latin typeface="Cambria" pitchFamily="34" charset="0"/>
-                <a:ea typeface="Cambria" pitchFamily="34" charset="-122"/>
-                <a:cs typeface="Cambria" pitchFamily="34" charset="-120"/>
-              </a:rPr>
-              <a:t>18</a:t>
-            </a:r>
-            <a:endParaRPr lang="en-US" sz="2000" dirty="0"/>
-          </a:p>
-        </p:txBody>
-      </p:sp>
-      <p:sp>
-        <p:nvSpPr>
-          <p:cNvPr id="36" name="Shape 34"/>
-          <p:cNvSpPr/>
-          <p:nvPr/>
-        </p:nvSpPr>
-        <p:spPr>
-          <a:xfrm>
-            <a:off x="4279392" y="4114800"/>
-            <a:ext cx="3493008" cy="777240"/>
-          </a:xfrm>
-          <a:prstGeom prst="roundRect">
-            <a:avLst>
-              <a:gd name="adj" fmla="val 7059"/>
-            </a:avLst>
-          </a:prstGeom>
-          <a:solidFill>
-            <a:srgbClr val="1E1A19"/>
-          </a:solidFill>
-          <a:ln w="12700">
-            <a:solidFill>
-              <a:srgbClr val="2C2524"/>
-            </a:solidFill>
-            <a:prstDash val="solid"/>
-          </a:ln>
-        </p:spPr>
-      </p:sp>
-      <p:sp>
-        <p:nvSpPr>
-          <p:cNvPr id="37" name="Text 35"/>
-          <p:cNvSpPr txBox="1"/>
-          <p:nvPr/>
-        </p:nvSpPr>
-        <p:spPr>
-          <a:xfrm>
-            <a:off x="4443984" y="4169664"/>
-            <a:ext cx="2560320" cy="384048"/>
-          </a:xfrm>
-          <a:prstGeom prst="rect">
-            <a:avLst/>
-          </a:prstGeom>
-          <a:noFill/>
-          <a:ln/>
-        </p:spPr>
-        <p:txBody>
-          <a:bodyPr wrap="square" lIns="0" tIns="0" rIns="0" bIns="0" rtlCol="0" anchor="t"/>
-          <a:lstStyle/>
-          <a:p>
-            <a:pPr indent="0" marL="0">
-              <a:buNone/>
-            </a:pPr>
-            <a:r>
-              <a:rPr lang="en-US" sz="1200" b="1" dirty="0">
-                <a:solidFill>
-                  <a:srgbClr val="F4F1F0"/>
-                </a:solidFill>
-                <a:latin typeface="Calibri" pitchFamily="34" charset="0"/>
-                <a:ea typeface="Calibri" pitchFamily="34" charset="-122"/>
-                <a:cs typeface="Calibri" pitchFamily="34" charset="-120"/>
-              </a:rPr>
-              <a:t>Creative direction</a:t>
-            </a:r>
-            <a:endParaRPr lang="en-US" sz="1200" dirty="0"/>
-          </a:p>
-        </p:txBody>
-      </p:sp>
-      <p:sp>
-        <p:nvSpPr>
-          <p:cNvPr id="38" name="Text 36"/>
-          <p:cNvSpPr txBox="1"/>
-          <p:nvPr/>
-        </p:nvSpPr>
-        <p:spPr>
-          <a:xfrm>
-            <a:off x="4443984" y="4526280"/>
-            <a:ext cx="2743200" cy="292608"/>
-          </a:xfrm>
-          <a:prstGeom prst="rect">
-            <a:avLst/>
-          </a:prstGeom>
-          <a:noFill/>
-          <a:ln/>
-        </p:spPr>
-        <p:txBody>
-          <a:bodyPr wrap="square" lIns="0" tIns="0" rIns="0" bIns="0" rtlCol="0" anchor="ctr"/>
-          <a:lstStyle/>
-          <a:p>
-            <a:pPr indent="0" marL="0">
-              <a:buNone/>
-            </a:pPr>
-            <a:r>
-              <a:rPr lang="en-US" sz="1100" dirty="0">
-                <a:solidFill>
-                  <a:srgbClr val="A9A09E"/>
-                </a:solidFill>
-                <a:latin typeface="Calibri" pitchFamily="34" charset="0"/>
-                <a:ea typeface="Calibri" pitchFamily="34" charset="-122"/>
-                <a:cs typeface="Calibri" pitchFamily="34" charset="-120"/>
-              </a:rPr>
-              <a:t>2 permissions</a:t>
-            </a:r>
-            <a:endParaRPr lang="en-US" sz="1100" dirty="0"/>
-          </a:p>
-        </p:txBody>
-      </p:sp>
-      <p:sp>
-        <p:nvSpPr>
-          <p:cNvPr id="39" name="Text 37"/>
-          <p:cNvSpPr txBox="1"/>
-          <p:nvPr/>
-        </p:nvSpPr>
-        <p:spPr>
-          <a:xfrm>
-            <a:off x="7040880" y="4206240"/>
-            <a:ext cx="566928" cy="594360"/>
-          </a:xfrm>
-          <a:prstGeom prst="rect">
-            <a:avLst/>
-          </a:prstGeom>
-          <a:noFill/>
-          <a:ln/>
-        </p:spPr>
-        <p:txBody>
-          <a:bodyPr wrap="square" lIns="0" tIns="0" rIns="0" bIns="0" rtlCol="0" anchor="ctr"/>
-          <a:lstStyle/>
-          <a:p>
-            <a:pPr algn="r" indent="0" marL="0">
-              <a:buNone/>
-            </a:pPr>
-            <a:r>
-              <a:rPr lang="en-US" sz="2000" b="1" dirty="0">
-                <a:solidFill>
-                  <a:srgbClr val="B8323A"/>
-                </a:solidFill>
-                <a:latin typeface="Cambria" pitchFamily="34" charset="0"/>
-                <a:ea typeface="Cambria" pitchFamily="34" charset="-122"/>
-                <a:cs typeface="Cambria" pitchFamily="34" charset="-120"/>
-              </a:rPr>
-              <a:t>9</a:t>
-            </a:r>
-            <a:endParaRPr lang="en-US" sz="2000" dirty="0"/>
-          </a:p>
-        </p:txBody>
-      </p:sp>
-      <p:sp>
-        <p:nvSpPr>
-          <p:cNvPr id="40" name="Shape 38"/>
-          <p:cNvSpPr/>
-          <p:nvPr/>
-        </p:nvSpPr>
-        <p:spPr>
-          <a:xfrm>
-            <a:off x="7991856" y="4114800"/>
-            <a:ext cx="3493008" cy="777240"/>
-          </a:xfrm>
-          <a:prstGeom prst="roundRect">
-            <a:avLst>
-              <a:gd name="adj" fmla="val 7059"/>
-            </a:avLst>
-          </a:prstGeom>
-          <a:solidFill>
-            <a:srgbClr val="1E1A19"/>
-          </a:solidFill>
-          <a:ln w="12700">
-            <a:solidFill>
-              <a:srgbClr val="2C2524"/>
-            </a:solidFill>
-            <a:prstDash val="solid"/>
-          </a:ln>
-        </p:spPr>
-      </p:sp>
-      <p:sp>
-        <p:nvSpPr>
-          <p:cNvPr id="41" name="Text 39"/>
-          <p:cNvSpPr txBox="1"/>
-          <p:nvPr/>
-        </p:nvSpPr>
-        <p:spPr>
-          <a:xfrm>
-            <a:off x="8156448" y="4169664"/>
-            <a:ext cx="2560320" cy="384048"/>
-          </a:xfrm>
-          <a:prstGeom prst="rect">
-            <a:avLst/>
-          </a:prstGeom>
-          <a:noFill/>
-          <a:ln/>
-        </p:spPr>
-        <p:txBody>
-          <a:bodyPr wrap="square" lIns="0" tIns="0" rIns="0" bIns="0" rtlCol="0" anchor="t"/>
-          <a:lstStyle/>
-          <a:p>
-            <a:pPr indent="0" marL="0">
-              <a:buNone/>
-            </a:pPr>
-            <a:r>
-              <a:rPr lang="en-US" sz="1200" b="1" dirty="0">
-                <a:solidFill>
-                  <a:srgbClr val="F4F1F0"/>
-                </a:solidFill>
-                <a:latin typeface="Calibri" pitchFamily="34" charset="0"/>
-                <a:ea typeface="Calibri" pitchFamily="34" charset="-122"/>
-                <a:cs typeface="Calibri" pitchFamily="34" charset="-120"/>
-              </a:rPr>
-              <a:t>Administration</a:t>
-            </a:r>
-            <a:endParaRPr lang="en-US" sz="1200" dirty="0"/>
-          </a:p>
-        </p:txBody>
-      </p:sp>
-      <p:sp>
-        <p:nvSpPr>
-          <p:cNvPr id="42" name="Text 40"/>
-          <p:cNvSpPr txBox="1"/>
-          <p:nvPr/>
-        </p:nvSpPr>
-        <p:spPr>
-          <a:xfrm>
-            <a:off x="8156448" y="4526280"/>
-            <a:ext cx="2743200" cy="292608"/>
-          </a:xfrm>
-          <a:prstGeom prst="rect">
-            <a:avLst/>
-          </a:prstGeom>
-          <a:noFill/>
-          <a:ln/>
-        </p:spPr>
-        <p:txBody>
-          <a:bodyPr wrap="square" lIns="0" tIns="0" rIns="0" bIns="0" rtlCol="0" anchor="ctr"/>
-          <a:lstStyle/>
-          <a:p>
-            <a:pPr indent="0" marL="0">
-              <a:buNone/>
-            </a:pPr>
-            <a:r>
-              <a:rPr lang="en-US" sz="1100" dirty="0">
-                <a:solidFill>
-                  <a:srgbClr val="A9A09E"/>
-                </a:solidFill>
-                <a:latin typeface="Calibri" pitchFamily="34" charset="0"/>
-                <a:ea typeface="Calibri" pitchFamily="34" charset="-122"/>
-                <a:cs typeface="Calibri" pitchFamily="34" charset="-120"/>
-              </a:rPr>
-              <a:t>18 permissions</a:t>
-            </a:r>
-            <a:endParaRPr lang="en-US" sz="1100" dirty="0"/>
-          </a:p>
-        </p:txBody>
-      </p:sp>
-      <p:sp>
-        <p:nvSpPr>
-          <p:cNvPr id="43" name="Text 41"/>
-          <p:cNvSpPr txBox="1"/>
-          <p:nvPr/>
-        </p:nvSpPr>
-        <p:spPr>
-          <a:xfrm>
-            <a:off x="10753344" y="4206240"/>
-            <a:ext cx="566928" cy="594360"/>
-          </a:xfrm>
-          <a:prstGeom prst="rect">
-            <a:avLst/>
-          </a:prstGeom>
-          <a:noFill/>
-          <a:ln/>
-        </p:spPr>
-        <p:txBody>
-          <a:bodyPr wrap="square" lIns="0" tIns="0" rIns="0" bIns="0" rtlCol="0" anchor="ctr"/>
-          <a:lstStyle/>
-          <a:p>
-            <a:pPr algn="r" indent="0" marL="0">
-              <a:buNone/>
-            </a:pPr>
-            <a:r>
-              <a:rPr lang="en-US" sz="2000" b="1" dirty="0">
-                <a:solidFill>
-                  <a:srgbClr val="B8323A"/>
-                </a:solidFill>
-                <a:latin typeface="Cambria" pitchFamily="34" charset="0"/>
-                <a:ea typeface="Cambria" pitchFamily="34" charset="-122"/>
-                <a:cs typeface="Cambria" pitchFamily="34" charset="-120"/>
-              </a:rPr>
-              <a:t>8</a:t>
-            </a:r>
-            <a:endParaRPr lang="en-US" sz="2000" dirty="0"/>
-          </a:p>
-        </p:txBody>
-      </p:sp>
-      <p:sp>
-        <p:nvSpPr>
-          <p:cNvPr id="44" name="Shape 42"/>
-          <p:cNvSpPr/>
-          <p:nvPr/>
-        </p:nvSpPr>
-        <p:spPr>
-          <a:xfrm>
-            <a:off x="566928" y="5029200"/>
-            <a:ext cx="3493008" cy="777240"/>
-          </a:xfrm>
-          <a:prstGeom prst="roundRect">
-            <a:avLst>
-              <a:gd name="adj" fmla="val 7059"/>
-            </a:avLst>
-          </a:prstGeom>
-          <a:solidFill>
-            <a:srgbClr val="1E1A19"/>
-          </a:solidFill>
-          <a:ln w="12700">
-            <a:solidFill>
-              <a:srgbClr val="2C2524"/>
-            </a:solidFill>
-            <a:prstDash val="solid"/>
-          </a:ln>
-        </p:spPr>
-      </p:sp>
-      <p:sp>
-        <p:nvSpPr>
-          <p:cNvPr id="45" name="Text 43"/>
-          <p:cNvSpPr txBox="1"/>
-          <p:nvPr/>
-        </p:nvSpPr>
-        <p:spPr>
-          <a:xfrm>
-            <a:off x="731520" y="5084064"/>
-            <a:ext cx="2560320" cy="384048"/>
-          </a:xfrm>
-          <a:prstGeom prst="rect">
-            <a:avLst/>
-          </a:prstGeom>
-          <a:noFill/>
-          <a:ln/>
-        </p:spPr>
-        <p:txBody>
-          <a:bodyPr wrap="square" lIns="0" tIns="0" rIns="0" bIns="0" rtlCol="0" anchor="t"/>
-          <a:lstStyle/>
-          <a:p>
-            <a:pPr indent="0" marL="0">
-              <a:buNone/>
-            </a:pPr>
-            <a:r>
-              <a:rPr lang="en-US" sz="1200" b="1" dirty="0">
-                <a:solidFill>
-                  <a:srgbClr val="F4F1F0"/>
-                </a:solidFill>
-                <a:latin typeface="Calibri" pitchFamily="34" charset="0"/>
-                <a:ea typeface="Calibri" pitchFamily="34" charset="-122"/>
-                <a:cs typeface="Calibri" pitchFamily="34" charset="-120"/>
-              </a:rPr>
-              <a:t>Studio leadership</a:t>
-            </a:r>
-            <a:endParaRPr lang="en-US" sz="1200" dirty="0"/>
-          </a:p>
-        </p:txBody>
-      </p:sp>
-      <p:sp>
-        <p:nvSpPr>
-          <p:cNvPr id="46" name="Text 44"/>
-          <p:cNvSpPr txBox="1"/>
-          <p:nvPr/>
-        </p:nvSpPr>
-        <p:spPr>
-          <a:xfrm>
-            <a:off x="731520" y="5440680"/>
-            <a:ext cx="2743200" cy="292608"/>
-          </a:xfrm>
-          <a:prstGeom prst="rect">
-            <a:avLst/>
-          </a:prstGeom>
-          <a:noFill/>
-          <a:ln/>
-        </p:spPr>
-        <p:txBody>
-          <a:bodyPr wrap="square" lIns="0" tIns="0" rIns="0" bIns="0" rtlCol="0" anchor="ctr"/>
-          <a:lstStyle/>
-          <a:p>
-            <a:pPr indent="0" marL="0">
-              <a:buNone/>
-            </a:pPr>
-            <a:r>
-              <a:rPr lang="en-US" sz="1100" dirty="0">
-                <a:solidFill>
-                  <a:srgbClr val="A9A09E"/>
-                </a:solidFill>
-                <a:latin typeface="Calibri" pitchFamily="34" charset="0"/>
-                <a:ea typeface="Calibri" pitchFamily="34" charset="-122"/>
-                <a:cs typeface="Calibri" pitchFamily="34" charset="-120"/>
-              </a:rPr>
-              <a:t>16 permissions</a:t>
-            </a:r>
-            <a:endParaRPr lang="en-US" sz="1100" dirty="0"/>
-          </a:p>
-        </p:txBody>
-      </p:sp>
-      <p:sp>
-        <p:nvSpPr>
-          <p:cNvPr id="47" name="Text 45"/>
-          <p:cNvSpPr txBox="1"/>
-          <p:nvPr/>
-        </p:nvSpPr>
-        <p:spPr>
-          <a:xfrm>
-            <a:off x="3328416" y="5120640"/>
-            <a:ext cx="566928" cy="594360"/>
-          </a:xfrm>
-          <a:prstGeom prst="rect">
-            <a:avLst/>
-          </a:prstGeom>
-          <a:noFill/>
-          <a:ln/>
-        </p:spPr>
-        <p:txBody>
-          <a:bodyPr wrap="square" lIns="0" tIns="0" rIns="0" bIns="0" rtlCol="0" anchor="ctr"/>
-          <a:lstStyle/>
-          <a:p>
-            <a:pPr algn="r" indent="0" marL="0">
-              <a:buNone/>
-            </a:pPr>
-            <a:r>
-              <a:rPr lang="en-US" sz="2000" b="1" dirty="0">
-                <a:solidFill>
-                  <a:srgbClr val="B8323A"/>
-                </a:solidFill>
-                <a:latin typeface="Cambria" pitchFamily="34" charset="0"/>
-                <a:ea typeface="Cambria" pitchFamily="34" charset="-122"/>
-                <a:cs typeface="Cambria" pitchFamily="34" charset="-120"/>
-              </a:rPr>
-              <a:t>7</a:t>
-            </a:r>
-            <a:endParaRPr lang="en-US" sz="2000" dirty="0"/>
-          </a:p>
-        </p:txBody>
-      </p:sp>
-      <p:sp>
-        <p:nvSpPr>
-          <p:cNvPr id="48" name="Shape 46"/>
-          <p:cNvSpPr/>
-          <p:nvPr/>
-        </p:nvSpPr>
-        <p:spPr>
-          <a:xfrm>
-            <a:off x="4279392" y="5029200"/>
-            <a:ext cx="3493008" cy="777240"/>
-          </a:xfrm>
-          <a:prstGeom prst="roundRect">
-            <a:avLst>
-              <a:gd name="adj" fmla="val 7059"/>
-            </a:avLst>
-          </a:prstGeom>
-          <a:solidFill>
-            <a:srgbClr val="1E1A19"/>
-          </a:solidFill>
-          <a:ln w="12700">
-            <a:solidFill>
-              <a:srgbClr val="2C2524"/>
-            </a:solidFill>
-            <a:prstDash val="solid"/>
-          </a:ln>
-        </p:spPr>
-      </p:sp>
-      <p:sp>
-        <p:nvSpPr>
-          <p:cNvPr id="49" name="Text 47"/>
-          <p:cNvSpPr txBox="1"/>
-          <p:nvPr/>
-        </p:nvSpPr>
-        <p:spPr>
-          <a:xfrm>
-            <a:off x="4443984" y="5084064"/>
-            <a:ext cx="2560320" cy="384048"/>
-          </a:xfrm>
-          <a:prstGeom prst="rect">
-            <a:avLst/>
-          </a:prstGeom>
-          <a:noFill/>
-          <a:ln/>
-        </p:spPr>
-        <p:txBody>
-          <a:bodyPr wrap="square" lIns="0" tIns="0" rIns="0" bIns="0" rtlCol="0" anchor="t"/>
-          <a:lstStyle/>
-          <a:p>
-            <a:pPr indent="0" marL="0">
-              <a:buNone/>
-            </a:pPr>
-            <a:r>
-              <a:rPr lang="en-US" sz="1200" b="1" dirty="0">
-                <a:solidFill>
-                  <a:srgbClr val="F4F1F0"/>
-                </a:solidFill>
-                <a:latin typeface="Calibri" pitchFamily="34" charset="0"/>
-                <a:ea typeface="Calibri" pitchFamily="34" charset="-122"/>
-                <a:cs typeface="Calibri" pitchFamily="34" charset="-120"/>
-              </a:rPr>
-              <a:t>Creative Art Director and Super Admin</a:t>
-            </a:r>
-            <a:endParaRPr lang="en-US" sz="1200" dirty="0"/>
-          </a:p>
-        </p:txBody>
-      </p:sp>
-      <p:sp>
-        <p:nvSpPr>
-          <p:cNvPr id="50" name="Text 48"/>
-          <p:cNvSpPr txBox="1"/>
-          <p:nvPr/>
-        </p:nvSpPr>
-        <p:spPr>
-          <a:xfrm>
-            <a:off x="4443984" y="5440680"/>
-            <a:ext cx="2743200" cy="292608"/>
-          </a:xfrm>
-          <a:prstGeom prst="rect">
-            <a:avLst/>
-          </a:prstGeom>
-          <a:noFill/>
-          <a:ln/>
-        </p:spPr>
-        <p:txBody>
-          <a:bodyPr wrap="square" lIns="0" tIns="0" rIns="0" bIns="0" rtlCol="0" anchor="ctr"/>
-          <a:lstStyle/>
-          <a:p>
-            <a:pPr indent="0" marL="0">
-              <a:buNone/>
-            </a:pPr>
-            <a:r>
-              <a:rPr lang="en-US" sz="1100" dirty="0">
-                <a:solidFill>
-                  <a:srgbClr val="A9A09E"/>
-                </a:solidFill>
-                <a:latin typeface="Calibri" pitchFamily="34" charset="0"/>
-                <a:ea typeface="Calibri" pitchFamily="34" charset="-122"/>
-                <a:cs typeface="Calibri" pitchFamily="34" charset="-120"/>
-              </a:rPr>
-              <a:t>3 permissions</a:t>
-            </a:r>
-            <a:endParaRPr lang="en-US" sz="1100" dirty="0"/>
-          </a:p>
-        </p:txBody>
-      </p:sp>
-      <p:sp>
-        <p:nvSpPr>
-          <p:cNvPr id="51" name="Text 49"/>
-          <p:cNvSpPr txBox="1"/>
-          <p:nvPr/>
-        </p:nvSpPr>
-        <p:spPr>
-          <a:xfrm>
-            <a:off x="7040880" y="5120640"/>
-            <a:ext cx="566928" cy="594360"/>
-          </a:xfrm>
-          <a:prstGeom prst="rect">
-            <a:avLst/>
-          </a:prstGeom>
-          <a:noFill/>
-          <a:ln/>
-        </p:spPr>
-        <p:txBody>
-          <a:bodyPr wrap="square" lIns="0" tIns="0" rIns="0" bIns="0" rtlCol="0" anchor="ctr"/>
-          <a:lstStyle/>
-          <a:p>
-            <a:pPr algn="r" indent="0" marL="0">
-              <a:buNone/>
-            </a:pPr>
-            <a:r>
-              <a:rPr lang="en-US" sz="2000" b="1" dirty="0">
-                <a:solidFill>
-                  <a:srgbClr val="B8323A"/>
-                </a:solidFill>
-                <a:latin typeface="Cambria" pitchFamily="34" charset="0"/>
-                <a:ea typeface="Cambria" pitchFamily="34" charset="-122"/>
-                <a:cs typeface="Cambria" pitchFamily="34" charset="-120"/>
-              </a:rPr>
-              <a:t>2</a:t>
-            </a:r>
-            <a:endParaRPr lang="en-US" sz="2000" dirty="0"/>
-          </a:p>
-        </p:txBody>
-      </p:sp>
-      <p:sp>
-        <p:nvSpPr>
-          <p:cNvPr id="52" name="Shape 50"/>
-          <p:cNvSpPr/>
-          <p:nvPr/>
-        </p:nvSpPr>
-        <p:spPr>
-          <a:xfrm>
-            <a:off x="7991856" y="5029200"/>
-            <a:ext cx="3493008" cy="777240"/>
-          </a:xfrm>
-          <a:prstGeom prst="roundRect">
-            <a:avLst>
-              <a:gd name="adj" fmla="val 7059"/>
-            </a:avLst>
-          </a:prstGeom>
-          <a:solidFill>
-            <a:srgbClr val="1E1A19"/>
-          </a:solidFill>
-          <a:ln w="12700">
-            <a:solidFill>
-              <a:srgbClr val="2C2524"/>
-            </a:solidFill>
-            <a:prstDash val="solid"/>
-          </a:ln>
-        </p:spPr>
-      </p:sp>
-      <p:sp>
-        <p:nvSpPr>
-          <p:cNvPr id="53" name="Text 51"/>
-          <p:cNvSpPr txBox="1"/>
-          <p:nvPr/>
-        </p:nvSpPr>
-        <p:spPr>
-          <a:xfrm>
-            <a:off x="8156448" y="5084064"/>
-            <a:ext cx="2560320" cy="384048"/>
-          </a:xfrm>
-          <a:prstGeom prst="rect">
-            <a:avLst/>
-          </a:prstGeom>
-          <a:noFill/>
-          <a:ln/>
-        </p:spPr>
-        <p:txBody>
-          <a:bodyPr wrap="square" lIns="0" tIns="0" rIns="0" bIns="0" rtlCol="0" anchor="t"/>
-          <a:lstStyle/>
-          <a:p>
-            <a:pPr indent="0" marL="0">
-              <a:buNone/>
-            </a:pPr>
-            <a:r>
-              <a:rPr lang="en-US" sz="1200" b="1" dirty="0">
-                <a:solidFill>
-                  <a:srgbClr val="F4F1F0"/>
-                </a:solidFill>
-                <a:latin typeface="Calibri" pitchFamily="34" charset="0"/>
-                <a:ea typeface="Calibri" pitchFamily="34" charset="-122"/>
-                <a:cs typeface="Calibri" pitchFamily="34" charset="-120"/>
-              </a:rPr>
-              <a:t>Super Admin only</a:t>
-            </a:r>
-            <a:endParaRPr lang="en-US" sz="1200" dirty="0"/>
-          </a:p>
-        </p:txBody>
-      </p:sp>
-      <p:sp>
-        <p:nvSpPr>
-          <p:cNvPr id="54" name="Text 52"/>
-          <p:cNvSpPr txBox="1"/>
-          <p:nvPr/>
-        </p:nvSpPr>
-        <p:spPr>
-          <a:xfrm>
-            <a:off x="8156448" y="5440680"/>
-            <a:ext cx="2743200" cy="292608"/>
-          </a:xfrm>
-          <a:prstGeom prst="rect">
-            <a:avLst/>
-          </a:prstGeom>
-          <a:noFill/>
-          <a:ln/>
-        </p:spPr>
-        <p:txBody>
-          <a:bodyPr wrap="square" lIns="0" tIns="0" rIns="0" bIns="0" rtlCol="0" anchor="ctr"/>
-          <a:lstStyle/>
-          <a:p>
-            <a:pPr indent="0" marL="0">
-              <a:buNone/>
-            </a:pPr>
-            <a:r>
-              <a:rPr lang="en-US" sz="1100" dirty="0">
-                <a:solidFill>
-                  <a:srgbClr val="A9A09E"/>
-                </a:solidFill>
-                <a:latin typeface="Calibri" pitchFamily="34" charset="0"/>
-                <a:ea typeface="Calibri" pitchFamily="34" charset="-122"/>
-                <a:cs typeface="Calibri" pitchFamily="34" charset="-120"/>
-              </a:rPr>
-              <a:t>9 permissions</a:t>
-            </a:r>
-            <a:endParaRPr lang="en-US" sz="1100" dirty="0"/>
-          </a:p>
-        </p:txBody>
-      </p:sp>
-      <p:sp>
-        <p:nvSpPr>
-          <p:cNvPr id="55" name="Text 53"/>
-          <p:cNvSpPr txBox="1"/>
-          <p:nvPr/>
-        </p:nvSpPr>
-        <p:spPr>
-          <a:xfrm>
-            <a:off x="10753344" y="5120640"/>
-            <a:ext cx="566928" cy="594360"/>
-          </a:xfrm>
-          <a:prstGeom prst="rect">
-            <a:avLst/>
-          </a:prstGeom>
-          <a:noFill/>
-          <a:ln/>
-        </p:spPr>
-        <p:txBody>
-          <a:bodyPr wrap="square" lIns="0" tIns="0" rIns="0" bIns="0" rtlCol="0" anchor="ctr"/>
-          <a:lstStyle/>
-          <a:p>
-            <a:pPr algn="r" indent="0" marL="0">
-              <a:buNone/>
-            </a:pPr>
-            <a:r>
-              <a:rPr lang="en-US" sz="2000" b="1" dirty="0">
-                <a:solidFill>
-                  <a:srgbClr val="B8323A"/>
-                </a:solidFill>
-                <a:latin typeface="Cambria" pitchFamily="34" charset="0"/>
-                <a:ea typeface="Cambria" pitchFamily="34" charset="-122"/>
-                <a:cs typeface="Cambria" pitchFamily="34" charset="-120"/>
-              </a:rPr>
-              <a:t>1</a:t>
-            </a:r>
-            <a:endParaRPr lang="en-US" sz="2000" dirty="0"/>
-          </a:p>
-        </p:txBody>
-      </p:sp>
-      <p:sp>
-        <p:nvSpPr>
-          <p:cNvPr id="56" name="Text 54"/>
-          <p:cNvSpPr txBox="1"/>
-          <p:nvPr/>
-        </p:nvSpPr>
-        <p:spPr>
-          <a:xfrm>
-            <a:off x="566928" y="5989320"/>
-            <a:ext cx="10881360" cy="548640"/>
-          </a:xfrm>
-          <a:prstGeom prst="rect">
-            <a:avLst/>
-          </a:prstGeom>
-          <a:noFill/>
-          <a:ln/>
-        </p:spPr>
-        <p:txBody>
-          <a:bodyPr wrap="square" lIns="0" tIns="0" rIns="0" bIns="0" rtlCol="0" anchor="ctr"/>
-          <a:lstStyle/>
-          <a:p>
-            <a:pPr indent="0" marL="0">
-              <a:buNone/>
-            </a:pPr>
-            <a:r>
-              <a:rPr lang="en-US" sz="1300" dirty="0">
-                <a:solidFill>
-                  <a:srgbClr val="A9A09E"/>
-                </a:solidFill>
-                <a:latin typeface="Calibri" pitchFamily="34" charset="0"/>
-                <a:ea typeface="Calibri" pitchFamily="34" charset="-122"/>
-                <a:cs typeface="Calibri" pitchFamily="34" charset="-120"/>
-              </a:rPr>
-              <a:t>The large number on each card is how many designations hold that band. Super Admin holds everything, including any permission added in future, without anybody switching it on.</a:t>
-            </a:r>
-            <a:endParaRPr lang="en-US" sz="1300" dirty="0"/>
+              <a:t>The working-hours control.</a:t>
+            </a:r>
+            <a:endParaRPr lang="en-US" sz="1000" dirty="0"/>
           </a:p>
         </p:txBody>
       </p:sp>
@@ -15964,7 +14539,7 @@
                 <a:ea typeface="Cambria" pitchFamily="34" charset="-122"/>
                 <a:cs typeface="Cambria" pitchFamily="34" charset="-120"/>
               </a:rPr>
-              <a:t>One screen decides what everybody else may do</a:t>
+              <a:t>Twelve access bands, not sixty role lists</a:t>
             </a:r>
             <a:endParaRPr lang="en-US" sz="3400" dirty="0"/>
           </a:p>
@@ -15978,111 +14553,32 @@
         </p:nvSpPr>
         <p:spPr>
           <a:xfrm>
-            <a:off x="566928" y="1828800"/>
-            <a:ext cx="4937760" cy="3200400"/>
-          </a:xfrm>
-          <a:prstGeom prst="rect">
-            <a:avLst/>
-          </a:prstGeom>
-          <a:noFill/>
-          <a:ln/>
-        </p:spPr>
-        <p:txBody>
-          <a:bodyPr wrap="square" rtlCol="0" anchor="ctr"/>
-          <a:lstStyle/>
-          <a:p>
-            <a:pPr marL="342900" indent="-342900">
-              <a:lnSpc>
-                <a:spcPts val="2000"/>
-              </a:lnSpc>
-              <a:spcAft>
-                <a:spcPts val="1000"/>
-              </a:spcAft>
-              <a:buSzPct val="100000"/>
-              <a:buChar char="•"/>
+            <a:off x="566928" y="1554480"/>
+            <a:ext cx="6035040" cy="457200"/>
+          </a:xfrm>
+          <a:prstGeom prst="rect">
+            <a:avLst/>
+          </a:prstGeom>
+          <a:noFill/>
+          <a:ln/>
+        </p:spPr>
+        <p:txBody>
+          <a:bodyPr wrap="square" lIns="0" tIns="0" rIns="0" bIns="0" rtlCol="0" anchor="ctr"/>
+          <a:lstStyle/>
+          <a:p>
+            <a:pPr indent="0" marL="0">
+              <a:buNone/>
             </a:pPr>
             <a:r>
               <a:rPr lang="en-US" sz="1400" dirty="0">
                 <a:solidFill>
-                  <a:srgbClr val="F4F1F0"/>
-                </a:solidFill>
-                <a:latin typeface="Calibri" pitchFamily="34" charset="0"/>
-                <a:ea typeface="Calibri" pitchFamily="34" charset="-122"/>
-                <a:cs typeface="Calibri" pitchFamily="34" charset="-120"/>
-              </a:rPr>
-              <a:t>Choose a designation, tick the actions it should hold, save.</a:t>
-            </a:r>
-            <a:endParaRPr lang="en-US" sz="1400" dirty="0"/>
-          </a:p>
-          <a:p>
-            <a:pPr marL="342900" indent="-342900">
-              <a:lnSpc>
-                <a:spcPts val="2000"/>
-              </a:lnSpc>
-              <a:spcAft>
-                <a:spcPts val="1000"/>
-              </a:spcAft>
-              <a:buSzPct val="100000"/>
-              <a:buChar char="•"/>
-            </a:pPr>
-            <a:r>
-              <a:rPr lang="en-US" sz="1400" dirty="0">
-                <a:solidFill>
-                  <a:srgbClr val="F4F1F0"/>
-                </a:solidFill>
-                <a:latin typeface="Calibri" pitchFamily="34" charset="0"/>
-                <a:ea typeface="Calibri" pitchFamily="34" charset="-122"/>
-                <a:cs typeface="Calibri" pitchFamily="34" charset="-120"/>
-              </a:rPr>
-              <a:t>The change applies to everybody holding that designation, on their next request.</a:t>
-            </a:r>
-            <a:endParaRPr lang="en-US" sz="1400" dirty="0"/>
-          </a:p>
-          <a:p>
-            <a:pPr marL="342900" indent="-342900">
-              <a:lnSpc>
-                <a:spcPts val="2000"/>
-              </a:lnSpc>
-              <a:spcAft>
-                <a:spcPts val="1000"/>
-              </a:spcAft>
-              <a:buSzPct val="100000"/>
-              <a:buChar char="•"/>
-            </a:pPr>
-            <a:r>
-              <a:rPr lang="en-US" sz="1400" dirty="0">
-                <a:solidFill>
-                  <a:srgbClr val="F4F1F0"/>
-                </a:solidFill>
-                <a:latin typeface="Calibri" pitchFamily="34" charset="0"/>
-                <a:ea typeface="Calibri" pitchFamily="34" charset="-122"/>
-                <a:cs typeface="Calibri" pitchFamily="34" charset="-120"/>
-              </a:rPr>
-              <a:t>Super Admin holds every permission and cannot be edited down.</a:t>
-            </a:r>
-            <a:endParaRPr lang="en-US" sz="1400" dirty="0"/>
-          </a:p>
-          <a:p>
-            <a:pPr marL="342900" indent="-342900">
-              <a:lnSpc>
-                <a:spcPts val="2000"/>
-              </a:lnSpc>
-              <a:spcAft>
-                <a:spcPts val="1000"/>
-              </a:spcAft>
-              <a:buSzPct val="100000"/>
-              <a:buChar char="•"/>
-            </a:pPr>
-            <a:r>
-              <a:rPr lang="en-US" sz="1400" dirty="0">
-                <a:solidFill>
-                  <a:srgbClr val="F4F1F0"/>
-                </a:solidFill>
-                <a:latin typeface="Calibri" pitchFamily="34" charset="0"/>
-                <a:ea typeface="Calibri" pitchFamily="34" charset="-122"/>
-                <a:cs typeface="Calibri" pitchFamily="34" charset="-120"/>
-              </a:rPr>
-              <a:t>Every change is written to the Activity Log — the designation, the permission and the direction.</a:t>
+                  <a:srgbClr val="A9A09E"/>
+                </a:solidFill>
+                <a:latin typeface="Calibri" pitchFamily="34" charset="0"/>
+                <a:ea typeface="Calibri" pitchFamily="34" charset="-122"/>
+                <a:cs typeface="Calibri" pitchFamily="34" charset="-120"/>
+              </a:rPr>
+              <a:t>62 permissions across 60 designations, in only thirteen distinct groups of holders.</a:t>
             </a:r>
             <a:endParaRPr lang="en-US" sz="1400" dirty="0"/>
           </a:p>
@@ -16096,8 +14592,8 @@
         </p:nvSpPr>
         <p:spPr>
           <a:xfrm>
-            <a:off x="566928" y="5532120"/>
-            <a:ext cx="4937760" cy="777240"/>
+            <a:off x="566928" y="2286000"/>
+            <a:ext cx="3493008" cy="777240"/>
           </a:xfrm>
           <a:prstGeom prst="roundRect">
             <a:avLst>
@@ -16123,38 +14619,168 @@
         </p:nvSpPr>
         <p:spPr>
           <a:xfrm>
-            <a:off x="749808" y="5532120"/>
-            <a:ext cx="4572000" cy="777240"/>
-          </a:xfrm>
-          <a:prstGeom prst="rect">
-            <a:avLst/>
-          </a:prstGeom>
-          <a:noFill/>
-          <a:ln/>
-        </p:spPr>
-        <p:txBody>
-          <a:bodyPr wrap="square" lIns="0" tIns="0" rIns="0" bIns="0" rtlCol="0" anchor="ctr"/>
+            <a:off x="731520" y="2340864"/>
+            <a:ext cx="2560320" cy="384048"/>
+          </a:xfrm>
+          <a:prstGeom prst="rect">
+            <a:avLst/>
+          </a:prstGeom>
+          <a:noFill/>
+          <a:ln/>
+        </p:spPr>
+        <p:txBody>
+          <a:bodyPr wrap="square" lIns="0" tIns="0" rIns="0" bIns="0" rtlCol="0" anchor="t"/>
           <a:lstStyle/>
           <a:p>
             <a:pPr indent="0" marL="0">
               <a:buNone/>
             </a:pPr>
             <a:r>
-              <a:rPr lang="en-US" sz="1000" b="1" spc="200" kern="0" dirty="0">
+              <a:rPr lang="en-US" sz="1200" b="1" dirty="0">
+                <a:solidFill>
+                  <a:srgbClr val="F4F1F0"/>
+                </a:solidFill>
+                <a:latin typeface="Calibri" pitchFamily="34" charset="0"/>
+                <a:ea typeface="Calibri" pitchFamily="34" charset="-122"/>
+                <a:cs typeface="Calibri" pitchFamily="34" charset="-120"/>
+              </a:rPr>
+              <a:t>Everyone</a:t>
+            </a:r>
+            <a:endParaRPr lang="en-US" sz="1200" dirty="0"/>
+          </a:p>
+        </p:txBody>
+      </p:sp>
+      <p:sp>
+        <p:nvSpPr>
+          <p:cNvPr id="10" name="Text 8"/>
+          <p:cNvSpPr txBox="1"/>
+          <p:nvPr/>
+        </p:nvSpPr>
+        <p:spPr>
+          <a:xfrm>
+            <a:off x="731520" y="2697480"/>
+            <a:ext cx="2743200" cy="292608"/>
+          </a:xfrm>
+          <a:prstGeom prst="rect">
+            <a:avLst/>
+          </a:prstGeom>
+          <a:noFill/>
+          <a:ln/>
+        </p:spPr>
+        <p:txBody>
+          <a:bodyPr wrap="square" lIns="0" tIns="0" rIns="0" bIns="0" rtlCol="0" anchor="ctr"/>
+          <a:lstStyle/>
+          <a:p>
+            <a:pPr indent="0" marL="0">
+              <a:buNone/>
+            </a:pPr>
+            <a:r>
+              <a:rPr lang="en-US" sz="1100" dirty="0">
+                <a:solidFill>
+                  <a:srgbClr val="A9A09E"/>
+                </a:solidFill>
+                <a:latin typeface="Calibri" pitchFamily="34" charset="0"/>
+                <a:ea typeface="Calibri" pitchFamily="34" charset="-122"/>
+                <a:cs typeface="Calibri" pitchFamily="34" charset="-120"/>
+              </a:rPr>
+              <a:t>4 permissions</a:t>
+            </a:r>
+            <a:endParaRPr lang="en-US" sz="1100" dirty="0"/>
+          </a:p>
+        </p:txBody>
+      </p:sp>
+      <p:sp>
+        <p:nvSpPr>
+          <p:cNvPr id="11" name="Text 9"/>
+          <p:cNvSpPr txBox="1"/>
+          <p:nvPr/>
+        </p:nvSpPr>
+        <p:spPr>
+          <a:xfrm>
+            <a:off x="3328416" y="2377440"/>
+            <a:ext cx="566928" cy="594360"/>
+          </a:xfrm>
+          <a:prstGeom prst="rect">
+            <a:avLst/>
+          </a:prstGeom>
+          <a:noFill/>
+          <a:ln/>
+        </p:spPr>
+        <p:txBody>
+          <a:bodyPr wrap="square" lIns="0" tIns="0" rIns="0" bIns="0" rtlCol="0" anchor="ctr"/>
+          <a:lstStyle/>
+          <a:p>
+            <a:pPr algn="r" indent="0" marL="0">
+              <a:buNone/>
+            </a:pPr>
+            <a:r>
+              <a:rPr lang="en-US" sz="2000" b="1" dirty="0">
                 <a:solidFill>
                   <a:srgbClr val="B8323A"/>
                 </a:solidFill>
-                <a:latin typeface="Calibri" pitchFamily="34" charset="0"/>
-                <a:ea typeface="Calibri" pitchFamily="34" charset="-122"/>
-                <a:cs typeface="Calibri" pitchFamily="34" charset="-120"/>
-              </a:rPr>
-              <a:t>WHO  </a:t>
-            </a:r>
+                <a:latin typeface="Cambria" pitchFamily="34" charset="0"/>
+                <a:ea typeface="Cambria" pitchFamily="34" charset="-122"/>
+                <a:cs typeface="Cambria" pitchFamily="34" charset="-120"/>
+              </a:rPr>
+              <a:t>60</a:t>
+            </a:r>
+            <a:endParaRPr lang="en-US" sz="2000" dirty="0"/>
+          </a:p>
+        </p:txBody>
+      </p:sp>
+      <p:sp>
+        <p:nvSpPr>
+          <p:cNvPr id="12" name="Shape 10"/>
+          <p:cNvSpPr/>
+          <p:nvPr/>
+        </p:nvSpPr>
+        <p:spPr>
+          <a:xfrm>
+            <a:off x="4279392" y="2286000"/>
+            <a:ext cx="3493008" cy="777240"/>
+          </a:xfrm>
+          <a:prstGeom prst="roundRect">
+            <a:avLst>
+              <a:gd name="adj" fmla="val 7059"/>
+            </a:avLst>
+          </a:prstGeom>
+          <a:solidFill>
+            <a:srgbClr val="1E1A19"/>
+          </a:solidFill>
+          <a:ln w="12700">
+            <a:solidFill>
+              <a:srgbClr val="2C2524"/>
+            </a:solidFill>
+            <a:prstDash val="solid"/>
+          </a:ln>
+        </p:spPr>
+      </p:sp>
+      <p:sp>
+        <p:nvSpPr>
+          <p:cNvPr id="13" name="Text 11"/>
+          <p:cNvSpPr txBox="1"/>
+          <p:nvPr/>
+        </p:nvSpPr>
+        <p:spPr>
+          <a:xfrm>
+            <a:off x="4443984" y="2340864"/>
+            <a:ext cx="2560320" cy="384048"/>
+          </a:xfrm>
+          <a:prstGeom prst="rect">
+            <a:avLst/>
+          </a:prstGeom>
+          <a:noFill/>
+          <a:ln/>
+        </p:spPr>
+        <p:txBody>
+          <a:bodyPr wrap="square" lIns="0" tIns="0" rIns="0" bIns="0" rtlCol="0" anchor="t"/>
+          <a:lstStyle/>
+          <a:p>
             <a:pPr indent="0" marL="0">
               <a:buNone/>
             </a:pPr>
             <a:r>
-              <a:rPr lang="en-US" sz="1200" dirty="0">
+              <a:rPr lang="en-US" sz="1200" b="1" dirty="0">
                 <a:solidFill>
                   <a:srgbClr val="F4F1F0"/>
                 </a:solidFill>
@@ -16162,69 +14788,38 @@
                 <a:ea typeface="Calibri" pitchFamily="34" charset="-122"/>
                 <a:cs typeface="Calibri" pitchFamily="34" charset="-120"/>
               </a:rPr>
-              <a:t>Super Admin, and nobody else.</a:t>
-            </a:r>
-            <a:endParaRPr lang="en-US" sz="1000" dirty="0"/>
-          </a:p>
-        </p:txBody>
-      </p:sp>
-      <p:pic>
-        <p:nvPicPr>
-          <p:cNvPr id="10" name="Image 0" descr="preencoded.png">    </p:cNvPr>
-          <p:cNvPicPr>
-            <a:picLocks noChangeAspect="1"/>
-          </p:cNvPicPr>
-          <p:nvPr/>
-        </p:nvPicPr>
-        <p:blipFill>
-          <a:blip r:embed="rId1"/>
-          <a:stretch>
-            <a:fillRect/>
-          </a:stretch>
-        </p:blipFill>
-        <p:spPr>
-          <a:xfrm>
-            <a:off x="5989320" y="1570441"/>
-            <a:ext cx="5632704" cy="4082877"/>
-          </a:xfrm>
-          <a:prstGeom prst="rect">
-            <a:avLst/>
-          </a:prstGeom>
-          <a:effectLst>
-            <a:outerShdw sx="100000" sy="100000" kx="0" ky="0" algn="bl" rotWithShape="0" blurRad="177800" dist="50800" dir="5400000">
-              <a:srgbClr val="000000">
-                <a:alpha val="55000"/>
-              </a:srgbClr>
-            </a:outerShdw>
-          </a:effectLst>
-        </p:spPr>
-      </p:pic>
-      <p:sp>
-        <p:nvSpPr>
-          <p:cNvPr id="11" name="Text 8"/>
-          <p:cNvSpPr txBox="1"/>
-          <p:nvPr/>
-        </p:nvSpPr>
-        <p:spPr>
-          <a:xfrm>
-            <a:off x="5989320" y="5763047"/>
-            <a:ext cx="5632704" cy="457200"/>
-          </a:xfrm>
-          <a:prstGeom prst="rect">
-            <a:avLst/>
-          </a:prstGeom>
-          <a:noFill/>
-          <a:ln/>
-        </p:spPr>
-        <p:txBody>
-          <a:bodyPr wrap="square" lIns="0" tIns="0" rIns="0" bIns="0" rtlCol="0" anchor="ctr"/>
-          <a:lstStyle/>
-          <a:p>
-            <a:pPr algn="ctr" indent="0" marL="0">
-              <a:buNone/>
-            </a:pPr>
-            <a:r>
-              <a:rPr lang="en-US" sz="1000" i="1" dirty="0">
+              <a:t>Everyone who works on assets</a:t>
+            </a:r>
+            <a:endParaRPr lang="en-US" sz="1200" dirty="0"/>
+          </a:p>
+        </p:txBody>
+      </p:sp>
+      <p:sp>
+        <p:nvSpPr>
+          <p:cNvPr id="14" name="Text 12"/>
+          <p:cNvSpPr txBox="1"/>
+          <p:nvPr/>
+        </p:nvSpPr>
+        <p:spPr>
+          <a:xfrm>
+            <a:off x="4443984" y="2697480"/>
+            <a:ext cx="2743200" cy="292608"/>
+          </a:xfrm>
+          <a:prstGeom prst="rect">
+            <a:avLst/>
+          </a:prstGeom>
+          <a:noFill/>
+          <a:ln/>
+        </p:spPr>
+        <p:txBody>
+          <a:bodyPr wrap="square" lIns="0" tIns="0" rIns="0" bIns="0" rtlCol="0" anchor="ctr"/>
+          <a:lstStyle/>
+          <a:p>
+            <a:pPr indent="0" marL="0">
+              <a:buNone/>
+            </a:pPr>
+            <a:r>
+              <a:rPr lang="en-US" sz="1100" dirty="0">
                 <a:solidFill>
                   <a:srgbClr val="A9A09E"/>
                 </a:solidFill>
@@ -16232,9 +14827,1671 @@
                 <a:ea typeface="Calibri" pitchFamily="34" charset="-122"/>
                 <a:cs typeface="Calibri" pitchFamily="34" charset="-120"/>
               </a:rPr>
-              <a:t>The permission grid for one designation (first screenful).</a:t>
-            </a:r>
-            <a:endParaRPr lang="en-US" sz="1000" dirty="0"/>
+              <a:t>2 permissions</a:t>
+            </a:r>
+            <a:endParaRPr lang="en-US" sz="1100" dirty="0"/>
+          </a:p>
+        </p:txBody>
+      </p:sp>
+      <p:sp>
+        <p:nvSpPr>
+          <p:cNvPr id="15" name="Text 13"/>
+          <p:cNvSpPr txBox="1"/>
+          <p:nvPr/>
+        </p:nvSpPr>
+        <p:spPr>
+          <a:xfrm>
+            <a:off x="7040880" y="2377440"/>
+            <a:ext cx="566928" cy="594360"/>
+          </a:xfrm>
+          <a:prstGeom prst="rect">
+            <a:avLst/>
+          </a:prstGeom>
+          <a:noFill/>
+          <a:ln/>
+        </p:spPr>
+        <p:txBody>
+          <a:bodyPr wrap="square" lIns="0" tIns="0" rIns="0" bIns="0" rtlCol="0" anchor="ctr"/>
+          <a:lstStyle/>
+          <a:p>
+            <a:pPr algn="r" indent="0" marL="0">
+              <a:buNone/>
+            </a:pPr>
+            <a:r>
+              <a:rPr lang="en-US" sz="2000" b="1" dirty="0">
+                <a:solidFill>
+                  <a:srgbClr val="B8323A"/>
+                </a:solidFill>
+                <a:latin typeface="Cambria" pitchFamily="34" charset="0"/>
+                <a:ea typeface="Cambria" pitchFamily="34" charset="-122"/>
+                <a:cs typeface="Cambria" pitchFamily="34" charset="-120"/>
+              </a:rPr>
+              <a:t>51</a:t>
+            </a:r>
+            <a:endParaRPr lang="en-US" sz="2000" dirty="0"/>
+          </a:p>
+        </p:txBody>
+      </p:sp>
+      <p:sp>
+        <p:nvSpPr>
+          <p:cNvPr id="16" name="Shape 14"/>
+          <p:cNvSpPr/>
+          <p:nvPr/>
+        </p:nvSpPr>
+        <p:spPr>
+          <a:xfrm>
+            <a:off x="7991856" y="2286000"/>
+            <a:ext cx="3493008" cy="777240"/>
+          </a:xfrm>
+          <a:prstGeom prst="roundRect">
+            <a:avLst>
+              <a:gd name="adj" fmla="val 7059"/>
+            </a:avLst>
+          </a:prstGeom>
+          <a:solidFill>
+            <a:srgbClr val="1E1A19"/>
+          </a:solidFill>
+          <a:ln w="12700">
+            <a:solidFill>
+              <a:srgbClr val="2C2524"/>
+            </a:solidFill>
+            <a:prstDash val="solid"/>
+          </a:ln>
+        </p:spPr>
+      </p:sp>
+      <p:sp>
+        <p:nvSpPr>
+          <p:cNvPr id="17" name="Text 15"/>
+          <p:cNvSpPr txBox="1"/>
+          <p:nvPr/>
+        </p:nvSpPr>
+        <p:spPr>
+          <a:xfrm>
+            <a:off x="8156448" y="2340864"/>
+            <a:ext cx="2560320" cy="384048"/>
+          </a:xfrm>
+          <a:prstGeom prst="rect">
+            <a:avLst/>
+          </a:prstGeom>
+          <a:noFill/>
+          <a:ln/>
+        </p:spPr>
+        <p:txBody>
+          <a:bodyPr wrap="square" lIns="0" tIns="0" rIns="0" bIns="0" rtlCol="0" anchor="t"/>
+          <a:lstStyle/>
+          <a:p>
+            <a:pPr indent="0" marL="0">
+              <a:buNone/>
+            </a:pPr>
+            <a:r>
+              <a:rPr lang="en-US" sz="1200" b="1" dirty="0">
+                <a:solidFill>
+                  <a:srgbClr val="F4F1F0"/>
+                </a:solidFill>
+                <a:latin typeface="Calibri" pitchFamily="34" charset="0"/>
+                <a:ea typeface="Calibri" pitchFamily="34" charset="-122"/>
+                <a:cs typeface="Calibri" pitchFamily="34" charset="-120"/>
+              </a:rPr>
+              <a:t>Production planning</a:t>
+            </a:r>
+            <a:endParaRPr lang="en-US" sz="1200" dirty="0"/>
+          </a:p>
+        </p:txBody>
+      </p:sp>
+      <p:sp>
+        <p:nvSpPr>
+          <p:cNvPr id="18" name="Text 16"/>
+          <p:cNvSpPr txBox="1"/>
+          <p:nvPr/>
+        </p:nvSpPr>
+        <p:spPr>
+          <a:xfrm>
+            <a:off x="8156448" y="2697480"/>
+            <a:ext cx="2743200" cy="292608"/>
+          </a:xfrm>
+          <a:prstGeom prst="rect">
+            <a:avLst/>
+          </a:prstGeom>
+          <a:noFill/>
+          <a:ln/>
+        </p:spPr>
+        <p:txBody>
+          <a:bodyPr wrap="square" lIns="0" tIns="0" rIns="0" bIns="0" rtlCol="0" anchor="ctr"/>
+          <a:lstStyle/>
+          <a:p>
+            <a:pPr indent="0" marL="0">
+              <a:buNone/>
+            </a:pPr>
+            <a:r>
+              <a:rPr lang="en-US" sz="1100" dirty="0">
+                <a:solidFill>
+                  <a:srgbClr val="A9A09E"/>
+                </a:solidFill>
+                <a:latin typeface="Calibri" pitchFamily="34" charset="0"/>
+                <a:ea typeface="Calibri" pitchFamily="34" charset="-122"/>
+                <a:cs typeface="Calibri" pitchFamily="34" charset="-120"/>
+              </a:rPr>
+              <a:t>2 permissions</a:t>
+            </a:r>
+            <a:endParaRPr lang="en-US" sz="1100" dirty="0"/>
+          </a:p>
+        </p:txBody>
+      </p:sp>
+      <p:sp>
+        <p:nvSpPr>
+          <p:cNvPr id="19" name="Text 17"/>
+          <p:cNvSpPr txBox="1"/>
+          <p:nvPr/>
+        </p:nvSpPr>
+        <p:spPr>
+          <a:xfrm>
+            <a:off x="10753344" y="2377440"/>
+            <a:ext cx="566928" cy="594360"/>
+          </a:xfrm>
+          <a:prstGeom prst="rect">
+            <a:avLst/>
+          </a:prstGeom>
+          <a:noFill/>
+          <a:ln/>
+        </p:spPr>
+        <p:txBody>
+          <a:bodyPr wrap="square" lIns="0" tIns="0" rIns="0" bIns="0" rtlCol="0" anchor="ctr"/>
+          <a:lstStyle/>
+          <a:p>
+            <a:pPr algn="r" indent="0" marL="0">
+              <a:buNone/>
+            </a:pPr>
+            <a:r>
+              <a:rPr lang="en-US" sz="2000" b="1" dirty="0">
+                <a:solidFill>
+                  <a:srgbClr val="B8323A"/>
+                </a:solidFill>
+                <a:latin typeface="Cambria" pitchFamily="34" charset="0"/>
+                <a:ea typeface="Cambria" pitchFamily="34" charset="-122"/>
+                <a:cs typeface="Cambria" pitchFamily="34" charset="-120"/>
+              </a:rPr>
+              <a:t>23</a:t>
+            </a:r>
+            <a:endParaRPr lang="en-US" sz="2000" dirty="0"/>
+          </a:p>
+        </p:txBody>
+      </p:sp>
+      <p:sp>
+        <p:nvSpPr>
+          <p:cNvPr id="20" name="Shape 18"/>
+          <p:cNvSpPr/>
+          <p:nvPr/>
+        </p:nvSpPr>
+        <p:spPr>
+          <a:xfrm>
+            <a:off x="566928" y="3200400"/>
+            <a:ext cx="3493008" cy="777240"/>
+          </a:xfrm>
+          <a:prstGeom prst="roundRect">
+            <a:avLst>
+              <a:gd name="adj" fmla="val 7059"/>
+            </a:avLst>
+          </a:prstGeom>
+          <a:solidFill>
+            <a:srgbClr val="1E1A19"/>
+          </a:solidFill>
+          <a:ln w="12700">
+            <a:solidFill>
+              <a:srgbClr val="2C2524"/>
+            </a:solidFill>
+            <a:prstDash val="solid"/>
+          </a:ln>
+        </p:spPr>
+      </p:sp>
+      <p:sp>
+        <p:nvSpPr>
+          <p:cNvPr id="21" name="Text 19"/>
+          <p:cNvSpPr txBox="1"/>
+          <p:nvPr/>
+        </p:nvSpPr>
+        <p:spPr>
+          <a:xfrm>
+            <a:off x="731520" y="3255264"/>
+            <a:ext cx="2560320" cy="384048"/>
+          </a:xfrm>
+          <a:prstGeom prst="rect">
+            <a:avLst/>
+          </a:prstGeom>
+          <a:noFill/>
+          <a:ln/>
+        </p:spPr>
+        <p:txBody>
+          <a:bodyPr wrap="square" lIns="0" tIns="0" rIns="0" bIns="0" rtlCol="0" anchor="t"/>
+          <a:lstStyle/>
+          <a:p>
+            <a:pPr indent="0" marL="0">
+              <a:buNone/>
+            </a:pPr>
+            <a:r>
+              <a:rPr lang="en-US" sz="1200" b="1" dirty="0">
+                <a:solidFill>
+                  <a:srgbClr val="F4F1F0"/>
+                </a:solidFill>
+                <a:latin typeface="Calibri" pitchFamily="34" charset="0"/>
+                <a:ea typeface="Calibri" pitchFamily="34" charset="-122"/>
+                <a:cs typeface="Calibri" pitchFamily="34" charset="-120"/>
+              </a:rPr>
+              <a:t>First review gate</a:t>
+            </a:r>
+            <a:endParaRPr lang="en-US" sz="1200" dirty="0"/>
+          </a:p>
+        </p:txBody>
+      </p:sp>
+      <p:sp>
+        <p:nvSpPr>
+          <p:cNvPr id="22" name="Text 20"/>
+          <p:cNvSpPr txBox="1"/>
+          <p:nvPr/>
+        </p:nvSpPr>
+        <p:spPr>
+          <a:xfrm>
+            <a:off x="731520" y="3611880"/>
+            <a:ext cx="2743200" cy="292608"/>
+          </a:xfrm>
+          <a:prstGeom prst="rect">
+            <a:avLst/>
+          </a:prstGeom>
+          <a:noFill/>
+          <a:ln/>
+        </p:spPr>
+        <p:txBody>
+          <a:bodyPr wrap="square" lIns="0" tIns="0" rIns="0" bIns="0" rtlCol="0" anchor="ctr"/>
+          <a:lstStyle/>
+          <a:p>
+            <a:pPr indent="0" marL="0">
+              <a:buNone/>
+            </a:pPr>
+            <a:r>
+              <a:rPr lang="en-US" sz="1100" dirty="0">
+                <a:solidFill>
+                  <a:srgbClr val="A9A09E"/>
+                </a:solidFill>
+                <a:latin typeface="Calibri" pitchFamily="34" charset="0"/>
+                <a:ea typeface="Calibri" pitchFamily="34" charset="-122"/>
+                <a:cs typeface="Calibri" pitchFamily="34" charset="-120"/>
+              </a:rPr>
+              <a:t>1 permission</a:t>
+            </a:r>
+            <a:endParaRPr lang="en-US" sz="1100" dirty="0"/>
+          </a:p>
+        </p:txBody>
+      </p:sp>
+      <p:sp>
+        <p:nvSpPr>
+          <p:cNvPr id="23" name="Text 21"/>
+          <p:cNvSpPr txBox="1"/>
+          <p:nvPr/>
+        </p:nvSpPr>
+        <p:spPr>
+          <a:xfrm>
+            <a:off x="3328416" y="3291840"/>
+            <a:ext cx="566928" cy="594360"/>
+          </a:xfrm>
+          <a:prstGeom prst="rect">
+            <a:avLst/>
+          </a:prstGeom>
+          <a:noFill/>
+          <a:ln/>
+        </p:spPr>
+        <p:txBody>
+          <a:bodyPr wrap="square" lIns="0" tIns="0" rIns="0" bIns="0" rtlCol="0" anchor="ctr"/>
+          <a:lstStyle/>
+          <a:p>
+            <a:pPr algn="r" indent="0" marL="0">
+              <a:buNone/>
+            </a:pPr>
+            <a:r>
+              <a:rPr lang="en-US" sz="2000" b="1" dirty="0">
+                <a:solidFill>
+                  <a:srgbClr val="B8323A"/>
+                </a:solidFill>
+                <a:latin typeface="Cambria" pitchFamily="34" charset="0"/>
+                <a:ea typeface="Cambria" pitchFamily="34" charset="-122"/>
+                <a:cs typeface="Cambria" pitchFamily="34" charset="-120"/>
+              </a:rPr>
+              <a:t>23</a:t>
+            </a:r>
+            <a:endParaRPr lang="en-US" sz="2000" dirty="0"/>
+          </a:p>
+        </p:txBody>
+      </p:sp>
+      <p:sp>
+        <p:nvSpPr>
+          <p:cNvPr id="24" name="Shape 22"/>
+          <p:cNvSpPr/>
+          <p:nvPr/>
+        </p:nvSpPr>
+        <p:spPr>
+          <a:xfrm>
+            <a:off x="4279392" y="3200400"/>
+            <a:ext cx="3493008" cy="777240"/>
+          </a:xfrm>
+          <a:prstGeom prst="roundRect">
+            <a:avLst>
+              <a:gd name="adj" fmla="val 7059"/>
+            </a:avLst>
+          </a:prstGeom>
+          <a:solidFill>
+            <a:srgbClr val="1E1A19"/>
+          </a:solidFill>
+          <a:ln w="12700">
+            <a:solidFill>
+              <a:srgbClr val="2C2524"/>
+            </a:solidFill>
+            <a:prstDash val="solid"/>
+          </a:ln>
+        </p:spPr>
+      </p:sp>
+      <p:sp>
+        <p:nvSpPr>
+          <p:cNvPr id="25" name="Text 23"/>
+          <p:cNvSpPr txBox="1"/>
+          <p:nvPr/>
+        </p:nvSpPr>
+        <p:spPr>
+          <a:xfrm>
+            <a:off x="4443984" y="3255264"/>
+            <a:ext cx="2560320" cy="384048"/>
+          </a:xfrm>
+          <a:prstGeom prst="rect">
+            <a:avLst/>
+          </a:prstGeom>
+          <a:noFill/>
+          <a:ln/>
+        </p:spPr>
+        <p:txBody>
+          <a:bodyPr wrap="square" lIns="0" tIns="0" rIns="0" bIns="0" rtlCol="0" anchor="t"/>
+          <a:lstStyle/>
+          <a:p>
+            <a:pPr indent="0" marL="0">
+              <a:buNone/>
+            </a:pPr>
+            <a:r>
+              <a:rPr lang="en-US" sz="1200" b="1" dirty="0">
+                <a:solidFill>
+                  <a:srgbClr val="F4F1F0"/>
+                </a:solidFill>
+                <a:latin typeface="Calibri" pitchFamily="34" charset="0"/>
+                <a:ea typeface="Calibri" pitchFamily="34" charset="-122"/>
+                <a:cs typeface="Calibri" pitchFamily="34" charset="-120"/>
+              </a:rPr>
+              <a:t>Leads and producers</a:t>
+            </a:r>
+            <a:endParaRPr lang="en-US" sz="1200" dirty="0"/>
+          </a:p>
+        </p:txBody>
+      </p:sp>
+      <p:sp>
+        <p:nvSpPr>
+          <p:cNvPr id="26" name="Text 24"/>
+          <p:cNvSpPr txBox="1"/>
+          <p:nvPr/>
+        </p:nvSpPr>
+        <p:spPr>
+          <a:xfrm>
+            <a:off x="4443984" y="3611880"/>
+            <a:ext cx="2743200" cy="292608"/>
+          </a:xfrm>
+          <a:prstGeom prst="rect">
+            <a:avLst/>
+          </a:prstGeom>
+          <a:noFill/>
+          <a:ln/>
+        </p:spPr>
+        <p:txBody>
+          <a:bodyPr wrap="square" lIns="0" tIns="0" rIns="0" bIns="0" rtlCol="0" anchor="ctr"/>
+          <a:lstStyle/>
+          <a:p>
+            <a:pPr indent="0" marL="0">
+              <a:buNone/>
+            </a:pPr>
+            <a:r>
+              <a:rPr lang="en-US" sz="1100" dirty="0">
+                <a:solidFill>
+                  <a:srgbClr val="A9A09E"/>
+                </a:solidFill>
+                <a:latin typeface="Calibri" pitchFamily="34" charset="0"/>
+                <a:ea typeface="Calibri" pitchFamily="34" charset="-122"/>
+                <a:cs typeface="Calibri" pitchFamily="34" charset="-120"/>
+              </a:rPr>
+              <a:t>2 permissions</a:t>
+            </a:r>
+            <a:endParaRPr lang="en-US" sz="1100" dirty="0"/>
+          </a:p>
+        </p:txBody>
+      </p:sp>
+      <p:sp>
+        <p:nvSpPr>
+          <p:cNvPr id="27" name="Text 25"/>
+          <p:cNvSpPr txBox="1"/>
+          <p:nvPr/>
+        </p:nvSpPr>
+        <p:spPr>
+          <a:xfrm>
+            <a:off x="7040880" y="3291840"/>
+            <a:ext cx="566928" cy="594360"/>
+          </a:xfrm>
+          <a:prstGeom prst="rect">
+            <a:avLst/>
+          </a:prstGeom>
+          <a:noFill/>
+          <a:ln/>
+        </p:spPr>
+        <p:txBody>
+          <a:bodyPr wrap="square" lIns="0" tIns="0" rIns="0" bIns="0" rtlCol="0" anchor="ctr"/>
+          <a:lstStyle/>
+          <a:p>
+            <a:pPr algn="r" indent="0" marL="0">
+              <a:buNone/>
+            </a:pPr>
+            <a:r>
+              <a:rPr lang="en-US" sz="2000" b="1" dirty="0">
+                <a:solidFill>
+                  <a:srgbClr val="B8323A"/>
+                </a:solidFill>
+                <a:latin typeface="Cambria" pitchFamily="34" charset="0"/>
+                <a:ea typeface="Cambria" pitchFamily="34" charset="-122"/>
+                <a:cs typeface="Cambria" pitchFamily="34" charset="-120"/>
+              </a:rPr>
+              <a:t>18</a:t>
+            </a:r>
+            <a:endParaRPr lang="en-US" sz="2000" dirty="0"/>
+          </a:p>
+        </p:txBody>
+      </p:sp>
+      <p:sp>
+        <p:nvSpPr>
+          <p:cNvPr id="28" name="Shape 26"/>
+          <p:cNvSpPr/>
+          <p:nvPr/>
+        </p:nvSpPr>
+        <p:spPr>
+          <a:xfrm>
+            <a:off x="7991856" y="3200400"/>
+            <a:ext cx="3493008" cy="777240"/>
+          </a:xfrm>
+          <a:prstGeom prst="roundRect">
+            <a:avLst>
+              <a:gd name="adj" fmla="val 7059"/>
+            </a:avLst>
+          </a:prstGeom>
+          <a:solidFill>
+            <a:srgbClr val="1E1A19"/>
+          </a:solidFill>
+          <a:ln w="12700">
+            <a:solidFill>
+              <a:srgbClr val="2C2524"/>
+            </a:solidFill>
+            <a:prstDash val="solid"/>
+          </a:ln>
+        </p:spPr>
+      </p:sp>
+      <p:sp>
+        <p:nvSpPr>
+          <p:cNvPr id="29" name="Text 27"/>
+          <p:cNvSpPr txBox="1"/>
+          <p:nvPr/>
+        </p:nvSpPr>
+        <p:spPr>
+          <a:xfrm>
+            <a:off x="8156448" y="3255264"/>
+            <a:ext cx="2560320" cy="384048"/>
+          </a:xfrm>
+          <a:prstGeom prst="rect">
+            <a:avLst/>
+          </a:prstGeom>
+          <a:noFill/>
+          <a:ln/>
+        </p:spPr>
+        <p:txBody>
+          <a:bodyPr wrap="square" lIns="0" tIns="0" rIns="0" bIns="0" rtlCol="0" anchor="t"/>
+          <a:lstStyle/>
+          <a:p>
+            <a:pPr indent="0" marL="0">
+              <a:buNone/>
+            </a:pPr>
+            <a:r>
+              <a:rPr lang="en-US" sz="1200" b="1" dirty="0">
+                <a:solidFill>
+                  <a:srgbClr val="F4F1F0"/>
+                </a:solidFill>
+                <a:latin typeface="Calibri" pitchFamily="34" charset="0"/>
+                <a:ea typeface="Calibri" pitchFamily="34" charset="-122"/>
+                <a:cs typeface="Calibri" pitchFamily="34" charset="-120"/>
+              </a:rPr>
+              <a:t>Anyone who supervises people</a:t>
+            </a:r>
+            <a:endParaRPr lang="en-US" sz="1200" dirty="0"/>
+          </a:p>
+        </p:txBody>
+      </p:sp>
+      <p:sp>
+        <p:nvSpPr>
+          <p:cNvPr id="30" name="Text 28"/>
+          <p:cNvSpPr txBox="1"/>
+          <p:nvPr/>
+        </p:nvSpPr>
+        <p:spPr>
+          <a:xfrm>
+            <a:off x="8156448" y="3611880"/>
+            <a:ext cx="2743200" cy="292608"/>
+          </a:xfrm>
+          <a:prstGeom prst="rect">
+            <a:avLst/>
+          </a:prstGeom>
+          <a:noFill/>
+          <a:ln/>
+        </p:spPr>
+        <p:txBody>
+          <a:bodyPr wrap="square" lIns="0" tIns="0" rIns="0" bIns="0" rtlCol="0" anchor="ctr"/>
+          <a:lstStyle/>
+          <a:p>
+            <a:pPr indent="0" marL="0">
+              <a:buNone/>
+            </a:pPr>
+            <a:r>
+              <a:rPr lang="en-US" sz="1100" dirty="0">
+                <a:solidFill>
+                  <a:srgbClr val="A9A09E"/>
+                </a:solidFill>
+                <a:latin typeface="Calibri" pitchFamily="34" charset="0"/>
+                <a:ea typeface="Calibri" pitchFamily="34" charset="-122"/>
+                <a:cs typeface="Calibri" pitchFamily="34" charset="-120"/>
+              </a:rPr>
+              <a:t>1 permission</a:t>
+            </a:r>
+            <a:endParaRPr lang="en-US" sz="1100" dirty="0"/>
+          </a:p>
+        </p:txBody>
+      </p:sp>
+      <p:sp>
+        <p:nvSpPr>
+          <p:cNvPr id="31" name="Text 29"/>
+          <p:cNvSpPr txBox="1"/>
+          <p:nvPr/>
+        </p:nvSpPr>
+        <p:spPr>
+          <a:xfrm>
+            <a:off x="10753344" y="3291840"/>
+            <a:ext cx="566928" cy="594360"/>
+          </a:xfrm>
+          <a:prstGeom prst="rect">
+            <a:avLst/>
+          </a:prstGeom>
+          <a:noFill/>
+          <a:ln/>
+        </p:spPr>
+        <p:txBody>
+          <a:bodyPr wrap="square" lIns="0" tIns="0" rIns="0" bIns="0" rtlCol="0" anchor="ctr"/>
+          <a:lstStyle/>
+          <a:p>
+            <a:pPr algn="r" indent="0" marL="0">
+              <a:buNone/>
+            </a:pPr>
+            <a:r>
+              <a:rPr lang="en-US" sz="2000" b="1" dirty="0">
+                <a:solidFill>
+                  <a:srgbClr val="B8323A"/>
+                </a:solidFill>
+                <a:latin typeface="Cambria" pitchFamily="34" charset="0"/>
+                <a:ea typeface="Cambria" pitchFamily="34" charset="-122"/>
+                <a:cs typeface="Cambria" pitchFamily="34" charset="-120"/>
+              </a:rPr>
+              <a:t>14</a:t>
+            </a:r>
+            <a:endParaRPr lang="en-US" sz="2000" dirty="0"/>
+          </a:p>
+        </p:txBody>
+      </p:sp>
+      <p:sp>
+        <p:nvSpPr>
+          <p:cNvPr id="32" name="Shape 30"/>
+          <p:cNvSpPr/>
+          <p:nvPr/>
+        </p:nvSpPr>
+        <p:spPr>
+          <a:xfrm>
+            <a:off x="566928" y="4114800"/>
+            <a:ext cx="3493008" cy="777240"/>
+          </a:xfrm>
+          <a:prstGeom prst="roundRect">
+            <a:avLst>
+              <a:gd name="adj" fmla="val 7059"/>
+            </a:avLst>
+          </a:prstGeom>
+          <a:solidFill>
+            <a:srgbClr val="1E1A19"/>
+          </a:solidFill>
+          <a:ln w="12700">
+            <a:solidFill>
+              <a:srgbClr val="2C2524"/>
+            </a:solidFill>
+            <a:prstDash val="solid"/>
+          </a:ln>
+        </p:spPr>
+      </p:sp>
+      <p:sp>
+        <p:nvSpPr>
+          <p:cNvPr id="33" name="Text 31"/>
+          <p:cNvSpPr txBox="1"/>
+          <p:nvPr/>
+        </p:nvSpPr>
+        <p:spPr>
+          <a:xfrm>
+            <a:off x="731520" y="4169664"/>
+            <a:ext cx="2560320" cy="384048"/>
+          </a:xfrm>
+          <a:prstGeom prst="rect">
+            <a:avLst/>
+          </a:prstGeom>
+          <a:noFill/>
+          <a:ln/>
+        </p:spPr>
+        <p:txBody>
+          <a:bodyPr wrap="square" lIns="0" tIns="0" rIns="0" bIns="0" rtlCol="0" anchor="t"/>
+          <a:lstStyle/>
+          <a:p>
+            <a:pPr indent="0" marL="0">
+              <a:buNone/>
+            </a:pPr>
+            <a:r>
+              <a:rPr lang="en-US" sz="1200" b="1" dirty="0">
+                <a:solidFill>
+                  <a:srgbClr val="F4F1F0"/>
+                </a:solidFill>
+                <a:latin typeface="Calibri" pitchFamily="34" charset="0"/>
+                <a:ea typeface="Calibri" pitchFamily="34" charset="-122"/>
+                <a:cs typeface="Calibri" pitchFamily="34" charset="-120"/>
+              </a:rPr>
+              <a:t>Delivery</a:t>
+            </a:r>
+            <a:endParaRPr lang="en-US" sz="1200" dirty="0"/>
+          </a:p>
+        </p:txBody>
+      </p:sp>
+      <p:sp>
+        <p:nvSpPr>
+          <p:cNvPr id="34" name="Text 32"/>
+          <p:cNvSpPr txBox="1"/>
+          <p:nvPr/>
+        </p:nvSpPr>
+        <p:spPr>
+          <a:xfrm>
+            <a:off x="731520" y="4526280"/>
+            <a:ext cx="2743200" cy="292608"/>
+          </a:xfrm>
+          <a:prstGeom prst="rect">
+            <a:avLst/>
+          </a:prstGeom>
+          <a:noFill/>
+          <a:ln/>
+        </p:spPr>
+        <p:txBody>
+          <a:bodyPr wrap="square" lIns="0" tIns="0" rIns="0" bIns="0" rtlCol="0" anchor="ctr"/>
+          <a:lstStyle/>
+          <a:p>
+            <a:pPr indent="0" marL="0">
+              <a:buNone/>
+            </a:pPr>
+            <a:r>
+              <a:rPr lang="en-US" sz="1100" dirty="0">
+                <a:solidFill>
+                  <a:srgbClr val="A9A09E"/>
+                </a:solidFill>
+                <a:latin typeface="Calibri" pitchFamily="34" charset="0"/>
+                <a:ea typeface="Calibri" pitchFamily="34" charset="-122"/>
+                <a:cs typeface="Calibri" pitchFamily="34" charset="-120"/>
+              </a:rPr>
+              <a:t>1 permission</a:t>
+            </a:r>
+            <a:endParaRPr lang="en-US" sz="1100" dirty="0"/>
+          </a:p>
+        </p:txBody>
+      </p:sp>
+      <p:sp>
+        <p:nvSpPr>
+          <p:cNvPr id="35" name="Text 33"/>
+          <p:cNvSpPr txBox="1"/>
+          <p:nvPr/>
+        </p:nvSpPr>
+        <p:spPr>
+          <a:xfrm>
+            <a:off x="3328416" y="4206240"/>
+            <a:ext cx="566928" cy="594360"/>
+          </a:xfrm>
+          <a:prstGeom prst="rect">
+            <a:avLst/>
+          </a:prstGeom>
+          <a:noFill/>
+          <a:ln/>
+        </p:spPr>
+        <p:txBody>
+          <a:bodyPr wrap="square" lIns="0" tIns="0" rIns="0" bIns="0" rtlCol="0" anchor="ctr"/>
+          <a:lstStyle/>
+          <a:p>
+            <a:pPr algn="r" indent="0" marL="0">
+              <a:buNone/>
+            </a:pPr>
+            <a:r>
+              <a:rPr lang="en-US" sz="2000" b="1" dirty="0">
+                <a:solidFill>
+                  <a:srgbClr val="B8323A"/>
+                </a:solidFill>
+                <a:latin typeface="Cambria" pitchFamily="34" charset="0"/>
+                <a:ea typeface="Cambria" pitchFamily="34" charset="-122"/>
+                <a:cs typeface="Cambria" pitchFamily="34" charset="-120"/>
+              </a:rPr>
+              <a:t>18</a:t>
+            </a:r>
+            <a:endParaRPr lang="en-US" sz="2000" dirty="0"/>
+          </a:p>
+        </p:txBody>
+      </p:sp>
+      <p:sp>
+        <p:nvSpPr>
+          <p:cNvPr id="36" name="Shape 34"/>
+          <p:cNvSpPr/>
+          <p:nvPr/>
+        </p:nvSpPr>
+        <p:spPr>
+          <a:xfrm>
+            <a:off x="4279392" y="4114800"/>
+            <a:ext cx="3493008" cy="777240"/>
+          </a:xfrm>
+          <a:prstGeom prst="roundRect">
+            <a:avLst>
+              <a:gd name="adj" fmla="val 7059"/>
+            </a:avLst>
+          </a:prstGeom>
+          <a:solidFill>
+            <a:srgbClr val="1E1A19"/>
+          </a:solidFill>
+          <a:ln w="12700">
+            <a:solidFill>
+              <a:srgbClr val="2C2524"/>
+            </a:solidFill>
+            <a:prstDash val="solid"/>
+          </a:ln>
+        </p:spPr>
+      </p:sp>
+      <p:sp>
+        <p:nvSpPr>
+          <p:cNvPr id="37" name="Text 35"/>
+          <p:cNvSpPr txBox="1"/>
+          <p:nvPr/>
+        </p:nvSpPr>
+        <p:spPr>
+          <a:xfrm>
+            <a:off x="4443984" y="4169664"/>
+            <a:ext cx="2560320" cy="384048"/>
+          </a:xfrm>
+          <a:prstGeom prst="rect">
+            <a:avLst/>
+          </a:prstGeom>
+          <a:noFill/>
+          <a:ln/>
+        </p:spPr>
+        <p:txBody>
+          <a:bodyPr wrap="square" lIns="0" tIns="0" rIns="0" bIns="0" rtlCol="0" anchor="t"/>
+          <a:lstStyle/>
+          <a:p>
+            <a:pPr indent="0" marL="0">
+              <a:buNone/>
+            </a:pPr>
+            <a:r>
+              <a:rPr lang="en-US" sz="1200" b="1" dirty="0">
+                <a:solidFill>
+                  <a:srgbClr val="F4F1F0"/>
+                </a:solidFill>
+                <a:latin typeface="Calibri" pitchFamily="34" charset="0"/>
+                <a:ea typeface="Calibri" pitchFamily="34" charset="-122"/>
+                <a:cs typeface="Calibri" pitchFamily="34" charset="-120"/>
+              </a:rPr>
+              <a:t>Creative direction</a:t>
+            </a:r>
+            <a:endParaRPr lang="en-US" sz="1200" dirty="0"/>
+          </a:p>
+        </p:txBody>
+      </p:sp>
+      <p:sp>
+        <p:nvSpPr>
+          <p:cNvPr id="38" name="Text 36"/>
+          <p:cNvSpPr txBox="1"/>
+          <p:nvPr/>
+        </p:nvSpPr>
+        <p:spPr>
+          <a:xfrm>
+            <a:off x="4443984" y="4526280"/>
+            <a:ext cx="2743200" cy="292608"/>
+          </a:xfrm>
+          <a:prstGeom prst="rect">
+            <a:avLst/>
+          </a:prstGeom>
+          <a:noFill/>
+          <a:ln/>
+        </p:spPr>
+        <p:txBody>
+          <a:bodyPr wrap="square" lIns="0" tIns="0" rIns="0" bIns="0" rtlCol="0" anchor="ctr"/>
+          <a:lstStyle/>
+          <a:p>
+            <a:pPr indent="0" marL="0">
+              <a:buNone/>
+            </a:pPr>
+            <a:r>
+              <a:rPr lang="en-US" sz="1100" dirty="0">
+                <a:solidFill>
+                  <a:srgbClr val="A9A09E"/>
+                </a:solidFill>
+                <a:latin typeface="Calibri" pitchFamily="34" charset="0"/>
+                <a:ea typeface="Calibri" pitchFamily="34" charset="-122"/>
+                <a:cs typeface="Calibri" pitchFamily="34" charset="-120"/>
+              </a:rPr>
+              <a:t>2 permissions</a:t>
+            </a:r>
+            <a:endParaRPr lang="en-US" sz="1100" dirty="0"/>
+          </a:p>
+        </p:txBody>
+      </p:sp>
+      <p:sp>
+        <p:nvSpPr>
+          <p:cNvPr id="39" name="Text 37"/>
+          <p:cNvSpPr txBox="1"/>
+          <p:nvPr/>
+        </p:nvSpPr>
+        <p:spPr>
+          <a:xfrm>
+            <a:off x="7040880" y="4206240"/>
+            <a:ext cx="566928" cy="594360"/>
+          </a:xfrm>
+          <a:prstGeom prst="rect">
+            <a:avLst/>
+          </a:prstGeom>
+          <a:noFill/>
+          <a:ln/>
+        </p:spPr>
+        <p:txBody>
+          <a:bodyPr wrap="square" lIns="0" tIns="0" rIns="0" bIns="0" rtlCol="0" anchor="ctr"/>
+          <a:lstStyle/>
+          <a:p>
+            <a:pPr algn="r" indent="0" marL="0">
+              <a:buNone/>
+            </a:pPr>
+            <a:r>
+              <a:rPr lang="en-US" sz="2000" b="1" dirty="0">
+                <a:solidFill>
+                  <a:srgbClr val="B8323A"/>
+                </a:solidFill>
+                <a:latin typeface="Cambria" pitchFamily="34" charset="0"/>
+                <a:ea typeface="Cambria" pitchFamily="34" charset="-122"/>
+                <a:cs typeface="Cambria" pitchFamily="34" charset="-120"/>
+              </a:rPr>
+              <a:t>9</a:t>
+            </a:r>
+            <a:endParaRPr lang="en-US" sz="2000" dirty="0"/>
+          </a:p>
+        </p:txBody>
+      </p:sp>
+      <p:sp>
+        <p:nvSpPr>
+          <p:cNvPr id="40" name="Shape 38"/>
+          <p:cNvSpPr/>
+          <p:nvPr/>
+        </p:nvSpPr>
+        <p:spPr>
+          <a:xfrm>
+            <a:off x="7991856" y="4114800"/>
+            <a:ext cx="3493008" cy="777240"/>
+          </a:xfrm>
+          <a:prstGeom prst="roundRect">
+            <a:avLst>
+              <a:gd name="adj" fmla="val 7059"/>
+            </a:avLst>
+          </a:prstGeom>
+          <a:solidFill>
+            <a:srgbClr val="1E1A19"/>
+          </a:solidFill>
+          <a:ln w="12700">
+            <a:solidFill>
+              <a:srgbClr val="2C2524"/>
+            </a:solidFill>
+            <a:prstDash val="solid"/>
+          </a:ln>
+        </p:spPr>
+      </p:sp>
+      <p:sp>
+        <p:nvSpPr>
+          <p:cNvPr id="41" name="Text 39"/>
+          <p:cNvSpPr txBox="1"/>
+          <p:nvPr/>
+        </p:nvSpPr>
+        <p:spPr>
+          <a:xfrm>
+            <a:off x="8156448" y="4169664"/>
+            <a:ext cx="2560320" cy="384048"/>
+          </a:xfrm>
+          <a:prstGeom prst="rect">
+            <a:avLst/>
+          </a:prstGeom>
+          <a:noFill/>
+          <a:ln/>
+        </p:spPr>
+        <p:txBody>
+          <a:bodyPr wrap="square" lIns="0" tIns="0" rIns="0" bIns="0" rtlCol="0" anchor="t"/>
+          <a:lstStyle/>
+          <a:p>
+            <a:pPr indent="0" marL="0">
+              <a:buNone/>
+            </a:pPr>
+            <a:r>
+              <a:rPr lang="en-US" sz="1200" b="1" dirty="0">
+                <a:solidFill>
+                  <a:srgbClr val="F4F1F0"/>
+                </a:solidFill>
+                <a:latin typeface="Calibri" pitchFamily="34" charset="0"/>
+                <a:ea typeface="Calibri" pitchFamily="34" charset="-122"/>
+                <a:cs typeface="Calibri" pitchFamily="34" charset="-120"/>
+              </a:rPr>
+              <a:t>Administration</a:t>
+            </a:r>
+            <a:endParaRPr lang="en-US" sz="1200" dirty="0"/>
+          </a:p>
+        </p:txBody>
+      </p:sp>
+      <p:sp>
+        <p:nvSpPr>
+          <p:cNvPr id="42" name="Text 40"/>
+          <p:cNvSpPr txBox="1"/>
+          <p:nvPr/>
+        </p:nvSpPr>
+        <p:spPr>
+          <a:xfrm>
+            <a:off x="8156448" y="4526280"/>
+            <a:ext cx="2743200" cy="292608"/>
+          </a:xfrm>
+          <a:prstGeom prst="rect">
+            <a:avLst/>
+          </a:prstGeom>
+          <a:noFill/>
+          <a:ln/>
+        </p:spPr>
+        <p:txBody>
+          <a:bodyPr wrap="square" lIns="0" tIns="0" rIns="0" bIns="0" rtlCol="0" anchor="ctr"/>
+          <a:lstStyle/>
+          <a:p>
+            <a:pPr indent="0" marL="0">
+              <a:buNone/>
+            </a:pPr>
+            <a:r>
+              <a:rPr lang="en-US" sz="1100" dirty="0">
+                <a:solidFill>
+                  <a:srgbClr val="A9A09E"/>
+                </a:solidFill>
+                <a:latin typeface="Calibri" pitchFamily="34" charset="0"/>
+                <a:ea typeface="Calibri" pitchFamily="34" charset="-122"/>
+                <a:cs typeface="Calibri" pitchFamily="34" charset="-120"/>
+              </a:rPr>
+              <a:t>18 permissions</a:t>
+            </a:r>
+            <a:endParaRPr lang="en-US" sz="1100" dirty="0"/>
+          </a:p>
+        </p:txBody>
+      </p:sp>
+      <p:sp>
+        <p:nvSpPr>
+          <p:cNvPr id="43" name="Text 41"/>
+          <p:cNvSpPr txBox="1"/>
+          <p:nvPr/>
+        </p:nvSpPr>
+        <p:spPr>
+          <a:xfrm>
+            <a:off x="10753344" y="4206240"/>
+            <a:ext cx="566928" cy="594360"/>
+          </a:xfrm>
+          <a:prstGeom prst="rect">
+            <a:avLst/>
+          </a:prstGeom>
+          <a:noFill/>
+          <a:ln/>
+        </p:spPr>
+        <p:txBody>
+          <a:bodyPr wrap="square" lIns="0" tIns="0" rIns="0" bIns="0" rtlCol="0" anchor="ctr"/>
+          <a:lstStyle/>
+          <a:p>
+            <a:pPr algn="r" indent="0" marL="0">
+              <a:buNone/>
+            </a:pPr>
+            <a:r>
+              <a:rPr lang="en-US" sz="2000" b="1" dirty="0">
+                <a:solidFill>
+                  <a:srgbClr val="B8323A"/>
+                </a:solidFill>
+                <a:latin typeface="Cambria" pitchFamily="34" charset="0"/>
+                <a:ea typeface="Cambria" pitchFamily="34" charset="-122"/>
+                <a:cs typeface="Cambria" pitchFamily="34" charset="-120"/>
+              </a:rPr>
+              <a:t>8</a:t>
+            </a:r>
+            <a:endParaRPr lang="en-US" sz="2000" dirty="0"/>
+          </a:p>
+        </p:txBody>
+      </p:sp>
+      <p:sp>
+        <p:nvSpPr>
+          <p:cNvPr id="44" name="Shape 42"/>
+          <p:cNvSpPr/>
+          <p:nvPr/>
+        </p:nvSpPr>
+        <p:spPr>
+          <a:xfrm>
+            <a:off x="566928" y="5029200"/>
+            <a:ext cx="3493008" cy="777240"/>
+          </a:xfrm>
+          <a:prstGeom prst="roundRect">
+            <a:avLst>
+              <a:gd name="adj" fmla="val 7059"/>
+            </a:avLst>
+          </a:prstGeom>
+          <a:solidFill>
+            <a:srgbClr val="1E1A19"/>
+          </a:solidFill>
+          <a:ln w="12700">
+            <a:solidFill>
+              <a:srgbClr val="2C2524"/>
+            </a:solidFill>
+            <a:prstDash val="solid"/>
+          </a:ln>
+        </p:spPr>
+      </p:sp>
+      <p:sp>
+        <p:nvSpPr>
+          <p:cNvPr id="45" name="Text 43"/>
+          <p:cNvSpPr txBox="1"/>
+          <p:nvPr/>
+        </p:nvSpPr>
+        <p:spPr>
+          <a:xfrm>
+            <a:off x="731520" y="5084064"/>
+            <a:ext cx="2560320" cy="384048"/>
+          </a:xfrm>
+          <a:prstGeom prst="rect">
+            <a:avLst/>
+          </a:prstGeom>
+          <a:noFill/>
+          <a:ln/>
+        </p:spPr>
+        <p:txBody>
+          <a:bodyPr wrap="square" lIns="0" tIns="0" rIns="0" bIns="0" rtlCol="0" anchor="t"/>
+          <a:lstStyle/>
+          <a:p>
+            <a:pPr indent="0" marL="0">
+              <a:buNone/>
+            </a:pPr>
+            <a:r>
+              <a:rPr lang="en-US" sz="1200" b="1" dirty="0">
+                <a:solidFill>
+                  <a:srgbClr val="F4F1F0"/>
+                </a:solidFill>
+                <a:latin typeface="Calibri" pitchFamily="34" charset="0"/>
+                <a:ea typeface="Calibri" pitchFamily="34" charset="-122"/>
+                <a:cs typeface="Calibri" pitchFamily="34" charset="-120"/>
+              </a:rPr>
+              <a:t>Studio leadership</a:t>
+            </a:r>
+            <a:endParaRPr lang="en-US" sz="1200" dirty="0"/>
+          </a:p>
+        </p:txBody>
+      </p:sp>
+      <p:sp>
+        <p:nvSpPr>
+          <p:cNvPr id="46" name="Text 44"/>
+          <p:cNvSpPr txBox="1"/>
+          <p:nvPr/>
+        </p:nvSpPr>
+        <p:spPr>
+          <a:xfrm>
+            <a:off x="731520" y="5440680"/>
+            <a:ext cx="2743200" cy="292608"/>
+          </a:xfrm>
+          <a:prstGeom prst="rect">
+            <a:avLst/>
+          </a:prstGeom>
+          <a:noFill/>
+          <a:ln/>
+        </p:spPr>
+        <p:txBody>
+          <a:bodyPr wrap="square" lIns="0" tIns="0" rIns="0" bIns="0" rtlCol="0" anchor="ctr"/>
+          <a:lstStyle/>
+          <a:p>
+            <a:pPr indent="0" marL="0">
+              <a:buNone/>
+            </a:pPr>
+            <a:r>
+              <a:rPr lang="en-US" sz="1100" dirty="0">
+                <a:solidFill>
+                  <a:srgbClr val="A9A09E"/>
+                </a:solidFill>
+                <a:latin typeface="Calibri" pitchFamily="34" charset="0"/>
+                <a:ea typeface="Calibri" pitchFamily="34" charset="-122"/>
+                <a:cs typeface="Calibri" pitchFamily="34" charset="-120"/>
+              </a:rPr>
+              <a:t>16 permissions</a:t>
+            </a:r>
+            <a:endParaRPr lang="en-US" sz="1100" dirty="0"/>
+          </a:p>
+        </p:txBody>
+      </p:sp>
+      <p:sp>
+        <p:nvSpPr>
+          <p:cNvPr id="47" name="Text 45"/>
+          <p:cNvSpPr txBox="1"/>
+          <p:nvPr/>
+        </p:nvSpPr>
+        <p:spPr>
+          <a:xfrm>
+            <a:off x="3328416" y="5120640"/>
+            <a:ext cx="566928" cy="594360"/>
+          </a:xfrm>
+          <a:prstGeom prst="rect">
+            <a:avLst/>
+          </a:prstGeom>
+          <a:noFill/>
+          <a:ln/>
+        </p:spPr>
+        <p:txBody>
+          <a:bodyPr wrap="square" lIns="0" tIns="0" rIns="0" bIns="0" rtlCol="0" anchor="ctr"/>
+          <a:lstStyle/>
+          <a:p>
+            <a:pPr algn="r" indent="0" marL="0">
+              <a:buNone/>
+            </a:pPr>
+            <a:r>
+              <a:rPr lang="en-US" sz="2000" b="1" dirty="0">
+                <a:solidFill>
+                  <a:srgbClr val="B8323A"/>
+                </a:solidFill>
+                <a:latin typeface="Cambria" pitchFamily="34" charset="0"/>
+                <a:ea typeface="Cambria" pitchFamily="34" charset="-122"/>
+                <a:cs typeface="Cambria" pitchFamily="34" charset="-120"/>
+              </a:rPr>
+              <a:t>7</a:t>
+            </a:r>
+            <a:endParaRPr lang="en-US" sz="2000" dirty="0"/>
+          </a:p>
+        </p:txBody>
+      </p:sp>
+      <p:sp>
+        <p:nvSpPr>
+          <p:cNvPr id="48" name="Shape 46"/>
+          <p:cNvSpPr/>
+          <p:nvPr/>
+        </p:nvSpPr>
+        <p:spPr>
+          <a:xfrm>
+            <a:off x="4279392" y="5029200"/>
+            <a:ext cx="3493008" cy="777240"/>
+          </a:xfrm>
+          <a:prstGeom prst="roundRect">
+            <a:avLst>
+              <a:gd name="adj" fmla="val 7059"/>
+            </a:avLst>
+          </a:prstGeom>
+          <a:solidFill>
+            <a:srgbClr val="1E1A19"/>
+          </a:solidFill>
+          <a:ln w="12700">
+            <a:solidFill>
+              <a:srgbClr val="2C2524"/>
+            </a:solidFill>
+            <a:prstDash val="solid"/>
+          </a:ln>
+        </p:spPr>
+      </p:sp>
+      <p:sp>
+        <p:nvSpPr>
+          <p:cNvPr id="49" name="Text 47"/>
+          <p:cNvSpPr txBox="1"/>
+          <p:nvPr/>
+        </p:nvSpPr>
+        <p:spPr>
+          <a:xfrm>
+            <a:off x="4443984" y="5084064"/>
+            <a:ext cx="2560320" cy="384048"/>
+          </a:xfrm>
+          <a:prstGeom prst="rect">
+            <a:avLst/>
+          </a:prstGeom>
+          <a:noFill/>
+          <a:ln/>
+        </p:spPr>
+        <p:txBody>
+          <a:bodyPr wrap="square" lIns="0" tIns="0" rIns="0" bIns="0" rtlCol="0" anchor="t"/>
+          <a:lstStyle/>
+          <a:p>
+            <a:pPr indent="0" marL="0">
+              <a:buNone/>
+            </a:pPr>
+            <a:r>
+              <a:rPr lang="en-US" sz="1200" b="1" dirty="0">
+                <a:solidFill>
+                  <a:srgbClr val="F4F1F0"/>
+                </a:solidFill>
+                <a:latin typeface="Calibri" pitchFamily="34" charset="0"/>
+                <a:ea typeface="Calibri" pitchFamily="34" charset="-122"/>
+                <a:cs typeface="Calibri" pitchFamily="34" charset="-120"/>
+              </a:rPr>
+              <a:t>Production planning and creative direction</a:t>
+            </a:r>
+            <a:endParaRPr lang="en-US" sz="1200" dirty="0"/>
+          </a:p>
+        </p:txBody>
+      </p:sp>
+      <p:sp>
+        <p:nvSpPr>
+          <p:cNvPr id="50" name="Text 48"/>
+          <p:cNvSpPr txBox="1"/>
+          <p:nvPr/>
+        </p:nvSpPr>
+        <p:spPr>
+          <a:xfrm>
+            <a:off x="4443984" y="5440680"/>
+            <a:ext cx="2743200" cy="292608"/>
+          </a:xfrm>
+          <a:prstGeom prst="rect">
+            <a:avLst/>
+          </a:prstGeom>
+          <a:noFill/>
+          <a:ln/>
+        </p:spPr>
+        <p:txBody>
+          <a:bodyPr wrap="square" lIns="0" tIns="0" rIns="0" bIns="0" rtlCol="0" anchor="ctr"/>
+          <a:lstStyle/>
+          <a:p>
+            <a:pPr indent="0" marL="0">
+              <a:buNone/>
+            </a:pPr>
+            <a:r>
+              <a:rPr lang="en-US" sz="1100" dirty="0">
+                <a:solidFill>
+                  <a:srgbClr val="A9A09E"/>
+                </a:solidFill>
+                <a:latin typeface="Calibri" pitchFamily="34" charset="0"/>
+                <a:ea typeface="Calibri" pitchFamily="34" charset="-122"/>
+                <a:cs typeface="Calibri" pitchFamily="34" charset="-120"/>
+              </a:rPr>
+              <a:t>1 permission</a:t>
+            </a:r>
+            <a:endParaRPr lang="en-US" sz="1100" dirty="0"/>
+          </a:p>
+        </p:txBody>
+      </p:sp>
+      <p:sp>
+        <p:nvSpPr>
+          <p:cNvPr id="51" name="Text 49"/>
+          <p:cNvSpPr txBox="1"/>
+          <p:nvPr/>
+        </p:nvSpPr>
+        <p:spPr>
+          <a:xfrm>
+            <a:off x="7040880" y="5120640"/>
+            <a:ext cx="566928" cy="594360"/>
+          </a:xfrm>
+          <a:prstGeom prst="rect">
+            <a:avLst/>
+          </a:prstGeom>
+          <a:noFill/>
+          <a:ln/>
+        </p:spPr>
+        <p:txBody>
+          <a:bodyPr wrap="square" lIns="0" tIns="0" rIns="0" bIns="0" rtlCol="0" anchor="ctr"/>
+          <a:lstStyle/>
+          <a:p>
+            <a:pPr algn="r" indent="0" marL="0">
+              <a:buNone/>
+            </a:pPr>
+            <a:r>
+              <a:rPr lang="en-US" sz="2000" b="1" dirty="0">
+                <a:solidFill>
+                  <a:srgbClr val="B8323A"/>
+                </a:solidFill>
+                <a:latin typeface="Cambria" pitchFamily="34" charset="0"/>
+                <a:ea typeface="Cambria" pitchFamily="34" charset="-122"/>
+                <a:cs typeface="Cambria" pitchFamily="34" charset="-120"/>
+              </a:rPr>
+              <a:t>25</a:t>
+            </a:r>
+            <a:endParaRPr lang="en-US" sz="2000" dirty="0"/>
+          </a:p>
+        </p:txBody>
+      </p:sp>
+      <p:sp>
+        <p:nvSpPr>
+          <p:cNvPr id="52" name="Shape 50"/>
+          <p:cNvSpPr/>
+          <p:nvPr/>
+        </p:nvSpPr>
+        <p:spPr>
+          <a:xfrm>
+            <a:off x="7991856" y="5029200"/>
+            <a:ext cx="3493008" cy="777240"/>
+          </a:xfrm>
+          <a:prstGeom prst="roundRect">
+            <a:avLst>
+              <a:gd name="adj" fmla="val 7059"/>
+            </a:avLst>
+          </a:prstGeom>
+          <a:solidFill>
+            <a:srgbClr val="1E1A19"/>
+          </a:solidFill>
+          <a:ln w="12700">
+            <a:solidFill>
+              <a:srgbClr val="2C2524"/>
+            </a:solidFill>
+            <a:prstDash val="solid"/>
+          </a:ln>
+        </p:spPr>
+      </p:sp>
+      <p:sp>
+        <p:nvSpPr>
+          <p:cNvPr id="53" name="Text 51"/>
+          <p:cNvSpPr txBox="1"/>
+          <p:nvPr/>
+        </p:nvSpPr>
+        <p:spPr>
+          <a:xfrm>
+            <a:off x="8156448" y="5084064"/>
+            <a:ext cx="2560320" cy="384048"/>
+          </a:xfrm>
+          <a:prstGeom prst="rect">
+            <a:avLst/>
+          </a:prstGeom>
+          <a:noFill/>
+          <a:ln/>
+        </p:spPr>
+        <p:txBody>
+          <a:bodyPr wrap="square" lIns="0" tIns="0" rIns="0" bIns="0" rtlCol="0" anchor="t"/>
+          <a:lstStyle/>
+          <a:p>
+            <a:pPr indent="0" marL="0">
+              <a:buNone/>
+            </a:pPr>
+            <a:r>
+              <a:rPr lang="en-US" sz="1200" b="1" dirty="0">
+                <a:solidFill>
+                  <a:srgbClr val="F4F1F0"/>
+                </a:solidFill>
+                <a:latin typeface="Calibri" pitchFamily="34" charset="0"/>
+                <a:ea typeface="Calibri" pitchFamily="34" charset="-122"/>
+                <a:cs typeface="Calibri" pitchFamily="34" charset="-120"/>
+              </a:rPr>
+              <a:t>Creative Art Director and Super Admin</a:t>
+            </a:r>
+            <a:endParaRPr lang="en-US" sz="1200" dirty="0"/>
+          </a:p>
+        </p:txBody>
+      </p:sp>
+      <p:sp>
+        <p:nvSpPr>
+          <p:cNvPr id="54" name="Text 52"/>
+          <p:cNvSpPr txBox="1"/>
+          <p:nvPr/>
+        </p:nvSpPr>
+        <p:spPr>
+          <a:xfrm>
+            <a:off x="8156448" y="5440680"/>
+            <a:ext cx="2743200" cy="292608"/>
+          </a:xfrm>
+          <a:prstGeom prst="rect">
+            <a:avLst/>
+          </a:prstGeom>
+          <a:noFill/>
+          <a:ln/>
+        </p:spPr>
+        <p:txBody>
+          <a:bodyPr wrap="square" lIns="0" tIns="0" rIns="0" bIns="0" rtlCol="0" anchor="ctr"/>
+          <a:lstStyle/>
+          <a:p>
+            <a:pPr indent="0" marL="0">
+              <a:buNone/>
+            </a:pPr>
+            <a:r>
+              <a:rPr lang="en-US" sz="1100" dirty="0">
+                <a:solidFill>
+                  <a:srgbClr val="A9A09E"/>
+                </a:solidFill>
+                <a:latin typeface="Calibri" pitchFamily="34" charset="0"/>
+                <a:ea typeface="Calibri" pitchFamily="34" charset="-122"/>
+                <a:cs typeface="Calibri" pitchFamily="34" charset="-120"/>
+              </a:rPr>
+              <a:t>3 permissions</a:t>
+            </a:r>
+            <a:endParaRPr lang="en-US" sz="1100" dirty="0"/>
+          </a:p>
+        </p:txBody>
+      </p:sp>
+      <p:sp>
+        <p:nvSpPr>
+          <p:cNvPr id="55" name="Text 53"/>
+          <p:cNvSpPr txBox="1"/>
+          <p:nvPr/>
+        </p:nvSpPr>
+        <p:spPr>
+          <a:xfrm>
+            <a:off x="10753344" y="5120640"/>
+            <a:ext cx="566928" cy="594360"/>
+          </a:xfrm>
+          <a:prstGeom prst="rect">
+            <a:avLst/>
+          </a:prstGeom>
+          <a:noFill/>
+          <a:ln/>
+        </p:spPr>
+        <p:txBody>
+          <a:bodyPr wrap="square" lIns="0" tIns="0" rIns="0" bIns="0" rtlCol="0" anchor="ctr"/>
+          <a:lstStyle/>
+          <a:p>
+            <a:pPr algn="r" indent="0" marL="0">
+              <a:buNone/>
+            </a:pPr>
+            <a:r>
+              <a:rPr lang="en-US" sz="2000" b="1" dirty="0">
+                <a:solidFill>
+                  <a:srgbClr val="B8323A"/>
+                </a:solidFill>
+                <a:latin typeface="Cambria" pitchFamily="34" charset="0"/>
+                <a:ea typeface="Cambria" pitchFamily="34" charset="-122"/>
+                <a:cs typeface="Cambria" pitchFamily="34" charset="-120"/>
+              </a:rPr>
+              <a:t>2</a:t>
+            </a:r>
+            <a:endParaRPr lang="en-US" sz="2000" dirty="0"/>
+          </a:p>
+        </p:txBody>
+      </p:sp>
+      <p:sp>
+        <p:nvSpPr>
+          <p:cNvPr id="56" name="Shape 54"/>
+          <p:cNvSpPr/>
+          <p:nvPr/>
+        </p:nvSpPr>
+        <p:spPr>
+          <a:xfrm>
+            <a:off x="566928" y="5943600"/>
+            <a:ext cx="3493008" cy="777240"/>
+          </a:xfrm>
+          <a:prstGeom prst="roundRect">
+            <a:avLst>
+              <a:gd name="adj" fmla="val 7059"/>
+            </a:avLst>
+          </a:prstGeom>
+          <a:solidFill>
+            <a:srgbClr val="1E1A19"/>
+          </a:solidFill>
+          <a:ln w="12700">
+            <a:solidFill>
+              <a:srgbClr val="2C2524"/>
+            </a:solidFill>
+            <a:prstDash val="solid"/>
+          </a:ln>
+        </p:spPr>
+      </p:sp>
+      <p:sp>
+        <p:nvSpPr>
+          <p:cNvPr id="57" name="Text 55"/>
+          <p:cNvSpPr txBox="1"/>
+          <p:nvPr/>
+        </p:nvSpPr>
+        <p:spPr>
+          <a:xfrm>
+            <a:off x="731520" y="5998464"/>
+            <a:ext cx="2560320" cy="384048"/>
+          </a:xfrm>
+          <a:prstGeom prst="rect">
+            <a:avLst/>
+          </a:prstGeom>
+          <a:noFill/>
+          <a:ln/>
+        </p:spPr>
+        <p:txBody>
+          <a:bodyPr wrap="square" lIns="0" tIns="0" rIns="0" bIns="0" rtlCol="0" anchor="t"/>
+          <a:lstStyle/>
+          <a:p>
+            <a:pPr indent="0" marL="0">
+              <a:buNone/>
+            </a:pPr>
+            <a:r>
+              <a:rPr lang="en-US" sz="1200" b="1" dirty="0">
+                <a:solidFill>
+                  <a:srgbClr val="F4F1F0"/>
+                </a:solidFill>
+                <a:latin typeface="Calibri" pitchFamily="34" charset="0"/>
+                <a:ea typeface="Calibri" pitchFamily="34" charset="-122"/>
+                <a:cs typeface="Calibri" pitchFamily="34" charset="-120"/>
+              </a:rPr>
+              <a:t>Super Admin only</a:t>
+            </a:r>
+            <a:endParaRPr lang="en-US" sz="1200" dirty="0"/>
+          </a:p>
+        </p:txBody>
+      </p:sp>
+      <p:sp>
+        <p:nvSpPr>
+          <p:cNvPr id="58" name="Text 56"/>
+          <p:cNvSpPr txBox="1"/>
+          <p:nvPr/>
+        </p:nvSpPr>
+        <p:spPr>
+          <a:xfrm>
+            <a:off x="731520" y="6355080"/>
+            <a:ext cx="2743200" cy="292608"/>
+          </a:xfrm>
+          <a:prstGeom prst="rect">
+            <a:avLst/>
+          </a:prstGeom>
+          <a:noFill/>
+          <a:ln/>
+        </p:spPr>
+        <p:txBody>
+          <a:bodyPr wrap="square" lIns="0" tIns="0" rIns="0" bIns="0" rtlCol="0" anchor="ctr"/>
+          <a:lstStyle/>
+          <a:p>
+            <a:pPr indent="0" marL="0">
+              <a:buNone/>
+            </a:pPr>
+            <a:r>
+              <a:rPr lang="en-US" sz="1100" dirty="0">
+                <a:solidFill>
+                  <a:srgbClr val="A9A09E"/>
+                </a:solidFill>
+                <a:latin typeface="Calibri" pitchFamily="34" charset="0"/>
+                <a:ea typeface="Calibri" pitchFamily="34" charset="-122"/>
+                <a:cs typeface="Calibri" pitchFamily="34" charset="-120"/>
+              </a:rPr>
+              <a:t>9 permissions</a:t>
+            </a:r>
+            <a:endParaRPr lang="en-US" sz="1100" dirty="0"/>
+          </a:p>
+        </p:txBody>
+      </p:sp>
+      <p:sp>
+        <p:nvSpPr>
+          <p:cNvPr id="59" name="Text 57"/>
+          <p:cNvSpPr txBox="1"/>
+          <p:nvPr/>
+        </p:nvSpPr>
+        <p:spPr>
+          <a:xfrm>
+            <a:off x="3328416" y="6035040"/>
+            <a:ext cx="566928" cy="594360"/>
+          </a:xfrm>
+          <a:prstGeom prst="rect">
+            <a:avLst/>
+          </a:prstGeom>
+          <a:noFill/>
+          <a:ln/>
+        </p:spPr>
+        <p:txBody>
+          <a:bodyPr wrap="square" lIns="0" tIns="0" rIns="0" bIns="0" rtlCol="0" anchor="ctr"/>
+          <a:lstStyle/>
+          <a:p>
+            <a:pPr algn="r" indent="0" marL="0">
+              <a:buNone/>
+            </a:pPr>
+            <a:r>
+              <a:rPr lang="en-US" sz="2000" b="1" dirty="0">
+                <a:solidFill>
+                  <a:srgbClr val="B8323A"/>
+                </a:solidFill>
+                <a:latin typeface="Cambria" pitchFamily="34" charset="0"/>
+                <a:ea typeface="Cambria" pitchFamily="34" charset="-122"/>
+                <a:cs typeface="Cambria" pitchFamily="34" charset="-120"/>
+              </a:rPr>
+              <a:t>1</a:t>
+            </a:r>
+            <a:endParaRPr lang="en-US" sz="2000" dirty="0"/>
+          </a:p>
+        </p:txBody>
+      </p:sp>
+      <p:sp>
+        <p:nvSpPr>
+          <p:cNvPr id="60" name="Text 58"/>
+          <p:cNvSpPr txBox="1"/>
+          <p:nvPr/>
+        </p:nvSpPr>
+        <p:spPr>
+          <a:xfrm>
+            <a:off x="566928" y="5989320"/>
+            <a:ext cx="10881360" cy="548640"/>
+          </a:xfrm>
+          <a:prstGeom prst="rect">
+            <a:avLst/>
+          </a:prstGeom>
+          <a:noFill/>
+          <a:ln/>
+        </p:spPr>
+        <p:txBody>
+          <a:bodyPr wrap="square" lIns="0" tIns="0" rIns="0" bIns="0" rtlCol="0" anchor="ctr"/>
+          <a:lstStyle/>
+          <a:p>
+            <a:pPr indent="0" marL="0">
+              <a:buNone/>
+            </a:pPr>
+            <a:r>
+              <a:rPr lang="en-US" sz="1300" dirty="0">
+                <a:solidFill>
+                  <a:srgbClr val="A9A09E"/>
+                </a:solidFill>
+                <a:latin typeface="Calibri" pitchFamily="34" charset="0"/>
+                <a:ea typeface="Calibri" pitchFamily="34" charset="-122"/>
+                <a:cs typeface="Calibri" pitchFamily="34" charset="-120"/>
+              </a:rPr>
+              <a:t>The large number on each card is how many designations hold that band. Super Admin holds everything, including any permission added in future, without anybody switching it on.</a:t>
+            </a:r>
+            <a:endParaRPr lang="en-US" sz="1300" dirty="0"/>
           </a:p>
         </p:txBody>
       </p:sp>
@@ -16403,7 +16660,7 @@
                 <a:ea typeface="Calibri" pitchFamily="34" charset="-122"/>
                 <a:cs typeface="Calibri" pitchFamily="34" charset="-120"/>
               </a:rPr>
-              <a:t>ACTIVITY LOG</a:t>
+              <a:t>PERMISSIONS</a:t>
             </a:r>
             <a:endParaRPr lang="en-US" sz="1100" dirty="0"/>
           </a:p>
@@ -16442,7 +16699,7 @@
                 <a:ea typeface="Cambria" pitchFamily="34" charset="-122"/>
                 <a:cs typeface="Cambria" pitchFamily="34" charset="-120"/>
               </a:rPr>
-              <a:t>One record that crosses every module</a:t>
+              <a:t>One screen decides what everybody else may do</a:t>
             </a:r>
             <a:endParaRPr lang="en-US" sz="3400" dirty="0"/>
           </a:p>
@@ -16488,7 +16745,7 @@
                 <a:ea typeface="Calibri" pitchFamily="34" charset="-122"/>
                 <a:cs typeface="Calibri" pitchFamily="34" charset="-120"/>
               </a:rPr>
-              <a:t>Every action anybody takes, newest first, with the person’s name and designation.</a:t>
+              <a:t>Choose a designation, tick the actions it should hold, save.</a:t>
             </a:r>
             <a:endParaRPr lang="en-US" sz="1400" dirty="0"/>
           </a:p>
@@ -16512,7 +16769,7 @@
                 <a:ea typeface="Calibri" pitchFamily="34" charset="-122"/>
                 <a:cs typeface="Calibri" pitchFamily="34" charset="-120"/>
               </a:rPr>
-              <a:t>Filter by person, module, action or date; search the text.</a:t>
+              <a:t>The change applies to everybody holding that designation, on their next request.</a:t>
             </a:r>
             <a:endParaRPr lang="en-US" sz="1400" dirty="0"/>
           </a:p>
@@ -16536,7 +16793,7 @@
                 <a:ea typeface="Calibri" pitchFamily="34" charset="-122"/>
                 <a:cs typeface="Calibri" pitchFamily="34" charset="-120"/>
               </a:rPr>
-              <a:t>Where a change has a before and an after, the entry shows both.</a:t>
+              <a:t>Super Admin holds every permission and cannot be edited down.</a:t>
             </a:r>
             <a:endParaRPr lang="en-US" sz="1400" dirty="0"/>
           </a:p>
@@ -16560,31 +16817,7 @@
                 <a:ea typeface="Calibri" pitchFamily="34" charset="-122"/>
                 <a:cs typeface="Calibri" pitchFamily="34" charset="-120"/>
               </a:rPr>
-              <a:t>Nothing here can be edited or removed, from this screen or any other.</a:t>
-            </a:r>
-            <a:endParaRPr lang="en-US" sz="1400" dirty="0"/>
-          </a:p>
-          <a:p>
-            <a:pPr marL="342900" indent="-342900">
-              <a:lnSpc>
-                <a:spcPts val="2000"/>
-              </a:lnSpc>
-              <a:spcAft>
-                <a:spcPts val="1000"/>
-              </a:spcAft>
-              <a:buSzPct val="100000"/>
-              <a:buChar char="•"/>
-            </a:pPr>
-            <a:r>
-              <a:rPr lang="en-US" sz="1400" dirty="0">
-                <a:solidFill>
-                  <a:srgbClr val="F4F1F0"/>
-                </a:solidFill>
-                <a:latin typeface="Calibri" pitchFamily="34" charset="0"/>
-                <a:ea typeface="Calibri" pitchFamily="34" charset="-122"/>
-                <a:cs typeface="Calibri" pitchFamily="34" charset="-120"/>
-              </a:rPr>
-              <a:t>The asset history, the review trail and the time-sheet log all still exist — this is the view that crosses them.</a:t>
+              <a:t>Every change is written to the Activity Log — the designation, the permission and the direction.</a:t>
             </a:r>
             <a:endParaRPr lang="en-US" sz="1400" dirty="0"/>
           </a:p>
@@ -16664,7 +16897,7 @@
                 <a:ea typeface="Calibri" pitchFamily="34" charset="-122"/>
                 <a:cs typeface="Calibri" pitchFamily="34" charset="-120"/>
               </a:rPr>
-              <a:t>Studio leadership — 7 designations. Readable, filterable, exportable, editable by nobody.</a:t>
+              <a:t>Super Admin, and nobody else.</a:t>
             </a:r>
             <a:endParaRPr lang="en-US" sz="1000" dirty="0"/>
           </a:p>
@@ -16686,8 +16919,8 @@
         </p:blipFill>
         <p:spPr>
           <a:xfrm>
-            <a:off x="5989320" y="1528779"/>
-            <a:ext cx="5632704" cy="4166201"/>
+            <a:off x="5989320" y="1570441"/>
+            <a:ext cx="5632704" cy="4082877"/>
           </a:xfrm>
           <a:prstGeom prst="rect">
             <a:avLst/>
@@ -16709,7 +16942,7 @@
         </p:nvSpPr>
         <p:spPr>
           <a:xfrm>
-            <a:off x="5989320" y="5804709"/>
+            <a:off x="5989320" y="5763047"/>
             <a:ext cx="5632704" cy="457200"/>
           </a:xfrm>
           <a:prstGeom prst="rect">
@@ -16734,7 +16967,7 @@
                 <a:ea typeface="Calibri" pitchFamily="34" charset="-122"/>
                 <a:cs typeface="Calibri" pitchFamily="34" charset="-120"/>
               </a:rPr>
-              <a:t>The Activity Log (first screenful).</a:t>
+              <a:t>The permission grid for one designation (first screenful).</a:t>
             </a:r>
             <a:endParaRPr lang="en-US" sz="1000" dirty="0"/>
           </a:p>
@@ -17919,7 +18152,7 @@
                 <a:ea typeface="Calibri" pitchFamily="34" charset="-122"/>
                 <a:cs typeface="Calibri" pitchFamily="34" charset="-120"/>
               </a:rPr>
-              <a:t>Notifications and your profile</a:t>
+              <a:t>Chat</a:t>
             </a:r>
             <a:endParaRPr lang="en-US" sz="1400" dirty="0"/>
           </a:p>
@@ -17997,7 +18230,7 @@
                 <a:ea typeface="Calibri" pitchFamily="34" charset="-122"/>
                 <a:cs typeface="Calibri" pitchFamily="34" charset="-120"/>
               </a:rPr>
-              <a:t>Settings and permissions</a:t>
+              <a:t>Notifications and your profile</a:t>
             </a:r>
             <a:endParaRPr lang="en-US" sz="1400" dirty="0"/>
           </a:p>
@@ -18036,7 +18269,7 @@
                 <a:ea typeface="Calibri" pitchFamily="34" charset="-122"/>
                 <a:cs typeface="Calibri" pitchFamily="34" charset="-120"/>
               </a:rPr>
-              <a:t>23-25</a:t>
+              <a:t>23</a:t>
             </a:r>
             <a:endParaRPr lang="en-US" sz="1300" dirty="0"/>
           </a:p>
@@ -18075,7 +18308,7 @@
                 <a:ea typeface="Calibri" pitchFamily="34" charset="-122"/>
                 <a:cs typeface="Calibri" pitchFamily="34" charset="-120"/>
               </a:rPr>
-              <a:t>The Activity Log</a:t>
+              <a:t>Settings and permissions</a:t>
             </a:r>
             <a:endParaRPr lang="en-US" sz="1400" dirty="0"/>
           </a:p>
@@ -18114,7 +18347,7 @@
                 <a:ea typeface="Calibri" pitchFamily="34" charset="-122"/>
                 <a:cs typeface="Calibri" pitchFamily="34" charset="-120"/>
               </a:rPr>
-              <a:t>26</a:t>
+              <a:t>24-26</a:t>
             </a:r>
             <a:endParaRPr lang="en-US" sz="1300" dirty="0"/>
           </a:p>
@@ -18153,7 +18386,7 @@
                 <a:ea typeface="Calibri" pitchFamily="34" charset="-122"/>
                 <a:cs typeface="Calibri" pitchFamily="34" charset="-120"/>
               </a:rPr>
-              <a:t>Keeping the documentation current</a:t>
+              <a:t>The Activity Log</a:t>
             </a:r>
             <a:endParaRPr lang="en-US" sz="1400" dirty="0"/>
           </a:p>
@@ -18193,6 +18426,84 @@
                 <a:cs typeface="Calibri" pitchFamily="34" charset="-120"/>
               </a:rPr>
               <a:t>27</a:t>
+            </a:r>
+            <a:endParaRPr lang="en-US" sz="1300" dirty="0"/>
+          </a:p>
+        </p:txBody>
+      </p:sp>
+      <p:sp>
+        <p:nvSpPr>
+          <p:cNvPr id="39" name="Text 37"/>
+          <p:cNvSpPr txBox="1"/>
+          <p:nvPr/>
+        </p:nvSpPr>
+        <p:spPr>
+          <a:xfrm>
+            <a:off x="6236208" y="2011680"/>
+            <a:ext cx="4754880" cy="411480"/>
+          </a:xfrm>
+          <a:prstGeom prst="rect">
+            <a:avLst/>
+          </a:prstGeom>
+          <a:noFill/>
+          <a:ln/>
+        </p:spPr>
+        <p:txBody>
+          <a:bodyPr wrap="square" lIns="0" tIns="0" rIns="0" bIns="0" rtlCol="0" anchor="ctr"/>
+          <a:lstStyle/>
+          <a:p>
+            <a:pPr indent="0" marL="0">
+              <a:buNone/>
+            </a:pPr>
+            <a:r>
+              <a:rPr lang="en-US" sz="1400" dirty="0">
+                <a:solidFill>
+                  <a:srgbClr val="F4F1F0"/>
+                </a:solidFill>
+                <a:latin typeface="Calibri" pitchFamily="34" charset="0"/>
+                <a:ea typeface="Calibri" pitchFamily="34" charset="-122"/>
+                <a:cs typeface="Calibri" pitchFamily="34" charset="-120"/>
+              </a:rPr>
+              <a:t>Keeping the documentation current</a:t>
+            </a:r>
+            <a:endParaRPr lang="en-US" sz="1400" dirty="0"/>
+          </a:p>
+        </p:txBody>
+      </p:sp>
+      <p:sp>
+        <p:nvSpPr>
+          <p:cNvPr id="40" name="Text 38"/>
+          <p:cNvSpPr txBox="1"/>
+          <p:nvPr/>
+        </p:nvSpPr>
+        <p:spPr>
+          <a:xfrm>
+            <a:off x="10991088" y="2011680"/>
+            <a:ext cx="640080" cy="411480"/>
+          </a:xfrm>
+          <a:prstGeom prst="rect">
+            <a:avLst/>
+          </a:prstGeom>
+          <a:noFill/>
+          <a:ln/>
+        </p:spPr>
+        <p:txBody>
+          <a:bodyPr wrap="square" lIns="0" tIns="0" rIns="0" bIns="0" rtlCol="0" anchor="ctr"/>
+          <a:lstStyle/>
+          <a:p>
+            <a:pPr algn="r" indent="0" marL="0">
+              <a:buNone/>
+            </a:pPr>
+            <a:r>
+              <a:rPr lang="en-US" sz="1300" b="1" dirty="0">
+                <a:solidFill>
+                  <a:srgbClr val="B8323A"/>
+                </a:solidFill>
+                <a:latin typeface="Calibri" pitchFamily="34" charset="0"/>
+                <a:ea typeface="Calibri" pitchFamily="34" charset="-122"/>
+                <a:cs typeface="Calibri" pitchFamily="34" charset="-120"/>
+              </a:rPr>
+              <a:t>28</a:t>
             </a:r>
             <a:endParaRPr lang="en-US" sz="1300" dirty="0"/>
           </a:p>
@@ -18209,6 +18520,508 @@
 <file path=ppt/slides/slide30.xml><?xml version="1.0" encoding="utf-8"?>
 <p:sld xmlns:a="http://schemas.openxmlformats.org/drawingml/2006/main" xmlns:r="http://schemas.openxmlformats.org/officeDocument/2006/relationships" xmlns:p="http://schemas.openxmlformats.org/presentationml/2006/main">
   <p:cSld name="Slide 30">
+    <p:bg>
+      <p:bgPr>
+        <a:solidFill>
+          <a:srgbClr val="141110"/>
+        </a:solidFill>
+      </p:bgPr>
+    </p:bg>
+    <p:spTree>
+      <p:nvGrpSpPr>
+        <p:cNvPr id="1" name=""/>
+        <p:cNvGrpSpPr/>
+        <p:nvPr/>
+      </p:nvGrpSpPr>
+      <p:grpSpPr>
+        <a:xfrm>
+          <a:off x="0" y="0"/>
+          <a:ext cx="0" cy="0"/>
+          <a:chOff x="0" y="0"/>
+          <a:chExt cx="0" cy="0"/>
+        </a:xfrm>
+      </p:grpSpPr>
+      <p:sp>
+        <p:nvSpPr>
+          <p:cNvPr id="2" name="Text 0"/>
+          <p:cNvSpPr txBox="1"/>
+          <p:nvPr/>
+        </p:nvSpPr>
+        <p:spPr>
+          <a:xfrm>
+            <a:off x="11411712" y="6355080"/>
+            <a:ext cx="457200" cy="274320"/>
+          </a:xfrm>
+          <a:prstGeom prst="rect">
+            <a:avLst/>
+          </a:prstGeom>
+          <a:noFill/>
+          <a:ln/>
+        </p:spPr>
+        <p:txBody>
+          <a:bodyPr wrap="square" lIns="0" tIns="0" rIns="0" bIns="0" rtlCol="0" anchor="ctr"/>
+          <a:lstStyle/>
+          <a:p>
+            <a:pPr algn="r" indent="0" marL="0">
+              <a:buNone/>
+            </a:pPr>
+            <a:r>
+              <a:rPr lang="en-US" sz="1000" dirty="0">
+                <a:solidFill>
+                  <a:srgbClr val="A9A09E"/>
+                </a:solidFill>
+                <a:latin typeface="Calibri" pitchFamily="34" charset="0"/>
+                <a:ea typeface="Calibri" pitchFamily="34" charset="-122"/>
+                <a:cs typeface="Calibri" pitchFamily="34" charset="-120"/>
+              </a:rPr>
+              <a:t>30</a:t>
+            </a:r>
+            <a:endParaRPr lang="en-US" sz="1000" dirty="0"/>
+          </a:p>
+        </p:txBody>
+      </p:sp>
+      <p:sp>
+        <p:nvSpPr>
+          <p:cNvPr id="3" name="Shape 1"/>
+          <p:cNvSpPr/>
+          <p:nvPr/>
+        </p:nvSpPr>
+        <p:spPr>
+          <a:xfrm>
+            <a:off x="566928" y="384048"/>
+            <a:ext cx="329184" cy="329184"/>
+          </a:xfrm>
+          <a:prstGeom prst="roundRect">
+            <a:avLst>
+              <a:gd name="adj" fmla="val 22222"/>
+            </a:avLst>
+          </a:prstGeom>
+          <a:solidFill>
+            <a:srgbClr val="7F1416"/>
+          </a:solidFill>
+          <a:ln/>
+        </p:spPr>
+      </p:sp>
+      <p:sp>
+        <p:nvSpPr>
+          <p:cNvPr id="4" name="Text 2"/>
+          <p:cNvSpPr txBox="1"/>
+          <p:nvPr/>
+        </p:nvSpPr>
+        <p:spPr>
+          <a:xfrm>
+            <a:off x="566928" y="384048"/>
+            <a:ext cx="329184" cy="329184"/>
+          </a:xfrm>
+          <a:prstGeom prst="rect">
+            <a:avLst/>
+          </a:prstGeom>
+          <a:noFill/>
+          <a:ln/>
+        </p:spPr>
+        <p:txBody>
+          <a:bodyPr wrap="square" lIns="0" tIns="0" rIns="0" bIns="0" rtlCol="0" anchor="ctr"/>
+          <a:lstStyle/>
+          <a:p>
+            <a:pPr algn="ctr" indent="0" marL="0">
+              <a:buNone/>
+            </a:pPr>
+            <a:r>
+              <a:rPr lang="en-US" sz="1600" b="1" dirty="0">
+                <a:solidFill>
+                  <a:srgbClr val="FFFFFF"/>
+                </a:solidFill>
+                <a:latin typeface="Cambria" pitchFamily="34" charset="0"/>
+                <a:ea typeface="Cambria" pitchFamily="34" charset="-122"/>
+                <a:cs typeface="Cambria" pitchFamily="34" charset="-120"/>
+              </a:rPr>
+              <a:t>Z</a:t>
+            </a:r>
+            <a:endParaRPr lang="en-US" sz="1600" dirty="0"/>
+          </a:p>
+        </p:txBody>
+      </p:sp>
+      <p:sp>
+        <p:nvSpPr>
+          <p:cNvPr id="5" name="Text 3"/>
+          <p:cNvSpPr txBox="1"/>
+          <p:nvPr/>
+        </p:nvSpPr>
+        <p:spPr>
+          <a:xfrm>
+            <a:off x="1024128" y="384048"/>
+            <a:ext cx="7315200" cy="329184"/>
+          </a:xfrm>
+          <a:prstGeom prst="rect">
+            <a:avLst/>
+          </a:prstGeom>
+          <a:noFill/>
+          <a:ln/>
+        </p:spPr>
+        <p:txBody>
+          <a:bodyPr wrap="square" lIns="0" tIns="0" rIns="0" bIns="0" rtlCol="0" anchor="ctr"/>
+          <a:lstStyle/>
+          <a:p>
+            <a:pPr indent="0" marL="0">
+              <a:buNone/>
+            </a:pPr>
+            <a:r>
+              <a:rPr lang="en-US" sz="1100" b="1" spc="200" kern="0" dirty="0">
+                <a:solidFill>
+                  <a:srgbClr val="A9A09E"/>
+                </a:solidFill>
+                <a:latin typeface="Calibri" pitchFamily="34" charset="0"/>
+                <a:ea typeface="Calibri" pitchFamily="34" charset="-122"/>
+                <a:cs typeface="Calibri" pitchFamily="34" charset="-120"/>
+              </a:rPr>
+              <a:t>ACTIVITY LOG</a:t>
+            </a:r>
+            <a:endParaRPr lang="en-US" sz="1100" dirty="0"/>
+          </a:p>
+        </p:txBody>
+      </p:sp>
+      <p:sp>
+        <p:nvSpPr>
+          <p:cNvPr id="6" name="Text 4"/>
+          <p:cNvSpPr txBox="1"/>
+          <p:nvPr/>
+        </p:nvSpPr>
+        <p:spPr>
+          <a:xfrm>
+            <a:off x="566928" y="868680"/>
+            <a:ext cx="11064240" cy="685800"/>
+          </a:xfrm>
+          <a:prstGeom prst="rect">
+            <a:avLst/>
+          </a:prstGeom>
+          <a:noFill/>
+          <a:ln/>
+        </p:spPr>
+        <p:txBody>
+          <a:bodyPr wrap="square" lIns="0" tIns="0" rIns="0" bIns="0" rtlCol="0" anchor="ctr"/>
+          <a:lstStyle/>
+          <a:p>
+            <a:pPr indent="0" marL="0">
+              <a:buNone/>
+            </a:pPr>
+            <a:r>
+              <a:rPr lang="en-US" sz="3400" b="1" dirty="0">
+                <a:solidFill>
+                  <a:srgbClr val="F4F1F0"/>
+                </a:solidFill>
+                <a:latin typeface="Cambria" pitchFamily="34" charset="0"/>
+                <a:ea typeface="Cambria" pitchFamily="34" charset="-122"/>
+                <a:cs typeface="Cambria" pitchFamily="34" charset="-120"/>
+              </a:rPr>
+              <a:t>One record that crosses every module</a:t>
+            </a:r>
+            <a:endParaRPr lang="en-US" sz="3400" dirty="0"/>
+          </a:p>
+        </p:txBody>
+      </p:sp>
+      <p:sp>
+        <p:nvSpPr>
+          <p:cNvPr id="7" name="Text 5"/>
+          <p:cNvSpPr txBox="1"/>
+          <p:nvPr/>
+        </p:nvSpPr>
+        <p:spPr>
+          <a:xfrm>
+            <a:off x="566928" y="1828800"/>
+            <a:ext cx="4937760" cy="3200400"/>
+          </a:xfrm>
+          <a:prstGeom prst="rect">
+            <a:avLst/>
+          </a:prstGeom>
+          <a:noFill/>
+          <a:ln/>
+        </p:spPr>
+        <p:txBody>
+          <a:bodyPr wrap="square" rtlCol="0" anchor="ctr"/>
+          <a:lstStyle/>
+          <a:p>
+            <a:pPr marL="342900" indent="-342900">
+              <a:lnSpc>
+                <a:spcPts val="2000"/>
+              </a:lnSpc>
+              <a:spcAft>
+                <a:spcPts val="1000"/>
+              </a:spcAft>
+              <a:buSzPct val="100000"/>
+              <a:buChar char="•"/>
+            </a:pPr>
+            <a:r>
+              <a:rPr lang="en-US" sz="1400" dirty="0">
+                <a:solidFill>
+                  <a:srgbClr val="F4F1F0"/>
+                </a:solidFill>
+                <a:latin typeface="Calibri" pitchFamily="34" charset="0"/>
+                <a:ea typeface="Calibri" pitchFamily="34" charset="-122"/>
+                <a:cs typeface="Calibri" pitchFamily="34" charset="-120"/>
+              </a:rPr>
+              <a:t>Every action anybody takes, newest first, with the person’s name and designation.</a:t>
+            </a:r>
+            <a:endParaRPr lang="en-US" sz="1400" dirty="0"/>
+          </a:p>
+          <a:p>
+            <a:pPr marL="342900" indent="-342900">
+              <a:lnSpc>
+                <a:spcPts val="2000"/>
+              </a:lnSpc>
+              <a:spcAft>
+                <a:spcPts val="1000"/>
+              </a:spcAft>
+              <a:buSzPct val="100000"/>
+              <a:buChar char="•"/>
+            </a:pPr>
+            <a:r>
+              <a:rPr lang="en-US" sz="1400" dirty="0">
+                <a:solidFill>
+                  <a:srgbClr val="F4F1F0"/>
+                </a:solidFill>
+                <a:latin typeface="Calibri" pitchFamily="34" charset="0"/>
+                <a:ea typeface="Calibri" pitchFamily="34" charset="-122"/>
+                <a:cs typeface="Calibri" pitchFamily="34" charset="-120"/>
+              </a:rPr>
+              <a:t>Filter by person, module, action or date; search the text.</a:t>
+            </a:r>
+            <a:endParaRPr lang="en-US" sz="1400" dirty="0"/>
+          </a:p>
+          <a:p>
+            <a:pPr marL="342900" indent="-342900">
+              <a:lnSpc>
+                <a:spcPts val="2000"/>
+              </a:lnSpc>
+              <a:spcAft>
+                <a:spcPts val="1000"/>
+              </a:spcAft>
+              <a:buSzPct val="100000"/>
+              <a:buChar char="•"/>
+            </a:pPr>
+            <a:r>
+              <a:rPr lang="en-US" sz="1400" dirty="0">
+                <a:solidFill>
+                  <a:srgbClr val="F4F1F0"/>
+                </a:solidFill>
+                <a:latin typeface="Calibri" pitchFamily="34" charset="0"/>
+                <a:ea typeface="Calibri" pitchFamily="34" charset="-122"/>
+                <a:cs typeface="Calibri" pitchFamily="34" charset="-120"/>
+              </a:rPr>
+              <a:t>Where a change has a before and an after, the entry shows both.</a:t>
+            </a:r>
+            <a:endParaRPr lang="en-US" sz="1400" dirty="0"/>
+          </a:p>
+          <a:p>
+            <a:pPr marL="342900" indent="-342900">
+              <a:lnSpc>
+                <a:spcPts val="2000"/>
+              </a:lnSpc>
+              <a:spcAft>
+                <a:spcPts val="1000"/>
+              </a:spcAft>
+              <a:buSzPct val="100000"/>
+              <a:buChar char="•"/>
+            </a:pPr>
+            <a:r>
+              <a:rPr lang="en-US" sz="1400" dirty="0">
+                <a:solidFill>
+                  <a:srgbClr val="F4F1F0"/>
+                </a:solidFill>
+                <a:latin typeface="Calibri" pitchFamily="34" charset="0"/>
+                <a:ea typeface="Calibri" pitchFamily="34" charset="-122"/>
+                <a:cs typeface="Calibri" pitchFamily="34" charset="-120"/>
+              </a:rPr>
+              <a:t>Nothing here can be edited or removed, from this screen or any other.</a:t>
+            </a:r>
+            <a:endParaRPr lang="en-US" sz="1400" dirty="0"/>
+          </a:p>
+          <a:p>
+            <a:pPr marL="342900" indent="-342900">
+              <a:lnSpc>
+                <a:spcPts val="2000"/>
+              </a:lnSpc>
+              <a:spcAft>
+                <a:spcPts val="1000"/>
+              </a:spcAft>
+              <a:buSzPct val="100000"/>
+              <a:buChar char="•"/>
+            </a:pPr>
+            <a:r>
+              <a:rPr lang="en-US" sz="1400" dirty="0">
+                <a:solidFill>
+                  <a:srgbClr val="F4F1F0"/>
+                </a:solidFill>
+                <a:latin typeface="Calibri" pitchFamily="34" charset="0"/>
+                <a:ea typeface="Calibri" pitchFamily="34" charset="-122"/>
+                <a:cs typeface="Calibri" pitchFamily="34" charset="-120"/>
+              </a:rPr>
+              <a:t>The asset history, the review trail and the time-sheet log all still exist — this is the view that crosses them.</a:t>
+            </a:r>
+            <a:endParaRPr lang="en-US" sz="1400" dirty="0"/>
+          </a:p>
+        </p:txBody>
+      </p:sp>
+      <p:sp>
+        <p:nvSpPr>
+          <p:cNvPr id="8" name="Shape 6"/>
+          <p:cNvSpPr/>
+          <p:nvPr/>
+        </p:nvSpPr>
+        <p:spPr>
+          <a:xfrm>
+            <a:off x="566928" y="5532120"/>
+            <a:ext cx="4937760" cy="777240"/>
+          </a:xfrm>
+          <a:prstGeom prst="roundRect">
+            <a:avLst>
+              <a:gd name="adj" fmla="val 7059"/>
+            </a:avLst>
+          </a:prstGeom>
+          <a:solidFill>
+            <a:srgbClr val="1E1A19"/>
+          </a:solidFill>
+          <a:ln w="12700">
+            <a:solidFill>
+              <a:srgbClr val="2C2524"/>
+            </a:solidFill>
+            <a:prstDash val="solid"/>
+          </a:ln>
+        </p:spPr>
+      </p:sp>
+      <p:sp>
+        <p:nvSpPr>
+          <p:cNvPr id="9" name="Text 7"/>
+          <p:cNvSpPr txBox="1"/>
+          <p:nvPr/>
+        </p:nvSpPr>
+        <p:spPr>
+          <a:xfrm>
+            <a:off x="749808" y="5532120"/>
+            <a:ext cx="4572000" cy="777240"/>
+          </a:xfrm>
+          <a:prstGeom prst="rect">
+            <a:avLst/>
+          </a:prstGeom>
+          <a:noFill/>
+          <a:ln/>
+        </p:spPr>
+        <p:txBody>
+          <a:bodyPr wrap="square" lIns="0" tIns="0" rIns="0" bIns="0" rtlCol="0" anchor="ctr"/>
+          <a:lstStyle/>
+          <a:p>
+            <a:pPr indent="0" marL="0">
+              <a:buNone/>
+            </a:pPr>
+            <a:r>
+              <a:rPr lang="en-US" sz="1000" b="1" spc="200" kern="0" dirty="0">
+                <a:solidFill>
+                  <a:srgbClr val="B8323A"/>
+                </a:solidFill>
+                <a:latin typeface="Calibri" pitchFamily="34" charset="0"/>
+                <a:ea typeface="Calibri" pitchFamily="34" charset="-122"/>
+                <a:cs typeface="Calibri" pitchFamily="34" charset="-120"/>
+              </a:rPr>
+              <a:t>WHO  </a:t>
+            </a:r>
+            <a:pPr indent="0" marL="0">
+              <a:buNone/>
+            </a:pPr>
+            <a:r>
+              <a:rPr lang="en-US" sz="1200" dirty="0">
+                <a:solidFill>
+                  <a:srgbClr val="F4F1F0"/>
+                </a:solidFill>
+                <a:latin typeface="Calibri" pitchFamily="34" charset="0"/>
+                <a:ea typeface="Calibri" pitchFamily="34" charset="-122"/>
+                <a:cs typeface="Calibri" pitchFamily="34" charset="-120"/>
+              </a:rPr>
+              <a:t>Studio leadership — 7 designations. Readable, filterable, exportable, editable by nobody.</a:t>
+            </a:r>
+            <a:endParaRPr lang="en-US" sz="1000" dirty="0"/>
+          </a:p>
+        </p:txBody>
+      </p:sp>
+      <p:pic>
+        <p:nvPicPr>
+          <p:cNvPr id="10" name="Image 0" descr="preencoded.png">    </p:cNvPr>
+          <p:cNvPicPr>
+            <a:picLocks noChangeAspect="1"/>
+          </p:cNvPicPr>
+          <p:nvPr/>
+        </p:nvPicPr>
+        <p:blipFill>
+          <a:blip r:embed="rId1"/>
+          <a:stretch>
+            <a:fillRect/>
+          </a:stretch>
+        </p:blipFill>
+        <p:spPr>
+          <a:xfrm>
+            <a:off x="5989320" y="1528779"/>
+            <a:ext cx="5632704" cy="4166201"/>
+          </a:xfrm>
+          <a:prstGeom prst="rect">
+            <a:avLst/>
+          </a:prstGeom>
+          <a:effectLst>
+            <a:outerShdw sx="100000" sy="100000" kx="0" ky="0" algn="bl" rotWithShape="0" blurRad="177800" dist="50800" dir="5400000">
+              <a:srgbClr val="000000">
+                <a:alpha val="55000"/>
+              </a:srgbClr>
+            </a:outerShdw>
+          </a:effectLst>
+        </p:spPr>
+      </p:pic>
+      <p:sp>
+        <p:nvSpPr>
+          <p:cNvPr id="11" name="Text 8"/>
+          <p:cNvSpPr txBox="1"/>
+          <p:nvPr/>
+        </p:nvSpPr>
+        <p:spPr>
+          <a:xfrm>
+            <a:off x="5989320" y="5804709"/>
+            <a:ext cx="5632704" cy="457200"/>
+          </a:xfrm>
+          <a:prstGeom prst="rect">
+            <a:avLst/>
+          </a:prstGeom>
+          <a:noFill/>
+          <a:ln/>
+        </p:spPr>
+        <p:txBody>
+          <a:bodyPr wrap="square" lIns="0" tIns="0" rIns="0" bIns="0" rtlCol="0" anchor="ctr"/>
+          <a:lstStyle/>
+          <a:p>
+            <a:pPr algn="ctr" indent="0" marL="0">
+              <a:buNone/>
+            </a:pPr>
+            <a:r>
+              <a:rPr lang="en-US" sz="1000" i="1" dirty="0">
+                <a:solidFill>
+                  <a:srgbClr val="A9A09E"/>
+                </a:solidFill>
+                <a:latin typeface="Calibri" pitchFamily="34" charset="0"/>
+                <a:ea typeface="Calibri" pitchFamily="34" charset="-122"/>
+                <a:cs typeface="Calibri" pitchFamily="34" charset="-120"/>
+              </a:rPr>
+              <a:t>The Activity Log (first screenful).</a:t>
+            </a:r>
+            <a:endParaRPr lang="en-US" sz="1000" dirty="0"/>
+          </a:p>
+        </p:txBody>
+      </p:sp>
+    </p:spTree>
+  </p:cSld>
+  <p:clrMapOvr>
+    <a:masterClrMapping/>
+  </p:clrMapOvr>
+</p:sld>
+</file>
+
+<file path=ppt/slides/slide31.xml><?xml version="1.0" encoding="utf-8"?>
+<p:sld xmlns:a="http://schemas.openxmlformats.org/drawingml/2006/main" xmlns:r="http://schemas.openxmlformats.org/officeDocument/2006/relationships" xmlns:p="http://schemas.openxmlformats.org/presentationml/2006/main">
+  <p:cSld name="Slide 31">
     <p:bg>
       <p:bgPr>
         <a:solidFill>
@@ -18263,7 +19076,7 @@
                 <a:ea typeface="Calibri" pitchFamily="34" charset="-122"/>
                 <a:cs typeface="Calibri" pitchFamily="34" charset="-120"/>
               </a:rPr>
-              <a:t>30</a:t>
+              <a:t>31</a:t>
             </a:r>
             <a:endParaRPr lang="en-US" sz="1000" dirty="0"/>
           </a:p>

--- a/docs/ZVKY-FORGE-Overview.pptx
+++ b/docs/ZVKY-FORGE-Overview.pptx
@@ -11621,7 +11621,31 @@
                 <a:ea typeface="Calibri" pitchFamily="34" charset="-122"/>
                 <a:cs typeface="Calibri" pitchFamily="34" charset="-120"/>
               </a:rPr>
-              <a:t>Pick an asset and the hours it recorded that day are offered — a suggestion in a field you can change.</a:t>
+              <a:t>Pick an asset and the hours it has left to log are filled in — what it recorded, less what you have already filed against it, so a multi-day job is never counted twice.</a:t>
+            </a:r>
+            <a:endParaRPr lang="en-US" sz="1400" dirty="0"/>
+          </a:p>
+          <a:p>
+            <a:pPr marL="342900" indent="-342900">
+              <a:lnSpc>
+                <a:spcPts val="2000"/>
+              </a:lnSpc>
+              <a:spcAft>
+                <a:spcPts val="1000"/>
+              </a:spcAft>
+              <a:buSzPct val="100000"/>
+              <a:buChar char="•"/>
+            </a:pPr>
+            <a:r>
+              <a:rPr lang="en-US" sz="1400" dirty="0">
+                <a:solidFill>
+                  <a:srgbClr val="F4F1F0"/>
+                </a:solidFill>
+                <a:latin typeface="Calibri" pitchFamily="34" charset="0"/>
+                <a:ea typeface="Calibri" pitchFamily="34" charset="-122"/>
+                <a:cs typeface="Calibri" pitchFamily="34" charset="-120"/>
+              </a:rPr>
+              <a:t>A starting figure in a field you can change, and it never overwrites a number you have typed.</a:t>
             </a:r>
             <a:endParaRPr lang="en-US" sz="1400" dirty="0"/>
           </a:p>

--- a/docs/ZVKY-FORGE-Overview.pptx
+++ b/docs/ZVKY-FORGE-Overview.pptx
@@ -2292,7 +2292,7 @@
           <a:p>
             <a:r>
               <a:rPr lang="en-US" dirty="0"/>
-              <a:t>These thirteen bands are generated from the permission table, not written by hand. Appendix A of the manual lists every designation in each.</a:t>
+              <a:t>These fourteen bands are generated from the permission table, not written by hand. Appendix A of the manual lists every designation in each.</a:t>
             </a:r>
             <a:endParaRPr lang="en-US" dirty="0"/>
           </a:p>
@@ -10178,7 +10178,7 @@
                 <a:ea typeface="Cambria" pitchFamily="34" charset="-122"/>
                 <a:cs typeface="Cambria" pitchFamily="34" charset="-120"/>
               </a:rPr>
-              <a:t>62</a:t>
+              <a:t>64</a:t>
             </a:r>
             <a:endParaRPr lang="en-US" sz="5400" dirty="0"/>
           </a:p>
@@ -13199,7 +13199,7 @@
                 <a:ea typeface="Calibri" pitchFamily="34" charset="-122"/>
                 <a:cs typeface="Calibri" pitchFamily="34" charset="-120"/>
               </a:rPr>
-              <a:t>Files: .png, .jpg, .svg, .webp, .mov, .mp4 up to 30MB — deleted after eight hours. The message stays and says the file expired.</a:t>
+              <a:t>Files: .png, .jpg, .svg, .webp, .mov, .mp4 up to 30MB — deleted after twelve hours. The message stays and says the file expired.</a:t>
             </a:r>
             <a:endParaRPr lang="en-US" sz="1400" dirty="0"/>
           </a:p>
@@ -14602,7 +14602,7 @@
                 <a:ea typeface="Calibri" pitchFamily="34" charset="-122"/>
                 <a:cs typeface="Calibri" pitchFamily="34" charset="-120"/>
               </a:rPr>
-              <a:t>62 permissions across 60 designations, in only thirteen distinct groups of holders.</a:t>
+              <a:t>64 permissions across 60 designations, in only fourteen distinct groups of holders.</a:t>
             </a:r>
             <a:endParaRPr lang="en-US" sz="1400" dirty="0"/>
           </a:p>
@@ -16108,7 +16108,7 @@
                 <a:ea typeface="Calibri" pitchFamily="34" charset="-122"/>
                 <a:cs typeface="Calibri" pitchFamily="34" charset="-120"/>
               </a:rPr>
-              <a:t>Production planning and creative direction</a:t>
+              <a:t>Everyone except the shielded designations</a:t>
             </a:r>
             <a:endParaRPr lang="en-US" sz="1200" dirty="0"/>
           </a:p>
@@ -16186,7 +16186,7 @@
                 <a:ea typeface="Cambria" pitchFamily="34" charset="-122"/>
                 <a:cs typeface="Cambria" pitchFamily="34" charset="-120"/>
               </a:rPr>
-              <a:t>25</a:t>
+              <a:t>58</a:t>
             </a:r>
             <a:endParaRPr lang="en-US" sz="2000" dirty="0"/>
           </a:p>
@@ -16252,7 +16252,7 @@
                 <a:ea typeface="Calibri" pitchFamily="34" charset="-122"/>
                 <a:cs typeface="Calibri" pitchFamily="34" charset="-120"/>
               </a:rPr>
-              <a:t>Creative Art Director and Super Admin</a:t>
+              <a:t>Production planning and creative direction</a:t>
             </a:r>
             <a:endParaRPr lang="en-US" sz="1200" dirty="0"/>
           </a:p>
@@ -16291,7 +16291,7 @@
                 <a:ea typeface="Calibri" pitchFamily="34" charset="-122"/>
                 <a:cs typeface="Calibri" pitchFamily="34" charset="-120"/>
               </a:rPr>
-              <a:t>3 permissions</a:t>
+              <a:t>1 permission</a:t>
             </a:r>
             <a:endParaRPr lang="en-US" sz="1100" dirty="0"/>
           </a:p>
@@ -16330,7 +16330,7 @@
                 <a:ea typeface="Cambria" pitchFamily="34" charset="-122"/>
                 <a:cs typeface="Cambria" pitchFamily="34" charset="-120"/>
               </a:rPr>
-              <a:t>2</a:t>
+              <a:t>25</a:t>
             </a:r>
             <a:endParaRPr lang="en-US" sz="2000" dirty="0"/>
           </a:p>
@@ -16396,7 +16396,7 @@
                 <a:ea typeface="Calibri" pitchFamily="34" charset="-122"/>
                 <a:cs typeface="Calibri" pitchFamily="34" charset="-120"/>
               </a:rPr>
-              <a:t>Super Admin only</a:t>
+              <a:t>Creative Art Director and Super Admin</a:t>
             </a:r>
             <a:endParaRPr lang="en-US" sz="1200" dirty="0"/>
           </a:p>
@@ -16435,7 +16435,7 @@
                 <a:ea typeface="Calibri" pitchFamily="34" charset="-122"/>
                 <a:cs typeface="Calibri" pitchFamily="34" charset="-120"/>
               </a:rPr>
-              <a:t>9 permissions</a:t>
+              <a:t>3 permissions</a:t>
             </a:r>
             <a:endParaRPr lang="en-US" sz="1100" dirty="0"/>
           </a:p>
@@ -16474,6 +16474,150 @@
                 <a:ea typeface="Cambria" pitchFamily="34" charset="-122"/>
                 <a:cs typeface="Cambria" pitchFamily="34" charset="-120"/>
               </a:rPr>
+              <a:t>2</a:t>
+            </a:r>
+            <a:endParaRPr lang="en-US" sz="2000" dirty="0"/>
+          </a:p>
+        </p:txBody>
+      </p:sp>
+      <p:sp>
+        <p:nvSpPr>
+          <p:cNvPr id="60" name="Shape 58"/>
+          <p:cNvSpPr/>
+          <p:nvPr/>
+        </p:nvSpPr>
+        <p:spPr>
+          <a:xfrm>
+            <a:off x="4279392" y="5943600"/>
+            <a:ext cx="3493008" cy="777240"/>
+          </a:xfrm>
+          <a:prstGeom prst="roundRect">
+            <a:avLst>
+              <a:gd name="adj" fmla="val 7059"/>
+            </a:avLst>
+          </a:prstGeom>
+          <a:solidFill>
+            <a:srgbClr val="1E1A19"/>
+          </a:solidFill>
+          <a:ln w="12700">
+            <a:solidFill>
+              <a:srgbClr val="2C2524"/>
+            </a:solidFill>
+            <a:prstDash val="solid"/>
+          </a:ln>
+        </p:spPr>
+      </p:sp>
+      <p:sp>
+        <p:nvSpPr>
+          <p:cNvPr id="61" name="Text 59"/>
+          <p:cNvSpPr txBox="1"/>
+          <p:nvPr/>
+        </p:nvSpPr>
+        <p:spPr>
+          <a:xfrm>
+            <a:off x="4443984" y="5998464"/>
+            <a:ext cx="2560320" cy="384048"/>
+          </a:xfrm>
+          <a:prstGeom prst="rect">
+            <a:avLst/>
+          </a:prstGeom>
+          <a:noFill/>
+          <a:ln/>
+        </p:spPr>
+        <p:txBody>
+          <a:bodyPr wrap="square" lIns="0" tIns="0" rIns="0" bIns="0" rtlCol="0" anchor="t"/>
+          <a:lstStyle/>
+          <a:p>
+            <a:pPr indent="0" marL="0">
+              <a:buNone/>
+            </a:pPr>
+            <a:r>
+              <a:rPr lang="en-US" sz="1200" b="1" dirty="0">
+                <a:solidFill>
+                  <a:srgbClr val="F4F1F0"/>
+                </a:solidFill>
+                <a:latin typeface="Calibri" pitchFamily="34" charset="0"/>
+                <a:ea typeface="Calibri" pitchFamily="34" charset="-122"/>
+                <a:cs typeface="Calibri" pitchFamily="34" charset="-120"/>
+              </a:rPr>
+              <a:t>Super Admin only</a:t>
+            </a:r>
+            <a:endParaRPr lang="en-US" sz="1200" dirty="0"/>
+          </a:p>
+        </p:txBody>
+      </p:sp>
+      <p:sp>
+        <p:nvSpPr>
+          <p:cNvPr id="62" name="Text 60"/>
+          <p:cNvSpPr txBox="1"/>
+          <p:nvPr/>
+        </p:nvSpPr>
+        <p:spPr>
+          <a:xfrm>
+            <a:off x="4443984" y="6355080"/>
+            <a:ext cx="2743200" cy="292608"/>
+          </a:xfrm>
+          <a:prstGeom prst="rect">
+            <a:avLst/>
+          </a:prstGeom>
+          <a:noFill/>
+          <a:ln/>
+        </p:spPr>
+        <p:txBody>
+          <a:bodyPr wrap="square" lIns="0" tIns="0" rIns="0" bIns="0" rtlCol="0" anchor="ctr"/>
+          <a:lstStyle/>
+          <a:p>
+            <a:pPr indent="0" marL="0">
+              <a:buNone/>
+            </a:pPr>
+            <a:r>
+              <a:rPr lang="en-US" sz="1100" dirty="0">
+                <a:solidFill>
+                  <a:srgbClr val="A9A09E"/>
+                </a:solidFill>
+                <a:latin typeface="Calibri" pitchFamily="34" charset="0"/>
+                <a:ea typeface="Calibri" pitchFamily="34" charset="-122"/>
+                <a:cs typeface="Calibri" pitchFamily="34" charset="-120"/>
+              </a:rPr>
+              <a:t>10 permissions</a:t>
+            </a:r>
+            <a:endParaRPr lang="en-US" sz="1100" dirty="0"/>
+          </a:p>
+        </p:txBody>
+      </p:sp>
+      <p:sp>
+        <p:nvSpPr>
+          <p:cNvPr id="63" name="Text 61"/>
+          <p:cNvSpPr txBox="1"/>
+          <p:nvPr/>
+        </p:nvSpPr>
+        <p:spPr>
+          <a:xfrm>
+            <a:off x="7040880" y="6035040"/>
+            <a:ext cx="566928" cy="594360"/>
+          </a:xfrm>
+          <a:prstGeom prst="rect">
+            <a:avLst/>
+          </a:prstGeom>
+          <a:noFill/>
+          <a:ln/>
+        </p:spPr>
+        <p:txBody>
+          <a:bodyPr wrap="square" lIns="0" tIns="0" rIns="0" bIns="0" rtlCol="0" anchor="ctr"/>
+          <a:lstStyle/>
+          <a:p>
+            <a:pPr algn="r" indent="0" marL="0">
+              <a:buNone/>
+            </a:pPr>
+            <a:r>
+              <a:rPr lang="en-US" sz="2000" b="1" dirty="0">
+                <a:solidFill>
+                  <a:srgbClr val="B8323A"/>
+                </a:solidFill>
+                <a:latin typeface="Cambria" pitchFamily="34" charset="0"/>
+                <a:ea typeface="Cambria" pitchFamily="34" charset="-122"/>
+                <a:cs typeface="Cambria" pitchFamily="34" charset="-120"/>
+              </a:rPr>
               <a:t>1</a:t>
             </a:r>
             <a:endParaRPr lang="en-US" sz="2000" dirty="0"/>
@@ -16482,7 +16626,7 @@
       </p:sp>
       <p:sp>
         <p:nvSpPr>
-          <p:cNvPr id="60" name="Text 58"/>
+          <p:cNvPr id="64" name="Text 62"/>
           <p:cNvSpPr txBox="1"/>
           <p:nvPr/>
         </p:nvSpPr>

--- a/docs/ZVKY-FORGE-Overview.pptx
+++ b/docs/ZVKY-FORGE-Overview.pptx
@@ -11551,7 +11551,7 @@
                 <a:ea typeface="Cambria" pitchFamily="34" charset="-122"/>
                 <a:cs typeface="Cambria" pitchFamily="34" charset="-120"/>
               </a:rPr>
-              <a:t>A day at a time, in IST</a:t>
+              <a:t>A weekday at a time, in IST</a:t>
             </a:r>
             <a:endParaRPr lang="en-US" sz="3400" dirty="0"/>
           </a:p>
@@ -11597,7 +11597,7 @@
                 <a:ea typeface="Calibri" pitchFamily="34" charset="-122"/>
                 <a:cs typeface="Calibri" pitchFamily="34" charset="-120"/>
               </a:rPr>
-              <a:t>A line is a number of HOURS against a project, an asset or non-project time. No start and end times.</a:t>
+              <a:t>Monday to Friday. There is no Saturday or Sunday row, and the API refuses a line dated to one.</a:t>
             </a:r>
             <a:endParaRPr lang="en-US" sz="1400" dirty="0"/>
           </a:p>
@@ -11621,7 +11621,7 @@
                 <a:ea typeface="Calibri" pitchFamily="34" charset="-122"/>
                 <a:cs typeface="Calibri" pitchFamily="34" charset="-120"/>
               </a:rPr>
-              <a:t>Pick an asset and the hours it has left to log are filled in — what it recorded, less what you have already filed against it, so a multi-day job is never counted twice.</a:t>
+              <a:t>A line is a number of HOURS against a project, an asset or non-project time. No start and end times.</a:t>
             </a:r>
             <a:endParaRPr lang="en-US" sz="1400" dirty="0"/>
           </a:p>
@@ -11645,7 +11645,7 @@
                 <a:ea typeface="Calibri" pitchFamily="34" charset="-122"/>
                 <a:cs typeface="Calibri" pitchFamily="34" charset="-120"/>
               </a:rPr>
-              <a:t>A starting figure in a field you can change, and it never overwrites a number you have typed.</a:t>
+              <a:t>Pick an asset and its hours are WORKED OUT and the field locks — what it recorded, less what you have already filed against it, so a multi-day job is never counted twice. Weekend work still counts towards it.</a:t>
             </a:r>
             <a:endParaRPr lang="en-US" sz="1400" dirty="0"/>
           </a:p>
@@ -11669,7 +11669,7 @@
                 <a:ea typeface="Calibri" pitchFamily="34" charset="-122"/>
                 <a:cs typeface="Calibri" pitchFamily="34" charset="-120"/>
               </a:rPr>
-              <a:t>A day over 8 hours is flagged, not refused. A long day is real; a form that refuses one is not.</a:t>
+              <a:t>Time with no asset — leave, a meeting, training — is typed in as before. There is nothing to calculate it from.</a:t>
             </a:r>
             <a:endParaRPr lang="en-US" sz="1400" dirty="0"/>
           </a:p>
@@ -11693,7 +11693,7 @@
                 <a:ea typeface="Calibri" pitchFamily="34" charset="-122"/>
                 <a:cs typeface="Calibri" pitchFamily="34" charset="-120"/>
               </a:rPr>
-              <a:t>Submission is daily, and nobody approves it. Submitting locks the day; its owner can reopen it.</a:t>
+              <a:t>If a calculated figure looks wrong, flag it with a reason. Nobody edits it; the disagreement goes on the record beside it.</a:t>
             </a:r>
             <a:endParaRPr lang="en-US" sz="1400" dirty="0"/>
           </a:p>
@@ -11717,7 +11717,31 @@
                 <a:ea typeface="Calibri" pitchFamily="34" charset="-122"/>
                 <a:cs typeface="Calibri" pitchFamily="34" charset="-120"/>
               </a:rPr>
-              <a:t>A lead reads their team’s hours and nothing more — the approval queue is gone.</a:t>
+              <a:t>A day over 8 hours is flagged, not refused. A long day is real; a form that refuses one is not.</a:t>
+            </a:r>
+            <a:endParaRPr lang="en-US" sz="1400" dirty="0"/>
+          </a:p>
+          <a:p>
+            <a:pPr marL="342900" indent="-342900">
+              <a:lnSpc>
+                <a:spcPts val="2000"/>
+              </a:lnSpc>
+              <a:spcAft>
+                <a:spcPts val="1000"/>
+              </a:spcAft>
+              <a:buSzPct val="100000"/>
+              <a:buChar char="•"/>
+            </a:pPr>
+            <a:r>
+              <a:rPr lang="en-US" sz="1400" dirty="0">
+                <a:solidFill>
+                  <a:srgbClr val="F4F1F0"/>
+                </a:solidFill>
+                <a:latin typeface="Calibri" pitchFamily="34" charset="0"/>
+                <a:ea typeface="Calibri" pitchFamily="34" charset="-122"/>
+                <a:cs typeface="Calibri" pitchFamily="34" charset="-120"/>
+              </a:rPr>
+              <a:t>Submission is daily, and nobody approves it. Submitting locks the day; its owner can reopen it.</a:t>
             </a:r>
             <a:endParaRPr lang="en-US" sz="1400" dirty="0"/>
           </a:p>
@@ -11819,8 +11843,8 @@
         </p:blipFill>
         <p:spPr>
           <a:xfrm>
-            <a:off x="5989320" y="2345627"/>
-            <a:ext cx="5632704" cy="2532505"/>
+            <a:off x="5989320" y="1935480"/>
+            <a:ext cx="5632704" cy="3352800"/>
           </a:xfrm>
           <a:prstGeom prst="rect">
             <a:avLst/>
@@ -11842,7 +11866,7 @@
         </p:nvSpPr>
         <p:spPr>
           <a:xfrm>
-            <a:off x="5989320" y="4987861"/>
+            <a:off x="5989320" y="5398008"/>
             <a:ext cx="5632704" cy="457200"/>
           </a:xfrm>
           <a:prstGeom prst="rect">
@@ -11867,7 +11891,7 @@
                 <a:ea typeface="Calibri" pitchFamily="34" charset="-122"/>
                 <a:cs typeface="Calibri" pitchFamily="34" charset="-120"/>
               </a:rPr>
-              <a:t>A week of Draft and Submitted days.</a:t>
+              <a:t>A working week: an asset line, a flagged figure and non-project time.</a:t>
             </a:r>
             <a:endParaRPr lang="en-US" sz="1000" dirty="0"/>
           </a:p>

--- a/docs/ZVKY-FORGE-Overview.pptx
+++ b/docs/ZVKY-FORGE-Overview.pptx
@@ -12745,6 +12745,30 @@
                 <a:ea typeface="Calibri" pitchFamily="34" charset="-122"/>
                 <a:cs typeface="Calibri" pitchFamily="34" charset="-120"/>
               </a:rPr>
+              <a:t>RESET PASSWORD gives somebody a temporary one, signs their devices out and forces them to choose a new one. Nobody ever sees the password they pick. Super Admin only until granted in Settings.</a:t>
+            </a:r>
+            <a:endParaRPr lang="en-US" sz="1400" dirty="0"/>
+          </a:p>
+          <a:p>
+            <a:pPr marL="342900" indent="-342900">
+              <a:lnSpc>
+                <a:spcPts val="2000"/>
+              </a:lnSpc>
+              <a:spcAft>
+                <a:spcPts val="1000"/>
+              </a:spcAft>
+              <a:buSzPct val="100000"/>
+              <a:buChar char="•"/>
+            </a:pPr>
+            <a:r>
+              <a:rPr lang="en-US" sz="1400" dirty="0">
+                <a:solidFill>
+                  <a:srgbClr val="F4F1F0"/>
+                </a:solidFill>
+                <a:latin typeface="Calibri" pitchFamily="34" charset="0"/>
+                <a:ea typeface="Calibri" pitchFamily="34" charset="-122"/>
+                <a:cs typeface="Calibri" pitchFamily="34" charset="-120"/>
+              </a:rPr>
               <a:t>My Team shows the people who report to you, what they are carrying and how far along it is.</a:t>
             </a:r>
             <a:endParaRPr lang="en-US" sz="1400" dirty="0"/>
@@ -13248,6 +13272,30 @@
                 <a:cs typeface="Calibri" pitchFamily="34" charset="-120"/>
               </a:rPr>
               <a:t>Private to the people in it. No Super Admin view, no export, and no permission that could create one.</a:t>
+            </a:r>
+            <a:endParaRPr lang="en-US" sz="1400" dirty="0"/>
+          </a:p>
+          <a:p>
+            <a:pPr marL="342900" indent="-342900">
+              <a:lnSpc>
+                <a:spcPts val="2000"/>
+              </a:lnSpc>
+              <a:spcAft>
+                <a:spcPts val="1000"/>
+              </a:spcAft>
+              <a:buSzPct val="100000"/>
+              <a:buChar char="•"/>
+            </a:pPr>
+            <a:r>
+              <a:rPr lang="en-US" sz="1400" dirty="0">
+                <a:solidFill>
+                  <a:srgbClr val="F4F1F0"/>
+                </a:solidFill>
+                <a:latin typeface="Calibri" pitchFamily="34" charset="0"/>
+                <a:ea typeface="Calibri" pitchFamily="34" charset="-122"/>
+                <a:cs typeface="Calibri" pitchFamily="34" charset="-120"/>
+              </a:rPr>
+              <a:t>A new message also raises a DESKTOP notification, as an assignment does. Everyone is asked for browser permission; a refusal is reported in the app, not swallowed.</a:t>
             </a:r>
             <a:endParaRPr lang="en-US" sz="1400" dirty="0"/>
           </a:p>

--- a/docs/ZVKY-FORGE-Overview.pptx
+++ b/docs/ZVKY-FORGE-Overview.pptx
@@ -3795,7 +3795,7 @@
                 <a:ea typeface="Calibri" pitchFamily="34" charset="-122"/>
                 <a:cs typeface="Calibri" pitchFamily="34" charset="-120"/>
               </a:rPr>
-              <a:t>Internal induction deck  ·  built 2026-09-05</a:t>
+              <a:t>Internal induction deck  ·  built 2026-09-06</a:t>
             </a:r>
             <a:endParaRPr lang="en-US" sz="1100" dirty="0"/>
           </a:p>
@@ -13271,7 +13271,31 @@
                 <a:ea typeface="Calibri" pitchFamily="34" charset="-122"/>
                 <a:cs typeface="Calibri" pitchFamily="34" charset="-120"/>
               </a:rPr>
-              <a:t>Private to the people in it. No Super Admin view, no export, and no permission that could create one.</a:t>
+              <a:t>Private INSIDE chat: nobody reads a conversation they are not in through the panel, Super Admin included.</a:t>
+            </a:r>
+            <a:endParaRPr lang="en-US" sz="1400" dirty="0"/>
+          </a:p>
+          <a:p>
+            <a:pPr marL="342900" indent="-342900">
+              <a:lnSpc>
+                <a:spcPts val="2000"/>
+              </a:lnSpc>
+              <a:spcAft>
+                <a:spcPts val="1000"/>
+              </a:spcAft>
+              <a:buSzPct val="100000"/>
+              <a:buChar char="•"/>
+            </a:pPr>
+            <a:r>
+              <a:rPr lang="en-US" sz="1400" dirty="0">
+                <a:solidFill>
+                  <a:srgbClr val="F4F1F0"/>
+                </a:solidFill>
+                <a:latin typeface="Calibri" pitchFamily="34" charset="0"/>
+                <a:ea typeface="Calibri" pitchFamily="34" charset="-122"/>
+                <a:cs typeface="Calibri" pitchFamily="34" charset="-120"/>
+              </a:rPr>
+              <a:t>OUTSIDE it there is one screen — Settings → Chat Activity — that reads everything, behind its own permission, held by the Super Admin alone. Reading it is itself recorded. Tell staff chat is logged.</a:t>
             </a:r>
             <a:endParaRPr lang="en-US" sz="1400" dirty="0"/>
           </a:p>
@@ -14674,7 +14698,7 @@
                 <a:ea typeface="Calibri" pitchFamily="34" charset="-122"/>
                 <a:cs typeface="Calibri" pitchFamily="34" charset="-120"/>
               </a:rPr>
-              <a:t>64 permissions across 60 designations, in only fourteen distinct groups of holders.</a:t>
+              <a:t>65 permissions across 60 designations, in only fourteen distinct groups of holders.</a:t>
             </a:r>
             <a:endParaRPr lang="en-US" sz="1400" dirty="0"/>
           </a:p>
@@ -16651,7 +16675,7 @@
                 <a:ea typeface="Calibri" pitchFamily="34" charset="-122"/>
                 <a:cs typeface="Calibri" pitchFamily="34" charset="-120"/>
               </a:rPr>
-              <a:t>10 permissions</a:t>
+              <a:t>11 permissions</a:t>
             </a:r>
             <a:endParaRPr lang="en-US" sz="1100" dirty="0"/>
           </a:p>

--- a/docs/ZVKY-FORGE-Overview.pptx
+++ b/docs/ZVKY-FORGE-Overview.pptx
@@ -12745,7 +12745,7 @@
                 <a:ea typeface="Calibri" pitchFamily="34" charset="-122"/>
                 <a:cs typeface="Calibri" pitchFamily="34" charset="-120"/>
               </a:rPr>
-              <a:t>RESET PASSWORD gives somebody a temporary one, signs their devices out and forces them to choose a new one. Nobody ever sees the password they pick. Super Admin only until granted in Settings.</a:t>
+              <a:t>RESET PASSWORD sets the studio’s standing password — the same one new accounts get — signs their devices out and forces them to choose a new one. Tell them promptly: until they do, anybody who knows that password could set it for them. Super Admin only until granted in Settings.</a:t>
             </a:r>
             <a:endParaRPr lang="en-US" sz="1400" dirty="0"/>
           </a:p>
